--- a/presentation/RetainIQ_Project_Review.pptx
+++ b/presentation/RetainIQ_Project_Review.pptx
@@ -29,6 +29,7 @@
     <p:sldId id="277" r:id="rId29"/>
     <p:sldId id="278" r:id="rId30"/>
     <p:sldId id="279" r:id="rId31"/>
+    <p:sldId id="280" r:id="rId32"/>
   </p:sldIdLst>
   <p:sldSz cx="12191695" cy="6858000" type="screen4x3"/>
   <p:notesSz cx="6858000" cy="9144000"/>
@@ -2113,6 +2114,76 @@
 </p:notes>
 </file>
 
+<file path=ppt/notesSlides/notesSlide25.xml><?xml version="1.0" encoding="utf-8"?>
+<p:notes xmlns:a="http://schemas.openxmlformats.org/drawingml/2006/main" xmlns:p="http://schemas.openxmlformats.org/presentationml/2006/main" xmlns:r="http://schemas.openxmlformats.org/officeDocument/2006/relationships">
+  <p:cSld>
+    <p:spTree>
+      <p:nvGrpSpPr>
+        <p:cNvPr id="1" name=""/>
+        <p:cNvGrpSpPr/>
+        <p:nvPr/>
+      </p:nvGrpSpPr>
+      <p:grpSpPr>
+        <a:xfrm>
+          <a:off x="0" y="0"/>
+          <a:ext cx="0" cy="0"/>
+          <a:chOff x="0" y="0"/>
+          <a:chExt cx="0" cy="0"/>
+        </a:xfrm>
+      </p:grpSpPr>
+      <p:sp>
+        <p:nvSpPr>
+          <p:cNvPr id="2" name="Slide Image Placeholder 1"/>
+          <p:cNvSpPr>
+            <a:spLocks noGrp="1"/>
+          </p:cNvSpPr>
+          <p:nvPr>
+            <p:ph type="sldImg" idx="2"/>
+          </p:nvPr>
+        </p:nvSpPr>
+        <p:spPr/>
+      </p:sp>
+      <p:sp>
+        <p:nvSpPr>
+          <p:cNvPr id="3" name="Notes Placeholder 2"/>
+          <p:cNvSpPr>
+            <a:spLocks noGrp="1"/>
+          </p:cNvSpPr>
+          <p:nvPr>
+            <p:ph type="body" idx="3" sz="quarter"/>
+          </p:nvPr>
+        </p:nvSpPr>
+        <p:spPr/>
+        <p:txBody>
+          <a:bodyPr/>
+          <a:lstStyle/>
+          <a:p>
+            <a:r>
+              <a:t>Backup slide. Use it if a reviewer asks how the pieces connect, or how the notebook work reaches the running app. The answer is one shared preprocessing path and a frozen feature contract.</a:t>
+            </a:r>
+          </a:p>
+        </p:txBody>
+      </p:sp>
+      <p:sp>
+        <p:nvSpPr>
+          <p:cNvPr id="4" name="Slide Number Placeholder 3"/>
+          <p:cNvSpPr>
+            <a:spLocks noGrp="1"/>
+          </p:cNvSpPr>
+          <p:nvPr>
+            <p:ph type="sldNum" idx="5" sz="quarter"/>
+          </p:nvPr>
+        </p:nvSpPr>
+        <p:spPr/>
+      </p:sp>
+    </p:spTree>
+  </p:cSld>
+  <p:clrMapOvr>
+    <a:masterClrMapping/>
+  </p:clrMapOvr>
+</p:notes>
+</file>
+
 <file path=ppt/notesSlides/notesSlide3.xml><?xml version="1.0" encoding="utf-8"?>
 <p:notes xmlns:a="http://schemas.openxmlformats.org/drawingml/2006/main" xmlns:p="http://schemas.openxmlformats.org/presentationml/2006/main" xmlns:r="http://schemas.openxmlformats.org/officeDocument/2006/relationships">
   <p:cSld>
@@ -5860,7 +5931,7 @@
         </p:nvSpPr>
         <p:spPr>
           <a:xfrm>
-            <a:off x="566928" y="1005840"/>
+            <a:off x="566928" y="1115568"/>
             <a:ext cx="8778240" cy="256032"/>
           </a:xfrm>
           <a:prstGeom prst="rect">
@@ -5902,8 +5973,8 @@
         </p:nvSpPr>
         <p:spPr>
           <a:xfrm>
-            <a:off x="566928" y="1335024"/>
-            <a:ext cx="9509760" cy="1481328"/>
+            <a:off x="566928" y="1463040"/>
+            <a:ext cx="9509760" cy="1536192"/>
           </a:xfrm>
           <a:prstGeom prst="rect">
             <a:avLst/>
@@ -5963,7 +6034,7 @@
         </p:nvSpPr>
         <p:spPr>
           <a:xfrm>
-            <a:off x="566928" y="2889504"/>
+            <a:off x="566928" y="3127248"/>
             <a:ext cx="1920240" cy="32004"/>
           </a:xfrm>
           <a:prstGeom prst="rect">
@@ -6007,7 +6078,7 @@
         </p:nvSpPr>
         <p:spPr>
           <a:xfrm>
-            <a:off x="566928" y="3127248"/>
+            <a:off x="566928" y="3383280"/>
             <a:ext cx="7406640" cy="914400"/>
           </a:xfrm>
           <a:prstGeom prst="rect">
@@ -6049,8 +6120,8 @@
         </p:nvSpPr>
         <p:spPr>
           <a:xfrm>
-            <a:off x="10104120" y="2066543"/>
-            <a:ext cx="105156" cy="201168"/>
+            <a:off x="10104120" y="2242108"/>
+            <a:ext cx="110413" cy="211226"/>
           </a:xfrm>
           <a:prstGeom prst="rect">
             <a:avLst/>
@@ -6093,8 +6164,8 @@
         </p:nvSpPr>
         <p:spPr>
           <a:xfrm>
-            <a:off x="10287000" y="1920240"/>
-            <a:ext cx="105156" cy="347472"/>
+            <a:off x="10296144" y="2088489"/>
+            <a:ext cx="110413" cy="364845"/>
           </a:xfrm>
           <a:prstGeom prst="rect">
             <a:avLst/>
@@ -6137,8 +6208,8 @@
         </p:nvSpPr>
         <p:spPr>
           <a:xfrm>
-            <a:off x="10469880" y="1773936"/>
-            <a:ext cx="105156" cy="493776"/>
+            <a:off x="10488168" y="1934870"/>
+            <a:ext cx="110413" cy="518464"/>
           </a:xfrm>
           <a:prstGeom prst="rect">
             <a:avLst/>
@@ -6181,8 +6252,8 @@
         </p:nvSpPr>
         <p:spPr>
           <a:xfrm>
-            <a:off x="10652760" y="1627632"/>
-            <a:ext cx="105156" cy="640080"/>
+            <a:off x="10680192" y="1781251"/>
+            <a:ext cx="110413" cy="672084"/>
           </a:xfrm>
           <a:prstGeom prst="rect">
             <a:avLst/>
@@ -6225,8 +6296,8 @@
         </p:nvSpPr>
         <p:spPr>
           <a:xfrm>
-            <a:off x="10835640" y="1481328"/>
-            <a:ext cx="105156" cy="786384"/>
+            <a:off x="10872216" y="1627631"/>
+            <a:ext cx="110413" cy="825703"/>
           </a:xfrm>
           <a:prstGeom prst="rect">
             <a:avLst/>
@@ -6269,7 +6340,7 @@
         </p:nvSpPr>
         <p:spPr>
           <a:xfrm>
-            <a:off x="10104120" y="2359152"/>
+            <a:off x="10104120" y="2549347"/>
             <a:ext cx="2011680" cy="219456"/>
           </a:xfrm>
           <a:prstGeom prst="rect">
@@ -6292,7 +6363,7 @@
               </a:spcAft>
             </a:pPr>
             <a:r>
-              <a:rPr sz="850" b="0">
+              <a:rPr sz="892" b="0">
                 <a:solidFill>
                   <a:srgbClr val="8CA0BE"/>
                 </a:solidFill>
@@ -6311,8 +6382,8 @@
         </p:nvSpPr>
         <p:spPr>
           <a:xfrm>
-            <a:off x="566928" y="4315968"/>
-            <a:ext cx="2157984" cy="932688"/>
+            <a:off x="566928" y="4517136"/>
+            <a:ext cx="2157984" cy="939153"/>
           </a:xfrm>
           <a:prstGeom prst="roundRect">
             <a:avLst>
@@ -6359,8 +6430,8 @@
         </p:nvSpPr>
         <p:spPr>
           <a:xfrm>
-            <a:off x="713232" y="4443983"/>
-            <a:ext cx="1901952" cy="731520"/>
+            <a:off x="713232" y="4645152"/>
+            <a:ext cx="1901952" cy="737985"/>
           </a:xfrm>
           <a:prstGeom prst="rect">
             <a:avLst/>
@@ -6382,7 +6453,7 @@
               </a:spcAft>
             </a:pPr>
             <a:r>
-              <a:rPr sz="2500" b="1">
+              <a:rPr sz="2700" b="1">
                 <a:solidFill>
                   <a:srgbClr val="2FD8B4"/>
                 </a:solidFill>
@@ -6420,8 +6491,8 @@
         </p:nvSpPr>
         <p:spPr>
           <a:xfrm>
-            <a:off x="2852928" y="4315968"/>
-            <a:ext cx="2157984" cy="932688"/>
+            <a:off x="2852928" y="4517136"/>
+            <a:ext cx="2157984" cy="939153"/>
           </a:xfrm>
           <a:prstGeom prst="roundRect">
             <a:avLst>
@@ -6468,8 +6539,8 @@
         </p:nvSpPr>
         <p:spPr>
           <a:xfrm>
-            <a:off x="2999232" y="4443983"/>
-            <a:ext cx="1901952" cy="731520"/>
+            <a:off x="2999232" y="4645152"/>
+            <a:ext cx="1901952" cy="737985"/>
           </a:xfrm>
           <a:prstGeom prst="rect">
             <a:avLst/>
@@ -6491,7 +6562,7 @@
               </a:spcAft>
             </a:pPr>
             <a:r>
-              <a:rPr sz="2500" b="1">
+              <a:rPr sz="2700" b="1">
                 <a:solidFill>
                   <a:srgbClr val="2FD8B4"/>
                 </a:solidFill>
@@ -6529,8 +6600,8 @@
         </p:nvSpPr>
         <p:spPr>
           <a:xfrm>
-            <a:off x="5138928" y="4315968"/>
-            <a:ext cx="2157984" cy="932688"/>
+            <a:off x="5138928" y="4517136"/>
+            <a:ext cx="2157984" cy="939153"/>
           </a:xfrm>
           <a:prstGeom prst="roundRect">
             <a:avLst>
@@ -6577,8 +6648,8 @@
         </p:nvSpPr>
         <p:spPr>
           <a:xfrm>
-            <a:off x="5285232" y="4443983"/>
-            <a:ext cx="1901952" cy="731520"/>
+            <a:off x="5285232" y="4645152"/>
+            <a:ext cx="1901952" cy="737985"/>
           </a:xfrm>
           <a:prstGeom prst="rect">
             <a:avLst/>
@@ -6600,7 +6671,7 @@
               </a:spcAft>
             </a:pPr>
             <a:r>
-              <a:rPr sz="2500" b="1">
+              <a:rPr sz="2700" b="1">
                 <a:solidFill>
                   <a:srgbClr val="4C8DFF"/>
                 </a:solidFill>
@@ -6638,8 +6709,8 @@
         </p:nvSpPr>
         <p:spPr>
           <a:xfrm>
-            <a:off x="7424927" y="4315968"/>
-            <a:ext cx="4197096" cy="932688"/>
+            <a:off x="7424927" y="4517136"/>
+            <a:ext cx="4197096" cy="939153"/>
           </a:xfrm>
           <a:prstGeom prst="roundRect">
             <a:avLst>
@@ -6686,8 +6757,8 @@
         </p:nvSpPr>
         <p:spPr>
           <a:xfrm>
-            <a:off x="7571231" y="4443983"/>
-            <a:ext cx="3941063" cy="731520"/>
+            <a:off x="7571231" y="4645152"/>
+            <a:ext cx="3941063" cy="737985"/>
           </a:xfrm>
           <a:prstGeom prst="rect">
             <a:avLst/>
@@ -6709,7 +6780,7 @@
               </a:spcAft>
             </a:pPr>
             <a:r>
-              <a:rPr sz="2500" b="1">
+              <a:rPr sz="2700" b="1">
                 <a:solidFill>
                   <a:srgbClr val="FF5C6C"/>
                 </a:solidFill>
@@ -6747,8 +6818,8 @@
         </p:nvSpPr>
         <p:spPr>
           <a:xfrm>
-            <a:off x="566928" y="5486400"/>
-            <a:ext cx="11064240" cy="658368"/>
+            <a:off x="566928" y="5694033"/>
+            <a:ext cx="11064240" cy="560462"/>
           </a:xfrm>
           <a:prstGeom prst="rect">
             <a:avLst/>
@@ -7040,8 +7111,8 @@
         </p:nvSpPr>
         <p:spPr>
           <a:xfrm>
-            <a:off x="566928" y="1572768"/>
-            <a:ext cx="3977639" cy="457200"/>
+            <a:off x="566928" y="1517904"/>
+            <a:ext cx="3977639" cy="665683"/>
           </a:xfrm>
           <a:prstGeom prst="roundRect">
             <a:avLst>
@@ -7088,7 +7159,7 @@
         </p:nvSpPr>
         <p:spPr>
           <a:xfrm>
-            <a:off x="694944" y="1691640"/>
+            <a:off x="694944" y="1704441"/>
             <a:ext cx="3758183" cy="292608"/>
           </a:xfrm>
           <a:prstGeom prst="rect">
@@ -7111,7 +7182,7 @@
               </a:spcAft>
             </a:pPr>
             <a:r>
-              <a:rPr sz="1019" b="1">
+              <a:rPr sz="1050" b="1">
                 <a:solidFill>
                   <a:srgbClr val="8CA0BE"/>
                 </a:solidFill>
@@ -7130,8 +7201,8 @@
         </p:nvSpPr>
         <p:spPr>
           <a:xfrm>
-            <a:off x="4544568" y="1572768"/>
-            <a:ext cx="1426464" cy="457200"/>
+            <a:off x="4544568" y="1517904"/>
+            <a:ext cx="1426464" cy="665683"/>
           </a:xfrm>
           <a:prstGeom prst="roundRect">
             <a:avLst>
@@ -7178,7 +7249,7 @@
         </p:nvSpPr>
         <p:spPr>
           <a:xfrm>
-            <a:off x="4672583" y="1691640"/>
+            <a:off x="4672583" y="1704441"/>
             <a:ext cx="1207008" cy="292608"/>
           </a:xfrm>
           <a:prstGeom prst="rect">
@@ -7201,7 +7272,7 @@
               </a:spcAft>
             </a:pPr>
             <a:r>
-              <a:rPr sz="1019" b="1">
+              <a:rPr sz="1050" b="1">
                 <a:solidFill>
                   <a:srgbClr val="8CA0BE"/>
                 </a:solidFill>
@@ -7220,8 +7291,8 @@
         </p:nvSpPr>
         <p:spPr>
           <a:xfrm>
-            <a:off x="5971031" y="1572768"/>
-            <a:ext cx="1426464" cy="457200"/>
+            <a:off x="5971031" y="1517904"/>
+            <a:ext cx="1426464" cy="665683"/>
           </a:xfrm>
           <a:prstGeom prst="roundRect">
             <a:avLst>
@@ -7268,7 +7339,7 @@
         </p:nvSpPr>
         <p:spPr>
           <a:xfrm>
-            <a:off x="6099047" y="1691640"/>
+            <a:off x="6099047" y="1704441"/>
             <a:ext cx="1207008" cy="292608"/>
           </a:xfrm>
           <a:prstGeom prst="rect">
@@ -7291,7 +7362,7 @@
               </a:spcAft>
             </a:pPr>
             <a:r>
-              <a:rPr sz="1019" b="1">
+              <a:rPr sz="1050" b="1">
                 <a:solidFill>
                   <a:srgbClr val="8CA0BE"/>
                 </a:solidFill>
@@ -7310,8 +7381,8 @@
         </p:nvSpPr>
         <p:spPr>
           <a:xfrm>
-            <a:off x="7397496" y="1572768"/>
-            <a:ext cx="1298448" cy="457200"/>
+            <a:off x="7397496" y="1517904"/>
+            <a:ext cx="1298448" cy="665683"/>
           </a:xfrm>
           <a:prstGeom prst="roundRect">
             <a:avLst>
@@ -7358,7 +7429,7 @@
         </p:nvSpPr>
         <p:spPr>
           <a:xfrm>
-            <a:off x="7525512" y="1691640"/>
+            <a:off x="7525512" y="1704441"/>
             <a:ext cx="1078992" cy="292608"/>
           </a:xfrm>
           <a:prstGeom prst="rect">
@@ -7381,7 +7452,7 @@
               </a:spcAft>
             </a:pPr>
             <a:r>
-              <a:rPr sz="1019" b="1">
+              <a:rPr sz="1050" b="1">
                 <a:solidFill>
                   <a:srgbClr val="8CA0BE"/>
                 </a:solidFill>
@@ -7400,8 +7471,8 @@
         </p:nvSpPr>
         <p:spPr>
           <a:xfrm>
-            <a:off x="8695944" y="1572768"/>
-            <a:ext cx="1298448" cy="457200"/>
+            <a:off x="8695944" y="1517904"/>
+            <a:ext cx="1298448" cy="665683"/>
           </a:xfrm>
           <a:prstGeom prst="roundRect">
             <a:avLst>
@@ -7448,7 +7519,7 @@
         </p:nvSpPr>
         <p:spPr>
           <a:xfrm>
-            <a:off x="8823960" y="1691640"/>
+            <a:off x="8823960" y="1704441"/>
             <a:ext cx="1078992" cy="292608"/>
           </a:xfrm>
           <a:prstGeom prst="rect">
@@ -7471,7 +7542,7 @@
               </a:spcAft>
             </a:pPr>
             <a:r>
-              <a:rPr sz="1019" b="1">
+              <a:rPr sz="1050" b="1">
                 <a:solidFill>
                   <a:srgbClr val="8CA0BE"/>
                 </a:solidFill>
@@ -7490,8 +7561,8 @@
         </p:nvSpPr>
         <p:spPr>
           <a:xfrm>
-            <a:off x="9994392" y="1572768"/>
-            <a:ext cx="1636776" cy="457200"/>
+            <a:off x="9994392" y="1517904"/>
+            <a:ext cx="1636776" cy="665683"/>
           </a:xfrm>
           <a:prstGeom prst="roundRect">
             <a:avLst>
@@ -7538,7 +7609,7 @@
         </p:nvSpPr>
         <p:spPr>
           <a:xfrm>
-            <a:off x="10122408" y="1691640"/>
+            <a:off x="10122408" y="1704441"/>
             <a:ext cx="1417320" cy="292608"/>
           </a:xfrm>
           <a:prstGeom prst="rect">
@@ -7561,7 +7632,7 @@
               </a:spcAft>
             </a:pPr>
             <a:r>
-              <a:rPr sz="1019" b="1">
+              <a:rPr sz="1050" b="1">
                 <a:solidFill>
                   <a:srgbClr val="8CA0BE"/>
                 </a:solidFill>
@@ -7580,8 +7651,8 @@
         </p:nvSpPr>
         <p:spPr>
           <a:xfrm>
-            <a:off x="566928" y="2121408"/>
-            <a:ext cx="3977639" cy="493776"/>
+            <a:off x="566928" y="2197303"/>
+            <a:ext cx="3977639" cy="665683"/>
           </a:xfrm>
           <a:prstGeom prst="roundRect">
             <a:avLst>
@@ -7628,7 +7699,7 @@
         </p:nvSpPr>
         <p:spPr>
           <a:xfrm>
-            <a:off x="694944" y="2240279"/>
+            <a:off x="694944" y="2383840"/>
             <a:ext cx="3758183" cy="292608"/>
           </a:xfrm>
           <a:prstGeom prst="rect">
@@ -7651,7 +7722,7 @@
               </a:spcAft>
             </a:pPr>
             <a:r>
-              <a:rPr sz="1100" b="1">
+              <a:rPr sz="1150" b="1">
                 <a:solidFill>
                   <a:srgbClr val="EAF0F7"/>
                 </a:solidFill>
@@ -7670,8 +7741,8 @@
         </p:nvSpPr>
         <p:spPr>
           <a:xfrm>
-            <a:off x="4544568" y="2121408"/>
-            <a:ext cx="1426464" cy="493776"/>
+            <a:off x="4544568" y="2197303"/>
+            <a:ext cx="1426464" cy="665683"/>
           </a:xfrm>
           <a:prstGeom prst="roundRect">
             <a:avLst>
@@ -7718,7 +7789,7 @@
         </p:nvSpPr>
         <p:spPr>
           <a:xfrm>
-            <a:off x="4672583" y="2240279"/>
+            <a:off x="4672583" y="2383840"/>
             <a:ext cx="1207008" cy="292608"/>
           </a:xfrm>
           <a:prstGeom prst="rect">
@@ -7741,7 +7812,7 @@
               </a:spcAft>
             </a:pPr>
             <a:r>
-              <a:rPr sz="1100" b="0">
+              <a:rPr sz="1150" b="0">
                 <a:solidFill>
                   <a:srgbClr val="2FD8B4"/>
                 </a:solidFill>
@@ -7760,8 +7831,8 @@
         </p:nvSpPr>
         <p:spPr>
           <a:xfrm>
-            <a:off x="5971031" y="2121408"/>
-            <a:ext cx="1426464" cy="493776"/>
+            <a:off x="5971031" y="2197303"/>
+            <a:ext cx="1426464" cy="665683"/>
           </a:xfrm>
           <a:prstGeom prst="roundRect">
             <a:avLst>
@@ -7808,7 +7879,7 @@
         </p:nvSpPr>
         <p:spPr>
           <a:xfrm>
-            <a:off x="6099047" y="2240279"/>
+            <a:off x="6099047" y="2383840"/>
             <a:ext cx="1207008" cy="292608"/>
           </a:xfrm>
           <a:prstGeom prst="rect">
@@ -7831,7 +7902,7 @@
               </a:spcAft>
             </a:pPr>
             <a:r>
-              <a:rPr sz="1100" b="0">
+              <a:rPr sz="1150" b="0">
                 <a:solidFill>
                   <a:srgbClr val="2FD8B4"/>
                 </a:solidFill>
@@ -7850,8 +7921,8 @@
         </p:nvSpPr>
         <p:spPr>
           <a:xfrm>
-            <a:off x="7397496" y="2121408"/>
-            <a:ext cx="1298448" cy="493776"/>
+            <a:off x="7397496" y="2197303"/>
+            <a:ext cx="1298448" cy="665683"/>
           </a:xfrm>
           <a:prstGeom prst="roundRect">
             <a:avLst>
@@ -7898,7 +7969,7 @@
         </p:nvSpPr>
         <p:spPr>
           <a:xfrm>
-            <a:off x="7525512" y="2240279"/>
+            <a:off x="7525512" y="2383840"/>
             <a:ext cx="1078992" cy="292608"/>
           </a:xfrm>
           <a:prstGeom prst="rect">
@@ -7921,7 +7992,7 @@
               </a:spcAft>
             </a:pPr>
             <a:r>
-              <a:rPr sz="1100" b="0">
+              <a:rPr sz="1150" b="0">
                 <a:solidFill>
                   <a:srgbClr val="2FD8B4"/>
                 </a:solidFill>
@@ -7940,8 +8011,8 @@
         </p:nvSpPr>
         <p:spPr>
           <a:xfrm>
-            <a:off x="8695944" y="2121408"/>
-            <a:ext cx="1298448" cy="493776"/>
+            <a:off x="8695944" y="2197303"/>
+            <a:ext cx="1298448" cy="665683"/>
           </a:xfrm>
           <a:prstGeom prst="roundRect">
             <a:avLst>
@@ -7988,7 +8059,7 @@
         </p:nvSpPr>
         <p:spPr>
           <a:xfrm>
-            <a:off x="8823960" y="2240279"/>
+            <a:off x="8823960" y="2383840"/>
             <a:ext cx="1078992" cy="292608"/>
           </a:xfrm>
           <a:prstGeom prst="rect">
@@ -8011,7 +8082,7 @@
               </a:spcAft>
             </a:pPr>
             <a:r>
-              <a:rPr sz="1100" b="0">
+              <a:rPr sz="1150" b="0">
                 <a:solidFill>
                   <a:srgbClr val="2FD8B4"/>
                 </a:solidFill>
@@ -8030,8 +8101,8 @@
         </p:nvSpPr>
         <p:spPr>
           <a:xfrm>
-            <a:off x="9994392" y="2121408"/>
-            <a:ext cx="1636776" cy="493776"/>
+            <a:off x="9994392" y="2197303"/>
+            <a:ext cx="1636776" cy="665683"/>
           </a:xfrm>
           <a:prstGeom prst="roundRect">
             <a:avLst>
@@ -8078,7 +8149,7 @@
         </p:nvSpPr>
         <p:spPr>
           <a:xfrm>
-            <a:off x="10122408" y="2240279"/>
+            <a:off x="10122408" y="2383840"/>
             <a:ext cx="1417320" cy="292608"/>
           </a:xfrm>
           <a:prstGeom prst="rect">
@@ -8101,7 +8172,7 @@
               </a:spcAft>
             </a:pPr>
             <a:r>
-              <a:rPr sz="1100" b="0">
+              <a:rPr sz="1150" b="0">
                 <a:solidFill>
                   <a:srgbClr val="2FD8B4"/>
                 </a:solidFill>
@@ -8120,8 +8191,8 @@
         </p:nvSpPr>
         <p:spPr>
           <a:xfrm>
-            <a:off x="566928" y="2670048"/>
-            <a:ext cx="3977639" cy="493776"/>
+            <a:off x="566928" y="2876702"/>
+            <a:ext cx="3977639" cy="665683"/>
           </a:xfrm>
           <a:prstGeom prst="roundRect">
             <a:avLst>
@@ -8168,7 +8239,7 @@
         </p:nvSpPr>
         <p:spPr>
           <a:xfrm>
-            <a:off x="694944" y="2788920"/>
+            <a:off x="694944" y="3063240"/>
             <a:ext cx="3758183" cy="292608"/>
           </a:xfrm>
           <a:prstGeom prst="rect">
@@ -8191,7 +8262,7 @@
               </a:spcAft>
             </a:pPr>
             <a:r>
-              <a:rPr sz="1100" b="0">
+              <a:rPr sz="1150" b="0">
                 <a:solidFill>
                   <a:srgbClr val="EAF0F7"/>
                 </a:solidFill>
@@ -8210,8 +8281,8 @@
         </p:nvSpPr>
         <p:spPr>
           <a:xfrm>
-            <a:off x="4544568" y="2670048"/>
-            <a:ext cx="1426464" cy="493776"/>
+            <a:off x="4544568" y="2876702"/>
+            <a:ext cx="1426464" cy="665683"/>
           </a:xfrm>
           <a:prstGeom prst="roundRect">
             <a:avLst>
@@ -8258,7 +8329,7 @@
         </p:nvSpPr>
         <p:spPr>
           <a:xfrm>
-            <a:off x="4672583" y="2788920"/>
+            <a:off x="4672583" y="3063240"/>
             <a:ext cx="1207008" cy="292608"/>
           </a:xfrm>
           <a:prstGeom prst="rect">
@@ -8281,7 +8352,7 @@
               </a:spcAft>
             </a:pPr>
             <a:r>
-              <a:rPr sz="1100" b="0">
+              <a:rPr sz="1150" b="0">
                 <a:solidFill>
                   <a:srgbClr val="EAF0F7"/>
                 </a:solidFill>
@@ -8300,8 +8371,8 @@
         </p:nvSpPr>
         <p:spPr>
           <a:xfrm>
-            <a:off x="5971031" y="2670048"/>
-            <a:ext cx="1426464" cy="493776"/>
+            <a:off x="5971031" y="2876702"/>
+            <a:ext cx="1426464" cy="665683"/>
           </a:xfrm>
           <a:prstGeom prst="roundRect">
             <a:avLst>
@@ -8348,7 +8419,7 @@
         </p:nvSpPr>
         <p:spPr>
           <a:xfrm>
-            <a:off x="6099047" y="2788920"/>
+            <a:off x="6099047" y="3063240"/>
             <a:ext cx="1207008" cy="292608"/>
           </a:xfrm>
           <a:prstGeom prst="rect">
@@ -8371,7 +8442,7 @@
               </a:spcAft>
             </a:pPr>
             <a:r>
-              <a:rPr sz="1100" b="0">
+              <a:rPr sz="1150" b="0">
                 <a:solidFill>
                   <a:srgbClr val="EAF0F7"/>
                 </a:solidFill>
@@ -8390,8 +8461,8 @@
         </p:nvSpPr>
         <p:spPr>
           <a:xfrm>
-            <a:off x="7397496" y="2670048"/>
-            <a:ext cx="1298448" cy="493776"/>
+            <a:off x="7397496" y="2876702"/>
+            <a:ext cx="1298448" cy="665683"/>
           </a:xfrm>
           <a:prstGeom prst="roundRect">
             <a:avLst>
@@ -8438,7 +8509,7 @@
         </p:nvSpPr>
         <p:spPr>
           <a:xfrm>
-            <a:off x="7525512" y="2788920"/>
+            <a:off x="7525512" y="3063240"/>
             <a:ext cx="1078992" cy="292608"/>
           </a:xfrm>
           <a:prstGeom prst="rect">
@@ -8461,7 +8532,7 @@
               </a:spcAft>
             </a:pPr>
             <a:r>
-              <a:rPr sz="1100" b="0">
+              <a:rPr sz="1150" b="0">
                 <a:solidFill>
                   <a:srgbClr val="EAF0F7"/>
                 </a:solidFill>
@@ -8480,8 +8551,8 @@
         </p:nvSpPr>
         <p:spPr>
           <a:xfrm>
-            <a:off x="8695944" y="2670048"/>
-            <a:ext cx="1298448" cy="493776"/>
+            <a:off x="8695944" y="2876702"/>
+            <a:ext cx="1298448" cy="665683"/>
           </a:xfrm>
           <a:prstGeom prst="roundRect">
             <a:avLst>
@@ -8528,7 +8599,7 @@
         </p:nvSpPr>
         <p:spPr>
           <a:xfrm>
-            <a:off x="8823960" y="2788920"/>
+            <a:off x="8823960" y="3063240"/>
             <a:ext cx="1078992" cy="292608"/>
           </a:xfrm>
           <a:prstGeom prst="rect">
@@ -8551,7 +8622,7 @@
               </a:spcAft>
             </a:pPr>
             <a:r>
-              <a:rPr sz="1100" b="0">
+              <a:rPr sz="1150" b="0">
                 <a:solidFill>
                   <a:srgbClr val="EAF0F7"/>
                 </a:solidFill>
@@ -8570,8 +8641,8 @@
         </p:nvSpPr>
         <p:spPr>
           <a:xfrm>
-            <a:off x="9994392" y="2670048"/>
-            <a:ext cx="1636776" cy="493776"/>
+            <a:off x="9994392" y="2876702"/>
+            <a:ext cx="1636776" cy="665683"/>
           </a:xfrm>
           <a:prstGeom prst="roundRect">
             <a:avLst>
@@ -8618,7 +8689,7 @@
         </p:nvSpPr>
         <p:spPr>
           <a:xfrm>
-            <a:off x="10122408" y="2788920"/>
+            <a:off x="10122408" y="3063240"/>
             <a:ext cx="1417320" cy="292608"/>
           </a:xfrm>
           <a:prstGeom prst="rect">
@@ -8641,7 +8712,7 @@
               </a:spcAft>
             </a:pPr>
             <a:r>
-              <a:rPr sz="1100" b="0">
+              <a:rPr sz="1150" b="0">
                 <a:solidFill>
                   <a:srgbClr val="EAF0F7"/>
                 </a:solidFill>
@@ -8660,8 +8731,8 @@
         </p:nvSpPr>
         <p:spPr>
           <a:xfrm>
-            <a:off x="566928" y="3218688"/>
-            <a:ext cx="3977639" cy="493776"/>
+            <a:off x="566928" y="3556101"/>
+            <a:ext cx="3977639" cy="665683"/>
           </a:xfrm>
           <a:prstGeom prst="roundRect">
             <a:avLst>
@@ -8708,7 +8779,7 @@
         </p:nvSpPr>
         <p:spPr>
           <a:xfrm>
-            <a:off x="694944" y="3337560"/>
+            <a:off x="694944" y="3742639"/>
             <a:ext cx="3758183" cy="292608"/>
           </a:xfrm>
           <a:prstGeom prst="rect">
@@ -8731,7 +8802,7 @@
               </a:spcAft>
             </a:pPr>
             <a:r>
-              <a:rPr sz="1100" b="0">
+              <a:rPr sz="1150" b="0">
                 <a:solidFill>
                   <a:srgbClr val="EAF0F7"/>
                 </a:solidFill>
@@ -8750,8 +8821,8 @@
         </p:nvSpPr>
         <p:spPr>
           <a:xfrm>
-            <a:off x="4544568" y="3218688"/>
-            <a:ext cx="1426464" cy="493776"/>
+            <a:off x="4544568" y="3556101"/>
+            <a:ext cx="1426464" cy="665683"/>
           </a:xfrm>
           <a:prstGeom prst="roundRect">
             <a:avLst>
@@ -8798,7 +8869,7 @@
         </p:nvSpPr>
         <p:spPr>
           <a:xfrm>
-            <a:off x="4672583" y="3337560"/>
+            <a:off x="4672583" y="3742639"/>
             <a:ext cx="1207008" cy="292608"/>
           </a:xfrm>
           <a:prstGeom prst="rect">
@@ -8821,7 +8892,7 @@
               </a:spcAft>
             </a:pPr>
             <a:r>
-              <a:rPr sz="1100" b="0">
+              <a:rPr sz="1150" b="0">
                 <a:solidFill>
                   <a:srgbClr val="EAF0F7"/>
                 </a:solidFill>
@@ -8840,8 +8911,8 @@
         </p:nvSpPr>
         <p:spPr>
           <a:xfrm>
-            <a:off x="5971031" y="3218688"/>
-            <a:ext cx="1426464" cy="493776"/>
+            <a:off x="5971031" y="3556101"/>
+            <a:ext cx="1426464" cy="665683"/>
           </a:xfrm>
           <a:prstGeom prst="roundRect">
             <a:avLst>
@@ -8888,7 +8959,7 @@
         </p:nvSpPr>
         <p:spPr>
           <a:xfrm>
-            <a:off x="6099047" y="3337560"/>
+            <a:off x="6099047" y="3742639"/>
             <a:ext cx="1207008" cy="292608"/>
           </a:xfrm>
           <a:prstGeom prst="rect">
@@ -8911,7 +8982,7 @@
               </a:spcAft>
             </a:pPr>
             <a:r>
-              <a:rPr sz="1100" b="0">
+              <a:rPr sz="1150" b="0">
                 <a:solidFill>
                   <a:srgbClr val="EAF0F7"/>
                 </a:solidFill>
@@ -8930,8 +9001,8 @@
         </p:nvSpPr>
         <p:spPr>
           <a:xfrm>
-            <a:off x="7397496" y="3218688"/>
-            <a:ext cx="1298448" cy="493776"/>
+            <a:off x="7397496" y="3556101"/>
+            <a:ext cx="1298448" cy="665683"/>
           </a:xfrm>
           <a:prstGeom prst="roundRect">
             <a:avLst>
@@ -8978,7 +9049,7 @@
         </p:nvSpPr>
         <p:spPr>
           <a:xfrm>
-            <a:off x="7525512" y="3337560"/>
+            <a:off x="7525512" y="3742639"/>
             <a:ext cx="1078992" cy="292608"/>
           </a:xfrm>
           <a:prstGeom prst="rect">
@@ -9001,7 +9072,7 @@
               </a:spcAft>
             </a:pPr>
             <a:r>
-              <a:rPr sz="1100" b="0">
+              <a:rPr sz="1150" b="0">
                 <a:solidFill>
                   <a:srgbClr val="EAF0F7"/>
                 </a:solidFill>
@@ -9020,8 +9091,8 @@
         </p:nvSpPr>
         <p:spPr>
           <a:xfrm>
-            <a:off x="8695944" y="3218688"/>
-            <a:ext cx="1298448" cy="493776"/>
+            <a:off x="8695944" y="3556101"/>
+            <a:ext cx="1298448" cy="665683"/>
           </a:xfrm>
           <a:prstGeom prst="roundRect">
             <a:avLst>
@@ -9068,7 +9139,7 @@
         </p:nvSpPr>
         <p:spPr>
           <a:xfrm>
-            <a:off x="8823960" y="3337560"/>
+            <a:off x="8823960" y="3742639"/>
             <a:ext cx="1078992" cy="292608"/>
           </a:xfrm>
           <a:prstGeom prst="rect">
@@ -9091,7 +9162,7 @@
               </a:spcAft>
             </a:pPr>
             <a:r>
-              <a:rPr sz="1100" b="0">
+              <a:rPr sz="1150" b="0">
                 <a:solidFill>
                   <a:srgbClr val="EAF0F7"/>
                 </a:solidFill>
@@ -9110,8 +9181,8 @@
         </p:nvSpPr>
         <p:spPr>
           <a:xfrm>
-            <a:off x="9994392" y="3218688"/>
-            <a:ext cx="1636776" cy="493776"/>
+            <a:off x="9994392" y="3556101"/>
+            <a:ext cx="1636776" cy="665683"/>
           </a:xfrm>
           <a:prstGeom prst="roundRect">
             <a:avLst>
@@ -9158,7 +9229,7 @@
         </p:nvSpPr>
         <p:spPr>
           <a:xfrm>
-            <a:off x="10122408" y="3337560"/>
+            <a:off x="10122408" y="3742639"/>
             <a:ext cx="1417320" cy="292608"/>
           </a:xfrm>
           <a:prstGeom prst="rect">
@@ -9181,7 +9252,7 @@
               </a:spcAft>
             </a:pPr>
             <a:r>
-              <a:rPr sz="1100" b="0">
+              <a:rPr sz="1150" b="0">
                 <a:solidFill>
                   <a:srgbClr val="EAF0F7"/>
                 </a:solidFill>
@@ -9200,8 +9271,8 @@
         </p:nvSpPr>
         <p:spPr>
           <a:xfrm>
-            <a:off x="566928" y="3767328"/>
-            <a:ext cx="3977639" cy="493776"/>
+            <a:off x="566928" y="4235500"/>
+            <a:ext cx="3977639" cy="665683"/>
           </a:xfrm>
           <a:prstGeom prst="roundRect">
             <a:avLst>
@@ -9248,7 +9319,7 @@
         </p:nvSpPr>
         <p:spPr>
           <a:xfrm>
-            <a:off x="694944" y="3886200"/>
+            <a:off x="694944" y="4422038"/>
             <a:ext cx="3758183" cy="292608"/>
           </a:xfrm>
           <a:prstGeom prst="rect">
@@ -9271,7 +9342,7 @@
               </a:spcAft>
             </a:pPr>
             <a:r>
-              <a:rPr sz="1100" b="0">
+              <a:rPr sz="1150" b="0">
                 <a:solidFill>
                   <a:srgbClr val="EAF0F7"/>
                 </a:solidFill>
@@ -9290,8 +9361,8 @@
         </p:nvSpPr>
         <p:spPr>
           <a:xfrm>
-            <a:off x="4544568" y="3767328"/>
-            <a:ext cx="1426464" cy="493776"/>
+            <a:off x="4544568" y="4235500"/>
+            <a:ext cx="1426464" cy="665683"/>
           </a:xfrm>
           <a:prstGeom prst="roundRect">
             <a:avLst>
@@ -9338,7 +9409,7 @@
         </p:nvSpPr>
         <p:spPr>
           <a:xfrm>
-            <a:off x="4672583" y="3886200"/>
+            <a:off x="4672583" y="4422038"/>
             <a:ext cx="1207008" cy="292608"/>
           </a:xfrm>
           <a:prstGeom prst="rect">
@@ -9361,7 +9432,7 @@
               </a:spcAft>
             </a:pPr>
             <a:r>
-              <a:rPr sz="1100" b="0">
+              <a:rPr sz="1150" b="0">
                 <a:solidFill>
                   <a:srgbClr val="EAF0F7"/>
                 </a:solidFill>
@@ -9380,8 +9451,8 @@
         </p:nvSpPr>
         <p:spPr>
           <a:xfrm>
-            <a:off x="5971031" y="3767328"/>
-            <a:ext cx="1426464" cy="493776"/>
+            <a:off x="5971031" y="4235500"/>
+            <a:ext cx="1426464" cy="665683"/>
           </a:xfrm>
           <a:prstGeom prst="roundRect">
             <a:avLst>
@@ -9428,7 +9499,7 @@
         </p:nvSpPr>
         <p:spPr>
           <a:xfrm>
-            <a:off x="6099047" y="3886200"/>
+            <a:off x="6099047" y="4422038"/>
             <a:ext cx="1207008" cy="292608"/>
           </a:xfrm>
           <a:prstGeom prst="rect">
@@ -9451,7 +9522,7 @@
               </a:spcAft>
             </a:pPr>
             <a:r>
-              <a:rPr sz="1100" b="0">
+              <a:rPr sz="1150" b="0">
                 <a:solidFill>
                   <a:srgbClr val="EAF0F7"/>
                 </a:solidFill>
@@ -9470,8 +9541,8 @@
         </p:nvSpPr>
         <p:spPr>
           <a:xfrm>
-            <a:off x="7397496" y="3767328"/>
-            <a:ext cx="1298448" cy="493776"/>
+            <a:off x="7397496" y="4235500"/>
+            <a:ext cx="1298448" cy="665683"/>
           </a:xfrm>
           <a:prstGeom prst="roundRect">
             <a:avLst>
@@ -9518,7 +9589,7 @@
         </p:nvSpPr>
         <p:spPr>
           <a:xfrm>
-            <a:off x="7525512" y="3886200"/>
+            <a:off x="7525512" y="4422038"/>
             <a:ext cx="1078992" cy="292608"/>
           </a:xfrm>
           <a:prstGeom prst="rect">
@@ -9541,7 +9612,7 @@
               </a:spcAft>
             </a:pPr>
             <a:r>
-              <a:rPr sz="1100" b="0">
+              <a:rPr sz="1150" b="0">
                 <a:solidFill>
                   <a:srgbClr val="EAF0F7"/>
                 </a:solidFill>
@@ -9560,8 +9631,8 @@
         </p:nvSpPr>
         <p:spPr>
           <a:xfrm>
-            <a:off x="8695944" y="3767328"/>
-            <a:ext cx="1298448" cy="493776"/>
+            <a:off x="8695944" y="4235500"/>
+            <a:ext cx="1298448" cy="665683"/>
           </a:xfrm>
           <a:prstGeom prst="roundRect">
             <a:avLst>
@@ -9608,7 +9679,7 @@
         </p:nvSpPr>
         <p:spPr>
           <a:xfrm>
-            <a:off x="8823960" y="3886200"/>
+            <a:off x="8823960" y="4422038"/>
             <a:ext cx="1078992" cy="292608"/>
           </a:xfrm>
           <a:prstGeom prst="rect">
@@ -9631,7 +9702,7 @@
               </a:spcAft>
             </a:pPr>
             <a:r>
-              <a:rPr sz="1100" b="0">
+              <a:rPr sz="1150" b="0">
                 <a:solidFill>
                   <a:srgbClr val="EAF0F7"/>
                 </a:solidFill>
@@ -9650,8 +9721,8 @@
         </p:nvSpPr>
         <p:spPr>
           <a:xfrm>
-            <a:off x="9994392" y="3767328"/>
-            <a:ext cx="1636776" cy="493776"/>
+            <a:off x="9994392" y="4235500"/>
+            <a:ext cx="1636776" cy="665683"/>
           </a:xfrm>
           <a:prstGeom prst="roundRect">
             <a:avLst>
@@ -9698,7 +9769,7 @@
         </p:nvSpPr>
         <p:spPr>
           <a:xfrm>
-            <a:off x="10122408" y="3886200"/>
+            <a:off x="10122408" y="4422038"/>
             <a:ext cx="1417320" cy="292608"/>
           </a:xfrm>
           <a:prstGeom prst="rect">
@@ -9721,7 +9792,7 @@
               </a:spcAft>
             </a:pPr>
             <a:r>
-              <a:rPr sz="1100" b="0">
+              <a:rPr sz="1150" b="0">
                 <a:solidFill>
                   <a:srgbClr val="EAF0F7"/>
                 </a:solidFill>
@@ -9740,8 +9811,8 @@
         </p:nvSpPr>
         <p:spPr>
           <a:xfrm>
-            <a:off x="566928" y="4443983"/>
-            <a:ext cx="11057839" cy="1188720"/>
+            <a:off x="566928" y="5047488"/>
+            <a:ext cx="11057839" cy="1170431"/>
           </a:xfrm>
           <a:prstGeom prst="roundRect">
             <a:avLst>
@@ -9788,8 +9859,8 @@
         </p:nvSpPr>
         <p:spPr>
           <a:xfrm>
-            <a:off x="749808" y="4571999"/>
-            <a:ext cx="10692079" cy="950976"/>
+            <a:off x="749808" y="5175503"/>
+            <a:ext cx="10692079" cy="932687"/>
           </a:xfrm>
           <a:prstGeom prst="rect">
             <a:avLst/>
@@ -10833,8 +10904,8 @@
         </p:blipFill>
         <p:spPr>
           <a:xfrm>
-            <a:off x="893106" y="1536192"/>
-            <a:ext cx="6571403" cy="3931920"/>
+            <a:off x="566928" y="1517904"/>
+            <a:ext cx="7680959" cy="4465979"/>
           </a:xfrm>
           <a:prstGeom prst="rect">
             <a:avLst/>
@@ -10849,8 +10920,8 @@
         </p:nvSpPr>
         <p:spPr>
           <a:xfrm>
-            <a:off x="7973568" y="1536192"/>
-            <a:ext cx="3648456" cy="1865376"/>
+            <a:off x="8449056" y="1517904"/>
+            <a:ext cx="3175711" cy="2276856"/>
           </a:xfrm>
           <a:prstGeom prst="roundRect">
             <a:avLst>
@@ -10897,8 +10968,8 @@
         </p:nvSpPr>
         <p:spPr>
           <a:xfrm>
-            <a:off x="8156448" y="1664207"/>
-            <a:ext cx="3319272" cy="1591056"/>
+            <a:off x="8631936" y="1664207"/>
+            <a:ext cx="2809951" cy="1984248"/>
           </a:xfrm>
           <a:prstGeom prst="rect">
             <a:avLst/>
@@ -10958,8 +11029,8 @@
         </p:nvSpPr>
         <p:spPr>
           <a:xfrm>
-            <a:off x="7973568" y="3529584"/>
-            <a:ext cx="3648456" cy="1938528"/>
+            <a:off x="8449056" y="3941063"/>
+            <a:ext cx="3175711" cy="2276856"/>
           </a:xfrm>
           <a:prstGeom prst="roundRect">
             <a:avLst>
@@ -11006,8 +11077,8 @@
         </p:nvSpPr>
         <p:spPr>
           <a:xfrm>
-            <a:off x="8156448" y="3657600"/>
-            <a:ext cx="3282696" cy="1700784"/>
+            <a:off x="8631936" y="4069079"/>
+            <a:ext cx="2809951" cy="2039111"/>
           </a:xfrm>
           <a:prstGeom prst="rect">
             <a:avLst/>
@@ -12051,8 +12122,8 @@
         </p:blipFill>
         <p:spPr>
           <a:xfrm>
-            <a:off x="670033" y="1536191"/>
-            <a:ext cx="6697509" cy="3456432"/>
+            <a:off x="566928" y="1517904"/>
+            <a:ext cx="7315200" cy="3673712"/>
           </a:xfrm>
           <a:prstGeom prst="rect">
             <a:avLst/>
@@ -12067,8 +12138,8 @@
         </p:nvSpPr>
         <p:spPr>
           <a:xfrm>
-            <a:off x="7680960" y="1554480"/>
-            <a:ext cx="3941063" cy="1737360"/>
+            <a:off x="8147303" y="1517904"/>
+            <a:ext cx="3477463" cy="2276856"/>
           </a:xfrm>
           <a:prstGeom prst="roundRect">
             <a:avLst>
@@ -12115,8 +12186,8 @@
         </p:nvSpPr>
         <p:spPr>
           <a:xfrm>
-            <a:off x="7863840" y="1682495"/>
-            <a:ext cx="3611880" cy="1517904"/>
+            <a:off x="8330183" y="1664207"/>
+            <a:ext cx="3111703" cy="1984248"/>
           </a:xfrm>
           <a:prstGeom prst="rect">
             <a:avLst/>
@@ -12176,8 +12247,8 @@
         </p:nvSpPr>
         <p:spPr>
           <a:xfrm>
-            <a:off x="7680960" y="3401568"/>
-            <a:ext cx="3941063" cy="1591056"/>
+            <a:off x="8147303" y="3941063"/>
+            <a:ext cx="3477463" cy="2276856"/>
           </a:xfrm>
           <a:prstGeom prst="roundRect">
             <a:avLst>
@@ -12224,8 +12295,8 @@
         </p:nvSpPr>
         <p:spPr>
           <a:xfrm>
-            <a:off x="7863840" y="3529584"/>
-            <a:ext cx="3575303" cy="1353312"/>
+            <a:off x="8330183" y="4069079"/>
+            <a:ext cx="3111703" cy="2039111"/>
           </a:xfrm>
           <a:prstGeom prst="rect">
             <a:avLst/>
@@ -13261,8 +13332,8 @@
         </p:nvSpPr>
         <p:spPr>
           <a:xfrm>
-            <a:off x="566928" y="1536192"/>
-            <a:ext cx="3539642" cy="859536"/>
+            <a:off x="566928" y="1517904"/>
+            <a:ext cx="3539642" cy="914400"/>
           </a:xfrm>
           <a:prstGeom prst="roundRect">
             <a:avLst>
@@ -13309,8 +13380,8 @@
         </p:nvSpPr>
         <p:spPr>
           <a:xfrm>
-            <a:off x="768096" y="1645919"/>
-            <a:ext cx="3137306" cy="658368"/>
+            <a:off x="768096" y="1664207"/>
+            <a:ext cx="3137306" cy="621792"/>
           </a:xfrm>
           <a:prstGeom prst="rect">
             <a:avLst/>
@@ -13370,8 +13441,8 @@
         </p:nvSpPr>
         <p:spPr>
           <a:xfrm>
-            <a:off x="4326026" y="1536192"/>
-            <a:ext cx="3539642" cy="859536"/>
+            <a:off x="4326026" y="1517904"/>
+            <a:ext cx="3539642" cy="914400"/>
           </a:xfrm>
           <a:prstGeom prst="roundRect">
             <a:avLst>
@@ -13418,8 +13489,8 @@
         </p:nvSpPr>
         <p:spPr>
           <a:xfrm>
-            <a:off x="4527194" y="1645919"/>
-            <a:ext cx="3137306" cy="658368"/>
+            <a:off x="4527194" y="1664207"/>
+            <a:ext cx="3137306" cy="621792"/>
           </a:xfrm>
           <a:prstGeom prst="rect">
             <a:avLst/>
@@ -13479,8 +13550,8 @@
         </p:nvSpPr>
         <p:spPr>
           <a:xfrm>
-            <a:off x="8085124" y="1536192"/>
-            <a:ext cx="3539642" cy="859536"/>
+            <a:off x="8085124" y="1517904"/>
+            <a:ext cx="3539642" cy="914400"/>
           </a:xfrm>
           <a:prstGeom prst="roundRect">
             <a:avLst>
@@ -13527,8 +13598,8 @@
         </p:nvSpPr>
         <p:spPr>
           <a:xfrm>
-            <a:off x="8286292" y="1645919"/>
-            <a:ext cx="3137306" cy="658368"/>
+            <a:off x="8286292" y="1664207"/>
+            <a:ext cx="3137306" cy="621792"/>
           </a:xfrm>
           <a:prstGeom prst="rect">
             <a:avLst/>
@@ -13596,8 +13667,8 @@
         </p:blipFill>
         <p:spPr>
           <a:xfrm>
-            <a:off x="1056355" y="2468880"/>
-            <a:ext cx="6080312" cy="3072384"/>
+            <a:off x="566928" y="2596896"/>
+            <a:ext cx="7059168" cy="3473831"/>
           </a:xfrm>
           <a:prstGeom prst="rect">
             <a:avLst/>
@@ -13612,8 +13683,8 @@
         </p:nvSpPr>
         <p:spPr>
           <a:xfrm>
-            <a:off x="7882127" y="2487168"/>
-            <a:ext cx="3739896" cy="1444752"/>
+            <a:off x="7882127" y="2651760"/>
+            <a:ext cx="3742639" cy="1709928"/>
           </a:xfrm>
           <a:prstGeom prst="roundRect">
             <a:avLst>
@@ -13660,8 +13731,8 @@
         </p:nvSpPr>
         <p:spPr>
           <a:xfrm>
-            <a:off x="8065008" y="2615184"/>
-            <a:ext cx="3410712" cy="1225296"/>
+            <a:off x="8065007" y="2798064"/>
+            <a:ext cx="3376879" cy="1417319"/>
           </a:xfrm>
           <a:prstGeom prst="rect">
             <a:avLst/>
@@ -13721,8 +13792,8 @@
         </p:nvSpPr>
         <p:spPr>
           <a:xfrm>
-            <a:off x="7882127" y="4059935"/>
-            <a:ext cx="3739896" cy="1481328"/>
+            <a:off x="7882127" y="4507992"/>
+            <a:ext cx="3742639" cy="1709928"/>
           </a:xfrm>
           <a:prstGeom prst="roundRect">
             <a:avLst>
@@ -13769,8 +13840,8 @@
         </p:nvSpPr>
         <p:spPr>
           <a:xfrm>
-            <a:off x="8065008" y="4187952"/>
-            <a:ext cx="3410712" cy="1261872"/>
+            <a:off x="8065007" y="4654296"/>
+            <a:ext cx="3376879" cy="1417319"/>
           </a:xfrm>
           <a:prstGeom prst="rect">
             <a:avLst/>
@@ -14814,8 +14885,8 @@
         </p:blipFill>
         <p:spPr>
           <a:xfrm>
-            <a:off x="716152" y="1554480"/>
-            <a:ext cx="6193790" cy="2779776"/>
+            <a:off x="566928" y="1517904"/>
+            <a:ext cx="6492239" cy="2818792"/>
           </a:xfrm>
           <a:prstGeom prst="rect">
             <a:avLst/>
@@ -14830,8 +14901,8 @@
         </p:nvSpPr>
         <p:spPr>
           <a:xfrm>
-            <a:off x="7269480" y="1536192"/>
-            <a:ext cx="4352544" cy="2816352"/>
+            <a:off x="7269480" y="1517904"/>
+            <a:ext cx="4352544" cy="4700016"/>
           </a:xfrm>
           <a:prstGeom prst="roundRect">
             <a:avLst>
@@ -14878,8 +14949,8 @@
         </p:nvSpPr>
         <p:spPr>
           <a:xfrm>
-            <a:off x="7452360" y="1664207"/>
-            <a:ext cx="4023360" cy="2596896"/>
+            <a:off x="7452360" y="1682495"/>
+            <a:ext cx="4023360" cy="4370831"/>
           </a:xfrm>
           <a:prstGeom prst="rect">
             <a:avLst/>
@@ -15072,8 +15143,8 @@
         </p:nvSpPr>
         <p:spPr>
           <a:xfrm>
-            <a:off x="566928" y="4480560"/>
-            <a:ext cx="6492240" cy="1097280"/>
+            <a:off x="566928" y="4718304"/>
+            <a:ext cx="6492240" cy="1499615"/>
           </a:xfrm>
           <a:prstGeom prst="roundRect">
             <a:avLst>
@@ -15120,8 +15191,8 @@
         </p:nvSpPr>
         <p:spPr>
           <a:xfrm>
-            <a:off x="749808" y="4608576"/>
-            <a:ext cx="6126479" cy="859536"/>
+            <a:off x="749808" y="4846320"/>
+            <a:ext cx="6126479" cy="1261871"/>
           </a:xfrm>
           <a:prstGeom prst="rect">
             <a:avLst/>
@@ -15181,8 +15252,8 @@
         </p:nvSpPr>
         <p:spPr>
           <a:xfrm>
-            <a:off x="7269480" y="4480560"/>
-            <a:ext cx="4352544" cy="1097280"/>
+            <a:off x="7269480" y="4718304"/>
+            <a:ext cx="4352544" cy="1499615"/>
           </a:xfrm>
           <a:prstGeom prst="roundRect">
             <a:avLst>
@@ -15229,8 +15300,8 @@
         </p:nvSpPr>
         <p:spPr>
           <a:xfrm>
-            <a:off x="7452360" y="4608576"/>
-            <a:ext cx="4023360" cy="896112"/>
+            <a:off x="7452360" y="4864608"/>
+            <a:ext cx="4023360" cy="1207007"/>
           </a:xfrm>
           <a:prstGeom prst="rect">
             <a:avLst/>
@@ -16266,8 +16337,8 @@
         </p:nvSpPr>
         <p:spPr>
           <a:xfrm>
-            <a:off x="566928" y="1554480"/>
-            <a:ext cx="5760720" cy="2157984"/>
+            <a:off x="566928" y="1517904"/>
+            <a:ext cx="5486400" cy="3121590"/>
           </a:xfrm>
           <a:prstGeom prst="roundRect">
             <a:avLst>
@@ -16322,8 +16393,8 @@
         </p:blipFill>
         <p:spPr>
           <a:xfrm>
-            <a:off x="1653501" y="1636776"/>
-            <a:ext cx="3587573" cy="1993391"/>
+            <a:off x="649224" y="1600200"/>
+            <a:ext cx="5321808" cy="2956998"/>
           </a:xfrm>
           <a:prstGeom prst="rect">
             <a:avLst/>
@@ -16338,8 +16409,8 @@
         </p:nvSpPr>
         <p:spPr>
           <a:xfrm>
-            <a:off x="6492240" y="1554480"/>
-            <a:ext cx="5129784" cy="2157984"/>
+            <a:off x="6327648" y="1517904"/>
+            <a:ext cx="5486400" cy="3121152"/>
           </a:xfrm>
           <a:prstGeom prst="roundRect">
             <a:avLst>
@@ -16394,8 +16465,8 @@
         </p:blipFill>
         <p:spPr>
           <a:xfrm>
-            <a:off x="7263079" y="1636776"/>
-            <a:ext cx="3588105" cy="1993391"/>
+            <a:off x="6409944" y="1600199"/>
+            <a:ext cx="5321808" cy="2956560"/>
           </a:xfrm>
           <a:prstGeom prst="rect">
             <a:avLst/>
@@ -16410,8 +16481,8 @@
         </p:nvSpPr>
         <p:spPr>
           <a:xfrm>
-            <a:off x="566928" y="3858768"/>
-            <a:ext cx="2641015" cy="1481328"/>
+            <a:off x="566928" y="4782312"/>
+            <a:ext cx="2641015" cy="1435607"/>
           </a:xfrm>
           <a:prstGeom prst="roundRect">
             <a:avLst>
@@ -16458,8 +16529,8 @@
         </p:nvSpPr>
         <p:spPr>
           <a:xfrm>
-            <a:off x="566928" y="3986783"/>
-            <a:ext cx="32004" cy="1225296"/>
+            <a:off x="566928" y="4910327"/>
+            <a:ext cx="32004" cy="1179575"/>
           </a:xfrm>
           <a:prstGeom prst="rect">
             <a:avLst/>
@@ -16502,8 +16573,8 @@
         </p:nvSpPr>
         <p:spPr>
           <a:xfrm>
-            <a:off x="749808" y="4005072"/>
-            <a:ext cx="2256967" cy="1207008"/>
+            <a:off x="749808" y="4928616"/>
+            <a:ext cx="2256967" cy="1161287"/>
           </a:xfrm>
           <a:prstGeom prst="rect">
             <a:avLst/>
@@ -16563,8 +16634,8 @@
         </p:nvSpPr>
         <p:spPr>
           <a:xfrm>
-            <a:off x="3372535" y="3858768"/>
-            <a:ext cx="2641015" cy="1481328"/>
+            <a:off x="3372535" y="4782312"/>
+            <a:ext cx="2641015" cy="1435607"/>
           </a:xfrm>
           <a:prstGeom prst="roundRect">
             <a:avLst>
@@ -16611,8 +16682,8 @@
         </p:nvSpPr>
         <p:spPr>
           <a:xfrm>
-            <a:off x="3372535" y="3986783"/>
-            <a:ext cx="32004" cy="1225296"/>
+            <a:off x="3372535" y="4910327"/>
+            <a:ext cx="32004" cy="1179575"/>
           </a:xfrm>
           <a:prstGeom prst="rect">
             <a:avLst/>
@@ -16655,8 +16726,8 @@
         </p:nvSpPr>
         <p:spPr>
           <a:xfrm>
-            <a:off x="3555415" y="4005072"/>
-            <a:ext cx="2256967" cy="1207008"/>
+            <a:off x="3555415" y="4928616"/>
+            <a:ext cx="2256967" cy="1161287"/>
           </a:xfrm>
           <a:prstGeom prst="rect">
             <a:avLst/>
@@ -16716,8 +16787,8 @@
         </p:nvSpPr>
         <p:spPr>
           <a:xfrm>
-            <a:off x="6178143" y="3858768"/>
-            <a:ext cx="2641015" cy="1481328"/>
+            <a:off x="6178143" y="4782312"/>
+            <a:ext cx="2641015" cy="1435607"/>
           </a:xfrm>
           <a:prstGeom prst="roundRect">
             <a:avLst>
@@ -16764,8 +16835,8 @@
         </p:nvSpPr>
         <p:spPr>
           <a:xfrm>
-            <a:off x="6178143" y="3986783"/>
-            <a:ext cx="32004" cy="1225296"/>
+            <a:off x="6178143" y="4910327"/>
+            <a:ext cx="32004" cy="1179575"/>
           </a:xfrm>
           <a:prstGeom prst="rect">
             <a:avLst/>
@@ -16808,8 +16879,8 @@
         </p:nvSpPr>
         <p:spPr>
           <a:xfrm>
-            <a:off x="6361023" y="4005072"/>
-            <a:ext cx="2256967" cy="1207008"/>
+            <a:off x="6361023" y="4928616"/>
+            <a:ext cx="2256967" cy="1161287"/>
           </a:xfrm>
           <a:prstGeom prst="rect">
             <a:avLst/>
@@ -16869,8 +16940,8 @@
         </p:nvSpPr>
         <p:spPr>
           <a:xfrm>
-            <a:off x="8983751" y="3858768"/>
-            <a:ext cx="2641015" cy="1481328"/>
+            <a:off x="8983751" y="4782312"/>
+            <a:ext cx="2641015" cy="1435607"/>
           </a:xfrm>
           <a:prstGeom prst="roundRect">
             <a:avLst>
@@ -16917,8 +16988,8 @@
         </p:nvSpPr>
         <p:spPr>
           <a:xfrm>
-            <a:off x="8983751" y="3986783"/>
-            <a:ext cx="32004" cy="1225296"/>
+            <a:off x="8983751" y="4910327"/>
+            <a:ext cx="32004" cy="1179575"/>
           </a:xfrm>
           <a:prstGeom prst="rect">
             <a:avLst/>
@@ -16961,8 +17032,8 @@
         </p:nvSpPr>
         <p:spPr>
           <a:xfrm>
-            <a:off x="9166631" y="4005072"/>
-            <a:ext cx="2256967" cy="1207008"/>
+            <a:off x="9166631" y="4928616"/>
+            <a:ext cx="2256967" cy="1161287"/>
           </a:xfrm>
           <a:prstGeom prst="rect">
             <a:avLst/>
@@ -17992,7 +18063,7 @@
       </p:sp>
       <p:pic>
         <p:nvPicPr>
-          <p:cNvPr id="7" name="Picture 6" descr="chart_architecture.png"/>
+          <p:cNvPr id="7" name="Picture 6" descr="06.prediction_dashboard.png"/>
           <p:cNvPicPr>
             <a:picLocks noChangeAspect="1"/>
           </p:cNvPicPr>
@@ -18006,8 +18077,8 @@
         </p:blipFill>
         <p:spPr>
           <a:xfrm>
-            <a:off x="3784249" y="1499616"/>
-            <a:ext cx="4623196" cy="2011680"/>
+            <a:off x="566928" y="1517904"/>
+            <a:ext cx="4644813" cy="3531648"/>
           </a:xfrm>
           <a:prstGeom prst="rect">
             <a:avLst/>
@@ -18016,7 +18087,7 @@
       </p:pic>
       <p:pic>
         <p:nvPicPr>
-          <p:cNvPr id="8" name="Picture 7" descr="06.prediction_dashboard.png"/>
+          <p:cNvPr id="8" name="Picture 7" descr="04.Bulk_prediction.png"/>
           <p:cNvPicPr>
             <a:picLocks noChangeAspect="1"/>
           </p:cNvPicPr>
@@ -18030,48 +18101,24 @@
         </p:blipFill>
         <p:spPr>
           <a:xfrm>
-            <a:off x="1484433" y="3602735"/>
-            <a:ext cx="3102749" cy="2359152"/>
+            <a:off x="5412909" y="1517904"/>
+            <a:ext cx="6211857" cy="3531648"/>
           </a:xfrm>
           <a:prstGeom prst="rect">
             <a:avLst/>
           </a:prstGeom>
         </p:spPr>
       </p:pic>
-      <p:pic>
-        <p:nvPicPr>
-          <p:cNvPr id="9" name="Picture 8" descr="04.Bulk_prediction.png"/>
-          <p:cNvPicPr>
-            <a:picLocks noChangeAspect="1"/>
-          </p:cNvPicPr>
-          <p:nvPr/>
-        </p:nvPicPr>
-        <p:blipFill>
-          <a:blip r:embed="rId4"/>
-          <a:stretch>
-            <a:fillRect/>
-          </a:stretch>
-        </p:blipFill>
-        <p:spPr>
-          <a:xfrm>
-            <a:off x="5669280" y="3768571"/>
-            <a:ext cx="3566159" cy="2027480"/>
-          </a:xfrm>
-          <a:prstGeom prst="rect">
-            <a:avLst/>
-          </a:prstGeom>
-        </p:spPr>
-      </p:pic>
-      <p:sp>
-        <p:nvSpPr>
-          <p:cNvPr id="10" name="Rounded Rectangle 9"/>
-          <p:cNvSpPr/>
-          <p:nvPr/>
-        </p:nvSpPr>
-        <p:spPr>
-          <a:xfrm>
-            <a:off x="9400032" y="3602735"/>
-            <a:ext cx="2221992" cy="2359152"/>
+      <p:sp>
+        <p:nvSpPr>
+          <p:cNvPr id="9" name="Rounded Rectangle 8"/>
+          <p:cNvSpPr/>
+          <p:nvPr/>
+        </p:nvSpPr>
+        <p:spPr>
+          <a:xfrm>
+            <a:off x="566928" y="5193791"/>
+            <a:ext cx="11057839" cy="1024127"/>
           </a:xfrm>
           <a:prstGeom prst="roundRect">
             <a:avLst>
@@ -18112,14 +18159,14 @@
       </p:sp>
       <p:sp>
         <p:nvSpPr>
-          <p:cNvPr id="11" name="TextBox 10"/>
+          <p:cNvPr id="10" name="TextBox 9"/>
           <p:cNvSpPr txBox="1"/>
           <p:nvPr/>
         </p:nvSpPr>
         <p:spPr>
           <a:xfrm>
-            <a:off x="9546336" y="3712463"/>
-            <a:ext cx="1929384" cy="2139696"/>
+            <a:off x="786384" y="5321807"/>
+            <a:ext cx="8570671" cy="786383"/>
           </a:xfrm>
           <a:prstGeom prst="rect">
             <a:avLst/>
@@ -18137,135 +18184,64 @@
                 <a:spcPct val="112000"/>
               </a:lnSpc>
               <a:spcAft>
-                <a:spcPts val="500"/>
+                <a:spcPts val="400"/>
               </a:spcAft>
             </a:pPr>
             <a:r>
-              <a:rPr sz="950" b="1">
+              <a:rPr sz="980" b="1">
                 <a:solidFill>
                   <a:srgbClr val="2FD8B4"/>
                 </a:solidFill>
                 <a:latin typeface="Consolas"/>
               </a:rPr>
-              <a:t>WHAT A USER DOES</a:t>
+              <a:t>WHAT A REVIEWER DOES</a:t>
             </a:r>
           </a:p>
           <a:p>
             <a:pPr algn="l">
               <a:lnSpc>
-                <a:spcPct val="112000"/>
+                <a:spcPct val="116000"/>
               </a:lnSpc>
               <a:spcAft>
-                <a:spcPts val="300"/>
+                <a:spcPts val="0"/>
               </a:spcAft>
             </a:pPr>
             <a:r>
-              <a:rPr sz="930" b="0">
+              <a:rPr sz="1040" b="0">
                 <a:solidFill>
                   <a:srgbClr val="EAF0F7"/>
                 </a:solidFill>
                 <a:latin typeface="Segoe UI"/>
               </a:rPr>
-              <a:t>1  Upload a CSV</a:t>
-            </a:r>
-          </a:p>
-          <a:p>
-            <a:pPr algn="l">
-              <a:lnSpc>
-                <a:spcPct val="112000"/>
-              </a:lnSpc>
-              <a:spcAft>
-                <a:spcPts val="300"/>
-              </a:spcAft>
-            </a:pPr>
-            <a:r>
-              <a:rPr sz="930" b="0">
-                <a:solidFill>
-                  <a:srgbClr val="EAF0F7"/>
-                </a:solidFill>
-                <a:latin typeface="Segoe UI"/>
-              </a:rPr>
-              <a:t>2  Validate the file</a:t>
-            </a:r>
-          </a:p>
-          <a:p>
-            <a:pPr algn="l">
-              <a:lnSpc>
-                <a:spcPct val="112000"/>
-              </a:lnSpc>
-              <a:spcAft>
-                <a:spcPts val="300"/>
-              </a:spcAft>
-            </a:pPr>
-            <a:r>
-              <a:rPr sz="930" b="0">
-                <a:solidFill>
-                  <a:srgbClr val="EAF0F7"/>
-                </a:solidFill>
-                <a:latin typeface="Segoe UI"/>
-              </a:rPr>
-              <a:t>3  Score the portfolio</a:t>
-            </a:r>
-          </a:p>
-          <a:p>
-            <a:pPr algn="l">
-              <a:lnSpc>
-                <a:spcPct val="112000"/>
-              </a:lnSpc>
-              <a:spcAft>
-                <a:spcPts val="300"/>
-              </a:spcAft>
-            </a:pPr>
-            <a:r>
-              <a:rPr sz="930" b="0">
-                <a:solidFill>
-                  <a:srgbClr val="EAF0F7"/>
-                </a:solidFill>
-                <a:latin typeface="Segoe UI"/>
-              </a:rPr>
-              <a:t>4  Read the KPIs</a:t>
-            </a:r>
-          </a:p>
-          <a:p>
-            <a:pPr algn="l">
-              <a:lnSpc>
-                <a:spcPct val="112000"/>
-              </a:lnSpc>
-              <a:spcAft>
-                <a:spcPts val="300"/>
-              </a:spcAft>
-            </a:pPr>
-            <a:r>
-              <a:rPr sz="930" b="0">
-                <a:solidFill>
-                  <a:srgbClr val="EAF0F7"/>
-                </a:solidFill>
-                <a:latin typeface="Segoe UI"/>
-              </a:rPr>
-              <a:t>5  Drill into a customer</a:t>
-            </a:r>
-          </a:p>
-          <a:p>
-            <a:pPr algn="l">
-              <a:lnSpc>
-                <a:spcPct val="112000"/>
-              </a:lnSpc>
-              <a:spcAft>
-                <a:spcPts val="700"/>
-              </a:spcAft>
-            </a:pPr>
-            <a:r>
-              <a:rPr sz="930" b="0">
-                <a:solidFill>
-                  <a:srgbClr val="EAF0F7"/>
-                </a:solidFill>
-                <a:latin typeface="Segoe UI"/>
-              </a:rPr>
-              <a:t>6  Download the report</a:t>
-            </a:r>
-          </a:p>
-          <a:p>
-            <a:pPr algn="l">
+              <a:t>Upload a CSV  →  validate the file before scoring  →  score the whole portfolio
+Read churn rate, risk split and revenue at risk  →  drill into a customer  →  download a private report</a:t>
+            </a:r>
+          </a:p>
+        </p:txBody>
+      </p:sp>
+      <p:sp>
+        <p:nvSpPr>
+          <p:cNvPr id="11" name="TextBox 10"/>
+          <p:cNvSpPr txBox="1"/>
+          <p:nvPr/>
+        </p:nvSpPr>
+        <p:spPr>
+          <a:xfrm>
+            <a:off x="9613087" y="5321807"/>
+            <a:ext cx="2011680" cy="310896"/>
+          </a:xfrm>
+          <a:prstGeom prst="rect">
+            <a:avLst/>
+          </a:prstGeom>
+          <a:noFill/>
+        </p:spPr>
+        <p:txBody>
+          <a:bodyPr wrap="square" lIns="0" rIns="0" tIns="0" bIns="0" anchor="t">
+            <a:spAutoFit/>
+          </a:bodyPr>
+          <a:lstStyle/>
+          <a:p>
+            <a:pPr algn="r">
               <a:lnSpc>
                 <a:spcPct val="112000"/>
               </a:lnSpc>
@@ -18274,13 +18250,13 @@
               </a:spcAft>
             </a:pPr>
             <a:r>
-              <a:rPr sz="869" b="0">
+              <a:rPr sz="840" b="1">
                 <a:solidFill>
                   <a:srgbClr val="8CA0BE"/>
                 </a:solidFill>
-                <a:latin typeface="Segoe UI"/>
+                <a:latin typeface="Consolas"/>
               </a:rPr>
-              <a:t>Reports are scoped to the visitor by a signed cookie — never a shared folder.</a:t>
+              <a:t>REPORTS ARE PRIVATE — SCOPED BY SIGNED COOKIE</a:t>
             </a:r>
           </a:p>
         </p:txBody>
@@ -19269,8 +19245,8 @@
         </p:nvSpPr>
         <p:spPr>
           <a:xfrm>
-            <a:off x="566928" y="1554480"/>
-            <a:ext cx="5410047" cy="1481328"/>
+            <a:off x="566928" y="1517904"/>
+            <a:ext cx="5410047" cy="1773935"/>
           </a:xfrm>
           <a:prstGeom prst="roundRect">
             <a:avLst>
@@ -19317,8 +19293,8 @@
         </p:nvSpPr>
         <p:spPr>
           <a:xfrm>
-            <a:off x="566928" y="1682495"/>
-            <a:ext cx="32004" cy="1225296"/>
+            <a:off x="566928" y="1664207"/>
+            <a:ext cx="32004" cy="1481327"/>
           </a:xfrm>
           <a:prstGeom prst="rect">
             <a:avLst/>
@@ -19361,8 +19337,8 @@
         </p:nvSpPr>
         <p:spPr>
           <a:xfrm>
-            <a:off x="768096" y="1700784"/>
-            <a:ext cx="4989423" cy="1188720"/>
+            <a:off x="786384" y="1682495"/>
+            <a:ext cx="4952847" cy="1444751"/>
           </a:xfrm>
           <a:prstGeom prst="rect">
             <a:avLst/>
@@ -19441,8 +19417,8 @@
         </p:nvSpPr>
         <p:spPr>
           <a:xfrm>
-            <a:off x="6214719" y="1554480"/>
-            <a:ext cx="5410047" cy="1481328"/>
+            <a:off x="6214719" y="1517904"/>
+            <a:ext cx="5410047" cy="1773935"/>
           </a:xfrm>
           <a:prstGeom prst="roundRect">
             <a:avLst>
@@ -19489,8 +19465,8 @@
         </p:nvSpPr>
         <p:spPr>
           <a:xfrm>
-            <a:off x="6214719" y="1682495"/>
-            <a:ext cx="32004" cy="1225296"/>
+            <a:off x="6214719" y="1664207"/>
+            <a:ext cx="32004" cy="1481327"/>
           </a:xfrm>
           <a:prstGeom prst="rect">
             <a:avLst/>
@@ -19533,8 +19509,8 @@
         </p:nvSpPr>
         <p:spPr>
           <a:xfrm>
-            <a:off x="6415887" y="1700784"/>
-            <a:ext cx="4989423" cy="1188720"/>
+            <a:off x="6434175" y="1682495"/>
+            <a:ext cx="4952847" cy="1444751"/>
           </a:xfrm>
           <a:prstGeom prst="rect">
             <a:avLst/>
@@ -19613,8 +19589,8 @@
         </p:nvSpPr>
         <p:spPr>
           <a:xfrm>
-            <a:off x="566928" y="3182112"/>
-            <a:ext cx="5410047" cy="1481328"/>
+            <a:off x="566928" y="3438144"/>
+            <a:ext cx="5410047" cy="1773935"/>
           </a:xfrm>
           <a:prstGeom prst="roundRect">
             <a:avLst>
@@ -19661,8 +19637,8 @@
         </p:nvSpPr>
         <p:spPr>
           <a:xfrm>
-            <a:off x="566928" y="3310128"/>
-            <a:ext cx="32004" cy="1225296"/>
+            <a:off x="566928" y="3584448"/>
+            <a:ext cx="32004" cy="1481327"/>
           </a:xfrm>
           <a:prstGeom prst="rect">
             <a:avLst/>
@@ -19705,8 +19681,8 @@
         </p:nvSpPr>
         <p:spPr>
           <a:xfrm>
-            <a:off x="768096" y="3328416"/>
-            <a:ext cx="4989423" cy="1188720"/>
+            <a:off x="786384" y="3602736"/>
+            <a:ext cx="4952847" cy="1444751"/>
           </a:xfrm>
           <a:prstGeom prst="rect">
             <a:avLst/>
@@ -19785,8 +19761,8 @@
         </p:nvSpPr>
         <p:spPr>
           <a:xfrm>
-            <a:off x="6214719" y="3182112"/>
-            <a:ext cx="5410047" cy="1481328"/>
+            <a:off x="6214719" y="3438144"/>
+            <a:ext cx="5410047" cy="1773935"/>
           </a:xfrm>
           <a:prstGeom prst="roundRect">
             <a:avLst>
@@ -19833,8 +19809,8 @@
         </p:nvSpPr>
         <p:spPr>
           <a:xfrm>
-            <a:off x="6214719" y="3310128"/>
-            <a:ext cx="32004" cy="1225296"/>
+            <a:off x="6214719" y="3584448"/>
+            <a:ext cx="32004" cy="1481327"/>
           </a:xfrm>
           <a:prstGeom prst="rect">
             <a:avLst/>
@@ -19877,8 +19853,8 @@
         </p:nvSpPr>
         <p:spPr>
           <a:xfrm>
-            <a:off x="6415887" y="3328416"/>
-            <a:ext cx="4989423" cy="1188720"/>
+            <a:off x="6434175" y="3602736"/>
+            <a:ext cx="4952847" cy="1444751"/>
           </a:xfrm>
           <a:prstGeom prst="rect">
             <a:avLst/>
@@ -19957,8 +19933,8 @@
         </p:nvSpPr>
         <p:spPr>
           <a:xfrm>
-            <a:off x="566928" y="4864608"/>
-            <a:ext cx="11057839" cy="914400"/>
+            <a:off x="566928" y="5358383"/>
+            <a:ext cx="11057839" cy="859535"/>
           </a:xfrm>
           <a:prstGeom prst="roundRect">
             <a:avLst>
@@ -20005,8 +19981,8 @@
         </p:nvSpPr>
         <p:spPr>
           <a:xfrm>
-            <a:off x="749808" y="4992624"/>
-            <a:ext cx="10692079" cy="676656"/>
+            <a:off x="749808" y="5486399"/>
+            <a:ext cx="10692079" cy="621791"/>
           </a:xfrm>
           <a:prstGeom prst="rect">
             <a:avLst/>
@@ -21042,8 +21018,8 @@
         </p:nvSpPr>
         <p:spPr>
           <a:xfrm>
-            <a:off x="566928" y="1554480"/>
-            <a:ext cx="2627299" cy="2395728"/>
+            <a:off x="566928" y="1517904"/>
+            <a:ext cx="2627299" cy="3054096"/>
           </a:xfrm>
           <a:prstGeom prst="roundRect">
             <a:avLst>
@@ -21090,7 +21066,7 @@
         </p:nvSpPr>
         <p:spPr>
           <a:xfrm>
-            <a:off x="566928" y="1554480"/>
+            <a:off x="566928" y="1517904"/>
             <a:ext cx="2627299" cy="41148"/>
           </a:xfrm>
           <a:prstGeom prst="rect">
@@ -21134,8 +21110,8 @@
         </p:nvSpPr>
         <p:spPr>
           <a:xfrm>
-            <a:off x="749808" y="1737360"/>
-            <a:ext cx="2261539" cy="2084831"/>
+            <a:off x="749808" y="1755648"/>
+            <a:ext cx="2261539" cy="2633472"/>
           </a:xfrm>
           <a:prstGeom prst="rect">
             <a:avLst/>
@@ -21153,11 +21129,11 @@
                 <a:spcPct val="112000"/>
               </a:lnSpc>
               <a:spcAft>
-                <a:spcPts val="800"/>
+                <a:spcPts val="1300"/>
               </a:spcAft>
             </a:pPr>
             <a:r>
-              <a:rPr sz="1000" b="1">
+              <a:rPr sz="1100" b="1">
                 <a:solidFill>
                   <a:srgbClr val="2FD8B4"/>
                 </a:solidFill>
@@ -21169,14 +21145,14 @@
           <a:p>
             <a:pPr algn="l">
               <a:lnSpc>
-                <a:spcPct val="110000"/>
+                <a:spcPct val="114000"/>
               </a:lnSpc>
               <a:spcAft>
-                <a:spcPts val="500"/>
+                <a:spcPts val="1500"/>
               </a:spcAft>
             </a:pPr>
             <a:r>
-              <a:rPr sz="1040" b="0">
+              <a:rPr sz="1160" b="0">
                 <a:solidFill>
                   <a:srgbClr val="EAF0F7"/>
                 </a:solidFill>
@@ -21188,77 +21164,77 @@
           <a:p>
             <a:pPr algn="l">
               <a:lnSpc>
-                <a:spcPct val="110000"/>
+                <a:spcPct val="114000"/>
               </a:lnSpc>
               <a:spcAft>
-                <a:spcPts val="500"/>
+                <a:spcPts val="1500"/>
               </a:spcAft>
             </a:pPr>
             <a:r>
-              <a:rPr sz="1040" b="0">
+              <a:rPr sz="1160" b="0">
                 <a:solidFill>
                   <a:srgbClr val="EAF0F7"/>
                 </a:solidFill>
                 <a:latin typeface="Segoe UI"/>
               </a:rPr>
-              <a:t>·  Pandas — data manipulation</a:t>
+              <a:t>·  Pandas — data handling</a:t>
             </a:r>
           </a:p>
           <a:p>
             <a:pPr algn="l">
               <a:lnSpc>
-                <a:spcPct val="110000"/>
+                <a:spcPct val="114000"/>
               </a:lnSpc>
               <a:spcAft>
-                <a:spcPts val="500"/>
+                <a:spcPts val="1500"/>
               </a:spcAft>
             </a:pPr>
             <a:r>
-              <a:rPr sz="1040" b="0">
+              <a:rPr sz="1160" b="0">
                 <a:solidFill>
                   <a:srgbClr val="EAF0F7"/>
                 </a:solidFill>
                 <a:latin typeface="Segoe UI"/>
               </a:rPr>
-              <a:t>·  NumPy — numerical computing</a:t>
+              <a:t>·  NumPy — numerics</a:t>
             </a:r>
           </a:p>
           <a:p>
             <a:pPr algn="l">
               <a:lnSpc>
-                <a:spcPct val="110000"/>
+                <a:spcPct val="114000"/>
               </a:lnSpc>
               <a:spcAft>
-                <a:spcPts val="500"/>
+                <a:spcPts val="1500"/>
               </a:spcAft>
             </a:pPr>
             <a:r>
-              <a:rPr sz="1040" b="0">
+              <a:rPr sz="1160" b="0">
                 <a:solidFill>
                   <a:srgbClr val="EAF0F7"/>
                 </a:solidFill>
                 <a:latin typeface="Segoe UI"/>
               </a:rPr>
-              <a:t>·  SQL Server (extraction layer)</a:t>
+              <a:t>·  SQL Server — extraction</a:t>
             </a:r>
           </a:p>
           <a:p>
             <a:pPr algn="l">
               <a:lnSpc>
-                <a:spcPct val="110000"/>
+                <a:spcPct val="114000"/>
               </a:lnSpc>
               <a:spcAft>
-                <a:spcPts val="500"/>
+                <a:spcPts val="1500"/>
               </a:spcAft>
             </a:pPr>
             <a:r>
-              <a:rPr sz="1040" b="0">
+              <a:rPr sz="1160" b="0">
                 <a:solidFill>
                   <a:srgbClr val="EAF0F7"/>
                 </a:solidFill>
                 <a:latin typeface="Segoe UI"/>
               </a:rPr>
-              <a:t>·  SQLAlchemy — DB connection</a:t>
+              <a:t>·  SQLAlchemy — DB layer</a:t>
             </a:r>
           </a:p>
         </p:txBody>
@@ -21271,8 +21247,8 @@
         </p:nvSpPr>
         <p:spPr>
           <a:xfrm>
-            <a:off x="3377107" y="1554480"/>
-            <a:ext cx="2627299" cy="2395728"/>
+            <a:off x="3377107" y="1517904"/>
+            <a:ext cx="2627299" cy="3054096"/>
           </a:xfrm>
           <a:prstGeom prst="roundRect">
             <a:avLst>
@@ -21319,7 +21295,7 @@
         </p:nvSpPr>
         <p:spPr>
           <a:xfrm>
-            <a:off x="3377107" y="1554480"/>
+            <a:off x="3377107" y="1517904"/>
             <a:ext cx="2627299" cy="41148"/>
           </a:xfrm>
           <a:prstGeom prst="rect">
@@ -21363,8 +21339,8 @@
         </p:nvSpPr>
         <p:spPr>
           <a:xfrm>
-            <a:off x="3559987" y="1737360"/>
-            <a:ext cx="2261539" cy="2084831"/>
+            <a:off x="3559987" y="1755648"/>
+            <a:ext cx="2261539" cy="2633472"/>
           </a:xfrm>
           <a:prstGeom prst="rect">
             <a:avLst/>
@@ -21382,11 +21358,11 @@
                 <a:spcPct val="112000"/>
               </a:lnSpc>
               <a:spcAft>
-                <a:spcPts val="800"/>
+                <a:spcPts val="1300"/>
               </a:spcAft>
             </a:pPr>
             <a:r>
-              <a:rPr sz="1000" b="1">
+              <a:rPr sz="1100" b="1">
                 <a:solidFill>
                   <a:srgbClr val="F5A623"/>
                 </a:solidFill>
@@ -21398,52 +21374,52 @@
           <a:p>
             <a:pPr algn="l">
               <a:lnSpc>
-                <a:spcPct val="110000"/>
+                <a:spcPct val="114000"/>
               </a:lnSpc>
               <a:spcAft>
-                <a:spcPts val="500"/>
+                <a:spcPts val="1500"/>
               </a:spcAft>
             </a:pPr>
             <a:r>
-              <a:rPr sz="1040" b="0">
+              <a:rPr sz="1160" b="0">
                 <a:solidFill>
                   <a:srgbClr val="EAF0F7"/>
                 </a:solidFill>
                 <a:latin typeface="Segoe UI"/>
               </a:rPr>
-              <a:t>·  Scikit-learn — training &amp; evaluation</a:t>
+              <a:t>·  Scikit-learn — training</a:t>
             </a:r>
           </a:p>
           <a:p>
             <a:pPr algn="l">
               <a:lnSpc>
-                <a:spcPct val="110000"/>
+                <a:spcPct val="114000"/>
               </a:lnSpc>
               <a:spcAft>
-                <a:spcPts val="500"/>
+                <a:spcPts val="1500"/>
               </a:spcAft>
             </a:pPr>
             <a:r>
-              <a:rPr sz="1040" b="0">
+              <a:rPr sz="1160" b="0">
                 <a:solidFill>
                   <a:srgbClr val="EAF0F7"/>
                 </a:solidFill>
                 <a:latin typeface="Segoe UI"/>
               </a:rPr>
-              <a:t>·  Logistic Regression (deployed)</a:t>
+              <a:t>·  Logistic Regression (live)</a:t>
             </a:r>
           </a:p>
           <a:p>
             <a:pPr algn="l">
               <a:lnSpc>
-                <a:spcPct val="110000"/>
+                <a:spcPct val="114000"/>
               </a:lnSpc>
               <a:spcAft>
-                <a:spcPts val="500"/>
+                <a:spcPts val="1500"/>
               </a:spcAft>
             </a:pPr>
             <a:r>
-              <a:rPr sz="1040" b="0">
+              <a:rPr sz="1160" b="0">
                 <a:solidFill>
                   <a:srgbClr val="EAF0F7"/>
                 </a:solidFill>
@@ -21455,39 +21431,39 @@
           <a:p>
             <a:pPr algn="l">
               <a:lnSpc>
-                <a:spcPct val="110000"/>
+                <a:spcPct val="114000"/>
               </a:lnSpc>
               <a:spcAft>
-                <a:spcPts val="500"/>
+                <a:spcPts val="1500"/>
               </a:spcAft>
             </a:pPr>
             <a:r>
-              <a:rPr sz="1040" b="0">
+              <a:rPr sz="1160" b="0">
                 <a:solidFill>
                   <a:srgbClr val="EAF0F7"/>
                 </a:solidFill>
                 <a:latin typeface="Segoe UI"/>
               </a:rPr>
-              <a:t>·  Joblib — model persistence</a:t>
+              <a:t>·  Joblib — model files</a:t>
             </a:r>
           </a:p>
           <a:p>
             <a:pPr algn="l">
               <a:lnSpc>
-                <a:spcPct val="110000"/>
+                <a:spcPct val="114000"/>
               </a:lnSpc>
               <a:spcAft>
-                <a:spcPts val="500"/>
+                <a:spcPts val="1500"/>
               </a:spcAft>
             </a:pPr>
             <a:r>
-              <a:rPr sz="1040" b="0">
+              <a:rPr sz="1160" b="0">
                 <a:solidFill>
                   <a:srgbClr val="EAF0F7"/>
                 </a:solidFill>
                 <a:latin typeface="Segoe UI"/>
               </a:rPr>
-              <a:t>·  SHAP — explainability research</a:t>
+              <a:t>·  SHAP — research only</a:t>
             </a:r>
           </a:p>
         </p:txBody>
@@ -21500,8 +21476,8 @@
         </p:nvSpPr>
         <p:spPr>
           <a:xfrm>
-            <a:off x="6187287" y="1554480"/>
-            <a:ext cx="2627299" cy="2395728"/>
+            <a:off x="6187287" y="1517904"/>
+            <a:ext cx="2627299" cy="3054096"/>
           </a:xfrm>
           <a:prstGeom prst="roundRect">
             <a:avLst>
@@ -21548,7 +21524,7 @@
         </p:nvSpPr>
         <p:spPr>
           <a:xfrm>
-            <a:off x="6187287" y="1554480"/>
+            <a:off x="6187287" y="1517904"/>
             <a:ext cx="2627299" cy="41148"/>
           </a:xfrm>
           <a:prstGeom prst="rect">
@@ -21592,8 +21568,8 @@
         </p:nvSpPr>
         <p:spPr>
           <a:xfrm>
-            <a:off x="6370167" y="1737360"/>
-            <a:ext cx="2261539" cy="2084831"/>
+            <a:off x="6370167" y="1755648"/>
+            <a:ext cx="2261539" cy="2633472"/>
           </a:xfrm>
           <a:prstGeom prst="rect">
             <a:avLst/>
@@ -21611,11 +21587,11 @@
                 <a:spcPct val="112000"/>
               </a:lnSpc>
               <a:spcAft>
-                <a:spcPts val="800"/>
+                <a:spcPts val="1300"/>
               </a:spcAft>
             </a:pPr>
             <a:r>
-              <a:rPr sz="1000" b="1">
+              <a:rPr sz="1100" b="1">
                 <a:solidFill>
                   <a:srgbClr val="4C8DFF"/>
                 </a:solidFill>
@@ -21627,96 +21603,96 @@
           <a:p>
             <a:pPr algn="l">
               <a:lnSpc>
-                <a:spcPct val="110000"/>
+                <a:spcPct val="114000"/>
               </a:lnSpc>
               <a:spcAft>
-                <a:spcPts val="500"/>
+                <a:spcPts val="1500"/>
               </a:spcAft>
             </a:pPr>
             <a:r>
-              <a:rPr sz="1040" b="0">
+              <a:rPr sz="1160" b="0">
                 <a:solidFill>
                   <a:srgbClr val="EAF0F7"/>
                 </a:solidFill>
                 <a:latin typeface="Segoe UI"/>
               </a:rPr>
-              <a:t>·  Flask — application server</a:t>
+              <a:t>·  Flask — app server</a:t>
             </a:r>
           </a:p>
           <a:p>
             <a:pPr algn="l">
               <a:lnSpc>
-                <a:spcPct val="110000"/>
+                <a:spcPct val="114000"/>
               </a:lnSpc>
               <a:spcAft>
-                <a:spcPts val="500"/>
+                <a:spcPts val="1500"/>
               </a:spcAft>
             </a:pPr>
             <a:r>
-              <a:rPr sz="1040" b="0">
+              <a:rPr sz="1160" b="0">
                 <a:solidFill>
                   <a:srgbClr val="EAF0F7"/>
                 </a:solidFill>
                 <a:latin typeface="Segoe UI"/>
               </a:rPr>
-              <a:t>·  Jinja2 — server-side templates</a:t>
+              <a:t>·  Jinja2 — templates</a:t>
             </a:r>
           </a:p>
           <a:p>
             <a:pPr algn="l">
               <a:lnSpc>
-                <a:spcPct val="110000"/>
+                <a:spcPct val="114000"/>
               </a:lnSpc>
               <a:spcAft>
-                <a:spcPts val="500"/>
+                <a:spcPts val="1500"/>
               </a:spcAft>
             </a:pPr>
             <a:r>
-              <a:rPr sz="1040" b="0">
+              <a:rPr sz="1160" b="0">
                 <a:solidFill>
                   <a:srgbClr val="EAF0F7"/>
                 </a:solidFill>
                 <a:latin typeface="Segoe UI"/>
               </a:rPr>
-              <a:t>·  HTML5 · CSS3 (custom design system)</a:t>
+              <a:t>·  HTML5 · CSS3 — design system</a:t>
             </a:r>
           </a:p>
           <a:p>
             <a:pPr algn="l">
               <a:lnSpc>
-                <a:spcPct val="110000"/>
+                <a:spcPct val="114000"/>
               </a:lnSpc>
               <a:spcAft>
-                <a:spcPts val="500"/>
+                <a:spcPts val="1500"/>
               </a:spcAft>
             </a:pPr>
             <a:r>
-              <a:rPr sz="1040" b="0">
+              <a:rPr sz="1160" b="0">
                 <a:solidFill>
                   <a:srgbClr val="EAF0F7"/>
                 </a:solidFill>
                 <a:latin typeface="Segoe UI"/>
               </a:rPr>
-              <a:t>·  Vanilla JavaScript — dashboards</a:t>
+              <a:t>·  Vanilla JavaScript — charts</a:t>
             </a:r>
           </a:p>
           <a:p>
             <a:pPr algn="l">
               <a:lnSpc>
-                <a:spcPct val="110000"/>
+                <a:spcPct val="114000"/>
               </a:lnSpc>
               <a:spcAft>
-                <a:spcPts val="500"/>
+                <a:spcPts val="1500"/>
               </a:spcAft>
             </a:pPr>
             <a:r>
-              <a:rPr sz="1040" b="0">
+              <a:rPr sz="1160" b="0">
                 <a:solidFill>
                   <a:srgbClr val="EAF0F7"/>
                 </a:solidFill>
                 <a:latin typeface="Segoe UI"/>
               </a:rPr>
-              <a:t>·  Gunicorn — WSGI production server</a:t>
+              <a:t>·  Gunicorn — WSGI server</a:t>
             </a:r>
           </a:p>
         </p:txBody>
@@ -21729,8 +21705,8 @@
         </p:nvSpPr>
         <p:spPr>
           <a:xfrm>
-            <a:off x="8997467" y="1554480"/>
-            <a:ext cx="2627299" cy="2395728"/>
+            <a:off x="8997467" y="1517904"/>
+            <a:ext cx="2627299" cy="3054096"/>
           </a:xfrm>
           <a:prstGeom prst="roundRect">
             <a:avLst>
@@ -21777,7 +21753,7 @@
         </p:nvSpPr>
         <p:spPr>
           <a:xfrm>
-            <a:off x="8997467" y="1554480"/>
+            <a:off x="8997467" y="1517904"/>
             <a:ext cx="2627299" cy="41148"/>
           </a:xfrm>
           <a:prstGeom prst="rect">
@@ -21821,8 +21797,8 @@
         </p:nvSpPr>
         <p:spPr>
           <a:xfrm>
-            <a:off x="9180347" y="1737360"/>
-            <a:ext cx="2261539" cy="2084831"/>
+            <a:off x="9180347" y="1755648"/>
+            <a:ext cx="2261539" cy="2633472"/>
           </a:xfrm>
           <a:prstGeom prst="rect">
             <a:avLst/>
@@ -21840,11 +21816,11 @@
                 <a:spcPct val="112000"/>
               </a:lnSpc>
               <a:spcAft>
-                <a:spcPts val="800"/>
+                <a:spcPts val="1300"/>
               </a:spcAft>
             </a:pPr>
             <a:r>
-              <a:rPr sz="1000" b="1">
+              <a:rPr sz="1100" b="1">
                 <a:solidFill>
                   <a:srgbClr val="FF5C6C"/>
                 </a:solidFill>
@@ -21856,96 +21832,96 @@
           <a:p>
             <a:pPr algn="l">
               <a:lnSpc>
-                <a:spcPct val="110000"/>
+                <a:spcPct val="114000"/>
               </a:lnSpc>
               <a:spcAft>
-                <a:spcPts val="500"/>
+                <a:spcPts val="1500"/>
               </a:spcAft>
             </a:pPr>
             <a:r>
-              <a:rPr sz="1040" b="0">
+              <a:rPr sz="1160" b="0">
                 <a:solidFill>
                   <a:srgbClr val="EAF0F7"/>
                 </a:solidFill>
                 <a:latin typeface="Segoe UI"/>
               </a:rPr>
-              <a:t>·  FastAPI + Pydantic — typed API</a:t>
+              <a:t>·  FastAPI + Pydantic — API</a:t>
             </a:r>
           </a:p>
           <a:p>
             <a:pPr algn="l">
               <a:lnSpc>
-                <a:spcPct val="110000"/>
+                <a:spcPct val="114000"/>
               </a:lnSpc>
               <a:spcAft>
-                <a:spcPts val="500"/>
+                <a:spcPts val="1500"/>
               </a:spcAft>
             </a:pPr>
             <a:r>
-              <a:rPr sz="1040" b="0">
+              <a:rPr sz="1160" b="0">
                 <a:solidFill>
                   <a:srgbClr val="EAF0F7"/>
                 </a:solidFill>
                 <a:latin typeface="Segoe UI"/>
               </a:rPr>
-              <a:t>·  Docker — container image</a:t>
+              <a:t>·  Docker — container</a:t>
             </a:r>
           </a:p>
           <a:p>
             <a:pPr algn="l">
               <a:lnSpc>
-                <a:spcPct val="110000"/>
+                <a:spcPct val="114000"/>
               </a:lnSpc>
               <a:spcAft>
-                <a:spcPts val="500"/>
+                <a:spcPts val="1500"/>
               </a:spcAft>
             </a:pPr>
             <a:r>
-              <a:rPr sz="1040" b="0">
+              <a:rPr sz="1160" b="0">
                 <a:solidFill>
                   <a:srgbClr val="EAF0F7"/>
                 </a:solidFill>
                 <a:latin typeface="Segoe UI"/>
               </a:rPr>
-              <a:t>·  Render — cloud hosting</a:t>
+              <a:t>·  Render — cloud host</a:t>
             </a:r>
           </a:p>
           <a:p>
             <a:pPr algn="l">
               <a:lnSpc>
-                <a:spcPct val="110000"/>
+                <a:spcPct val="114000"/>
               </a:lnSpc>
               <a:spcAft>
-                <a:spcPts val="500"/>
+                <a:spcPts val="1500"/>
               </a:spcAft>
             </a:pPr>
             <a:r>
-              <a:rPr sz="1040" b="0">
+              <a:rPr sz="1160" b="0">
                 <a:solidFill>
                   <a:srgbClr val="EAF0F7"/>
                 </a:solidFill>
                 <a:latin typeface="Segoe UI"/>
               </a:rPr>
-              <a:t>·  Git &amp; GitHub — version control</a:t>
+              <a:t>·  Git &amp; GitHub — versioning</a:t>
             </a:r>
           </a:p>
           <a:p>
             <a:pPr algn="l">
               <a:lnSpc>
-                <a:spcPct val="110000"/>
+                <a:spcPct val="114000"/>
               </a:lnSpc>
               <a:spcAft>
-                <a:spcPts val="500"/>
+                <a:spcPts val="1500"/>
               </a:spcAft>
             </a:pPr>
             <a:r>
-              <a:rPr sz="1040" b="0">
+              <a:rPr sz="1160" b="0">
                 <a:solidFill>
                   <a:srgbClr val="EAF0F7"/>
                 </a:solidFill>
                 <a:latin typeface="Segoe UI"/>
               </a:rPr>
-              <a:t>·  Microsoft Power BI (.pbix / .pbit)</a:t>
+              <a:t>·  Power BI (.pbix / .pbit)</a:t>
             </a:r>
           </a:p>
         </p:txBody>
@@ -21958,8 +21934,8 @@
         </p:nvSpPr>
         <p:spPr>
           <a:xfrm>
-            <a:off x="566928" y="4096511"/>
-            <a:ext cx="11057839" cy="1042415"/>
+            <a:off x="566928" y="4718304"/>
+            <a:ext cx="11057839" cy="1499615"/>
           </a:xfrm>
           <a:prstGeom prst="roundRect">
             <a:avLst>
@@ -22006,8 +21982,8 @@
         </p:nvSpPr>
         <p:spPr>
           <a:xfrm>
-            <a:off x="749808" y="4224527"/>
-            <a:ext cx="10692079" cy="804671"/>
+            <a:off x="749808" y="4846320"/>
+            <a:ext cx="10692079" cy="1261871"/>
           </a:xfrm>
           <a:prstGeom prst="rect">
             <a:avLst/>
@@ -23043,8 +23019,8 @@
         </p:nvSpPr>
         <p:spPr>
           <a:xfrm>
-            <a:off x="566928" y="1536192"/>
-            <a:ext cx="3527450" cy="3310128"/>
+            <a:off x="566928" y="1517904"/>
+            <a:ext cx="3527450" cy="4700016"/>
           </a:xfrm>
           <a:prstGeom prst="roundRect">
             <a:avLst>
@@ -23091,8 +23067,8 @@
         </p:nvSpPr>
         <p:spPr>
           <a:xfrm>
-            <a:off x="768096" y="1664207"/>
-            <a:ext cx="3125114" cy="3035808"/>
+            <a:off x="768096" y="1682495"/>
+            <a:ext cx="3125114" cy="4370831"/>
           </a:xfrm>
           <a:prstGeom prst="rect">
             <a:avLst/>
@@ -23228,8 +23204,8 @@
         </p:nvSpPr>
         <p:spPr>
           <a:xfrm>
-            <a:off x="4332122" y="1536192"/>
-            <a:ext cx="3527450" cy="3310128"/>
+            <a:off x="4332122" y="1517904"/>
+            <a:ext cx="3527450" cy="4700016"/>
           </a:xfrm>
           <a:prstGeom prst="roundRect">
             <a:avLst>
@@ -23276,8 +23252,8 @@
         </p:nvSpPr>
         <p:spPr>
           <a:xfrm>
-            <a:off x="4533290" y="1664207"/>
-            <a:ext cx="3125114" cy="3035808"/>
+            <a:off x="4533290" y="1682495"/>
+            <a:ext cx="3125114" cy="4370831"/>
           </a:xfrm>
           <a:prstGeom prst="rect">
             <a:avLst/>
@@ -23375,8 +23351,8 @@
         </p:nvSpPr>
         <p:spPr>
           <a:xfrm>
-            <a:off x="8097316" y="1536192"/>
-            <a:ext cx="3527450" cy="3310128"/>
+            <a:off x="8097316" y="1517904"/>
+            <a:ext cx="3527450" cy="4700016"/>
           </a:xfrm>
           <a:prstGeom prst="roundRect">
             <a:avLst>
@@ -23423,8 +23399,8 @@
         </p:nvSpPr>
         <p:spPr>
           <a:xfrm>
-            <a:off x="8298484" y="1664207"/>
-            <a:ext cx="3125114" cy="3035808"/>
+            <a:off x="8298484" y="1682495"/>
+            <a:ext cx="3125114" cy="4370831"/>
           </a:xfrm>
           <a:prstGeom prst="rect">
             <a:avLst/>
@@ -24525,8 +24501,8 @@
         </p:blipFill>
         <p:spPr>
           <a:xfrm>
-            <a:off x="2662055" y="1481328"/>
-            <a:ext cx="6867584" cy="3017520"/>
+            <a:off x="566928" y="1517904"/>
+            <a:ext cx="11057839" cy="3436210"/>
           </a:xfrm>
           <a:prstGeom prst="rect">
             <a:avLst/>
@@ -24541,8 +24517,8 @@
         </p:nvSpPr>
         <p:spPr>
           <a:xfrm>
-            <a:off x="566928" y="4608576"/>
-            <a:ext cx="11057839" cy="1042415"/>
+            <a:off x="566928" y="5596128"/>
+            <a:ext cx="11057839" cy="621792"/>
           </a:xfrm>
           <a:prstGeom prst="roundRect">
             <a:avLst>
@@ -24589,8 +24565,8 @@
         </p:nvSpPr>
         <p:spPr>
           <a:xfrm>
-            <a:off x="749808" y="4736592"/>
-            <a:ext cx="10692079" cy="804671"/>
+            <a:off x="749808" y="5724144"/>
+            <a:ext cx="10692079" cy="384048"/>
           </a:xfrm>
           <a:prstGeom prst="rect">
             <a:avLst/>
@@ -24637,7 +24613,7 @@
                 </a:solidFill>
                 <a:latin typeface="Segoe UI"/>
               </a:rPr>
-              <a:t>Act I shows the signal fading — the business problem and the data that records it. Act II is reading the signal — building the model and interrogating how far to trust it. Act III is the signal recovered — what the intelligence is worth and the product that delivers it.</a:t>
+              <a:t>Three acts — the signal fades (I), reading the signal (II), the signal recovered (III). Every slide names its phase in the footer.</a:t>
             </a:r>
           </a:p>
         </p:txBody>
@@ -25670,8 +25646,8 @@
         </p:nvSpPr>
         <p:spPr>
           <a:xfrm>
-            <a:off x="566928" y="1572768"/>
-            <a:ext cx="5321808" cy="3273552"/>
+            <a:off x="566928" y="1517904"/>
+            <a:ext cx="5321808" cy="3968496"/>
           </a:xfrm>
           <a:prstGeom prst="roundRect">
             <a:avLst>
@@ -25718,8 +25694,8 @@
         </p:nvSpPr>
         <p:spPr>
           <a:xfrm>
-            <a:off x="822960" y="1773936"/>
-            <a:ext cx="4809744" cy="2889504"/>
+            <a:off x="822960" y="1737360"/>
+            <a:ext cx="4809744" cy="3529584"/>
           </a:xfrm>
           <a:prstGeom prst="rect">
             <a:avLst/>
@@ -25813,17 +25789,55 @@
                 <a:spcPct val="116000"/>
               </a:lnSpc>
               <a:spcAft>
+                <a:spcPts val="1200"/>
+              </a:spcAft>
+            </a:pPr>
+            <a:r>
+              <a:rPr sz="1060" b="0">
+                <a:solidFill>
+                  <a:srgbClr val="EAF0F7"/>
+                </a:solidFill>
+                <a:latin typeface="Consolas"/>
+              </a:rPr>
+              <a:t>github.com/Logesh0247/RetainIQ_Signal_Ops_Console</a:t>
+            </a:r>
+          </a:p>
+          <a:p>
+            <a:pPr algn="l">
+              <a:lnSpc>
+                <a:spcPct val="118000"/>
+              </a:lnSpc>
+              <a:spcAft>
+                <a:spcPts val="1000"/>
+              </a:spcAft>
+            </a:pPr>
+            <a:r>
+              <a:rPr sz="1040" b="0">
+                <a:solidFill>
+                  <a:srgbClr val="8CA0BE"/>
+                </a:solidFill>
+                <a:latin typeface="Segoe UI"/>
+              </a:rPr>
+              <a:t>Notebooks 01–09, the Flask console, the FastAPI wrapper and the nine-test suite are all in the repository.</a:t>
+            </a:r>
+          </a:p>
+          <a:p>
+            <a:pPr algn="l">
+              <a:lnSpc>
+                <a:spcPct val="118000"/>
+              </a:lnSpc>
+              <a:spcAft>
                 <a:spcPts val="0"/>
               </a:spcAft>
             </a:pPr>
             <a:r>
-              <a:rPr sz="1060" b="0">
-                <a:solidFill>
-                  <a:srgbClr val="EAF0F7"/>
-                </a:solidFill>
-                <a:latin typeface="Consolas"/>
+              <a:rPr sz="1040" b="0">
+                <a:solidFill>
+                  <a:srgbClr val="F5A623"/>
+                </a:solidFill>
+                <a:latin typeface="Segoe UI"/>
               </a:rPr>
-              <a:t>github.com/Logesh0247/RetainIQ_Signal_Ops_Console</a:t>
+              <a:t>The host is a free tier — open it once a minute before the review so the first scan is instant.</a:t>
             </a:r>
           </a:p>
         </p:txBody>
@@ -25836,8 +25850,8 @@
         </p:nvSpPr>
         <p:spPr>
           <a:xfrm>
-            <a:off x="5980176" y="1572768"/>
-            <a:ext cx="2724912" cy="3273552"/>
+            <a:off x="5980176" y="1517904"/>
+            <a:ext cx="2724912" cy="3968496"/>
           </a:xfrm>
           <a:prstGeom prst="roundRect">
             <a:avLst>
@@ -25892,8 +25906,8 @@
         </p:blipFill>
         <p:spPr>
           <a:xfrm>
-            <a:off x="6126480" y="1737360"/>
-            <a:ext cx="2432304" cy="2432304"/>
+            <a:off x="6035040" y="1719072"/>
+            <a:ext cx="2615184" cy="2615184"/>
           </a:xfrm>
           <a:prstGeom prst="rect">
             <a:avLst/>
@@ -25908,7 +25922,7 @@
         </p:nvSpPr>
         <p:spPr>
           <a:xfrm>
-            <a:off x="6126480" y="4261104"/>
+            <a:off x="6126480" y="4864608"/>
             <a:ext cx="2432304" cy="475488"/>
           </a:xfrm>
           <a:prstGeom prst="rect">
@@ -25969,8 +25983,8 @@
         </p:nvSpPr>
         <p:spPr>
           <a:xfrm>
-            <a:off x="8796528" y="1572768"/>
-            <a:ext cx="2825496" cy="3273552"/>
+            <a:off x="8796528" y="1517904"/>
+            <a:ext cx="2825496" cy="3968496"/>
           </a:xfrm>
           <a:prstGeom prst="roundRect">
             <a:avLst>
@@ -26102,8 +26116,8 @@
         </p:nvSpPr>
         <p:spPr>
           <a:xfrm>
-            <a:off x="8979408" y="2907791"/>
-            <a:ext cx="2459736" cy="1828800"/>
+            <a:off x="8979408" y="2999232"/>
+            <a:ext cx="2459736" cy="2194560"/>
           </a:xfrm>
           <a:prstGeom prst="rect">
             <a:avLst/>
@@ -26182,7 +26196,7 @@
         </p:nvSpPr>
         <p:spPr>
           <a:xfrm>
-            <a:off x="10104120" y="5636361"/>
+            <a:off x="10104120" y="4795113"/>
             <a:ext cx="89382" cy="170992"/>
           </a:xfrm>
           <a:prstGeom prst="rect">
@@ -26226,7 +26240,7 @@
         </p:nvSpPr>
         <p:spPr>
           <a:xfrm>
-            <a:off x="10259568" y="5512003"/>
+            <a:off x="10259568" y="4670755"/>
             <a:ext cx="89382" cy="295351"/>
           </a:xfrm>
           <a:prstGeom prst="rect">
@@ -26270,7 +26284,7 @@
         </p:nvSpPr>
         <p:spPr>
           <a:xfrm>
-            <a:off x="10415016" y="5387644"/>
+            <a:off x="10415016" y="4546396"/>
             <a:ext cx="89382" cy="419709"/>
           </a:xfrm>
           <a:prstGeom prst="rect">
@@ -26314,7 +26328,7 @@
         </p:nvSpPr>
         <p:spPr>
           <a:xfrm>
-            <a:off x="10570464" y="5263286"/>
+            <a:off x="10570464" y="4422038"/>
             <a:ext cx="89382" cy="544068"/>
           </a:xfrm>
           <a:prstGeom prst="rect">
@@ -26358,7 +26372,7 @@
         </p:nvSpPr>
         <p:spPr>
           <a:xfrm>
-            <a:off x="10725912" y="5138928"/>
+            <a:off x="10725912" y="4297680"/>
             <a:ext cx="89382" cy="668426"/>
           </a:xfrm>
           <a:prstGeom prst="rect">
@@ -26402,8 +26416,8 @@
         </p:nvSpPr>
         <p:spPr>
           <a:xfrm>
-            <a:off x="566928" y="4992624"/>
-            <a:ext cx="11057839" cy="365760"/>
+            <a:off x="566928" y="5669280"/>
+            <a:ext cx="11057839" cy="548640"/>
           </a:xfrm>
           <a:prstGeom prst="rect">
             <a:avLst/>
@@ -26676,8 +26690,8 @@
         </p:nvSpPr>
         <p:spPr>
           <a:xfrm>
-            <a:off x="566928" y="1700784"/>
-            <a:ext cx="3977639" cy="457200"/>
+            <a:off x="566928" y="1517904"/>
+            <a:ext cx="3977639" cy="665683"/>
           </a:xfrm>
           <a:prstGeom prst="roundRect">
             <a:avLst>
@@ -26724,7 +26738,7 @@
         </p:nvSpPr>
         <p:spPr>
           <a:xfrm>
-            <a:off x="694944" y="1819655"/>
+            <a:off x="694944" y="1704441"/>
             <a:ext cx="3758183" cy="292608"/>
           </a:xfrm>
           <a:prstGeom prst="rect">
@@ -26747,7 +26761,7 @@
               </a:spcAft>
             </a:pPr>
             <a:r>
-              <a:rPr sz="1019" b="1">
+              <a:rPr sz="1050" b="1">
                 <a:solidFill>
                   <a:srgbClr val="8CA0BE"/>
                 </a:solidFill>
@@ -26766,8 +26780,8 @@
         </p:nvSpPr>
         <p:spPr>
           <a:xfrm>
-            <a:off x="4544568" y="1700784"/>
-            <a:ext cx="1426464" cy="457200"/>
+            <a:off x="4544568" y="1517904"/>
+            <a:ext cx="1426464" cy="665683"/>
           </a:xfrm>
           <a:prstGeom prst="roundRect">
             <a:avLst>
@@ -26814,7 +26828,7 @@
         </p:nvSpPr>
         <p:spPr>
           <a:xfrm>
-            <a:off x="4672583" y="1819655"/>
+            <a:off x="4672583" y="1704441"/>
             <a:ext cx="1207008" cy="292608"/>
           </a:xfrm>
           <a:prstGeom prst="rect">
@@ -26837,7 +26851,7 @@
               </a:spcAft>
             </a:pPr>
             <a:r>
-              <a:rPr sz="1019" b="1">
+              <a:rPr sz="1050" b="1">
                 <a:solidFill>
                   <a:srgbClr val="8CA0BE"/>
                 </a:solidFill>
@@ -26856,8 +26870,8 @@
         </p:nvSpPr>
         <p:spPr>
           <a:xfrm>
-            <a:off x="5971031" y="1700784"/>
-            <a:ext cx="1426464" cy="457200"/>
+            <a:off x="5971031" y="1517904"/>
+            <a:ext cx="1426464" cy="665683"/>
           </a:xfrm>
           <a:prstGeom prst="roundRect">
             <a:avLst>
@@ -26904,7 +26918,7 @@
         </p:nvSpPr>
         <p:spPr>
           <a:xfrm>
-            <a:off x="6099047" y="1819655"/>
+            <a:off x="6099047" y="1704441"/>
             <a:ext cx="1207008" cy="292608"/>
           </a:xfrm>
           <a:prstGeom prst="rect">
@@ -26927,7 +26941,7 @@
               </a:spcAft>
             </a:pPr>
             <a:r>
-              <a:rPr sz="1019" b="1">
+              <a:rPr sz="1050" b="1">
                 <a:solidFill>
                   <a:srgbClr val="8CA0BE"/>
                 </a:solidFill>
@@ -26946,8 +26960,8 @@
         </p:nvSpPr>
         <p:spPr>
           <a:xfrm>
-            <a:off x="7397496" y="1700784"/>
-            <a:ext cx="1298448" cy="457200"/>
+            <a:off x="7397496" y="1517904"/>
+            <a:ext cx="1298448" cy="665683"/>
           </a:xfrm>
           <a:prstGeom prst="roundRect">
             <a:avLst>
@@ -26994,7 +27008,7 @@
         </p:nvSpPr>
         <p:spPr>
           <a:xfrm>
-            <a:off x="7525512" y="1819655"/>
+            <a:off x="7525512" y="1704441"/>
             <a:ext cx="1078992" cy="292608"/>
           </a:xfrm>
           <a:prstGeom prst="rect">
@@ -27017,7 +27031,7 @@
               </a:spcAft>
             </a:pPr>
             <a:r>
-              <a:rPr sz="1019" b="1">
+              <a:rPr sz="1050" b="1">
                 <a:solidFill>
                   <a:srgbClr val="8CA0BE"/>
                 </a:solidFill>
@@ -27036,8 +27050,8 @@
         </p:nvSpPr>
         <p:spPr>
           <a:xfrm>
-            <a:off x="8695944" y="1700784"/>
-            <a:ext cx="1298448" cy="457200"/>
+            <a:off x="8695944" y="1517904"/>
+            <a:ext cx="1298448" cy="665683"/>
           </a:xfrm>
           <a:prstGeom prst="roundRect">
             <a:avLst>
@@ -27084,7 +27098,7 @@
         </p:nvSpPr>
         <p:spPr>
           <a:xfrm>
-            <a:off x="8823960" y="1819655"/>
+            <a:off x="8823960" y="1704441"/>
             <a:ext cx="1078992" cy="292608"/>
           </a:xfrm>
           <a:prstGeom prst="rect">
@@ -27107,7 +27121,7 @@
               </a:spcAft>
             </a:pPr>
             <a:r>
-              <a:rPr sz="1019" b="1">
+              <a:rPr sz="1050" b="1">
                 <a:solidFill>
                   <a:srgbClr val="8CA0BE"/>
                 </a:solidFill>
@@ -27126,8 +27140,8 @@
         </p:nvSpPr>
         <p:spPr>
           <a:xfrm>
-            <a:off x="9994392" y="1700784"/>
-            <a:ext cx="1636776" cy="457200"/>
+            <a:off x="9994392" y="1517904"/>
+            <a:ext cx="1636776" cy="665683"/>
           </a:xfrm>
           <a:prstGeom prst="roundRect">
             <a:avLst>
@@ -27174,7 +27188,7 @@
         </p:nvSpPr>
         <p:spPr>
           <a:xfrm>
-            <a:off x="10122408" y="1819655"/>
+            <a:off x="10122408" y="1704441"/>
             <a:ext cx="1417320" cy="292608"/>
           </a:xfrm>
           <a:prstGeom prst="rect">
@@ -27197,7 +27211,7 @@
               </a:spcAft>
             </a:pPr>
             <a:r>
-              <a:rPr sz="1019" b="1">
+              <a:rPr sz="1050" b="1">
                 <a:solidFill>
                   <a:srgbClr val="8CA0BE"/>
                 </a:solidFill>
@@ -27216,8 +27230,8 @@
         </p:nvSpPr>
         <p:spPr>
           <a:xfrm>
-            <a:off x="566928" y="2249424"/>
-            <a:ext cx="3977639" cy="493776"/>
+            <a:off x="566928" y="2197303"/>
+            <a:ext cx="3977639" cy="665683"/>
           </a:xfrm>
           <a:prstGeom prst="roundRect">
             <a:avLst>
@@ -27264,7 +27278,7 @@
         </p:nvSpPr>
         <p:spPr>
           <a:xfrm>
-            <a:off x="694944" y="2368296"/>
+            <a:off x="694944" y="2383840"/>
             <a:ext cx="3758183" cy="292608"/>
           </a:xfrm>
           <a:prstGeom prst="rect">
@@ -27287,7 +27301,7 @@
               </a:spcAft>
             </a:pPr>
             <a:r>
-              <a:rPr sz="1100" b="1">
+              <a:rPr sz="1150" b="1">
                 <a:solidFill>
                   <a:srgbClr val="EAF0F7"/>
                 </a:solidFill>
@@ -27306,8 +27320,8 @@
         </p:nvSpPr>
         <p:spPr>
           <a:xfrm>
-            <a:off x="4544568" y="2249424"/>
-            <a:ext cx="1426464" cy="493776"/>
+            <a:off x="4544568" y="2197303"/>
+            <a:ext cx="1426464" cy="665683"/>
           </a:xfrm>
           <a:prstGeom prst="roundRect">
             <a:avLst>
@@ -27354,7 +27368,7 @@
         </p:nvSpPr>
         <p:spPr>
           <a:xfrm>
-            <a:off x="4672583" y="2368296"/>
+            <a:off x="4672583" y="2383840"/>
             <a:ext cx="1207008" cy="292608"/>
           </a:xfrm>
           <a:prstGeom prst="rect">
@@ -27377,7 +27391,7 @@
               </a:spcAft>
             </a:pPr>
             <a:r>
-              <a:rPr sz="1100" b="0">
+              <a:rPr sz="1150" b="0">
                 <a:solidFill>
                   <a:srgbClr val="2FD8B4"/>
                 </a:solidFill>
@@ -27396,8 +27410,8 @@
         </p:nvSpPr>
         <p:spPr>
           <a:xfrm>
-            <a:off x="5971031" y="2249424"/>
-            <a:ext cx="1426464" cy="493776"/>
+            <a:off x="5971031" y="2197303"/>
+            <a:ext cx="1426464" cy="665683"/>
           </a:xfrm>
           <a:prstGeom prst="roundRect">
             <a:avLst>
@@ -27444,7 +27458,7 @@
         </p:nvSpPr>
         <p:spPr>
           <a:xfrm>
-            <a:off x="6099047" y="2368296"/>
+            <a:off x="6099047" y="2383840"/>
             <a:ext cx="1207008" cy="292608"/>
           </a:xfrm>
           <a:prstGeom prst="rect">
@@ -27467,7 +27481,7 @@
               </a:spcAft>
             </a:pPr>
             <a:r>
-              <a:rPr sz="1100" b="0">
+              <a:rPr sz="1150" b="0">
                 <a:solidFill>
                   <a:srgbClr val="2FD8B4"/>
                 </a:solidFill>
@@ -27486,8 +27500,8 @@
         </p:nvSpPr>
         <p:spPr>
           <a:xfrm>
-            <a:off x="7397496" y="2249424"/>
-            <a:ext cx="1298448" cy="493776"/>
+            <a:off x="7397496" y="2197303"/>
+            <a:ext cx="1298448" cy="665683"/>
           </a:xfrm>
           <a:prstGeom prst="roundRect">
             <a:avLst>
@@ -27534,7 +27548,7 @@
         </p:nvSpPr>
         <p:spPr>
           <a:xfrm>
-            <a:off x="7525512" y="2368296"/>
+            <a:off x="7525512" y="2383840"/>
             <a:ext cx="1078992" cy="292608"/>
           </a:xfrm>
           <a:prstGeom prst="rect">
@@ -27557,7 +27571,7 @@
               </a:spcAft>
             </a:pPr>
             <a:r>
-              <a:rPr sz="1100" b="0">
+              <a:rPr sz="1150" b="0">
                 <a:solidFill>
                   <a:srgbClr val="2FD8B4"/>
                 </a:solidFill>
@@ -27576,8 +27590,8 @@
         </p:nvSpPr>
         <p:spPr>
           <a:xfrm>
-            <a:off x="8695944" y="2249424"/>
-            <a:ext cx="1298448" cy="493776"/>
+            <a:off x="8695944" y="2197303"/>
+            <a:ext cx="1298448" cy="665683"/>
           </a:xfrm>
           <a:prstGeom prst="roundRect">
             <a:avLst>
@@ -27624,7 +27638,7 @@
         </p:nvSpPr>
         <p:spPr>
           <a:xfrm>
-            <a:off x="8823960" y="2368296"/>
+            <a:off x="8823960" y="2383840"/>
             <a:ext cx="1078992" cy="292608"/>
           </a:xfrm>
           <a:prstGeom prst="rect">
@@ -27647,7 +27661,7 @@
               </a:spcAft>
             </a:pPr>
             <a:r>
-              <a:rPr sz="1100" b="0">
+              <a:rPr sz="1150" b="0">
                 <a:solidFill>
                   <a:srgbClr val="2FD8B4"/>
                 </a:solidFill>
@@ -27666,8 +27680,8 @@
         </p:nvSpPr>
         <p:spPr>
           <a:xfrm>
-            <a:off x="9994392" y="2249424"/>
-            <a:ext cx="1636776" cy="493776"/>
+            <a:off x="9994392" y="2197303"/>
+            <a:ext cx="1636776" cy="665683"/>
           </a:xfrm>
           <a:prstGeom prst="roundRect">
             <a:avLst>
@@ -27714,7 +27728,7 @@
         </p:nvSpPr>
         <p:spPr>
           <a:xfrm>
-            <a:off x="10122408" y="2368296"/>
+            <a:off x="10122408" y="2383840"/>
             <a:ext cx="1417320" cy="292608"/>
           </a:xfrm>
           <a:prstGeom prst="rect">
@@ -27737,7 +27751,7 @@
               </a:spcAft>
             </a:pPr>
             <a:r>
-              <a:rPr sz="1100" b="0">
+              <a:rPr sz="1150" b="0">
                 <a:solidFill>
                   <a:srgbClr val="2FD8B4"/>
                 </a:solidFill>
@@ -27756,8 +27770,8 @@
         </p:nvSpPr>
         <p:spPr>
           <a:xfrm>
-            <a:off x="566928" y="2798064"/>
-            <a:ext cx="3977639" cy="493776"/>
+            <a:off x="566928" y="2876702"/>
+            <a:ext cx="3977639" cy="665683"/>
           </a:xfrm>
           <a:prstGeom prst="roundRect">
             <a:avLst>
@@ -27804,7 +27818,7 @@
         </p:nvSpPr>
         <p:spPr>
           <a:xfrm>
-            <a:off x="694944" y="2916936"/>
+            <a:off x="694944" y="3063240"/>
             <a:ext cx="3758183" cy="292608"/>
           </a:xfrm>
           <a:prstGeom prst="rect">
@@ -27827,7 +27841,7 @@
               </a:spcAft>
             </a:pPr>
             <a:r>
-              <a:rPr sz="1100" b="0">
+              <a:rPr sz="1150" b="0">
                 <a:solidFill>
                   <a:srgbClr val="EAF0F7"/>
                 </a:solidFill>
@@ -27846,8 +27860,8 @@
         </p:nvSpPr>
         <p:spPr>
           <a:xfrm>
-            <a:off x="4544568" y="2798064"/>
-            <a:ext cx="1426464" cy="493776"/>
+            <a:off x="4544568" y="2876702"/>
+            <a:ext cx="1426464" cy="665683"/>
           </a:xfrm>
           <a:prstGeom prst="roundRect">
             <a:avLst>
@@ -27894,7 +27908,7 @@
         </p:nvSpPr>
         <p:spPr>
           <a:xfrm>
-            <a:off x="4672583" y="2916936"/>
+            <a:off x="4672583" y="3063240"/>
             <a:ext cx="1207008" cy="292608"/>
           </a:xfrm>
           <a:prstGeom prst="rect">
@@ -27917,7 +27931,7 @@
               </a:spcAft>
             </a:pPr>
             <a:r>
-              <a:rPr sz="1100" b="0">
+              <a:rPr sz="1150" b="0">
                 <a:solidFill>
                   <a:srgbClr val="EAF0F7"/>
                 </a:solidFill>
@@ -27936,8 +27950,8 @@
         </p:nvSpPr>
         <p:spPr>
           <a:xfrm>
-            <a:off x="5971031" y="2798064"/>
-            <a:ext cx="1426464" cy="493776"/>
+            <a:off x="5971031" y="2876702"/>
+            <a:ext cx="1426464" cy="665683"/>
           </a:xfrm>
           <a:prstGeom prst="roundRect">
             <a:avLst>
@@ -27984,7 +27998,7 @@
         </p:nvSpPr>
         <p:spPr>
           <a:xfrm>
-            <a:off x="6099047" y="2916936"/>
+            <a:off x="6099047" y="3063240"/>
             <a:ext cx="1207008" cy="292608"/>
           </a:xfrm>
           <a:prstGeom prst="rect">
@@ -28007,7 +28021,7 @@
               </a:spcAft>
             </a:pPr>
             <a:r>
-              <a:rPr sz="1100" b="0">
+              <a:rPr sz="1150" b="0">
                 <a:solidFill>
                   <a:srgbClr val="EAF0F7"/>
                 </a:solidFill>
@@ -28026,8 +28040,8 @@
         </p:nvSpPr>
         <p:spPr>
           <a:xfrm>
-            <a:off x="7397496" y="2798064"/>
-            <a:ext cx="1298448" cy="493776"/>
+            <a:off x="7397496" y="2876702"/>
+            <a:ext cx="1298448" cy="665683"/>
           </a:xfrm>
           <a:prstGeom prst="roundRect">
             <a:avLst>
@@ -28074,7 +28088,7 @@
         </p:nvSpPr>
         <p:spPr>
           <a:xfrm>
-            <a:off x="7525512" y="2916936"/>
+            <a:off x="7525512" y="3063240"/>
             <a:ext cx="1078992" cy="292608"/>
           </a:xfrm>
           <a:prstGeom prst="rect">
@@ -28097,7 +28111,7 @@
               </a:spcAft>
             </a:pPr>
             <a:r>
-              <a:rPr sz="1100" b="0">
+              <a:rPr sz="1150" b="0">
                 <a:solidFill>
                   <a:srgbClr val="EAF0F7"/>
                 </a:solidFill>
@@ -28116,8 +28130,8 @@
         </p:nvSpPr>
         <p:spPr>
           <a:xfrm>
-            <a:off x="8695944" y="2798064"/>
-            <a:ext cx="1298448" cy="493776"/>
+            <a:off x="8695944" y="2876702"/>
+            <a:ext cx="1298448" cy="665683"/>
           </a:xfrm>
           <a:prstGeom prst="roundRect">
             <a:avLst>
@@ -28164,7 +28178,7 @@
         </p:nvSpPr>
         <p:spPr>
           <a:xfrm>
-            <a:off x="8823960" y="2916936"/>
+            <a:off x="8823960" y="3063240"/>
             <a:ext cx="1078992" cy="292608"/>
           </a:xfrm>
           <a:prstGeom prst="rect">
@@ -28187,7 +28201,7 @@
               </a:spcAft>
             </a:pPr>
             <a:r>
-              <a:rPr sz="1100" b="0">
+              <a:rPr sz="1150" b="0">
                 <a:solidFill>
                   <a:srgbClr val="EAF0F7"/>
                 </a:solidFill>
@@ -28206,8 +28220,8 @@
         </p:nvSpPr>
         <p:spPr>
           <a:xfrm>
-            <a:off x="9994392" y="2798064"/>
-            <a:ext cx="1636776" cy="493776"/>
+            <a:off x="9994392" y="2876702"/>
+            <a:ext cx="1636776" cy="665683"/>
           </a:xfrm>
           <a:prstGeom prst="roundRect">
             <a:avLst>
@@ -28254,7 +28268,7 @@
         </p:nvSpPr>
         <p:spPr>
           <a:xfrm>
-            <a:off x="10122408" y="2916936"/>
+            <a:off x="10122408" y="3063240"/>
             <a:ext cx="1417320" cy="292608"/>
           </a:xfrm>
           <a:prstGeom prst="rect">
@@ -28277,7 +28291,7 @@
               </a:spcAft>
             </a:pPr>
             <a:r>
-              <a:rPr sz="1100" b="0">
+              <a:rPr sz="1150" b="0">
                 <a:solidFill>
                   <a:srgbClr val="EAF0F7"/>
                 </a:solidFill>
@@ -28296,8 +28310,8 @@
         </p:nvSpPr>
         <p:spPr>
           <a:xfrm>
-            <a:off x="566928" y="3346704"/>
-            <a:ext cx="3977639" cy="493776"/>
+            <a:off x="566928" y="3556101"/>
+            <a:ext cx="3977639" cy="665683"/>
           </a:xfrm>
           <a:prstGeom prst="roundRect">
             <a:avLst>
@@ -28344,7 +28358,7 @@
         </p:nvSpPr>
         <p:spPr>
           <a:xfrm>
-            <a:off x="694944" y="3465576"/>
+            <a:off x="694944" y="3742639"/>
             <a:ext cx="3758183" cy="292608"/>
           </a:xfrm>
           <a:prstGeom prst="rect">
@@ -28367,7 +28381,7 @@
               </a:spcAft>
             </a:pPr>
             <a:r>
-              <a:rPr sz="1100" b="0">
+              <a:rPr sz="1150" b="0">
                 <a:solidFill>
                   <a:srgbClr val="EAF0F7"/>
                 </a:solidFill>
@@ -28386,8 +28400,8 @@
         </p:nvSpPr>
         <p:spPr>
           <a:xfrm>
-            <a:off x="4544568" y="3346704"/>
-            <a:ext cx="1426464" cy="493776"/>
+            <a:off x="4544568" y="3556101"/>
+            <a:ext cx="1426464" cy="665683"/>
           </a:xfrm>
           <a:prstGeom prst="roundRect">
             <a:avLst>
@@ -28434,7 +28448,7 @@
         </p:nvSpPr>
         <p:spPr>
           <a:xfrm>
-            <a:off x="4672583" y="3465576"/>
+            <a:off x="4672583" y="3742639"/>
             <a:ext cx="1207008" cy="292608"/>
           </a:xfrm>
           <a:prstGeom prst="rect">
@@ -28457,7 +28471,7 @@
               </a:spcAft>
             </a:pPr>
             <a:r>
-              <a:rPr sz="1100" b="0">
+              <a:rPr sz="1150" b="0">
                 <a:solidFill>
                   <a:srgbClr val="EAF0F7"/>
                 </a:solidFill>
@@ -28476,8 +28490,8 @@
         </p:nvSpPr>
         <p:spPr>
           <a:xfrm>
-            <a:off x="5971031" y="3346704"/>
-            <a:ext cx="1426464" cy="493776"/>
+            <a:off x="5971031" y="3556101"/>
+            <a:ext cx="1426464" cy="665683"/>
           </a:xfrm>
           <a:prstGeom prst="roundRect">
             <a:avLst>
@@ -28524,7 +28538,7 @@
         </p:nvSpPr>
         <p:spPr>
           <a:xfrm>
-            <a:off x="6099047" y="3465576"/>
+            <a:off x="6099047" y="3742639"/>
             <a:ext cx="1207008" cy="292608"/>
           </a:xfrm>
           <a:prstGeom prst="rect">
@@ -28547,7 +28561,7 @@
               </a:spcAft>
             </a:pPr>
             <a:r>
-              <a:rPr sz="1100" b="0">
+              <a:rPr sz="1150" b="0">
                 <a:solidFill>
                   <a:srgbClr val="EAF0F7"/>
                 </a:solidFill>
@@ -28566,8 +28580,8 @@
         </p:nvSpPr>
         <p:spPr>
           <a:xfrm>
-            <a:off x="7397496" y="3346704"/>
-            <a:ext cx="1298448" cy="493776"/>
+            <a:off x="7397496" y="3556101"/>
+            <a:ext cx="1298448" cy="665683"/>
           </a:xfrm>
           <a:prstGeom prst="roundRect">
             <a:avLst>
@@ -28614,7 +28628,7 @@
         </p:nvSpPr>
         <p:spPr>
           <a:xfrm>
-            <a:off x="7525512" y="3465576"/>
+            <a:off x="7525512" y="3742639"/>
             <a:ext cx="1078992" cy="292608"/>
           </a:xfrm>
           <a:prstGeom prst="rect">
@@ -28637,7 +28651,7 @@
               </a:spcAft>
             </a:pPr>
             <a:r>
-              <a:rPr sz="1100" b="0">
+              <a:rPr sz="1150" b="0">
                 <a:solidFill>
                   <a:srgbClr val="EAF0F7"/>
                 </a:solidFill>
@@ -28656,8 +28670,8 @@
         </p:nvSpPr>
         <p:spPr>
           <a:xfrm>
-            <a:off x="8695944" y="3346704"/>
-            <a:ext cx="1298448" cy="493776"/>
+            <a:off x="8695944" y="3556101"/>
+            <a:ext cx="1298448" cy="665683"/>
           </a:xfrm>
           <a:prstGeom prst="roundRect">
             <a:avLst>
@@ -28704,7 +28718,7 @@
         </p:nvSpPr>
         <p:spPr>
           <a:xfrm>
-            <a:off x="8823960" y="3465576"/>
+            <a:off x="8823960" y="3742639"/>
             <a:ext cx="1078992" cy="292608"/>
           </a:xfrm>
           <a:prstGeom prst="rect">
@@ -28727,7 +28741,7 @@
               </a:spcAft>
             </a:pPr>
             <a:r>
-              <a:rPr sz="1100" b="0">
+              <a:rPr sz="1150" b="0">
                 <a:solidFill>
                   <a:srgbClr val="EAF0F7"/>
                 </a:solidFill>
@@ -28746,8 +28760,8 @@
         </p:nvSpPr>
         <p:spPr>
           <a:xfrm>
-            <a:off x="9994392" y="3346704"/>
-            <a:ext cx="1636776" cy="493776"/>
+            <a:off x="9994392" y="3556101"/>
+            <a:ext cx="1636776" cy="665683"/>
           </a:xfrm>
           <a:prstGeom prst="roundRect">
             <a:avLst>
@@ -28794,7 +28808,7 @@
         </p:nvSpPr>
         <p:spPr>
           <a:xfrm>
-            <a:off x="10122408" y="3465576"/>
+            <a:off x="10122408" y="3742639"/>
             <a:ext cx="1417320" cy="292608"/>
           </a:xfrm>
           <a:prstGeom prst="rect">
@@ -28817,7 +28831,7 @@
               </a:spcAft>
             </a:pPr>
             <a:r>
-              <a:rPr sz="1100" b="0">
+              <a:rPr sz="1150" b="0">
                 <a:solidFill>
                   <a:srgbClr val="EAF0F7"/>
                 </a:solidFill>
@@ -28836,8 +28850,8 @@
         </p:nvSpPr>
         <p:spPr>
           <a:xfrm>
-            <a:off x="566928" y="3895344"/>
-            <a:ext cx="3977639" cy="493776"/>
+            <a:off x="566928" y="4235500"/>
+            <a:ext cx="3977639" cy="665683"/>
           </a:xfrm>
           <a:prstGeom prst="roundRect">
             <a:avLst>
@@ -28884,7 +28898,7 @@
         </p:nvSpPr>
         <p:spPr>
           <a:xfrm>
-            <a:off x="694944" y="4014215"/>
+            <a:off x="694944" y="4422038"/>
             <a:ext cx="3758183" cy="292608"/>
           </a:xfrm>
           <a:prstGeom prst="rect">
@@ -28907,7 +28921,7 @@
               </a:spcAft>
             </a:pPr>
             <a:r>
-              <a:rPr sz="1100" b="0">
+              <a:rPr sz="1150" b="0">
                 <a:solidFill>
                   <a:srgbClr val="EAF0F7"/>
                 </a:solidFill>
@@ -28926,8 +28940,8 @@
         </p:nvSpPr>
         <p:spPr>
           <a:xfrm>
-            <a:off x="4544568" y="3895344"/>
-            <a:ext cx="1426464" cy="493776"/>
+            <a:off x="4544568" y="4235500"/>
+            <a:ext cx="1426464" cy="665683"/>
           </a:xfrm>
           <a:prstGeom prst="roundRect">
             <a:avLst>
@@ -28974,7 +28988,7 @@
         </p:nvSpPr>
         <p:spPr>
           <a:xfrm>
-            <a:off x="4672583" y="4014215"/>
+            <a:off x="4672583" y="4422038"/>
             <a:ext cx="1207008" cy="292608"/>
           </a:xfrm>
           <a:prstGeom prst="rect">
@@ -28997,7 +29011,7 @@
               </a:spcAft>
             </a:pPr>
             <a:r>
-              <a:rPr sz="1100" b="0">
+              <a:rPr sz="1150" b="0">
                 <a:solidFill>
                   <a:srgbClr val="EAF0F7"/>
                 </a:solidFill>
@@ -29016,8 +29030,8 @@
         </p:nvSpPr>
         <p:spPr>
           <a:xfrm>
-            <a:off x="5971031" y="3895344"/>
-            <a:ext cx="1426464" cy="493776"/>
+            <a:off x="5971031" y="4235500"/>
+            <a:ext cx="1426464" cy="665683"/>
           </a:xfrm>
           <a:prstGeom prst="roundRect">
             <a:avLst>
@@ -29064,7 +29078,7 @@
         </p:nvSpPr>
         <p:spPr>
           <a:xfrm>
-            <a:off x="6099047" y="4014215"/>
+            <a:off x="6099047" y="4422038"/>
             <a:ext cx="1207008" cy="292608"/>
           </a:xfrm>
           <a:prstGeom prst="rect">
@@ -29087,7 +29101,7 @@
               </a:spcAft>
             </a:pPr>
             <a:r>
-              <a:rPr sz="1100" b="0">
+              <a:rPr sz="1150" b="0">
                 <a:solidFill>
                   <a:srgbClr val="EAF0F7"/>
                 </a:solidFill>
@@ -29106,8 +29120,8 @@
         </p:nvSpPr>
         <p:spPr>
           <a:xfrm>
-            <a:off x="7397496" y="3895344"/>
-            <a:ext cx="1298448" cy="493776"/>
+            <a:off x="7397496" y="4235500"/>
+            <a:ext cx="1298448" cy="665683"/>
           </a:xfrm>
           <a:prstGeom prst="roundRect">
             <a:avLst>
@@ -29154,7 +29168,7 @@
         </p:nvSpPr>
         <p:spPr>
           <a:xfrm>
-            <a:off x="7525512" y="4014215"/>
+            <a:off x="7525512" y="4422038"/>
             <a:ext cx="1078992" cy="292608"/>
           </a:xfrm>
           <a:prstGeom prst="rect">
@@ -29177,7 +29191,7 @@
               </a:spcAft>
             </a:pPr>
             <a:r>
-              <a:rPr sz="1100" b="0">
+              <a:rPr sz="1150" b="0">
                 <a:solidFill>
                   <a:srgbClr val="EAF0F7"/>
                 </a:solidFill>
@@ -29196,8 +29210,8 @@
         </p:nvSpPr>
         <p:spPr>
           <a:xfrm>
-            <a:off x="8695944" y="3895344"/>
-            <a:ext cx="1298448" cy="493776"/>
+            <a:off x="8695944" y="4235500"/>
+            <a:ext cx="1298448" cy="665683"/>
           </a:xfrm>
           <a:prstGeom prst="roundRect">
             <a:avLst>
@@ -29244,7 +29258,7 @@
         </p:nvSpPr>
         <p:spPr>
           <a:xfrm>
-            <a:off x="8823960" y="4014215"/>
+            <a:off x="8823960" y="4422038"/>
             <a:ext cx="1078992" cy="292608"/>
           </a:xfrm>
           <a:prstGeom prst="rect">
@@ -29267,7 +29281,7 @@
               </a:spcAft>
             </a:pPr>
             <a:r>
-              <a:rPr sz="1100" b="0">
+              <a:rPr sz="1150" b="0">
                 <a:solidFill>
                   <a:srgbClr val="EAF0F7"/>
                 </a:solidFill>
@@ -29286,8 +29300,8 @@
         </p:nvSpPr>
         <p:spPr>
           <a:xfrm>
-            <a:off x="9994392" y="3895344"/>
-            <a:ext cx="1636776" cy="493776"/>
+            <a:off x="9994392" y="4235500"/>
+            <a:ext cx="1636776" cy="665683"/>
           </a:xfrm>
           <a:prstGeom prst="roundRect">
             <a:avLst>
@@ -29334,7 +29348,7 @@
         </p:nvSpPr>
         <p:spPr>
           <a:xfrm>
-            <a:off x="10122408" y="4014215"/>
+            <a:off x="10122408" y="4422038"/>
             <a:ext cx="1417320" cy="292608"/>
           </a:xfrm>
           <a:prstGeom prst="rect">
@@ -29357,7 +29371,7 @@
               </a:spcAft>
             </a:pPr>
             <a:r>
-              <a:rPr sz="1100" b="0">
+              <a:rPr sz="1150" b="0">
                 <a:solidFill>
                   <a:srgbClr val="EAF0F7"/>
                 </a:solidFill>
@@ -29376,8 +29390,8 @@
         </p:nvSpPr>
         <p:spPr>
           <a:xfrm>
-            <a:off x="566928" y="4754879"/>
-            <a:ext cx="11057839" cy="1280160"/>
+            <a:off x="566928" y="5047488"/>
+            <a:ext cx="11057839" cy="1170431"/>
           </a:xfrm>
           <a:prstGeom prst="rect">
             <a:avLst/>
@@ -30413,8 +30427,8 @@
         </p:nvSpPr>
         <p:spPr>
           <a:xfrm>
-            <a:off x="566928" y="1700784"/>
-            <a:ext cx="3291840" cy="493776"/>
+            <a:off x="566928" y="1517904"/>
+            <a:ext cx="3291840" cy="594360"/>
           </a:xfrm>
           <a:prstGeom prst="roundRect">
             <a:avLst>
@@ -30461,8 +30475,8 @@
         </p:nvSpPr>
         <p:spPr>
           <a:xfrm>
-            <a:off x="3858768" y="1700784"/>
-            <a:ext cx="7763256" cy="493776"/>
+            <a:off x="3858768" y="1517904"/>
+            <a:ext cx="7763256" cy="594360"/>
           </a:xfrm>
           <a:prstGeom prst="roundRect">
             <a:avLst>
@@ -30509,7 +30523,7 @@
         </p:nvSpPr>
         <p:spPr>
           <a:xfrm>
-            <a:off x="713232" y="1837943"/>
+            <a:off x="713232" y="1677924"/>
             <a:ext cx="3063240" cy="274320"/>
           </a:xfrm>
           <a:prstGeom prst="rect">
@@ -30551,7 +30565,7 @@
         </p:nvSpPr>
         <p:spPr>
           <a:xfrm>
-            <a:off x="4005072" y="1837943"/>
+            <a:off x="4005072" y="1677924"/>
             <a:ext cx="7498079" cy="274320"/>
           </a:xfrm>
           <a:prstGeom prst="rect">
@@ -30574,7 +30588,7 @@
               </a:spcAft>
             </a:pPr>
             <a:r>
-              <a:rPr sz="1019" b="1">
+              <a:rPr sz="1040" b="1">
                 <a:solidFill>
                   <a:srgbClr val="8CA0BE"/>
                 </a:solidFill>
@@ -30593,8 +30607,8 @@
         </p:nvSpPr>
         <p:spPr>
           <a:xfrm>
-            <a:off x="566928" y="2267712"/>
-            <a:ext cx="3291840" cy="493776"/>
+            <a:off x="566928" y="2123236"/>
+            <a:ext cx="3291840" cy="594360"/>
           </a:xfrm>
           <a:prstGeom prst="roundRect">
             <a:avLst>
@@ -30641,8 +30655,8 @@
         </p:nvSpPr>
         <p:spPr>
           <a:xfrm>
-            <a:off x="3858768" y="2267712"/>
-            <a:ext cx="7763256" cy="493776"/>
+            <a:off x="3858768" y="2123236"/>
+            <a:ext cx="7763256" cy="594360"/>
           </a:xfrm>
           <a:prstGeom prst="roundRect">
             <a:avLst>
@@ -30689,7 +30703,7 @@
         </p:nvSpPr>
         <p:spPr>
           <a:xfrm>
-            <a:off x="713232" y="2404872"/>
+            <a:off x="713232" y="2283256"/>
             <a:ext cx="3063240" cy="274320"/>
           </a:xfrm>
           <a:prstGeom prst="rect">
@@ -30731,7 +30745,7 @@
         </p:nvSpPr>
         <p:spPr>
           <a:xfrm>
-            <a:off x="4005072" y="2404872"/>
+            <a:off x="4005072" y="2283256"/>
             <a:ext cx="7498079" cy="274320"/>
           </a:xfrm>
           <a:prstGeom prst="rect">
@@ -30754,7 +30768,7 @@
               </a:spcAft>
             </a:pPr>
             <a:r>
-              <a:rPr sz="1019" b="0">
+              <a:rPr sz="1040" b="0">
                 <a:solidFill>
                   <a:srgbClr val="2FD8B4"/>
                 </a:solidFill>
@@ -30773,8 +30787,8 @@
         </p:nvSpPr>
         <p:spPr>
           <a:xfrm>
-            <a:off x="566928" y="2834640"/>
-            <a:ext cx="3291840" cy="493776"/>
+            <a:off x="566928" y="2728569"/>
+            <a:ext cx="3291840" cy="594360"/>
           </a:xfrm>
           <a:prstGeom prst="roundRect">
             <a:avLst>
@@ -30821,8 +30835,8 @@
         </p:nvSpPr>
         <p:spPr>
           <a:xfrm>
-            <a:off x="3858768" y="2834640"/>
-            <a:ext cx="7763256" cy="493776"/>
+            <a:off x="3858768" y="2728569"/>
+            <a:ext cx="7763256" cy="594360"/>
           </a:xfrm>
           <a:prstGeom prst="roundRect">
             <a:avLst>
@@ -30869,7 +30883,7 @@
         </p:nvSpPr>
         <p:spPr>
           <a:xfrm>
-            <a:off x="713232" y="2971800"/>
+            <a:off x="713232" y="2888589"/>
             <a:ext cx="3063240" cy="274320"/>
           </a:xfrm>
           <a:prstGeom prst="rect">
@@ -30911,7 +30925,7 @@
         </p:nvSpPr>
         <p:spPr>
           <a:xfrm>
-            <a:off x="4005072" y="2971800"/>
+            <a:off x="4005072" y="2888589"/>
             <a:ext cx="7498079" cy="274320"/>
           </a:xfrm>
           <a:prstGeom prst="rect">
@@ -30934,7 +30948,7 @@
               </a:spcAft>
             </a:pPr>
             <a:r>
-              <a:rPr sz="1019" b="0">
+              <a:rPr sz="1040" b="0">
                 <a:solidFill>
                   <a:srgbClr val="2FD8B4"/>
                 </a:solidFill>
@@ -30953,8 +30967,8 @@
         </p:nvSpPr>
         <p:spPr>
           <a:xfrm>
-            <a:off x="566928" y="3401568"/>
-            <a:ext cx="3291840" cy="493776"/>
+            <a:off x="566928" y="3333902"/>
+            <a:ext cx="3291840" cy="594360"/>
           </a:xfrm>
           <a:prstGeom prst="roundRect">
             <a:avLst>
@@ -31001,8 +31015,8 @@
         </p:nvSpPr>
         <p:spPr>
           <a:xfrm>
-            <a:off x="3858768" y="3401568"/>
-            <a:ext cx="7763256" cy="493776"/>
+            <a:off x="3858768" y="3333902"/>
+            <a:ext cx="7763256" cy="594360"/>
           </a:xfrm>
           <a:prstGeom prst="roundRect">
             <a:avLst>
@@ -31049,7 +31063,7 @@
         </p:nvSpPr>
         <p:spPr>
           <a:xfrm>
-            <a:off x="713232" y="3538728"/>
+            <a:off x="713232" y="3493922"/>
             <a:ext cx="3063240" cy="274320"/>
           </a:xfrm>
           <a:prstGeom prst="rect">
@@ -31091,7 +31105,7 @@
         </p:nvSpPr>
         <p:spPr>
           <a:xfrm>
-            <a:off x="4005072" y="3538728"/>
+            <a:off x="4005072" y="3493922"/>
             <a:ext cx="7498079" cy="274320"/>
           </a:xfrm>
           <a:prstGeom prst="rect">
@@ -31114,7 +31128,7 @@
               </a:spcAft>
             </a:pPr>
             <a:r>
-              <a:rPr sz="1019" b="0">
+              <a:rPr sz="1040" b="0">
                 <a:solidFill>
                   <a:srgbClr val="2FD8B4"/>
                 </a:solidFill>
@@ -31133,8 +31147,8 @@
         </p:nvSpPr>
         <p:spPr>
           <a:xfrm>
-            <a:off x="566928" y="3968496"/>
-            <a:ext cx="3291840" cy="493776"/>
+            <a:off x="566928" y="3939235"/>
+            <a:ext cx="3291840" cy="594360"/>
           </a:xfrm>
           <a:prstGeom prst="roundRect">
             <a:avLst>
@@ -31181,8 +31195,8 @@
         </p:nvSpPr>
         <p:spPr>
           <a:xfrm>
-            <a:off x="3858768" y="3968496"/>
-            <a:ext cx="7763256" cy="493776"/>
+            <a:off x="3858768" y="3939235"/>
+            <a:ext cx="7763256" cy="594360"/>
           </a:xfrm>
           <a:prstGeom prst="roundRect">
             <a:avLst>
@@ -31229,7 +31243,7 @@
         </p:nvSpPr>
         <p:spPr>
           <a:xfrm>
-            <a:off x="713232" y="4105656"/>
+            <a:off x="713232" y="4099255"/>
             <a:ext cx="3063240" cy="274320"/>
           </a:xfrm>
           <a:prstGeom prst="rect">
@@ -31271,7 +31285,7 @@
         </p:nvSpPr>
         <p:spPr>
           <a:xfrm>
-            <a:off x="4005072" y="4105656"/>
+            <a:off x="4005072" y="4099255"/>
             <a:ext cx="7498079" cy="274320"/>
           </a:xfrm>
           <a:prstGeom prst="rect">
@@ -31294,7 +31308,7 @@
               </a:spcAft>
             </a:pPr>
             <a:r>
-              <a:rPr sz="1019" b="0">
+              <a:rPr sz="1040" b="0">
                 <a:solidFill>
                   <a:srgbClr val="2FD8B4"/>
                 </a:solidFill>
@@ -31313,8 +31327,8 @@
         </p:nvSpPr>
         <p:spPr>
           <a:xfrm>
-            <a:off x="566928" y="4718304"/>
-            <a:ext cx="11057839" cy="1188720"/>
+            <a:off x="566928" y="4681728"/>
+            <a:ext cx="11057839" cy="1536192"/>
           </a:xfrm>
           <a:prstGeom prst="roundRect">
             <a:avLst>
@@ -31361,8 +31375,8 @@
         </p:nvSpPr>
         <p:spPr>
           <a:xfrm>
-            <a:off x="749808" y="4846320"/>
-            <a:ext cx="10692079" cy="950976"/>
+            <a:off x="749808" y="4809744"/>
+            <a:ext cx="10692079" cy="1298448"/>
           </a:xfrm>
           <a:prstGeom prst="rect">
             <a:avLst/>
@@ -32398,8 +32412,8 @@
         </p:nvSpPr>
         <p:spPr>
           <a:xfrm>
-            <a:off x="566928" y="1609344"/>
-            <a:ext cx="5437479" cy="4023360"/>
+            <a:off x="566928" y="1517904"/>
+            <a:ext cx="5437479" cy="4700016"/>
           </a:xfrm>
           <a:prstGeom prst="rect">
             <a:avLst/>
@@ -32417,11 +32431,11 @@
                 <a:spcPct val="112000"/>
               </a:lnSpc>
               <a:spcAft>
-                <a:spcPts val="120"/>
+                <a:spcPts val="850"/>
               </a:spcAft>
             </a:pPr>
             <a:r>
-              <a:rPr sz="940" b="0">
+              <a:rPr sz="1150" b="0">
                 <a:solidFill>
                   <a:srgbClr val="EAF0F7"/>
                 </a:solidFill>
@@ -32436,11 +32450,11 @@
                 <a:spcPct val="112000"/>
               </a:lnSpc>
               <a:spcAft>
-                <a:spcPts val="120"/>
+                <a:spcPts val="850"/>
               </a:spcAft>
             </a:pPr>
             <a:r>
-              <a:rPr sz="940" b="0">
+              <a:rPr sz="1150" b="0">
                 <a:solidFill>
                   <a:srgbClr val="EAF0F7"/>
                 </a:solidFill>
@@ -32455,11 +32469,11 @@
                 <a:spcPct val="112000"/>
               </a:lnSpc>
               <a:spcAft>
-                <a:spcPts val="120"/>
+                <a:spcPts val="850"/>
               </a:spcAft>
             </a:pPr>
             <a:r>
-              <a:rPr sz="940" b="0">
+              <a:rPr sz="1150" b="0">
                 <a:solidFill>
                   <a:srgbClr val="EAF0F7"/>
                 </a:solidFill>
@@ -32474,11 +32488,11 @@
                 <a:spcPct val="112000"/>
               </a:lnSpc>
               <a:spcAft>
-                <a:spcPts val="120"/>
+                <a:spcPts val="850"/>
               </a:spcAft>
             </a:pPr>
             <a:r>
-              <a:rPr sz="940" b="0">
+              <a:rPr sz="1150" b="0">
                 <a:solidFill>
                   <a:srgbClr val="EAF0F7"/>
                 </a:solidFill>
@@ -32493,11 +32507,11 @@
                 <a:spcPct val="112000"/>
               </a:lnSpc>
               <a:spcAft>
-                <a:spcPts val="120"/>
+                <a:spcPts val="850"/>
               </a:spcAft>
             </a:pPr>
             <a:r>
-              <a:rPr sz="940" b="0">
+              <a:rPr sz="1150" b="0">
                 <a:solidFill>
                   <a:srgbClr val="EAF0F7"/>
                 </a:solidFill>
@@ -32512,11 +32526,11 @@
                 <a:spcPct val="112000"/>
               </a:lnSpc>
               <a:spcAft>
-                <a:spcPts val="120"/>
+                <a:spcPts val="850"/>
               </a:spcAft>
             </a:pPr>
             <a:r>
-              <a:rPr sz="940" b="0">
+              <a:rPr sz="1150" b="0">
                 <a:solidFill>
                   <a:srgbClr val="EAF0F7"/>
                 </a:solidFill>
@@ -32531,11 +32545,11 @@
                 <a:spcPct val="112000"/>
               </a:lnSpc>
               <a:spcAft>
-                <a:spcPts val="120"/>
+                <a:spcPts val="850"/>
               </a:spcAft>
             </a:pPr>
             <a:r>
-              <a:rPr sz="940" b="0">
+              <a:rPr sz="1150" b="0">
                 <a:solidFill>
                   <a:srgbClr val="EAF0F7"/>
                 </a:solidFill>
@@ -32550,11 +32564,11 @@
                 <a:spcPct val="112000"/>
               </a:lnSpc>
               <a:spcAft>
-                <a:spcPts val="120"/>
+                <a:spcPts val="850"/>
               </a:spcAft>
             </a:pPr>
             <a:r>
-              <a:rPr sz="940" b="0">
+              <a:rPr sz="1150" b="0">
                 <a:solidFill>
                   <a:srgbClr val="EAF0F7"/>
                 </a:solidFill>
@@ -32569,11 +32583,11 @@
                 <a:spcPct val="112000"/>
               </a:lnSpc>
               <a:spcAft>
-                <a:spcPts val="120"/>
+                <a:spcPts val="850"/>
               </a:spcAft>
             </a:pPr>
             <a:r>
-              <a:rPr sz="940" b="0">
+              <a:rPr sz="1150" b="0">
                 <a:solidFill>
                   <a:srgbClr val="EAF0F7"/>
                 </a:solidFill>
@@ -32588,11 +32602,11 @@
                 <a:spcPct val="112000"/>
               </a:lnSpc>
               <a:spcAft>
-                <a:spcPts val="120"/>
+                <a:spcPts val="850"/>
               </a:spcAft>
             </a:pPr>
             <a:r>
-              <a:rPr sz="940" b="0">
+              <a:rPr sz="1150" b="0">
                 <a:solidFill>
                   <a:srgbClr val="EAF0F7"/>
                 </a:solidFill>
@@ -32607,11 +32621,11 @@
                 <a:spcPct val="112000"/>
               </a:lnSpc>
               <a:spcAft>
-                <a:spcPts val="120"/>
+                <a:spcPts val="850"/>
               </a:spcAft>
             </a:pPr>
             <a:r>
-              <a:rPr sz="940" b="0">
+              <a:rPr sz="1150" b="0">
                 <a:solidFill>
                   <a:srgbClr val="EAF0F7"/>
                 </a:solidFill>
@@ -32626,11 +32640,11 @@
                 <a:spcPct val="112000"/>
               </a:lnSpc>
               <a:spcAft>
-                <a:spcPts val="120"/>
+                <a:spcPts val="850"/>
               </a:spcAft>
             </a:pPr>
             <a:r>
-              <a:rPr sz="940" b="0">
+              <a:rPr sz="1150" b="0">
                 <a:solidFill>
                   <a:srgbClr val="EAF0F7"/>
                 </a:solidFill>
@@ -32645,11 +32659,11 @@
                 <a:spcPct val="112000"/>
               </a:lnSpc>
               <a:spcAft>
-                <a:spcPts val="120"/>
+                <a:spcPts val="850"/>
               </a:spcAft>
             </a:pPr>
             <a:r>
-              <a:rPr sz="940" b="0">
+              <a:rPr sz="1150" b="0">
                 <a:solidFill>
                   <a:srgbClr val="EAF0F7"/>
                 </a:solidFill>
@@ -32664,11 +32678,11 @@
                 <a:spcPct val="112000"/>
               </a:lnSpc>
               <a:spcAft>
-                <a:spcPts val="120"/>
+                <a:spcPts val="850"/>
               </a:spcAft>
             </a:pPr>
             <a:r>
-              <a:rPr sz="940" b="0">
+              <a:rPr sz="1150" b="0">
                 <a:solidFill>
                   <a:srgbClr val="EAF0F7"/>
                 </a:solidFill>
@@ -32683,11 +32697,11 @@
                 <a:spcPct val="112000"/>
               </a:lnSpc>
               <a:spcAft>
-                <a:spcPts val="120"/>
+                <a:spcPts val="850"/>
               </a:spcAft>
             </a:pPr>
             <a:r>
-              <a:rPr sz="940" b="0">
+              <a:rPr sz="1150" b="0">
                 <a:solidFill>
                   <a:srgbClr val="EAF0F7"/>
                 </a:solidFill>
@@ -32706,8 +32720,8 @@
         </p:nvSpPr>
         <p:spPr>
           <a:xfrm>
-            <a:off x="6187287" y="1609344"/>
-            <a:ext cx="5437479" cy="4023360"/>
+            <a:off x="6187287" y="1517904"/>
+            <a:ext cx="5437479" cy="4700016"/>
           </a:xfrm>
           <a:prstGeom prst="rect">
             <a:avLst/>
@@ -32725,11 +32739,11 @@
                 <a:spcPct val="112000"/>
               </a:lnSpc>
               <a:spcAft>
-                <a:spcPts val="120"/>
+                <a:spcPts val="850"/>
               </a:spcAft>
             </a:pPr>
             <a:r>
-              <a:rPr sz="940" b="0">
+              <a:rPr sz="1150" b="0">
                 <a:solidFill>
                   <a:srgbClr val="EAF0F7"/>
                 </a:solidFill>
@@ -32744,11 +32758,11 @@
                 <a:spcPct val="112000"/>
               </a:lnSpc>
               <a:spcAft>
-                <a:spcPts val="120"/>
+                <a:spcPts val="850"/>
               </a:spcAft>
             </a:pPr>
             <a:r>
-              <a:rPr sz="940" b="0">
+              <a:rPr sz="1150" b="0">
                 <a:solidFill>
                   <a:srgbClr val="EAF0F7"/>
                 </a:solidFill>
@@ -32763,11 +32777,11 @@
                 <a:spcPct val="112000"/>
               </a:lnSpc>
               <a:spcAft>
-                <a:spcPts val="120"/>
+                <a:spcPts val="850"/>
               </a:spcAft>
             </a:pPr>
             <a:r>
-              <a:rPr sz="940" b="0">
+              <a:rPr sz="1150" b="0">
                 <a:solidFill>
                   <a:srgbClr val="EAF0F7"/>
                 </a:solidFill>
@@ -32782,11 +32796,11 @@
                 <a:spcPct val="112000"/>
               </a:lnSpc>
               <a:spcAft>
-                <a:spcPts val="120"/>
+                <a:spcPts val="850"/>
               </a:spcAft>
             </a:pPr>
             <a:r>
-              <a:rPr sz="940" b="0">
+              <a:rPr sz="1150" b="0">
                 <a:solidFill>
                   <a:srgbClr val="EAF0F7"/>
                 </a:solidFill>
@@ -32801,11 +32815,11 @@
                 <a:spcPct val="112000"/>
               </a:lnSpc>
               <a:spcAft>
-                <a:spcPts val="120"/>
+                <a:spcPts val="850"/>
               </a:spcAft>
             </a:pPr>
             <a:r>
-              <a:rPr sz="940" b="0">
+              <a:rPr sz="1150" b="0">
                 <a:solidFill>
                   <a:srgbClr val="EAF0F7"/>
                 </a:solidFill>
@@ -32820,11 +32834,11 @@
                 <a:spcPct val="112000"/>
               </a:lnSpc>
               <a:spcAft>
-                <a:spcPts val="120"/>
+                <a:spcPts val="850"/>
               </a:spcAft>
             </a:pPr>
             <a:r>
-              <a:rPr sz="940" b="0">
+              <a:rPr sz="1150" b="0">
                 <a:solidFill>
                   <a:srgbClr val="EAF0F7"/>
                 </a:solidFill>
@@ -32839,11 +32853,11 @@
                 <a:spcPct val="112000"/>
               </a:lnSpc>
               <a:spcAft>
-                <a:spcPts val="120"/>
+                <a:spcPts val="850"/>
               </a:spcAft>
             </a:pPr>
             <a:r>
-              <a:rPr sz="940" b="0">
+              <a:rPr sz="1150" b="0">
                 <a:solidFill>
                   <a:srgbClr val="EAF0F7"/>
                 </a:solidFill>
@@ -32858,11 +32872,11 @@
                 <a:spcPct val="112000"/>
               </a:lnSpc>
               <a:spcAft>
-                <a:spcPts val="120"/>
+                <a:spcPts val="850"/>
               </a:spcAft>
             </a:pPr>
             <a:r>
-              <a:rPr sz="940" b="0">
+              <a:rPr sz="1150" b="0">
                 <a:solidFill>
                   <a:srgbClr val="EAF0F7"/>
                 </a:solidFill>
@@ -32877,11 +32891,11 @@
                 <a:spcPct val="112000"/>
               </a:lnSpc>
               <a:spcAft>
-                <a:spcPts val="120"/>
+                <a:spcPts val="850"/>
               </a:spcAft>
             </a:pPr>
             <a:r>
-              <a:rPr sz="940" b="0">
+              <a:rPr sz="1150" b="0">
                 <a:solidFill>
                   <a:srgbClr val="EAF0F7"/>
                 </a:solidFill>
@@ -32896,11 +32910,11 @@
                 <a:spcPct val="112000"/>
               </a:lnSpc>
               <a:spcAft>
-                <a:spcPts val="120"/>
+                <a:spcPts val="850"/>
               </a:spcAft>
             </a:pPr>
             <a:r>
-              <a:rPr sz="940" b="0">
+              <a:rPr sz="1150" b="0">
                 <a:solidFill>
                   <a:srgbClr val="EAF0F7"/>
                 </a:solidFill>
@@ -32915,11 +32929,11 @@
                 <a:spcPct val="112000"/>
               </a:lnSpc>
               <a:spcAft>
-                <a:spcPts val="120"/>
+                <a:spcPts val="850"/>
               </a:spcAft>
             </a:pPr>
             <a:r>
-              <a:rPr sz="940" b="0">
+              <a:rPr sz="1150" b="0">
                 <a:solidFill>
                   <a:srgbClr val="EAF0F7"/>
                 </a:solidFill>
@@ -32934,11 +32948,11 @@
                 <a:spcPct val="112000"/>
               </a:lnSpc>
               <a:spcAft>
-                <a:spcPts val="120"/>
+                <a:spcPts val="850"/>
               </a:spcAft>
             </a:pPr>
             <a:r>
-              <a:rPr sz="940" b="0">
+              <a:rPr sz="1150" b="0">
                 <a:solidFill>
                   <a:srgbClr val="EAF0F7"/>
                 </a:solidFill>
@@ -32953,11 +32967,11 @@
                 <a:spcPct val="112000"/>
               </a:lnSpc>
               <a:spcAft>
-                <a:spcPts val="120"/>
+                <a:spcPts val="850"/>
               </a:spcAft>
             </a:pPr>
             <a:r>
-              <a:rPr sz="940" b="0">
+              <a:rPr sz="1150" b="0">
                 <a:solidFill>
                   <a:srgbClr val="EAF0F7"/>
                 </a:solidFill>
@@ -32972,11 +32986,11 @@
                 <a:spcPct val="112000"/>
               </a:lnSpc>
               <a:spcAft>
-                <a:spcPts val="120"/>
+                <a:spcPts val="850"/>
               </a:spcAft>
             </a:pPr>
             <a:r>
-              <a:rPr sz="940" b="0">
+              <a:rPr sz="1150" b="0">
                 <a:solidFill>
                   <a:srgbClr val="EAF0F7"/>
                 </a:solidFill>
@@ -32991,11 +33005,11 @@
                 <a:spcPct val="112000"/>
               </a:lnSpc>
               <a:spcAft>
-                <a:spcPts val="120"/>
+                <a:spcPts val="850"/>
               </a:spcAft>
             </a:pPr>
             <a:r>
-              <a:rPr sz="940" b="0">
+              <a:rPr sz="1150" b="0">
                 <a:solidFill>
                   <a:srgbClr val="EAF0F7"/>
                 </a:solidFill>
@@ -33990,8 +34004,8 @@
         </p:nvSpPr>
         <p:spPr>
           <a:xfrm>
-            <a:off x="566928" y="1554480"/>
-            <a:ext cx="4846320" cy="2212848"/>
+            <a:off x="566928" y="1517904"/>
+            <a:ext cx="4846320" cy="2798063"/>
           </a:xfrm>
           <a:prstGeom prst="roundRect">
             <a:avLst>
@@ -34039,7 +34053,7 @@
         <p:spPr>
           <a:xfrm>
             <a:off x="749808" y="1682495"/>
-            <a:ext cx="4480560" cy="1956816"/>
+            <a:ext cx="4480560" cy="2468879"/>
           </a:xfrm>
           <a:prstGeom prst="rect">
             <a:avLst/>
@@ -34152,17 +34166,36 @@
                 <a:spcPct val="112000"/>
               </a:lnSpc>
               <a:spcAft>
+                <a:spcPts val="1200"/>
+              </a:spcAft>
+            </a:pPr>
+            <a:r>
+              <a:rPr sz="980" b="0">
+                <a:solidFill>
+                  <a:srgbClr val="2FD8B4"/>
+                </a:solidFill>
+                <a:latin typeface="Consolas"/>
+              </a:rPr>
+              <a:t>→  top_drivers · recommendations</a:t>
+            </a:r>
+          </a:p>
+          <a:p>
+            <a:pPr algn="l">
+              <a:lnSpc>
+                <a:spcPct val="112000"/>
+              </a:lnSpc>
+              <a:spcAft>
                 <a:spcPts val="0"/>
               </a:spcAft>
             </a:pPr>
             <a:r>
               <a:rPr sz="980" b="0">
                 <a:solidFill>
-                  <a:srgbClr val="2FD8B4"/>
+                  <a:srgbClr val="8CA0BE"/>
                 </a:solidFill>
                 <a:latin typeface="Consolas"/>
               </a:rPr>
-              <a:t>→  top_drivers · recommendations</a:t>
+              <a:t>GET /api/health  →  the uptime probe the host checks before it routes traffic</a:t>
             </a:r>
           </a:p>
         </p:txBody>
@@ -34175,8 +34208,8 @@
         </p:nvSpPr>
         <p:spPr>
           <a:xfrm>
-            <a:off x="5596128" y="1554480"/>
-            <a:ext cx="6025896" cy="2212848"/>
+            <a:off x="5596128" y="1517904"/>
+            <a:ext cx="6025896" cy="2798063"/>
           </a:xfrm>
           <a:prstGeom prst="roundRect">
             <a:avLst>
@@ -34224,7 +34257,7 @@
         <p:spPr>
           <a:xfrm>
             <a:off x="5779008" y="1682495"/>
-            <a:ext cx="5660136" cy="1956816"/>
+            <a:ext cx="5660136" cy="2468879"/>
           </a:xfrm>
           <a:prstGeom prst="rect">
             <a:avLst/>
@@ -34337,6 +34370,44 @@
                 <a:spcPct val="114000"/>
               </a:lnSpc>
               <a:spcAft>
+                <a:spcPts val="400"/>
+              </a:spcAft>
+            </a:pPr>
+            <a:r>
+              <a:rPr sz="980" b="0">
+                <a:solidFill>
+                  <a:srgbClr val="EAF0F7"/>
+                </a:solidFill>
+                <a:latin typeface="Segoe UI"/>
+              </a:rPr>
+              <a:t>QR codes  →  build_qr.py, decoded back to verify</a:t>
+            </a:r>
+          </a:p>
+          <a:p>
+            <a:pPr algn="l">
+              <a:lnSpc>
+                <a:spcPct val="114000"/>
+              </a:lnSpc>
+              <a:spcAft>
+                <a:spcPts val="400"/>
+              </a:spcAft>
+            </a:pPr>
+            <a:r>
+              <a:rPr sz="980" b="0">
+                <a:solidFill>
+                  <a:srgbClr val="EAF0F7"/>
+                </a:solidFill>
+                <a:latin typeface="Segoe UI"/>
+              </a:rPr>
+              <a:t>Console screenshots  →  templates/images/ from the running app</a:t>
+            </a:r>
+          </a:p>
+          <a:p>
+            <a:pPr algn="l">
+              <a:lnSpc>
+                <a:spcPct val="114000"/>
+              </a:lnSpc>
+              <a:spcAft>
                 <a:spcPts val="0"/>
               </a:spcAft>
             </a:pPr>
@@ -34347,7 +34418,7 @@
                 </a:solidFill>
                 <a:latin typeface="Segoe UI"/>
               </a:rPr>
-              <a:t>QR codes  →  build_qr.py, decoded back to verify</a:t>
+              <a:t>Power BI pages  →  Power_BI_dashboard/Screenshots/</a:t>
             </a:r>
           </a:p>
         </p:txBody>
@@ -34360,8 +34431,8 @@
         </p:nvSpPr>
         <p:spPr>
           <a:xfrm>
-            <a:off x="566928" y="3913632"/>
-            <a:ext cx="11057839" cy="1005840"/>
+            <a:off x="566928" y="4462272"/>
+            <a:ext cx="11057839" cy="1755647"/>
           </a:xfrm>
           <a:prstGeom prst="roundRect">
             <a:avLst>
@@ -34408,8 +34479,8 @@
         </p:nvSpPr>
         <p:spPr>
           <a:xfrm>
-            <a:off x="749808" y="4041648"/>
-            <a:ext cx="10692079" cy="768096"/>
+            <a:off x="749808" y="4590288"/>
+            <a:ext cx="10692079" cy="1517903"/>
           </a:xfrm>
           <a:prstGeom prst="rect">
             <a:avLst/>
@@ -35201,6 +35272,1465 @@
                 <a:latin typeface="Consolas"/>
               </a:rPr>
               <a:t>24</a:t>
+            </a:r>
+          </a:p>
+        </p:txBody>
+      </p:sp>
+    </p:spTree>
+  </p:cSld>
+  <p:clrMapOvr>
+    <a:masterClrMapping/>
+  </p:clrMapOvr>
+</p:sld>
+</file>
+
+<file path=ppt/slides/slide25.xml><?xml version="1.0" encoding="utf-8"?>
+<p:sld xmlns:a="http://schemas.openxmlformats.org/drawingml/2006/main" xmlns:p="http://schemas.openxmlformats.org/presentationml/2006/main" xmlns:r="http://schemas.openxmlformats.org/officeDocument/2006/relationships">
+  <p:cSld>
+    <p:spTree>
+      <p:nvGrpSpPr>
+        <p:cNvPr id="1" name=""/>
+        <p:cNvGrpSpPr/>
+        <p:nvPr/>
+      </p:nvGrpSpPr>
+      <p:grpSpPr/>
+      <p:sp>
+        <p:nvSpPr>
+          <p:cNvPr id="2" name="Rectangle 1"/>
+          <p:cNvSpPr/>
+          <p:nvPr/>
+        </p:nvSpPr>
+        <p:spPr>
+          <a:xfrm>
+            <a:off x="0" y="0"/>
+            <a:ext cx="12191695" cy="6858000"/>
+          </a:xfrm>
+          <a:prstGeom prst="rect">
+            <a:avLst/>
+          </a:prstGeom>
+          <a:solidFill>
+            <a:srgbClr val="0A0F1C"/>
+          </a:solidFill>
+          <a:ln>
+            <a:noFill/>
+          </a:ln>
+          <a:effectLst/>
+        </p:spPr>
+        <p:style>
+          <a:lnRef idx="1">
+            <a:schemeClr val="accent1"/>
+          </a:lnRef>
+          <a:fillRef idx="3">
+            <a:schemeClr val="accent1"/>
+          </a:fillRef>
+          <a:effectRef idx="2">
+            <a:schemeClr val="accent1"/>
+          </a:effectRef>
+          <a:fontRef idx="minor">
+            <a:schemeClr val="lt1"/>
+          </a:fontRef>
+        </p:style>
+        <p:txBody>
+          <a:bodyPr rtlCol="0" anchor="ctr"/>
+          <a:lstStyle/>
+          <a:p>
+            <a:pPr algn="ctr"/>
+          </a:p>
+        </p:txBody>
+      </p:sp>
+      <p:sp>
+        <p:nvSpPr>
+          <p:cNvPr id="3" name="TextBox 2"/>
+          <p:cNvSpPr txBox="1"/>
+          <p:nvPr/>
+        </p:nvSpPr>
+        <p:spPr>
+          <a:xfrm>
+            <a:off x="566928" y="365760"/>
+            <a:ext cx="8229600" cy="237744"/>
+          </a:xfrm>
+          <a:prstGeom prst="rect">
+            <a:avLst/>
+          </a:prstGeom>
+          <a:noFill/>
+        </p:spPr>
+        <p:txBody>
+          <a:bodyPr wrap="square" lIns="0" rIns="0" tIns="0" bIns="0" anchor="t">
+            <a:spAutoFit/>
+          </a:bodyPr>
+          <a:lstStyle/>
+          <a:p>
+            <a:pPr algn="l">
+              <a:lnSpc>
+                <a:spcPct val="112000"/>
+              </a:lnSpc>
+              <a:spcAft>
+                <a:spcPts val="0"/>
+              </a:spcAft>
+            </a:pPr>
+            <a:r>
+              <a:rPr sz="1000" b="1">
+                <a:solidFill>
+                  <a:srgbClr val="8CA0BE"/>
+                </a:solidFill>
+                <a:latin typeface="Consolas"/>
+              </a:rPr>
+              <a:t>APPENDIX</a:t>
+            </a:r>
+          </a:p>
+        </p:txBody>
+      </p:sp>
+      <p:sp>
+        <p:nvSpPr>
+          <p:cNvPr id="4" name="TextBox 3"/>
+          <p:cNvSpPr txBox="1"/>
+          <p:nvPr/>
+        </p:nvSpPr>
+        <p:spPr>
+          <a:xfrm>
+            <a:off x="566928" y="576072"/>
+            <a:ext cx="11057839" cy="475488"/>
+          </a:xfrm>
+          <a:prstGeom prst="rect">
+            <a:avLst/>
+          </a:prstGeom>
+          <a:noFill/>
+        </p:spPr>
+        <p:txBody>
+          <a:bodyPr wrap="square" lIns="0" rIns="0" tIns="0" bIns="0" anchor="t">
+            <a:spAutoFit/>
+          </a:bodyPr>
+          <a:lstStyle/>
+          <a:p>
+            <a:pPr algn="l">
+              <a:lnSpc>
+                <a:spcPct val="112000"/>
+              </a:lnSpc>
+              <a:spcAft>
+                <a:spcPts val="0"/>
+              </a:spcAft>
+            </a:pPr>
+            <a:r>
+              <a:rPr sz="2600" b="1">
+                <a:solidFill>
+                  <a:srgbClr val="EAF0F7"/>
+                </a:solidFill>
+                <a:latin typeface="Segoe UI"/>
+              </a:rPr>
+              <a:t>How the system fits together</a:t>
+            </a:r>
+          </a:p>
+        </p:txBody>
+      </p:sp>
+      <p:sp>
+        <p:nvSpPr>
+          <p:cNvPr id="5" name="TextBox 4"/>
+          <p:cNvSpPr txBox="1"/>
+          <p:nvPr/>
+        </p:nvSpPr>
+        <p:spPr>
+          <a:xfrm>
+            <a:off x="566928" y="1060704"/>
+            <a:ext cx="11057839" cy="274320"/>
+          </a:xfrm>
+          <a:prstGeom prst="rect">
+            <a:avLst/>
+          </a:prstGeom>
+          <a:noFill/>
+        </p:spPr>
+        <p:txBody>
+          <a:bodyPr wrap="square" lIns="0" rIns="0" tIns="0" bIns="0" anchor="t">
+            <a:spAutoFit/>
+          </a:bodyPr>
+          <a:lstStyle/>
+          <a:p>
+            <a:pPr algn="l">
+              <a:lnSpc>
+                <a:spcPct val="112000"/>
+              </a:lnSpc>
+              <a:spcAft>
+                <a:spcPts val="0"/>
+              </a:spcAft>
+            </a:pPr>
+            <a:r>
+              <a:rPr sz="1250" b="0">
+                <a:solidFill>
+                  <a:srgbClr val="8CA0BE"/>
+                </a:solidFill>
+                <a:latin typeface="Segoe UI"/>
+              </a:rPr>
+              <a:t>One shared path from raw customer data to the console, the API and the BI layer</a:t>
+            </a:r>
+          </a:p>
+        </p:txBody>
+      </p:sp>
+      <p:sp>
+        <p:nvSpPr>
+          <p:cNvPr id="6" name="Rectangle 5"/>
+          <p:cNvSpPr/>
+          <p:nvPr/>
+        </p:nvSpPr>
+        <p:spPr>
+          <a:xfrm>
+            <a:off x="566928" y="1371600"/>
+            <a:ext cx="11057839" cy="12801"/>
+          </a:xfrm>
+          <a:prstGeom prst="rect">
+            <a:avLst/>
+          </a:prstGeom>
+          <a:solidFill>
+            <a:srgbClr val="223049"/>
+          </a:solidFill>
+          <a:ln>
+            <a:noFill/>
+          </a:ln>
+          <a:effectLst/>
+        </p:spPr>
+        <p:style>
+          <a:lnRef idx="1">
+            <a:schemeClr val="accent1"/>
+          </a:lnRef>
+          <a:fillRef idx="3">
+            <a:schemeClr val="accent1"/>
+          </a:fillRef>
+          <a:effectRef idx="2">
+            <a:schemeClr val="accent1"/>
+          </a:effectRef>
+          <a:fontRef idx="minor">
+            <a:schemeClr val="lt1"/>
+          </a:fontRef>
+        </p:style>
+        <p:txBody>
+          <a:bodyPr rtlCol="0" anchor="ctr"/>
+          <a:lstStyle/>
+          <a:p>
+            <a:pPr algn="ctr"/>
+          </a:p>
+        </p:txBody>
+      </p:sp>
+      <p:pic>
+        <p:nvPicPr>
+          <p:cNvPr id="7" name="Picture 6" descr="chart_architecture.png"/>
+          <p:cNvPicPr>
+            <a:picLocks noChangeAspect="1"/>
+          </p:cNvPicPr>
+          <p:nvPr/>
+        </p:nvPicPr>
+        <p:blipFill>
+          <a:blip r:embed="rId2"/>
+          <a:stretch>
+            <a:fillRect/>
+          </a:stretch>
+        </p:blipFill>
+        <p:spPr>
+          <a:xfrm>
+            <a:off x="1631322" y="1517904"/>
+            <a:ext cx="8929050" cy="3291839"/>
+          </a:xfrm>
+          <a:prstGeom prst="rect">
+            <a:avLst/>
+          </a:prstGeom>
+        </p:spPr>
+      </p:pic>
+      <p:sp>
+        <p:nvSpPr>
+          <p:cNvPr id="8" name="Rounded Rectangle 7"/>
+          <p:cNvSpPr/>
+          <p:nvPr/>
+        </p:nvSpPr>
+        <p:spPr>
+          <a:xfrm>
+            <a:off x="566928" y="4956048"/>
+            <a:ext cx="3551834" cy="1261871"/>
+          </a:xfrm>
+          <a:prstGeom prst="roundRect">
+            <a:avLst>
+              <a:gd name="adj" fmla="val 8000"/>
+            </a:avLst>
+          </a:prstGeom>
+          <a:solidFill>
+            <a:srgbClr val="111A2C"/>
+          </a:solidFill>
+          <a:ln w="12700">
+            <a:solidFill>
+              <a:srgbClr val="223049"/>
+            </a:solidFill>
+          </a:ln>
+          <a:effectLst/>
+        </p:spPr>
+        <p:style>
+          <a:lnRef idx="1">
+            <a:schemeClr val="accent1"/>
+          </a:lnRef>
+          <a:fillRef idx="3">
+            <a:schemeClr val="accent1"/>
+          </a:fillRef>
+          <a:effectRef idx="2">
+            <a:schemeClr val="accent1"/>
+          </a:effectRef>
+          <a:fontRef idx="minor">
+            <a:schemeClr val="lt1"/>
+          </a:fontRef>
+        </p:style>
+        <p:txBody>
+          <a:bodyPr rtlCol="0" anchor="ctr"/>
+          <a:lstStyle/>
+          <a:p>
+            <a:pPr algn="ctr"/>
+          </a:p>
+        </p:txBody>
+      </p:sp>
+      <p:sp>
+        <p:nvSpPr>
+          <p:cNvPr id="9" name="Rectangle 8"/>
+          <p:cNvSpPr/>
+          <p:nvPr/>
+        </p:nvSpPr>
+        <p:spPr>
+          <a:xfrm>
+            <a:off x="566928" y="5084064"/>
+            <a:ext cx="32004" cy="1005839"/>
+          </a:xfrm>
+          <a:prstGeom prst="rect">
+            <a:avLst/>
+          </a:prstGeom>
+          <a:solidFill>
+            <a:srgbClr val="4C8DFF"/>
+          </a:solidFill>
+          <a:ln>
+            <a:noFill/>
+          </a:ln>
+          <a:effectLst/>
+        </p:spPr>
+        <p:style>
+          <a:lnRef idx="1">
+            <a:schemeClr val="accent1"/>
+          </a:lnRef>
+          <a:fillRef idx="3">
+            <a:schemeClr val="accent1"/>
+          </a:fillRef>
+          <a:effectRef idx="2">
+            <a:schemeClr val="accent1"/>
+          </a:effectRef>
+          <a:fontRef idx="minor">
+            <a:schemeClr val="lt1"/>
+          </a:fontRef>
+        </p:style>
+        <p:txBody>
+          <a:bodyPr rtlCol="0" anchor="ctr"/>
+          <a:lstStyle/>
+          <a:p>
+            <a:pPr algn="ctr"/>
+          </a:p>
+        </p:txBody>
+      </p:sp>
+      <p:sp>
+        <p:nvSpPr>
+          <p:cNvPr id="10" name="TextBox 9"/>
+          <p:cNvSpPr txBox="1"/>
+          <p:nvPr/>
+        </p:nvSpPr>
+        <p:spPr>
+          <a:xfrm>
+            <a:off x="749808" y="5102352"/>
+            <a:ext cx="3167786" cy="969263"/>
+          </a:xfrm>
+          <a:prstGeom prst="rect">
+            <a:avLst/>
+          </a:prstGeom>
+          <a:noFill/>
+        </p:spPr>
+        <p:txBody>
+          <a:bodyPr wrap="square" lIns="0" rIns="0" tIns="0" bIns="0" anchor="t">
+            <a:spAutoFit/>
+          </a:bodyPr>
+          <a:lstStyle/>
+          <a:p>
+            <a:pPr algn="l">
+              <a:lnSpc>
+                <a:spcPct val="112000"/>
+              </a:lnSpc>
+              <a:spcAft>
+                <a:spcPts val="500"/>
+              </a:spcAft>
+            </a:pPr>
+            <a:r>
+              <a:rPr sz="1000" b="1">
+                <a:solidFill>
+                  <a:srgbClr val="4C8DFF"/>
+                </a:solidFill>
+                <a:latin typeface="Consolas"/>
+              </a:rPr>
+              <a:t>ONE PREPROCESSING PATH</a:t>
+            </a:r>
+          </a:p>
+          <a:p>
+            <a:pPr algn="l">
+              <a:lnSpc>
+                <a:spcPct val="116000"/>
+              </a:lnSpc>
+              <a:spcAft>
+                <a:spcPts val="0"/>
+              </a:spcAft>
+            </a:pPr>
+            <a:r>
+              <a:rPr sz="1019" b="0">
+                <a:solidFill>
+                  <a:srgbClr val="EAF0F7"/>
+                </a:solidFill>
+                <a:latin typeface="Segoe UI"/>
+              </a:rPr>
+              <a:t>The notebook pipeline and the app import the same transformations, so a score in the console and a metric in this deck come from the same 30 features.</a:t>
+            </a:r>
+          </a:p>
+        </p:txBody>
+      </p:sp>
+      <p:sp>
+        <p:nvSpPr>
+          <p:cNvPr id="11" name="Rounded Rectangle 10"/>
+          <p:cNvSpPr/>
+          <p:nvPr/>
+        </p:nvSpPr>
+        <p:spPr>
+          <a:xfrm>
+            <a:off x="4319930" y="4956048"/>
+            <a:ext cx="3551834" cy="1261871"/>
+          </a:xfrm>
+          <a:prstGeom prst="roundRect">
+            <a:avLst>
+              <a:gd name="adj" fmla="val 8000"/>
+            </a:avLst>
+          </a:prstGeom>
+          <a:solidFill>
+            <a:srgbClr val="111A2C"/>
+          </a:solidFill>
+          <a:ln w="12700">
+            <a:solidFill>
+              <a:srgbClr val="223049"/>
+            </a:solidFill>
+          </a:ln>
+          <a:effectLst/>
+        </p:spPr>
+        <p:style>
+          <a:lnRef idx="1">
+            <a:schemeClr val="accent1"/>
+          </a:lnRef>
+          <a:fillRef idx="3">
+            <a:schemeClr val="accent1"/>
+          </a:fillRef>
+          <a:effectRef idx="2">
+            <a:schemeClr val="accent1"/>
+          </a:effectRef>
+          <a:fontRef idx="minor">
+            <a:schemeClr val="lt1"/>
+          </a:fontRef>
+        </p:style>
+        <p:txBody>
+          <a:bodyPr rtlCol="0" anchor="ctr"/>
+          <a:lstStyle/>
+          <a:p>
+            <a:pPr algn="ctr"/>
+          </a:p>
+        </p:txBody>
+      </p:sp>
+      <p:sp>
+        <p:nvSpPr>
+          <p:cNvPr id="12" name="Rectangle 11"/>
+          <p:cNvSpPr/>
+          <p:nvPr/>
+        </p:nvSpPr>
+        <p:spPr>
+          <a:xfrm>
+            <a:off x="4319930" y="5084064"/>
+            <a:ext cx="32004" cy="1005839"/>
+          </a:xfrm>
+          <a:prstGeom prst="rect">
+            <a:avLst/>
+          </a:prstGeom>
+          <a:solidFill>
+            <a:srgbClr val="2FD8B4"/>
+          </a:solidFill>
+          <a:ln>
+            <a:noFill/>
+          </a:ln>
+          <a:effectLst/>
+        </p:spPr>
+        <p:style>
+          <a:lnRef idx="1">
+            <a:schemeClr val="accent1"/>
+          </a:lnRef>
+          <a:fillRef idx="3">
+            <a:schemeClr val="accent1"/>
+          </a:fillRef>
+          <a:effectRef idx="2">
+            <a:schemeClr val="accent1"/>
+          </a:effectRef>
+          <a:fontRef idx="minor">
+            <a:schemeClr val="lt1"/>
+          </a:fontRef>
+        </p:style>
+        <p:txBody>
+          <a:bodyPr rtlCol="0" anchor="ctr"/>
+          <a:lstStyle/>
+          <a:p>
+            <a:pPr algn="ctr"/>
+          </a:p>
+        </p:txBody>
+      </p:sp>
+      <p:sp>
+        <p:nvSpPr>
+          <p:cNvPr id="13" name="TextBox 12"/>
+          <p:cNvSpPr txBox="1"/>
+          <p:nvPr/>
+        </p:nvSpPr>
+        <p:spPr>
+          <a:xfrm>
+            <a:off x="4502810" y="5102352"/>
+            <a:ext cx="3167786" cy="969263"/>
+          </a:xfrm>
+          <a:prstGeom prst="rect">
+            <a:avLst/>
+          </a:prstGeom>
+          <a:noFill/>
+        </p:spPr>
+        <p:txBody>
+          <a:bodyPr wrap="square" lIns="0" rIns="0" tIns="0" bIns="0" anchor="t">
+            <a:spAutoFit/>
+          </a:bodyPr>
+          <a:lstStyle/>
+          <a:p>
+            <a:pPr algn="l">
+              <a:lnSpc>
+                <a:spcPct val="112000"/>
+              </a:lnSpc>
+              <a:spcAft>
+                <a:spcPts val="500"/>
+              </a:spcAft>
+            </a:pPr>
+            <a:r>
+              <a:rPr sz="1000" b="1">
+                <a:solidFill>
+                  <a:srgbClr val="2FD8B4"/>
+                </a:solidFill>
+                <a:latin typeface="Consolas"/>
+              </a:rPr>
+              <a:t>TWO ENTRY POINTS</a:t>
+            </a:r>
+          </a:p>
+          <a:p>
+            <a:pPr algn="l">
+              <a:lnSpc>
+                <a:spcPct val="116000"/>
+              </a:lnSpc>
+              <a:spcAft>
+                <a:spcPts val="0"/>
+              </a:spcAft>
+            </a:pPr>
+            <a:r>
+              <a:rPr sz="1019" b="0">
+                <a:solidFill>
+                  <a:srgbClr val="EAF0F7"/>
+                </a:solidFill>
+                <a:latin typeface="Segoe UI"/>
+              </a:rPr>
+              <a:t>The Flask console serves the reviewable UI; the FastAPI wrapper serves the same model to any other client. Both load the frozen feature list.</a:t>
+            </a:r>
+          </a:p>
+        </p:txBody>
+      </p:sp>
+      <p:sp>
+        <p:nvSpPr>
+          <p:cNvPr id="14" name="Rounded Rectangle 13"/>
+          <p:cNvSpPr/>
+          <p:nvPr/>
+        </p:nvSpPr>
+        <p:spPr>
+          <a:xfrm>
+            <a:off x="8072932" y="4956048"/>
+            <a:ext cx="3551834" cy="1261871"/>
+          </a:xfrm>
+          <a:prstGeom prst="roundRect">
+            <a:avLst>
+              <a:gd name="adj" fmla="val 8000"/>
+            </a:avLst>
+          </a:prstGeom>
+          <a:solidFill>
+            <a:srgbClr val="111A2C"/>
+          </a:solidFill>
+          <a:ln w="12700">
+            <a:solidFill>
+              <a:srgbClr val="223049"/>
+            </a:solidFill>
+          </a:ln>
+          <a:effectLst/>
+        </p:spPr>
+        <p:style>
+          <a:lnRef idx="1">
+            <a:schemeClr val="accent1"/>
+          </a:lnRef>
+          <a:fillRef idx="3">
+            <a:schemeClr val="accent1"/>
+          </a:fillRef>
+          <a:effectRef idx="2">
+            <a:schemeClr val="accent1"/>
+          </a:effectRef>
+          <a:fontRef idx="minor">
+            <a:schemeClr val="lt1"/>
+          </a:fontRef>
+        </p:style>
+        <p:txBody>
+          <a:bodyPr rtlCol="0" anchor="ctr"/>
+          <a:lstStyle/>
+          <a:p>
+            <a:pPr algn="ctr"/>
+          </a:p>
+        </p:txBody>
+      </p:sp>
+      <p:sp>
+        <p:nvSpPr>
+          <p:cNvPr id="15" name="Rectangle 14"/>
+          <p:cNvSpPr/>
+          <p:nvPr/>
+        </p:nvSpPr>
+        <p:spPr>
+          <a:xfrm>
+            <a:off x="8072932" y="5084064"/>
+            <a:ext cx="32004" cy="1005839"/>
+          </a:xfrm>
+          <a:prstGeom prst="rect">
+            <a:avLst/>
+          </a:prstGeom>
+          <a:solidFill>
+            <a:srgbClr val="F5A623"/>
+          </a:solidFill>
+          <a:ln>
+            <a:noFill/>
+          </a:ln>
+          <a:effectLst/>
+        </p:spPr>
+        <p:style>
+          <a:lnRef idx="1">
+            <a:schemeClr val="accent1"/>
+          </a:lnRef>
+          <a:fillRef idx="3">
+            <a:schemeClr val="accent1"/>
+          </a:fillRef>
+          <a:effectRef idx="2">
+            <a:schemeClr val="accent1"/>
+          </a:effectRef>
+          <a:fontRef idx="minor">
+            <a:schemeClr val="lt1"/>
+          </a:fontRef>
+        </p:style>
+        <p:txBody>
+          <a:bodyPr rtlCol="0" anchor="ctr"/>
+          <a:lstStyle/>
+          <a:p>
+            <a:pPr algn="ctr"/>
+          </a:p>
+        </p:txBody>
+      </p:sp>
+      <p:sp>
+        <p:nvSpPr>
+          <p:cNvPr id="16" name="TextBox 15"/>
+          <p:cNvSpPr txBox="1"/>
+          <p:nvPr/>
+        </p:nvSpPr>
+        <p:spPr>
+          <a:xfrm>
+            <a:off x="8255812" y="5102352"/>
+            <a:ext cx="3167786" cy="969263"/>
+          </a:xfrm>
+          <a:prstGeom prst="rect">
+            <a:avLst/>
+          </a:prstGeom>
+          <a:noFill/>
+        </p:spPr>
+        <p:txBody>
+          <a:bodyPr wrap="square" lIns="0" rIns="0" tIns="0" bIns="0" anchor="t">
+            <a:spAutoFit/>
+          </a:bodyPr>
+          <a:lstStyle/>
+          <a:p>
+            <a:pPr algn="l">
+              <a:lnSpc>
+                <a:spcPct val="112000"/>
+              </a:lnSpc>
+              <a:spcAft>
+                <a:spcPts val="500"/>
+              </a:spcAft>
+            </a:pPr>
+            <a:r>
+              <a:rPr sz="1000" b="1">
+                <a:solidFill>
+                  <a:srgbClr val="F5A623"/>
+                </a:solidFill>
+                <a:latin typeface="Consolas"/>
+              </a:rPr>
+              <a:t>LAYERS ON TOP</a:t>
+            </a:r>
+          </a:p>
+          <a:p>
+            <a:pPr algn="l">
+              <a:lnSpc>
+                <a:spcPct val="116000"/>
+              </a:lnSpc>
+              <a:spcAft>
+                <a:spcPts val="0"/>
+              </a:spcAft>
+            </a:pPr>
+            <a:r>
+              <a:rPr sz="1019" b="0">
+                <a:solidFill>
+                  <a:srgbClr val="EAF0F7"/>
+                </a:solidFill>
+                <a:latin typeface="Segoe UI"/>
+              </a:rPr>
+              <a:t>Risk bands and recommendations are rules over the probability, not a second model — which is why they are auditable.</a:t>
+            </a:r>
+          </a:p>
+        </p:txBody>
+      </p:sp>
+      <p:sp>
+        <p:nvSpPr>
+          <p:cNvPr id="17" name="Rectangle 16"/>
+          <p:cNvSpPr/>
+          <p:nvPr/>
+        </p:nvSpPr>
+        <p:spPr>
+          <a:xfrm>
+            <a:off x="566928" y="6309360"/>
+            <a:ext cx="743145" cy="43891"/>
+          </a:xfrm>
+          <a:prstGeom prst="rect">
+            <a:avLst/>
+          </a:prstGeom>
+          <a:solidFill>
+            <a:srgbClr val="2FD8B4"/>
+          </a:solidFill>
+          <a:ln>
+            <a:noFill/>
+          </a:ln>
+          <a:effectLst/>
+        </p:spPr>
+        <p:style>
+          <a:lnRef idx="1">
+            <a:schemeClr val="accent1"/>
+          </a:lnRef>
+          <a:fillRef idx="3">
+            <a:schemeClr val="accent1"/>
+          </a:fillRef>
+          <a:effectRef idx="2">
+            <a:schemeClr val="accent1"/>
+          </a:effectRef>
+          <a:fontRef idx="minor">
+            <a:schemeClr val="lt1"/>
+          </a:fontRef>
+        </p:style>
+        <p:txBody>
+          <a:bodyPr rtlCol="0" anchor="ctr"/>
+          <a:lstStyle/>
+          <a:p>
+            <a:pPr algn="ctr"/>
+          </a:p>
+        </p:txBody>
+      </p:sp>
+      <p:sp>
+        <p:nvSpPr>
+          <p:cNvPr id="18" name="Rectangle 17"/>
+          <p:cNvSpPr/>
+          <p:nvPr/>
+        </p:nvSpPr>
+        <p:spPr>
+          <a:xfrm>
+            <a:off x="1360365" y="6309360"/>
+            <a:ext cx="743145" cy="43891"/>
+          </a:xfrm>
+          <a:prstGeom prst="rect">
+            <a:avLst/>
+          </a:prstGeom>
+          <a:solidFill>
+            <a:srgbClr val="2FD8B4"/>
+          </a:solidFill>
+          <a:ln>
+            <a:noFill/>
+          </a:ln>
+          <a:effectLst/>
+        </p:spPr>
+        <p:style>
+          <a:lnRef idx="1">
+            <a:schemeClr val="accent1"/>
+          </a:lnRef>
+          <a:fillRef idx="3">
+            <a:schemeClr val="accent1"/>
+          </a:fillRef>
+          <a:effectRef idx="2">
+            <a:schemeClr val="accent1"/>
+          </a:effectRef>
+          <a:fontRef idx="minor">
+            <a:schemeClr val="lt1"/>
+          </a:fontRef>
+        </p:style>
+        <p:txBody>
+          <a:bodyPr rtlCol="0" anchor="ctr"/>
+          <a:lstStyle/>
+          <a:p>
+            <a:pPr algn="ctr"/>
+          </a:p>
+        </p:txBody>
+      </p:sp>
+      <p:sp>
+        <p:nvSpPr>
+          <p:cNvPr id="19" name="Rectangle 18"/>
+          <p:cNvSpPr/>
+          <p:nvPr/>
+        </p:nvSpPr>
+        <p:spPr>
+          <a:xfrm>
+            <a:off x="2153803" y="6309360"/>
+            <a:ext cx="743145" cy="43891"/>
+          </a:xfrm>
+          <a:prstGeom prst="rect">
+            <a:avLst/>
+          </a:prstGeom>
+          <a:solidFill>
+            <a:srgbClr val="2FD8B4"/>
+          </a:solidFill>
+          <a:ln>
+            <a:noFill/>
+          </a:ln>
+          <a:effectLst/>
+        </p:spPr>
+        <p:style>
+          <a:lnRef idx="1">
+            <a:schemeClr val="accent1"/>
+          </a:lnRef>
+          <a:fillRef idx="3">
+            <a:schemeClr val="accent1"/>
+          </a:fillRef>
+          <a:effectRef idx="2">
+            <a:schemeClr val="accent1"/>
+          </a:effectRef>
+          <a:fontRef idx="minor">
+            <a:schemeClr val="lt1"/>
+          </a:fontRef>
+        </p:style>
+        <p:txBody>
+          <a:bodyPr rtlCol="0" anchor="ctr"/>
+          <a:lstStyle/>
+          <a:p>
+            <a:pPr algn="ctr"/>
+          </a:p>
+        </p:txBody>
+      </p:sp>
+      <p:sp>
+        <p:nvSpPr>
+          <p:cNvPr id="20" name="Rectangle 19"/>
+          <p:cNvSpPr/>
+          <p:nvPr/>
+        </p:nvSpPr>
+        <p:spPr>
+          <a:xfrm>
+            <a:off x="2947241" y="6309360"/>
+            <a:ext cx="743145" cy="43891"/>
+          </a:xfrm>
+          <a:prstGeom prst="rect">
+            <a:avLst/>
+          </a:prstGeom>
+          <a:solidFill>
+            <a:srgbClr val="2FD8B4"/>
+          </a:solidFill>
+          <a:ln>
+            <a:noFill/>
+          </a:ln>
+          <a:effectLst/>
+        </p:spPr>
+        <p:style>
+          <a:lnRef idx="1">
+            <a:schemeClr val="accent1"/>
+          </a:lnRef>
+          <a:fillRef idx="3">
+            <a:schemeClr val="accent1"/>
+          </a:fillRef>
+          <a:effectRef idx="2">
+            <a:schemeClr val="accent1"/>
+          </a:effectRef>
+          <a:fontRef idx="minor">
+            <a:schemeClr val="lt1"/>
+          </a:fontRef>
+        </p:style>
+        <p:txBody>
+          <a:bodyPr rtlCol="0" anchor="ctr"/>
+          <a:lstStyle/>
+          <a:p>
+            <a:pPr algn="ctr"/>
+          </a:p>
+        </p:txBody>
+      </p:sp>
+      <p:sp>
+        <p:nvSpPr>
+          <p:cNvPr id="21" name="Rectangle 20"/>
+          <p:cNvSpPr/>
+          <p:nvPr/>
+        </p:nvSpPr>
+        <p:spPr>
+          <a:xfrm>
+            <a:off x="3740679" y="6309360"/>
+            <a:ext cx="743145" cy="43891"/>
+          </a:xfrm>
+          <a:prstGeom prst="rect">
+            <a:avLst/>
+          </a:prstGeom>
+          <a:solidFill>
+            <a:srgbClr val="2FD8B4"/>
+          </a:solidFill>
+          <a:ln>
+            <a:noFill/>
+          </a:ln>
+          <a:effectLst/>
+        </p:spPr>
+        <p:style>
+          <a:lnRef idx="1">
+            <a:schemeClr val="accent1"/>
+          </a:lnRef>
+          <a:fillRef idx="3">
+            <a:schemeClr val="accent1"/>
+          </a:fillRef>
+          <a:effectRef idx="2">
+            <a:schemeClr val="accent1"/>
+          </a:effectRef>
+          <a:fontRef idx="minor">
+            <a:schemeClr val="lt1"/>
+          </a:fontRef>
+        </p:style>
+        <p:txBody>
+          <a:bodyPr rtlCol="0" anchor="ctr"/>
+          <a:lstStyle/>
+          <a:p>
+            <a:pPr algn="ctr"/>
+          </a:p>
+        </p:txBody>
+      </p:sp>
+      <p:sp>
+        <p:nvSpPr>
+          <p:cNvPr id="22" name="Rectangle 21"/>
+          <p:cNvSpPr/>
+          <p:nvPr/>
+        </p:nvSpPr>
+        <p:spPr>
+          <a:xfrm>
+            <a:off x="4534117" y="6309360"/>
+            <a:ext cx="743145" cy="43891"/>
+          </a:xfrm>
+          <a:prstGeom prst="rect">
+            <a:avLst/>
+          </a:prstGeom>
+          <a:solidFill>
+            <a:srgbClr val="2FD8B4"/>
+          </a:solidFill>
+          <a:ln>
+            <a:noFill/>
+          </a:ln>
+          <a:effectLst/>
+        </p:spPr>
+        <p:style>
+          <a:lnRef idx="1">
+            <a:schemeClr val="accent1"/>
+          </a:lnRef>
+          <a:fillRef idx="3">
+            <a:schemeClr val="accent1"/>
+          </a:fillRef>
+          <a:effectRef idx="2">
+            <a:schemeClr val="accent1"/>
+          </a:effectRef>
+          <a:fontRef idx="minor">
+            <a:schemeClr val="lt1"/>
+          </a:fontRef>
+        </p:style>
+        <p:txBody>
+          <a:bodyPr rtlCol="0" anchor="ctr"/>
+          <a:lstStyle/>
+          <a:p>
+            <a:pPr algn="ctr"/>
+          </a:p>
+        </p:txBody>
+      </p:sp>
+      <p:sp>
+        <p:nvSpPr>
+          <p:cNvPr id="23" name="Rectangle 22"/>
+          <p:cNvSpPr/>
+          <p:nvPr/>
+        </p:nvSpPr>
+        <p:spPr>
+          <a:xfrm>
+            <a:off x="5327555" y="6309360"/>
+            <a:ext cx="743145" cy="43891"/>
+          </a:xfrm>
+          <a:prstGeom prst="rect">
+            <a:avLst/>
+          </a:prstGeom>
+          <a:solidFill>
+            <a:srgbClr val="2FD8B4"/>
+          </a:solidFill>
+          <a:ln>
+            <a:noFill/>
+          </a:ln>
+          <a:effectLst/>
+        </p:spPr>
+        <p:style>
+          <a:lnRef idx="1">
+            <a:schemeClr val="accent1"/>
+          </a:lnRef>
+          <a:fillRef idx="3">
+            <a:schemeClr val="accent1"/>
+          </a:fillRef>
+          <a:effectRef idx="2">
+            <a:schemeClr val="accent1"/>
+          </a:effectRef>
+          <a:fontRef idx="minor">
+            <a:schemeClr val="lt1"/>
+          </a:fontRef>
+        </p:style>
+        <p:txBody>
+          <a:bodyPr rtlCol="0" anchor="ctr"/>
+          <a:lstStyle/>
+          <a:p>
+            <a:pPr algn="ctr"/>
+          </a:p>
+        </p:txBody>
+      </p:sp>
+      <p:sp>
+        <p:nvSpPr>
+          <p:cNvPr id="24" name="Rectangle 23"/>
+          <p:cNvSpPr/>
+          <p:nvPr/>
+        </p:nvSpPr>
+        <p:spPr>
+          <a:xfrm>
+            <a:off x="6120993" y="6309360"/>
+            <a:ext cx="743145" cy="43891"/>
+          </a:xfrm>
+          <a:prstGeom prst="rect">
+            <a:avLst/>
+          </a:prstGeom>
+          <a:solidFill>
+            <a:srgbClr val="2FD8B4"/>
+          </a:solidFill>
+          <a:ln>
+            <a:noFill/>
+          </a:ln>
+          <a:effectLst/>
+        </p:spPr>
+        <p:style>
+          <a:lnRef idx="1">
+            <a:schemeClr val="accent1"/>
+          </a:lnRef>
+          <a:fillRef idx="3">
+            <a:schemeClr val="accent1"/>
+          </a:fillRef>
+          <a:effectRef idx="2">
+            <a:schemeClr val="accent1"/>
+          </a:effectRef>
+          <a:fontRef idx="minor">
+            <a:schemeClr val="lt1"/>
+          </a:fontRef>
+        </p:style>
+        <p:txBody>
+          <a:bodyPr rtlCol="0" anchor="ctr"/>
+          <a:lstStyle/>
+          <a:p>
+            <a:pPr algn="ctr"/>
+          </a:p>
+        </p:txBody>
+      </p:sp>
+      <p:sp>
+        <p:nvSpPr>
+          <p:cNvPr id="25" name="Rectangle 24"/>
+          <p:cNvSpPr/>
+          <p:nvPr/>
+        </p:nvSpPr>
+        <p:spPr>
+          <a:xfrm>
+            <a:off x="6914431" y="6309360"/>
+            <a:ext cx="743145" cy="43891"/>
+          </a:xfrm>
+          <a:prstGeom prst="rect">
+            <a:avLst/>
+          </a:prstGeom>
+          <a:solidFill>
+            <a:srgbClr val="2FD8B4"/>
+          </a:solidFill>
+          <a:ln>
+            <a:noFill/>
+          </a:ln>
+          <a:effectLst/>
+        </p:spPr>
+        <p:style>
+          <a:lnRef idx="1">
+            <a:schemeClr val="accent1"/>
+          </a:lnRef>
+          <a:fillRef idx="3">
+            <a:schemeClr val="accent1"/>
+          </a:fillRef>
+          <a:effectRef idx="2">
+            <a:schemeClr val="accent1"/>
+          </a:effectRef>
+          <a:fontRef idx="minor">
+            <a:schemeClr val="lt1"/>
+          </a:fontRef>
+        </p:style>
+        <p:txBody>
+          <a:bodyPr rtlCol="0" anchor="ctr"/>
+          <a:lstStyle/>
+          <a:p>
+            <a:pPr algn="ctr"/>
+          </a:p>
+        </p:txBody>
+      </p:sp>
+      <p:sp>
+        <p:nvSpPr>
+          <p:cNvPr id="26" name="Rectangle 25"/>
+          <p:cNvSpPr/>
+          <p:nvPr/>
+        </p:nvSpPr>
+        <p:spPr>
+          <a:xfrm>
+            <a:off x="7707869" y="6309360"/>
+            <a:ext cx="743145" cy="43891"/>
+          </a:xfrm>
+          <a:prstGeom prst="rect">
+            <a:avLst/>
+          </a:prstGeom>
+          <a:solidFill>
+            <a:srgbClr val="2FD8B4"/>
+          </a:solidFill>
+          <a:ln>
+            <a:noFill/>
+          </a:ln>
+          <a:effectLst/>
+        </p:spPr>
+        <p:style>
+          <a:lnRef idx="1">
+            <a:schemeClr val="accent1"/>
+          </a:lnRef>
+          <a:fillRef idx="3">
+            <a:schemeClr val="accent1"/>
+          </a:fillRef>
+          <a:effectRef idx="2">
+            <a:schemeClr val="accent1"/>
+          </a:effectRef>
+          <a:fontRef idx="minor">
+            <a:schemeClr val="lt1"/>
+          </a:fontRef>
+        </p:style>
+        <p:txBody>
+          <a:bodyPr rtlCol="0" anchor="ctr"/>
+          <a:lstStyle/>
+          <a:p>
+            <a:pPr algn="ctr"/>
+          </a:p>
+        </p:txBody>
+      </p:sp>
+      <p:sp>
+        <p:nvSpPr>
+          <p:cNvPr id="27" name="Rectangle 26"/>
+          <p:cNvSpPr/>
+          <p:nvPr/>
+        </p:nvSpPr>
+        <p:spPr>
+          <a:xfrm>
+            <a:off x="8501307" y="6309360"/>
+            <a:ext cx="743145" cy="43891"/>
+          </a:xfrm>
+          <a:prstGeom prst="rect">
+            <a:avLst/>
+          </a:prstGeom>
+          <a:solidFill>
+            <a:srgbClr val="2FD8B4"/>
+          </a:solidFill>
+          <a:ln>
+            <a:noFill/>
+          </a:ln>
+          <a:effectLst/>
+        </p:spPr>
+        <p:style>
+          <a:lnRef idx="1">
+            <a:schemeClr val="accent1"/>
+          </a:lnRef>
+          <a:fillRef idx="3">
+            <a:schemeClr val="accent1"/>
+          </a:fillRef>
+          <a:effectRef idx="2">
+            <a:schemeClr val="accent1"/>
+          </a:effectRef>
+          <a:fontRef idx="minor">
+            <a:schemeClr val="lt1"/>
+          </a:fontRef>
+        </p:style>
+        <p:txBody>
+          <a:bodyPr rtlCol="0" anchor="ctr"/>
+          <a:lstStyle/>
+          <a:p>
+            <a:pPr algn="ctr"/>
+          </a:p>
+        </p:txBody>
+      </p:sp>
+      <p:sp>
+        <p:nvSpPr>
+          <p:cNvPr id="28" name="Rectangle 27"/>
+          <p:cNvSpPr/>
+          <p:nvPr/>
+        </p:nvSpPr>
+        <p:spPr>
+          <a:xfrm>
+            <a:off x="9294745" y="6309360"/>
+            <a:ext cx="743145" cy="43891"/>
+          </a:xfrm>
+          <a:prstGeom prst="rect">
+            <a:avLst/>
+          </a:prstGeom>
+          <a:solidFill>
+            <a:srgbClr val="2FD8B4"/>
+          </a:solidFill>
+          <a:ln>
+            <a:noFill/>
+          </a:ln>
+          <a:effectLst/>
+        </p:spPr>
+        <p:style>
+          <a:lnRef idx="1">
+            <a:schemeClr val="accent1"/>
+          </a:lnRef>
+          <a:fillRef idx="3">
+            <a:schemeClr val="accent1"/>
+          </a:fillRef>
+          <a:effectRef idx="2">
+            <a:schemeClr val="accent1"/>
+          </a:effectRef>
+          <a:fontRef idx="minor">
+            <a:schemeClr val="lt1"/>
+          </a:fontRef>
+        </p:style>
+        <p:txBody>
+          <a:bodyPr rtlCol="0" anchor="ctr"/>
+          <a:lstStyle/>
+          <a:p>
+            <a:pPr algn="ctr"/>
+          </a:p>
+        </p:txBody>
+      </p:sp>
+      <p:sp>
+        <p:nvSpPr>
+          <p:cNvPr id="29" name="Rectangle 28"/>
+          <p:cNvSpPr/>
+          <p:nvPr/>
+        </p:nvSpPr>
+        <p:spPr>
+          <a:xfrm>
+            <a:off x="10088183" y="6309360"/>
+            <a:ext cx="743145" cy="43891"/>
+          </a:xfrm>
+          <a:prstGeom prst="rect">
+            <a:avLst/>
+          </a:prstGeom>
+          <a:solidFill>
+            <a:srgbClr val="2FD8B4"/>
+          </a:solidFill>
+          <a:ln>
+            <a:noFill/>
+          </a:ln>
+          <a:effectLst/>
+        </p:spPr>
+        <p:style>
+          <a:lnRef idx="1">
+            <a:schemeClr val="accent1"/>
+          </a:lnRef>
+          <a:fillRef idx="3">
+            <a:schemeClr val="accent1"/>
+          </a:fillRef>
+          <a:effectRef idx="2">
+            <a:schemeClr val="accent1"/>
+          </a:effectRef>
+          <a:fontRef idx="minor">
+            <a:schemeClr val="lt1"/>
+          </a:fontRef>
+        </p:style>
+        <p:txBody>
+          <a:bodyPr rtlCol="0" anchor="ctr"/>
+          <a:lstStyle/>
+          <a:p>
+            <a:pPr algn="ctr"/>
+          </a:p>
+        </p:txBody>
+      </p:sp>
+      <p:sp>
+        <p:nvSpPr>
+          <p:cNvPr id="30" name="Rectangle 29"/>
+          <p:cNvSpPr/>
+          <p:nvPr/>
+        </p:nvSpPr>
+        <p:spPr>
+          <a:xfrm>
+            <a:off x="10881621" y="6309360"/>
+            <a:ext cx="743145" cy="43891"/>
+          </a:xfrm>
+          <a:prstGeom prst="rect">
+            <a:avLst/>
+          </a:prstGeom>
+          <a:solidFill>
+            <a:srgbClr val="2FD8B4"/>
+          </a:solidFill>
+          <a:ln>
+            <a:noFill/>
+          </a:ln>
+          <a:effectLst/>
+        </p:spPr>
+        <p:style>
+          <a:lnRef idx="1">
+            <a:schemeClr val="accent1"/>
+          </a:lnRef>
+          <a:fillRef idx="3">
+            <a:schemeClr val="accent1"/>
+          </a:fillRef>
+          <a:effectRef idx="2">
+            <a:schemeClr val="accent1"/>
+          </a:effectRef>
+          <a:fontRef idx="minor">
+            <a:schemeClr val="lt1"/>
+          </a:fontRef>
+        </p:style>
+        <p:txBody>
+          <a:bodyPr rtlCol="0" anchor="ctr"/>
+          <a:lstStyle/>
+          <a:p>
+            <a:pPr algn="ctr"/>
+          </a:p>
+        </p:txBody>
+      </p:sp>
+      <p:sp>
+        <p:nvSpPr>
+          <p:cNvPr id="31" name="Rectangle 30"/>
+          <p:cNvSpPr/>
+          <p:nvPr/>
+        </p:nvSpPr>
+        <p:spPr>
+          <a:xfrm>
+            <a:off x="566928" y="6455664"/>
+            <a:ext cx="11057839" cy="9144"/>
+          </a:xfrm>
+          <a:prstGeom prst="rect">
+            <a:avLst/>
+          </a:prstGeom>
+          <a:solidFill>
+            <a:srgbClr val="223049"/>
+          </a:solidFill>
+          <a:ln>
+            <a:noFill/>
+          </a:ln>
+          <a:effectLst/>
+        </p:spPr>
+        <p:style>
+          <a:lnRef idx="1">
+            <a:schemeClr val="accent1"/>
+          </a:lnRef>
+          <a:fillRef idx="3">
+            <a:schemeClr val="accent1"/>
+          </a:fillRef>
+          <a:effectRef idx="2">
+            <a:schemeClr val="accent1"/>
+          </a:effectRef>
+          <a:fontRef idx="minor">
+            <a:schemeClr val="lt1"/>
+          </a:fontRef>
+        </p:style>
+        <p:txBody>
+          <a:bodyPr rtlCol="0" anchor="ctr"/>
+          <a:lstStyle/>
+          <a:p>
+            <a:pPr algn="ctr"/>
+          </a:p>
+        </p:txBody>
+      </p:sp>
+      <p:sp>
+        <p:nvSpPr>
+          <p:cNvPr id="32" name="TextBox 31"/>
+          <p:cNvSpPr txBox="1"/>
+          <p:nvPr/>
+        </p:nvSpPr>
+        <p:spPr>
+          <a:xfrm>
+            <a:off x="566928" y="6510528"/>
+            <a:ext cx="9509760" cy="219456"/>
+          </a:xfrm>
+          <a:prstGeom prst="rect">
+            <a:avLst/>
+          </a:prstGeom>
+          <a:noFill/>
+        </p:spPr>
+        <p:txBody>
+          <a:bodyPr wrap="square" lIns="0" rIns="0" tIns="0" bIns="0" anchor="t">
+            <a:spAutoFit/>
+          </a:bodyPr>
+          <a:lstStyle/>
+          <a:p>
+            <a:pPr algn="l">
+              <a:lnSpc>
+                <a:spcPct val="112000"/>
+              </a:lnSpc>
+              <a:spcAft>
+                <a:spcPts val="0"/>
+              </a:spcAft>
+            </a:pPr>
+            <a:r>
+              <a:rPr sz="900" b="0">
+                <a:solidFill>
+                  <a:srgbClr val="8CA0BE"/>
+                </a:solidFill>
+                <a:latin typeface="Segoe UI"/>
+              </a:rPr>
+              <a:t>Appendix · use only if asked</a:t>
+            </a:r>
+          </a:p>
+        </p:txBody>
+      </p:sp>
+      <p:sp>
+        <p:nvSpPr>
+          <p:cNvPr id="33" name="TextBox 32"/>
+          <p:cNvSpPr txBox="1"/>
+          <p:nvPr/>
+        </p:nvSpPr>
+        <p:spPr>
+          <a:xfrm>
+            <a:off x="10527487" y="6510528"/>
+            <a:ext cx="1097280" cy="219456"/>
+          </a:xfrm>
+          <a:prstGeom prst="rect">
+            <a:avLst/>
+          </a:prstGeom>
+          <a:noFill/>
+        </p:spPr>
+        <p:txBody>
+          <a:bodyPr wrap="square" lIns="0" rIns="0" tIns="0" bIns="0" anchor="t">
+            <a:spAutoFit/>
+          </a:bodyPr>
+          <a:lstStyle/>
+          <a:p>
+            <a:pPr algn="r">
+              <a:lnSpc>
+                <a:spcPct val="112000"/>
+              </a:lnSpc>
+              <a:spcAft>
+                <a:spcPts val="0"/>
+              </a:spcAft>
+            </a:pPr>
+            <a:r>
+              <a:rPr sz="900" b="0">
+                <a:solidFill>
+                  <a:srgbClr val="8CA0BE"/>
+                </a:solidFill>
+                <a:latin typeface="Consolas"/>
+              </a:rPr>
+              <a:t>25</a:t>
             </a:r>
           </a:p>
         </p:txBody>
@@ -35445,8 +36975,8 @@
         </p:nvSpPr>
         <p:spPr>
           <a:xfrm>
-            <a:off x="566928" y="1572768"/>
-            <a:ext cx="5989320" cy="1920240"/>
+            <a:off x="566928" y="1517904"/>
+            <a:ext cx="5989320" cy="2194560"/>
           </a:xfrm>
           <a:prstGeom prst="rect">
             <a:avLst/>
@@ -35588,8 +37118,8 @@
         </p:nvSpPr>
         <p:spPr>
           <a:xfrm>
-            <a:off x="566928" y="3730752"/>
-            <a:ext cx="2889504" cy="1042415"/>
+            <a:off x="566928" y="3895344"/>
+            <a:ext cx="2889504" cy="1097280"/>
           </a:xfrm>
           <a:prstGeom prst="roundRect">
             <a:avLst>
@@ -35636,8 +37166,8 @@
         </p:nvSpPr>
         <p:spPr>
           <a:xfrm>
-            <a:off x="566928" y="3858768"/>
-            <a:ext cx="32004" cy="786384"/>
+            <a:off x="566928" y="4041648"/>
+            <a:ext cx="32004" cy="804671"/>
           </a:xfrm>
           <a:prstGeom prst="rect">
             <a:avLst/>
@@ -35680,8 +37210,8 @@
         </p:nvSpPr>
         <p:spPr>
           <a:xfrm>
-            <a:off x="749808" y="3877056"/>
-            <a:ext cx="2615184" cy="822960"/>
+            <a:off x="768096" y="4059935"/>
+            <a:ext cx="2578608" cy="786383"/>
           </a:xfrm>
           <a:prstGeom prst="rect">
             <a:avLst/>
@@ -35741,8 +37271,8 @@
         </p:nvSpPr>
         <p:spPr>
           <a:xfrm>
-            <a:off x="3621024" y="3730752"/>
-            <a:ext cx="2889504" cy="1042415"/>
+            <a:off x="3621024" y="3895344"/>
+            <a:ext cx="2889504" cy="1097280"/>
           </a:xfrm>
           <a:prstGeom prst="roundRect">
             <a:avLst>
@@ -35789,8 +37319,8 @@
         </p:nvSpPr>
         <p:spPr>
           <a:xfrm>
-            <a:off x="3621024" y="3858768"/>
-            <a:ext cx="32004" cy="786384"/>
+            <a:off x="3621024" y="4041648"/>
+            <a:ext cx="32004" cy="804671"/>
           </a:xfrm>
           <a:prstGeom prst="rect">
             <a:avLst/>
@@ -35833,8 +37363,8 @@
         </p:nvSpPr>
         <p:spPr>
           <a:xfrm>
-            <a:off x="3803904" y="3877056"/>
-            <a:ext cx="2615184" cy="822960"/>
+            <a:off x="3822191" y="4059935"/>
+            <a:ext cx="2578608" cy="786383"/>
           </a:xfrm>
           <a:prstGeom prst="rect">
             <a:avLst/>
@@ -35894,8 +37424,8 @@
         </p:nvSpPr>
         <p:spPr>
           <a:xfrm>
-            <a:off x="566928" y="4919472"/>
-            <a:ext cx="2889504" cy="1042415"/>
+            <a:off x="566928" y="5120640"/>
+            <a:ext cx="2889504" cy="1097280"/>
           </a:xfrm>
           <a:prstGeom prst="roundRect">
             <a:avLst>
@@ -35942,8 +37472,8 @@
         </p:nvSpPr>
         <p:spPr>
           <a:xfrm>
-            <a:off x="566928" y="5047488"/>
-            <a:ext cx="32004" cy="786384"/>
+            <a:off x="566928" y="5266944"/>
+            <a:ext cx="32004" cy="804671"/>
           </a:xfrm>
           <a:prstGeom prst="rect">
             <a:avLst/>
@@ -35986,8 +37516,8 @@
         </p:nvSpPr>
         <p:spPr>
           <a:xfrm>
-            <a:off x="749808" y="5065776"/>
-            <a:ext cx="2615184" cy="822960"/>
+            <a:off x="768096" y="5285231"/>
+            <a:ext cx="2578608" cy="786383"/>
           </a:xfrm>
           <a:prstGeom prst="rect">
             <a:avLst/>
@@ -36047,8 +37577,8 @@
         </p:nvSpPr>
         <p:spPr>
           <a:xfrm>
-            <a:off x="3621024" y="4919472"/>
-            <a:ext cx="2889504" cy="1042415"/>
+            <a:off x="3621024" y="5120640"/>
+            <a:ext cx="2889504" cy="1097280"/>
           </a:xfrm>
           <a:prstGeom prst="roundRect">
             <a:avLst>
@@ -36095,8 +37625,8 @@
         </p:nvSpPr>
         <p:spPr>
           <a:xfrm>
-            <a:off x="3621024" y="5047488"/>
-            <a:ext cx="32004" cy="786384"/>
+            <a:off x="3621024" y="5266944"/>
+            <a:ext cx="32004" cy="804671"/>
           </a:xfrm>
           <a:prstGeom prst="rect">
             <a:avLst/>
@@ -36139,8 +37669,8 @@
         </p:nvSpPr>
         <p:spPr>
           <a:xfrm>
-            <a:off x="3803904" y="5065776"/>
-            <a:ext cx="2615184" cy="822960"/>
+            <a:off x="3822191" y="5285231"/>
+            <a:ext cx="2578608" cy="786383"/>
           </a:xfrm>
           <a:prstGeom prst="rect">
             <a:avLst/>
@@ -36194,61 +37724,13 @@
       </p:sp>
       <p:sp>
         <p:nvSpPr>
-          <p:cNvPr id="20" name="Rounded Rectangle 19"/>
-          <p:cNvSpPr/>
-          <p:nvPr/>
-        </p:nvSpPr>
-        <p:spPr>
-          <a:xfrm>
-            <a:off x="6967728" y="1572768"/>
-            <a:ext cx="4654296" cy="4480560"/>
-          </a:xfrm>
-          <a:prstGeom prst="roundRect">
-            <a:avLst>
-              <a:gd name="adj" fmla="val 8000"/>
-            </a:avLst>
-          </a:prstGeom>
-          <a:solidFill>
-            <a:srgbClr val="111A2C"/>
-          </a:solidFill>
-          <a:ln w="12700">
-            <a:solidFill>
-              <a:srgbClr val="223049"/>
-            </a:solidFill>
-          </a:ln>
-          <a:effectLst/>
-        </p:spPr>
-        <p:style>
-          <a:lnRef idx="1">
-            <a:schemeClr val="accent1"/>
-          </a:lnRef>
-          <a:fillRef idx="3">
-            <a:schemeClr val="accent1"/>
-          </a:fillRef>
-          <a:effectRef idx="2">
-            <a:schemeClr val="accent1"/>
-          </a:effectRef>
-          <a:fontRef idx="minor">
-            <a:schemeClr val="lt1"/>
-          </a:fontRef>
-        </p:style>
-        <p:txBody>
-          <a:bodyPr rtlCol="0" anchor="ctr"/>
-          <a:lstStyle/>
-          <a:p>
-            <a:pPr algn="ctr"/>
-          </a:p>
-        </p:txBody>
-      </p:sp>
-      <p:sp>
-        <p:nvSpPr>
-          <p:cNvPr id="21" name="TextBox 20"/>
+          <p:cNvPr id="20" name="TextBox 19"/>
           <p:cNvSpPr txBox="1"/>
           <p:nvPr/>
         </p:nvSpPr>
         <p:spPr>
           <a:xfrm>
-            <a:off x="7187184" y="1719072"/>
+            <a:off x="7187184" y="1700784"/>
             <a:ext cx="4206240" cy="274320"/>
           </a:xfrm>
           <a:prstGeom prst="rect">
@@ -36271,7 +37753,7 @@
               </a:spcAft>
             </a:pPr>
             <a:r>
-              <a:rPr sz="1000" b="1">
+              <a:rPr sz="1050" b="1">
                 <a:solidFill>
                   <a:srgbClr val="8CA0BE"/>
                 </a:solidFill>
@@ -36284,7 +37766,7 @@
       </p:sp>
       <p:pic>
         <p:nvPicPr>
-          <p:cNvPr id="22" name="Picture 21" descr="chart_churn_split.png"/>
+          <p:cNvPr id="21" name="Picture 20" descr="chart_churn_split.png"/>
           <p:cNvPicPr>
             <a:picLocks noChangeAspect="1"/>
           </p:cNvPicPr>
@@ -36298,8 +37780,8 @@
         </p:blipFill>
         <p:spPr>
           <a:xfrm>
-            <a:off x="7278268" y="1975104"/>
-            <a:ext cx="4033215" cy="3566160"/>
+            <a:off x="7511796" y="1956815"/>
+            <a:ext cx="3566159" cy="3566159"/>
           </a:xfrm>
           <a:prstGeom prst="rect">
             <a:avLst/>
@@ -36308,14 +37790,14 @@
       </p:pic>
       <p:sp>
         <p:nvSpPr>
-          <p:cNvPr id="23" name="TextBox 22"/>
+          <p:cNvPr id="22" name="TextBox 21"/>
           <p:cNvSpPr txBox="1"/>
           <p:nvPr/>
         </p:nvSpPr>
         <p:spPr>
           <a:xfrm>
-            <a:off x="7187184" y="5541264"/>
-            <a:ext cx="4206240" cy="457200"/>
+            <a:off x="7187184" y="5614416"/>
+            <a:ext cx="4206240" cy="603504"/>
           </a:xfrm>
           <a:prstGeom prst="rect">
             <a:avLst/>
@@ -36343,14 +37825,14 @@
                 </a:solidFill>
                 <a:latin typeface="Segoe UI"/>
               </a:rPr>
-              <a:t>Predicting "nobody churns" is already 73.46% accurate — which is why accuracy alone decides nothing in this project.</a:t>
-            </a:r>
-          </a:p>
-        </p:txBody>
-      </p:sp>
-      <p:sp>
-        <p:nvSpPr>
-          <p:cNvPr id="24" name="Rectangle 23"/>
+              <a:t>1,869 churned · 5,174 retained of 7,043. Predicting "nobody churns" is already 73.46% accurate — which is why accuracy alone decides nothing here.</a:t>
+            </a:r>
+          </a:p>
+        </p:txBody>
+      </p:sp>
+      <p:sp>
+        <p:nvSpPr>
+          <p:cNvPr id="23" name="Rectangle 22"/>
           <p:cNvSpPr/>
           <p:nvPr/>
         </p:nvSpPr>
@@ -36394,7 +37876,7 @@
       </p:sp>
       <p:sp>
         <p:nvSpPr>
-          <p:cNvPr id="25" name="Rectangle 24"/>
+          <p:cNvPr id="24" name="Rectangle 23"/>
           <p:cNvSpPr/>
           <p:nvPr/>
         </p:nvSpPr>
@@ -36438,7 +37920,7 @@
       </p:sp>
       <p:sp>
         <p:nvSpPr>
-          <p:cNvPr id="26" name="Rectangle 25"/>
+          <p:cNvPr id="25" name="Rectangle 24"/>
           <p:cNvSpPr/>
           <p:nvPr/>
         </p:nvSpPr>
@@ -36482,7 +37964,7 @@
       </p:sp>
       <p:sp>
         <p:nvSpPr>
-          <p:cNvPr id="27" name="Rectangle 26"/>
+          <p:cNvPr id="26" name="Rectangle 25"/>
           <p:cNvSpPr/>
           <p:nvPr/>
         </p:nvSpPr>
@@ -36526,7 +38008,7 @@
       </p:sp>
       <p:sp>
         <p:nvSpPr>
-          <p:cNvPr id="28" name="Rectangle 27"/>
+          <p:cNvPr id="27" name="Rectangle 26"/>
           <p:cNvSpPr/>
           <p:nvPr/>
         </p:nvSpPr>
@@ -36570,7 +38052,7 @@
       </p:sp>
       <p:sp>
         <p:nvSpPr>
-          <p:cNvPr id="29" name="Rectangle 28"/>
+          <p:cNvPr id="28" name="Rectangle 27"/>
           <p:cNvSpPr/>
           <p:nvPr/>
         </p:nvSpPr>
@@ -36614,7 +38096,7 @@
       </p:sp>
       <p:sp>
         <p:nvSpPr>
-          <p:cNvPr id="30" name="Rectangle 29"/>
+          <p:cNvPr id="29" name="Rectangle 28"/>
           <p:cNvSpPr/>
           <p:nvPr/>
         </p:nvSpPr>
@@ -36658,7 +38140,7 @@
       </p:sp>
       <p:sp>
         <p:nvSpPr>
-          <p:cNvPr id="31" name="Rectangle 30"/>
+          <p:cNvPr id="30" name="Rectangle 29"/>
           <p:cNvSpPr/>
           <p:nvPr/>
         </p:nvSpPr>
@@ -36702,7 +38184,7 @@
       </p:sp>
       <p:sp>
         <p:nvSpPr>
-          <p:cNvPr id="32" name="Rectangle 31"/>
+          <p:cNvPr id="31" name="Rectangle 30"/>
           <p:cNvSpPr/>
           <p:nvPr/>
         </p:nvSpPr>
@@ -36746,7 +38228,7 @@
       </p:sp>
       <p:sp>
         <p:nvSpPr>
-          <p:cNvPr id="33" name="Rectangle 32"/>
+          <p:cNvPr id="32" name="Rectangle 31"/>
           <p:cNvSpPr/>
           <p:nvPr/>
         </p:nvSpPr>
@@ -36790,7 +38272,7 @@
       </p:sp>
       <p:sp>
         <p:nvSpPr>
-          <p:cNvPr id="34" name="Rectangle 33"/>
+          <p:cNvPr id="33" name="Rectangle 32"/>
           <p:cNvSpPr/>
           <p:nvPr/>
         </p:nvSpPr>
@@ -36834,7 +38316,7 @@
       </p:sp>
       <p:sp>
         <p:nvSpPr>
-          <p:cNvPr id="35" name="Rectangle 34"/>
+          <p:cNvPr id="34" name="Rectangle 33"/>
           <p:cNvSpPr/>
           <p:nvPr/>
         </p:nvSpPr>
@@ -36878,7 +38360,7 @@
       </p:sp>
       <p:sp>
         <p:nvSpPr>
-          <p:cNvPr id="36" name="Rectangle 35"/>
+          <p:cNvPr id="35" name="Rectangle 34"/>
           <p:cNvSpPr/>
           <p:nvPr/>
         </p:nvSpPr>
@@ -36922,7 +38404,7 @@
       </p:sp>
       <p:sp>
         <p:nvSpPr>
-          <p:cNvPr id="37" name="Rectangle 36"/>
+          <p:cNvPr id="36" name="Rectangle 35"/>
           <p:cNvSpPr/>
           <p:nvPr/>
         </p:nvSpPr>
@@ -36966,7 +38448,7 @@
       </p:sp>
       <p:sp>
         <p:nvSpPr>
-          <p:cNvPr id="38" name="Rectangle 37"/>
+          <p:cNvPr id="37" name="Rectangle 36"/>
           <p:cNvSpPr/>
           <p:nvPr/>
         </p:nvSpPr>
@@ -37010,7 +38492,7 @@
       </p:sp>
       <p:sp>
         <p:nvSpPr>
-          <p:cNvPr id="39" name="TextBox 38"/>
+          <p:cNvPr id="38" name="TextBox 37"/>
           <p:cNvSpPr txBox="1"/>
           <p:nvPr/>
         </p:nvSpPr>
@@ -37052,7 +38534,7 @@
       </p:sp>
       <p:sp>
         <p:nvSpPr>
-          <p:cNvPr id="40" name="TextBox 39"/>
+          <p:cNvPr id="39" name="TextBox 38"/>
           <p:cNvSpPr txBox="1"/>
           <p:nvPr/>
         </p:nvSpPr>
@@ -37332,8 +38814,8 @@
         </p:nvSpPr>
         <p:spPr>
           <a:xfrm>
-            <a:off x="566928" y="1554480"/>
-            <a:ext cx="2094524" cy="969264"/>
+            <a:off x="566928" y="1517904"/>
+            <a:ext cx="2094524" cy="1078992"/>
           </a:xfrm>
           <a:prstGeom prst="roundRect">
             <a:avLst>
@@ -37380,8 +38862,8 @@
         </p:nvSpPr>
         <p:spPr>
           <a:xfrm>
-            <a:off x="713232" y="1682495"/>
-            <a:ext cx="1838492" cy="768096"/>
+            <a:off x="713232" y="1645919"/>
+            <a:ext cx="1838492" cy="877824"/>
           </a:xfrm>
           <a:prstGeom prst="rect">
             <a:avLst/>
@@ -37403,7 +38885,7 @@
               </a:spcAft>
             </a:pPr>
             <a:r>
-              <a:rPr sz="2000" b="1">
+              <a:rPr sz="2100" b="1">
                 <a:solidFill>
                   <a:srgbClr val="EAF0F7"/>
                 </a:solidFill>
@@ -37441,8 +38923,8 @@
         </p:nvSpPr>
         <p:spPr>
           <a:xfrm>
-            <a:off x="2807756" y="1554480"/>
-            <a:ext cx="2094524" cy="969264"/>
+            <a:off x="2807756" y="1517904"/>
+            <a:ext cx="2094524" cy="1078992"/>
           </a:xfrm>
           <a:prstGeom prst="roundRect">
             <a:avLst>
@@ -37489,8 +38971,8 @@
         </p:nvSpPr>
         <p:spPr>
           <a:xfrm>
-            <a:off x="2954060" y="1682495"/>
-            <a:ext cx="1838492" cy="768096"/>
+            <a:off x="2954060" y="1645919"/>
+            <a:ext cx="1838492" cy="877824"/>
           </a:xfrm>
           <a:prstGeom prst="rect">
             <a:avLst/>
@@ -37512,7 +38994,7 @@
               </a:spcAft>
             </a:pPr>
             <a:r>
-              <a:rPr sz="2000" b="1">
+              <a:rPr sz="2100" b="1">
                 <a:solidFill>
                   <a:srgbClr val="EAF0F7"/>
                 </a:solidFill>
@@ -37550,8 +39032,8 @@
         </p:nvSpPr>
         <p:spPr>
           <a:xfrm>
-            <a:off x="5048585" y="1554480"/>
-            <a:ext cx="2094524" cy="969264"/>
+            <a:off x="5048585" y="1517904"/>
+            <a:ext cx="2094524" cy="1078992"/>
           </a:xfrm>
           <a:prstGeom prst="roundRect">
             <a:avLst>
@@ -37598,8 +39080,8 @@
         </p:nvSpPr>
         <p:spPr>
           <a:xfrm>
-            <a:off x="5194889" y="1682495"/>
-            <a:ext cx="1838492" cy="768096"/>
+            <a:off x="5194889" y="1645919"/>
+            <a:ext cx="1838492" cy="877824"/>
           </a:xfrm>
           <a:prstGeom prst="rect">
             <a:avLst/>
@@ -37621,7 +39103,7 @@
               </a:spcAft>
             </a:pPr>
             <a:r>
-              <a:rPr sz="2000" b="1">
+              <a:rPr sz="2100" b="1">
                 <a:solidFill>
                   <a:srgbClr val="EAF0F7"/>
                 </a:solidFill>
@@ -37659,8 +39141,8 @@
         </p:nvSpPr>
         <p:spPr>
           <a:xfrm>
-            <a:off x="7289413" y="1554480"/>
-            <a:ext cx="2094524" cy="969264"/>
+            <a:off x="7289413" y="1517904"/>
+            <a:ext cx="2094524" cy="1078992"/>
           </a:xfrm>
           <a:prstGeom prst="roundRect">
             <a:avLst>
@@ -37707,8 +39189,8 @@
         </p:nvSpPr>
         <p:spPr>
           <a:xfrm>
-            <a:off x="7435717" y="1682495"/>
-            <a:ext cx="1838492" cy="768096"/>
+            <a:off x="7435717" y="1645919"/>
+            <a:ext cx="1838492" cy="877824"/>
           </a:xfrm>
           <a:prstGeom prst="rect">
             <a:avLst/>
@@ -37730,7 +39212,7 @@
               </a:spcAft>
             </a:pPr>
             <a:r>
-              <a:rPr sz="2000" b="1">
+              <a:rPr sz="2100" b="1">
                 <a:solidFill>
                   <a:srgbClr val="FF5C6C"/>
                 </a:solidFill>
@@ -37768,8 +39250,8 @@
         </p:nvSpPr>
         <p:spPr>
           <a:xfrm>
-            <a:off x="9530242" y="1554480"/>
-            <a:ext cx="2094524" cy="969264"/>
+            <a:off x="9530242" y="1517904"/>
+            <a:ext cx="2094524" cy="1078992"/>
           </a:xfrm>
           <a:prstGeom prst="roundRect">
             <a:avLst>
@@ -37816,8 +39298,8 @@
         </p:nvSpPr>
         <p:spPr>
           <a:xfrm>
-            <a:off x="9676546" y="1682495"/>
-            <a:ext cx="1838492" cy="768096"/>
+            <a:off x="9676546" y="1645919"/>
+            <a:ext cx="1838492" cy="877824"/>
           </a:xfrm>
           <a:prstGeom prst="rect">
             <a:avLst/>
@@ -37839,7 +39321,7 @@
               </a:spcAft>
             </a:pPr>
             <a:r>
-              <a:rPr sz="2000" b="1">
+              <a:rPr sz="2100" b="1">
                 <a:solidFill>
                   <a:srgbClr val="4C8DFF"/>
                 </a:solidFill>
@@ -37877,8 +39359,8 @@
         </p:nvSpPr>
         <p:spPr>
           <a:xfrm>
-            <a:off x="566928" y="2706624"/>
-            <a:ext cx="5394960" cy="2377440"/>
+            <a:off x="566928" y="2779776"/>
+            <a:ext cx="5394960" cy="3438144"/>
           </a:xfrm>
           <a:prstGeom prst="rect">
             <a:avLst/>
@@ -38017,8 +39499,8 @@
         </p:nvSpPr>
         <p:spPr>
           <a:xfrm>
-            <a:off x="6263640" y="2706624"/>
-            <a:ext cx="5358384" cy="1188720"/>
+            <a:off x="6263640" y="2779776"/>
+            <a:ext cx="5358384" cy="1645919"/>
           </a:xfrm>
           <a:prstGeom prst="roundRect">
             <a:avLst>
@@ -38065,8 +39547,8 @@
         </p:nvSpPr>
         <p:spPr>
           <a:xfrm>
-            <a:off x="6446520" y="2834640"/>
-            <a:ext cx="4992624" cy="950976"/>
+            <a:off x="6446520" y="2907792"/>
+            <a:ext cx="4992624" cy="1408175"/>
           </a:xfrm>
           <a:prstGeom prst="rect">
             <a:avLst/>
@@ -38126,8 +39608,8 @@
         </p:nvSpPr>
         <p:spPr>
           <a:xfrm>
-            <a:off x="6263640" y="4059935"/>
-            <a:ext cx="5358384" cy="1188720"/>
+            <a:off x="6263640" y="4572000"/>
+            <a:ext cx="5358384" cy="1645919"/>
           </a:xfrm>
           <a:prstGeom prst="roundRect">
             <a:avLst>
@@ -38174,8 +39656,8 @@
         </p:nvSpPr>
         <p:spPr>
           <a:xfrm>
-            <a:off x="6446520" y="4187951"/>
-            <a:ext cx="4992624" cy="950976"/>
+            <a:off x="6446520" y="4700016"/>
+            <a:ext cx="4992624" cy="1408175"/>
           </a:xfrm>
           <a:prstGeom prst="rect">
             <a:avLst/>
@@ -39211,8 +40693,8 @@
         </p:nvSpPr>
         <p:spPr>
           <a:xfrm>
-            <a:off x="566928" y="1572768"/>
-            <a:ext cx="2558719" cy="1005840"/>
+            <a:off x="566928" y="1517904"/>
+            <a:ext cx="2558719" cy="1188720"/>
           </a:xfrm>
           <a:prstGeom prst="roundRect">
             <a:avLst>
@@ -39259,8 +40741,570 @@
         </p:nvSpPr>
         <p:spPr>
           <a:xfrm>
-            <a:off x="731520" y="1700784"/>
-            <a:ext cx="2229535" cy="786384"/>
+            <a:off x="749808" y="1719072"/>
+            <a:ext cx="2192959" cy="822960"/>
+          </a:xfrm>
+          <a:prstGeom prst="rect">
+            <a:avLst/>
+          </a:prstGeom>
+          <a:noFill/>
+        </p:spPr>
+        <p:txBody>
+          <a:bodyPr wrap="square" lIns="0" rIns="0" tIns="0" bIns="0" anchor="t">
+            <a:spAutoFit/>
+          </a:bodyPr>
+          <a:lstStyle/>
+          <a:p>
+            <a:pPr algn="l">
+              <a:lnSpc>
+                <a:spcPct val="112000"/>
+              </a:lnSpc>
+              <a:spcAft>
+                <a:spcPts val="400"/>
+              </a:spcAft>
+            </a:pPr>
+            <a:r>
+              <a:rPr sz="1350" b="1">
+                <a:solidFill>
+                  <a:srgbClr val="EAF0F7"/>
+                </a:solidFill>
+                <a:latin typeface="Segoe UI"/>
+              </a:rPr>
+              <a:t>Raw upload</a:t>
+            </a:r>
+          </a:p>
+          <a:p>
+            <a:pPr algn="l">
+              <a:lnSpc>
+                <a:spcPct val="114000"/>
+              </a:lnSpc>
+              <a:spcAft>
+                <a:spcPts val="0"/>
+              </a:spcAft>
+            </a:pPr>
+            <a:r>
+              <a:rPr sz="1000" b="0">
+                <a:solidFill>
+                  <a:srgbClr val="8CA0BE"/>
+                </a:solidFill>
+                <a:latin typeface="Segoe UI"/>
+              </a:rPr>
+              <a:t>7,043 records · 34 columns</a:t>
+            </a:r>
+          </a:p>
+        </p:txBody>
+      </p:sp>
+      <p:sp>
+        <p:nvSpPr>
+          <p:cNvPr id="9" name="TextBox 8"/>
+          <p:cNvSpPr txBox="1"/>
+          <p:nvPr/>
+        </p:nvSpPr>
+        <p:spPr>
+          <a:xfrm>
+            <a:off x="3143935" y="1929384"/>
+            <a:ext cx="256032" cy="365760"/>
+          </a:xfrm>
+          <a:prstGeom prst="rect">
+            <a:avLst/>
+          </a:prstGeom>
+          <a:noFill/>
+        </p:spPr>
+        <p:txBody>
+          <a:bodyPr wrap="square" lIns="0" rIns="0" tIns="0" bIns="0" anchor="t">
+            <a:spAutoFit/>
+          </a:bodyPr>
+          <a:lstStyle/>
+          <a:p>
+            <a:pPr algn="ctr">
+              <a:lnSpc>
+                <a:spcPct val="112000"/>
+              </a:lnSpc>
+              <a:spcAft>
+                <a:spcPts val="0"/>
+              </a:spcAft>
+            </a:pPr>
+            <a:r>
+              <a:rPr sz="1700" b="1">
+                <a:solidFill>
+                  <a:srgbClr val="2FD8B4"/>
+                </a:solidFill>
+                <a:latin typeface="Segoe UI"/>
+              </a:rPr>
+              <a:t>→</a:t>
+            </a:r>
+          </a:p>
+        </p:txBody>
+      </p:sp>
+      <p:sp>
+        <p:nvSpPr>
+          <p:cNvPr id="10" name="Rounded Rectangle 9"/>
+          <p:cNvSpPr/>
+          <p:nvPr/>
+        </p:nvSpPr>
+        <p:spPr>
+          <a:xfrm>
+            <a:off x="3399967" y="1517904"/>
+            <a:ext cx="2558719" cy="1188720"/>
+          </a:xfrm>
+          <a:prstGeom prst="roundRect">
+            <a:avLst>
+              <a:gd name="adj" fmla="val 8000"/>
+            </a:avLst>
+          </a:prstGeom>
+          <a:solidFill>
+            <a:srgbClr val="162136"/>
+          </a:solidFill>
+          <a:ln w="15240">
+            <a:solidFill>
+              <a:srgbClr val="4C8DFF"/>
+            </a:solidFill>
+          </a:ln>
+          <a:effectLst/>
+        </p:spPr>
+        <p:style>
+          <a:lnRef idx="1">
+            <a:schemeClr val="accent1"/>
+          </a:lnRef>
+          <a:fillRef idx="3">
+            <a:schemeClr val="accent1"/>
+          </a:fillRef>
+          <a:effectRef idx="2">
+            <a:schemeClr val="accent1"/>
+          </a:effectRef>
+          <a:fontRef idx="minor">
+            <a:schemeClr val="lt1"/>
+          </a:fontRef>
+        </p:style>
+        <p:txBody>
+          <a:bodyPr rtlCol="0" anchor="ctr"/>
+          <a:lstStyle/>
+          <a:p>
+            <a:pPr algn="ctr"/>
+          </a:p>
+        </p:txBody>
+      </p:sp>
+      <p:sp>
+        <p:nvSpPr>
+          <p:cNvPr id="11" name="TextBox 10"/>
+          <p:cNvSpPr txBox="1"/>
+          <p:nvPr/>
+        </p:nvSpPr>
+        <p:spPr>
+          <a:xfrm>
+            <a:off x="3582847" y="1719072"/>
+            <a:ext cx="2192959" cy="822960"/>
+          </a:xfrm>
+          <a:prstGeom prst="rect">
+            <a:avLst/>
+          </a:prstGeom>
+          <a:noFill/>
+        </p:spPr>
+        <p:txBody>
+          <a:bodyPr wrap="square" lIns="0" rIns="0" tIns="0" bIns="0" anchor="t">
+            <a:spAutoFit/>
+          </a:bodyPr>
+          <a:lstStyle/>
+          <a:p>
+            <a:pPr algn="l">
+              <a:lnSpc>
+                <a:spcPct val="112000"/>
+              </a:lnSpc>
+              <a:spcAft>
+                <a:spcPts val="400"/>
+              </a:spcAft>
+            </a:pPr>
+            <a:r>
+              <a:rPr sz="1350" b="1">
+                <a:solidFill>
+                  <a:srgbClr val="EAF0F7"/>
+                </a:solidFill>
+                <a:latin typeface="Segoe UI"/>
+              </a:rPr>
+              <a:t>Clean</a:t>
+            </a:r>
+          </a:p>
+          <a:p>
+            <a:pPr algn="l">
+              <a:lnSpc>
+                <a:spcPct val="114000"/>
+              </a:lnSpc>
+              <a:spcAft>
+                <a:spcPts val="0"/>
+              </a:spcAft>
+            </a:pPr>
+            <a:r>
+              <a:rPr sz="1000" b="0">
+                <a:solidFill>
+                  <a:srgbClr val="8CA0BE"/>
+                </a:solidFill>
+                <a:latin typeface="Segoe UI"/>
+              </a:rPr>
+              <a:t>types, blanks, duplicates, category names</a:t>
+            </a:r>
+          </a:p>
+        </p:txBody>
+      </p:sp>
+      <p:sp>
+        <p:nvSpPr>
+          <p:cNvPr id="12" name="TextBox 11"/>
+          <p:cNvSpPr txBox="1"/>
+          <p:nvPr/>
+        </p:nvSpPr>
+        <p:spPr>
+          <a:xfrm>
+            <a:off x="5976975" y="1929384"/>
+            <a:ext cx="256032" cy="365760"/>
+          </a:xfrm>
+          <a:prstGeom prst="rect">
+            <a:avLst/>
+          </a:prstGeom>
+          <a:noFill/>
+        </p:spPr>
+        <p:txBody>
+          <a:bodyPr wrap="square" lIns="0" rIns="0" tIns="0" bIns="0" anchor="t">
+            <a:spAutoFit/>
+          </a:bodyPr>
+          <a:lstStyle/>
+          <a:p>
+            <a:pPr algn="ctr">
+              <a:lnSpc>
+                <a:spcPct val="112000"/>
+              </a:lnSpc>
+              <a:spcAft>
+                <a:spcPts val="0"/>
+              </a:spcAft>
+            </a:pPr>
+            <a:r>
+              <a:rPr sz="1700" b="1">
+                <a:solidFill>
+                  <a:srgbClr val="2FD8B4"/>
+                </a:solidFill>
+                <a:latin typeface="Segoe UI"/>
+              </a:rPr>
+              <a:t>→</a:t>
+            </a:r>
+          </a:p>
+        </p:txBody>
+      </p:sp>
+      <p:sp>
+        <p:nvSpPr>
+          <p:cNvPr id="13" name="Rounded Rectangle 12"/>
+          <p:cNvSpPr/>
+          <p:nvPr/>
+        </p:nvSpPr>
+        <p:spPr>
+          <a:xfrm>
+            <a:off x="6233007" y="1517904"/>
+            <a:ext cx="2558719" cy="1188720"/>
+          </a:xfrm>
+          <a:prstGeom prst="roundRect">
+            <a:avLst>
+              <a:gd name="adj" fmla="val 8000"/>
+            </a:avLst>
+          </a:prstGeom>
+          <a:solidFill>
+            <a:srgbClr val="162136"/>
+          </a:solidFill>
+          <a:ln w="15240">
+            <a:solidFill>
+              <a:srgbClr val="F5A623"/>
+            </a:solidFill>
+          </a:ln>
+          <a:effectLst/>
+        </p:spPr>
+        <p:style>
+          <a:lnRef idx="1">
+            <a:schemeClr val="accent1"/>
+          </a:lnRef>
+          <a:fillRef idx="3">
+            <a:schemeClr val="accent1"/>
+          </a:fillRef>
+          <a:effectRef idx="2">
+            <a:schemeClr val="accent1"/>
+          </a:effectRef>
+          <a:fontRef idx="minor">
+            <a:schemeClr val="lt1"/>
+          </a:fontRef>
+        </p:style>
+        <p:txBody>
+          <a:bodyPr rtlCol="0" anchor="ctr"/>
+          <a:lstStyle/>
+          <a:p>
+            <a:pPr algn="ctr"/>
+          </a:p>
+        </p:txBody>
+      </p:sp>
+      <p:sp>
+        <p:nvSpPr>
+          <p:cNvPr id="14" name="TextBox 13"/>
+          <p:cNvSpPr txBox="1"/>
+          <p:nvPr/>
+        </p:nvSpPr>
+        <p:spPr>
+          <a:xfrm>
+            <a:off x="6415887" y="1719072"/>
+            <a:ext cx="2192959" cy="822960"/>
+          </a:xfrm>
+          <a:prstGeom prst="rect">
+            <a:avLst/>
+          </a:prstGeom>
+          <a:noFill/>
+        </p:spPr>
+        <p:txBody>
+          <a:bodyPr wrap="square" lIns="0" rIns="0" tIns="0" bIns="0" anchor="t">
+            <a:spAutoFit/>
+          </a:bodyPr>
+          <a:lstStyle/>
+          <a:p>
+            <a:pPr algn="l">
+              <a:lnSpc>
+                <a:spcPct val="112000"/>
+              </a:lnSpc>
+              <a:spcAft>
+                <a:spcPts val="400"/>
+              </a:spcAft>
+            </a:pPr>
+            <a:r>
+              <a:rPr sz="1350" b="1">
+                <a:solidFill>
+                  <a:srgbClr val="EAF0F7"/>
+                </a:solidFill>
+                <a:latin typeface="Segoe UI"/>
+              </a:rPr>
+              <a:t>Encode</a:t>
+            </a:r>
+          </a:p>
+          <a:p>
+            <a:pPr algn="l">
+              <a:lnSpc>
+                <a:spcPct val="114000"/>
+              </a:lnSpc>
+              <a:spcAft>
+                <a:spcPts val="0"/>
+              </a:spcAft>
+            </a:pPr>
+            <a:r>
+              <a:rPr sz="1000" b="0">
+                <a:solidFill>
+                  <a:srgbClr val="8CA0BE"/>
+                </a:solidFill>
+                <a:latin typeface="Segoe UI"/>
+              </a:rPr>
+              <a:t>16 categoricals → 27 flags</a:t>
+            </a:r>
+          </a:p>
+        </p:txBody>
+      </p:sp>
+      <p:sp>
+        <p:nvSpPr>
+          <p:cNvPr id="15" name="TextBox 14"/>
+          <p:cNvSpPr txBox="1"/>
+          <p:nvPr/>
+        </p:nvSpPr>
+        <p:spPr>
+          <a:xfrm>
+            <a:off x="8810015" y="1929384"/>
+            <a:ext cx="256032" cy="365760"/>
+          </a:xfrm>
+          <a:prstGeom prst="rect">
+            <a:avLst/>
+          </a:prstGeom>
+          <a:noFill/>
+        </p:spPr>
+        <p:txBody>
+          <a:bodyPr wrap="square" lIns="0" rIns="0" tIns="0" bIns="0" anchor="t">
+            <a:spAutoFit/>
+          </a:bodyPr>
+          <a:lstStyle/>
+          <a:p>
+            <a:pPr algn="ctr">
+              <a:lnSpc>
+                <a:spcPct val="112000"/>
+              </a:lnSpc>
+              <a:spcAft>
+                <a:spcPts val="0"/>
+              </a:spcAft>
+            </a:pPr>
+            <a:r>
+              <a:rPr sz="1700" b="1">
+                <a:solidFill>
+                  <a:srgbClr val="2FD8B4"/>
+                </a:solidFill>
+                <a:latin typeface="Segoe UI"/>
+              </a:rPr>
+              <a:t>→</a:t>
+            </a:r>
+          </a:p>
+        </p:txBody>
+      </p:sp>
+      <p:sp>
+        <p:nvSpPr>
+          <p:cNvPr id="16" name="Rounded Rectangle 15"/>
+          <p:cNvSpPr/>
+          <p:nvPr/>
+        </p:nvSpPr>
+        <p:spPr>
+          <a:xfrm>
+            <a:off x="9066047" y="1517904"/>
+            <a:ext cx="2558719" cy="1188720"/>
+          </a:xfrm>
+          <a:prstGeom prst="roundRect">
+            <a:avLst>
+              <a:gd name="adj" fmla="val 8000"/>
+            </a:avLst>
+          </a:prstGeom>
+          <a:solidFill>
+            <a:srgbClr val="162136"/>
+          </a:solidFill>
+          <a:ln w="15240">
+            <a:solidFill>
+              <a:srgbClr val="2FD8B4"/>
+            </a:solidFill>
+          </a:ln>
+          <a:effectLst/>
+        </p:spPr>
+        <p:style>
+          <a:lnRef idx="1">
+            <a:schemeClr val="accent1"/>
+          </a:lnRef>
+          <a:fillRef idx="3">
+            <a:schemeClr val="accent1"/>
+          </a:fillRef>
+          <a:effectRef idx="2">
+            <a:schemeClr val="accent1"/>
+          </a:effectRef>
+          <a:fontRef idx="minor">
+            <a:schemeClr val="lt1"/>
+          </a:fontRef>
+        </p:style>
+        <p:txBody>
+          <a:bodyPr rtlCol="0" anchor="ctr"/>
+          <a:lstStyle/>
+          <a:p>
+            <a:pPr algn="ctr"/>
+          </a:p>
+        </p:txBody>
+      </p:sp>
+      <p:sp>
+        <p:nvSpPr>
+          <p:cNvPr id="17" name="TextBox 16"/>
+          <p:cNvSpPr txBox="1"/>
+          <p:nvPr/>
+        </p:nvSpPr>
+        <p:spPr>
+          <a:xfrm>
+            <a:off x="9248927" y="1719072"/>
+            <a:ext cx="2192959" cy="822960"/>
+          </a:xfrm>
+          <a:prstGeom prst="rect">
+            <a:avLst/>
+          </a:prstGeom>
+          <a:noFill/>
+        </p:spPr>
+        <p:txBody>
+          <a:bodyPr wrap="square" lIns="0" rIns="0" tIns="0" bIns="0" anchor="t">
+            <a:spAutoFit/>
+          </a:bodyPr>
+          <a:lstStyle/>
+          <a:p>
+            <a:pPr algn="l">
+              <a:lnSpc>
+                <a:spcPct val="112000"/>
+              </a:lnSpc>
+              <a:spcAft>
+                <a:spcPts val="400"/>
+              </a:spcAft>
+            </a:pPr>
+            <a:r>
+              <a:rPr sz="1350" b="1">
+                <a:solidFill>
+                  <a:srgbClr val="EAF0F7"/>
+                </a:solidFill>
+                <a:latin typeface="Segoe UI"/>
+              </a:rPr>
+              <a:t>30 features</a:t>
+            </a:r>
+          </a:p>
+          <a:p>
+            <a:pPr algn="l">
+              <a:lnSpc>
+                <a:spcPct val="114000"/>
+              </a:lnSpc>
+              <a:spcAft>
+                <a:spcPts val="0"/>
+              </a:spcAft>
+            </a:pPr>
+            <a:r>
+              <a:rPr sz="1000" b="0">
+                <a:solidFill>
+                  <a:srgbClr val="8CA0BE"/>
+                </a:solidFill>
+                <a:latin typeface="Segoe UI"/>
+              </a:rPr>
+              <a:t>frozen column contract</a:t>
+            </a:r>
+          </a:p>
+        </p:txBody>
+      </p:sp>
+      <p:sp>
+        <p:nvSpPr>
+          <p:cNvPr id="18" name="Rounded Rectangle 17"/>
+          <p:cNvSpPr/>
+          <p:nvPr/>
+        </p:nvSpPr>
+        <p:spPr>
+          <a:xfrm>
+            <a:off x="566928" y="2889504"/>
+            <a:ext cx="11057839" cy="1371600"/>
+          </a:xfrm>
+          <a:prstGeom prst="roundRect">
+            <a:avLst>
+              <a:gd name="adj" fmla="val 8000"/>
+            </a:avLst>
+          </a:prstGeom>
+          <a:solidFill>
+            <a:srgbClr val="162136"/>
+          </a:solidFill>
+          <a:ln w="15240">
+            <a:solidFill>
+              <a:srgbClr val="F5A623"/>
+            </a:solidFill>
+          </a:ln>
+          <a:effectLst/>
+        </p:spPr>
+        <p:style>
+          <a:lnRef idx="1">
+            <a:schemeClr val="accent1"/>
+          </a:lnRef>
+          <a:fillRef idx="3">
+            <a:schemeClr val="accent1"/>
+          </a:fillRef>
+          <a:effectRef idx="2">
+            <a:schemeClr val="accent1"/>
+          </a:effectRef>
+          <a:fontRef idx="minor">
+            <a:schemeClr val="lt1"/>
+          </a:fontRef>
+        </p:style>
+        <p:txBody>
+          <a:bodyPr rtlCol="0" anchor="ctr"/>
+          <a:lstStyle/>
+          <a:p>
+            <a:pPr algn="ctr"/>
+          </a:p>
+        </p:txBody>
+      </p:sp>
+      <p:sp>
+        <p:nvSpPr>
+          <p:cNvPr id="19" name="TextBox 18"/>
+          <p:cNvSpPr txBox="1"/>
+          <p:nvPr/>
+        </p:nvSpPr>
+        <p:spPr>
+          <a:xfrm>
+            <a:off x="749808" y="3017520"/>
+            <a:ext cx="10692079" cy="1133856"/>
           </a:xfrm>
           <a:prstGeom prst="rect">
             <a:avLst/>
@@ -39282,568 +41326,6 @@
               </a:spcAft>
             </a:pPr>
             <a:r>
-              <a:rPr sz="1300" b="1">
-                <a:solidFill>
-                  <a:srgbClr val="EAF0F7"/>
-                </a:solidFill>
-                <a:latin typeface="Segoe UI"/>
-              </a:rPr>
-              <a:t>Raw upload</a:t>
-            </a:r>
-          </a:p>
-          <a:p>
-            <a:pPr algn="l">
-              <a:lnSpc>
-                <a:spcPct val="114000"/>
-              </a:lnSpc>
-              <a:spcAft>
-                <a:spcPts val="0"/>
-              </a:spcAft>
-            </a:pPr>
-            <a:r>
-              <a:rPr sz="980" b="0">
-                <a:solidFill>
-                  <a:srgbClr val="8CA0BE"/>
-                </a:solidFill>
-                <a:latin typeface="Segoe UI"/>
-              </a:rPr>
-              <a:t>7,043 records · 34 columns</a:t>
-            </a:r>
-          </a:p>
-        </p:txBody>
-      </p:sp>
-      <p:sp>
-        <p:nvSpPr>
-          <p:cNvPr id="9" name="TextBox 8"/>
-          <p:cNvSpPr txBox="1"/>
-          <p:nvPr/>
-        </p:nvSpPr>
-        <p:spPr>
-          <a:xfrm>
-            <a:off x="3143935" y="1847088"/>
-            <a:ext cx="256032" cy="365760"/>
-          </a:xfrm>
-          <a:prstGeom prst="rect">
-            <a:avLst/>
-          </a:prstGeom>
-          <a:noFill/>
-        </p:spPr>
-        <p:txBody>
-          <a:bodyPr wrap="square" lIns="0" rIns="0" tIns="0" bIns="0" anchor="t">
-            <a:spAutoFit/>
-          </a:bodyPr>
-          <a:lstStyle/>
-          <a:p>
-            <a:pPr algn="ctr">
-              <a:lnSpc>
-                <a:spcPct val="112000"/>
-              </a:lnSpc>
-              <a:spcAft>
-                <a:spcPts val="0"/>
-              </a:spcAft>
-            </a:pPr>
-            <a:r>
-              <a:rPr sz="1700" b="1">
-                <a:solidFill>
-                  <a:srgbClr val="2FD8B4"/>
-                </a:solidFill>
-                <a:latin typeface="Segoe UI"/>
-              </a:rPr>
-              <a:t>→</a:t>
-            </a:r>
-          </a:p>
-        </p:txBody>
-      </p:sp>
-      <p:sp>
-        <p:nvSpPr>
-          <p:cNvPr id="10" name="Rounded Rectangle 9"/>
-          <p:cNvSpPr/>
-          <p:nvPr/>
-        </p:nvSpPr>
-        <p:spPr>
-          <a:xfrm>
-            <a:off x="3399967" y="1572768"/>
-            <a:ext cx="2558719" cy="1005840"/>
-          </a:xfrm>
-          <a:prstGeom prst="roundRect">
-            <a:avLst>
-              <a:gd name="adj" fmla="val 8000"/>
-            </a:avLst>
-          </a:prstGeom>
-          <a:solidFill>
-            <a:srgbClr val="162136"/>
-          </a:solidFill>
-          <a:ln w="15240">
-            <a:solidFill>
-              <a:srgbClr val="4C8DFF"/>
-            </a:solidFill>
-          </a:ln>
-          <a:effectLst/>
-        </p:spPr>
-        <p:style>
-          <a:lnRef idx="1">
-            <a:schemeClr val="accent1"/>
-          </a:lnRef>
-          <a:fillRef idx="3">
-            <a:schemeClr val="accent1"/>
-          </a:fillRef>
-          <a:effectRef idx="2">
-            <a:schemeClr val="accent1"/>
-          </a:effectRef>
-          <a:fontRef idx="minor">
-            <a:schemeClr val="lt1"/>
-          </a:fontRef>
-        </p:style>
-        <p:txBody>
-          <a:bodyPr rtlCol="0" anchor="ctr"/>
-          <a:lstStyle/>
-          <a:p>
-            <a:pPr algn="ctr"/>
-          </a:p>
-        </p:txBody>
-      </p:sp>
-      <p:sp>
-        <p:nvSpPr>
-          <p:cNvPr id="11" name="TextBox 10"/>
-          <p:cNvSpPr txBox="1"/>
-          <p:nvPr/>
-        </p:nvSpPr>
-        <p:spPr>
-          <a:xfrm>
-            <a:off x="3564559" y="1700784"/>
-            <a:ext cx="2229535" cy="786384"/>
-          </a:xfrm>
-          <a:prstGeom prst="rect">
-            <a:avLst/>
-          </a:prstGeom>
-          <a:noFill/>
-        </p:spPr>
-        <p:txBody>
-          <a:bodyPr wrap="square" lIns="0" rIns="0" tIns="0" bIns="0" anchor="t">
-            <a:spAutoFit/>
-          </a:bodyPr>
-          <a:lstStyle/>
-          <a:p>
-            <a:pPr algn="l">
-              <a:lnSpc>
-                <a:spcPct val="112000"/>
-              </a:lnSpc>
-              <a:spcAft>
-                <a:spcPts val="300"/>
-              </a:spcAft>
-            </a:pPr>
-            <a:r>
-              <a:rPr sz="1300" b="1">
-                <a:solidFill>
-                  <a:srgbClr val="EAF0F7"/>
-                </a:solidFill>
-                <a:latin typeface="Segoe UI"/>
-              </a:rPr>
-              <a:t>Clean</a:t>
-            </a:r>
-          </a:p>
-          <a:p>
-            <a:pPr algn="l">
-              <a:lnSpc>
-                <a:spcPct val="114000"/>
-              </a:lnSpc>
-              <a:spcAft>
-                <a:spcPts val="0"/>
-              </a:spcAft>
-            </a:pPr>
-            <a:r>
-              <a:rPr sz="980" b="0">
-                <a:solidFill>
-                  <a:srgbClr val="8CA0BE"/>
-                </a:solidFill>
-                <a:latin typeface="Segoe UI"/>
-              </a:rPr>
-              <a:t>types, blanks, duplicates, category names</a:t>
-            </a:r>
-          </a:p>
-        </p:txBody>
-      </p:sp>
-      <p:sp>
-        <p:nvSpPr>
-          <p:cNvPr id="12" name="TextBox 11"/>
-          <p:cNvSpPr txBox="1"/>
-          <p:nvPr/>
-        </p:nvSpPr>
-        <p:spPr>
-          <a:xfrm>
-            <a:off x="5976975" y="1847088"/>
-            <a:ext cx="256032" cy="365760"/>
-          </a:xfrm>
-          <a:prstGeom prst="rect">
-            <a:avLst/>
-          </a:prstGeom>
-          <a:noFill/>
-        </p:spPr>
-        <p:txBody>
-          <a:bodyPr wrap="square" lIns="0" rIns="0" tIns="0" bIns="0" anchor="t">
-            <a:spAutoFit/>
-          </a:bodyPr>
-          <a:lstStyle/>
-          <a:p>
-            <a:pPr algn="ctr">
-              <a:lnSpc>
-                <a:spcPct val="112000"/>
-              </a:lnSpc>
-              <a:spcAft>
-                <a:spcPts val="0"/>
-              </a:spcAft>
-            </a:pPr>
-            <a:r>
-              <a:rPr sz="1700" b="1">
-                <a:solidFill>
-                  <a:srgbClr val="2FD8B4"/>
-                </a:solidFill>
-                <a:latin typeface="Segoe UI"/>
-              </a:rPr>
-              <a:t>→</a:t>
-            </a:r>
-          </a:p>
-        </p:txBody>
-      </p:sp>
-      <p:sp>
-        <p:nvSpPr>
-          <p:cNvPr id="13" name="Rounded Rectangle 12"/>
-          <p:cNvSpPr/>
-          <p:nvPr/>
-        </p:nvSpPr>
-        <p:spPr>
-          <a:xfrm>
-            <a:off x="6233007" y="1572768"/>
-            <a:ext cx="2558719" cy="1005840"/>
-          </a:xfrm>
-          <a:prstGeom prst="roundRect">
-            <a:avLst>
-              <a:gd name="adj" fmla="val 8000"/>
-            </a:avLst>
-          </a:prstGeom>
-          <a:solidFill>
-            <a:srgbClr val="162136"/>
-          </a:solidFill>
-          <a:ln w="15240">
-            <a:solidFill>
-              <a:srgbClr val="F5A623"/>
-            </a:solidFill>
-          </a:ln>
-          <a:effectLst/>
-        </p:spPr>
-        <p:style>
-          <a:lnRef idx="1">
-            <a:schemeClr val="accent1"/>
-          </a:lnRef>
-          <a:fillRef idx="3">
-            <a:schemeClr val="accent1"/>
-          </a:fillRef>
-          <a:effectRef idx="2">
-            <a:schemeClr val="accent1"/>
-          </a:effectRef>
-          <a:fontRef idx="minor">
-            <a:schemeClr val="lt1"/>
-          </a:fontRef>
-        </p:style>
-        <p:txBody>
-          <a:bodyPr rtlCol="0" anchor="ctr"/>
-          <a:lstStyle/>
-          <a:p>
-            <a:pPr algn="ctr"/>
-          </a:p>
-        </p:txBody>
-      </p:sp>
-      <p:sp>
-        <p:nvSpPr>
-          <p:cNvPr id="14" name="TextBox 13"/>
-          <p:cNvSpPr txBox="1"/>
-          <p:nvPr/>
-        </p:nvSpPr>
-        <p:spPr>
-          <a:xfrm>
-            <a:off x="6397599" y="1700784"/>
-            <a:ext cx="2229535" cy="786384"/>
-          </a:xfrm>
-          <a:prstGeom prst="rect">
-            <a:avLst/>
-          </a:prstGeom>
-          <a:noFill/>
-        </p:spPr>
-        <p:txBody>
-          <a:bodyPr wrap="square" lIns="0" rIns="0" tIns="0" bIns="0" anchor="t">
-            <a:spAutoFit/>
-          </a:bodyPr>
-          <a:lstStyle/>
-          <a:p>
-            <a:pPr algn="l">
-              <a:lnSpc>
-                <a:spcPct val="112000"/>
-              </a:lnSpc>
-              <a:spcAft>
-                <a:spcPts val="300"/>
-              </a:spcAft>
-            </a:pPr>
-            <a:r>
-              <a:rPr sz="1300" b="1">
-                <a:solidFill>
-                  <a:srgbClr val="EAF0F7"/>
-                </a:solidFill>
-                <a:latin typeface="Segoe UI"/>
-              </a:rPr>
-              <a:t>Encode</a:t>
-            </a:r>
-          </a:p>
-          <a:p>
-            <a:pPr algn="l">
-              <a:lnSpc>
-                <a:spcPct val="114000"/>
-              </a:lnSpc>
-              <a:spcAft>
-                <a:spcPts val="0"/>
-              </a:spcAft>
-            </a:pPr>
-            <a:r>
-              <a:rPr sz="980" b="0">
-                <a:solidFill>
-                  <a:srgbClr val="8CA0BE"/>
-                </a:solidFill>
-                <a:latin typeface="Segoe UI"/>
-              </a:rPr>
-              <a:t>16 categoricals → 27 flags</a:t>
-            </a:r>
-          </a:p>
-        </p:txBody>
-      </p:sp>
-      <p:sp>
-        <p:nvSpPr>
-          <p:cNvPr id="15" name="TextBox 14"/>
-          <p:cNvSpPr txBox="1"/>
-          <p:nvPr/>
-        </p:nvSpPr>
-        <p:spPr>
-          <a:xfrm>
-            <a:off x="8810015" y="1847088"/>
-            <a:ext cx="256032" cy="365760"/>
-          </a:xfrm>
-          <a:prstGeom prst="rect">
-            <a:avLst/>
-          </a:prstGeom>
-          <a:noFill/>
-        </p:spPr>
-        <p:txBody>
-          <a:bodyPr wrap="square" lIns="0" rIns="0" tIns="0" bIns="0" anchor="t">
-            <a:spAutoFit/>
-          </a:bodyPr>
-          <a:lstStyle/>
-          <a:p>
-            <a:pPr algn="ctr">
-              <a:lnSpc>
-                <a:spcPct val="112000"/>
-              </a:lnSpc>
-              <a:spcAft>
-                <a:spcPts val="0"/>
-              </a:spcAft>
-            </a:pPr>
-            <a:r>
-              <a:rPr sz="1700" b="1">
-                <a:solidFill>
-                  <a:srgbClr val="2FD8B4"/>
-                </a:solidFill>
-                <a:latin typeface="Segoe UI"/>
-              </a:rPr>
-              <a:t>→</a:t>
-            </a:r>
-          </a:p>
-        </p:txBody>
-      </p:sp>
-      <p:sp>
-        <p:nvSpPr>
-          <p:cNvPr id="16" name="Rounded Rectangle 15"/>
-          <p:cNvSpPr/>
-          <p:nvPr/>
-        </p:nvSpPr>
-        <p:spPr>
-          <a:xfrm>
-            <a:off x="9066047" y="1572768"/>
-            <a:ext cx="2558719" cy="1005840"/>
-          </a:xfrm>
-          <a:prstGeom prst="roundRect">
-            <a:avLst>
-              <a:gd name="adj" fmla="val 8000"/>
-            </a:avLst>
-          </a:prstGeom>
-          <a:solidFill>
-            <a:srgbClr val="162136"/>
-          </a:solidFill>
-          <a:ln w="15240">
-            <a:solidFill>
-              <a:srgbClr val="2FD8B4"/>
-            </a:solidFill>
-          </a:ln>
-          <a:effectLst/>
-        </p:spPr>
-        <p:style>
-          <a:lnRef idx="1">
-            <a:schemeClr val="accent1"/>
-          </a:lnRef>
-          <a:fillRef idx="3">
-            <a:schemeClr val="accent1"/>
-          </a:fillRef>
-          <a:effectRef idx="2">
-            <a:schemeClr val="accent1"/>
-          </a:effectRef>
-          <a:fontRef idx="minor">
-            <a:schemeClr val="lt1"/>
-          </a:fontRef>
-        </p:style>
-        <p:txBody>
-          <a:bodyPr rtlCol="0" anchor="ctr"/>
-          <a:lstStyle/>
-          <a:p>
-            <a:pPr algn="ctr"/>
-          </a:p>
-        </p:txBody>
-      </p:sp>
-      <p:sp>
-        <p:nvSpPr>
-          <p:cNvPr id="17" name="TextBox 16"/>
-          <p:cNvSpPr txBox="1"/>
-          <p:nvPr/>
-        </p:nvSpPr>
-        <p:spPr>
-          <a:xfrm>
-            <a:off x="9230639" y="1700784"/>
-            <a:ext cx="2229535" cy="786384"/>
-          </a:xfrm>
-          <a:prstGeom prst="rect">
-            <a:avLst/>
-          </a:prstGeom>
-          <a:noFill/>
-        </p:spPr>
-        <p:txBody>
-          <a:bodyPr wrap="square" lIns="0" rIns="0" tIns="0" bIns="0" anchor="t">
-            <a:spAutoFit/>
-          </a:bodyPr>
-          <a:lstStyle/>
-          <a:p>
-            <a:pPr algn="l">
-              <a:lnSpc>
-                <a:spcPct val="112000"/>
-              </a:lnSpc>
-              <a:spcAft>
-                <a:spcPts val="300"/>
-              </a:spcAft>
-            </a:pPr>
-            <a:r>
-              <a:rPr sz="1300" b="1">
-                <a:solidFill>
-                  <a:srgbClr val="EAF0F7"/>
-                </a:solidFill>
-                <a:latin typeface="Segoe UI"/>
-              </a:rPr>
-              <a:t>30 features</a:t>
-            </a:r>
-          </a:p>
-          <a:p>
-            <a:pPr algn="l">
-              <a:lnSpc>
-                <a:spcPct val="114000"/>
-              </a:lnSpc>
-              <a:spcAft>
-                <a:spcPts val="0"/>
-              </a:spcAft>
-            </a:pPr>
-            <a:r>
-              <a:rPr sz="980" b="0">
-                <a:solidFill>
-                  <a:srgbClr val="8CA0BE"/>
-                </a:solidFill>
-                <a:latin typeface="Segoe UI"/>
-              </a:rPr>
-              <a:t>frozen column contract</a:t>
-            </a:r>
-          </a:p>
-        </p:txBody>
-      </p:sp>
-      <p:sp>
-        <p:nvSpPr>
-          <p:cNvPr id="18" name="Rounded Rectangle 17"/>
-          <p:cNvSpPr/>
-          <p:nvPr/>
-        </p:nvSpPr>
-        <p:spPr>
-          <a:xfrm>
-            <a:off x="566928" y="2834639"/>
-            <a:ext cx="11057839" cy="1225296"/>
-          </a:xfrm>
-          <a:prstGeom prst="roundRect">
-            <a:avLst>
-              <a:gd name="adj" fmla="val 8000"/>
-            </a:avLst>
-          </a:prstGeom>
-          <a:solidFill>
-            <a:srgbClr val="162136"/>
-          </a:solidFill>
-          <a:ln w="15240">
-            <a:solidFill>
-              <a:srgbClr val="F5A623"/>
-            </a:solidFill>
-          </a:ln>
-          <a:effectLst/>
-        </p:spPr>
-        <p:style>
-          <a:lnRef idx="1">
-            <a:schemeClr val="accent1"/>
-          </a:lnRef>
-          <a:fillRef idx="3">
-            <a:schemeClr val="accent1"/>
-          </a:fillRef>
-          <a:effectRef idx="2">
-            <a:schemeClr val="accent1"/>
-          </a:effectRef>
-          <a:fontRef idx="minor">
-            <a:schemeClr val="lt1"/>
-          </a:fontRef>
-        </p:style>
-        <p:txBody>
-          <a:bodyPr rtlCol="0" anchor="ctr"/>
-          <a:lstStyle/>
-          <a:p>
-            <a:pPr algn="ctr"/>
-          </a:p>
-        </p:txBody>
-      </p:sp>
-      <p:sp>
-        <p:nvSpPr>
-          <p:cNvPr id="19" name="TextBox 18"/>
-          <p:cNvSpPr txBox="1"/>
-          <p:nvPr/>
-        </p:nvSpPr>
-        <p:spPr>
-          <a:xfrm>
-            <a:off x="749808" y="2962656"/>
-            <a:ext cx="10692079" cy="987552"/>
-          </a:xfrm>
-          <a:prstGeom prst="rect">
-            <a:avLst/>
-          </a:prstGeom>
-          <a:noFill/>
-        </p:spPr>
-        <p:txBody>
-          <a:bodyPr wrap="square" lIns="0" rIns="0" tIns="0" bIns="0" anchor="t">
-            <a:spAutoFit/>
-          </a:bodyPr>
-          <a:lstStyle/>
-          <a:p>
-            <a:pPr algn="l">
-              <a:lnSpc>
-                <a:spcPct val="112000"/>
-              </a:lnSpc>
-              <a:spcAft>
-                <a:spcPts val="300"/>
-              </a:spcAft>
-            </a:pPr>
-            <a:r>
               <a:rPr sz="1150" b="1">
                 <a:solidFill>
                   <a:srgbClr val="F5A623"/>
@@ -39882,8 +41364,8 @@
         </p:nvSpPr>
         <p:spPr>
           <a:xfrm>
-            <a:off x="566928" y="4242816"/>
-            <a:ext cx="11055096" cy="1371600"/>
+            <a:off x="566928" y="4407408"/>
+            <a:ext cx="11055096" cy="1810511"/>
           </a:xfrm>
           <a:prstGeom prst="rect">
             <a:avLst/>
@@ -40968,8 +42450,8 @@
         </p:blipFill>
         <p:spPr>
           <a:xfrm>
-            <a:off x="607187" y="1554480"/>
-            <a:ext cx="5360160" cy="2962656"/>
+            <a:off x="566928" y="1609855"/>
+            <a:ext cx="5440680" cy="2925057"/>
           </a:xfrm>
           <a:prstGeom prst="rect">
             <a:avLst/>
@@ -40992,8 +42474,8 @@
         </p:blipFill>
         <p:spPr>
           <a:xfrm>
-            <a:off x="6703730" y="1554480"/>
-            <a:ext cx="4405050" cy="2962656"/>
+            <a:off x="6190488" y="1517904"/>
+            <a:ext cx="4772086" cy="3108959"/>
           </a:xfrm>
           <a:prstGeom prst="rect">
             <a:avLst/>
@@ -41008,8 +42490,8 @@
         </p:nvSpPr>
         <p:spPr>
           <a:xfrm>
-            <a:off x="566928" y="4626864"/>
-            <a:ext cx="3576218" cy="1517904"/>
+            <a:off x="566928" y="4773168"/>
+            <a:ext cx="3576218" cy="1444751"/>
           </a:xfrm>
           <a:prstGeom prst="roundRect">
             <a:avLst>
@@ -41056,8 +42538,8 @@
         </p:nvSpPr>
         <p:spPr>
           <a:xfrm>
-            <a:off x="566928" y="4773168"/>
-            <a:ext cx="32004" cy="1225296"/>
+            <a:off x="566928" y="4919472"/>
+            <a:ext cx="32004" cy="1152143"/>
           </a:xfrm>
           <a:prstGeom prst="rect">
             <a:avLst/>
@@ -41100,8 +42582,8 @@
         </p:nvSpPr>
         <p:spPr>
           <a:xfrm>
-            <a:off x="749808" y="4791455"/>
-            <a:ext cx="3210458" cy="1225296"/>
+            <a:off x="749808" y="4937759"/>
+            <a:ext cx="3210458" cy="1133855"/>
           </a:xfrm>
           <a:prstGeom prst="rect">
             <a:avLst/>
@@ -41161,8 +42643,8 @@
         </p:nvSpPr>
         <p:spPr>
           <a:xfrm>
-            <a:off x="4307738" y="4626864"/>
-            <a:ext cx="3576218" cy="1517904"/>
+            <a:off x="4307738" y="4773168"/>
+            <a:ext cx="3576218" cy="1444751"/>
           </a:xfrm>
           <a:prstGeom prst="roundRect">
             <a:avLst>
@@ -41209,8 +42691,8 @@
         </p:nvSpPr>
         <p:spPr>
           <a:xfrm>
-            <a:off x="4307738" y="4773168"/>
-            <a:ext cx="32004" cy="1225296"/>
+            <a:off x="4307738" y="4919472"/>
+            <a:ext cx="32004" cy="1152143"/>
           </a:xfrm>
           <a:prstGeom prst="rect">
             <a:avLst/>
@@ -41253,8 +42735,8 @@
         </p:nvSpPr>
         <p:spPr>
           <a:xfrm>
-            <a:off x="4490618" y="4791455"/>
-            <a:ext cx="3210458" cy="1225296"/>
+            <a:off x="4490618" y="4937759"/>
+            <a:ext cx="3210458" cy="1133855"/>
           </a:xfrm>
           <a:prstGeom prst="rect">
             <a:avLst/>
@@ -41314,8 +42796,8 @@
         </p:nvSpPr>
         <p:spPr>
           <a:xfrm>
-            <a:off x="8048548" y="4626864"/>
-            <a:ext cx="3576218" cy="1517904"/>
+            <a:off x="8048548" y="4773168"/>
+            <a:ext cx="3576218" cy="1444751"/>
           </a:xfrm>
           <a:prstGeom prst="roundRect">
             <a:avLst>
@@ -41362,8 +42844,8 @@
         </p:nvSpPr>
         <p:spPr>
           <a:xfrm>
-            <a:off x="8048548" y="4773168"/>
-            <a:ext cx="32004" cy="1225296"/>
+            <a:off x="8048548" y="4919472"/>
+            <a:ext cx="32004" cy="1152143"/>
           </a:xfrm>
           <a:prstGeom prst="rect">
             <a:avLst/>
@@ -41406,8 +42888,8 @@
         </p:nvSpPr>
         <p:spPr>
           <a:xfrm>
-            <a:off x="8231428" y="4791455"/>
-            <a:ext cx="3210458" cy="1225296"/>
+            <a:off x="8231428" y="4937759"/>
+            <a:ext cx="3210458" cy="1133855"/>
           </a:xfrm>
           <a:prstGeom prst="rect">
             <a:avLst/>
@@ -42443,8 +43925,8 @@
         </p:nvSpPr>
         <p:spPr>
           <a:xfrm>
-            <a:off x="566928" y="1554480"/>
-            <a:ext cx="3584448" cy="1005840"/>
+            <a:off x="566928" y="1517904"/>
+            <a:ext cx="3584448" cy="1133855"/>
           </a:xfrm>
           <a:prstGeom prst="roundRect">
             <a:avLst>
@@ -42491,8 +43973,8 @@
         </p:nvSpPr>
         <p:spPr>
           <a:xfrm>
-            <a:off x="713232" y="1682495"/>
-            <a:ext cx="3328415" cy="804672"/>
+            <a:off x="713232" y="1645919"/>
+            <a:ext cx="3328415" cy="932687"/>
           </a:xfrm>
           <a:prstGeom prst="rect">
             <a:avLst/>
@@ -42514,7 +43996,7 @@
               </a:spcAft>
             </a:pPr>
             <a:r>
-              <a:rPr sz="2600" b="1">
+              <a:rPr sz="2800" b="1">
                 <a:solidFill>
                   <a:srgbClr val="4C8DFF"/>
                 </a:solidFill>
@@ -42552,8 +44034,8 @@
         </p:nvSpPr>
         <p:spPr>
           <a:xfrm>
-            <a:off x="4315968" y="1554480"/>
-            <a:ext cx="3584448" cy="1005840"/>
+            <a:off x="4315968" y="1517904"/>
+            <a:ext cx="3584448" cy="1133855"/>
           </a:xfrm>
           <a:prstGeom prst="roundRect">
             <a:avLst>
@@ -42600,8 +44082,8 @@
         </p:nvSpPr>
         <p:spPr>
           <a:xfrm>
-            <a:off x="4462272" y="1682495"/>
-            <a:ext cx="3328415" cy="804672"/>
+            <a:off x="4462272" y="1645919"/>
+            <a:ext cx="3328415" cy="932687"/>
           </a:xfrm>
           <a:prstGeom prst="rect">
             <a:avLst/>
@@ -42623,7 +44105,7 @@
               </a:spcAft>
             </a:pPr>
             <a:r>
-              <a:rPr sz="2600" b="1">
+              <a:rPr sz="2800" b="1">
                 <a:solidFill>
                   <a:srgbClr val="F5A623"/>
                 </a:solidFill>
@@ -42661,8 +44143,8 @@
         </p:nvSpPr>
         <p:spPr>
           <a:xfrm>
-            <a:off x="8065007" y="1554480"/>
-            <a:ext cx="3557016" cy="1005840"/>
+            <a:off x="8065007" y="1517904"/>
+            <a:ext cx="3557016" cy="1133855"/>
           </a:xfrm>
           <a:prstGeom prst="roundRect">
             <a:avLst>
@@ -42709,8 +44191,8 @@
         </p:nvSpPr>
         <p:spPr>
           <a:xfrm>
-            <a:off x="8211311" y="1682495"/>
-            <a:ext cx="3300984" cy="804672"/>
+            <a:off x="8211311" y="1645919"/>
+            <a:ext cx="3300984" cy="932687"/>
           </a:xfrm>
           <a:prstGeom prst="rect">
             <a:avLst/>
@@ -42732,7 +44214,7 @@
               </a:spcAft>
             </a:pPr>
             <a:r>
-              <a:rPr sz="2600" b="1">
+              <a:rPr sz="2800" b="1">
                 <a:solidFill>
                   <a:srgbClr val="2FD8B4"/>
                 </a:solidFill>
@@ -42770,8 +44252,8 @@
         </p:nvSpPr>
         <p:spPr>
           <a:xfrm>
-            <a:off x="566928" y="2724912"/>
-            <a:ext cx="5440680" cy="2487168"/>
+            <a:off x="566928" y="2834639"/>
+            <a:ext cx="5440680" cy="3383279"/>
           </a:xfrm>
           <a:prstGeom prst="roundRect">
             <a:avLst>
@@ -42818,8 +44300,8 @@
         </p:nvSpPr>
         <p:spPr>
           <a:xfrm>
-            <a:off x="768096" y="2871216"/>
-            <a:ext cx="5038344" cy="2194560"/>
+            <a:off x="768096" y="2999232"/>
+            <a:ext cx="5038344" cy="3054095"/>
           </a:xfrm>
           <a:prstGeom prst="rect">
             <a:avLst/>
@@ -42894,17 +44376,36 @@
                 <a:spcPct val="118000"/>
               </a:lnSpc>
               <a:spcAft>
+                <a:spcPts val="1200"/>
+              </a:spcAft>
+            </a:pPr>
+            <a:r>
+              <a:rPr sz="1080" b="0">
+                <a:solidFill>
+                  <a:srgbClr val="EAF0F7"/>
+                </a:solidFill>
+                <a:latin typeface="Segoe UI"/>
+              </a:rPr>
+              <a:t>Assigning 1, 2, 3 to DSL / Fiber / None would invent an ordering that does not exist. Flags keep the model honest about what these categories actually are.</a:t>
+            </a:r>
+          </a:p>
+          <a:p>
+            <a:pPr algn="l">
+              <a:lnSpc>
+                <a:spcPct val="118000"/>
+              </a:lnSpc>
+              <a:spcAft>
                 <a:spcPts val="0"/>
               </a:spcAft>
             </a:pPr>
             <a:r>
               <a:rPr sz="1080" b="0">
                 <a:solidFill>
-                  <a:srgbClr val="EAF0F7"/>
+                  <a:srgbClr val="8CA0BE"/>
                 </a:solidFill>
                 <a:latin typeface="Segoe UI"/>
               </a:rPr>
-              <a:t>Assigning 1, 2, 3 to DSL / Fiber / None would invent an ordering that does not exist. Flags keep the model honest about what these categories actually are.</a:t>
+              <a:t>Eleven Total Charges values are blank — every one of them belongs to a zero-tenure customer, so the missing rows never hide a churn signal.</a:t>
             </a:r>
           </a:p>
         </p:txBody>
@@ -42917,8 +44418,8 @@
         </p:nvSpPr>
         <p:spPr>
           <a:xfrm>
-            <a:off x="6172200" y="2724912"/>
-            <a:ext cx="5449824" cy="2487168"/>
+            <a:off x="6172200" y="2834639"/>
+            <a:ext cx="5449824" cy="3383279"/>
           </a:xfrm>
           <a:prstGeom prst="roundRect">
             <a:avLst>
@@ -42965,8 +44466,8 @@
         </p:nvSpPr>
         <p:spPr>
           <a:xfrm>
-            <a:off x="6355080" y="2871216"/>
-            <a:ext cx="5084064" cy="2194560"/>
+            <a:off x="6355080" y="2999232"/>
+            <a:ext cx="5084064" cy="3054095"/>
           </a:xfrm>
           <a:prstGeom prst="rect">
             <a:avLst/>
@@ -43022,17 +44523,36 @@
                 <a:spcPct val="118000"/>
               </a:lnSpc>
               <a:spcAft>
+                <a:spcPts val="1000"/>
+              </a:spcAft>
+            </a:pPr>
+            <a:r>
+              <a:rPr sz="1080" b="0">
+                <a:solidFill>
+                  <a:srgbClr val="8CA0BE"/>
+                </a:solidFill>
+                <a:latin typeface="Segoe UI"/>
+              </a:rPr>
+              <a:t>If the two ever disagree, the request fails loudly rather than silently scoring on a misaligned frame — the most common way a student project works in the notebook and quietly breaks in the app.</a:t>
+            </a:r>
+          </a:p>
+          <a:p>
+            <a:pPr algn="l">
+              <a:lnSpc>
+                <a:spcPct val="118000"/>
+              </a:lnSpc>
+              <a:spcAft>
                 <a:spcPts val="0"/>
               </a:spcAft>
             </a:pPr>
             <a:r>
               <a:rPr sz="1080" b="0">
                 <a:solidFill>
-                  <a:srgbClr val="8CA0BE"/>
+                  <a:srgbClr val="2FD8B4"/>
                 </a:solidFill>
                 <a:latin typeface="Segoe UI"/>
               </a:rPr>
-              <a:t>If the two ever disagree, the request fails loudly rather than silently scoring on a misaligned frame — the most common way a student project works in the notebook and quietly breaks in the app.</a:t>
+              <a:t>Uploads are validated against that same list, so a mismatched CSV is rejected before a single row is scored.</a:t>
             </a:r>
           </a:p>
         </p:txBody>
@@ -44029,8 +45549,8 @@
         </p:blipFill>
         <p:spPr>
           <a:xfrm>
-            <a:off x="1411475" y="1554480"/>
-            <a:ext cx="5488945" cy="3108960"/>
+            <a:off x="566928" y="1559627"/>
+            <a:ext cx="6501384" cy="3592441"/>
           </a:xfrm>
           <a:prstGeom prst="rect">
             <a:avLst/>
@@ -44045,8 +45565,8 @@
         </p:nvSpPr>
         <p:spPr>
           <a:xfrm>
-            <a:off x="8001000" y="1609344"/>
-            <a:ext cx="3621024" cy="3017520"/>
+            <a:off x="7324344" y="1572768"/>
+            <a:ext cx="4300423" cy="3566159"/>
           </a:xfrm>
           <a:prstGeom prst="rect">
             <a:avLst/>
@@ -44188,8 +45708,8 @@
         </p:nvSpPr>
         <p:spPr>
           <a:xfrm>
-            <a:off x="8001000" y="3730752"/>
-            <a:ext cx="3621024" cy="932688"/>
+            <a:off x="7324344" y="4151376"/>
+            <a:ext cx="4300423" cy="1042415"/>
           </a:xfrm>
           <a:prstGeom prst="roundRect">
             <a:avLst>
@@ -44236,8 +45756,8 @@
         </p:nvSpPr>
         <p:spPr>
           <a:xfrm>
-            <a:off x="8165592" y="3840480"/>
-            <a:ext cx="3291840" cy="768096"/>
+            <a:off x="7488936" y="4261104"/>
+            <a:ext cx="3971239" cy="877824"/>
           </a:xfrm>
           <a:prstGeom prst="rect">
             <a:avLst/>
@@ -44297,8 +45817,8 @@
         </p:nvSpPr>
         <p:spPr>
           <a:xfrm>
-            <a:off x="566928" y="4791456"/>
-            <a:ext cx="11057839" cy="969264"/>
+            <a:off x="566928" y="5340096"/>
+            <a:ext cx="11057839" cy="877824"/>
           </a:xfrm>
           <a:prstGeom prst="roundRect">
             <a:avLst>
@@ -44345,8 +45865,8 @@
         </p:nvSpPr>
         <p:spPr>
           <a:xfrm>
-            <a:off x="749808" y="4919472"/>
-            <a:ext cx="10692079" cy="731520"/>
+            <a:off x="749808" y="5468112"/>
+            <a:ext cx="10692079" cy="640080"/>
           </a:xfrm>
           <a:prstGeom prst="rect">
             <a:avLst/>
@@ -45390,8 +46910,8 @@
         </p:blipFill>
         <p:spPr>
           <a:xfrm>
-            <a:off x="1018771" y="1536192"/>
-            <a:ext cx="3320840" cy="2487168"/>
+            <a:off x="566928" y="1517904"/>
+            <a:ext cx="3408697" cy="2523861"/>
           </a:xfrm>
           <a:prstGeom prst="rect">
             <a:avLst/>
@@ -45414,8 +46934,8 @@
         </p:blipFill>
         <p:spPr>
           <a:xfrm>
-            <a:off x="4956048" y="1583967"/>
-            <a:ext cx="6684264" cy="2391617"/>
+            <a:off x="4158505" y="1517904"/>
+            <a:ext cx="7466261" cy="2523861"/>
           </a:xfrm>
           <a:prstGeom prst="rect">
             <a:avLst/>
@@ -45430,8 +46950,8 @@
         </p:nvSpPr>
         <p:spPr>
           <a:xfrm>
-            <a:off x="566928" y="4133087"/>
-            <a:ext cx="2094524" cy="822960"/>
+            <a:off x="566928" y="4279392"/>
+            <a:ext cx="2094524" cy="1060703"/>
           </a:xfrm>
           <a:prstGeom prst="roundRect">
             <a:avLst>
@@ -45478,8 +46998,8 @@
         </p:nvSpPr>
         <p:spPr>
           <a:xfrm>
-            <a:off x="713232" y="4261103"/>
-            <a:ext cx="1838492" cy="621792"/>
+            <a:off x="713232" y="4407407"/>
+            <a:ext cx="1838492" cy="859535"/>
           </a:xfrm>
           <a:prstGeom prst="rect">
             <a:avLst/>
@@ -45501,7 +47021,7 @@
               </a:spcAft>
             </a:pPr>
             <a:r>
-              <a:rPr sz="1800" b="1">
+              <a:rPr sz="2000" b="1">
                 <a:solidFill>
                   <a:srgbClr val="EAF0F7"/>
                 </a:solidFill>
@@ -45539,8 +47059,8 @@
         </p:nvSpPr>
         <p:spPr>
           <a:xfrm>
-            <a:off x="2807756" y="4133087"/>
-            <a:ext cx="2094524" cy="822960"/>
+            <a:off x="2807756" y="4279392"/>
+            <a:ext cx="2094524" cy="1060703"/>
           </a:xfrm>
           <a:prstGeom prst="roundRect">
             <a:avLst>
@@ -45587,8 +47107,8 @@
         </p:nvSpPr>
         <p:spPr>
           <a:xfrm>
-            <a:off x="2954060" y="4261103"/>
-            <a:ext cx="1838492" cy="621792"/>
+            <a:off x="2954060" y="4407407"/>
+            <a:ext cx="1838492" cy="859535"/>
           </a:xfrm>
           <a:prstGeom prst="rect">
             <a:avLst/>
@@ -45610,7 +47130,7 @@
               </a:spcAft>
             </a:pPr>
             <a:r>
-              <a:rPr sz="1800" b="1">
+              <a:rPr sz="2000" b="1">
                 <a:solidFill>
                   <a:srgbClr val="EAF0F7"/>
                 </a:solidFill>
@@ -45648,8 +47168,8 @@
         </p:nvSpPr>
         <p:spPr>
           <a:xfrm>
-            <a:off x="5048585" y="4133087"/>
-            <a:ext cx="2094524" cy="822960"/>
+            <a:off x="5048585" y="4279392"/>
+            <a:ext cx="2094524" cy="1060703"/>
           </a:xfrm>
           <a:prstGeom prst="roundRect">
             <a:avLst>
@@ -45696,8 +47216,8 @@
         </p:nvSpPr>
         <p:spPr>
           <a:xfrm>
-            <a:off x="5194889" y="4261103"/>
-            <a:ext cx="1838492" cy="621792"/>
+            <a:off x="5194889" y="4407407"/>
+            <a:ext cx="1838492" cy="859535"/>
           </a:xfrm>
           <a:prstGeom prst="rect">
             <a:avLst/>
@@ -45719,7 +47239,7 @@
               </a:spcAft>
             </a:pPr>
             <a:r>
-              <a:rPr sz="1800" b="1">
+              <a:rPr sz="2000" b="1">
                 <a:solidFill>
                   <a:srgbClr val="F5A623"/>
                 </a:solidFill>
@@ -45757,8 +47277,8 @@
         </p:nvSpPr>
         <p:spPr>
           <a:xfrm>
-            <a:off x="7289413" y="4133087"/>
-            <a:ext cx="2094524" cy="822960"/>
+            <a:off x="7289413" y="4279392"/>
+            <a:ext cx="2094524" cy="1060703"/>
           </a:xfrm>
           <a:prstGeom prst="roundRect">
             <a:avLst>
@@ -45805,8 +47325,8 @@
         </p:nvSpPr>
         <p:spPr>
           <a:xfrm>
-            <a:off x="7435717" y="4261103"/>
-            <a:ext cx="1838492" cy="621792"/>
+            <a:off x="7435717" y="4407407"/>
+            <a:ext cx="1838492" cy="859535"/>
           </a:xfrm>
           <a:prstGeom prst="rect">
             <a:avLst/>
@@ -45828,7 +47348,7 @@
               </a:spcAft>
             </a:pPr>
             <a:r>
-              <a:rPr sz="1800" b="1">
+              <a:rPr sz="2000" b="1">
                 <a:solidFill>
                   <a:srgbClr val="2FD8B4"/>
                 </a:solidFill>
@@ -45866,8 +47386,8 @@
         </p:nvSpPr>
         <p:spPr>
           <a:xfrm>
-            <a:off x="9530242" y="4133087"/>
-            <a:ext cx="2094524" cy="822960"/>
+            <a:off x="9530242" y="4279392"/>
+            <a:ext cx="2094524" cy="1060703"/>
           </a:xfrm>
           <a:prstGeom prst="roundRect">
             <a:avLst>
@@ -45914,8 +47434,8 @@
         </p:nvSpPr>
         <p:spPr>
           <a:xfrm>
-            <a:off x="9676546" y="4261103"/>
-            <a:ext cx="1838492" cy="621792"/>
+            <a:off x="9676546" y="4407407"/>
+            <a:ext cx="1838492" cy="859535"/>
           </a:xfrm>
           <a:prstGeom prst="rect">
             <a:avLst/>
@@ -45937,7 +47457,7 @@
               </a:spcAft>
             </a:pPr>
             <a:r>
-              <a:rPr sz="1800" b="1">
+              <a:rPr sz="2000" b="1">
                 <a:solidFill>
                   <a:srgbClr val="2FD8B4"/>
                 </a:solidFill>
@@ -45975,8 +47495,8 @@
         </p:nvSpPr>
         <p:spPr>
           <a:xfrm>
-            <a:off x="566928" y="5047488"/>
-            <a:ext cx="11057839" cy="457200"/>
+            <a:off x="566928" y="5431536"/>
+            <a:ext cx="11057839" cy="786383"/>
           </a:xfrm>
           <a:prstGeom prst="rect">
             <a:avLst/>

--- a/presentation/RetainIQ_Project_Review.pptx
+++ b/presentation/RetainIQ_Project_Review.pptx
@@ -16,11 +16,6 @@
     <p:sldId id="264" r:id="rId16"/>
     <p:sldId id="265" r:id="rId17"/>
     <p:sldId id="266" r:id="rId18"/>
-    <p:sldId id="267" r:id="rId19"/>
-    <p:sldId id="268" r:id="rId20"/>
-    <p:sldId id="269" r:id="rId21"/>
-    <p:sldId id="270" r:id="rId22"/>
-    <p:sldId id="271" r:id="rId23"/>
   </p:sldIdLst>
   <p:sldSz cx="12191695" cy="6858000" type="screen4x3"/>
   <p:notesSz cx="6858000" cy="9144000"/>
@@ -789,491 +784,6 @@
 </p:notes>
 </file>
 
-<file path=ppt/notesSlides/notesSlide12.xml><?xml version="1.0" encoding="utf-8"?>
-<p:notes xmlns:a="http://schemas.openxmlformats.org/drawingml/2006/main" xmlns:p="http://schemas.openxmlformats.org/presentationml/2006/main" xmlns:r="http://schemas.openxmlformats.org/officeDocument/2006/relationships">
-  <p:cSld>
-    <p:spTree>
-      <p:nvGrpSpPr>
-        <p:cNvPr id="1" name=""/>
-        <p:cNvGrpSpPr/>
-        <p:nvPr/>
-      </p:nvGrpSpPr>
-      <p:grpSpPr>
-        <a:xfrm>
-          <a:off x="0" y="0"/>
-          <a:ext cx="0" cy="0"/>
-          <a:chOff x="0" y="0"/>
-          <a:chExt cx="0" cy="0"/>
-        </a:xfrm>
-      </p:grpSpPr>
-      <p:sp>
-        <p:nvSpPr>
-          <p:cNvPr id="2" name="Slide Image Placeholder 1"/>
-          <p:cNvSpPr>
-            <a:spLocks noGrp="1"/>
-          </p:cNvSpPr>
-          <p:nvPr>
-            <p:ph type="sldImg" idx="2"/>
-          </p:nvPr>
-        </p:nvSpPr>
-        <p:spPr/>
-      </p:sp>
-      <p:sp>
-        <p:nvSpPr>
-          <p:cNvPr id="3" name="Notes Placeholder 2"/>
-          <p:cNvSpPr>
-            <a:spLocks noGrp="1"/>
-          </p:cNvSpPr>
-          <p:nvPr>
-            <p:ph type="body" idx="3" sz="quarter"/>
-          </p:nvPr>
-        </p:nvSpPr>
-        <p:spPr/>
-        <p:txBody>
-          <a:bodyPr/>
-          <a:lstStyle/>
-          <a:p>
-            <a:r>
-              <a:t>(7:05–7:40) Left chart: "this is who the high-risk band is — every one of them is</a:t>
-            </a:r>
-          </a:p>
-          <a:p>
-            <a:r>
-              <a:t>month-to-month, 91% are on fiber optic, 95% have no online security, and they</a:t>
-            </a:r>
-          </a:p>
-          <a:p>
-            <a:r>
-              <a:t>average under ten months of tenure."</a:t>
-            </a:r>
-          </a:p>
-          <a:p>
-            <a:r>
-              <a:t>Right: "and for a single customer the app names which of those factors pushed</a:t>
-            </a:r>
-          </a:p>
-          <a:p>
-            <a:r>
-              <a:t>this particular score."</a:t>
-            </a:r>
-          </a:p>
-          <a:p>
-            <a:r>
-              <a:t>If asked about SHAP: "I ran the SHAP analysis during experimentation; the</a:t>
-            </a:r>
-          </a:p>
-          <a:p>
-            <a:r>
-              <a:t>deployed model is linear, so I explain it with coefficients — same information,</a:t>
-            </a:r>
-          </a:p>
-          <a:p>
-            <a:r>
-              <a:t>no runtime cost." Do not overclaim here.</a:t>
-            </a:r>
-          </a:p>
-        </p:txBody>
-      </p:sp>
-      <p:sp>
-        <p:nvSpPr>
-          <p:cNvPr id="4" name="Slide Number Placeholder 3"/>
-          <p:cNvSpPr>
-            <a:spLocks noGrp="1"/>
-          </p:cNvSpPr>
-          <p:nvPr>
-            <p:ph type="sldNum" idx="5" sz="quarter"/>
-          </p:nvPr>
-        </p:nvSpPr>
-        <p:spPr/>
-      </p:sp>
-    </p:spTree>
-  </p:cSld>
-  <p:clrMapOvr>
-    <a:masterClrMapping/>
-  </p:clrMapOvr>
-</p:notes>
-</file>
-
-<file path=ppt/notesSlides/notesSlide13.xml><?xml version="1.0" encoding="utf-8"?>
-<p:notes xmlns:a="http://schemas.openxmlformats.org/drawingml/2006/main" xmlns:p="http://schemas.openxmlformats.org/presentationml/2006/main" xmlns:r="http://schemas.openxmlformats.org/officeDocument/2006/relationships">
-  <p:cSld>
-    <p:spTree>
-      <p:nvGrpSpPr>
-        <p:cNvPr id="1" name=""/>
-        <p:cNvGrpSpPr/>
-        <p:nvPr/>
-      </p:nvGrpSpPr>
-      <p:grpSpPr>
-        <a:xfrm>
-          <a:off x="0" y="0"/>
-          <a:ext cx="0" cy="0"/>
-          <a:chOff x="0" y="0"/>
-          <a:chExt cx="0" cy="0"/>
-        </a:xfrm>
-      </p:grpSpPr>
-      <p:sp>
-        <p:nvSpPr>
-          <p:cNvPr id="2" name="Slide Image Placeholder 1"/>
-          <p:cNvSpPr>
-            <a:spLocks noGrp="1"/>
-          </p:cNvSpPr>
-          <p:nvPr>
-            <p:ph type="sldImg" idx="2"/>
-          </p:nvPr>
-        </p:nvSpPr>
-        <p:spPr/>
-      </p:sp>
-      <p:sp>
-        <p:nvSpPr>
-          <p:cNvPr id="3" name="Notes Placeholder 2"/>
-          <p:cNvSpPr>
-            <a:spLocks noGrp="1"/>
-          </p:cNvSpPr>
-          <p:nvPr>
-            <p:ph type="body" idx="3" sz="quarter"/>
-          </p:nvPr>
-        </p:nvSpPr>
-        <p:spPr/>
-        <p:txBody>
-          <a:bodyPr/>
-          <a:lstStyle/>
-          <a:p>
-            <a:r>
-              <a:t>(7:40–8:15) "A probability isn't something a retention agent can act on, so I cut</a:t>
-            </a:r>
-          </a:p>
-          <a:p>
-            <a:r>
-              <a:t>it into three bands."</a:t>
-            </a:r>
-          </a:p>
-          <a:p>
-            <a:r>
-              <a:t>Then the validation, which is the point of the slide: "I checked the bands against</a:t>
-            </a:r>
-          </a:p>
-          <a:p>
-            <a:r>
-              <a:t>the real churn labels. Low risk actually churns 9.5%, medium 42%, high 73%. The</a:t>
-            </a:r>
-          </a:p>
-          <a:p>
-            <a:r>
-              <a:t>band is a genuine ordering of risk, not a cosmetic split."</a:t>
-            </a:r>
-          </a:p>
-          <a:p>
-            <a:r>
-              <a:t>Close operationally: "the team starts with 1,135 customers instead of 7,043."</a:t>
-            </a:r>
-          </a:p>
-        </p:txBody>
-      </p:sp>
-      <p:sp>
-        <p:nvSpPr>
-          <p:cNvPr id="4" name="Slide Number Placeholder 3"/>
-          <p:cNvSpPr>
-            <a:spLocks noGrp="1"/>
-          </p:cNvSpPr>
-          <p:nvPr>
-            <p:ph type="sldNum" idx="5" sz="quarter"/>
-          </p:nvPr>
-        </p:nvSpPr>
-        <p:spPr/>
-      </p:sp>
-    </p:spTree>
-  </p:cSld>
-  <p:clrMapOvr>
-    <a:masterClrMapping/>
-  </p:clrMapOvr>
-</p:notes>
-</file>
-
-<file path=ppt/notesSlides/notesSlide14.xml><?xml version="1.0" encoding="utf-8"?>
-<p:notes xmlns:a="http://schemas.openxmlformats.org/drawingml/2006/main" xmlns:p="http://schemas.openxmlformats.org/presentationml/2006/main" xmlns:r="http://schemas.openxmlformats.org/officeDocument/2006/relationships">
-  <p:cSld>
-    <p:spTree>
-      <p:nvGrpSpPr>
-        <p:cNvPr id="1" name=""/>
-        <p:cNvGrpSpPr/>
-        <p:nvPr/>
-      </p:nvGrpSpPr>
-      <p:grpSpPr>
-        <a:xfrm>
-          <a:off x="0" y="0"/>
-          <a:ext cx="0" cy="0"/>
-          <a:chOff x="0" y="0"/>
-          <a:chExt cx="0" cy="0"/>
-        </a:xfrm>
-      </p:grpSpPr>
-      <p:sp>
-        <p:nvSpPr>
-          <p:cNvPr id="2" name="Slide Image Placeholder 1"/>
-          <p:cNvSpPr>
-            <a:spLocks noGrp="1"/>
-          </p:cNvSpPr>
-          <p:nvPr>
-            <p:ph type="sldImg" idx="2"/>
-          </p:nvPr>
-        </p:nvSpPr>
-        <p:spPr/>
-      </p:sp>
-      <p:sp>
-        <p:nvSpPr>
-          <p:cNvPr id="3" name="Notes Placeholder 2"/>
-          <p:cNvSpPr>
-            <a:spLocks noGrp="1"/>
-          </p:cNvSpPr>
-          <p:nvPr>
-            <p:ph type="body" idx="3" sz="quarter"/>
-          </p:nvPr>
-        </p:nvSpPr>
-        <p:spPr/>
-        <p:txBody>
-          <a:bodyPr/>
-          <a:lstStyle/>
-          <a:p>
-            <a:r>
-              <a:t>(8:15–8:50) "Prediction alone doesn't retain anyone."</a:t>
-            </a:r>
-          </a:p>
-          <a:p>
-            <a:r>
-              <a:t>Show the offer list — note the biggest group is a contract-upgrade nudge, which</a:t>
-            </a:r>
-          </a:p>
-          <a:p>
-            <a:r>
-              <a:t>follows directly from the Phase 04 finding about month-to-month risk.</a:t>
-            </a:r>
-          </a:p>
-          <a:p>
-            <a:r>
-              <a:t>Then be precise about money: "this is monthly revenue at risk — exposure, $92,539</a:t>
-            </a:r>
-          </a:p>
-          <a:p>
-            <a:r>
-              <a:t>a month sitting in the high-risk band. I deliberately do not call it savings."</a:t>
-            </a:r>
-          </a:p>
-        </p:txBody>
-      </p:sp>
-      <p:sp>
-        <p:nvSpPr>
-          <p:cNvPr id="4" name="Slide Number Placeholder 3"/>
-          <p:cNvSpPr>
-            <a:spLocks noGrp="1"/>
-          </p:cNvSpPr>
-          <p:nvPr>
-            <p:ph type="sldNum" idx="5" sz="quarter"/>
-          </p:nvPr>
-        </p:nvSpPr>
-        <p:spPr/>
-      </p:sp>
-    </p:spTree>
-  </p:cSld>
-  <p:clrMapOvr>
-    <a:masterClrMapping/>
-  </p:clrMapOvr>
-</p:notes>
-</file>
-
-<file path=ppt/notesSlides/notesSlide15.xml><?xml version="1.0" encoding="utf-8"?>
-<p:notes xmlns:a="http://schemas.openxmlformats.org/drawingml/2006/main" xmlns:p="http://schemas.openxmlformats.org/presentationml/2006/main" xmlns:r="http://schemas.openxmlformats.org/officeDocument/2006/relationships">
-  <p:cSld>
-    <p:spTree>
-      <p:nvGrpSpPr>
-        <p:cNvPr id="1" name=""/>
-        <p:cNvGrpSpPr/>
-        <p:nvPr/>
-      </p:nvGrpSpPr>
-      <p:grpSpPr>
-        <a:xfrm>
-          <a:off x="0" y="0"/>
-          <a:ext cx="0" cy="0"/>
-          <a:chOff x="0" y="0"/>
-          <a:chExt cx="0" cy="0"/>
-        </a:xfrm>
-      </p:grpSpPr>
-      <p:sp>
-        <p:nvSpPr>
-          <p:cNvPr id="2" name="Slide Image Placeholder 1"/>
-          <p:cNvSpPr>
-            <a:spLocks noGrp="1"/>
-          </p:cNvSpPr>
-          <p:nvPr>
-            <p:ph type="sldImg" idx="2"/>
-          </p:nvPr>
-        </p:nvSpPr>
-        <p:spPr/>
-      </p:sp>
-      <p:sp>
-        <p:nvSpPr>
-          <p:cNvPr id="3" name="Notes Placeholder 2"/>
-          <p:cNvSpPr>
-            <a:spLocks noGrp="1"/>
-          </p:cNvSpPr>
-          <p:nvPr>
-            <p:ph type="body" idx="3" sz="quarter"/>
-          </p:nvPr>
-        </p:nvSpPr>
-        <p:spPr/>
-        <p:txBody>
-          <a:bodyPr/>
-          <a:lstStyle/>
-          <a:p>
-            <a:r>
-              <a:t>(8:50–9:15) "The machine learning app answers what is likely to happen. Power BI</a:t>
-            </a:r>
-          </a:p>
-          <a:p>
-            <a:r>
-              <a:t>answers what already happened and why — and it's what a non-technical</a:t>
-            </a:r>
-          </a:p>
-          <a:p>
-            <a:r>
-              <a:t>stakeholder actually opens."</a:t>
-            </a:r>
-          </a:p>
-          <a:p>
-            <a:r>
-              <a:t>Four pages: executive overview, customer insights, risk intelligence, retention</a:t>
-            </a:r>
-          </a:p>
-          <a:p>
-            <a:r>
-              <a:t>strategy. One sentence each, don't linger. Point out the underlined .pbit link —</a:t>
-            </a:r>
-          </a:p>
-          <a:p>
-            <a:r>
-              <a:t>it opens the reusable report template in the project repository.</a:t>
-            </a:r>
-          </a:p>
-        </p:txBody>
-      </p:sp>
-      <p:sp>
-        <p:nvSpPr>
-          <p:cNvPr id="4" name="Slide Number Placeholder 3"/>
-          <p:cNvSpPr>
-            <a:spLocks noGrp="1"/>
-          </p:cNvSpPr>
-          <p:nvPr>
-            <p:ph type="sldNum" idx="5" sz="quarter"/>
-          </p:nvPr>
-        </p:nvSpPr>
-        <p:spPr/>
-      </p:sp>
-    </p:spTree>
-  </p:cSld>
-  <p:clrMapOvr>
-    <a:masterClrMapping/>
-  </p:clrMapOvr>
-</p:notes>
-</file>
-
-<file path=ppt/notesSlides/notesSlide16.xml><?xml version="1.0" encoding="utf-8"?>
-<p:notes xmlns:a="http://schemas.openxmlformats.org/drawingml/2006/main" xmlns:p="http://schemas.openxmlformats.org/presentationml/2006/main" xmlns:r="http://schemas.openxmlformats.org/officeDocument/2006/relationships">
-  <p:cSld>
-    <p:spTree>
-      <p:nvGrpSpPr>
-        <p:cNvPr id="1" name=""/>
-        <p:cNvGrpSpPr/>
-        <p:nvPr/>
-      </p:nvGrpSpPr>
-      <p:grpSpPr>
-        <a:xfrm>
-          <a:off x="0" y="0"/>
-          <a:ext cx="0" cy="0"/>
-          <a:chOff x="0" y="0"/>
-          <a:chExt cx="0" cy="0"/>
-        </a:xfrm>
-      </p:grpSpPr>
-      <p:sp>
-        <p:nvSpPr>
-          <p:cNvPr id="2" name="Slide Image Placeholder 1"/>
-          <p:cNvSpPr>
-            <a:spLocks noGrp="1"/>
-          </p:cNvSpPr>
-          <p:nvPr>
-            <p:ph type="sldImg" idx="2"/>
-          </p:nvPr>
-        </p:nvSpPr>
-        <p:spPr/>
-      </p:sp>
-      <p:sp>
-        <p:nvSpPr>
-          <p:cNvPr id="3" name="Notes Placeholder 2"/>
-          <p:cNvSpPr>
-            <a:spLocks noGrp="1"/>
-          </p:cNvSpPr>
-          <p:nvPr>
-            <p:ph type="body" idx="3" sz="quarter"/>
-          </p:nvPr>
-        </p:nvSpPr>
-        <p:spPr/>
-        <p:txBody>
-          <a:bodyPr/>
-          <a:lstStyle/>
-          <a:p>
-            <a:r>
-              <a:t>(9:15–9:45) This is the demo slide. If the live site is warm, switch to it for</a:t>
-            </a:r>
-          </a:p>
-          <a:p>
-            <a:r>
-              <a:t>thirty seconds; otherwise walk the screenshots.</a:t>
-            </a:r>
-          </a:p>
-          <a:p>
-            <a:r>
-              <a:t>"Upload a portfolio, validate it before scoring, then read churn rate, risk</a:t>
-            </a:r>
-          </a:p>
-          <a:p>
-            <a:r>
-              <a:t>distribution and revenue at risk — and drill into any single customer."</a:t>
-            </a:r>
-          </a:p>
-          <a:p>
-            <a:r>
-              <a:t>One engineering detail worth a sentence: "reports are scoped to the visitor with</a:t>
-            </a:r>
-          </a:p>
-          <a:p>
-            <a:r>
-              <a:t>a signed cookie, so users never see each other's data — that has its own unit</a:t>
-            </a:r>
-          </a:p>
-          <a:p>
-            <a:r>
-              <a:t>test."</a:t>
-            </a:r>
-          </a:p>
-        </p:txBody>
-      </p:sp>
-      <p:sp>
-        <p:nvSpPr>
-          <p:cNvPr id="4" name="Slide Number Placeholder 3"/>
-          <p:cNvSpPr>
-            <a:spLocks noGrp="1"/>
-          </p:cNvSpPr>
-          <p:nvPr>
-            <p:ph type="sldNum" idx="5" sz="quarter"/>
-          </p:nvPr>
-        </p:nvSpPr>
-        <p:spPr/>
-      </p:sp>
-    </p:spTree>
-  </p:cSld>
-  <p:clrMapOvr>
-    <a:masterClrMapping/>
-  </p:clrMapOvr>
-</p:notes>
-</file>
-
 <file path=ppt/notesSlides/notesSlide2.xml><?xml version="1.0" encoding="utf-8"?>
 <p:notes xmlns:a="http://schemas.openxmlformats.org/drawingml/2006/main" xmlns:p="http://schemas.openxmlformats.org/presentationml/2006/main" xmlns:r="http://schemas.openxmlformats.org/officeDocument/2006/relationships">
   <p:cSld>
@@ -11076,7228 +10586,6 @@
                 <a:latin typeface="Consolas"/>
               </a:rPr>
               <a:t>11</a:t>
-            </a:r>
-          </a:p>
-        </p:txBody>
-      </p:sp>
-    </p:spTree>
-  </p:cSld>
-  <p:clrMapOvr>
-    <a:masterClrMapping/>
-  </p:clrMapOvr>
-</p:sld>
-</file>
-
-<file path=ppt/slides/slide12.xml><?xml version="1.0" encoding="utf-8"?>
-<p:sld xmlns:a="http://schemas.openxmlformats.org/drawingml/2006/main" xmlns:p="http://schemas.openxmlformats.org/presentationml/2006/main" xmlns:r="http://schemas.openxmlformats.org/officeDocument/2006/relationships">
-  <p:cSld>
-    <p:spTree>
-      <p:nvGrpSpPr>
-        <p:cNvPr id="1" name=""/>
-        <p:cNvGrpSpPr/>
-        <p:nvPr/>
-      </p:nvGrpSpPr>
-      <p:grpSpPr/>
-      <p:sp>
-        <p:nvSpPr>
-          <p:cNvPr id="2" name="Rectangle 1"/>
-          <p:cNvSpPr/>
-          <p:nvPr/>
-        </p:nvSpPr>
-        <p:spPr>
-          <a:xfrm>
-            <a:off x="0" y="0"/>
-            <a:ext cx="12191695" cy="6858000"/>
-          </a:xfrm>
-          <a:prstGeom prst="rect">
-            <a:avLst/>
-          </a:prstGeom>
-          <a:solidFill>
-            <a:srgbClr val="0A0F1C"/>
-          </a:solidFill>
-          <a:ln>
-            <a:noFill/>
-          </a:ln>
-          <a:effectLst/>
-        </p:spPr>
-        <p:style>
-          <a:lnRef idx="1">
-            <a:schemeClr val="accent1"/>
-          </a:lnRef>
-          <a:fillRef idx="3">
-            <a:schemeClr val="accent1"/>
-          </a:fillRef>
-          <a:effectRef idx="2">
-            <a:schemeClr val="accent1"/>
-          </a:effectRef>
-          <a:fontRef idx="minor">
-            <a:schemeClr val="lt1"/>
-          </a:fontRef>
-        </p:style>
-        <p:txBody>
-          <a:bodyPr rtlCol="0" anchor="ctr"/>
-          <a:lstStyle/>
-          <a:p>
-            <a:pPr algn="ctr"/>
-          </a:p>
-        </p:txBody>
-      </p:sp>
-      <p:sp>
-        <p:nvSpPr>
-          <p:cNvPr id="3" name="TextBox 2"/>
-          <p:cNvSpPr txBox="1"/>
-          <p:nvPr/>
-        </p:nvSpPr>
-        <p:spPr>
-          <a:xfrm>
-            <a:off x="566928" y="365760"/>
-            <a:ext cx="8229600" cy="237744"/>
-          </a:xfrm>
-          <a:prstGeom prst="rect">
-            <a:avLst/>
-          </a:prstGeom>
-          <a:noFill/>
-        </p:spPr>
-        <p:txBody>
-          <a:bodyPr wrap="square" lIns="0" rIns="0" tIns="0" bIns="0" anchor="t">
-            <a:spAutoFit/>
-          </a:bodyPr>
-          <a:lstStyle/>
-          <a:p>
-            <a:pPr algn="l">
-              <a:lnSpc>
-                <a:spcPct val="112000"/>
-              </a:lnSpc>
-              <a:spcAft>
-                <a:spcPts val="0"/>
-              </a:spcAft>
-            </a:pPr>
-            <a:r>
-              <a:rPr sz="1000" b="1">
-                <a:solidFill>
-                  <a:srgbClr val="2FD8B4"/>
-                </a:solidFill>
-                <a:latin typeface="Consolas"/>
-              </a:rPr>
-              <a:t>PHASE 09  ·  EXPLAINABILITY</a:t>
-            </a:r>
-          </a:p>
-        </p:txBody>
-      </p:sp>
-      <p:sp>
-        <p:nvSpPr>
-          <p:cNvPr id="4" name="TextBox 3"/>
-          <p:cNvSpPr txBox="1"/>
-          <p:nvPr/>
-        </p:nvSpPr>
-        <p:spPr>
-          <a:xfrm>
-            <a:off x="566928" y="576072"/>
-            <a:ext cx="11057839" cy="475488"/>
-          </a:xfrm>
-          <a:prstGeom prst="rect">
-            <a:avLst/>
-          </a:prstGeom>
-          <a:noFill/>
-        </p:spPr>
-        <p:txBody>
-          <a:bodyPr wrap="square" lIns="0" rIns="0" tIns="0" bIns="0" anchor="t">
-            <a:spAutoFit/>
-          </a:bodyPr>
-          <a:lstStyle/>
-          <a:p>
-            <a:pPr algn="l">
-              <a:lnSpc>
-                <a:spcPct val="112000"/>
-              </a:lnSpc>
-              <a:spcAft>
-                <a:spcPts val="0"/>
-              </a:spcAft>
-            </a:pPr>
-            <a:r>
-              <a:rPr sz="2600" b="1">
-                <a:solidFill>
-                  <a:srgbClr val="EAF0F7"/>
-                </a:solidFill>
-                <a:latin typeface="Segoe UI"/>
-              </a:rPr>
-              <a:t>Why the model flags a customer</a:t>
-            </a:r>
-          </a:p>
-        </p:txBody>
-      </p:sp>
-      <p:sp>
-        <p:nvSpPr>
-          <p:cNvPr id="5" name="TextBox 4"/>
-          <p:cNvSpPr txBox="1"/>
-          <p:nvPr/>
-        </p:nvSpPr>
-        <p:spPr>
-          <a:xfrm>
-            <a:off x="566928" y="1060704"/>
-            <a:ext cx="11057839" cy="274320"/>
-          </a:xfrm>
-          <a:prstGeom prst="rect">
-            <a:avLst/>
-          </a:prstGeom>
-          <a:noFill/>
-        </p:spPr>
-        <p:txBody>
-          <a:bodyPr wrap="square" lIns="0" rIns="0" tIns="0" bIns="0" anchor="t">
-            <a:spAutoFit/>
-          </a:bodyPr>
-          <a:lstStyle/>
-          <a:p>
-            <a:pPr algn="l">
-              <a:lnSpc>
-                <a:spcPct val="112000"/>
-              </a:lnSpc>
-              <a:spcAft>
-                <a:spcPts val="0"/>
-              </a:spcAft>
-            </a:pPr>
-            <a:r>
-              <a:rPr sz="1250" b="0">
-                <a:solidFill>
-                  <a:srgbClr val="8CA0BE"/>
-                </a:solidFill>
-                <a:latin typeface="Segoe UI"/>
-              </a:rPr>
-              <a:t>The profile of the high-risk band, and a per-customer explanation in the app</a:t>
-            </a:r>
-          </a:p>
-        </p:txBody>
-      </p:sp>
-      <p:sp>
-        <p:nvSpPr>
-          <p:cNvPr id="6" name="Rectangle 5"/>
-          <p:cNvSpPr/>
-          <p:nvPr/>
-        </p:nvSpPr>
-        <p:spPr>
-          <a:xfrm>
-            <a:off x="566928" y="1371600"/>
-            <a:ext cx="11057839" cy="12801"/>
-          </a:xfrm>
-          <a:prstGeom prst="rect">
-            <a:avLst/>
-          </a:prstGeom>
-          <a:solidFill>
-            <a:srgbClr val="223049"/>
-          </a:solidFill>
-          <a:ln>
-            <a:noFill/>
-          </a:ln>
-          <a:effectLst/>
-        </p:spPr>
-        <p:style>
-          <a:lnRef idx="1">
-            <a:schemeClr val="accent1"/>
-          </a:lnRef>
-          <a:fillRef idx="3">
-            <a:schemeClr val="accent1"/>
-          </a:fillRef>
-          <a:effectRef idx="2">
-            <a:schemeClr val="accent1"/>
-          </a:effectRef>
-          <a:fontRef idx="minor">
-            <a:schemeClr val="lt1"/>
-          </a:fontRef>
-        </p:style>
-        <p:txBody>
-          <a:bodyPr rtlCol="0" anchor="ctr"/>
-          <a:lstStyle/>
-          <a:p>
-            <a:pPr algn="ctr"/>
-          </a:p>
-        </p:txBody>
-      </p:sp>
-      <p:pic>
-        <p:nvPicPr>
-          <p:cNvPr id="7" name="Picture 6" descr="chart_high_risk_profile.png"/>
-          <p:cNvPicPr>
-            <a:picLocks noChangeAspect="1"/>
-          </p:cNvPicPr>
-          <p:nvPr/>
-        </p:nvPicPr>
-        <p:blipFill>
-          <a:blip r:embed="rId2"/>
-          <a:stretch>
-            <a:fillRect/>
-          </a:stretch>
-        </p:blipFill>
-        <p:spPr>
-          <a:xfrm>
-            <a:off x="566928" y="1517904"/>
-            <a:ext cx="7315200" cy="3673712"/>
-          </a:xfrm>
-          <a:prstGeom prst="rect">
-            <a:avLst/>
-          </a:prstGeom>
-        </p:spPr>
-      </p:pic>
-      <p:sp>
-        <p:nvSpPr>
-          <p:cNvPr id="8" name="Rounded Rectangle 7"/>
-          <p:cNvSpPr/>
-          <p:nvPr/>
-        </p:nvSpPr>
-        <p:spPr>
-          <a:xfrm>
-            <a:off x="8147303" y="1517904"/>
-            <a:ext cx="3477463" cy="2276856"/>
-          </a:xfrm>
-          <a:prstGeom prst="roundRect">
-            <a:avLst>
-              <a:gd name="adj" fmla="val 8000"/>
-            </a:avLst>
-          </a:prstGeom>
-          <a:solidFill>
-            <a:srgbClr val="111A2C"/>
-          </a:solidFill>
-          <a:ln w="12700">
-            <a:solidFill>
-              <a:srgbClr val="223049"/>
-            </a:solidFill>
-          </a:ln>
-          <a:effectLst/>
-        </p:spPr>
-        <p:style>
-          <a:lnRef idx="1">
-            <a:schemeClr val="accent1"/>
-          </a:lnRef>
-          <a:fillRef idx="3">
-            <a:schemeClr val="accent1"/>
-          </a:fillRef>
-          <a:effectRef idx="2">
-            <a:schemeClr val="accent1"/>
-          </a:effectRef>
-          <a:fontRef idx="minor">
-            <a:schemeClr val="lt1"/>
-          </a:fontRef>
-        </p:style>
-        <p:txBody>
-          <a:bodyPr rtlCol="0" anchor="ctr"/>
-          <a:lstStyle/>
-          <a:p>
-            <a:pPr algn="ctr"/>
-          </a:p>
-        </p:txBody>
-      </p:sp>
-      <p:sp>
-        <p:nvSpPr>
-          <p:cNvPr id="9" name="TextBox 8"/>
-          <p:cNvSpPr txBox="1"/>
-          <p:nvPr/>
-        </p:nvSpPr>
-        <p:spPr>
-          <a:xfrm>
-            <a:off x="8330183" y="1664207"/>
-            <a:ext cx="3111703" cy="1984248"/>
-          </a:xfrm>
-          <a:prstGeom prst="rect">
-            <a:avLst/>
-          </a:prstGeom>
-          <a:noFill/>
-        </p:spPr>
-        <p:txBody>
-          <a:bodyPr wrap="square" lIns="0" rIns="0" tIns="0" bIns="0" anchor="t">
-            <a:spAutoFit/>
-          </a:bodyPr>
-          <a:lstStyle/>
-          <a:p>
-            <a:pPr algn="l">
-              <a:lnSpc>
-                <a:spcPct val="112000"/>
-              </a:lnSpc>
-              <a:spcAft>
-                <a:spcPts val="600"/>
-              </a:spcAft>
-            </a:pPr>
-            <a:r>
-              <a:rPr sz="1050" b="1">
-                <a:solidFill>
-                  <a:srgbClr val="2FD8B4"/>
-                </a:solidFill>
-                <a:latin typeface="Consolas"/>
-              </a:rPr>
-              <a:t>PER-CUSTOMER EXPLANATION</a:t>
-            </a:r>
-          </a:p>
-          <a:p>
-            <a:pPr algn="l">
-              <a:lnSpc>
-                <a:spcPct val="118000"/>
-              </a:lnSpc>
-              <a:spcAft>
-                <a:spcPts val="0"/>
-              </a:spcAft>
-            </a:pPr>
-            <a:r>
-              <a:rPr sz="1060" b="0">
-                <a:solidFill>
-                  <a:srgbClr val="EAF0F7"/>
-                </a:solidFill>
-                <a:latin typeface="Segoe UI"/>
-              </a:rPr>
-              <a:t>For each prediction the console shows the top drivers, computed as coefficient × customer value — the honest linear explanation for a logistic model, with human labels like "Fiber optic internet" or "Account tenure".</a:t>
-            </a:r>
-          </a:p>
-        </p:txBody>
-      </p:sp>
-      <p:sp>
-        <p:nvSpPr>
-          <p:cNvPr id="10" name="Rounded Rectangle 9"/>
-          <p:cNvSpPr/>
-          <p:nvPr/>
-        </p:nvSpPr>
-        <p:spPr>
-          <a:xfrm>
-            <a:off x="8147303" y="3941063"/>
-            <a:ext cx="3477463" cy="2276856"/>
-          </a:xfrm>
-          <a:prstGeom prst="roundRect">
-            <a:avLst>
-              <a:gd name="adj" fmla="val 8000"/>
-            </a:avLst>
-          </a:prstGeom>
-          <a:solidFill>
-            <a:srgbClr val="162136"/>
-          </a:solidFill>
-          <a:ln w="15240">
-            <a:solidFill>
-              <a:srgbClr val="F5A623"/>
-            </a:solidFill>
-          </a:ln>
-          <a:effectLst/>
-        </p:spPr>
-        <p:style>
-          <a:lnRef idx="1">
-            <a:schemeClr val="accent1"/>
-          </a:lnRef>
-          <a:fillRef idx="3">
-            <a:schemeClr val="accent1"/>
-          </a:fillRef>
-          <a:effectRef idx="2">
-            <a:schemeClr val="accent1"/>
-          </a:effectRef>
-          <a:fontRef idx="minor">
-            <a:schemeClr val="lt1"/>
-          </a:fontRef>
-        </p:style>
-        <p:txBody>
-          <a:bodyPr rtlCol="0" anchor="ctr"/>
-          <a:lstStyle/>
-          <a:p>
-            <a:pPr algn="ctr"/>
-          </a:p>
-        </p:txBody>
-      </p:sp>
-      <p:sp>
-        <p:nvSpPr>
-          <p:cNvPr id="11" name="TextBox 10"/>
-          <p:cNvSpPr txBox="1"/>
-          <p:nvPr/>
-        </p:nvSpPr>
-        <p:spPr>
-          <a:xfrm>
-            <a:off x="8330183" y="4069079"/>
-            <a:ext cx="3111703" cy="2039111"/>
-          </a:xfrm>
-          <a:prstGeom prst="rect">
-            <a:avLst/>
-          </a:prstGeom>
-          <a:noFill/>
-        </p:spPr>
-        <p:txBody>
-          <a:bodyPr wrap="square" lIns="0" rIns="0" tIns="0" bIns="0" anchor="t">
-            <a:spAutoFit/>
-          </a:bodyPr>
-          <a:lstStyle/>
-          <a:p>
-            <a:pPr algn="l">
-              <a:lnSpc>
-                <a:spcPct val="112000"/>
-              </a:lnSpc>
-              <a:spcAft>
-                <a:spcPts val="300"/>
-              </a:spcAft>
-            </a:pPr>
-            <a:r>
-              <a:rPr sz="1150" b="1">
-                <a:solidFill>
-                  <a:srgbClr val="F5A623"/>
-                </a:solidFill>
-                <a:latin typeface="Segoe UI"/>
-              </a:rPr>
-              <a:t>ON SHAP — STATED PRECISELY</a:t>
-            </a:r>
-          </a:p>
-          <a:p>
-            <a:pPr algn="l">
-              <a:lnSpc>
-                <a:spcPct val="116000"/>
-              </a:lnSpc>
-              <a:spcAft>
-                <a:spcPts val="0"/>
-              </a:spcAft>
-            </a:pPr>
-            <a:r>
-              <a:rPr sz="1080" b="0">
-                <a:solidFill>
-                  <a:srgbClr val="EAF0F7"/>
-                </a:solidFill>
-                <a:latin typeface="Segoe UI"/>
-              </a:rPr>
-              <a:t>SHAP was explored during the project; summary, bar, dependence and waterfall plots are in the repository. Production explanation is aligned to the deployed Logistic Regression instead — accurate for a linear model, and it costs nothing at request time.</a:t>
-            </a:r>
-          </a:p>
-        </p:txBody>
-      </p:sp>
-      <p:sp>
-        <p:nvSpPr>
-          <p:cNvPr id="12" name="Rectangle 11"/>
-          <p:cNvSpPr/>
-          <p:nvPr/>
-        </p:nvSpPr>
-        <p:spPr>
-          <a:xfrm>
-            <a:off x="566928" y="6309360"/>
-            <a:ext cx="743145" cy="43891"/>
-          </a:xfrm>
-          <a:prstGeom prst="rect">
-            <a:avLst/>
-          </a:prstGeom>
-          <a:solidFill>
-            <a:srgbClr val="223049"/>
-          </a:solidFill>
-          <a:ln>
-            <a:noFill/>
-          </a:ln>
-          <a:effectLst/>
-        </p:spPr>
-        <p:style>
-          <a:lnRef idx="1">
-            <a:schemeClr val="accent1"/>
-          </a:lnRef>
-          <a:fillRef idx="3">
-            <a:schemeClr val="accent1"/>
-          </a:fillRef>
-          <a:effectRef idx="2">
-            <a:schemeClr val="accent1"/>
-          </a:effectRef>
-          <a:fontRef idx="minor">
-            <a:schemeClr val="lt1"/>
-          </a:fontRef>
-        </p:style>
-        <p:txBody>
-          <a:bodyPr rtlCol="0" anchor="ctr"/>
-          <a:lstStyle/>
-          <a:p>
-            <a:pPr algn="ctr"/>
-          </a:p>
-        </p:txBody>
-      </p:sp>
-      <p:sp>
-        <p:nvSpPr>
-          <p:cNvPr id="13" name="Rectangle 12"/>
-          <p:cNvSpPr/>
-          <p:nvPr/>
-        </p:nvSpPr>
-        <p:spPr>
-          <a:xfrm>
-            <a:off x="1360365" y="6309360"/>
-            <a:ext cx="743145" cy="43891"/>
-          </a:xfrm>
-          <a:prstGeom prst="rect">
-            <a:avLst/>
-          </a:prstGeom>
-          <a:solidFill>
-            <a:srgbClr val="223049"/>
-          </a:solidFill>
-          <a:ln>
-            <a:noFill/>
-          </a:ln>
-          <a:effectLst/>
-        </p:spPr>
-        <p:style>
-          <a:lnRef idx="1">
-            <a:schemeClr val="accent1"/>
-          </a:lnRef>
-          <a:fillRef idx="3">
-            <a:schemeClr val="accent1"/>
-          </a:fillRef>
-          <a:effectRef idx="2">
-            <a:schemeClr val="accent1"/>
-          </a:effectRef>
-          <a:fontRef idx="minor">
-            <a:schemeClr val="lt1"/>
-          </a:fontRef>
-        </p:style>
-        <p:txBody>
-          <a:bodyPr rtlCol="0" anchor="ctr"/>
-          <a:lstStyle/>
-          <a:p>
-            <a:pPr algn="ctr"/>
-          </a:p>
-        </p:txBody>
-      </p:sp>
-      <p:sp>
-        <p:nvSpPr>
-          <p:cNvPr id="14" name="Rectangle 13"/>
-          <p:cNvSpPr/>
-          <p:nvPr/>
-        </p:nvSpPr>
-        <p:spPr>
-          <a:xfrm>
-            <a:off x="2153803" y="6309360"/>
-            <a:ext cx="743145" cy="43891"/>
-          </a:xfrm>
-          <a:prstGeom prst="rect">
-            <a:avLst/>
-          </a:prstGeom>
-          <a:solidFill>
-            <a:srgbClr val="223049"/>
-          </a:solidFill>
-          <a:ln>
-            <a:noFill/>
-          </a:ln>
-          <a:effectLst/>
-        </p:spPr>
-        <p:style>
-          <a:lnRef idx="1">
-            <a:schemeClr val="accent1"/>
-          </a:lnRef>
-          <a:fillRef idx="3">
-            <a:schemeClr val="accent1"/>
-          </a:fillRef>
-          <a:effectRef idx="2">
-            <a:schemeClr val="accent1"/>
-          </a:effectRef>
-          <a:fontRef idx="minor">
-            <a:schemeClr val="lt1"/>
-          </a:fontRef>
-        </p:style>
-        <p:txBody>
-          <a:bodyPr rtlCol="0" anchor="ctr"/>
-          <a:lstStyle/>
-          <a:p>
-            <a:pPr algn="ctr"/>
-          </a:p>
-        </p:txBody>
-      </p:sp>
-      <p:sp>
-        <p:nvSpPr>
-          <p:cNvPr id="15" name="Rectangle 14"/>
-          <p:cNvSpPr/>
-          <p:nvPr/>
-        </p:nvSpPr>
-        <p:spPr>
-          <a:xfrm>
-            <a:off x="2947241" y="6309360"/>
-            <a:ext cx="743145" cy="43891"/>
-          </a:xfrm>
-          <a:prstGeom prst="rect">
-            <a:avLst/>
-          </a:prstGeom>
-          <a:solidFill>
-            <a:srgbClr val="223049"/>
-          </a:solidFill>
-          <a:ln>
-            <a:noFill/>
-          </a:ln>
-          <a:effectLst/>
-        </p:spPr>
-        <p:style>
-          <a:lnRef idx="1">
-            <a:schemeClr val="accent1"/>
-          </a:lnRef>
-          <a:fillRef idx="3">
-            <a:schemeClr val="accent1"/>
-          </a:fillRef>
-          <a:effectRef idx="2">
-            <a:schemeClr val="accent1"/>
-          </a:effectRef>
-          <a:fontRef idx="minor">
-            <a:schemeClr val="lt1"/>
-          </a:fontRef>
-        </p:style>
-        <p:txBody>
-          <a:bodyPr rtlCol="0" anchor="ctr"/>
-          <a:lstStyle/>
-          <a:p>
-            <a:pPr algn="ctr"/>
-          </a:p>
-        </p:txBody>
-      </p:sp>
-      <p:sp>
-        <p:nvSpPr>
-          <p:cNvPr id="16" name="Rectangle 15"/>
-          <p:cNvSpPr/>
-          <p:nvPr/>
-        </p:nvSpPr>
-        <p:spPr>
-          <a:xfrm>
-            <a:off x="3740679" y="6309360"/>
-            <a:ext cx="743145" cy="43891"/>
-          </a:xfrm>
-          <a:prstGeom prst="rect">
-            <a:avLst/>
-          </a:prstGeom>
-          <a:solidFill>
-            <a:srgbClr val="223049"/>
-          </a:solidFill>
-          <a:ln>
-            <a:noFill/>
-          </a:ln>
-          <a:effectLst/>
-        </p:spPr>
-        <p:style>
-          <a:lnRef idx="1">
-            <a:schemeClr val="accent1"/>
-          </a:lnRef>
-          <a:fillRef idx="3">
-            <a:schemeClr val="accent1"/>
-          </a:fillRef>
-          <a:effectRef idx="2">
-            <a:schemeClr val="accent1"/>
-          </a:effectRef>
-          <a:fontRef idx="minor">
-            <a:schemeClr val="lt1"/>
-          </a:fontRef>
-        </p:style>
-        <p:txBody>
-          <a:bodyPr rtlCol="0" anchor="ctr"/>
-          <a:lstStyle/>
-          <a:p>
-            <a:pPr algn="ctr"/>
-          </a:p>
-        </p:txBody>
-      </p:sp>
-      <p:sp>
-        <p:nvSpPr>
-          <p:cNvPr id="17" name="Rectangle 16"/>
-          <p:cNvSpPr/>
-          <p:nvPr/>
-        </p:nvSpPr>
-        <p:spPr>
-          <a:xfrm>
-            <a:off x="4534117" y="6309360"/>
-            <a:ext cx="743145" cy="43891"/>
-          </a:xfrm>
-          <a:prstGeom prst="rect">
-            <a:avLst/>
-          </a:prstGeom>
-          <a:solidFill>
-            <a:srgbClr val="223049"/>
-          </a:solidFill>
-          <a:ln>
-            <a:noFill/>
-          </a:ln>
-          <a:effectLst/>
-        </p:spPr>
-        <p:style>
-          <a:lnRef idx="1">
-            <a:schemeClr val="accent1"/>
-          </a:lnRef>
-          <a:fillRef idx="3">
-            <a:schemeClr val="accent1"/>
-          </a:fillRef>
-          <a:effectRef idx="2">
-            <a:schemeClr val="accent1"/>
-          </a:effectRef>
-          <a:fontRef idx="minor">
-            <a:schemeClr val="lt1"/>
-          </a:fontRef>
-        </p:style>
-        <p:txBody>
-          <a:bodyPr rtlCol="0" anchor="ctr"/>
-          <a:lstStyle/>
-          <a:p>
-            <a:pPr algn="ctr"/>
-          </a:p>
-        </p:txBody>
-      </p:sp>
-      <p:sp>
-        <p:nvSpPr>
-          <p:cNvPr id="18" name="Rectangle 17"/>
-          <p:cNvSpPr/>
-          <p:nvPr/>
-        </p:nvSpPr>
-        <p:spPr>
-          <a:xfrm>
-            <a:off x="5327555" y="6309360"/>
-            <a:ext cx="743145" cy="43891"/>
-          </a:xfrm>
-          <a:prstGeom prst="rect">
-            <a:avLst/>
-          </a:prstGeom>
-          <a:solidFill>
-            <a:srgbClr val="223049"/>
-          </a:solidFill>
-          <a:ln>
-            <a:noFill/>
-          </a:ln>
-          <a:effectLst/>
-        </p:spPr>
-        <p:style>
-          <a:lnRef idx="1">
-            <a:schemeClr val="accent1"/>
-          </a:lnRef>
-          <a:fillRef idx="3">
-            <a:schemeClr val="accent1"/>
-          </a:fillRef>
-          <a:effectRef idx="2">
-            <a:schemeClr val="accent1"/>
-          </a:effectRef>
-          <a:fontRef idx="minor">
-            <a:schemeClr val="lt1"/>
-          </a:fontRef>
-        </p:style>
-        <p:txBody>
-          <a:bodyPr rtlCol="0" anchor="ctr"/>
-          <a:lstStyle/>
-          <a:p>
-            <a:pPr algn="ctr"/>
-          </a:p>
-        </p:txBody>
-      </p:sp>
-      <p:sp>
-        <p:nvSpPr>
-          <p:cNvPr id="19" name="Rectangle 18"/>
-          <p:cNvSpPr/>
-          <p:nvPr/>
-        </p:nvSpPr>
-        <p:spPr>
-          <a:xfrm>
-            <a:off x="6120993" y="6309360"/>
-            <a:ext cx="743145" cy="43891"/>
-          </a:xfrm>
-          <a:prstGeom prst="rect">
-            <a:avLst/>
-          </a:prstGeom>
-          <a:solidFill>
-            <a:srgbClr val="223049"/>
-          </a:solidFill>
-          <a:ln>
-            <a:noFill/>
-          </a:ln>
-          <a:effectLst/>
-        </p:spPr>
-        <p:style>
-          <a:lnRef idx="1">
-            <a:schemeClr val="accent1"/>
-          </a:lnRef>
-          <a:fillRef idx="3">
-            <a:schemeClr val="accent1"/>
-          </a:fillRef>
-          <a:effectRef idx="2">
-            <a:schemeClr val="accent1"/>
-          </a:effectRef>
-          <a:fontRef idx="minor">
-            <a:schemeClr val="lt1"/>
-          </a:fontRef>
-        </p:style>
-        <p:txBody>
-          <a:bodyPr rtlCol="0" anchor="ctr"/>
-          <a:lstStyle/>
-          <a:p>
-            <a:pPr algn="ctr"/>
-          </a:p>
-        </p:txBody>
-      </p:sp>
-      <p:sp>
-        <p:nvSpPr>
-          <p:cNvPr id="20" name="Rectangle 19"/>
-          <p:cNvSpPr/>
-          <p:nvPr/>
-        </p:nvSpPr>
-        <p:spPr>
-          <a:xfrm>
-            <a:off x="6914431" y="6296558"/>
-            <a:ext cx="743145" cy="68580"/>
-          </a:xfrm>
-          <a:prstGeom prst="rect">
-            <a:avLst/>
-          </a:prstGeom>
-          <a:solidFill>
-            <a:srgbClr val="2FD8B4"/>
-          </a:solidFill>
-          <a:ln>
-            <a:noFill/>
-          </a:ln>
-          <a:effectLst/>
-        </p:spPr>
-        <p:style>
-          <a:lnRef idx="1">
-            <a:schemeClr val="accent1"/>
-          </a:lnRef>
-          <a:fillRef idx="3">
-            <a:schemeClr val="accent1"/>
-          </a:fillRef>
-          <a:effectRef idx="2">
-            <a:schemeClr val="accent1"/>
-          </a:effectRef>
-          <a:fontRef idx="minor">
-            <a:schemeClr val="lt1"/>
-          </a:fontRef>
-        </p:style>
-        <p:txBody>
-          <a:bodyPr rtlCol="0" anchor="ctr"/>
-          <a:lstStyle/>
-          <a:p>
-            <a:pPr algn="ctr"/>
-          </a:p>
-        </p:txBody>
-      </p:sp>
-      <p:sp>
-        <p:nvSpPr>
-          <p:cNvPr id="21" name="Rectangle 20"/>
-          <p:cNvSpPr/>
-          <p:nvPr/>
-        </p:nvSpPr>
-        <p:spPr>
-          <a:xfrm>
-            <a:off x="7707869" y="6309360"/>
-            <a:ext cx="743145" cy="43891"/>
-          </a:xfrm>
-          <a:prstGeom prst="rect">
-            <a:avLst/>
-          </a:prstGeom>
-          <a:solidFill>
-            <a:srgbClr val="223049"/>
-          </a:solidFill>
-          <a:ln>
-            <a:noFill/>
-          </a:ln>
-          <a:effectLst/>
-        </p:spPr>
-        <p:style>
-          <a:lnRef idx="1">
-            <a:schemeClr val="accent1"/>
-          </a:lnRef>
-          <a:fillRef idx="3">
-            <a:schemeClr val="accent1"/>
-          </a:fillRef>
-          <a:effectRef idx="2">
-            <a:schemeClr val="accent1"/>
-          </a:effectRef>
-          <a:fontRef idx="minor">
-            <a:schemeClr val="lt1"/>
-          </a:fontRef>
-        </p:style>
-        <p:txBody>
-          <a:bodyPr rtlCol="0" anchor="ctr"/>
-          <a:lstStyle/>
-          <a:p>
-            <a:pPr algn="ctr"/>
-          </a:p>
-        </p:txBody>
-      </p:sp>
-      <p:sp>
-        <p:nvSpPr>
-          <p:cNvPr id="22" name="Rectangle 21"/>
-          <p:cNvSpPr/>
-          <p:nvPr/>
-        </p:nvSpPr>
-        <p:spPr>
-          <a:xfrm>
-            <a:off x="8501307" y="6309360"/>
-            <a:ext cx="743145" cy="43891"/>
-          </a:xfrm>
-          <a:prstGeom prst="rect">
-            <a:avLst/>
-          </a:prstGeom>
-          <a:solidFill>
-            <a:srgbClr val="223049"/>
-          </a:solidFill>
-          <a:ln>
-            <a:noFill/>
-          </a:ln>
-          <a:effectLst/>
-        </p:spPr>
-        <p:style>
-          <a:lnRef idx="1">
-            <a:schemeClr val="accent1"/>
-          </a:lnRef>
-          <a:fillRef idx="3">
-            <a:schemeClr val="accent1"/>
-          </a:fillRef>
-          <a:effectRef idx="2">
-            <a:schemeClr val="accent1"/>
-          </a:effectRef>
-          <a:fontRef idx="minor">
-            <a:schemeClr val="lt1"/>
-          </a:fontRef>
-        </p:style>
-        <p:txBody>
-          <a:bodyPr rtlCol="0" anchor="ctr"/>
-          <a:lstStyle/>
-          <a:p>
-            <a:pPr algn="ctr"/>
-          </a:p>
-        </p:txBody>
-      </p:sp>
-      <p:sp>
-        <p:nvSpPr>
-          <p:cNvPr id="23" name="Rectangle 22"/>
-          <p:cNvSpPr/>
-          <p:nvPr/>
-        </p:nvSpPr>
-        <p:spPr>
-          <a:xfrm>
-            <a:off x="9294745" y="6309360"/>
-            <a:ext cx="743145" cy="43891"/>
-          </a:xfrm>
-          <a:prstGeom prst="rect">
-            <a:avLst/>
-          </a:prstGeom>
-          <a:solidFill>
-            <a:srgbClr val="223049"/>
-          </a:solidFill>
-          <a:ln>
-            <a:noFill/>
-          </a:ln>
-          <a:effectLst/>
-        </p:spPr>
-        <p:style>
-          <a:lnRef idx="1">
-            <a:schemeClr val="accent1"/>
-          </a:lnRef>
-          <a:fillRef idx="3">
-            <a:schemeClr val="accent1"/>
-          </a:fillRef>
-          <a:effectRef idx="2">
-            <a:schemeClr val="accent1"/>
-          </a:effectRef>
-          <a:fontRef idx="minor">
-            <a:schemeClr val="lt1"/>
-          </a:fontRef>
-        </p:style>
-        <p:txBody>
-          <a:bodyPr rtlCol="0" anchor="ctr"/>
-          <a:lstStyle/>
-          <a:p>
-            <a:pPr algn="ctr"/>
-          </a:p>
-        </p:txBody>
-      </p:sp>
-      <p:sp>
-        <p:nvSpPr>
-          <p:cNvPr id="24" name="Rectangle 23"/>
-          <p:cNvSpPr/>
-          <p:nvPr/>
-        </p:nvSpPr>
-        <p:spPr>
-          <a:xfrm>
-            <a:off x="10088183" y="6309360"/>
-            <a:ext cx="743145" cy="43891"/>
-          </a:xfrm>
-          <a:prstGeom prst="rect">
-            <a:avLst/>
-          </a:prstGeom>
-          <a:solidFill>
-            <a:srgbClr val="223049"/>
-          </a:solidFill>
-          <a:ln>
-            <a:noFill/>
-          </a:ln>
-          <a:effectLst/>
-        </p:spPr>
-        <p:style>
-          <a:lnRef idx="1">
-            <a:schemeClr val="accent1"/>
-          </a:lnRef>
-          <a:fillRef idx="3">
-            <a:schemeClr val="accent1"/>
-          </a:fillRef>
-          <a:effectRef idx="2">
-            <a:schemeClr val="accent1"/>
-          </a:effectRef>
-          <a:fontRef idx="minor">
-            <a:schemeClr val="lt1"/>
-          </a:fontRef>
-        </p:style>
-        <p:txBody>
-          <a:bodyPr rtlCol="0" anchor="ctr"/>
-          <a:lstStyle/>
-          <a:p>
-            <a:pPr algn="ctr"/>
-          </a:p>
-        </p:txBody>
-      </p:sp>
-      <p:sp>
-        <p:nvSpPr>
-          <p:cNvPr id="25" name="Rectangle 24"/>
-          <p:cNvSpPr/>
-          <p:nvPr/>
-        </p:nvSpPr>
-        <p:spPr>
-          <a:xfrm>
-            <a:off x="10881621" y="6309360"/>
-            <a:ext cx="743145" cy="43891"/>
-          </a:xfrm>
-          <a:prstGeom prst="rect">
-            <a:avLst/>
-          </a:prstGeom>
-          <a:solidFill>
-            <a:srgbClr val="223049"/>
-          </a:solidFill>
-          <a:ln>
-            <a:noFill/>
-          </a:ln>
-          <a:effectLst/>
-        </p:spPr>
-        <p:style>
-          <a:lnRef idx="1">
-            <a:schemeClr val="accent1"/>
-          </a:lnRef>
-          <a:fillRef idx="3">
-            <a:schemeClr val="accent1"/>
-          </a:fillRef>
-          <a:effectRef idx="2">
-            <a:schemeClr val="accent1"/>
-          </a:effectRef>
-          <a:fontRef idx="minor">
-            <a:schemeClr val="lt1"/>
-          </a:fontRef>
-        </p:style>
-        <p:txBody>
-          <a:bodyPr rtlCol="0" anchor="ctr"/>
-          <a:lstStyle/>
-          <a:p>
-            <a:pPr algn="ctr"/>
-          </a:p>
-        </p:txBody>
-      </p:sp>
-      <p:sp>
-        <p:nvSpPr>
-          <p:cNvPr id="26" name="Rectangle 25"/>
-          <p:cNvSpPr/>
-          <p:nvPr/>
-        </p:nvSpPr>
-        <p:spPr>
-          <a:xfrm>
-            <a:off x="566928" y="6455664"/>
-            <a:ext cx="11057839" cy="9144"/>
-          </a:xfrm>
-          <a:prstGeom prst="rect">
-            <a:avLst/>
-          </a:prstGeom>
-          <a:solidFill>
-            <a:srgbClr val="223049"/>
-          </a:solidFill>
-          <a:ln>
-            <a:noFill/>
-          </a:ln>
-          <a:effectLst/>
-        </p:spPr>
-        <p:style>
-          <a:lnRef idx="1">
-            <a:schemeClr val="accent1"/>
-          </a:lnRef>
-          <a:fillRef idx="3">
-            <a:schemeClr val="accent1"/>
-          </a:fillRef>
-          <a:effectRef idx="2">
-            <a:schemeClr val="accent1"/>
-          </a:effectRef>
-          <a:fontRef idx="minor">
-            <a:schemeClr val="lt1"/>
-          </a:fontRef>
-        </p:style>
-        <p:txBody>
-          <a:bodyPr rtlCol="0" anchor="ctr"/>
-          <a:lstStyle/>
-          <a:p>
-            <a:pPr algn="ctr"/>
-          </a:p>
-        </p:txBody>
-      </p:sp>
-      <p:sp>
-        <p:nvSpPr>
-          <p:cNvPr id="27" name="TextBox 26"/>
-          <p:cNvSpPr txBox="1"/>
-          <p:nvPr/>
-        </p:nvSpPr>
-        <p:spPr>
-          <a:xfrm>
-            <a:off x="566928" y="6510528"/>
-            <a:ext cx="9509760" cy="219456"/>
-          </a:xfrm>
-          <a:prstGeom prst="rect">
-            <a:avLst/>
-          </a:prstGeom>
-          <a:noFill/>
-        </p:spPr>
-        <p:txBody>
-          <a:bodyPr wrap="square" lIns="0" rIns="0" tIns="0" bIns="0" anchor="t">
-            <a:spAutoFit/>
-          </a:bodyPr>
-          <a:lstStyle/>
-          <a:p>
-            <a:pPr algn="l">
-              <a:lnSpc>
-                <a:spcPct val="112000"/>
-              </a:lnSpc>
-              <a:spcAft>
-                <a:spcPts val="0"/>
-              </a:spcAft>
-            </a:pPr>
-            <a:r>
-              <a:rPr sz="900" b="0">
-                <a:solidFill>
-                  <a:srgbClr val="8CA0BE"/>
-                </a:solidFill>
-                <a:latin typeface="Segoe UI"/>
-              </a:rPr>
-              <a:t>RetainIQ · Signal Ops Console   ·   PHASE 09 · EXPLAINABILITY</a:t>
-            </a:r>
-          </a:p>
-        </p:txBody>
-      </p:sp>
-      <p:sp>
-        <p:nvSpPr>
-          <p:cNvPr id="28" name="TextBox 27"/>
-          <p:cNvSpPr txBox="1"/>
-          <p:nvPr/>
-        </p:nvSpPr>
-        <p:spPr>
-          <a:xfrm>
-            <a:off x="10527487" y="6510528"/>
-            <a:ext cx="1097280" cy="219456"/>
-          </a:xfrm>
-          <a:prstGeom prst="rect">
-            <a:avLst/>
-          </a:prstGeom>
-          <a:noFill/>
-        </p:spPr>
-        <p:txBody>
-          <a:bodyPr wrap="square" lIns="0" rIns="0" tIns="0" bIns="0" anchor="t">
-            <a:spAutoFit/>
-          </a:bodyPr>
-          <a:lstStyle/>
-          <a:p>
-            <a:pPr algn="r">
-              <a:lnSpc>
-                <a:spcPct val="112000"/>
-              </a:lnSpc>
-              <a:spcAft>
-                <a:spcPts val="0"/>
-              </a:spcAft>
-            </a:pPr>
-            <a:r>
-              <a:rPr sz="900" b="0">
-                <a:solidFill>
-                  <a:srgbClr val="8CA0BE"/>
-                </a:solidFill>
-                <a:latin typeface="Consolas"/>
-              </a:rPr>
-              <a:t>12</a:t>
-            </a:r>
-          </a:p>
-        </p:txBody>
-      </p:sp>
-    </p:spTree>
-  </p:cSld>
-  <p:clrMapOvr>
-    <a:masterClrMapping/>
-  </p:clrMapOvr>
-</p:sld>
-</file>
-
-<file path=ppt/slides/slide13.xml><?xml version="1.0" encoding="utf-8"?>
-<p:sld xmlns:a="http://schemas.openxmlformats.org/drawingml/2006/main" xmlns:p="http://schemas.openxmlformats.org/presentationml/2006/main" xmlns:r="http://schemas.openxmlformats.org/officeDocument/2006/relationships">
-  <p:cSld>
-    <p:spTree>
-      <p:nvGrpSpPr>
-        <p:cNvPr id="1" name=""/>
-        <p:cNvGrpSpPr/>
-        <p:nvPr/>
-      </p:nvGrpSpPr>
-      <p:grpSpPr/>
-      <p:sp>
-        <p:nvSpPr>
-          <p:cNvPr id="2" name="Rectangle 1"/>
-          <p:cNvSpPr/>
-          <p:nvPr/>
-        </p:nvSpPr>
-        <p:spPr>
-          <a:xfrm>
-            <a:off x="0" y="0"/>
-            <a:ext cx="12191695" cy="6858000"/>
-          </a:xfrm>
-          <a:prstGeom prst="rect">
-            <a:avLst/>
-          </a:prstGeom>
-          <a:solidFill>
-            <a:srgbClr val="0A0F1C"/>
-          </a:solidFill>
-          <a:ln>
-            <a:noFill/>
-          </a:ln>
-          <a:effectLst/>
-        </p:spPr>
-        <p:style>
-          <a:lnRef idx="1">
-            <a:schemeClr val="accent1"/>
-          </a:lnRef>
-          <a:fillRef idx="3">
-            <a:schemeClr val="accent1"/>
-          </a:fillRef>
-          <a:effectRef idx="2">
-            <a:schemeClr val="accent1"/>
-          </a:effectRef>
-          <a:fontRef idx="minor">
-            <a:schemeClr val="lt1"/>
-          </a:fontRef>
-        </p:style>
-        <p:txBody>
-          <a:bodyPr rtlCol="0" anchor="ctr"/>
-          <a:lstStyle/>
-          <a:p>
-            <a:pPr algn="ctr"/>
-          </a:p>
-        </p:txBody>
-      </p:sp>
-      <p:sp>
-        <p:nvSpPr>
-          <p:cNvPr id="3" name="TextBox 2"/>
-          <p:cNvSpPr txBox="1"/>
-          <p:nvPr/>
-        </p:nvSpPr>
-        <p:spPr>
-          <a:xfrm>
-            <a:off x="566928" y="365760"/>
-            <a:ext cx="8229600" cy="237744"/>
-          </a:xfrm>
-          <a:prstGeom prst="rect">
-            <a:avLst/>
-          </a:prstGeom>
-          <a:noFill/>
-        </p:spPr>
-        <p:txBody>
-          <a:bodyPr wrap="square" lIns="0" rIns="0" tIns="0" bIns="0" anchor="t">
-            <a:spAutoFit/>
-          </a:bodyPr>
-          <a:lstStyle/>
-          <a:p>
-            <a:pPr algn="l">
-              <a:lnSpc>
-                <a:spcPct val="112000"/>
-              </a:lnSpc>
-              <a:spcAft>
-                <a:spcPts val="0"/>
-              </a:spcAft>
-            </a:pPr>
-            <a:r>
-              <a:rPr sz="1000" b="1">
-                <a:solidFill>
-                  <a:srgbClr val="2FD8B4"/>
-                </a:solidFill>
-                <a:latin typeface="Consolas"/>
-              </a:rPr>
-              <a:t>PHASE 10  ·  RISK SEGMENTATION</a:t>
-            </a:r>
-          </a:p>
-        </p:txBody>
-      </p:sp>
-      <p:sp>
-        <p:nvSpPr>
-          <p:cNvPr id="4" name="TextBox 3"/>
-          <p:cNvSpPr txBox="1"/>
-          <p:nvPr/>
-        </p:nvSpPr>
-        <p:spPr>
-          <a:xfrm>
-            <a:off x="566928" y="576072"/>
-            <a:ext cx="11057839" cy="475488"/>
-          </a:xfrm>
-          <a:prstGeom prst="rect">
-            <a:avLst/>
-          </a:prstGeom>
-          <a:noFill/>
-        </p:spPr>
-        <p:txBody>
-          <a:bodyPr wrap="square" lIns="0" rIns="0" tIns="0" bIns="0" anchor="t">
-            <a:spAutoFit/>
-          </a:bodyPr>
-          <a:lstStyle/>
-          <a:p>
-            <a:pPr algn="l">
-              <a:lnSpc>
-                <a:spcPct val="112000"/>
-              </a:lnSpc>
-              <a:spcAft>
-                <a:spcPts val="0"/>
-              </a:spcAft>
-            </a:pPr>
-            <a:r>
-              <a:rPr sz="2600" b="1">
-                <a:solidFill>
-                  <a:srgbClr val="EAF0F7"/>
-                </a:solidFill>
-                <a:latin typeface="Segoe UI"/>
-              </a:rPr>
-              <a:t>Turning a probability into a work queue</a:t>
-            </a:r>
-          </a:p>
-        </p:txBody>
-      </p:sp>
-      <p:sp>
-        <p:nvSpPr>
-          <p:cNvPr id="5" name="TextBox 4"/>
-          <p:cNvSpPr txBox="1"/>
-          <p:nvPr/>
-        </p:nvSpPr>
-        <p:spPr>
-          <a:xfrm>
-            <a:off x="566928" y="1060704"/>
-            <a:ext cx="11057839" cy="274320"/>
-          </a:xfrm>
-          <a:prstGeom prst="rect">
-            <a:avLst/>
-          </a:prstGeom>
-          <a:noFill/>
-        </p:spPr>
-        <p:txBody>
-          <a:bodyPr wrap="square" lIns="0" rIns="0" tIns="0" bIns="0" anchor="t">
-            <a:spAutoFit/>
-          </a:bodyPr>
-          <a:lstStyle/>
-          <a:p>
-            <a:pPr algn="l">
-              <a:lnSpc>
-                <a:spcPct val="112000"/>
-              </a:lnSpc>
-              <a:spcAft>
-                <a:spcPts val="0"/>
-              </a:spcAft>
-            </a:pPr>
-            <a:r>
-              <a:rPr sz="1250" b="0">
-                <a:solidFill>
-                  <a:srgbClr val="8CA0BE"/>
-                </a:solidFill>
-                <a:latin typeface="Segoe UI"/>
-              </a:rPr>
-              <a:t>Every scored customer lands in one of three operational bands</a:t>
-            </a:r>
-          </a:p>
-        </p:txBody>
-      </p:sp>
-      <p:sp>
-        <p:nvSpPr>
-          <p:cNvPr id="6" name="Rectangle 5"/>
-          <p:cNvSpPr/>
-          <p:nvPr/>
-        </p:nvSpPr>
-        <p:spPr>
-          <a:xfrm>
-            <a:off x="566928" y="1371600"/>
-            <a:ext cx="11057839" cy="12801"/>
-          </a:xfrm>
-          <a:prstGeom prst="rect">
-            <a:avLst/>
-          </a:prstGeom>
-          <a:solidFill>
-            <a:srgbClr val="223049"/>
-          </a:solidFill>
-          <a:ln>
-            <a:noFill/>
-          </a:ln>
-          <a:effectLst/>
-        </p:spPr>
-        <p:style>
-          <a:lnRef idx="1">
-            <a:schemeClr val="accent1"/>
-          </a:lnRef>
-          <a:fillRef idx="3">
-            <a:schemeClr val="accent1"/>
-          </a:fillRef>
-          <a:effectRef idx="2">
-            <a:schemeClr val="accent1"/>
-          </a:effectRef>
-          <a:fontRef idx="minor">
-            <a:schemeClr val="lt1"/>
-          </a:fontRef>
-        </p:style>
-        <p:txBody>
-          <a:bodyPr rtlCol="0" anchor="ctr"/>
-          <a:lstStyle/>
-          <a:p>
-            <a:pPr algn="ctr"/>
-          </a:p>
-        </p:txBody>
-      </p:sp>
-      <p:sp>
-        <p:nvSpPr>
-          <p:cNvPr id="7" name="Rounded Rectangle 6"/>
-          <p:cNvSpPr/>
-          <p:nvPr/>
-        </p:nvSpPr>
-        <p:spPr>
-          <a:xfrm>
-            <a:off x="566928" y="1517904"/>
-            <a:ext cx="3539642" cy="914400"/>
-          </a:xfrm>
-          <a:prstGeom prst="roundRect">
-            <a:avLst>
-              <a:gd name="adj" fmla="val 8000"/>
-            </a:avLst>
-          </a:prstGeom>
-          <a:solidFill>
-            <a:srgbClr val="111A2C"/>
-          </a:solidFill>
-          <a:ln w="15240">
-            <a:solidFill>
-              <a:srgbClr val="2FD8B4"/>
-            </a:solidFill>
-          </a:ln>
-          <a:effectLst/>
-        </p:spPr>
-        <p:style>
-          <a:lnRef idx="1">
-            <a:schemeClr val="accent1"/>
-          </a:lnRef>
-          <a:fillRef idx="3">
-            <a:schemeClr val="accent1"/>
-          </a:fillRef>
-          <a:effectRef idx="2">
-            <a:schemeClr val="accent1"/>
-          </a:effectRef>
-          <a:fontRef idx="minor">
-            <a:schemeClr val="lt1"/>
-          </a:fontRef>
-        </p:style>
-        <p:txBody>
-          <a:bodyPr rtlCol="0" anchor="ctr"/>
-          <a:lstStyle/>
-          <a:p>
-            <a:pPr algn="ctr"/>
-          </a:p>
-        </p:txBody>
-      </p:sp>
-      <p:sp>
-        <p:nvSpPr>
-          <p:cNvPr id="8" name="TextBox 7"/>
-          <p:cNvSpPr txBox="1"/>
-          <p:nvPr/>
-        </p:nvSpPr>
-        <p:spPr>
-          <a:xfrm>
-            <a:off x="768096" y="1664207"/>
-            <a:ext cx="3137306" cy="621792"/>
-          </a:xfrm>
-          <a:prstGeom prst="rect">
-            <a:avLst/>
-          </a:prstGeom>
-          <a:noFill/>
-        </p:spPr>
-        <p:txBody>
-          <a:bodyPr wrap="square" lIns="0" rIns="0" tIns="0" bIns="0" anchor="t">
-            <a:spAutoFit/>
-          </a:bodyPr>
-          <a:lstStyle/>
-          <a:p>
-            <a:pPr algn="l">
-              <a:lnSpc>
-                <a:spcPct val="112000"/>
-              </a:lnSpc>
-              <a:spcAft>
-                <a:spcPts val="200"/>
-              </a:spcAft>
-            </a:pPr>
-            <a:r>
-              <a:rPr sz="1150" b="1">
-                <a:solidFill>
-                  <a:srgbClr val="2FD8B4"/>
-                </a:solidFill>
-                <a:latin typeface="Consolas"/>
-              </a:rPr>
-              <a:t>&lt; 30%   LOW RISK</a:t>
-            </a:r>
-          </a:p>
-          <a:p>
-            <a:pPr algn="l">
-              <a:lnSpc>
-                <a:spcPct val="112000"/>
-              </a:lnSpc>
-              <a:spcAft>
-                <a:spcPts val="0"/>
-              </a:spcAft>
-            </a:pPr>
-            <a:r>
-              <a:rPr sz="1250" b="0">
-                <a:solidFill>
-                  <a:srgbClr val="EAF0F7"/>
-                </a:solidFill>
-                <a:latin typeface="Segoe UI"/>
-              </a:rPr>
-              <a:t>4,435 customers</a:t>
-            </a:r>
-          </a:p>
-        </p:txBody>
-      </p:sp>
-      <p:sp>
-        <p:nvSpPr>
-          <p:cNvPr id="9" name="Rounded Rectangle 8"/>
-          <p:cNvSpPr/>
-          <p:nvPr/>
-        </p:nvSpPr>
-        <p:spPr>
-          <a:xfrm>
-            <a:off x="4326026" y="1517904"/>
-            <a:ext cx="3539642" cy="914400"/>
-          </a:xfrm>
-          <a:prstGeom prst="roundRect">
-            <a:avLst>
-              <a:gd name="adj" fmla="val 8000"/>
-            </a:avLst>
-          </a:prstGeom>
-          <a:solidFill>
-            <a:srgbClr val="111A2C"/>
-          </a:solidFill>
-          <a:ln w="15240">
-            <a:solidFill>
-              <a:srgbClr val="F5A623"/>
-            </a:solidFill>
-          </a:ln>
-          <a:effectLst/>
-        </p:spPr>
-        <p:style>
-          <a:lnRef idx="1">
-            <a:schemeClr val="accent1"/>
-          </a:lnRef>
-          <a:fillRef idx="3">
-            <a:schemeClr val="accent1"/>
-          </a:fillRef>
-          <a:effectRef idx="2">
-            <a:schemeClr val="accent1"/>
-          </a:effectRef>
-          <a:fontRef idx="minor">
-            <a:schemeClr val="lt1"/>
-          </a:fontRef>
-        </p:style>
-        <p:txBody>
-          <a:bodyPr rtlCol="0" anchor="ctr"/>
-          <a:lstStyle/>
-          <a:p>
-            <a:pPr algn="ctr"/>
-          </a:p>
-        </p:txBody>
-      </p:sp>
-      <p:sp>
-        <p:nvSpPr>
-          <p:cNvPr id="10" name="TextBox 9"/>
-          <p:cNvSpPr txBox="1"/>
-          <p:nvPr/>
-        </p:nvSpPr>
-        <p:spPr>
-          <a:xfrm>
-            <a:off x="4527194" y="1664207"/>
-            <a:ext cx="3137306" cy="621792"/>
-          </a:xfrm>
-          <a:prstGeom prst="rect">
-            <a:avLst/>
-          </a:prstGeom>
-          <a:noFill/>
-        </p:spPr>
-        <p:txBody>
-          <a:bodyPr wrap="square" lIns="0" rIns="0" tIns="0" bIns="0" anchor="t">
-            <a:spAutoFit/>
-          </a:bodyPr>
-          <a:lstStyle/>
-          <a:p>
-            <a:pPr algn="l">
-              <a:lnSpc>
-                <a:spcPct val="112000"/>
-              </a:lnSpc>
-              <a:spcAft>
-                <a:spcPts val="200"/>
-              </a:spcAft>
-            </a:pPr>
-            <a:r>
-              <a:rPr sz="1150" b="1">
-                <a:solidFill>
-                  <a:srgbClr val="F5A623"/>
-                </a:solidFill>
-                <a:latin typeface="Consolas"/>
-              </a:rPr>
-              <a:t>30 – 60%   MEDIUM RISK</a:t>
-            </a:r>
-          </a:p>
-          <a:p>
-            <a:pPr algn="l">
-              <a:lnSpc>
-                <a:spcPct val="112000"/>
-              </a:lnSpc>
-              <a:spcAft>
-                <a:spcPts val="0"/>
-              </a:spcAft>
-            </a:pPr>
-            <a:r>
-              <a:rPr sz="1250" b="0">
-                <a:solidFill>
-                  <a:srgbClr val="EAF0F7"/>
-                </a:solidFill>
-                <a:latin typeface="Segoe UI"/>
-              </a:rPr>
-              <a:t>1,473 customers</a:t>
-            </a:r>
-          </a:p>
-        </p:txBody>
-      </p:sp>
-      <p:sp>
-        <p:nvSpPr>
-          <p:cNvPr id="11" name="Rounded Rectangle 10"/>
-          <p:cNvSpPr/>
-          <p:nvPr/>
-        </p:nvSpPr>
-        <p:spPr>
-          <a:xfrm>
-            <a:off x="8085124" y="1517904"/>
-            <a:ext cx="3539642" cy="914400"/>
-          </a:xfrm>
-          <a:prstGeom prst="roundRect">
-            <a:avLst>
-              <a:gd name="adj" fmla="val 8000"/>
-            </a:avLst>
-          </a:prstGeom>
-          <a:solidFill>
-            <a:srgbClr val="111A2C"/>
-          </a:solidFill>
-          <a:ln w="15240">
-            <a:solidFill>
-              <a:srgbClr val="FF5C6C"/>
-            </a:solidFill>
-          </a:ln>
-          <a:effectLst/>
-        </p:spPr>
-        <p:style>
-          <a:lnRef idx="1">
-            <a:schemeClr val="accent1"/>
-          </a:lnRef>
-          <a:fillRef idx="3">
-            <a:schemeClr val="accent1"/>
-          </a:fillRef>
-          <a:effectRef idx="2">
-            <a:schemeClr val="accent1"/>
-          </a:effectRef>
-          <a:fontRef idx="minor">
-            <a:schemeClr val="lt1"/>
-          </a:fontRef>
-        </p:style>
-        <p:txBody>
-          <a:bodyPr rtlCol="0" anchor="ctr"/>
-          <a:lstStyle/>
-          <a:p>
-            <a:pPr algn="ctr"/>
-          </a:p>
-        </p:txBody>
-      </p:sp>
-      <p:sp>
-        <p:nvSpPr>
-          <p:cNvPr id="12" name="TextBox 11"/>
-          <p:cNvSpPr txBox="1"/>
-          <p:nvPr/>
-        </p:nvSpPr>
-        <p:spPr>
-          <a:xfrm>
-            <a:off x="8286292" y="1664207"/>
-            <a:ext cx="3137306" cy="621792"/>
-          </a:xfrm>
-          <a:prstGeom prst="rect">
-            <a:avLst/>
-          </a:prstGeom>
-          <a:noFill/>
-        </p:spPr>
-        <p:txBody>
-          <a:bodyPr wrap="square" lIns="0" rIns="0" tIns="0" bIns="0" anchor="t">
-            <a:spAutoFit/>
-          </a:bodyPr>
-          <a:lstStyle/>
-          <a:p>
-            <a:pPr algn="l">
-              <a:lnSpc>
-                <a:spcPct val="112000"/>
-              </a:lnSpc>
-              <a:spcAft>
-                <a:spcPts val="200"/>
-              </a:spcAft>
-            </a:pPr>
-            <a:r>
-              <a:rPr sz="1150" b="1">
-                <a:solidFill>
-                  <a:srgbClr val="FF5C6C"/>
-                </a:solidFill>
-                <a:latin typeface="Consolas"/>
-              </a:rPr>
-              <a:t>≥ 60%   HIGH RISK</a:t>
-            </a:r>
-          </a:p>
-          <a:p>
-            <a:pPr algn="l">
-              <a:lnSpc>
-                <a:spcPct val="112000"/>
-              </a:lnSpc>
-              <a:spcAft>
-                <a:spcPts val="0"/>
-              </a:spcAft>
-            </a:pPr>
-            <a:r>
-              <a:rPr sz="1250" b="0">
-                <a:solidFill>
-                  <a:srgbClr val="EAF0F7"/>
-                </a:solidFill>
-                <a:latin typeface="Segoe UI"/>
-              </a:rPr>
-              <a:t>1,135 customers</a:t>
-            </a:r>
-          </a:p>
-        </p:txBody>
-      </p:sp>
-      <p:pic>
-        <p:nvPicPr>
-          <p:cNvPr id="13" name="Picture 12" descr="chart_risk_bands.png"/>
-          <p:cNvPicPr>
-            <a:picLocks noChangeAspect="1"/>
-          </p:cNvPicPr>
-          <p:nvPr/>
-        </p:nvPicPr>
-        <p:blipFill>
-          <a:blip r:embed="rId2"/>
-          <a:stretch>
-            <a:fillRect/>
-          </a:stretch>
-        </p:blipFill>
-        <p:spPr>
-          <a:xfrm>
-            <a:off x="566928" y="2596896"/>
-            <a:ext cx="7059168" cy="3473831"/>
-          </a:xfrm>
-          <a:prstGeom prst="rect">
-            <a:avLst/>
-          </a:prstGeom>
-        </p:spPr>
-      </p:pic>
-      <p:sp>
-        <p:nvSpPr>
-          <p:cNvPr id="14" name="Rounded Rectangle 13"/>
-          <p:cNvSpPr/>
-          <p:nvPr/>
-        </p:nvSpPr>
-        <p:spPr>
-          <a:xfrm>
-            <a:off x="7882127" y="2651760"/>
-            <a:ext cx="3742639" cy="1709928"/>
-          </a:xfrm>
-          <a:prstGeom prst="roundRect">
-            <a:avLst>
-              <a:gd name="adj" fmla="val 8000"/>
-            </a:avLst>
-          </a:prstGeom>
-          <a:solidFill>
-            <a:srgbClr val="162136"/>
-          </a:solidFill>
-          <a:ln w="15240">
-            <a:solidFill>
-              <a:srgbClr val="2FD8B4"/>
-            </a:solidFill>
-          </a:ln>
-          <a:effectLst/>
-        </p:spPr>
-        <p:style>
-          <a:lnRef idx="1">
-            <a:schemeClr val="accent1"/>
-          </a:lnRef>
-          <a:fillRef idx="3">
-            <a:schemeClr val="accent1"/>
-          </a:fillRef>
-          <a:effectRef idx="2">
-            <a:schemeClr val="accent1"/>
-          </a:effectRef>
-          <a:fontRef idx="minor">
-            <a:schemeClr val="lt1"/>
-          </a:fontRef>
-        </p:style>
-        <p:txBody>
-          <a:bodyPr rtlCol="0" anchor="ctr"/>
-          <a:lstStyle/>
-          <a:p>
-            <a:pPr algn="ctr"/>
-          </a:p>
-        </p:txBody>
-      </p:sp>
-      <p:sp>
-        <p:nvSpPr>
-          <p:cNvPr id="15" name="TextBox 14"/>
-          <p:cNvSpPr txBox="1"/>
-          <p:nvPr/>
-        </p:nvSpPr>
-        <p:spPr>
-          <a:xfrm>
-            <a:off x="8065007" y="2798064"/>
-            <a:ext cx="3376879" cy="1417319"/>
-          </a:xfrm>
-          <a:prstGeom prst="rect">
-            <a:avLst/>
-          </a:prstGeom>
-          <a:noFill/>
-        </p:spPr>
-        <p:txBody>
-          <a:bodyPr wrap="square" lIns="0" rIns="0" tIns="0" bIns="0" anchor="t">
-            <a:spAutoFit/>
-          </a:bodyPr>
-          <a:lstStyle/>
-          <a:p>
-            <a:pPr algn="l">
-              <a:lnSpc>
-                <a:spcPct val="112000"/>
-              </a:lnSpc>
-              <a:spcAft>
-                <a:spcPts val="500"/>
-              </a:spcAft>
-            </a:pPr>
-            <a:r>
-              <a:rPr sz="1050" b="1">
-                <a:solidFill>
-                  <a:srgbClr val="2FD8B4"/>
-                </a:solidFill>
-                <a:latin typeface="Consolas"/>
-              </a:rPr>
-              <a:t>VALIDATION</a:t>
-            </a:r>
-          </a:p>
-          <a:p>
-            <a:pPr algn="l">
-              <a:lnSpc>
-                <a:spcPct val="118000"/>
-              </a:lnSpc>
-              <a:spcAft>
-                <a:spcPts val="0"/>
-              </a:spcAft>
-            </a:pPr>
-            <a:r>
-              <a:rPr sz="1060" b="0">
-                <a:solidFill>
-                  <a:srgbClr val="EAF0F7"/>
-                </a:solidFill>
-                <a:latin typeface="Segoe UI"/>
-              </a:rPr>
-              <a:t>The bands track reality: actual churn is 9.5% in low risk, 42.0% in medium and 73.0% in high risk. The segmentation is not decoration — it orders the portfolio correctly.</a:t>
-            </a:r>
-          </a:p>
-        </p:txBody>
-      </p:sp>
-      <p:sp>
-        <p:nvSpPr>
-          <p:cNvPr id="16" name="Rounded Rectangle 15"/>
-          <p:cNvSpPr/>
-          <p:nvPr/>
-        </p:nvSpPr>
-        <p:spPr>
-          <a:xfrm>
-            <a:off x="7882127" y="4507992"/>
-            <a:ext cx="3742639" cy="1709928"/>
-          </a:xfrm>
-          <a:prstGeom prst="roundRect">
-            <a:avLst>
-              <a:gd name="adj" fmla="val 8000"/>
-            </a:avLst>
-          </a:prstGeom>
-          <a:solidFill>
-            <a:srgbClr val="111A2C"/>
-          </a:solidFill>
-          <a:ln w="15240">
-            <a:solidFill>
-              <a:srgbClr val="FF5C6C"/>
-            </a:solidFill>
-          </a:ln>
-          <a:effectLst/>
-        </p:spPr>
-        <p:style>
-          <a:lnRef idx="1">
-            <a:schemeClr val="accent1"/>
-          </a:lnRef>
-          <a:fillRef idx="3">
-            <a:schemeClr val="accent1"/>
-          </a:fillRef>
-          <a:effectRef idx="2">
-            <a:schemeClr val="accent1"/>
-          </a:effectRef>
-          <a:fontRef idx="minor">
-            <a:schemeClr val="lt1"/>
-          </a:fontRef>
-        </p:style>
-        <p:txBody>
-          <a:bodyPr rtlCol="0" anchor="ctr"/>
-          <a:lstStyle/>
-          <a:p>
-            <a:pPr algn="ctr"/>
-          </a:p>
-        </p:txBody>
-      </p:sp>
-      <p:sp>
-        <p:nvSpPr>
-          <p:cNvPr id="17" name="TextBox 16"/>
-          <p:cNvSpPr txBox="1"/>
-          <p:nvPr/>
-        </p:nvSpPr>
-        <p:spPr>
-          <a:xfrm>
-            <a:off x="8065007" y="4654296"/>
-            <a:ext cx="3376879" cy="1417319"/>
-          </a:xfrm>
-          <a:prstGeom prst="rect">
-            <a:avLst/>
-          </a:prstGeom>
-          <a:noFill/>
-        </p:spPr>
-        <p:txBody>
-          <a:bodyPr wrap="square" lIns="0" rIns="0" tIns="0" bIns="0" anchor="t">
-            <a:spAutoFit/>
-          </a:bodyPr>
-          <a:lstStyle/>
-          <a:p>
-            <a:pPr algn="l">
-              <a:lnSpc>
-                <a:spcPct val="112000"/>
-              </a:lnSpc>
-              <a:spcAft>
-                <a:spcPts val="500"/>
-              </a:spcAft>
-            </a:pPr>
-            <a:r>
-              <a:rPr sz="1050" b="1">
-                <a:solidFill>
-                  <a:srgbClr val="FF5C6C"/>
-                </a:solidFill>
-                <a:latin typeface="Consolas"/>
-              </a:rPr>
-              <a:t>THE OPERATIONAL PAYOFF</a:t>
-            </a:r>
-          </a:p>
-          <a:p>
-            <a:pPr algn="l">
-              <a:lnSpc>
-                <a:spcPct val="118000"/>
-              </a:lnSpc>
-              <a:spcAft>
-                <a:spcPts val="0"/>
-              </a:spcAft>
-            </a:pPr>
-            <a:r>
-              <a:rPr sz="1060" b="0">
-                <a:solidFill>
-                  <a:srgbClr val="EAF0F7"/>
-                </a:solidFill>
-                <a:latin typeface="Segoe UI"/>
-              </a:rPr>
-              <a:t>Instead of calling 7,043 customers, the team starts with 1,135 — 16.1% of the base, where 73% will actually leave — carrying $92,539 of recurring monthly charges.</a:t>
-            </a:r>
-          </a:p>
-        </p:txBody>
-      </p:sp>
-      <p:sp>
-        <p:nvSpPr>
-          <p:cNvPr id="18" name="Rectangle 17"/>
-          <p:cNvSpPr/>
-          <p:nvPr/>
-        </p:nvSpPr>
-        <p:spPr>
-          <a:xfrm>
-            <a:off x="566928" y="6309360"/>
-            <a:ext cx="743145" cy="43891"/>
-          </a:xfrm>
-          <a:prstGeom prst="rect">
-            <a:avLst/>
-          </a:prstGeom>
-          <a:solidFill>
-            <a:srgbClr val="223049"/>
-          </a:solidFill>
-          <a:ln>
-            <a:noFill/>
-          </a:ln>
-          <a:effectLst/>
-        </p:spPr>
-        <p:style>
-          <a:lnRef idx="1">
-            <a:schemeClr val="accent1"/>
-          </a:lnRef>
-          <a:fillRef idx="3">
-            <a:schemeClr val="accent1"/>
-          </a:fillRef>
-          <a:effectRef idx="2">
-            <a:schemeClr val="accent1"/>
-          </a:effectRef>
-          <a:fontRef idx="minor">
-            <a:schemeClr val="lt1"/>
-          </a:fontRef>
-        </p:style>
-        <p:txBody>
-          <a:bodyPr rtlCol="0" anchor="ctr"/>
-          <a:lstStyle/>
-          <a:p>
-            <a:pPr algn="ctr"/>
-          </a:p>
-        </p:txBody>
-      </p:sp>
-      <p:sp>
-        <p:nvSpPr>
-          <p:cNvPr id="19" name="Rectangle 18"/>
-          <p:cNvSpPr/>
-          <p:nvPr/>
-        </p:nvSpPr>
-        <p:spPr>
-          <a:xfrm>
-            <a:off x="1360365" y="6309360"/>
-            <a:ext cx="743145" cy="43891"/>
-          </a:xfrm>
-          <a:prstGeom prst="rect">
-            <a:avLst/>
-          </a:prstGeom>
-          <a:solidFill>
-            <a:srgbClr val="223049"/>
-          </a:solidFill>
-          <a:ln>
-            <a:noFill/>
-          </a:ln>
-          <a:effectLst/>
-        </p:spPr>
-        <p:style>
-          <a:lnRef idx="1">
-            <a:schemeClr val="accent1"/>
-          </a:lnRef>
-          <a:fillRef idx="3">
-            <a:schemeClr val="accent1"/>
-          </a:fillRef>
-          <a:effectRef idx="2">
-            <a:schemeClr val="accent1"/>
-          </a:effectRef>
-          <a:fontRef idx="minor">
-            <a:schemeClr val="lt1"/>
-          </a:fontRef>
-        </p:style>
-        <p:txBody>
-          <a:bodyPr rtlCol="0" anchor="ctr"/>
-          <a:lstStyle/>
-          <a:p>
-            <a:pPr algn="ctr"/>
-          </a:p>
-        </p:txBody>
-      </p:sp>
-      <p:sp>
-        <p:nvSpPr>
-          <p:cNvPr id="20" name="Rectangle 19"/>
-          <p:cNvSpPr/>
-          <p:nvPr/>
-        </p:nvSpPr>
-        <p:spPr>
-          <a:xfrm>
-            <a:off x="2153803" y="6309360"/>
-            <a:ext cx="743145" cy="43891"/>
-          </a:xfrm>
-          <a:prstGeom prst="rect">
-            <a:avLst/>
-          </a:prstGeom>
-          <a:solidFill>
-            <a:srgbClr val="223049"/>
-          </a:solidFill>
-          <a:ln>
-            <a:noFill/>
-          </a:ln>
-          <a:effectLst/>
-        </p:spPr>
-        <p:style>
-          <a:lnRef idx="1">
-            <a:schemeClr val="accent1"/>
-          </a:lnRef>
-          <a:fillRef idx="3">
-            <a:schemeClr val="accent1"/>
-          </a:fillRef>
-          <a:effectRef idx="2">
-            <a:schemeClr val="accent1"/>
-          </a:effectRef>
-          <a:fontRef idx="minor">
-            <a:schemeClr val="lt1"/>
-          </a:fontRef>
-        </p:style>
-        <p:txBody>
-          <a:bodyPr rtlCol="0" anchor="ctr"/>
-          <a:lstStyle/>
-          <a:p>
-            <a:pPr algn="ctr"/>
-          </a:p>
-        </p:txBody>
-      </p:sp>
-      <p:sp>
-        <p:nvSpPr>
-          <p:cNvPr id="21" name="Rectangle 20"/>
-          <p:cNvSpPr/>
-          <p:nvPr/>
-        </p:nvSpPr>
-        <p:spPr>
-          <a:xfrm>
-            <a:off x="2947241" y="6309360"/>
-            <a:ext cx="743145" cy="43891"/>
-          </a:xfrm>
-          <a:prstGeom prst="rect">
-            <a:avLst/>
-          </a:prstGeom>
-          <a:solidFill>
-            <a:srgbClr val="223049"/>
-          </a:solidFill>
-          <a:ln>
-            <a:noFill/>
-          </a:ln>
-          <a:effectLst/>
-        </p:spPr>
-        <p:style>
-          <a:lnRef idx="1">
-            <a:schemeClr val="accent1"/>
-          </a:lnRef>
-          <a:fillRef idx="3">
-            <a:schemeClr val="accent1"/>
-          </a:fillRef>
-          <a:effectRef idx="2">
-            <a:schemeClr val="accent1"/>
-          </a:effectRef>
-          <a:fontRef idx="minor">
-            <a:schemeClr val="lt1"/>
-          </a:fontRef>
-        </p:style>
-        <p:txBody>
-          <a:bodyPr rtlCol="0" anchor="ctr"/>
-          <a:lstStyle/>
-          <a:p>
-            <a:pPr algn="ctr"/>
-          </a:p>
-        </p:txBody>
-      </p:sp>
-      <p:sp>
-        <p:nvSpPr>
-          <p:cNvPr id="22" name="Rectangle 21"/>
-          <p:cNvSpPr/>
-          <p:nvPr/>
-        </p:nvSpPr>
-        <p:spPr>
-          <a:xfrm>
-            <a:off x="3740679" y="6309360"/>
-            <a:ext cx="743145" cy="43891"/>
-          </a:xfrm>
-          <a:prstGeom prst="rect">
-            <a:avLst/>
-          </a:prstGeom>
-          <a:solidFill>
-            <a:srgbClr val="223049"/>
-          </a:solidFill>
-          <a:ln>
-            <a:noFill/>
-          </a:ln>
-          <a:effectLst/>
-        </p:spPr>
-        <p:style>
-          <a:lnRef idx="1">
-            <a:schemeClr val="accent1"/>
-          </a:lnRef>
-          <a:fillRef idx="3">
-            <a:schemeClr val="accent1"/>
-          </a:fillRef>
-          <a:effectRef idx="2">
-            <a:schemeClr val="accent1"/>
-          </a:effectRef>
-          <a:fontRef idx="minor">
-            <a:schemeClr val="lt1"/>
-          </a:fontRef>
-        </p:style>
-        <p:txBody>
-          <a:bodyPr rtlCol="0" anchor="ctr"/>
-          <a:lstStyle/>
-          <a:p>
-            <a:pPr algn="ctr"/>
-          </a:p>
-        </p:txBody>
-      </p:sp>
-      <p:sp>
-        <p:nvSpPr>
-          <p:cNvPr id="23" name="Rectangle 22"/>
-          <p:cNvSpPr/>
-          <p:nvPr/>
-        </p:nvSpPr>
-        <p:spPr>
-          <a:xfrm>
-            <a:off x="4534117" y="6309360"/>
-            <a:ext cx="743145" cy="43891"/>
-          </a:xfrm>
-          <a:prstGeom prst="rect">
-            <a:avLst/>
-          </a:prstGeom>
-          <a:solidFill>
-            <a:srgbClr val="223049"/>
-          </a:solidFill>
-          <a:ln>
-            <a:noFill/>
-          </a:ln>
-          <a:effectLst/>
-        </p:spPr>
-        <p:style>
-          <a:lnRef idx="1">
-            <a:schemeClr val="accent1"/>
-          </a:lnRef>
-          <a:fillRef idx="3">
-            <a:schemeClr val="accent1"/>
-          </a:fillRef>
-          <a:effectRef idx="2">
-            <a:schemeClr val="accent1"/>
-          </a:effectRef>
-          <a:fontRef idx="minor">
-            <a:schemeClr val="lt1"/>
-          </a:fontRef>
-        </p:style>
-        <p:txBody>
-          <a:bodyPr rtlCol="0" anchor="ctr"/>
-          <a:lstStyle/>
-          <a:p>
-            <a:pPr algn="ctr"/>
-          </a:p>
-        </p:txBody>
-      </p:sp>
-      <p:sp>
-        <p:nvSpPr>
-          <p:cNvPr id="24" name="Rectangle 23"/>
-          <p:cNvSpPr/>
-          <p:nvPr/>
-        </p:nvSpPr>
-        <p:spPr>
-          <a:xfrm>
-            <a:off x="5327555" y="6309360"/>
-            <a:ext cx="743145" cy="43891"/>
-          </a:xfrm>
-          <a:prstGeom prst="rect">
-            <a:avLst/>
-          </a:prstGeom>
-          <a:solidFill>
-            <a:srgbClr val="223049"/>
-          </a:solidFill>
-          <a:ln>
-            <a:noFill/>
-          </a:ln>
-          <a:effectLst/>
-        </p:spPr>
-        <p:style>
-          <a:lnRef idx="1">
-            <a:schemeClr val="accent1"/>
-          </a:lnRef>
-          <a:fillRef idx="3">
-            <a:schemeClr val="accent1"/>
-          </a:fillRef>
-          <a:effectRef idx="2">
-            <a:schemeClr val="accent1"/>
-          </a:effectRef>
-          <a:fontRef idx="minor">
-            <a:schemeClr val="lt1"/>
-          </a:fontRef>
-        </p:style>
-        <p:txBody>
-          <a:bodyPr rtlCol="0" anchor="ctr"/>
-          <a:lstStyle/>
-          <a:p>
-            <a:pPr algn="ctr"/>
-          </a:p>
-        </p:txBody>
-      </p:sp>
-      <p:sp>
-        <p:nvSpPr>
-          <p:cNvPr id="25" name="Rectangle 24"/>
-          <p:cNvSpPr/>
-          <p:nvPr/>
-        </p:nvSpPr>
-        <p:spPr>
-          <a:xfrm>
-            <a:off x="6120993" y="6309360"/>
-            <a:ext cx="743145" cy="43891"/>
-          </a:xfrm>
-          <a:prstGeom prst="rect">
-            <a:avLst/>
-          </a:prstGeom>
-          <a:solidFill>
-            <a:srgbClr val="223049"/>
-          </a:solidFill>
-          <a:ln>
-            <a:noFill/>
-          </a:ln>
-          <a:effectLst/>
-        </p:spPr>
-        <p:style>
-          <a:lnRef idx="1">
-            <a:schemeClr val="accent1"/>
-          </a:lnRef>
-          <a:fillRef idx="3">
-            <a:schemeClr val="accent1"/>
-          </a:fillRef>
-          <a:effectRef idx="2">
-            <a:schemeClr val="accent1"/>
-          </a:effectRef>
-          <a:fontRef idx="minor">
-            <a:schemeClr val="lt1"/>
-          </a:fontRef>
-        </p:style>
-        <p:txBody>
-          <a:bodyPr rtlCol="0" anchor="ctr"/>
-          <a:lstStyle/>
-          <a:p>
-            <a:pPr algn="ctr"/>
-          </a:p>
-        </p:txBody>
-      </p:sp>
-      <p:sp>
-        <p:nvSpPr>
-          <p:cNvPr id="26" name="Rectangle 25"/>
-          <p:cNvSpPr/>
-          <p:nvPr/>
-        </p:nvSpPr>
-        <p:spPr>
-          <a:xfrm>
-            <a:off x="6914431" y="6309360"/>
-            <a:ext cx="743145" cy="43891"/>
-          </a:xfrm>
-          <a:prstGeom prst="rect">
-            <a:avLst/>
-          </a:prstGeom>
-          <a:solidFill>
-            <a:srgbClr val="223049"/>
-          </a:solidFill>
-          <a:ln>
-            <a:noFill/>
-          </a:ln>
-          <a:effectLst/>
-        </p:spPr>
-        <p:style>
-          <a:lnRef idx="1">
-            <a:schemeClr val="accent1"/>
-          </a:lnRef>
-          <a:fillRef idx="3">
-            <a:schemeClr val="accent1"/>
-          </a:fillRef>
-          <a:effectRef idx="2">
-            <a:schemeClr val="accent1"/>
-          </a:effectRef>
-          <a:fontRef idx="minor">
-            <a:schemeClr val="lt1"/>
-          </a:fontRef>
-        </p:style>
-        <p:txBody>
-          <a:bodyPr rtlCol="0" anchor="ctr"/>
-          <a:lstStyle/>
-          <a:p>
-            <a:pPr algn="ctr"/>
-          </a:p>
-        </p:txBody>
-      </p:sp>
-      <p:sp>
-        <p:nvSpPr>
-          <p:cNvPr id="27" name="Rectangle 26"/>
-          <p:cNvSpPr/>
-          <p:nvPr/>
-        </p:nvSpPr>
-        <p:spPr>
-          <a:xfrm>
-            <a:off x="7707869" y="6296558"/>
-            <a:ext cx="743145" cy="68580"/>
-          </a:xfrm>
-          <a:prstGeom prst="rect">
-            <a:avLst/>
-          </a:prstGeom>
-          <a:solidFill>
-            <a:srgbClr val="2FD8B4"/>
-          </a:solidFill>
-          <a:ln>
-            <a:noFill/>
-          </a:ln>
-          <a:effectLst/>
-        </p:spPr>
-        <p:style>
-          <a:lnRef idx="1">
-            <a:schemeClr val="accent1"/>
-          </a:lnRef>
-          <a:fillRef idx="3">
-            <a:schemeClr val="accent1"/>
-          </a:fillRef>
-          <a:effectRef idx="2">
-            <a:schemeClr val="accent1"/>
-          </a:effectRef>
-          <a:fontRef idx="minor">
-            <a:schemeClr val="lt1"/>
-          </a:fontRef>
-        </p:style>
-        <p:txBody>
-          <a:bodyPr rtlCol="0" anchor="ctr"/>
-          <a:lstStyle/>
-          <a:p>
-            <a:pPr algn="ctr"/>
-          </a:p>
-        </p:txBody>
-      </p:sp>
-      <p:sp>
-        <p:nvSpPr>
-          <p:cNvPr id="28" name="Rectangle 27"/>
-          <p:cNvSpPr/>
-          <p:nvPr/>
-        </p:nvSpPr>
-        <p:spPr>
-          <a:xfrm>
-            <a:off x="8501307" y="6309360"/>
-            <a:ext cx="743145" cy="43891"/>
-          </a:xfrm>
-          <a:prstGeom prst="rect">
-            <a:avLst/>
-          </a:prstGeom>
-          <a:solidFill>
-            <a:srgbClr val="223049"/>
-          </a:solidFill>
-          <a:ln>
-            <a:noFill/>
-          </a:ln>
-          <a:effectLst/>
-        </p:spPr>
-        <p:style>
-          <a:lnRef idx="1">
-            <a:schemeClr val="accent1"/>
-          </a:lnRef>
-          <a:fillRef idx="3">
-            <a:schemeClr val="accent1"/>
-          </a:fillRef>
-          <a:effectRef idx="2">
-            <a:schemeClr val="accent1"/>
-          </a:effectRef>
-          <a:fontRef idx="minor">
-            <a:schemeClr val="lt1"/>
-          </a:fontRef>
-        </p:style>
-        <p:txBody>
-          <a:bodyPr rtlCol="0" anchor="ctr"/>
-          <a:lstStyle/>
-          <a:p>
-            <a:pPr algn="ctr"/>
-          </a:p>
-        </p:txBody>
-      </p:sp>
-      <p:sp>
-        <p:nvSpPr>
-          <p:cNvPr id="29" name="Rectangle 28"/>
-          <p:cNvSpPr/>
-          <p:nvPr/>
-        </p:nvSpPr>
-        <p:spPr>
-          <a:xfrm>
-            <a:off x="9294745" y="6309360"/>
-            <a:ext cx="743145" cy="43891"/>
-          </a:xfrm>
-          <a:prstGeom prst="rect">
-            <a:avLst/>
-          </a:prstGeom>
-          <a:solidFill>
-            <a:srgbClr val="223049"/>
-          </a:solidFill>
-          <a:ln>
-            <a:noFill/>
-          </a:ln>
-          <a:effectLst/>
-        </p:spPr>
-        <p:style>
-          <a:lnRef idx="1">
-            <a:schemeClr val="accent1"/>
-          </a:lnRef>
-          <a:fillRef idx="3">
-            <a:schemeClr val="accent1"/>
-          </a:fillRef>
-          <a:effectRef idx="2">
-            <a:schemeClr val="accent1"/>
-          </a:effectRef>
-          <a:fontRef idx="minor">
-            <a:schemeClr val="lt1"/>
-          </a:fontRef>
-        </p:style>
-        <p:txBody>
-          <a:bodyPr rtlCol="0" anchor="ctr"/>
-          <a:lstStyle/>
-          <a:p>
-            <a:pPr algn="ctr"/>
-          </a:p>
-        </p:txBody>
-      </p:sp>
-      <p:sp>
-        <p:nvSpPr>
-          <p:cNvPr id="30" name="Rectangle 29"/>
-          <p:cNvSpPr/>
-          <p:nvPr/>
-        </p:nvSpPr>
-        <p:spPr>
-          <a:xfrm>
-            <a:off x="10088183" y="6309360"/>
-            <a:ext cx="743145" cy="43891"/>
-          </a:xfrm>
-          <a:prstGeom prst="rect">
-            <a:avLst/>
-          </a:prstGeom>
-          <a:solidFill>
-            <a:srgbClr val="223049"/>
-          </a:solidFill>
-          <a:ln>
-            <a:noFill/>
-          </a:ln>
-          <a:effectLst/>
-        </p:spPr>
-        <p:style>
-          <a:lnRef idx="1">
-            <a:schemeClr val="accent1"/>
-          </a:lnRef>
-          <a:fillRef idx="3">
-            <a:schemeClr val="accent1"/>
-          </a:fillRef>
-          <a:effectRef idx="2">
-            <a:schemeClr val="accent1"/>
-          </a:effectRef>
-          <a:fontRef idx="minor">
-            <a:schemeClr val="lt1"/>
-          </a:fontRef>
-        </p:style>
-        <p:txBody>
-          <a:bodyPr rtlCol="0" anchor="ctr"/>
-          <a:lstStyle/>
-          <a:p>
-            <a:pPr algn="ctr"/>
-          </a:p>
-        </p:txBody>
-      </p:sp>
-      <p:sp>
-        <p:nvSpPr>
-          <p:cNvPr id="31" name="Rectangle 30"/>
-          <p:cNvSpPr/>
-          <p:nvPr/>
-        </p:nvSpPr>
-        <p:spPr>
-          <a:xfrm>
-            <a:off x="10881621" y="6309360"/>
-            <a:ext cx="743145" cy="43891"/>
-          </a:xfrm>
-          <a:prstGeom prst="rect">
-            <a:avLst/>
-          </a:prstGeom>
-          <a:solidFill>
-            <a:srgbClr val="223049"/>
-          </a:solidFill>
-          <a:ln>
-            <a:noFill/>
-          </a:ln>
-          <a:effectLst/>
-        </p:spPr>
-        <p:style>
-          <a:lnRef idx="1">
-            <a:schemeClr val="accent1"/>
-          </a:lnRef>
-          <a:fillRef idx="3">
-            <a:schemeClr val="accent1"/>
-          </a:fillRef>
-          <a:effectRef idx="2">
-            <a:schemeClr val="accent1"/>
-          </a:effectRef>
-          <a:fontRef idx="minor">
-            <a:schemeClr val="lt1"/>
-          </a:fontRef>
-        </p:style>
-        <p:txBody>
-          <a:bodyPr rtlCol="0" anchor="ctr"/>
-          <a:lstStyle/>
-          <a:p>
-            <a:pPr algn="ctr"/>
-          </a:p>
-        </p:txBody>
-      </p:sp>
-      <p:sp>
-        <p:nvSpPr>
-          <p:cNvPr id="32" name="Rectangle 31"/>
-          <p:cNvSpPr/>
-          <p:nvPr/>
-        </p:nvSpPr>
-        <p:spPr>
-          <a:xfrm>
-            <a:off x="566928" y="6455664"/>
-            <a:ext cx="11057839" cy="9144"/>
-          </a:xfrm>
-          <a:prstGeom prst="rect">
-            <a:avLst/>
-          </a:prstGeom>
-          <a:solidFill>
-            <a:srgbClr val="223049"/>
-          </a:solidFill>
-          <a:ln>
-            <a:noFill/>
-          </a:ln>
-          <a:effectLst/>
-        </p:spPr>
-        <p:style>
-          <a:lnRef idx="1">
-            <a:schemeClr val="accent1"/>
-          </a:lnRef>
-          <a:fillRef idx="3">
-            <a:schemeClr val="accent1"/>
-          </a:fillRef>
-          <a:effectRef idx="2">
-            <a:schemeClr val="accent1"/>
-          </a:effectRef>
-          <a:fontRef idx="minor">
-            <a:schemeClr val="lt1"/>
-          </a:fontRef>
-        </p:style>
-        <p:txBody>
-          <a:bodyPr rtlCol="0" anchor="ctr"/>
-          <a:lstStyle/>
-          <a:p>
-            <a:pPr algn="ctr"/>
-          </a:p>
-        </p:txBody>
-      </p:sp>
-      <p:sp>
-        <p:nvSpPr>
-          <p:cNvPr id="33" name="TextBox 32"/>
-          <p:cNvSpPr txBox="1"/>
-          <p:nvPr/>
-        </p:nvSpPr>
-        <p:spPr>
-          <a:xfrm>
-            <a:off x="566928" y="6510528"/>
-            <a:ext cx="9509760" cy="219456"/>
-          </a:xfrm>
-          <a:prstGeom prst="rect">
-            <a:avLst/>
-          </a:prstGeom>
-          <a:noFill/>
-        </p:spPr>
-        <p:txBody>
-          <a:bodyPr wrap="square" lIns="0" rIns="0" tIns="0" bIns="0" anchor="t">
-            <a:spAutoFit/>
-          </a:bodyPr>
-          <a:lstStyle/>
-          <a:p>
-            <a:pPr algn="l">
-              <a:lnSpc>
-                <a:spcPct val="112000"/>
-              </a:lnSpc>
-              <a:spcAft>
-                <a:spcPts val="0"/>
-              </a:spcAft>
-            </a:pPr>
-            <a:r>
-              <a:rPr sz="900" b="0">
-                <a:solidFill>
-                  <a:srgbClr val="8CA0BE"/>
-                </a:solidFill>
-                <a:latin typeface="Segoe UI"/>
-              </a:rPr>
-              <a:t>RetainIQ · Signal Ops Console   ·   PHASE 10 · RISK SEGMENTATION</a:t>
-            </a:r>
-          </a:p>
-        </p:txBody>
-      </p:sp>
-      <p:sp>
-        <p:nvSpPr>
-          <p:cNvPr id="34" name="TextBox 33"/>
-          <p:cNvSpPr txBox="1"/>
-          <p:nvPr/>
-        </p:nvSpPr>
-        <p:spPr>
-          <a:xfrm>
-            <a:off x="10527487" y="6510528"/>
-            <a:ext cx="1097280" cy="219456"/>
-          </a:xfrm>
-          <a:prstGeom prst="rect">
-            <a:avLst/>
-          </a:prstGeom>
-          <a:noFill/>
-        </p:spPr>
-        <p:txBody>
-          <a:bodyPr wrap="square" lIns="0" rIns="0" tIns="0" bIns="0" anchor="t">
-            <a:spAutoFit/>
-          </a:bodyPr>
-          <a:lstStyle/>
-          <a:p>
-            <a:pPr algn="r">
-              <a:lnSpc>
-                <a:spcPct val="112000"/>
-              </a:lnSpc>
-              <a:spcAft>
-                <a:spcPts val="0"/>
-              </a:spcAft>
-            </a:pPr>
-            <a:r>
-              <a:rPr sz="900" b="0">
-                <a:solidFill>
-                  <a:srgbClr val="8CA0BE"/>
-                </a:solidFill>
-                <a:latin typeface="Consolas"/>
-              </a:rPr>
-              <a:t>13</a:t>
-            </a:r>
-          </a:p>
-        </p:txBody>
-      </p:sp>
-    </p:spTree>
-  </p:cSld>
-  <p:clrMapOvr>
-    <a:masterClrMapping/>
-  </p:clrMapOvr>
-</p:sld>
-</file>
-
-<file path=ppt/slides/slide14.xml><?xml version="1.0" encoding="utf-8"?>
-<p:sld xmlns:a="http://schemas.openxmlformats.org/drawingml/2006/main" xmlns:p="http://schemas.openxmlformats.org/presentationml/2006/main" xmlns:r="http://schemas.openxmlformats.org/officeDocument/2006/relationships">
-  <p:cSld>
-    <p:spTree>
-      <p:nvGrpSpPr>
-        <p:cNvPr id="1" name=""/>
-        <p:cNvGrpSpPr/>
-        <p:nvPr/>
-      </p:nvGrpSpPr>
-      <p:grpSpPr/>
-      <p:sp>
-        <p:nvSpPr>
-          <p:cNvPr id="2" name="Rectangle 1"/>
-          <p:cNvSpPr/>
-          <p:nvPr/>
-        </p:nvSpPr>
-        <p:spPr>
-          <a:xfrm>
-            <a:off x="0" y="0"/>
-            <a:ext cx="12191695" cy="6858000"/>
-          </a:xfrm>
-          <a:prstGeom prst="rect">
-            <a:avLst/>
-          </a:prstGeom>
-          <a:solidFill>
-            <a:srgbClr val="0A0F1C"/>
-          </a:solidFill>
-          <a:ln>
-            <a:noFill/>
-          </a:ln>
-          <a:effectLst/>
-        </p:spPr>
-        <p:style>
-          <a:lnRef idx="1">
-            <a:schemeClr val="accent1"/>
-          </a:lnRef>
-          <a:fillRef idx="3">
-            <a:schemeClr val="accent1"/>
-          </a:fillRef>
-          <a:effectRef idx="2">
-            <a:schemeClr val="accent1"/>
-          </a:effectRef>
-          <a:fontRef idx="minor">
-            <a:schemeClr val="lt1"/>
-          </a:fontRef>
-        </p:style>
-        <p:txBody>
-          <a:bodyPr rtlCol="0" anchor="ctr"/>
-          <a:lstStyle/>
-          <a:p>
-            <a:pPr algn="ctr"/>
-          </a:p>
-        </p:txBody>
-      </p:sp>
-      <p:sp>
-        <p:nvSpPr>
-          <p:cNvPr id="3" name="TextBox 2"/>
-          <p:cNvSpPr txBox="1"/>
-          <p:nvPr/>
-        </p:nvSpPr>
-        <p:spPr>
-          <a:xfrm>
-            <a:off x="566928" y="365760"/>
-            <a:ext cx="8229600" cy="237744"/>
-          </a:xfrm>
-          <a:prstGeom prst="rect">
-            <a:avLst/>
-          </a:prstGeom>
-          <a:noFill/>
-        </p:spPr>
-        <p:txBody>
-          <a:bodyPr wrap="square" lIns="0" rIns="0" tIns="0" bIns="0" anchor="t">
-            <a:spAutoFit/>
-          </a:bodyPr>
-          <a:lstStyle/>
-          <a:p>
-            <a:pPr algn="l">
-              <a:lnSpc>
-                <a:spcPct val="112000"/>
-              </a:lnSpc>
-              <a:spcAft>
-                <a:spcPts val="0"/>
-              </a:spcAft>
-            </a:pPr>
-            <a:r>
-              <a:rPr sz="1000" b="1">
-                <a:solidFill>
-                  <a:srgbClr val="2FD8B4"/>
-                </a:solidFill>
-                <a:latin typeface="Consolas"/>
-              </a:rPr>
-              <a:t>PHASE 11  ·  RETENTION INTELLIGENCE</a:t>
-            </a:r>
-          </a:p>
-        </p:txBody>
-      </p:sp>
-      <p:sp>
-        <p:nvSpPr>
-          <p:cNvPr id="4" name="TextBox 3"/>
-          <p:cNvSpPr txBox="1"/>
-          <p:nvPr/>
-        </p:nvSpPr>
-        <p:spPr>
-          <a:xfrm>
-            <a:off x="566928" y="576072"/>
-            <a:ext cx="11057839" cy="475488"/>
-          </a:xfrm>
-          <a:prstGeom prst="rect">
-            <a:avLst/>
-          </a:prstGeom>
-          <a:noFill/>
-        </p:spPr>
-        <p:txBody>
-          <a:bodyPr wrap="square" lIns="0" rIns="0" tIns="0" bIns="0" anchor="t">
-            <a:spAutoFit/>
-          </a:bodyPr>
-          <a:lstStyle/>
-          <a:p>
-            <a:pPr algn="l">
-              <a:lnSpc>
-                <a:spcPct val="112000"/>
-              </a:lnSpc>
-              <a:spcAft>
-                <a:spcPts val="0"/>
-              </a:spcAft>
-            </a:pPr>
-            <a:r>
-              <a:rPr sz="2600" b="1">
-                <a:solidFill>
-                  <a:srgbClr val="EAF0F7"/>
-                </a:solidFill>
-                <a:latin typeface="Segoe UI"/>
-              </a:rPr>
-              <a:t>From risk to action — and to money</a:t>
-            </a:r>
-          </a:p>
-        </p:txBody>
-      </p:sp>
-      <p:sp>
-        <p:nvSpPr>
-          <p:cNvPr id="5" name="TextBox 4"/>
-          <p:cNvSpPr txBox="1"/>
-          <p:nvPr/>
-        </p:nvSpPr>
-        <p:spPr>
-          <a:xfrm>
-            <a:off x="566928" y="1060704"/>
-            <a:ext cx="11057839" cy="274320"/>
-          </a:xfrm>
-          <a:prstGeom prst="rect">
-            <a:avLst/>
-          </a:prstGeom>
-          <a:noFill/>
-        </p:spPr>
-        <p:txBody>
-          <a:bodyPr wrap="square" lIns="0" rIns="0" tIns="0" bIns="0" anchor="t">
-            <a:spAutoFit/>
-          </a:bodyPr>
-          <a:lstStyle/>
-          <a:p>
-            <a:pPr algn="l">
-              <a:lnSpc>
-                <a:spcPct val="112000"/>
-              </a:lnSpc>
-              <a:spcAft>
-                <a:spcPts val="0"/>
-              </a:spcAft>
-            </a:pPr>
-            <a:r>
-              <a:rPr sz="1250" b="0">
-                <a:solidFill>
-                  <a:srgbClr val="8CA0BE"/>
-                </a:solidFill>
-                <a:latin typeface="Segoe UI"/>
-              </a:rPr>
-              <a:t>2,608 at-risk customers each received a specific recommendation</a:t>
-            </a:r>
-          </a:p>
-        </p:txBody>
-      </p:sp>
-      <p:sp>
-        <p:nvSpPr>
-          <p:cNvPr id="6" name="Rectangle 5"/>
-          <p:cNvSpPr/>
-          <p:nvPr/>
-        </p:nvSpPr>
-        <p:spPr>
-          <a:xfrm>
-            <a:off x="566928" y="1371600"/>
-            <a:ext cx="11057839" cy="12801"/>
-          </a:xfrm>
-          <a:prstGeom prst="rect">
-            <a:avLst/>
-          </a:prstGeom>
-          <a:solidFill>
-            <a:srgbClr val="223049"/>
-          </a:solidFill>
-          <a:ln>
-            <a:noFill/>
-          </a:ln>
-          <a:effectLst/>
-        </p:spPr>
-        <p:style>
-          <a:lnRef idx="1">
-            <a:schemeClr val="accent1"/>
-          </a:lnRef>
-          <a:fillRef idx="3">
-            <a:schemeClr val="accent1"/>
-          </a:fillRef>
-          <a:effectRef idx="2">
-            <a:schemeClr val="accent1"/>
-          </a:effectRef>
-          <a:fontRef idx="minor">
-            <a:schemeClr val="lt1"/>
-          </a:fontRef>
-        </p:style>
-        <p:txBody>
-          <a:bodyPr rtlCol="0" anchor="ctr"/>
-          <a:lstStyle/>
-          <a:p>
-            <a:pPr algn="ctr"/>
-          </a:p>
-        </p:txBody>
-      </p:sp>
-      <p:pic>
-        <p:nvPicPr>
-          <p:cNvPr id="7" name="Picture 6" descr="chart_revenue.png"/>
-          <p:cNvPicPr>
-            <a:picLocks noChangeAspect="1"/>
-          </p:cNvPicPr>
-          <p:nvPr/>
-        </p:nvPicPr>
-        <p:blipFill>
-          <a:blip r:embed="rId2"/>
-          <a:stretch>
-            <a:fillRect/>
-          </a:stretch>
-        </p:blipFill>
-        <p:spPr>
-          <a:xfrm>
-            <a:off x="566928" y="1517904"/>
-            <a:ext cx="6492239" cy="2818792"/>
-          </a:xfrm>
-          <a:prstGeom prst="rect">
-            <a:avLst/>
-          </a:prstGeom>
-        </p:spPr>
-      </p:pic>
-      <p:sp>
-        <p:nvSpPr>
-          <p:cNvPr id="8" name="Rounded Rectangle 7"/>
-          <p:cNvSpPr/>
-          <p:nvPr/>
-        </p:nvSpPr>
-        <p:spPr>
-          <a:xfrm>
-            <a:off x="7269480" y="1517904"/>
-            <a:ext cx="4352544" cy="4700016"/>
-          </a:xfrm>
-          <a:prstGeom prst="roundRect">
-            <a:avLst>
-              <a:gd name="adj" fmla="val 8000"/>
-            </a:avLst>
-          </a:prstGeom>
-          <a:solidFill>
-            <a:srgbClr val="111A2C"/>
-          </a:solidFill>
-          <a:ln w="12700">
-            <a:solidFill>
-              <a:srgbClr val="223049"/>
-            </a:solidFill>
-          </a:ln>
-          <a:effectLst/>
-        </p:spPr>
-        <p:style>
-          <a:lnRef idx="1">
-            <a:schemeClr val="accent1"/>
-          </a:lnRef>
-          <a:fillRef idx="3">
-            <a:schemeClr val="accent1"/>
-          </a:fillRef>
-          <a:effectRef idx="2">
-            <a:schemeClr val="accent1"/>
-          </a:effectRef>
-          <a:fontRef idx="minor">
-            <a:schemeClr val="lt1"/>
-          </a:fontRef>
-        </p:style>
-        <p:txBody>
-          <a:bodyPr rtlCol="0" anchor="ctr"/>
-          <a:lstStyle/>
-          <a:p>
-            <a:pPr algn="ctr"/>
-          </a:p>
-        </p:txBody>
-      </p:sp>
-      <p:sp>
-        <p:nvSpPr>
-          <p:cNvPr id="9" name="TextBox 8"/>
-          <p:cNvSpPr txBox="1"/>
-          <p:nvPr/>
-        </p:nvSpPr>
-        <p:spPr>
-          <a:xfrm>
-            <a:off x="7452360" y="1682495"/>
-            <a:ext cx="4023360" cy="4370831"/>
-          </a:xfrm>
-          <a:prstGeom prst="rect">
-            <a:avLst/>
-          </a:prstGeom>
-          <a:noFill/>
-        </p:spPr>
-        <p:txBody>
-          <a:bodyPr wrap="square" lIns="0" rIns="0" tIns="0" bIns="0" anchor="t">
-            <a:spAutoFit/>
-          </a:bodyPr>
-          <a:lstStyle/>
-          <a:p>
-            <a:pPr algn="l">
-              <a:lnSpc>
-                <a:spcPct val="112000"/>
-              </a:lnSpc>
-              <a:spcAft>
-                <a:spcPts val="700"/>
-              </a:spcAft>
-            </a:pPr>
-            <a:r>
-              <a:rPr sz="1050" b="1">
-                <a:solidFill>
-                  <a:srgbClr val="2FD8B4"/>
-                </a:solidFill>
-                <a:latin typeface="Consolas"/>
-              </a:rPr>
-              <a:t>RECOMMENDATIONS ISSUED (FULL PORTFOLIO)</a:t>
-            </a:r>
-          </a:p>
-          <a:p>
-            <a:pPr algn="l">
-              <a:lnSpc>
-                <a:spcPct val="112000"/>
-              </a:lnSpc>
-              <a:spcAft>
-                <a:spcPts val="300"/>
-              </a:spcAft>
-            </a:pPr>
-            <a:r>
-              <a:rPr sz="1040" b="0">
-                <a:solidFill>
-                  <a:srgbClr val="EAF0F7"/>
-                </a:solidFill>
-                <a:latin typeface="Consolas"/>
-              </a:rPr>
-              <a:t>Promote Long-Term Contract            792</a:t>
-            </a:r>
-          </a:p>
-          <a:p>
-            <a:pPr algn="l">
-              <a:lnSpc>
-                <a:spcPct val="112000"/>
-              </a:lnSpc>
-              <a:spcAft>
-                <a:spcPts val="300"/>
-              </a:spcAft>
-            </a:pPr>
-            <a:r>
-              <a:rPr sz="1040" b="0">
-                <a:solidFill>
-                  <a:srgbClr val="EAF0F7"/>
-                </a:solidFill>
-                <a:latin typeface="Consolas"/>
-              </a:rPr>
-              <a:t>5% Discount Offer                            663</a:t>
-            </a:r>
-          </a:p>
-          <a:p>
-            <a:pPr algn="l">
-              <a:lnSpc>
-                <a:spcPct val="112000"/>
-              </a:lnSpc>
-              <a:spcAft>
-                <a:spcPts val="300"/>
-              </a:spcAft>
-            </a:pPr>
-            <a:r>
-              <a:rPr sz="1040" b="0">
-                <a:solidFill>
-                  <a:srgbClr val="EAF0F7"/>
-                </a:solidFill>
-                <a:latin typeface="Consolas"/>
-              </a:rPr>
-              <a:t>Offer 15% Discount                          658</a:t>
-            </a:r>
-          </a:p>
-          <a:p>
-            <a:pPr algn="l">
-              <a:lnSpc>
-                <a:spcPct val="112000"/>
-              </a:lnSpc>
-              <a:spcAft>
-                <a:spcPts val="300"/>
-              </a:spcAft>
-            </a:pPr>
-            <a:r>
-              <a:rPr sz="1040" b="0">
-                <a:solidFill>
-                  <a:srgbClr val="EAF0F7"/>
-                </a:solidFill>
-                <a:latin typeface="Consolas"/>
-              </a:rPr>
-              <a:t>Welcome Retention Package          430</a:t>
-            </a:r>
-          </a:p>
-          <a:p>
-            <a:pPr algn="l">
-              <a:lnSpc>
-                <a:spcPct val="112000"/>
-              </a:lnSpc>
-              <a:spcAft>
-                <a:spcPts val="300"/>
-              </a:spcAft>
-            </a:pPr>
-            <a:r>
-              <a:rPr sz="1040" b="0">
-                <a:solidFill>
-                  <a:srgbClr val="EAF0F7"/>
-                </a:solidFill>
-                <a:latin typeface="Consolas"/>
-              </a:rPr>
-              <a:t>Free Online Security                       45</a:t>
-            </a:r>
-          </a:p>
-          <a:p>
-            <a:pPr algn="l">
-              <a:lnSpc>
-                <a:spcPct val="112000"/>
-              </a:lnSpc>
-              <a:spcAft>
-                <a:spcPts val="300"/>
-              </a:spcAft>
-            </a:pPr>
-            <a:r>
-              <a:rPr sz="1040" b="0">
-                <a:solidFill>
-                  <a:srgbClr val="EAF0F7"/>
-                </a:solidFill>
-                <a:latin typeface="Consolas"/>
-              </a:rPr>
-              <a:t>Switch to Autopay / Check-in          18</a:t>
-            </a:r>
-          </a:p>
-          <a:p>
-            <a:pPr algn="l">
-              <a:lnSpc>
-                <a:spcPct val="112000"/>
-              </a:lnSpc>
-              <a:spcAft>
-                <a:spcPts val="800"/>
-              </a:spcAft>
-            </a:pPr>
-            <a:r>
-              <a:rPr sz="1040" b="0">
-                <a:solidFill>
-                  <a:srgbClr val="EAF0F7"/>
-                </a:solidFill>
-                <a:latin typeface="Consolas"/>
-              </a:rPr>
-              <a:t>Free Premium Support                      2</a:t>
-            </a:r>
-          </a:p>
-          <a:p>
-            <a:pPr algn="l">
-              <a:lnSpc>
-                <a:spcPct val="116000"/>
-              </a:lnSpc>
-              <a:spcAft>
-                <a:spcPts val="0"/>
-              </a:spcAft>
-            </a:pPr>
-            <a:r>
-              <a:rPr sz="1019" b="0">
-                <a:solidFill>
-                  <a:srgbClr val="8CA0BE"/>
-                </a:solidFill>
-                <a:latin typeface="Segoe UI"/>
-              </a:rPr>
-              <a:t>Driven by each customer's own risk factors — a month-to-month customer with no security gets a different offer than a loyal high-value one.</a:t>
-            </a:r>
-          </a:p>
-        </p:txBody>
-      </p:sp>
-      <p:sp>
-        <p:nvSpPr>
-          <p:cNvPr id="10" name="Rounded Rectangle 9"/>
-          <p:cNvSpPr/>
-          <p:nvPr/>
-        </p:nvSpPr>
-        <p:spPr>
-          <a:xfrm>
-            <a:off x="566928" y="4718304"/>
-            <a:ext cx="6492240" cy="1499615"/>
-          </a:xfrm>
-          <a:prstGeom prst="roundRect">
-            <a:avLst>
-              <a:gd name="adj" fmla="val 8000"/>
-            </a:avLst>
-          </a:prstGeom>
-          <a:solidFill>
-            <a:srgbClr val="162136"/>
-          </a:solidFill>
-          <a:ln w="15240">
-            <a:solidFill>
-              <a:srgbClr val="F5A623"/>
-            </a:solidFill>
-          </a:ln>
-          <a:effectLst/>
-        </p:spPr>
-        <p:style>
-          <a:lnRef idx="1">
-            <a:schemeClr val="accent1"/>
-          </a:lnRef>
-          <a:fillRef idx="3">
-            <a:schemeClr val="accent1"/>
-          </a:fillRef>
-          <a:effectRef idx="2">
-            <a:schemeClr val="accent1"/>
-          </a:effectRef>
-          <a:fontRef idx="minor">
-            <a:schemeClr val="lt1"/>
-          </a:fontRef>
-        </p:style>
-        <p:txBody>
-          <a:bodyPr rtlCol="0" anchor="ctr"/>
-          <a:lstStyle/>
-          <a:p>
-            <a:pPr algn="ctr"/>
-          </a:p>
-        </p:txBody>
-      </p:sp>
-      <p:sp>
-        <p:nvSpPr>
-          <p:cNvPr id="11" name="TextBox 10"/>
-          <p:cNvSpPr txBox="1"/>
-          <p:nvPr/>
-        </p:nvSpPr>
-        <p:spPr>
-          <a:xfrm>
-            <a:off x="749808" y="4846320"/>
-            <a:ext cx="6126479" cy="1261871"/>
-          </a:xfrm>
-          <a:prstGeom prst="rect">
-            <a:avLst/>
-          </a:prstGeom>
-          <a:noFill/>
-        </p:spPr>
-        <p:txBody>
-          <a:bodyPr wrap="square" lIns="0" rIns="0" tIns="0" bIns="0" anchor="t">
-            <a:spAutoFit/>
-          </a:bodyPr>
-          <a:lstStyle/>
-          <a:p>
-            <a:pPr algn="l">
-              <a:lnSpc>
-                <a:spcPct val="112000"/>
-              </a:lnSpc>
-              <a:spcAft>
-                <a:spcPts val="300"/>
-              </a:spcAft>
-            </a:pPr>
-            <a:r>
-              <a:rPr sz="1150" b="1">
-                <a:solidFill>
-                  <a:srgbClr val="F5A623"/>
-                </a:solidFill>
-                <a:latin typeface="Segoe UI"/>
-              </a:rPr>
-              <a:t>SPEAK PRECISELY ABOUT THIS NUMBER</a:t>
-            </a:r>
-          </a:p>
-          <a:p>
-            <a:pPr algn="l">
-              <a:lnSpc>
-                <a:spcPct val="116000"/>
-              </a:lnSpc>
-              <a:spcAft>
-                <a:spcPts val="0"/>
-              </a:spcAft>
-            </a:pPr>
-            <a:r>
-              <a:rPr sz="1080" b="0">
-                <a:solidFill>
-                  <a:srgbClr val="EAF0F7"/>
-                </a:solidFill>
-                <a:latin typeface="Segoe UI"/>
-              </a:rPr>
-              <a:t>RetainIQ reports monthly revenue at risk — the recurring charges sitting inside flagged customers. $92,539/month in high risk, $200,302 including medium. It is exposure, not money already saved.</a:t>
-            </a:r>
-          </a:p>
-        </p:txBody>
-      </p:sp>
-      <p:sp>
-        <p:nvSpPr>
-          <p:cNvPr id="12" name="Rounded Rectangle 11"/>
-          <p:cNvSpPr/>
-          <p:nvPr/>
-        </p:nvSpPr>
-        <p:spPr>
-          <a:xfrm>
-            <a:off x="7269480" y="4718304"/>
-            <a:ext cx="4352544" cy="1499615"/>
-          </a:xfrm>
-          <a:prstGeom prst="roundRect">
-            <a:avLst>
-              <a:gd name="adj" fmla="val 8000"/>
-            </a:avLst>
-          </a:prstGeom>
-          <a:solidFill>
-            <a:srgbClr val="111A2C"/>
-          </a:solidFill>
-          <a:ln w="12700">
-            <a:solidFill>
-              <a:srgbClr val="223049"/>
-            </a:solidFill>
-          </a:ln>
-          <a:effectLst/>
-        </p:spPr>
-        <p:style>
-          <a:lnRef idx="1">
-            <a:schemeClr val="accent1"/>
-          </a:lnRef>
-          <a:fillRef idx="3">
-            <a:schemeClr val="accent1"/>
-          </a:fillRef>
-          <a:effectRef idx="2">
-            <a:schemeClr val="accent1"/>
-          </a:effectRef>
-          <a:fontRef idx="minor">
-            <a:schemeClr val="lt1"/>
-          </a:fontRef>
-        </p:style>
-        <p:txBody>
-          <a:bodyPr rtlCol="0" anchor="ctr"/>
-          <a:lstStyle/>
-          <a:p>
-            <a:pPr algn="ctr"/>
-          </a:p>
-        </p:txBody>
-      </p:sp>
-      <p:sp>
-        <p:nvSpPr>
-          <p:cNvPr id="13" name="TextBox 12"/>
-          <p:cNvSpPr txBox="1"/>
-          <p:nvPr/>
-        </p:nvSpPr>
-        <p:spPr>
-          <a:xfrm>
-            <a:off x="7452360" y="4864608"/>
-            <a:ext cx="4023360" cy="1207007"/>
-          </a:xfrm>
-          <a:prstGeom prst="rect">
-            <a:avLst/>
-          </a:prstGeom>
-          <a:noFill/>
-        </p:spPr>
-        <p:txBody>
-          <a:bodyPr wrap="square" lIns="0" rIns="0" tIns="0" bIns="0" anchor="t">
-            <a:spAutoFit/>
-          </a:bodyPr>
-          <a:lstStyle/>
-          <a:p>
-            <a:pPr algn="l">
-              <a:lnSpc>
-                <a:spcPct val="112000"/>
-              </a:lnSpc>
-              <a:spcAft>
-                <a:spcPts val="500"/>
-              </a:spcAft>
-            </a:pPr>
-            <a:r>
-              <a:rPr sz="1050" b="1">
-                <a:solidFill>
-                  <a:srgbClr val="2FD8B4"/>
-                </a:solidFill>
-                <a:latin typeface="Consolas"/>
-              </a:rPr>
-              <a:t>DECISION FRAMEWORK</a:t>
-            </a:r>
-          </a:p>
-          <a:p>
-            <a:pPr algn="l">
-              <a:lnSpc>
-                <a:spcPct val="118000"/>
-              </a:lnSpc>
-              <a:spcAft>
-                <a:spcPts val="0"/>
-              </a:spcAft>
-            </a:pPr>
-            <a:r>
-              <a:rPr sz="1040" b="0">
-                <a:solidFill>
-                  <a:srgbClr val="EAF0F7"/>
-                </a:solidFill>
-                <a:latin typeface="Segoe UI"/>
-              </a:rPr>
-              <a:t>Data → insight → prediction → explanation → action → business value. The platform deliberately does not stop at step three.</a:t>
-            </a:r>
-          </a:p>
-        </p:txBody>
-      </p:sp>
-      <p:sp>
-        <p:nvSpPr>
-          <p:cNvPr id="14" name="Rectangle 13"/>
-          <p:cNvSpPr/>
-          <p:nvPr/>
-        </p:nvSpPr>
-        <p:spPr>
-          <a:xfrm>
-            <a:off x="566928" y="6309360"/>
-            <a:ext cx="743145" cy="43891"/>
-          </a:xfrm>
-          <a:prstGeom prst="rect">
-            <a:avLst/>
-          </a:prstGeom>
-          <a:solidFill>
-            <a:srgbClr val="223049"/>
-          </a:solidFill>
-          <a:ln>
-            <a:noFill/>
-          </a:ln>
-          <a:effectLst/>
-        </p:spPr>
-        <p:style>
-          <a:lnRef idx="1">
-            <a:schemeClr val="accent1"/>
-          </a:lnRef>
-          <a:fillRef idx="3">
-            <a:schemeClr val="accent1"/>
-          </a:fillRef>
-          <a:effectRef idx="2">
-            <a:schemeClr val="accent1"/>
-          </a:effectRef>
-          <a:fontRef idx="minor">
-            <a:schemeClr val="lt1"/>
-          </a:fontRef>
-        </p:style>
-        <p:txBody>
-          <a:bodyPr rtlCol="0" anchor="ctr"/>
-          <a:lstStyle/>
-          <a:p>
-            <a:pPr algn="ctr"/>
-          </a:p>
-        </p:txBody>
-      </p:sp>
-      <p:sp>
-        <p:nvSpPr>
-          <p:cNvPr id="15" name="Rectangle 14"/>
-          <p:cNvSpPr/>
-          <p:nvPr/>
-        </p:nvSpPr>
-        <p:spPr>
-          <a:xfrm>
-            <a:off x="1360365" y="6309360"/>
-            <a:ext cx="743145" cy="43891"/>
-          </a:xfrm>
-          <a:prstGeom prst="rect">
-            <a:avLst/>
-          </a:prstGeom>
-          <a:solidFill>
-            <a:srgbClr val="223049"/>
-          </a:solidFill>
-          <a:ln>
-            <a:noFill/>
-          </a:ln>
-          <a:effectLst/>
-        </p:spPr>
-        <p:style>
-          <a:lnRef idx="1">
-            <a:schemeClr val="accent1"/>
-          </a:lnRef>
-          <a:fillRef idx="3">
-            <a:schemeClr val="accent1"/>
-          </a:fillRef>
-          <a:effectRef idx="2">
-            <a:schemeClr val="accent1"/>
-          </a:effectRef>
-          <a:fontRef idx="minor">
-            <a:schemeClr val="lt1"/>
-          </a:fontRef>
-        </p:style>
-        <p:txBody>
-          <a:bodyPr rtlCol="0" anchor="ctr"/>
-          <a:lstStyle/>
-          <a:p>
-            <a:pPr algn="ctr"/>
-          </a:p>
-        </p:txBody>
-      </p:sp>
-      <p:sp>
-        <p:nvSpPr>
-          <p:cNvPr id="16" name="Rectangle 15"/>
-          <p:cNvSpPr/>
-          <p:nvPr/>
-        </p:nvSpPr>
-        <p:spPr>
-          <a:xfrm>
-            <a:off x="2153803" y="6309360"/>
-            <a:ext cx="743145" cy="43891"/>
-          </a:xfrm>
-          <a:prstGeom prst="rect">
-            <a:avLst/>
-          </a:prstGeom>
-          <a:solidFill>
-            <a:srgbClr val="223049"/>
-          </a:solidFill>
-          <a:ln>
-            <a:noFill/>
-          </a:ln>
-          <a:effectLst/>
-        </p:spPr>
-        <p:style>
-          <a:lnRef idx="1">
-            <a:schemeClr val="accent1"/>
-          </a:lnRef>
-          <a:fillRef idx="3">
-            <a:schemeClr val="accent1"/>
-          </a:fillRef>
-          <a:effectRef idx="2">
-            <a:schemeClr val="accent1"/>
-          </a:effectRef>
-          <a:fontRef idx="minor">
-            <a:schemeClr val="lt1"/>
-          </a:fontRef>
-        </p:style>
-        <p:txBody>
-          <a:bodyPr rtlCol="0" anchor="ctr"/>
-          <a:lstStyle/>
-          <a:p>
-            <a:pPr algn="ctr"/>
-          </a:p>
-        </p:txBody>
-      </p:sp>
-      <p:sp>
-        <p:nvSpPr>
-          <p:cNvPr id="17" name="Rectangle 16"/>
-          <p:cNvSpPr/>
-          <p:nvPr/>
-        </p:nvSpPr>
-        <p:spPr>
-          <a:xfrm>
-            <a:off x="2947241" y="6309360"/>
-            <a:ext cx="743145" cy="43891"/>
-          </a:xfrm>
-          <a:prstGeom prst="rect">
-            <a:avLst/>
-          </a:prstGeom>
-          <a:solidFill>
-            <a:srgbClr val="223049"/>
-          </a:solidFill>
-          <a:ln>
-            <a:noFill/>
-          </a:ln>
-          <a:effectLst/>
-        </p:spPr>
-        <p:style>
-          <a:lnRef idx="1">
-            <a:schemeClr val="accent1"/>
-          </a:lnRef>
-          <a:fillRef idx="3">
-            <a:schemeClr val="accent1"/>
-          </a:fillRef>
-          <a:effectRef idx="2">
-            <a:schemeClr val="accent1"/>
-          </a:effectRef>
-          <a:fontRef idx="minor">
-            <a:schemeClr val="lt1"/>
-          </a:fontRef>
-        </p:style>
-        <p:txBody>
-          <a:bodyPr rtlCol="0" anchor="ctr"/>
-          <a:lstStyle/>
-          <a:p>
-            <a:pPr algn="ctr"/>
-          </a:p>
-        </p:txBody>
-      </p:sp>
-      <p:sp>
-        <p:nvSpPr>
-          <p:cNvPr id="18" name="Rectangle 17"/>
-          <p:cNvSpPr/>
-          <p:nvPr/>
-        </p:nvSpPr>
-        <p:spPr>
-          <a:xfrm>
-            <a:off x="3740679" y="6309360"/>
-            <a:ext cx="743145" cy="43891"/>
-          </a:xfrm>
-          <a:prstGeom prst="rect">
-            <a:avLst/>
-          </a:prstGeom>
-          <a:solidFill>
-            <a:srgbClr val="223049"/>
-          </a:solidFill>
-          <a:ln>
-            <a:noFill/>
-          </a:ln>
-          <a:effectLst/>
-        </p:spPr>
-        <p:style>
-          <a:lnRef idx="1">
-            <a:schemeClr val="accent1"/>
-          </a:lnRef>
-          <a:fillRef idx="3">
-            <a:schemeClr val="accent1"/>
-          </a:fillRef>
-          <a:effectRef idx="2">
-            <a:schemeClr val="accent1"/>
-          </a:effectRef>
-          <a:fontRef idx="minor">
-            <a:schemeClr val="lt1"/>
-          </a:fontRef>
-        </p:style>
-        <p:txBody>
-          <a:bodyPr rtlCol="0" anchor="ctr"/>
-          <a:lstStyle/>
-          <a:p>
-            <a:pPr algn="ctr"/>
-          </a:p>
-        </p:txBody>
-      </p:sp>
-      <p:sp>
-        <p:nvSpPr>
-          <p:cNvPr id="19" name="Rectangle 18"/>
-          <p:cNvSpPr/>
-          <p:nvPr/>
-        </p:nvSpPr>
-        <p:spPr>
-          <a:xfrm>
-            <a:off x="4534117" y="6309360"/>
-            <a:ext cx="743145" cy="43891"/>
-          </a:xfrm>
-          <a:prstGeom prst="rect">
-            <a:avLst/>
-          </a:prstGeom>
-          <a:solidFill>
-            <a:srgbClr val="223049"/>
-          </a:solidFill>
-          <a:ln>
-            <a:noFill/>
-          </a:ln>
-          <a:effectLst/>
-        </p:spPr>
-        <p:style>
-          <a:lnRef idx="1">
-            <a:schemeClr val="accent1"/>
-          </a:lnRef>
-          <a:fillRef idx="3">
-            <a:schemeClr val="accent1"/>
-          </a:fillRef>
-          <a:effectRef idx="2">
-            <a:schemeClr val="accent1"/>
-          </a:effectRef>
-          <a:fontRef idx="minor">
-            <a:schemeClr val="lt1"/>
-          </a:fontRef>
-        </p:style>
-        <p:txBody>
-          <a:bodyPr rtlCol="0" anchor="ctr"/>
-          <a:lstStyle/>
-          <a:p>
-            <a:pPr algn="ctr"/>
-          </a:p>
-        </p:txBody>
-      </p:sp>
-      <p:sp>
-        <p:nvSpPr>
-          <p:cNvPr id="20" name="Rectangle 19"/>
-          <p:cNvSpPr/>
-          <p:nvPr/>
-        </p:nvSpPr>
-        <p:spPr>
-          <a:xfrm>
-            <a:off x="5327555" y="6309360"/>
-            <a:ext cx="743145" cy="43891"/>
-          </a:xfrm>
-          <a:prstGeom prst="rect">
-            <a:avLst/>
-          </a:prstGeom>
-          <a:solidFill>
-            <a:srgbClr val="223049"/>
-          </a:solidFill>
-          <a:ln>
-            <a:noFill/>
-          </a:ln>
-          <a:effectLst/>
-        </p:spPr>
-        <p:style>
-          <a:lnRef idx="1">
-            <a:schemeClr val="accent1"/>
-          </a:lnRef>
-          <a:fillRef idx="3">
-            <a:schemeClr val="accent1"/>
-          </a:fillRef>
-          <a:effectRef idx="2">
-            <a:schemeClr val="accent1"/>
-          </a:effectRef>
-          <a:fontRef idx="minor">
-            <a:schemeClr val="lt1"/>
-          </a:fontRef>
-        </p:style>
-        <p:txBody>
-          <a:bodyPr rtlCol="0" anchor="ctr"/>
-          <a:lstStyle/>
-          <a:p>
-            <a:pPr algn="ctr"/>
-          </a:p>
-        </p:txBody>
-      </p:sp>
-      <p:sp>
-        <p:nvSpPr>
-          <p:cNvPr id="21" name="Rectangle 20"/>
-          <p:cNvSpPr/>
-          <p:nvPr/>
-        </p:nvSpPr>
-        <p:spPr>
-          <a:xfrm>
-            <a:off x="6120993" y="6309360"/>
-            <a:ext cx="743145" cy="43891"/>
-          </a:xfrm>
-          <a:prstGeom prst="rect">
-            <a:avLst/>
-          </a:prstGeom>
-          <a:solidFill>
-            <a:srgbClr val="223049"/>
-          </a:solidFill>
-          <a:ln>
-            <a:noFill/>
-          </a:ln>
-          <a:effectLst/>
-        </p:spPr>
-        <p:style>
-          <a:lnRef idx="1">
-            <a:schemeClr val="accent1"/>
-          </a:lnRef>
-          <a:fillRef idx="3">
-            <a:schemeClr val="accent1"/>
-          </a:fillRef>
-          <a:effectRef idx="2">
-            <a:schemeClr val="accent1"/>
-          </a:effectRef>
-          <a:fontRef idx="minor">
-            <a:schemeClr val="lt1"/>
-          </a:fontRef>
-        </p:style>
-        <p:txBody>
-          <a:bodyPr rtlCol="0" anchor="ctr"/>
-          <a:lstStyle/>
-          <a:p>
-            <a:pPr algn="ctr"/>
-          </a:p>
-        </p:txBody>
-      </p:sp>
-      <p:sp>
-        <p:nvSpPr>
-          <p:cNvPr id="22" name="Rectangle 21"/>
-          <p:cNvSpPr/>
-          <p:nvPr/>
-        </p:nvSpPr>
-        <p:spPr>
-          <a:xfrm>
-            <a:off x="6914431" y="6309360"/>
-            <a:ext cx="743145" cy="43891"/>
-          </a:xfrm>
-          <a:prstGeom prst="rect">
-            <a:avLst/>
-          </a:prstGeom>
-          <a:solidFill>
-            <a:srgbClr val="223049"/>
-          </a:solidFill>
-          <a:ln>
-            <a:noFill/>
-          </a:ln>
-          <a:effectLst/>
-        </p:spPr>
-        <p:style>
-          <a:lnRef idx="1">
-            <a:schemeClr val="accent1"/>
-          </a:lnRef>
-          <a:fillRef idx="3">
-            <a:schemeClr val="accent1"/>
-          </a:fillRef>
-          <a:effectRef idx="2">
-            <a:schemeClr val="accent1"/>
-          </a:effectRef>
-          <a:fontRef idx="minor">
-            <a:schemeClr val="lt1"/>
-          </a:fontRef>
-        </p:style>
-        <p:txBody>
-          <a:bodyPr rtlCol="0" anchor="ctr"/>
-          <a:lstStyle/>
-          <a:p>
-            <a:pPr algn="ctr"/>
-          </a:p>
-        </p:txBody>
-      </p:sp>
-      <p:sp>
-        <p:nvSpPr>
-          <p:cNvPr id="23" name="Rectangle 22"/>
-          <p:cNvSpPr/>
-          <p:nvPr/>
-        </p:nvSpPr>
-        <p:spPr>
-          <a:xfrm>
-            <a:off x="7707869" y="6309360"/>
-            <a:ext cx="743145" cy="43891"/>
-          </a:xfrm>
-          <a:prstGeom prst="rect">
-            <a:avLst/>
-          </a:prstGeom>
-          <a:solidFill>
-            <a:srgbClr val="223049"/>
-          </a:solidFill>
-          <a:ln>
-            <a:noFill/>
-          </a:ln>
-          <a:effectLst/>
-        </p:spPr>
-        <p:style>
-          <a:lnRef idx="1">
-            <a:schemeClr val="accent1"/>
-          </a:lnRef>
-          <a:fillRef idx="3">
-            <a:schemeClr val="accent1"/>
-          </a:fillRef>
-          <a:effectRef idx="2">
-            <a:schemeClr val="accent1"/>
-          </a:effectRef>
-          <a:fontRef idx="minor">
-            <a:schemeClr val="lt1"/>
-          </a:fontRef>
-        </p:style>
-        <p:txBody>
-          <a:bodyPr rtlCol="0" anchor="ctr"/>
-          <a:lstStyle/>
-          <a:p>
-            <a:pPr algn="ctr"/>
-          </a:p>
-        </p:txBody>
-      </p:sp>
-      <p:sp>
-        <p:nvSpPr>
-          <p:cNvPr id="24" name="Rectangle 23"/>
-          <p:cNvSpPr/>
-          <p:nvPr/>
-        </p:nvSpPr>
-        <p:spPr>
-          <a:xfrm>
-            <a:off x="8501307" y="6296558"/>
-            <a:ext cx="743145" cy="68580"/>
-          </a:xfrm>
-          <a:prstGeom prst="rect">
-            <a:avLst/>
-          </a:prstGeom>
-          <a:solidFill>
-            <a:srgbClr val="2FD8B4"/>
-          </a:solidFill>
-          <a:ln>
-            <a:noFill/>
-          </a:ln>
-          <a:effectLst/>
-        </p:spPr>
-        <p:style>
-          <a:lnRef idx="1">
-            <a:schemeClr val="accent1"/>
-          </a:lnRef>
-          <a:fillRef idx="3">
-            <a:schemeClr val="accent1"/>
-          </a:fillRef>
-          <a:effectRef idx="2">
-            <a:schemeClr val="accent1"/>
-          </a:effectRef>
-          <a:fontRef idx="minor">
-            <a:schemeClr val="lt1"/>
-          </a:fontRef>
-        </p:style>
-        <p:txBody>
-          <a:bodyPr rtlCol="0" anchor="ctr"/>
-          <a:lstStyle/>
-          <a:p>
-            <a:pPr algn="ctr"/>
-          </a:p>
-        </p:txBody>
-      </p:sp>
-      <p:sp>
-        <p:nvSpPr>
-          <p:cNvPr id="25" name="Rectangle 24"/>
-          <p:cNvSpPr/>
-          <p:nvPr/>
-        </p:nvSpPr>
-        <p:spPr>
-          <a:xfrm>
-            <a:off x="9294745" y="6309360"/>
-            <a:ext cx="743145" cy="43891"/>
-          </a:xfrm>
-          <a:prstGeom prst="rect">
-            <a:avLst/>
-          </a:prstGeom>
-          <a:solidFill>
-            <a:srgbClr val="223049"/>
-          </a:solidFill>
-          <a:ln>
-            <a:noFill/>
-          </a:ln>
-          <a:effectLst/>
-        </p:spPr>
-        <p:style>
-          <a:lnRef idx="1">
-            <a:schemeClr val="accent1"/>
-          </a:lnRef>
-          <a:fillRef idx="3">
-            <a:schemeClr val="accent1"/>
-          </a:fillRef>
-          <a:effectRef idx="2">
-            <a:schemeClr val="accent1"/>
-          </a:effectRef>
-          <a:fontRef idx="minor">
-            <a:schemeClr val="lt1"/>
-          </a:fontRef>
-        </p:style>
-        <p:txBody>
-          <a:bodyPr rtlCol="0" anchor="ctr"/>
-          <a:lstStyle/>
-          <a:p>
-            <a:pPr algn="ctr"/>
-          </a:p>
-        </p:txBody>
-      </p:sp>
-      <p:sp>
-        <p:nvSpPr>
-          <p:cNvPr id="26" name="Rectangle 25"/>
-          <p:cNvSpPr/>
-          <p:nvPr/>
-        </p:nvSpPr>
-        <p:spPr>
-          <a:xfrm>
-            <a:off x="10088183" y="6309360"/>
-            <a:ext cx="743145" cy="43891"/>
-          </a:xfrm>
-          <a:prstGeom prst="rect">
-            <a:avLst/>
-          </a:prstGeom>
-          <a:solidFill>
-            <a:srgbClr val="223049"/>
-          </a:solidFill>
-          <a:ln>
-            <a:noFill/>
-          </a:ln>
-          <a:effectLst/>
-        </p:spPr>
-        <p:style>
-          <a:lnRef idx="1">
-            <a:schemeClr val="accent1"/>
-          </a:lnRef>
-          <a:fillRef idx="3">
-            <a:schemeClr val="accent1"/>
-          </a:fillRef>
-          <a:effectRef idx="2">
-            <a:schemeClr val="accent1"/>
-          </a:effectRef>
-          <a:fontRef idx="minor">
-            <a:schemeClr val="lt1"/>
-          </a:fontRef>
-        </p:style>
-        <p:txBody>
-          <a:bodyPr rtlCol="0" anchor="ctr"/>
-          <a:lstStyle/>
-          <a:p>
-            <a:pPr algn="ctr"/>
-          </a:p>
-        </p:txBody>
-      </p:sp>
-      <p:sp>
-        <p:nvSpPr>
-          <p:cNvPr id="27" name="Rectangle 26"/>
-          <p:cNvSpPr/>
-          <p:nvPr/>
-        </p:nvSpPr>
-        <p:spPr>
-          <a:xfrm>
-            <a:off x="10881621" y="6309360"/>
-            <a:ext cx="743145" cy="43891"/>
-          </a:xfrm>
-          <a:prstGeom prst="rect">
-            <a:avLst/>
-          </a:prstGeom>
-          <a:solidFill>
-            <a:srgbClr val="223049"/>
-          </a:solidFill>
-          <a:ln>
-            <a:noFill/>
-          </a:ln>
-          <a:effectLst/>
-        </p:spPr>
-        <p:style>
-          <a:lnRef idx="1">
-            <a:schemeClr val="accent1"/>
-          </a:lnRef>
-          <a:fillRef idx="3">
-            <a:schemeClr val="accent1"/>
-          </a:fillRef>
-          <a:effectRef idx="2">
-            <a:schemeClr val="accent1"/>
-          </a:effectRef>
-          <a:fontRef idx="minor">
-            <a:schemeClr val="lt1"/>
-          </a:fontRef>
-        </p:style>
-        <p:txBody>
-          <a:bodyPr rtlCol="0" anchor="ctr"/>
-          <a:lstStyle/>
-          <a:p>
-            <a:pPr algn="ctr"/>
-          </a:p>
-        </p:txBody>
-      </p:sp>
-      <p:sp>
-        <p:nvSpPr>
-          <p:cNvPr id="28" name="Rectangle 27"/>
-          <p:cNvSpPr/>
-          <p:nvPr/>
-        </p:nvSpPr>
-        <p:spPr>
-          <a:xfrm>
-            <a:off x="566928" y="6455664"/>
-            <a:ext cx="11057839" cy="9144"/>
-          </a:xfrm>
-          <a:prstGeom prst="rect">
-            <a:avLst/>
-          </a:prstGeom>
-          <a:solidFill>
-            <a:srgbClr val="223049"/>
-          </a:solidFill>
-          <a:ln>
-            <a:noFill/>
-          </a:ln>
-          <a:effectLst/>
-        </p:spPr>
-        <p:style>
-          <a:lnRef idx="1">
-            <a:schemeClr val="accent1"/>
-          </a:lnRef>
-          <a:fillRef idx="3">
-            <a:schemeClr val="accent1"/>
-          </a:fillRef>
-          <a:effectRef idx="2">
-            <a:schemeClr val="accent1"/>
-          </a:effectRef>
-          <a:fontRef idx="minor">
-            <a:schemeClr val="lt1"/>
-          </a:fontRef>
-        </p:style>
-        <p:txBody>
-          <a:bodyPr rtlCol="0" anchor="ctr"/>
-          <a:lstStyle/>
-          <a:p>
-            <a:pPr algn="ctr"/>
-          </a:p>
-        </p:txBody>
-      </p:sp>
-      <p:sp>
-        <p:nvSpPr>
-          <p:cNvPr id="29" name="TextBox 28"/>
-          <p:cNvSpPr txBox="1"/>
-          <p:nvPr/>
-        </p:nvSpPr>
-        <p:spPr>
-          <a:xfrm>
-            <a:off x="566928" y="6510528"/>
-            <a:ext cx="9509760" cy="219456"/>
-          </a:xfrm>
-          <a:prstGeom prst="rect">
-            <a:avLst/>
-          </a:prstGeom>
-          <a:noFill/>
-        </p:spPr>
-        <p:txBody>
-          <a:bodyPr wrap="square" lIns="0" rIns="0" tIns="0" bIns="0" anchor="t">
-            <a:spAutoFit/>
-          </a:bodyPr>
-          <a:lstStyle/>
-          <a:p>
-            <a:pPr algn="l">
-              <a:lnSpc>
-                <a:spcPct val="112000"/>
-              </a:lnSpc>
-              <a:spcAft>
-                <a:spcPts val="0"/>
-              </a:spcAft>
-            </a:pPr>
-            <a:r>
-              <a:rPr sz="900" b="0">
-                <a:solidFill>
-                  <a:srgbClr val="8CA0BE"/>
-                </a:solidFill>
-                <a:latin typeface="Segoe UI"/>
-              </a:rPr>
-              <a:t>RetainIQ · Signal Ops Console   ·   PHASE 11 · RETENTION INTELLIGENCE</a:t>
-            </a:r>
-          </a:p>
-        </p:txBody>
-      </p:sp>
-      <p:sp>
-        <p:nvSpPr>
-          <p:cNvPr id="30" name="TextBox 29"/>
-          <p:cNvSpPr txBox="1"/>
-          <p:nvPr/>
-        </p:nvSpPr>
-        <p:spPr>
-          <a:xfrm>
-            <a:off x="10527487" y="6510528"/>
-            <a:ext cx="1097280" cy="219456"/>
-          </a:xfrm>
-          <a:prstGeom prst="rect">
-            <a:avLst/>
-          </a:prstGeom>
-          <a:noFill/>
-        </p:spPr>
-        <p:txBody>
-          <a:bodyPr wrap="square" lIns="0" rIns="0" tIns="0" bIns="0" anchor="t">
-            <a:spAutoFit/>
-          </a:bodyPr>
-          <a:lstStyle/>
-          <a:p>
-            <a:pPr algn="r">
-              <a:lnSpc>
-                <a:spcPct val="112000"/>
-              </a:lnSpc>
-              <a:spcAft>
-                <a:spcPts val="0"/>
-              </a:spcAft>
-            </a:pPr>
-            <a:r>
-              <a:rPr sz="900" b="0">
-                <a:solidFill>
-                  <a:srgbClr val="8CA0BE"/>
-                </a:solidFill>
-                <a:latin typeface="Consolas"/>
-              </a:rPr>
-              <a:t>14</a:t>
-            </a:r>
-          </a:p>
-        </p:txBody>
-      </p:sp>
-    </p:spTree>
-  </p:cSld>
-  <p:clrMapOvr>
-    <a:masterClrMapping/>
-  </p:clrMapOvr>
-</p:sld>
-</file>
-
-<file path=ppt/slides/slide15.xml><?xml version="1.0" encoding="utf-8"?>
-<p:sld xmlns:a="http://schemas.openxmlformats.org/drawingml/2006/main" xmlns:p="http://schemas.openxmlformats.org/presentationml/2006/main" xmlns:r="http://schemas.openxmlformats.org/officeDocument/2006/relationships">
-  <p:cSld>
-    <p:spTree>
-      <p:nvGrpSpPr>
-        <p:cNvPr id="1" name=""/>
-        <p:cNvGrpSpPr/>
-        <p:nvPr/>
-      </p:nvGrpSpPr>
-      <p:grpSpPr/>
-      <p:sp>
-        <p:nvSpPr>
-          <p:cNvPr id="2" name="Rectangle 1"/>
-          <p:cNvSpPr/>
-          <p:nvPr/>
-        </p:nvSpPr>
-        <p:spPr>
-          <a:xfrm>
-            <a:off x="0" y="0"/>
-            <a:ext cx="12191695" cy="6858000"/>
-          </a:xfrm>
-          <a:prstGeom prst="rect">
-            <a:avLst/>
-          </a:prstGeom>
-          <a:solidFill>
-            <a:srgbClr val="0A0F1C"/>
-          </a:solidFill>
-          <a:ln>
-            <a:noFill/>
-          </a:ln>
-          <a:effectLst/>
-        </p:spPr>
-        <p:style>
-          <a:lnRef idx="1">
-            <a:schemeClr val="accent1"/>
-          </a:lnRef>
-          <a:fillRef idx="3">
-            <a:schemeClr val="accent1"/>
-          </a:fillRef>
-          <a:effectRef idx="2">
-            <a:schemeClr val="accent1"/>
-          </a:effectRef>
-          <a:fontRef idx="minor">
-            <a:schemeClr val="lt1"/>
-          </a:fontRef>
-        </p:style>
-        <p:txBody>
-          <a:bodyPr rtlCol="0" anchor="ctr"/>
-          <a:lstStyle/>
-          <a:p>
-            <a:pPr algn="ctr"/>
-          </a:p>
-        </p:txBody>
-      </p:sp>
-      <p:sp>
-        <p:nvSpPr>
-          <p:cNvPr id="3" name="TextBox 2"/>
-          <p:cNvSpPr txBox="1"/>
-          <p:nvPr/>
-        </p:nvSpPr>
-        <p:spPr>
-          <a:xfrm>
-            <a:off x="566928" y="365760"/>
-            <a:ext cx="8229600" cy="237744"/>
-          </a:xfrm>
-          <a:prstGeom prst="rect">
-            <a:avLst/>
-          </a:prstGeom>
-          <a:noFill/>
-        </p:spPr>
-        <p:txBody>
-          <a:bodyPr wrap="square" lIns="0" rIns="0" tIns="0" bIns="0" anchor="t">
-            <a:spAutoFit/>
-          </a:bodyPr>
-          <a:lstStyle/>
-          <a:p>
-            <a:pPr algn="l">
-              <a:lnSpc>
-                <a:spcPct val="112000"/>
-              </a:lnSpc>
-              <a:spcAft>
-                <a:spcPts val="0"/>
-              </a:spcAft>
-            </a:pPr>
-            <a:r>
-              <a:rPr sz="1000" b="1">
-                <a:solidFill>
-                  <a:srgbClr val="2FD8B4"/>
-                </a:solidFill>
-                <a:latin typeface="Consolas"/>
-              </a:rPr>
-              <a:t>PHASE 12  ·  BUSINESS INTELLIGENCE</a:t>
-            </a:r>
-          </a:p>
-        </p:txBody>
-      </p:sp>
-      <p:sp>
-        <p:nvSpPr>
-          <p:cNvPr id="4" name="TextBox 3"/>
-          <p:cNvSpPr txBox="1"/>
-          <p:nvPr/>
-        </p:nvSpPr>
-        <p:spPr>
-          <a:xfrm>
-            <a:off x="566928" y="576072"/>
-            <a:ext cx="11057839" cy="475488"/>
-          </a:xfrm>
-          <a:prstGeom prst="rect">
-            <a:avLst/>
-          </a:prstGeom>
-          <a:noFill/>
-        </p:spPr>
-        <p:txBody>
-          <a:bodyPr wrap="square" lIns="0" rIns="0" tIns="0" bIns="0" anchor="t">
-            <a:spAutoFit/>
-          </a:bodyPr>
-          <a:lstStyle/>
-          <a:p>
-            <a:pPr algn="l">
-              <a:lnSpc>
-                <a:spcPct val="112000"/>
-              </a:lnSpc>
-              <a:spcAft>
-                <a:spcPts val="0"/>
-              </a:spcAft>
-            </a:pPr>
-            <a:r>
-              <a:rPr sz="2600" b="1">
-                <a:solidFill>
-                  <a:srgbClr val="EAF0F7"/>
-                </a:solidFill>
-                <a:latin typeface="Segoe UI"/>
-              </a:rPr>
-              <a:t>The descriptive layer beneath the predictions</a:t>
-            </a:r>
-          </a:p>
-        </p:txBody>
-      </p:sp>
-      <p:sp>
-        <p:nvSpPr>
-          <p:cNvPr id="5" name="TextBox 4"/>
-          <p:cNvSpPr txBox="1"/>
-          <p:nvPr/>
-        </p:nvSpPr>
-        <p:spPr>
-          <a:xfrm>
-            <a:off x="566928" y="1060704"/>
-            <a:ext cx="11057839" cy="274320"/>
-          </a:xfrm>
-          <a:prstGeom prst="rect">
-            <a:avLst/>
-          </a:prstGeom>
-          <a:noFill/>
-        </p:spPr>
-        <p:txBody>
-          <a:bodyPr wrap="square" lIns="0" rIns="0" tIns="0" bIns="0" anchor="t">
-            <a:spAutoFit/>
-          </a:bodyPr>
-          <a:lstStyle/>
-          <a:p>
-            <a:pPr algn="l">
-              <a:lnSpc>
-                <a:spcPct val="112000"/>
-              </a:lnSpc>
-              <a:spcAft>
-                <a:spcPts val="0"/>
-              </a:spcAft>
-            </a:pPr>
-            <a:r>
-              <a:rPr sz="1250" b="0">
-                <a:solidFill>
-                  <a:srgbClr val="8CA0BE"/>
-                </a:solidFill>
-                <a:latin typeface="Segoe UI"/>
-              </a:rPr>
-              <a:t>A four-page Power BI dashboard for the people who fund the retention team</a:t>
-            </a:r>
-          </a:p>
-        </p:txBody>
-      </p:sp>
-      <p:sp>
-        <p:nvSpPr>
-          <p:cNvPr id="6" name="Rectangle 5"/>
-          <p:cNvSpPr/>
-          <p:nvPr/>
-        </p:nvSpPr>
-        <p:spPr>
-          <a:xfrm>
-            <a:off x="566928" y="1371600"/>
-            <a:ext cx="11057839" cy="12801"/>
-          </a:xfrm>
-          <a:prstGeom prst="rect">
-            <a:avLst/>
-          </a:prstGeom>
-          <a:solidFill>
-            <a:srgbClr val="223049"/>
-          </a:solidFill>
-          <a:ln>
-            <a:noFill/>
-          </a:ln>
-          <a:effectLst/>
-        </p:spPr>
-        <p:style>
-          <a:lnRef idx="1">
-            <a:schemeClr val="accent1"/>
-          </a:lnRef>
-          <a:fillRef idx="3">
-            <a:schemeClr val="accent1"/>
-          </a:fillRef>
-          <a:effectRef idx="2">
-            <a:schemeClr val="accent1"/>
-          </a:effectRef>
-          <a:fontRef idx="minor">
-            <a:schemeClr val="lt1"/>
-          </a:fontRef>
-        </p:style>
-        <p:txBody>
-          <a:bodyPr rtlCol="0" anchor="ctr"/>
-          <a:lstStyle/>
-          <a:p>
-            <a:pPr algn="ctr"/>
-          </a:p>
-        </p:txBody>
-      </p:sp>
-      <p:sp>
-        <p:nvSpPr>
-          <p:cNvPr id="7" name="Rounded Rectangle 6"/>
-          <p:cNvSpPr/>
-          <p:nvPr/>
-        </p:nvSpPr>
-        <p:spPr>
-          <a:xfrm>
-            <a:off x="693491" y="1517904"/>
-            <a:ext cx="5233273" cy="2980944"/>
-          </a:xfrm>
-          <a:prstGeom prst="roundRect">
-            <a:avLst>
-              <a:gd name="adj" fmla="val 8000"/>
-            </a:avLst>
-          </a:prstGeom>
-          <a:solidFill>
-            <a:srgbClr val="FFFFFF"/>
-          </a:solidFill>
-          <a:ln w="12700">
-            <a:solidFill>
-              <a:srgbClr val="223049"/>
-            </a:solidFill>
-          </a:ln>
-          <a:effectLst/>
-        </p:spPr>
-        <p:style>
-          <a:lnRef idx="1">
-            <a:schemeClr val="accent1"/>
-          </a:lnRef>
-          <a:fillRef idx="3">
-            <a:schemeClr val="accent1"/>
-          </a:fillRef>
-          <a:effectRef idx="2">
-            <a:schemeClr val="accent1"/>
-          </a:effectRef>
-          <a:fontRef idx="minor">
-            <a:schemeClr val="lt1"/>
-          </a:fontRef>
-        </p:style>
-        <p:txBody>
-          <a:bodyPr rtlCol="0" anchor="ctr"/>
-          <a:lstStyle/>
-          <a:p>
-            <a:pPr algn="ctr"/>
-          </a:p>
-        </p:txBody>
-      </p:sp>
-      <p:pic>
-        <p:nvPicPr>
-          <p:cNvPr id="8" name="Picture 7" descr="page1_executive_overview.png.png"/>
-          <p:cNvPicPr>
-            <a:picLocks noChangeAspect="1"/>
-          </p:cNvPicPr>
-          <p:nvPr/>
-        </p:nvPicPr>
-        <p:blipFill>
-          <a:blip r:embed="rId2"/>
-          <a:stretch>
-            <a:fillRect/>
-          </a:stretch>
-        </p:blipFill>
-        <p:spPr>
-          <a:xfrm>
-            <a:off x="775787" y="1600200"/>
-            <a:ext cx="5068681" cy="2816351"/>
-          </a:xfrm>
-          <a:prstGeom prst="rect">
-            <a:avLst/>
-          </a:prstGeom>
-        </p:spPr>
-      </p:pic>
-      <p:sp>
-        <p:nvSpPr>
-          <p:cNvPr id="9" name="Rounded Rectangle 8"/>
-          <p:cNvSpPr/>
-          <p:nvPr/>
-        </p:nvSpPr>
-        <p:spPr>
-          <a:xfrm>
-            <a:off x="6453835" y="1517904"/>
-            <a:ext cx="5234025" cy="2980944"/>
-          </a:xfrm>
-          <a:prstGeom prst="roundRect">
-            <a:avLst>
-              <a:gd name="adj" fmla="val 8000"/>
-            </a:avLst>
-          </a:prstGeom>
-          <a:solidFill>
-            <a:srgbClr val="FFFFFF"/>
-          </a:solidFill>
-          <a:ln w="12700">
-            <a:solidFill>
-              <a:srgbClr val="223049"/>
-            </a:solidFill>
-          </a:ln>
-          <a:effectLst/>
-        </p:spPr>
-        <p:style>
-          <a:lnRef idx="1">
-            <a:schemeClr val="accent1"/>
-          </a:lnRef>
-          <a:fillRef idx="3">
-            <a:schemeClr val="accent1"/>
-          </a:fillRef>
-          <a:effectRef idx="2">
-            <a:schemeClr val="accent1"/>
-          </a:effectRef>
-          <a:fontRef idx="minor">
-            <a:schemeClr val="lt1"/>
-          </a:fontRef>
-        </p:style>
-        <p:txBody>
-          <a:bodyPr rtlCol="0" anchor="ctr"/>
-          <a:lstStyle/>
-          <a:p>
-            <a:pPr algn="ctr"/>
-          </a:p>
-        </p:txBody>
-      </p:sp>
-      <p:pic>
-        <p:nvPicPr>
-          <p:cNvPr id="10" name="Picture 9" descr="page3_risk_intelligence.png.png"/>
-          <p:cNvPicPr>
-            <a:picLocks noChangeAspect="1"/>
-          </p:cNvPicPr>
-          <p:nvPr/>
-        </p:nvPicPr>
-        <p:blipFill>
-          <a:blip r:embed="rId3"/>
-          <a:stretch>
-            <a:fillRect/>
-          </a:stretch>
-        </p:blipFill>
-        <p:spPr>
-          <a:xfrm>
-            <a:off x="6536131" y="1600200"/>
-            <a:ext cx="5069433" cy="2816351"/>
-          </a:xfrm>
-          <a:prstGeom prst="rect">
-            <a:avLst/>
-          </a:prstGeom>
-        </p:spPr>
-      </p:pic>
-      <p:sp>
-        <p:nvSpPr>
-          <p:cNvPr id="11" name="Rounded Rectangle 10"/>
-          <p:cNvSpPr/>
-          <p:nvPr/>
-        </p:nvSpPr>
-        <p:spPr>
-          <a:xfrm>
-            <a:off x="566928" y="4608576"/>
-            <a:ext cx="2641015" cy="1188720"/>
-          </a:xfrm>
-          <a:prstGeom prst="roundRect">
-            <a:avLst>
-              <a:gd name="adj" fmla="val 8000"/>
-            </a:avLst>
-          </a:prstGeom>
-          <a:solidFill>
-            <a:srgbClr val="111A2C"/>
-          </a:solidFill>
-          <a:ln w="12700">
-            <a:solidFill>
-              <a:srgbClr val="223049"/>
-            </a:solidFill>
-          </a:ln>
-          <a:effectLst/>
-        </p:spPr>
-        <p:style>
-          <a:lnRef idx="1">
-            <a:schemeClr val="accent1"/>
-          </a:lnRef>
-          <a:fillRef idx="3">
-            <a:schemeClr val="accent1"/>
-          </a:fillRef>
-          <a:effectRef idx="2">
-            <a:schemeClr val="accent1"/>
-          </a:effectRef>
-          <a:fontRef idx="minor">
-            <a:schemeClr val="lt1"/>
-          </a:fontRef>
-        </p:style>
-        <p:txBody>
-          <a:bodyPr rtlCol="0" anchor="ctr"/>
-          <a:lstStyle/>
-          <a:p>
-            <a:pPr algn="ctr"/>
-          </a:p>
-        </p:txBody>
-      </p:sp>
-      <p:sp>
-        <p:nvSpPr>
-          <p:cNvPr id="12" name="Rectangle 11"/>
-          <p:cNvSpPr/>
-          <p:nvPr/>
-        </p:nvSpPr>
-        <p:spPr>
-          <a:xfrm>
-            <a:off x="566928" y="4736592"/>
-            <a:ext cx="32004" cy="932688"/>
-          </a:xfrm>
-          <a:prstGeom prst="rect">
-            <a:avLst/>
-          </a:prstGeom>
-          <a:solidFill>
-            <a:srgbClr val="2FD8B4"/>
-          </a:solidFill>
-          <a:ln>
-            <a:noFill/>
-          </a:ln>
-          <a:effectLst/>
-        </p:spPr>
-        <p:style>
-          <a:lnRef idx="1">
-            <a:schemeClr val="accent1"/>
-          </a:lnRef>
-          <a:fillRef idx="3">
-            <a:schemeClr val="accent1"/>
-          </a:fillRef>
-          <a:effectRef idx="2">
-            <a:schemeClr val="accent1"/>
-          </a:effectRef>
-          <a:fontRef idx="minor">
-            <a:schemeClr val="lt1"/>
-          </a:fontRef>
-        </p:style>
-        <p:txBody>
-          <a:bodyPr rtlCol="0" anchor="ctr"/>
-          <a:lstStyle/>
-          <a:p>
-            <a:pPr algn="ctr"/>
-          </a:p>
-        </p:txBody>
-      </p:sp>
-      <p:sp>
-        <p:nvSpPr>
-          <p:cNvPr id="13" name="TextBox 12"/>
-          <p:cNvSpPr txBox="1"/>
-          <p:nvPr/>
-        </p:nvSpPr>
-        <p:spPr>
-          <a:xfrm>
-            <a:off x="749808" y="4754880"/>
-            <a:ext cx="2256967" cy="914400"/>
-          </a:xfrm>
-          <a:prstGeom prst="rect">
-            <a:avLst/>
-          </a:prstGeom>
-          <a:noFill/>
-        </p:spPr>
-        <p:txBody>
-          <a:bodyPr wrap="square" lIns="0" rIns="0" tIns="0" bIns="0" anchor="t">
-            <a:spAutoFit/>
-          </a:bodyPr>
-          <a:lstStyle/>
-          <a:p>
-            <a:pPr algn="l">
-              <a:lnSpc>
-                <a:spcPct val="112000"/>
-              </a:lnSpc>
-              <a:spcAft>
-                <a:spcPts val="400"/>
-              </a:spcAft>
-            </a:pPr>
-            <a:r>
-              <a:rPr sz="1150" b="1">
-                <a:solidFill>
-                  <a:srgbClr val="2FD8B4"/>
-                </a:solidFill>
-                <a:latin typeface="Segoe UI"/>
-              </a:rPr>
-              <a:t>Executive overview</a:t>
-            </a:r>
-          </a:p>
-          <a:p>
-            <a:pPr algn="l">
-              <a:lnSpc>
-                <a:spcPct val="116000"/>
-              </a:lnSpc>
-              <a:spcAft>
-                <a:spcPts val="0"/>
-              </a:spcAft>
-            </a:pPr>
-            <a:r>
-              <a:rPr sz="1000" b="0">
-                <a:solidFill>
-                  <a:srgbClr val="EAF0F7"/>
-                </a:solidFill>
-                <a:latin typeface="Segoe UI"/>
-              </a:rPr>
-              <a:t>Portfolio KPIs, churn rate and revenue in one view for management.</a:t>
-            </a:r>
-          </a:p>
-        </p:txBody>
-      </p:sp>
-      <p:sp>
-        <p:nvSpPr>
-          <p:cNvPr id="14" name="Rounded Rectangle 13"/>
-          <p:cNvSpPr/>
-          <p:nvPr/>
-        </p:nvSpPr>
-        <p:spPr>
-          <a:xfrm>
-            <a:off x="3372535" y="4608576"/>
-            <a:ext cx="2641015" cy="1188720"/>
-          </a:xfrm>
-          <a:prstGeom prst="roundRect">
-            <a:avLst>
-              <a:gd name="adj" fmla="val 8000"/>
-            </a:avLst>
-          </a:prstGeom>
-          <a:solidFill>
-            <a:srgbClr val="111A2C"/>
-          </a:solidFill>
-          <a:ln w="12700">
-            <a:solidFill>
-              <a:srgbClr val="223049"/>
-            </a:solidFill>
-          </a:ln>
-          <a:effectLst/>
-        </p:spPr>
-        <p:style>
-          <a:lnRef idx="1">
-            <a:schemeClr val="accent1"/>
-          </a:lnRef>
-          <a:fillRef idx="3">
-            <a:schemeClr val="accent1"/>
-          </a:fillRef>
-          <a:effectRef idx="2">
-            <a:schemeClr val="accent1"/>
-          </a:effectRef>
-          <a:fontRef idx="minor">
-            <a:schemeClr val="lt1"/>
-          </a:fontRef>
-        </p:style>
-        <p:txBody>
-          <a:bodyPr rtlCol="0" anchor="ctr"/>
-          <a:lstStyle/>
-          <a:p>
-            <a:pPr algn="ctr"/>
-          </a:p>
-        </p:txBody>
-      </p:sp>
-      <p:sp>
-        <p:nvSpPr>
-          <p:cNvPr id="15" name="Rectangle 14"/>
-          <p:cNvSpPr/>
-          <p:nvPr/>
-        </p:nvSpPr>
-        <p:spPr>
-          <a:xfrm>
-            <a:off x="3372535" y="4736592"/>
-            <a:ext cx="32004" cy="932688"/>
-          </a:xfrm>
-          <a:prstGeom prst="rect">
-            <a:avLst/>
-          </a:prstGeom>
-          <a:solidFill>
-            <a:srgbClr val="4C8DFF"/>
-          </a:solidFill>
-          <a:ln>
-            <a:noFill/>
-          </a:ln>
-          <a:effectLst/>
-        </p:spPr>
-        <p:style>
-          <a:lnRef idx="1">
-            <a:schemeClr val="accent1"/>
-          </a:lnRef>
-          <a:fillRef idx="3">
-            <a:schemeClr val="accent1"/>
-          </a:fillRef>
-          <a:effectRef idx="2">
-            <a:schemeClr val="accent1"/>
-          </a:effectRef>
-          <a:fontRef idx="minor">
-            <a:schemeClr val="lt1"/>
-          </a:fontRef>
-        </p:style>
-        <p:txBody>
-          <a:bodyPr rtlCol="0" anchor="ctr"/>
-          <a:lstStyle/>
-          <a:p>
-            <a:pPr algn="ctr"/>
-          </a:p>
-        </p:txBody>
-      </p:sp>
-      <p:sp>
-        <p:nvSpPr>
-          <p:cNvPr id="16" name="TextBox 15"/>
-          <p:cNvSpPr txBox="1"/>
-          <p:nvPr/>
-        </p:nvSpPr>
-        <p:spPr>
-          <a:xfrm>
-            <a:off x="3555415" y="4754880"/>
-            <a:ext cx="2256967" cy="914400"/>
-          </a:xfrm>
-          <a:prstGeom prst="rect">
-            <a:avLst/>
-          </a:prstGeom>
-          <a:noFill/>
-        </p:spPr>
-        <p:txBody>
-          <a:bodyPr wrap="square" lIns="0" rIns="0" tIns="0" bIns="0" anchor="t">
-            <a:spAutoFit/>
-          </a:bodyPr>
-          <a:lstStyle/>
-          <a:p>
-            <a:pPr algn="l">
-              <a:lnSpc>
-                <a:spcPct val="112000"/>
-              </a:lnSpc>
-              <a:spcAft>
-                <a:spcPts val="400"/>
-              </a:spcAft>
-            </a:pPr>
-            <a:r>
-              <a:rPr sz="1150" b="1">
-                <a:solidFill>
-                  <a:srgbClr val="4C8DFF"/>
-                </a:solidFill>
-                <a:latin typeface="Segoe UI"/>
-              </a:rPr>
-              <a:t>Customer insights</a:t>
-            </a:r>
-          </a:p>
-          <a:p>
-            <a:pPr algn="l">
-              <a:lnSpc>
-                <a:spcPct val="116000"/>
-              </a:lnSpc>
-              <a:spcAft>
-                <a:spcPts val="0"/>
-              </a:spcAft>
-            </a:pPr>
-            <a:r>
-              <a:rPr sz="1000" b="0">
-                <a:solidFill>
-                  <a:srgbClr val="EAF0F7"/>
-                </a:solidFill>
-                <a:latin typeface="Segoe UI"/>
-              </a:rPr>
-              <a:t>Where churn concentrates — contract, tenure, service mix.</a:t>
-            </a:r>
-          </a:p>
-        </p:txBody>
-      </p:sp>
-      <p:sp>
-        <p:nvSpPr>
-          <p:cNvPr id="17" name="Rounded Rectangle 16"/>
-          <p:cNvSpPr/>
-          <p:nvPr/>
-        </p:nvSpPr>
-        <p:spPr>
-          <a:xfrm>
-            <a:off x="6178143" y="4608576"/>
-            <a:ext cx="2641015" cy="1188720"/>
-          </a:xfrm>
-          <a:prstGeom prst="roundRect">
-            <a:avLst>
-              <a:gd name="adj" fmla="val 8000"/>
-            </a:avLst>
-          </a:prstGeom>
-          <a:solidFill>
-            <a:srgbClr val="111A2C"/>
-          </a:solidFill>
-          <a:ln w="12700">
-            <a:solidFill>
-              <a:srgbClr val="223049"/>
-            </a:solidFill>
-          </a:ln>
-          <a:effectLst/>
-        </p:spPr>
-        <p:style>
-          <a:lnRef idx="1">
-            <a:schemeClr val="accent1"/>
-          </a:lnRef>
-          <a:fillRef idx="3">
-            <a:schemeClr val="accent1"/>
-          </a:fillRef>
-          <a:effectRef idx="2">
-            <a:schemeClr val="accent1"/>
-          </a:effectRef>
-          <a:fontRef idx="minor">
-            <a:schemeClr val="lt1"/>
-          </a:fontRef>
-        </p:style>
-        <p:txBody>
-          <a:bodyPr rtlCol="0" anchor="ctr"/>
-          <a:lstStyle/>
-          <a:p>
-            <a:pPr algn="ctr"/>
-          </a:p>
-        </p:txBody>
-      </p:sp>
-      <p:sp>
-        <p:nvSpPr>
-          <p:cNvPr id="18" name="Rectangle 17"/>
-          <p:cNvSpPr/>
-          <p:nvPr/>
-        </p:nvSpPr>
-        <p:spPr>
-          <a:xfrm>
-            <a:off x="6178143" y="4736592"/>
-            <a:ext cx="32004" cy="932688"/>
-          </a:xfrm>
-          <a:prstGeom prst="rect">
-            <a:avLst/>
-          </a:prstGeom>
-          <a:solidFill>
-            <a:srgbClr val="F5A623"/>
-          </a:solidFill>
-          <a:ln>
-            <a:noFill/>
-          </a:ln>
-          <a:effectLst/>
-        </p:spPr>
-        <p:style>
-          <a:lnRef idx="1">
-            <a:schemeClr val="accent1"/>
-          </a:lnRef>
-          <a:fillRef idx="3">
-            <a:schemeClr val="accent1"/>
-          </a:fillRef>
-          <a:effectRef idx="2">
-            <a:schemeClr val="accent1"/>
-          </a:effectRef>
-          <a:fontRef idx="minor">
-            <a:schemeClr val="lt1"/>
-          </a:fontRef>
-        </p:style>
-        <p:txBody>
-          <a:bodyPr rtlCol="0" anchor="ctr"/>
-          <a:lstStyle/>
-          <a:p>
-            <a:pPr algn="ctr"/>
-          </a:p>
-        </p:txBody>
-      </p:sp>
-      <p:sp>
-        <p:nvSpPr>
-          <p:cNvPr id="19" name="TextBox 18"/>
-          <p:cNvSpPr txBox="1"/>
-          <p:nvPr/>
-        </p:nvSpPr>
-        <p:spPr>
-          <a:xfrm>
-            <a:off x="6361023" y="4754880"/>
-            <a:ext cx="2256967" cy="914400"/>
-          </a:xfrm>
-          <a:prstGeom prst="rect">
-            <a:avLst/>
-          </a:prstGeom>
-          <a:noFill/>
-        </p:spPr>
-        <p:txBody>
-          <a:bodyPr wrap="square" lIns="0" rIns="0" tIns="0" bIns="0" anchor="t">
-            <a:spAutoFit/>
-          </a:bodyPr>
-          <a:lstStyle/>
-          <a:p>
-            <a:pPr algn="l">
-              <a:lnSpc>
-                <a:spcPct val="112000"/>
-              </a:lnSpc>
-              <a:spcAft>
-                <a:spcPts val="400"/>
-              </a:spcAft>
-            </a:pPr>
-            <a:r>
-              <a:rPr sz="1150" b="1">
-                <a:solidFill>
-                  <a:srgbClr val="F5A623"/>
-                </a:solidFill>
-                <a:latin typeface="Segoe UI"/>
-              </a:rPr>
-              <a:t>Risk intelligence</a:t>
-            </a:r>
-          </a:p>
-          <a:p>
-            <a:pPr algn="l">
-              <a:lnSpc>
-                <a:spcPct val="116000"/>
-              </a:lnSpc>
-              <a:spcAft>
-                <a:spcPts val="0"/>
-              </a:spcAft>
-            </a:pPr>
-            <a:r>
-              <a:rPr sz="1000" b="0">
-                <a:solidFill>
-                  <a:srgbClr val="EAF0F7"/>
-                </a:solidFill>
-                <a:latin typeface="Segoe UI"/>
-              </a:rPr>
-              <a:t>The scored risk distribution carried into BI.</a:t>
-            </a:r>
-          </a:p>
-        </p:txBody>
-      </p:sp>
-      <p:sp>
-        <p:nvSpPr>
-          <p:cNvPr id="20" name="Rounded Rectangle 19"/>
-          <p:cNvSpPr/>
-          <p:nvPr/>
-        </p:nvSpPr>
-        <p:spPr>
-          <a:xfrm>
-            <a:off x="8983751" y="4608576"/>
-            <a:ext cx="2641015" cy="1188720"/>
-          </a:xfrm>
-          <a:prstGeom prst="roundRect">
-            <a:avLst>
-              <a:gd name="adj" fmla="val 8000"/>
-            </a:avLst>
-          </a:prstGeom>
-          <a:solidFill>
-            <a:srgbClr val="111A2C"/>
-          </a:solidFill>
-          <a:ln w="12700">
-            <a:solidFill>
-              <a:srgbClr val="223049"/>
-            </a:solidFill>
-          </a:ln>
-          <a:effectLst/>
-        </p:spPr>
-        <p:style>
-          <a:lnRef idx="1">
-            <a:schemeClr val="accent1"/>
-          </a:lnRef>
-          <a:fillRef idx="3">
-            <a:schemeClr val="accent1"/>
-          </a:fillRef>
-          <a:effectRef idx="2">
-            <a:schemeClr val="accent1"/>
-          </a:effectRef>
-          <a:fontRef idx="minor">
-            <a:schemeClr val="lt1"/>
-          </a:fontRef>
-        </p:style>
-        <p:txBody>
-          <a:bodyPr rtlCol="0" anchor="ctr"/>
-          <a:lstStyle/>
-          <a:p>
-            <a:pPr algn="ctr"/>
-          </a:p>
-        </p:txBody>
-      </p:sp>
-      <p:sp>
-        <p:nvSpPr>
-          <p:cNvPr id="21" name="Rectangle 20"/>
-          <p:cNvSpPr/>
-          <p:nvPr/>
-        </p:nvSpPr>
-        <p:spPr>
-          <a:xfrm>
-            <a:off x="8983751" y="4736592"/>
-            <a:ext cx="32004" cy="932688"/>
-          </a:xfrm>
-          <a:prstGeom prst="rect">
-            <a:avLst/>
-          </a:prstGeom>
-          <a:solidFill>
-            <a:srgbClr val="FF5C6C"/>
-          </a:solidFill>
-          <a:ln>
-            <a:noFill/>
-          </a:ln>
-          <a:effectLst/>
-        </p:spPr>
-        <p:style>
-          <a:lnRef idx="1">
-            <a:schemeClr val="accent1"/>
-          </a:lnRef>
-          <a:fillRef idx="3">
-            <a:schemeClr val="accent1"/>
-          </a:fillRef>
-          <a:effectRef idx="2">
-            <a:schemeClr val="accent1"/>
-          </a:effectRef>
-          <a:fontRef idx="minor">
-            <a:schemeClr val="lt1"/>
-          </a:fontRef>
-        </p:style>
-        <p:txBody>
-          <a:bodyPr rtlCol="0" anchor="ctr"/>
-          <a:lstStyle/>
-          <a:p>
-            <a:pPr algn="ctr"/>
-          </a:p>
-        </p:txBody>
-      </p:sp>
-      <p:sp>
-        <p:nvSpPr>
-          <p:cNvPr id="22" name="TextBox 21"/>
-          <p:cNvSpPr txBox="1"/>
-          <p:nvPr/>
-        </p:nvSpPr>
-        <p:spPr>
-          <a:xfrm>
-            <a:off x="9166631" y="4754880"/>
-            <a:ext cx="2256967" cy="914400"/>
-          </a:xfrm>
-          <a:prstGeom prst="rect">
-            <a:avLst/>
-          </a:prstGeom>
-          <a:noFill/>
-        </p:spPr>
-        <p:txBody>
-          <a:bodyPr wrap="square" lIns="0" rIns="0" tIns="0" bIns="0" anchor="t">
-            <a:spAutoFit/>
-          </a:bodyPr>
-          <a:lstStyle/>
-          <a:p>
-            <a:pPr algn="l">
-              <a:lnSpc>
-                <a:spcPct val="112000"/>
-              </a:lnSpc>
-              <a:spcAft>
-                <a:spcPts val="400"/>
-              </a:spcAft>
-            </a:pPr>
-            <a:r>
-              <a:rPr sz="1150" b="1">
-                <a:solidFill>
-                  <a:srgbClr val="FF5C6C"/>
-                </a:solidFill>
-                <a:latin typeface="Segoe UI"/>
-              </a:rPr>
-              <a:t>Retention strategy</a:t>
-            </a:r>
-          </a:p>
-          <a:p>
-            <a:pPr algn="l">
-              <a:lnSpc>
-                <a:spcPct val="116000"/>
-              </a:lnSpc>
-              <a:spcAft>
-                <a:spcPts val="0"/>
-              </a:spcAft>
-            </a:pPr>
-            <a:r>
-              <a:rPr sz="1000" b="0">
-                <a:solidFill>
-                  <a:srgbClr val="EAF0F7"/>
-                </a:solidFill>
-                <a:latin typeface="Segoe UI"/>
-              </a:rPr>
-              <a:t>Which actions are recommended, and to how many customers.</a:t>
-            </a:r>
-          </a:p>
-        </p:txBody>
-      </p:sp>
-      <p:sp>
-        <p:nvSpPr>
-          <p:cNvPr id="23" name="Rounded Rectangle 22"/>
-          <p:cNvSpPr/>
-          <p:nvPr/>
-        </p:nvSpPr>
-        <p:spPr>
-          <a:xfrm>
-            <a:off x="566928" y="5907024"/>
-            <a:ext cx="11057839" cy="310896"/>
-          </a:xfrm>
-          <a:prstGeom prst="roundRect">
-            <a:avLst>
-              <a:gd name="adj" fmla="val 8000"/>
-            </a:avLst>
-          </a:prstGeom>
-          <a:solidFill>
-            <a:srgbClr val="162136"/>
-          </a:solidFill>
-          <a:ln w="12700">
-            <a:solidFill>
-              <a:srgbClr val="4C8DFF"/>
-            </a:solidFill>
-          </a:ln>
-          <a:effectLst/>
-        </p:spPr>
-        <p:style>
-          <a:lnRef idx="1">
-            <a:schemeClr val="accent1"/>
-          </a:lnRef>
-          <a:fillRef idx="3">
-            <a:schemeClr val="accent1"/>
-          </a:fillRef>
-          <a:effectRef idx="2">
-            <a:schemeClr val="accent1"/>
-          </a:effectRef>
-          <a:fontRef idx="minor">
-            <a:schemeClr val="lt1"/>
-          </a:fontRef>
-        </p:style>
-        <p:txBody>
-          <a:bodyPr rtlCol="0" anchor="ctr"/>
-          <a:lstStyle/>
-          <a:p>
-            <a:pPr algn="ctr"/>
-          </a:p>
-        </p:txBody>
-      </p:sp>
-      <p:sp>
-        <p:nvSpPr>
-          <p:cNvPr id="24" name="TextBox 23"/>
-          <p:cNvSpPr txBox="1"/>
-          <p:nvPr/>
-        </p:nvSpPr>
-        <p:spPr>
-          <a:xfrm>
-            <a:off x="749808" y="5925312"/>
-            <a:ext cx="10692079" cy="274320"/>
-          </a:xfrm>
-          <a:prstGeom prst="rect">
-            <a:avLst/>
-          </a:prstGeom>
-          <a:noFill/>
-        </p:spPr>
-        <p:txBody>
-          <a:bodyPr wrap="square" lIns="0" rIns="0" tIns="0" bIns="0" anchor="ctr">
-            <a:spAutoFit/>
-          </a:bodyPr>
-          <a:lstStyle/>
-          <a:p>
-            <a:pPr algn="l">
-              <a:lnSpc>
-                <a:spcPct val="112000"/>
-              </a:lnSpc>
-              <a:spcAft>
-                <a:spcPts val="0"/>
-              </a:spcAft>
-            </a:pPr>
-            <a:r>
-              <a:rPr sz="1050" b="1" u="sng">
-                <a:solidFill>
-                  <a:srgbClr val="4C8DFF"/>
-                </a:solidFill>
-                <a:latin typeface="Consolas"/>
-                <a:hlinkClick r:id="rId4"/>
-              </a:rPr>
-              <a:t>OPEN THE EDITABLE POWER BI TEMPLATE (.PBIT)  ↗</a:t>
-            </a:r>
-          </a:p>
-        </p:txBody>
-      </p:sp>
-      <p:sp>
-        <p:nvSpPr>
-          <p:cNvPr id="25" name="Rectangle 24"/>
-          <p:cNvSpPr/>
-          <p:nvPr/>
-        </p:nvSpPr>
-        <p:spPr>
-          <a:xfrm>
-            <a:off x="566928" y="6309360"/>
-            <a:ext cx="743145" cy="43891"/>
-          </a:xfrm>
-          <a:prstGeom prst="rect">
-            <a:avLst/>
-          </a:prstGeom>
-          <a:solidFill>
-            <a:srgbClr val="223049"/>
-          </a:solidFill>
-          <a:ln>
-            <a:noFill/>
-          </a:ln>
-          <a:effectLst/>
-        </p:spPr>
-        <p:style>
-          <a:lnRef idx="1">
-            <a:schemeClr val="accent1"/>
-          </a:lnRef>
-          <a:fillRef idx="3">
-            <a:schemeClr val="accent1"/>
-          </a:fillRef>
-          <a:effectRef idx="2">
-            <a:schemeClr val="accent1"/>
-          </a:effectRef>
-          <a:fontRef idx="minor">
-            <a:schemeClr val="lt1"/>
-          </a:fontRef>
-        </p:style>
-        <p:txBody>
-          <a:bodyPr rtlCol="0" anchor="ctr"/>
-          <a:lstStyle/>
-          <a:p>
-            <a:pPr algn="ctr"/>
-          </a:p>
-        </p:txBody>
-      </p:sp>
-      <p:sp>
-        <p:nvSpPr>
-          <p:cNvPr id="26" name="Rectangle 25"/>
-          <p:cNvSpPr/>
-          <p:nvPr/>
-        </p:nvSpPr>
-        <p:spPr>
-          <a:xfrm>
-            <a:off x="1360365" y="6309360"/>
-            <a:ext cx="743145" cy="43891"/>
-          </a:xfrm>
-          <a:prstGeom prst="rect">
-            <a:avLst/>
-          </a:prstGeom>
-          <a:solidFill>
-            <a:srgbClr val="223049"/>
-          </a:solidFill>
-          <a:ln>
-            <a:noFill/>
-          </a:ln>
-          <a:effectLst/>
-        </p:spPr>
-        <p:style>
-          <a:lnRef idx="1">
-            <a:schemeClr val="accent1"/>
-          </a:lnRef>
-          <a:fillRef idx="3">
-            <a:schemeClr val="accent1"/>
-          </a:fillRef>
-          <a:effectRef idx="2">
-            <a:schemeClr val="accent1"/>
-          </a:effectRef>
-          <a:fontRef idx="minor">
-            <a:schemeClr val="lt1"/>
-          </a:fontRef>
-        </p:style>
-        <p:txBody>
-          <a:bodyPr rtlCol="0" anchor="ctr"/>
-          <a:lstStyle/>
-          <a:p>
-            <a:pPr algn="ctr"/>
-          </a:p>
-        </p:txBody>
-      </p:sp>
-      <p:sp>
-        <p:nvSpPr>
-          <p:cNvPr id="27" name="Rectangle 26"/>
-          <p:cNvSpPr/>
-          <p:nvPr/>
-        </p:nvSpPr>
-        <p:spPr>
-          <a:xfrm>
-            <a:off x="2153803" y="6309360"/>
-            <a:ext cx="743145" cy="43891"/>
-          </a:xfrm>
-          <a:prstGeom prst="rect">
-            <a:avLst/>
-          </a:prstGeom>
-          <a:solidFill>
-            <a:srgbClr val="223049"/>
-          </a:solidFill>
-          <a:ln>
-            <a:noFill/>
-          </a:ln>
-          <a:effectLst/>
-        </p:spPr>
-        <p:style>
-          <a:lnRef idx="1">
-            <a:schemeClr val="accent1"/>
-          </a:lnRef>
-          <a:fillRef idx="3">
-            <a:schemeClr val="accent1"/>
-          </a:fillRef>
-          <a:effectRef idx="2">
-            <a:schemeClr val="accent1"/>
-          </a:effectRef>
-          <a:fontRef idx="minor">
-            <a:schemeClr val="lt1"/>
-          </a:fontRef>
-        </p:style>
-        <p:txBody>
-          <a:bodyPr rtlCol="0" anchor="ctr"/>
-          <a:lstStyle/>
-          <a:p>
-            <a:pPr algn="ctr"/>
-          </a:p>
-        </p:txBody>
-      </p:sp>
-      <p:sp>
-        <p:nvSpPr>
-          <p:cNvPr id="28" name="Rectangle 27"/>
-          <p:cNvSpPr/>
-          <p:nvPr/>
-        </p:nvSpPr>
-        <p:spPr>
-          <a:xfrm>
-            <a:off x="2947241" y="6309360"/>
-            <a:ext cx="743145" cy="43891"/>
-          </a:xfrm>
-          <a:prstGeom prst="rect">
-            <a:avLst/>
-          </a:prstGeom>
-          <a:solidFill>
-            <a:srgbClr val="223049"/>
-          </a:solidFill>
-          <a:ln>
-            <a:noFill/>
-          </a:ln>
-          <a:effectLst/>
-        </p:spPr>
-        <p:style>
-          <a:lnRef idx="1">
-            <a:schemeClr val="accent1"/>
-          </a:lnRef>
-          <a:fillRef idx="3">
-            <a:schemeClr val="accent1"/>
-          </a:fillRef>
-          <a:effectRef idx="2">
-            <a:schemeClr val="accent1"/>
-          </a:effectRef>
-          <a:fontRef idx="minor">
-            <a:schemeClr val="lt1"/>
-          </a:fontRef>
-        </p:style>
-        <p:txBody>
-          <a:bodyPr rtlCol="0" anchor="ctr"/>
-          <a:lstStyle/>
-          <a:p>
-            <a:pPr algn="ctr"/>
-          </a:p>
-        </p:txBody>
-      </p:sp>
-      <p:sp>
-        <p:nvSpPr>
-          <p:cNvPr id="29" name="Rectangle 28"/>
-          <p:cNvSpPr/>
-          <p:nvPr/>
-        </p:nvSpPr>
-        <p:spPr>
-          <a:xfrm>
-            <a:off x="3740679" y="6309360"/>
-            <a:ext cx="743145" cy="43891"/>
-          </a:xfrm>
-          <a:prstGeom prst="rect">
-            <a:avLst/>
-          </a:prstGeom>
-          <a:solidFill>
-            <a:srgbClr val="223049"/>
-          </a:solidFill>
-          <a:ln>
-            <a:noFill/>
-          </a:ln>
-          <a:effectLst/>
-        </p:spPr>
-        <p:style>
-          <a:lnRef idx="1">
-            <a:schemeClr val="accent1"/>
-          </a:lnRef>
-          <a:fillRef idx="3">
-            <a:schemeClr val="accent1"/>
-          </a:fillRef>
-          <a:effectRef idx="2">
-            <a:schemeClr val="accent1"/>
-          </a:effectRef>
-          <a:fontRef idx="minor">
-            <a:schemeClr val="lt1"/>
-          </a:fontRef>
-        </p:style>
-        <p:txBody>
-          <a:bodyPr rtlCol="0" anchor="ctr"/>
-          <a:lstStyle/>
-          <a:p>
-            <a:pPr algn="ctr"/>
-          </a:p>
-        </p:txBody>
-      </p:sp>
-      <p:sp>
-        <p:nvSpPr>
-          <p:cNvPr id="30" name="Rectangle 29"/>
-          <p:cNvSpPr/>
-          <p:nvPr/>
-        </p:nvSpPr>
-        <p:spPr>
-          <a:xfrm>
-            <a:off x="4534117" y="6309360"/>
-            <a:ext cx="743145" cy="43891"/>
-          </a:xfrm>
-          <a:prstGeom prst="rect">
-            <a:avLst/>
-          </a:prstGeom>
-          <a:solidFill>
-            <a:srgbClr val="223049"/>
-          </a:solidFill>
-          <a:ln>
-            <a:noFill/>
-          </a:ln>
-          <a:effectLst/>
-        </p:spPr>
-        <p:style>
-          <a:lnRef idx="1">
-            <a:schemeClr val="accent1"/>
-          </a:lnRef>
-          <a:fillRef idx="3">
-            <a:schemeClr val="accent1"/>
-          </a:fillRef>
-          <a:effectRef idx="2">
-            <a:schemeClr val="accent1"/>
-          </a:effectRef>
-          <a:fontRef idx="minor">
-            <a:schemeClr val="lt1"/>
-          </a:fontRef>
-        </p:style>
-        <p:txBody>
-          <a:bodyPr rtlCol="0" anchor="ctr"/>
-          <a:lstStyle/>
-          <a:p>
-            <a:pPr algn="ctr"/>
-          </a:p>
-        </p:txBody>
-      </p:sp>
-      <p:sp>
-        <p:nvSpPr>
-          <p:cNvPr id="31" name="Rectangle 30"/>
-          <p:cNvSpPr/>
-          <p:nvPr/>
-        </p:nvSpPr>
-        <p:spPr>
-          <a:xfrm>
-            <a:off x="5327555" y="6309360"/>
-            <a:ext cx="743145" cy="43891"/>
-          </a:xfrm>
-          <a:prstGeom prst="rect">
-            <a:avLst/>
-          </a:prstGeom>
-          <a:solidFill>
-            <a:srgbClr val="223049"/>
-          </a:solidFill>
-          <a:ln>
-            <a:noFill/>
-          </a:ln>
-          <a:effectLst/>
-        </p:spPr>
-        <p:style>
-          <a:lnRef idx="1">
-            <a:schemeClr val="accent1"/>
-          </a:lnRef>
-          <a:fillRef idx="3">
-            <a:schemeClr val="accent1"/>
-          </a:fillRef>
-          <a:effectRef idx="2">
-            <a:schemeClr val="accent1"/>
-          </a:effectRef>
-          <a:fontRef idx="minor">
-            <a:schemeClr val="lt1"/>
-          </a:fontRef>
-        </p:style>
-        <p:txBody>
-          <a:bodyPr rtlCol="0" anchor="ctr"/>
-          <a:lstStyle/>
-          <a:p>
-            <a:pPr algn="ctr"/>
-          </a:p>
-        </p:txBody>
-      </p:sp>
-      <p:sp>
-        <p:nvSpPr>
-          <p:cNvPr id="32" name="Rectangle 31"/>
-          <p:cNvSpPr/>
-          <p:nvPr/>
-        </p:nvSpPr>
-        <p:spPr>
-          <a:xfrm>
-            <a:off x="6120993" y="6309360"/>
-            <a:ext cx="743145" cy="43891"/>
-          </a:xfrm>
-          <a:prstGeom prst="rect">
-            <a:avLst/>
-          </a:prstGeom>
-          <a:solidFill>
-            <a:srgbClr val="223049"/>
-          </a:solidFill>
-          <a:ln>
-            <a:noFill/>
-          </a:ln>
-          <a:effectLst/>
-        </p:spPr>
-        <p:style>
-          <a:lnRef idx="1">
-            <a:schemeClr val="accent1"/>
-          </a:lnRef>
-          <a:fillRef idx="3">
-            <a:schemeClr val="accent1"/>
-          </a:fillRef>
-          <a:effectRef idx="2">
-            <a:schemeClr val="accent1"/>
-          </a:effectRef>
-          <a:fontRef idx="minor">
-            <a:schemeClr val="lt1"/>
-          </a:fontRef>
-        </p:style>
-        <p:txBody>
-          <a:bodyPr rtlCol="0" anchor="ctr"/>
-          <a:lstStyle/>
-          <a:p>
-            <a:pPr algn="ctr"/>
-          </a:p>
-        </p:txBody>
-      </p:sp>
-      <p:sp>
-        <p:nvSpPr>
-          <p:cNvPr id="33" name="Rectangle 32"/>
-          <p:cNvSpPr/>
-          <p:nvPr/>
-        </p:nvSpPr>
-        <p:spPr>
-          <a:xfrm>
-            <a:off x="6914431" y="6309360"/>
-            <a:ext cx="743145" cy="43891"/>
-          </a:xfrm>
-          <a:prstGeom prst="rect">
-            <a:avLst/>
-          </a:prstGeom>
-          <a:solidFill>
-            <a:srgbClr val="223049"/>
-          </a:solidFill>
-          <a:ln>
-            <a:noFill/>
-          </a:ln>
-          <a:effectLst/>
-        </p:spPr>
-        <p:style>
-          <a:lnRef idx="1">
-            <a:schemeClr val="accent1"/>
-          </a:lnRef>
-          <a:fillRef idx="3">
-            <a:schemeClr val="accent1"/>
-          </a:fillRef>
-          <a:effectRef idx="2">
-            <a:schemeClr val="accent1"/>
-          </a:effectRef>
-          <a:fontRef idx="minor">
-            <a:schemeClr val="lt1"/>
-          </a:fontRef>
-        </p:style>
-        <p:txBody>
-          <a:bodyPr rtlCol="0" anchor="ctr"/>
-          <a:lstStyle/>
-          <a:p>
-            <a:pPr algn="ctr"/>
-          </a:p>
-        </p:txBody>
-      </p:sp>
-      <p:sp>
-        <p:nvSpPr>
-          <p:cNvPr id="34" name="Rectangle 33"/>
-          <p:cNvSpPr/>
-          <p:nvPr/>
-        </p:nvSpPr>
-        <p:spPr>
-          <a:xfrm>
-            <a:off x="7707869" y="6309360"/>
-            <a:ext cx="743145" cy="43891"/>
-          </a:xfrm>
-          <a:prstGeom prst="rect">
-            <a:avLst/>
-          </a:prstGeom>
-          <a:solidFill>
-            <a:srgbClr val="223049"/>
-          </a:solidFill>
-          <a:ln>
-            <a:noFill/>
-          </a:ln>
-          <a:effectLst/>
-        </p:spPr>
-        <p:style>
-          <a:lnRef idx="1">
-            <a:schemeClr val="accent1"/>
-          </a:lnRef>
-          <a:fillRef idx="3">
-            <a:schemeClr val="accent1"/>
-          </a:fillRef>
-          <a:effectRef idx="2">
-            <a:schemeClr val="accent1"/>
-          </a:effectRef>
-          <a:fontRef idx="minor">
-            <a:schemeClr val="lt1"/>
-          </a:fontRef>
-        </p:style>
-        <p:txBody>
-          <a:bodyPr rtlCol="0" anchor="ctr"/>
-          <a:lstStyle/>
-          <a:p>
-            <a:pPr algn="ctr"/>
-          </a:p>
-        </p:txBody>
-      </p:sp>
-      <p:sp>
-        <p:nvSpPr>
-          <p:cNvPr id="35" name="Rectangle 34"/>
-          <p:cNvSpPr/>
-          <p:nvPr/>
-        </p:nvSpPr>
-        <p:spPr>
-          <a:xfrm>
-            <a:off x="8501307" y="6309360"/>
-            <a:ext cx="743145" cy="43891"/>
-          </a:xfrm>
-          <a:prstGeom prst="rect">
-            <a:avLst/>
-          </a:prstGeom>
-          <a:solidFill>
-            <a:srgbClr val="223049"/>
-          </a:solidFill>
-          <a:ln>
-            <a:noFill/>
-          </a:ln>
-          <a:effectLst/>
-        </p:spPr>
-        <p:style>
-          <a:lnRef idx="1">
-            <a:schemeClr val="accent1"/>
-          </a:lnRef>
-          <a:fillRef idx="3">
-            <a:schemeClr val="accent1"/>
-          </a:fillRef>
-          <a:effectRef idx="2">
-            <a:schemeClr val="accent1"/>
-          </a:effectRef>
-          <a:fontRef idx="minor">
-            <a:schemeClr val="lt1"/>
-          </a:fontRef>
-        </p:style>
-        <p:txBody>
-          <a:bodyPr rtlCol="0" anchor="ctr"/>
-          <a:lstStyle/>
-          <a:p>
-            <a:pPr algn="ctr"/>
-          </a:p>
-        </p:txBody>
-      </p:sp>
-      <p:sp>
-        <p:nvSpPr>
-          <p:cNvPr id="36" name="Rectangle 35"/>
-          <p:cNvSpPr/>
-          <p:nvPr/>
-        </p:nvSpPr>
-        <p:spPr>
-          <a:xfrm>
-            <a:off x="9294745" y="6296558"/>
-            <a:ext cx="743145" cy="68580"/>
-          </a:xfrm>
-          <a:prstGeom prst="rect">
-            <a:avLst/>
-          </a:prstGeom>
-          <a:solidFill>
-            <a:srgbClr val="2FD8B4"/>
-          </a:solidFill>
-          <a:ln>
-            <a:noFill/>
-          </a:ln>
-          <a:effectLst/>
-        </p:spPr>
-        <p:style>
-          <a:lnRef idx="1">
-            <a:schemeClr val="accent1"/>
-          </a:lnRef>
-          <a:fillRef idx="3">
-            <a:schemeClr val="accent1"/>
-          </a:fillRef>
-          <a:effectRef idx="2">
-            <a:schemeClr val="accent1"/>
-          </a:effectRef>
-          <a:fontRef idx="minor">
-            <a:schemeClr val="lt1"/>
-          </a:fontRef>
-        </p:style>
-        <p:txBody>
-          <a:bodyPr rtlCol="0" anchor="ctr"/>
-          <a:lstStyle/>
-          <a:p>
-            <a:pPr algn="ctr"/>
-          </a:p>
-        </p:txBody>
-      </p:sp>
-      <p:sp>
-        <p:nvSpPr>
-          <p:cNvPr id="37" name="Rectangle 36"/>
-          <p:cNvSpPr/>
-          <p:nvPr/>
-        </p:nvSpPr>
-        <p:spPr>
-          <a:xfrm>
-            <a:off x="10088183" y="6309360"/>
-            <a:ext cx="743145" cy="43891"/>
-          </a:xfrm>
-          <a:prstGeom prst="rect">
-            <a:avLst/>
-          </a:prstGeom>
-          <a:solidFill>
-            <a:srgbClr val="223049"/>
-          </a:solidFill>
-          <a:ln>
-            <a:noFill/>
-          </a:ln>
-          <a:effectLst/>
-        </p:spPr>
-        <p:style>
-          <a:lnRef idx="1">
-            <a:schemeClr val="accent1"/>
-          </a:lnRef>
-          <a:fillRef idx="3">
-            <a:schemeClr val="accent1"/>
-          </a:fillRef>
-          <a:effectRef idx="2">
-            <a:schemeClr val="accent1"/>
-          </a:effectRef>
-          <a:fontRef idx="minor">
-            <a:schemeClr val="lt1"/>
-          </a:fontRef>
-        </p:style>
-        <p:txBody>
-          <a:bodyPr rtlCol="0" anchor="ctr"/>
-          <a:lstStyle/>
-          <a:p>
-            <a:pPr algn="ctr"/>
-          </a:p>
-        </p:txBody>
-      </p:sp>
-      <p:sp>
-        <p:nvSpPr>
-          <p:cNvPr id="38" name="Rectangle 37"/>
-          <p:cNvSpPr/>
-          <p:nvPr/>
-        </p:nvSpPr>
-        <p:spPr>
-          <a:xfrm>
-            <a:off x="10881621" y="6309360"/>
-            <a:ext cx="743145" cy="43891"/>
-          </a:xfrm>
-          <a:prstGeom prst="rect">
-            <a:avLst/>
-          </a:prstGeom>
-          <a:solidFill>
-            <a:srgbClr val="223049"/>
-          </a:solidFill>
-          <a:ln>
-            <a:noFill/>
-          </a:ln>
-          <a:effectLst/>
-        </p:spPr>
-        <p:style>
-          <a:lnRef idx="1">
-            <a:schemeClr val="accent1"/>
-          </a:lnRef>
-          <a:fillRef idx="3">
-            <a:schemeClr val="accent1"/>
-          </a:fillRef>
-          <a:effectRef idx="2">
-            <a:schemeClr val="accent1"/>
-          </a:effectRef>
-          <a:fontRef idx="minor">
-            <a:schemeClr val="lt1"/>
-          </a:fontRef>
-        </p:style>
-        <p:txBody>
-          <a:bodyPr rtlCol="0" anchor="ctr"/>
-          <a:lstStyle/>
-          <a:p>
-            <a:pPr algn="ctr"/>
-          </a:p>
-        </p:txBody>
-      </p:sp>
-      <p:sp>
-        <p:nvSpPr>
-          <p:cNvPr id="39" name="Rectangle 38"/>
-          <p:cNvSpPr/>
-          <p:nvPr/>
-        </p:nvSpPr>
-        <p:spPr>
-          <a:xfrm>
-            <a:off x="566928" y="6455664"/>
-            <a:ext cx="11057839" cy="9144"/>
-          </a:xfrm>
-          <a:prstGeom prst="rect">
-            <a:avLst/>
-          </a:prstGeom>
-          <a:solidFill>
-            <a:srgbClr val="223049"/>
-          </a:solidFill>
-          <a:ln>
-            <a:noFill/>
-          </a:ln>
-          <a:effectLst/>
-        </p:spPr>
-        <p:style>
-          <a:lnRef idx="1">
-            <a:schemeClr val="accent1"/>
-          </a:lnRef>
-          <a:fillRef idx="3">
-            <a:schemeClr val="accent1"/>
-          </a:fillRef>
-          <a:effectRef idx="2">
-            <a:schemeClr val="accent1"/>
-          </a:effectRef>
-          <a:fontRef idx="minor">
-            <a:schemeClr val="lt1"/>
-          </a:fontRef>
-        </p:style>
-        <p:txBody>
-          <a:bodyPr rtlCol="0" anchor="ctr"/>
-          <a:lstStyle/>
-          <a:p>
-            <a:pPr algn="ctr"/>
-          </a:p>
-        </p:txBody>
-      </p:sp>
-      <p:sp>
-        <p:nvSpPr>
-          <p:cNvPr id="40" name="TextBox 39"/>
-          <p:cNvSpPr txBox="1"/>
-          <p:nvPr/>
-        </p:nvSpPr>
-        <p:spPr>
-          <a:xfrm>
-            <a:off x="566928" y="6510528"/>
-            <a:ext cx="9509760" cy="219456"/>
-          </a:xfrm>
-          <a:prstGeom prst="rect">
-            <a:avLst/>
-          </a:prstGeom>
-          <a:noFill/>
-        </p:spPr>
-        <p:txBody>
-          <a:bodyPr wrap="square" lIns="0" rIns="0" tIns="0" bIns="0" anchor="t">
-            <a:spAutoFit/>
-          </a:bodyPr>
-          <a:lstStyle/>
-          <a:p>
-            <a:pPr algn="l">
-              <a:lnSpc>
-                <a:spcPct val="112000"/>
-              </a:lnSpc>
-              <a:spcAft>
-                <a:spcPts val="0"/>
-              </a:spcAft>
-            </a:pPr>
-            <a:r>
-              <a:rPr sz="900" b="0">
-                <a:solidFill>
-                  <a:srgbClr val="8CA0BE"/>
-                </a:solidFill>
-                <a:latin typeface="Segoe UI"/>
-              </a:rPr>
-              <a:t>RetainIQ · Signal Ops Console   ·   PHASE 12 · BUSINESS INTELLIGENCE</a:t>
-            </a:r>
-          </a:p>
-        </p:txBody>
-      </p:sp>
-      <p:sp>
-        <p:nvSpPr>
-          <p:cNvPr id="41" name="TextBox 40"/>
-          <p:cNvSpPr txBox="1"/>
-          <p:nvPr/>
-        </p:nvSpPr>
-        <p:spPr>
-          <a:xfrm>
-            <a:off x="10527487" y="6510528"/>
-            <a:ext cx="1097280" cy="219456"/>
-          </a:xfrm>
-          <a:prstGeom prst="rect">
-            <a:avLst/>
-          </a:prstGeom>
-          <a:noFill/>
-        </p:spPr>
-        <p:txBody>
-          <a:bodyPr wrap="square" lIns="0" rIns="0" tIns="0" bIns="0" anchor="t">
-            <a:spAutoFit/>
-          </a:bodyPr>
-          <a:lstStyle/>
-          <a:p>
-            <a:pPr algn="r">
-              <a:lnSpc>
-                <a:spcPct val="112000"/>
-              </a:lnSpc>
-              <a:spcAft>
-                <a:spcPts val="0"/>
-              </a:spcAft>
-            </a:pPr>
-            <a:r>
-              <a:rPr sz="900" b="0">
-                <a:solidFill>
-                  <a:srgbClr val="8CA0BE"/>
-                </a:solidFill>
-                <a:latin typeface="Consolas"/>
-              </a:rPr>
-              <a:t>15</a:t>
-            </a:r>
-          </a:p>
-        </p:txBody>
-      </p:sp>
-    </p:spTree>
-  </p:cSld>
-  <p:clrMapOvr>
-    <a:masterClrMapping/>
-  </p:clrMapOvr>
-</p:sld>
-</file>
-
-<file path=ppt/slides/slide16.xml><?xml version="1.0" encoding="utf-8"?>
-<p:sld xmlns:a="http://schemas.openxmlformats.org/drawingml/2006/main" xmlns:p="http://schemas.openxmlformats.org/presentationml/2006/main" xmlns:r="http://schemas.openxmlformats.org/officeDocument/2006/relationships">
-  <p:cSld>
-    <p:spTree>
-      <p:nvGrpSpPr>
-        <p:cNvPr id="1" name=""/>
-        <p:cNvGrpSpPr/>
-        <p:nvPr/>
-      </p:nvGrpSpPr>
-      <p:grpSpPr/>
-      <p:sp>
-        <p:nvSpPr>
-          <p:cNvPr id="2" name="Rectangle 1"/>
-          <p:cNvSpPr/>
-          <p:nvPr/>
-        </p:nvSpPr>
-        <p:spPr>
-          <a:xfrm>
-            <a:off x="0" y="0"/>
-            <a:ext cx="12191695" cy="6858000"/>
-          </a:xfrm>
-          <a:prstGeom prst="rect">
-            <a:avLst/>
-          </a:prstGeom>
-          <a:solidFill>
-            <a:srgbClr val="0A0F1C"/>
-          </a:solidFill>
-          <a:ln>
-            <a:noFill/>
-          </a:ln>
-          <a:effectLst/>
-        </p:spPr>
-        <p:style>
-          <a:lnRef idx="1">
-            <a:schemeClr val="accent1"/>
-          </a:lnRef>
-          <a:fillRef idx="3">
-            <a:schemeClr val="accent1"/>
-          </a:fillRef>
-          <a:effectRef idx="2">
-            <a:schemeClr val="accent1"/>
-          </a:effectRef>
-          <a:fontRef idx="minor">
-            <a:schemeClr val="lt1"/>
-          </a:fontRef>
-        </p:style>
-        <p:txBody>
-          <a:bodyPr rtlCol="0" anchor="ctr"/>
-          <a:lstStyle/>
-          <a:p>
-            <a:pPr algn="ctr"/>
-          </a:p>
-        </p:txBody>
-      </p:sp>
-      <p:sp>
-        <p:nvSpPr>
-          <p:cNvPr id="3" name="TextBox 2"/>
-          <p:cNvSpPr txBox="1"/>
-          <p:nvPr/>
-        </p:nvSpPr>
-        <p:spPr>
-          <a:xfrm>
-            <a:off x="566928" y="365760"/>
-            <a:ext cx="8229600" cy="237744"/>
-          </a:xfrm>
-          <a:prstGeom prst="rect">
-            <a:avLst/>
-          </a:prstGeom>
-          <a:noFill/>
-        </p:spPr>
-        <p:txBody>
-          <a:bodyPr wrap="square" lIns="0" rIns="0" tIns="0" bIns="0" anchor="t">
-            <a:spAutoFit/>
-          </a:bodyPr>
-          <a:lstStyle/>
-          <a:p>
-            <a:pPr algn="l">
-              <a:lnSpc>
-                <a:spcPct val="112000"/>
-              </a:lnSpc>
-              <a:spcAft>
-                <a:spcPts val="0"/>
-              </a:spcAft>
-            </a:pPr>
-            <a:r>
-              <a:rPr sz="1000" b="1">
-                <a:solidFill>
-                  <a:srgbClr val="2FD8B4"/>
-                </a:solidFill>
-                <a:latin typeface="Consolas"/>
-              </a:rPr>
-              <a:t>PHASE 13  ·  WEB APPLICATION</a:t>
-            </a:r>
-          </a:p>
-        </p:txBody>
-      </p:sp>
-      <p:sp>
-        <p:nvSpPr>
-          <p:cNvPr id="4" name="TextBox 3"/>
-          <p:cNvSpPr txBox="1"/>
-          <p:nvPr/>
-        </p:nvSpPr>
-        <p:spPr>
-          <a:xfrm>
-            <a:off x="566928" y="576072"/>
-            <a:ext cx="11057839" cy="475488"/>
-          </a:xfrm>
-          <a:prstGeom prst="rect">
-            <a:avLst/>
-          </a:prstGeom>
-          <a:noFill/>
-        </p:spPr>
-        <p:txBody>
-          <a:bodyPr wrap="square" lIns="0" rIns="0" tIns="0" bIns="0" anchor="t">
-            <a:spAutoFit/>
-          </a:bodyPr>
-          <a:lstStyle/>
-          <a:p>
-            <a:pPr algn="l">
-              <a:lnSpc>
-                <a:spcPct val="112000"/>
-              </a:lnSpc>
-              <a:spcAft>
-                <a:spcPts val="0"/>
-              </a:spcAft>
-            </a:pPr>
-            <a:r>
-              <a:rPr sz="2600" b="1">
-                <a:solidFill>
-                  <a:srgbClr val="EAF0F7"/>
-                </a:solidFill>
-                <a:latin typeface="Segoe UI"/>
-              </a:rPr>
-              <a:t>The product: a Signal Ops Console</a:t>
-            </a:r>
-          </a:p>
-        </p:txBody>
-      </p:sp>
-      <p:sp>
-        <p:nvSpPr>
-          <p:cNvPr id="5" name="TextBox 4"/>
-          <p:cNvSpPr txBox="1"/>
-          <p:nvPr/>
-        </p:nvSpPr>
-        <p:spPr>
-          <a:xfrm>
-            <a:off x="566928" y="1060704"/>
-            <a:ext cx="11057839" cy="274320"/>
-          </a:xfrm>
-          <a:prstGeom prst="rect">
-            <a:avLst/>
-          </a:prstGeom>
-          <a:noFill/>
-        </p:spPr>
-        <p:txBody>
-          <a:bodyPr wrap="square" lIns="0" rIns="0" tIns="0" bIns="0" anchor="t">
-            <a:spAutoFit/>
-          </a:bodyPr>
-          <a:lstStyle/>
-          <a:p>
-            <a:pPr algn="l">
-              <a:lnSpc>
-                <a:spcPct val="112000"/>
-              </a:lnSpc>
-              <a:spcAft>
-                <a:spcPts val="0"/>
-              </a:spcAft>
-            </a:pPr>
-            <a:r>
-              <a:rPr sz="1250" b="0">
-                <a:solidFill>
-                  <a:srgbClr val="8CA0BE"/>
-                </a:solidFill>
-                <a:latin typeface="Segoe UI"/>
-              </a:rPr>
-              <a:t>A working Flask application — bulk scoring, dashboard, private reports</a:t>
-            </a:r>
-          </a:p>
-        </p:txBody>
-      </p:sp>
-      <p:sp>
-        <p:nvSpPr>
-          <p:cNvPr id="6" name="Rectangle 5"/>
-          <p:cNvSpPr/>
-          <p:nvPr/>
-        </p:nvSpPr>
-        <p:spPr>
-          <a:xfrm>
-            <a:off x="566928" y="1371600"/>
-            <a:ext cx="11057839" cy="12801"/>
-          </a:xfrm>
-          <a:prstGeom prst="rect">
-            <a:avLst/>
-          </a:prstGeom>
-          <a:solidFill>
-            <a:srgbClr val="223049"/>
-          </a:solidFill>
-          <a:ln>
-            <a:noFill/>
-          </a:ln>
-          <a:effectLst/>
-        </p:spPr>
-        <p:style>
-          <a:lnRef idx="1">
-            <a:schemeClr val="accent1"/>
-          </a:lnRef>
-          <a:fillRef idx="3">
-            <a:schemeClr val="accent1"/>
-          </a:fillRef>
-          <a:effectRef idx="2">
-            <a:schemeClr val="accent1"/>
-          </a:effectRef>
-          <a:fontRef idx="minor">
-            <a:schemeClr val="lt1"/>
-          </a:fontRef>
-        </p:style>
-        <p:txBody>
-          <a:bodyPr rtlCol="0" anchor="ctr"/>
-          <a:lstStyle/>
-          <a:p>
-            <a:pPr algn="ctr"/>
-          </a:p>
-        </p:txBody>
-      </p:sp>
-      <p:pic>
-        <p:nvPicPr>
-          <p:cNvPr id="7" name="Picture 6" descr="06.prediction_dashboard.png"/>
-          <p:cNvPicPr>
-            <a:picLocks noChangeAspect="1"/>
-          </p:cNvPicPr>
-          <p:nvPr/>
-        </p:nvPicPr>
-        <p:blipFill>
-          <a:blip r:embed="rId2"/>
-          <a:stretch>
-            <a:fillRect/>
-          </a:stretch>
-        </p:blipFill>
-        <p:spPr>
-          <a:xfrm>
-            <a:off x="566928" y="1517904"/>
-            <a:ext cx="4644813" cy="3531648"/>
-          </a:xfrm>
-          <a:prstGeom prst="rect">
-            <a:avLst/>
-          </a:prstGeom>
-        </p:spPr>
-      </p:pic>
-      <p:pic>
-        <p:nvPicPr>
-          <p:cNvPr id="8" name="Picture 7" descr="04.Bulk_prediction.png"/>
-          <p:cNvPicPr>
-            <a:picLocks noChangeAspect="1"/>
-          </p:cNvPicPr>
-          <p:nvPr/>
-        </p:nvPicPr>
-        <p:blipFill>
-          <a:blip r:embed="rId3"/>
-          <a:stretch>
-            <a:fillRect/>
-          </a:stretch>
-        </p:blipFill>
-        <p:spPr>
-          <a:xfrm>
-            <a:off x="5412909" y="1517904"/>
-            <a:ext cx="6211857" cy="3531648"/>
-          </a:xfrm>
-          <a:prstGeom prst="rect">
-            <a:avLst/>
-          </a:prstGeom>
-        </p:spPr>
-      </p:pic>
-      <p:sp>
-        <p:nvSpPr>
-          <p:cNvPr id="9" name="Rounded Rectangle 8"/>
-          <p:cNvSpPr/>
-          <p:nvPr/>
-        </p:nvSpPr>
-        <p:spPr>
-          <a:xfrm>
-            <a:off x="566928" y="5193791"/>
-            <a:ext cx="11057839" cy="1024127"/>
-          </a:xfrm>
-          <a:prstGeom prst="roundRect">
-            <a:avLst>
-              <a:gd name="adj" fmla="val 8000"/>
-            </a:avLst>
-          </a:prstGeom>
-          <a:solidFill>
-            <a:srgbClr val="111A2C"/>
-          </a:solidFill>
-          <a:ln w="12700">
-            <a:solidFill>
-              <a:srgbClr val="223049"/>
-            </a:solidFill>
-          </a:ln>
-          <a:effectLst/>
-        </p:spPr>
-        <p:style>
-          <a:lnRef idx="1">
-            <a:schemeClr val="accent1"/>
-          </a:lnRef>
-          <a:fillRef idx="3">
-            <a:schemeClr val="accent1"/>
-          </a:fillRef>
-          <a:effectRef idx="2">
-            <a:schemeClr val="accent1"/>
-          </a:effectRef>
-          <a:fontRef idx="minor">
-            <a:schemeClr val="lt1"/>
-          </a:fontRef>
-        </p:style>
-        <p:txBody>
-          <a:bodyPr rtlCol="0" anchor="ctr"/>
-          <a:lstStyle/>
-          <a:p>
-            <a:pPr algn="ctr"/>
-          </a:p>
-        </p:txBody>
-      </p:sp>
-      <p:sp>
-        <p:nvSpPr>
-          <p:cNvPr id="10" name="TextBox 9"/>
-          <p:cNvSpPr txBox="1"/>
-          <p:nvPr/>
-        </p:nvSpPr>
-        <p:spPr>
-          <a:xfrm>
-            <a:off x="786384" y="5321807"/>
-            <a:ext cx="8570671" cy="786383"/>
-          </a:xfrm>
-          <a:prstGeom prst="rect">
-            <a:avLst/>
-          </a:prstGeom>
-          <a:noFill/>
-        </p:spPr>
-        <p:txBody>
-          <a:bodyPr wrap="square" lIns="0" rIns="0" tIns="0" bIns="0" anchor="t">
-            <a:spAutoFit/>
-          </a:bodyPr>
-          <a:lstStyle/>
-          <a:p>
-            <a:pPr algn="l">
-              <a:lnSpc>
-                <a:spcPct val="112000"/>
-              </a:lnSpc>
-              <a:spcAft>
-                <a:spcPts val="400"/>
-              </a:spcAft>
-            </a:pPr>
-            <a:r>
-              <a:rPr sz="980" b="1">
-                <a:solidFill>
-                  <a:srgbClr val="2FD8B4"/>
-                </a:solidFill>
-                <a:latin typeface="Consolas"/>
-              </a:rPr>
-              <a:t>WHAT A REVIEWER DOES</a:t>
-            </a:r>
-          </a:p>
-          <a:p>
-            <a:pPr algn="l">
-              <a:lnSpc>
-                <a:spcPct val="116000"/>
-              </a:lnSpc>
-              <a:spcAft>
-                <a:spcPts val="0"/>
-              </a:spcAft>
-            </a:pPr>
-            <a:r>
-              <a:rPr sz="1040" b="0">
-                <a:solidFill>
-                  <a:srgbClr val="EAF0F7"/>
-                </a:solidFill>
-                <a:latin typeface="Segoe UI"/>
-              </a:rPr>
-              <a:t>Upload a CSV  →  validate the file before scoring  →  score the whole portfolio
-Read churn rate, risk split and revenue at risk  →  drill into a customer  →  download a private report</a:t>
-            </a:r>
-          </a:p>
-        </p:txBody>
-      </p:sp>
-      <p:sp>
-        <p:nvSpPr>
-          <p:cNvPr id="11" name="TextBox 10"/>
-          <p:cNvSpPr txBox="1"/>
-          <p:nvPr/>
-        </p:nvSpPr>
-        <p:spPr>
-          <a:xfrm>
-            <a:off x="9613087" y="5321807"/>
-            <a:ext cx="2011680" cy="310896"/>
-          </a:xfrm>
-          <a:prstGeom prst="rect">
-            <a:avLst/>
-          </a:prstGeom>
-          <a:noFill/>
-        </p:spPr>
-        <p:txBody>
-          <a:bodyPr wrap="square" lIns="0" rIns="0" tIns="0" bIns="0" anchor="t">
-            <a:spAutoFit/>
-          </a:bodyPr>
-          <a:lstStyle/>
-          <a:p>
-            <a:pPr algn="r">
-              <a:lnSpc>
-                <a:spcPct val="112000"/>
-              </a:lnSpc>
-              <a:spcAft>
-                <a:spcPts val="0"/>
-              </a:spcAft>
-            </a:pPr>
-            <a:r>
-              <a:rPr sz="840" b="1">
-                <a:solidFill>
-                  <a:srgbClr val="8CA0BE"/>
-                </a:solidFill>
-                <a:latin typeface="Consolas"/>
-              </a:rPr>
-              <a:t>REPORTS ARE PRIVATE — SCOPED BY SIGNED COOKIE</a:t>
-            </a:r>
-          </a:p>
-        </p:txBody>
-      </p:sp>
-      <p:sp>
-        <p:nvSpPr>
-          <p:cNvPr id="12" name="Rectangle 11"/>
-          <p:cNvSpPr/>
-          <p:nvPr/>
-        </p:nvSpPr>
-        <p:spPr>
-          <a:xfrm>
-            <a:off x="566928" y="6309360"/>
-            <a:ext cx="743145" cy="43891"/>
-          </a:xfrm>
-          <a:prstGeom prst="rect">
-            <a:avLst/>
-          </a:prstGeom>
-          <a:solidFill>
-            <a:srgbClr val="223049"/>
-          </a:solidFill>
-          <a:ln>
-            <a:noFill/>
-          </a:ln>
-          <a:effectLst/>
-        </p:spPr>
-        <p:style>
-          <a:lnRef idx="1">
-            <a:schemeClr val="accent1"/>
-          </a:lnRef>
-          <a:fillRef idx="3">
-            <a:schemeClr val="accent1"/>
-          </a:fillRef>
-          <a:effectRef idx="2">
-            <a:schemeClr val="accent1"/>
-          </a:effectRef>
-          <a:fontRef idx="minor">
-            <a:schemeClr val="lt1"/>
-          </a:fontRef>
-        </p:style>
-        <p:txBody>
-          <a:bodyPr rtlCol="0" anchor="ctr"/>
-          <a:lstStyle/>
-          <a:p>
-            <a:pPr algn="ctr"/>
-          </a:p>
-        </p:txBody>
-      </p:sp>
-      <p:sp>
-        <p:nvSpPr>
-          <p:cNvPr id="13" name="Rectangle 12"/>
-          <p:cNvSpPr/>
-          <p:nvPr/>
-        </p:nvSpPr>
-        <p:spPr>
-          <a:xfrm>
-            <a:off x="1360365" y="6309360"/>
-            <a:ext cx="743145" cy="43891"/>
-          </a:xfrm>
-          <a:prstGeom prst="rect">
-            <a:avLst/>
-          </a:prstGeom>
-          <a:solidFill>
-            <a:srgbClr val="223049"/>
-          </a:solidFill>
-          <a:ln>
-            <a:noFill/>
-          </a:ln>
-          <a:effectLst/>
-        </p:spPr>
-        <p:style>
-          <a:lnRef idx="1">
-            <a:schemeClr val="accent1"/>
-          </a:lnRef>
-          <a:fillRef idx="3">
-            <a:schemeClr val="accent1"/>
-          </a:fillRef>
-          <a:effectRef idx="2">
-            <a:schemeClr val="accent1"/>
-          </a:effectRef>
-          <a:fontRef idx="minor">
-            <a:schemeClr val="lt1"/>
-          </a:fontRef>
-        </p:style>
-        <p:txBody>
-          <a:bodyPr rtlCol="0" anchor="ctr"/>
-          <a:lstStyle/>
-          <a:p>
-            <a:pPr algn="ctr"/>
-          </a:p>
-        </p:txBody>
-      </p:sp>
-      <p:sp>
-        <p:nvSpPr>
-          <p:cNvPr id="14" name="Rectangle 13"/>
-          <p:cNvSpPr/>
-          <p:nvPr/>
-        </p:nvSpPr>
-        <p:spPr>
-          <a:xfrm>
-            <a:off x="2153803" y="6309360"/>
-            <a:ext cx="743145" cy="43891"/>
-          </a:xfrm>
-          <a:prstGeom prst="rect">
-            <a:avLst/>
-          </a:prstGeom>
-          <a:solidFill>
-            <a:srgbClr val="223049"/>
-          </a:solidFill>
-          <a:ln>
-            <a:noFill/>
-          </a:ln>
-          <a:effectLst/>
-        </p:spPr>
-        <p:style>
-          <a:lnRef idx="1">
-            <a:schemeClr val="accent1"/>
-          </a:lnRef>
-          <a:fillRef idx="3">
-            <a:schemeClr val="accent1"/>
-          </a:fillRef>
-          <a:effectRef idx="2">
-            <a:schemeClr val="accent1"/>
-          </a:effectRef>
-          <a:fontRef idx="minor">
-            <a:schemeClr val="lt1"/>
-          </a:fontRef>
-        </p:style>
-        <p:txBody>
-          <a:bodyPr rtlCol="0" anchor="ctr"/>
-          <a:lstStyle/>
-          <a:p>
-            <a:pPr algn="ctr"/>
-          </a:p>
-        </p:txBody>
-      </p:sp>
-      <p:sp>
-        <p:nvSpPr>
-          <p:cNvPr id="15" name="Rectangle 14"/>
-          <p:cNvSpPr/>
-          <p:nvPr/>
-        </p:nvSpPr>
-        <p:spPr>
-          <a:xfrm>
-            <a:off x="2947241" y="6309360"/>
-            <a:ext cx="743145" cy="43891"/>
-          </a:xfrm>
-          <a:prstGeom prst="rect">
-            <a:avLst/>
-          </a:prstGeom>
-          <a:solidFill>
-            <a:srgbClr val="223049"/>
-          </a:solidFill>
-          <a:ln>
-            <a:noFill/>
-          </a:ln>
-          <a:effectLst/>
-        </p:spPr>
-        <p:style>
-          <a:lnRef idx="1">
-            <a:schemeClr val="accent1"/>
-          </a:lnRef>
-          <a:fillRef idx="3">
-            <a:schemeClr val="accent1"/>
-          </a:fillRef>
-          <a:effectRef idx="2">
-            <a:schemeClr val="accent1"/>
-          </a:effectRef>
-          <a:fontRef idx="minor">
-            <a:schemeClr val="lt1"/>
-          </a:fontRef>
-        </p:style>
-        <p:txBody>
-          <a:bodyPr rtlCol="0" anchor="ctr"/>
-          <a:lstStyle/>
-          <a:p>
-            <a:pPr algn="ctr"/>
-          </a:p>
-        </p:txBody>
-      </p:sp>
-      <p:sp>
-        <p:nvSpPr>
-          <p:cNvPr id="16" name="Rectangle 15"/>
-          <p:cNvSpPr/>
-          <p:nvPr/>
-        </p:nvSpPr>
-        <p:spPr>
-          <a:xfrm>
-            <a:off x="3740679" y="6309360"/>
-            <a:ext cx="743145" cy="43891"/>
-          </a:xfrm>
-          <a:prstGeom prst="rect">
-            <a:avLst/>
-          </a:prstGeom>
-          <a:solidFill>
-            <a:srgbClr val="223049"/>
-          </a:solidFill>
-          <a:ln>
-            <a:noFill/>
-          </a:ln>
-          <a:effectLst/>
-        </p:spPr>
-        <p:style>
-          <a:lnRef idx="1">
-            <a:schemeClr val="accent1"/>
-          </a:lnRef>
-          <a:fillRef idx="3">
-            <a:schemeClr val="accent1"/>
-          </a:fillRef>
-          <a:effectRef idx="2">
-            <a:schemeClr val="accent1"/>
-          </a:effectRef>
-          <a:fontRef idx="minor">
-            <a:schemeClr val="lt1"/>
-          </a:fontRef>
-        </p:style>
-        <p:txBody>
-          <a:bodyPr rtlCol="0" anchor="ctr"/>
-          <a:lstStyle/>
-          <a:p>
-            <a:pPr algn="ctr"/>
-          </a:p>
-        </p:txBody>
-      </p:sp>
-      <p:sp>
-        <p:nvSpPr>
-          <p:cNvPr id="17" name="Rectangle 16"/>
-          <p:cNvSpPr/>
-          <p:nvPr/>
-        </p:nvSpPr>
-        <p:spPr>
-          <a:xfrm>
-            <a:off x="4534117" y="6309360"/>
-            <a:ext cx="743145" cy="43891"/>
-          </a:xfrm>
-          <a:prstGeom prst="rect">
-            <a:avLst/>
-          </a:prstGeom>
-          <a:solidFill>
-            <a:srgbClr val="223049"/>
-          </a:solidFill>
-          <a:ln>
-            <a:noFill/>
-          </a:ln>
-          <a:effectLst/>
-        </p:spPr>
-        <p:style>
-          <a:lnRef idx="1">
-            <a:schemeClr val="accent1"/>
-          </a:lnRef>
-          <a:fillRef idx="3">
-            <a:schemeClr val="accent1"/>
-          </a:fillRef>
-          <a:effectRef idx="2">
-            <a:schemeClr val="accent1"/>
-          </a:effectRef>
-          <a:fontRef idx="minor">
-            <a:schemeClr val="lt1"/>
-          </a:fontRef>
-        </p:style>
-        <p:txBody>
-          <a:bodyPr rtlCol="0" anchor="ctr"/>
-          <a:lstStyle/>
-          <a:p>
-            <a:pPr algn="ctr"/>
-          </a:p>
-        </p:txBody>
-      </p:sp>
-      <p:sp>
-        <p:nvSpPr>
-          <p:cNvPr id="18" name="Rectangle 17"/>
-          <p:cNvSpPr/>
-          <p:nvPr/>
-        </p:nvSpPr>
-        <p:spPr>
-          <a:xfrm>
-            <a:off x="5327555" y="6309360"/>
-            <a:ext cx="743145" cy="43891"/>
-          </a:xfrm>
-          <a:prstGeom prst="rect">
-            <a:avLst/>
-          </a:prstGeom>
-          <a:solidFill>
-            <a:srgbClr val="223049"/>
-          </a:solidFill>
-          <a:ln>
-            <a:noFill/>
-          </a:ln>
-          <a:effectLst/>
-        </p:spPr>
-        <p:style>
-          <a:lnRef idx="1">
-            <a:schemeClr val="accent1"/>
-          </a:lnRef>
-          <a:fillRef idx="3">
-            <a:schemeClr val="accent1"/>
-          </a:fillRef>
-          <a:effectRef idx="2">
-            <a:schemeClr val="accent1"/>
-          </a:effectRef>
-          <a:fontRef idx="minor">
-            <a:schemeClr val="lt1"/>
-          </a:fontRef>
-        </p:style>
-        <p:txBody>
-          <a:bodyPr rtlCol="0" anchor="ctr"/>
-          <a:lstStyle/>
-          <a:p>
-            <a:pPr algn="ctr"/>
-          </a:p>
-        </p:txBody>
-      </p:sp>
-      <p:sp>
-        <p:nvSpPr>
-          <p:cNvPr id="19" name="Rectangle 18"/>
-          <p:cNvSpPr/>
-          <p:nvPr/>
-        </p:nvSpPr>
-        <p:spPr>
-          <a:xfrm>
-            <a:off x="6120993" y="6309360"/>
-            <a:ext cx="743145" cy="43891"/>
-          </a:xfrm>
-          <a:prstGeom prst="rect">
-            <a:avLst/>
-          </a:prstGeom>
-          <a:solidFill>
-            <a:srgbClr val="223049"/>
-          </a:solidFill>
-          <a:ln>
-            <a:noFill/>
-          </a:ln>
-          <a:effectLst/>
-        </p:spPr>
-        <p:style>
-          <a:lnRef idx="1">
-            <a:schemeClr val="accent1"/>
-          </a:lnRef>
-          <a:fillRef idx="3">
-            <a:schemeClr val="accent1"/>
-          </a:fillRef>
-          <a:effectRef idx="2">
-            <a:schemeClr val="accent1"/>
-          </a:effectRef>
-          <a:fontRef idx="minor">
-            <a:schemeClr val="lt1"/>
-          </a:fontRef>
-        </p:style>
-        <p:txBody>
-          <a:bodyPr rtlCol="0" anchor="ctr"/>
-          <a:lstStyle/>
-          <a:p>
-            <a:pPr algn="ctr"/>
-          </a:p>
-        </p:txBody>
-      </p:sp>
-      <p:sp>
-        <p:nvSpPr>
-          <p:cNvPr id="20" name="Rectangle 19"/>
-          <p:cNvSpPr/>
-          <p:nvPr/>
-        </p:nvSpPr>
-        <p:spPr>
-          <a:xfrm>
-            <a:off x="6914431" y="6309360"/>
-            <a:ext cx="743145" cy="43891"/>
-          </a:xfrm>
-          <a:prstGeom prst="rect">
-            <a:avLst/>
-          </a:prstGeom>
-          <a:solidFill>
-            <a:srgbClr val="223049"/>
-          </a:solidFill>
-          <a:ln>
-            <a:noFill/>
-          </a:ln>
-          <a:effectLst/>
-        </p:spPr>
-        <p:style>
-          <a:lnRef idx="1">
-            <a:schemeClr val="accent1"/>
-          </a:lnRef>
-          <a:fillRef idx="3">
-            <a:schemeClr val="accent1"/>
-          </a:fillRef>
-          <a:effectRef idx="2">
-            <a:schemeClr val="accent1"/>
-          </a:effectRef>
-          <a:fontRef idx="minor">
-            <a:schemeClr val="lt1"/>
-          </a:fontRef>
-        </p:style>
-        <p:txBody>
-          <a:bodyPr rtlCol="0" anchor="ctr"/>
-          <a:lstStyle/>
-          <a:p>
-            <a:pPr algn="ctr"/>
-          </a:p>
-        </p:txBody>
-      </p:sp>
-      <p:sp>
-        <p:nvSpPr>
-          <p:cNvPr id="21" name="Rectangle 20"/>
-          <p:cNvSpPr/>
-          <p:nvPr/>
-        </p:nvSpPr>
-        <p:spPr>
-          <a:xfrm>
-            <a:off x="7707869" y="6309360"/>
-            <a:ext cx="743145" cy="43891"/>
-          </a:xfrm>
-          <a:prstGeom prst="rect">
-            <a:avLst/>
-          </a:prstGeom>
-          <a:solidFill>
-            <a:srgbClr val="223049"/>
-          </a:solidFill>
-          <a:ln>
-            <a:noFill/>
-          </a:ln>
-          <a:effectLst/>
-        </p:spPr>
-        <p:style>
-          <a:lnRef idx="1">
-            <a:schemeClr val="accent1"/>
-          </a:lnRef>
-          <a:fillRef idx="3">
-            <a:schemeClr val="accent1"/>
-          </a:fillRef>
-          <a:effectRef idx="2">
-            <a:schemeClr val="accent1"/>
-          </a:effectRef>
-          <a:fontRef idx="minor">
-            <a:schemeClr val="lt1"/>
-          </a:fontRef>
-        </p:style>
-        <p:txBody>
-          <a:bodyPr rtlCol="0" anchor="ctr"/>
-          <a:lstStyle/>
-          <a:p>
-            <a:pPr algn="ctr"/>
-          </a:p>
-        </p:txBody>
-      </p:sp>
-      <p:sp>
-        <p:nvSpPr>
-          <p:cNvPr id="22" name="Rectangle 21"/>
-          <p:cNvSpPr/>
-          <p:nvPr/>
-        </p:nvSpPr>
-        <p:spPr>
-          <a:xfrm>
-            <a:off x="8501307" y="6309360"/>
-            <a:ext cx="743145" cy="43891"/>
-          </a:xfrm>
-          <a:prstGeom prst="rect">
-            <a:avLst/>
-          </a:prstGeom>
-          <a:solidFill>
-            <a:srgbClr val="223049"/>
-          </a:solidFill>
-          <a:ln>
-            <a:noFill/>
-          </a:ln>
-          <a:effectLst/>
-        </p:spPr>
-        <p:style>
-          <a:lnRef idx="1">
-            <a:schemeClr val="accent1"/>
-          </a:lnRef>
-          <a:fillRef idx="3">
-            <a:schemeClr val="accent1"/>
-          </a:fillRef>
-          <a:effectRef idx="2">
-            <a:schemeClr val="accent1"/>
-          </a:effectRef>
-          <a:fontRef idx="minor">
-            <a:schemeClr val="lt1"/>
-          </a:fontRef>
-        </p:style>
-        <p:txBody>
-          <a:bodyPr rtlCol="0" anchor="ctr"/>
-          <a:lstStyle/>
-          <a:p>
-            <a:pPr algn="ctr"/>
-          </a:p>
-        </p:txBody>
-      </p:sp>
-      <p:sp>
-        <p:nvSpPr>
-          <p:cNvPr id="23" name="Rectangle 22"/>
-          <p:cNvSpPr/>
-          <p:nvPr/>
-        </p:nvSpPr>
-        <p:spPr>
-          <a:xfrm>
-            <a:off x="9294745" y="6309360"/>
-            <a:ext cx="743145" cy="43891"/>
-          </a:xfrm>
-          <a:prstGeom prst="rect">
-            <a:avLst/>
-          </a:prstGeom>
-          <a:solidFill>
-            <a:srgbClr val="223049"/>
-          </a:solidFill>
-          <a:ln>
-            <a:noFill/>
-          </a:ln>
-          <a:effectLst/>
-        </p:spPr>
-        <p:style>
-          <a:lnRef idx="1">
-            <a:schemeClr val="accent1"/>
-          </a:lnRef>
-          <a:fillRef idx="3">
-            <a:schemeClr val="accent1"/>
-          </a:fillRef>
-          <a:effectRef idx="2">
-            <a:schemeClr val="accent1"/>
-          </a:effectRef>
-          <a:fontRef idx="minor">
-            <a:schemeClr val="lt1"/>
-          </a:fontRef>
-        </p:style>
-        <p:txBody>
-          <a:bodyPr rtlCol="0" anchor="ctr"/>
-          <a:lstStyle/>
-          <a:p>
-            <a:pPr algn="ctr"/>
-          </a:p>
-        </p:txBody>
-      </p:sp>
-      <p:sp>
-        <p:nvSpPr>
-          <p:cNvPr id="24" name="Rectangle 23"/>
-          <p:cNvSpPr/>
-          <p:nvPr/>
-        </p:nvSpPr>
-        <p:spPr>
-          <a:xfrm>
-            <a:off x="10088183" y="6296558"/>
-            <a:ext cx="743145" cy="68580"/>
-          </a:xfrm>
-          <a:prstGeom prst="rect">
-            <a:avLst/>
-          </a:prstGeom>
-          <a:solidFill>
-            <a:srgbClr val="2FD8B4"/>
-          </a:solidFill>
-          <a:ln>
-            <a:noFill/>
-          </a:ln>
-          <a:effectLst/>
-        </p:spPr>
-        <p:style>
-          <a:lnRef idx="1">
-            <a:schemeClr val="accent1"/>
-          </a:lnRef>
-          <a:fillRef idx="3">
-            <a:schemeClr val="accent1"/>
-          </a:fillRef>
-          <a:effectRef idx="2">
-            <a:schemeClr val="accent1"/>
-          </a:effectRef>
-          <a:fontRef idx="minor">
-            <a:schemeClr val="lt1"/>
-          </a:fontRef>
-        </p:style>
-        <p:txBody>
-          <a:bodyPr rtlCol="0" anchor="ctr"/>
-          <a:lstStyle/>
-          <a:p>
-            <a:pPr algn="ctr"/>
-          </a:p>
-        </p:txBody>
-      </p:sp>
-      <p:sp>
-        <p:nvSpPr>
-          <p:cNvPr id="25" name="Rectangle 24"/>
-          <p:cNvSpPr/>
-          <p:nvPr/>
-        </p:nvSpPr>
-        <p:spPr>
-          <a:xfrm>
-            <a:off x="10881621" y="6309360"/>
-            <a:ext cx="743145" cy="43891"/>
-          </a:xfrm>
-          <a:prstGeom prst="rect">
-            <a:avLst/>
-          </a:prstGeom>
-          <a:solidFill>
-            <a:srgbClr val="223049"/>
-          </a:solidFill>
-          <a:ln>
-            <a:noFill/>
-          </a:ln>
-          <a:effectLst/>
-        </p:spPr>
-        <p:style>
-          <a:lnRef idx="1">
-            <a:schemeClr val="accent1"/>
-          </a:lnRef>
-          <a:fillRef idx="3">
-            <a:schemeClr val="accent1"/>
-          </a:fillRef>
-          <a:effectRef idx="2">
-            <a:schemeClr val="accent1"/>
-          </a:effectRef>
-          <a:fontRef idx="minor">
-            <a:schemeClr val="lt1"/>
-          </a:fontRef>
-        </p:style>
-        <p:txBody>
-          <a:bodyPr rtlCol="0" anchor="ctr"/>
-          <a:lstStyle/>
-          <a:p>
-            <a:pPr algn="ctr"/>
-          </a:p>
-        </p:txBody>
-      </p:sp>
-      <p:sp>
-        <p:nvSpPr>
-          <p:cNvPr id="26" name="Rectangle 25"/>
-          <p:cNvSpPr/>
-          <p:nvPr/>
-        </p:nvSpPr>
-        <p:spPr>
-          <a:xfrm>
-            <a:off x="566928" y="6455664"/>
-            <a:ext cx="11057839" cy="9144"/>
-          </a:xfrm>
-          <a:prstGeom prst="rect">
-            <a:avLst/>
-          </a:prstGeom>
-          <a:solidFill>
-            <a:srgbClr val="223049"/>
-          </a:solidFill>
-          <a:ln>
-            <a:noFill/>
-          </a:ln>
-          <a:effectLst/>
-        </p:spPr>
-        <p:style>
-          <a:lnRef idx="1">
-            <a:schemeClr val="accent1"/>
-          </a:lnRef>
-          <a:fillRef idx="3">
-            <a:schemeClr val="accent1"/>
-          </a:fillRef>
-          <a:effectRef idx="2">
-            <a:schemeClr val="accent1"/>
-          </a:effectRef>
-          <a:fontRef idx="minor">
-            <a:schemeClr val="lt1"/>
-          </a:fontRef>
-        </p:style>
-        <p:txBody>
-          <a:bodyPr rtlCol="0" anchor="ctr"/>
-          <a:lstStyle/>
-          <a:p>
-            <a:pPr algn="ctr"/>
-          </a:p>
-        </p:txBody>
-      </p:sp>
-      <p:sp>
-        <p:nvSpPr>
-          <p:cNvPr id="27" name="TextBox 26"/>
-          <p:cNvSpPr txBox="1"/>
-          <p:nvPr/>
-        </p:nvSpPr>
-        <p:spPr>
-          <a:xfrm>
-            <a:off x="566928" y="6510528"/>
-            <a:ext cx="9509760" cy="219456"/>
-          </a:xfrm>
-          <a:prstGeom prst="rect">
-            <a:avLst/>
-          </a:prstGeom>
-          <a:noFill/>
-        </p:spPr>
-        <p:txBody>
-          <a:bodyPr wrap="square" lIns="0" rIns="0" tIns="0" bIns="0" anchor="t">
-            <a:spAutoFit/>
-          </a:bodyPr>
-          <a:lstStyle/>
-          <a:p>
-            <a:pPr algn="l">
-              <a:lnSpc>
-                <a:spcPct val="112000"/>
-              </a:lnSpc>
-              <a:spcAft>
-                <a:spcPts val="0"/>
-              </a:spcAft>
-            </a:pPr>
-            <a:r>
-              <a:rPr sz="900" b="0">
-                <a:solidFill>
-                  <a:srgbClr val="8CA0BE"/>
-                </a:solidFill>
-                <a:latin typeface="Segoe UI"/>
-              </a:rPr>
-              <a:t>RetainIQ · Signal Ops Console   ·   PHASE 13 · WEB APPLICATION</a:t>
-            </a:r>
-          </a:p>
-        </p:txBody>
-      </p:sp>
-      <p:sp>
-        <p:nvSpPr>
-          <p:cNvPr id="28" name="TextBox 27"/>
-          <p:cNvSpPr txBox="1"/>
-          <p:nvPr/>
-        </p:nvSpPr>
-        <p:spPr>
-          <a:xfrm>
-            <a:off x="10527487" y="6510528"/>
-            <a:ext cx="1097280" cy="219456"/>
-          </a:xfrm>
-          <a:prstGeom prst="rect">
-            <a:avLst/>
-          </a:prstGeom>
-          <a:noFill/>
-        </p:spPr>
-        <p:txBody>
-          <a:bodyPr wrap="square" lIns="0" rIns="0" tIns="0" bIns="0" anchor="t">
-            <a:spAutoFit/>
-          </a:bodyPr>
-          <a:lstStyle/>
-          <a:p>
-            <a:pPr algn="r">
-              <a:lnSpc>
-                <a:spcPct val="112000"/>
-              </a:lnSpc>
-              <a:spcAft>
-                <a:spcPts val="0"/>
-              </a:spcAft>
-            </a:pPr>
-            <a:r>
-              <a:rPr sz="900" b="0">
-                <a:solidFill>
-                  <a:srgbClr val="8CA0BE"/>
-                </a:solidFill>
-                <a:latin typeface="Consolas"/>
-              </a:rPr>
-              <a:t>16</a:t>
             </a:r>
           </a:p>
         </p:txBody>

--- a/presentation/RetainIQ_Project_Review.pptx
+++ b/presentation/RetainIQ_Project_Review.pptx
@@ -16,6 +16,11 @@
     <p:sldId id="264" r:id="rId16"/>
     <p:sldId id="265" r:id="rId17"/>
     <p:sldId id="266" r:id="rId18"/>
+    <p:sldId id="267" r:id="rId19"/>
+    <p:sldId id="268" r:id="rId20"/>
+    <p:sldId id="269" r:id="rId21"/>
+    <p:sldId id="270" r:id="rId22"/>
+    <p:sldId id="271" r:id="rId23"/>
   </p:sldIdLst>
   <p:sldSz cx="12191695" cy="6858000" type="screen4x3"/>
   <p:notesSz cx="6858000" cy="9144000"/>
@@ -784,6 +789,491 @@
 </p:notes>
 </file>
 
+<file path=ppt/notesSlides/notesSlide12.xml><?xml version="1.0" encoding="utf-8"?>
+<p:notes xmlns:a="http://schemas.openxmlformats.org/drawingml/2006/main" xmlns:p="http://schemas.openxmlformats.org/presentationml/2006/main" xmlns:r="http://schemas.openxmlformats.org/officeDocument/2006/relationships">
+  <p:cSld>
+    <p:spTree>
+      <p:nvGrpSpPr>
+        <p:cNvPr id="1" name=""/>
+        <p:cNvGrpSpPr/>
+        <p:nvPr/>
+      </p:nvGrpSpPr>
+      <p:grpSpPr>
+        <a:xfrm>
+          <a:off x="0" y="0"/>
+          <a:ext cx="0" cy="0"/>
+          <a:chOff x="0" y="0"/>
+          <a:chExt cx="0" cy="0"/>
+        </a:xfrm>
+      </p:grpSpPr>
+      <p:sp>
+        <p:nvSpPr>
+          <p:cNvPr id="2" name="Slide Image Placeholder 1"/>
+          <p:cNvSpPr>
+            <a:spLocks noGrp="1"/>
+          </p:cNvSpPr>
+          <p:nvPr>
+            <p:ph type="sldImg" idx="2"/>
+          </p:nvPr>
+        </p:nvSpPr>
+        <p:spPr/>
+      </p:sp>
+      <p:sp>
+        <p:nvSpPr>
+          <p:cNvPr id="3" name="Notes Placeholder 2"/>
+          <p:cNvSpPr>
+            <a:spLocks noGrp="1"/>
+          </p:cNvSpPr>
+          <p:nvPr>
+            <p:ph type="body" idx="3" sz="quarter"/>
+          </p:nvPr>
+        </p:nvSpPr>
+        <p:spPr/>
+        <p:txBody>
+          <a:bodyPr/>
+          <a:lstStyle/>
+          <a:p>
+            <a:r>
+              <a:t>(7:05–7:40) Left chart: "this is who the high-risk band is — every one of them is</a:t>
+            </a:r>
+          </a:p>
+          <a:p>
+            <a:r>
+              <a:t>month-to-month, 91% are on fiber optic, 95% have no online security, and they</a:t>
+            </a:r>
+          </a:p>
+          <a:p>
+            <a:r>
+              <a:t>average under ten months of tenure."</a:t>
+            </a:r>
+          </a:p>
+          <a:p>
+            <a:r>
+              <a:t>Right: "and for a single customer the app names which of those factors pushed</a:t>
+            </a:r>
+          </a:p>
+          <a:p>
+            <a:r>
+              <a:t>this particular score."</a:t>
+            </a:r>
+          </a:p>
+          <a:p>
+            <a:r>
+              <a:t>If asked about SHAP: "I ran the SHAP analysis during experimentation; the</a:t>
+            </a:r>
+          </a:p>
+          <a:p>
+            <a:r>
+              <a:t>deployed model is linear, so I explain it with coefficients — same information,</a:t>
+            </a:r>
+          </a:p>
+          <a:p>
+            <a:r>
+              <a:t>no runtime cost." Do not overclaim here.</a:t>
+            </a:r>
+          </a:p>
+        </p:txBody>
+      </p:sp>
+      <p:sp>
+        <p:nvSpPr>
+          <p:cNvPr id="4" name="Slide Number Placeholder 3"/>
+          <p:cNvSpPr>
+            <a:spLocks noGrp="1"/>
+          </p:cNvSpPr>
+          <p:nvPr>
+            <p:ph type="sldNum" idx="5" sz="quarter"/>
+          </p:nvPr>
+        </p:nvSpPr>
+        <p:spPr/>
+      </p:sp>
+    </p:spTree>
+  </p:cSld>
+  <p:clrMapOvr>
+    <a:masterClrMapping/>
+  </p:clrMapOvr>
+</p:notes>
+</file>
+
+<file path=ppt/notesSlides/notesSlide13.xml><?xml version="1.0" encoding="utf-8"?>
+<p:notes xmlns:a="http://schemas.openxmlformats.org/drawingml/2006/main" xmlns:p="http://schemas.openxmlformats.org/presentationml/2006/main" xmlns:r="http://schemas.openxmlformats.org/officeDocument/2006/relationships">
+  <p:cSld>
+    <p:spTree>
+      <p:nvGrpSpPr>
+        <p:cNvPr id="1" name=""/>
+        <p:cNvGrpSpPr/>
+        <p:nvPr/>
+      </p:nvGrpSpPr>
+      <p:grpSpPr>
+        <a:xfrm>
+          <a:off x="0" y="0"/>
+          <a:ext cx="0" cy="0"/>
+          <a:chOff x="0" y="0"/>
+          <a:chExt cx="0" cy="0"/>
+        </a:xfrm>
+      </p:grpSpPr>
+      <p:sp>
+        <p:nvSpPr>
+          <p:cNvPr id="2" name="Slide Image Placeholder 1"/>
+          <p:cNvSpPr>
+            <a:spLocks noGrp="1"/>
+          </p:cNvSpPr>
+          <p:nvPr>
+            <p:ph type="sldImg" idx="2"/>
+          </p:nvPr>
+        </p:nvSpPr>
+        <p:spPr/>
+      </p:sp>
+      <p:sp>
+        <p:nvSpPr>
+          <p:cNvPr id="3" name="Notes Placeholder 2"/>
+          <p:cNvSpPr>
+            <a:spLocks noGrp="1"/>
+          </p:cNvSpPr>
+          <p:nvPr>
+            <p:ph type="body" idx="3" sz="quarter"/>
+          </p:nvPr>
+        </p:nvSpPr>
+        <p:spPr/>
+        <p:txBody>
+          <a:bodyPr/>
+          <a:lstStyle/>
+          <a:p>
+            <a:r>
+              <a:t>(7:40–8:15) "A probability isn't something a retention agent can act on, so I cut</a:t>
+            </a:r>
+          </a:p>
+          <a:p>
+            <a:r>
+              <a:t>it into three bands."</a:t>
+            </a:r>
+          </a:p>
+          <a:p>
+            <a:r>
+              <a:t>Then the validation, which is the point of the slide: "I checked the bands against</a:t>
+            </a:r>
+          </a:p>
+          <a:p>
+            <a:r>
+              <a:t>the real churn labels. Low risk actually churns 9.5%, medium 42%, high 73%. The</a:t>
+            </a:r>
+          </a:p>
+          <a:p>
+            <a:r>
+              <a:t>band is a genuine ordering of risk, not a cosmetic split."</a:t>
+            </a:r>
+          </a:p>
+          <a:p>
+            <a:r>
+              <a:t>Close operationally: "the team starts with 1,135 customers instead of 7,043."</a:t>
+            </a:r>
+          </a:p>
+        </p:txBody>
+      </p:sp>
+      <p:sp>
+        <p:nvSpPr>
+          <p:cNvPr id="4" name="Slide Number Placeholder 3"/>
+          <p:cNvSpPr>
+            <a:spLocks noGrp="1"/>
+          </p:cNvSpPr>
+          <p:nvPr>
+            <p:ph type="sldNum" idx="5" sz="quarter"/>
+          </p:nvPr>
+        </p:nvSpPr>
+        <p:spPr/>
+      </p:sp>
+    </p:spTree>
+  </p:cSld>
+  <p:clrMapOvr>
+    <a:masterClrMapping/>
+  </p:clrMapOvr>
+</p:notes>
+</file>
+
+<file path=ppt/notesSlides/notesSlide14.xml><?xml version="1.0" encoding="utf-8"?>
+<p:notes xmlns:a="http://schemas.openxmlformats.org/drawingml/2006/main" xmlns:p="http://schemas.openxmlformats.org/presentationml/2006/main" xmlns:r="http://schemas.openxmlformats.org/officeDocument/2006/relationships">
+  <p:cSld>
+    <p:spTree>
+      <p:nvGrpSpPr>
+        <p:cNvPr id="1" name=""/>
+        <p:cNvGrpSpPr/>
+        <p:nvPr/>
+      </p:nvGrpSpPr>
+      <p:grpSpPr>
+        <a:xfrm>
+          <a:off x="0" y="0"/>
+          <a:ext cx="0" cy="0"/>
+          <a:chOff x="0" y="0"/>
+          <a:chExt cx="0" cy="0"/>
+        </a:xfrm>
+      </p:grpSpPr>
+      <p:sp>
+        <p:nvSpPr>
+          <p:cNvPr id="2" name="Slide Image Placeholder 1"/>
+          <p:cNvSpPr>
+            <a:spLocks noGrp="1"/>
+          </p:cNvSpPr>
+          <p:nvPr>
+            <p:ph type="sldImg" idx="2"/>
+          </p:nvPr>
+        </p:nvSpPr>
+        <p:spPr/>
+      </p:sp>
+      <p:sp>
+        <p:nvSpPr>
+          <p:cNvPr id="3" name="Notes Placeholder 2"/>
+          <p:cNvSpPr>
+            <a:spLocks noGrp="1"/>
+          </p:cNvSpPr>
+          <p:nvPr>
+            <p:ph type="body" idx="3" sz="quarter"/>
+          </p:nvPr>
+        </p:nvSpPr>
+        <p:spPr/>
+        <p:txBody>
+          <a:bodyPr/>
+          <a:lstStyle/>
+          <a:p>
+            <a:r>
+              <a:t>(8:15–8:50) "Prediction alone doesn't retain anyone."</a:t>
+            </a:r>
+          </a:p>
+          <a:p>
+            <a:r>
+              <a:t>Show the offer list — note the biggest group is a contract-upgrade nudge, which</a:t>
+            </a:r>
+          </a:p>
+          <a:p>
+            <a:r>
+              <a:t>follows directly from the Phase 04 finding about month-to-month risk.</a:t>
+            </a:r>
+          </a:p>
+          <a:p>
+            <a:r>
+              <a:t>Then be precise about money: "this is monthly revenue at risk — exposure, $92,539</a:t>
+            </a:r>
+          </a:p>
+          <a:p>
+            <a:r>
+              <a:t>a month sitting in the high-risk band. I deliberately do not call it savings."</a:t>
+            </a:r>
+          </a:p>
+        </p:txBody>
+      </p:sp>
+      <p:sp>
+        <p:nvSpPr>
+          <p:cNvPr id="4" name="Slide Number Placeholder 3"/>
+          <p:cNvSpPr>
+            <a:spLocks noGrp="1"/>
+          </p:cNvSpPr>
+          <p:nvPr>
+            <p:ph type="sldNum" idx="5" sz="quarter"/>
+          </p:nvPr>
+        </p:nvSpPr>
+        <p:spPr/>
+      </p:sp>
+    </p:spTree>
+  </p:cSld>
+  <p:clrMapOvr>
+    <a:masterClrMapping/>
+  </p:clrMapOvr>
+</p:notes>
+</file>
+
+<file path=ppt/notesSlides/notesSlide15.xml><?xml version="1.0" encoding="utf-8"?>
+<p:notes xmlns:a="http://schemas.openxmlformats.org/drawingml/2006/main" xmlns:p="http://schemas.openxmlformats.org/presentationml/2006/main" xmlns:r="http://schemas.openxmlformats.org/officeDocument/2006/relationships">
+  <p:cSld>
+    <p:spTree>
+      <p:nvGrpSpPr>
+        <p:cNvPr id="1" name=""/>
+        <p:cNvGrpSpPr/>
+        <p:nvPr/>
+      </p:nvGrpSpPr>
+      <p:grpSpPr>
+        <a:xfrm>
+          <a:off x="0" y="0"/>
+          <a:ext cx="0" cy="0"/>
+          <a:chOff x="0" y="0"/>
+          <a:chExt cx="0" cy="0"/>
+        </a:xfrm>
+      </p:grpSpPr>
+      <p:sp>
+        <p:nvSpPr>
+          <p:cNvPr id="2" name="Slide Image Placeholder 1"/>
+          <p:cNvSpPr>
+            <a:spLocks noGrp="1"/>
+          </p:cNvSpPr>
+          <p:nvPr>
+            <p:ph type="sldImg" idx="2"/>
+          </p:nvPr>
+        </p:nvSpPr>
+        <p:spPr/>
+      </p:sp>
+      <p:sp>
+        <p:nvSpPr>
+          <p:cNvPr id="3" name="Notes Placeholder 2"/>
+          <p:cNvSpPr>
+            <a:spLocks noGrp="1"/>
+          </p:cNvSpPr>
+          <p:nvPr>
+            <p:ph type="body" idx="3" sz="quarter"/>
+          </p:nvPr>
+        </p:nvSpPr>
+        <p:spPr/>
+        <p:txBody>
+          <a:bodyPr/>
+          <a:lstStyle/>
+          <a:p>
+            <a:r>
+              <a:t>(8:50–9:15) "The machine learning app answers what is likely to happen. Power BI</a:t>
+            </a:r>
+          </a:p>
+          <a:p>
+            <a:r>
+              <a:t>answers what already happened and why — and it's what a non-technical</a:t>
+            </a:r>
+          </a:p>
+          <a:p>
+            <a:r>
+              <a:t>stakeholder actually opens."</a:t>
+            </a:r>
+          </a:p>
+          <a:p>
+            <a:r>
+              <a:t>Four pages: executive overview, customer insights, risk intelligence, retention</a:t>
+            </a:r>
+          </a:p>
+          <a:p>
+            <a:r>
+              <a:t>strategy. One sentence each, don't linger. Point out the underlined .pbit link —</a:t>
+            </a:r>
+          </a:p>
+          <a:p>
+            <a:r>
+              <a:t>it opens the reusable report template in the project repository.</a:t>
+            </a:r>
+          </a:p>
+        </p:txBody>
+      </p:sp>
+      <p:sp>
+        <p:nvSpPr>
+          <p:cNvPr id="4" name="Slide Number Placeholder 3"/>
+          <p:cNvSpPr>
+            <a:spLocks noGrp="1"/>
+          </p:cNvSpPr>
+          <p:nvPr>
+            <p:ph type="sldNum" idx="5" sz="quarter"/>
+          </p:nvPr>
+        </p:nvSpPr>
+        <p:spPr/>
+      </p:sp>
+    </p:spTree>
+  </p:cSld>
+  <p:clrMapOvr>
+    <a:masterClrMapping/>
+  </p:clrMapOvr>
+</p:notes>
+</file>
+
+<file path=ppt/notesSlides/notesSlide16.xml><?xml version="1.0" encoding="utf-8"?>
+<p:notes xmlns:a="http://schemas.openxmlformats.org/drawingml/2006/main" xmlns:p="http://schemas.openxmlformats.org/presentationml/2006/main" xmlns:r="http://schemas.openxmlformats.org/officeDocument/2006/relationships">
+  <p:cSld>
+    <p:spTree>
+      <p:nvGrpSpPr>
+        <p:cNvPr id="1" name=""/>
+        <p:cNvGrpSpPr/>
+        <p:nvPr/>
+      </p:nvGrpSpPr>
+      <p:grpSpPr>
+        <a:xfrm>
+          <a:off x="0" y="0"/>
+          <a:ext cx="0" cy="0"/>
+          <a:chOff x="0" y="0"/>
+          <a:chExt cx="0" cy="0"/>
+        </a:xfrm>
+      </p:grpSpPr>
+      <p:sp>
+        <p:nvSpPr>
+          <p:cNvPr id="2" name="Slide Image Placeholder 1"/>
+          <p:cNvSpPr>
+            <a:spLocks noGrp="1"/>
+          </p:cNvSpPr>
+          <p:nvPr>
+            <p:ph type="sldImg" idx="2"/>
+          </p:nvPr>
+        </p:nvSpPr>
+        <p:spPr/>
+      </p:sp>
+      <p:sp>
+        <p:nvSpPr>
+          <p:cNvPr id="3" name="Notes Placeholder 2"/>
+          <p:cNvSpPr>
+            <a:spLocks noGrp="1"/>
+          </p:cNvSpPr>
+          <p:nvPr>
+            <p:ph type="body" idx="3" sz="quarter"/>
+          </p:nvPr>
+        </p:nvSpPr>
+        <p:spPr/>
+        <p:txBody>
+          <a:bodyPr/>
+          <a:lstStyle/>
+          <a:p>
+            <a:r>
+              <a:t>(9:15–9:45) This is the demo slide. If the live site is warm, switch to it for</a:t>
+            </a:r>
+          </a:p>
+          <a:p>
+            <a:r>
+              <a:t>thirty seconds; otherwise walk the screenshots.</a:t>
+            </a:r>
+          </a:p>
+          <a:p>
+            <a:r>
+              <a:t>"Upload a portfolio, validate it before scoring, then read churn rate, risk</a:t>
+            </a:r>
+          </a:p>
+          <a:p>
+            <a:r>
+              <a:t>distribution and revenue at risk — and drill into any single customer."</a:t>
+            </a:r>
+          </a:p>
+          <a:p>
+            <a:r>
+              <a:t>One engineering detail worth a sentence: "reports are scoped to the visitor with</a:t>
+            </a:r>
+          </a:p>
+          <a:p>
+            <a:r>
+              <a:t>a signed cookie, so users never see each other's data — that has its own unit</a:t>
+            </a:r>
+          </a:p>
+          <a:p>
+            <a:r>
+              <a:t>test."</a:t>
+            </a:r>
+          </a:p>
+        </p:txBody>
+      </p:sp>
+      <p:sp>
+        <p:nvSpPr>
+          <p:cNvPr id="4" name="Slide Number Placeholder 3"/>
+          <p:cNvSpPr>
+            <a:spLocks noGrp="1"/>
+          </p:cNvSpPr>
+          <p:nvPr>
+            <p:ph type="sldNum" idx="5" sz="quarter"/>
+          </p:nvPr>
+        </p:nvSpPr>
+        <p:spPr/>
+      </p:sp>
+    </p:spTree>
+  </p:cSld>
+  <p:clrMapOvr>
+    <a:masterClrMapping/>
+  </p:clrMapOvr>
+</p:notes>
+</file>
+
 <file path=ppt/notesSlides/notesSlide2.xml><?xml version="1.0" encoding="utf-8"?>
 <p:notes xmlns:a="http://schemas.openxmlformats.org/drawingml/2006/main" xmlns:p="http://schemas.openxmlformats.org/presentationml/2006/main" xmlns:r="http://schemas.openxmlformats.org/officeDocument/2006/relationships">
   <p:cSld>
@@ -10586,6 +11076,7228 @@
                 <a:latin typeface="Consolas"/>
               </a:rPr>
               <a:t>11</a:t>
+            </a:r>
+          </a:p>
+        </p:txBody>
+      </p:sp>
+    </p:spTree>
+  </p:cSld>
+  <p:clrMapOvr>
+    <a:masterClrMapping/>
+  </p:clrMapOvr>
+</p:sld>
+</file>
+
+<file path=ppt/slides/slide12.xml><?xml version="1.0" encoding="utf-8"?>
+<p:sld xmlns:a="http://schemas.openxmlformats.org/drawingml/2006/main" xmlns:p="http://schemas.openxmlformats.org/presentationml/2006/main" xmlns:r="http://schemas.openxmlformats.org/officeDocument/2006/relationships">
+  <p:cSld>
+    <p:spTree>
+      <p:nvGrpSpPr>
+        <p:cNvPr id="1" name=""/>
+        <p:cNvGrpSpPr/>
+        <p:nvPr/>
+      </p:nvGrpSpPr>
+      <p:grpSpPr/>
+      <p:sp>
+        <p:nvSpPr>
+          <p:cNvPr id="2" name="Rectangle 1"/>
+          <p:cNvSpPr/>
+          <p:nvPr/>
+        </p:nvSpPr>
+        <p:spPr>
+          <a:xfrm>
+            <a:off x="0" y="0"/>
+            <a:ext cx="12191695" cy="6858000"/>
+          </a:xfrm>
+          <a:prstGeom prst="rect">
+            <a:avLst/>
+          </a:prstGeom>
+          <a:solidFill>
+            <a:srgbClr val="0A0F1C"/>
+          </a:solidFill>
+          <a:ln>
+            <a:noFill/>
+          </a:ln>
+          <a:effectLst/>
+        </p:spPr>
+        <p:style>
+          <a:lnRef idx="1">
+            <a:schemeClr val="accent1"/>
+          </a:lnRef>
+          <a:fillRef idx="3">
+            <a:schemeClr val="accent1"/>
+          </a:fillRef>
+          <a:effectRef idx="2">
+            <a:schemeClr val="accent1"/>
+          </a:effectRef>
+          <a:fontRef idx="minor">
+            <a:schemeClr val="lt1"/>
+          </a:fontRef>
+        </p:style>
+        <p:txBody>
+          <a:bodyPr rtlCol="0" anchor="ctr"/>
+          <a:lstStyle/>
+          <a:p>
+            <a:pPr algn="ctr"/>
+          </a:p>
+        </p:txBody>
+      </p:sp>
+      <p:sp>
+        <p:nvSpPr>
+          <p:cNvPr id="3" name="TextBox 2"/>
+          <p:cNvSpPr txBox="1"/>
+          <p:nvPr/>
+        </p:nvSpPr>
+        <p:spPr>
+          <a:xfrm>
+            <a:off x="566928" y="365760"/>
+            <a:ext cx="8229600" cy="237744"/>
+          </a:xfrm>
+          <a:prstGeom prst="rect">
+            <a:avLst/>
+          </a:prstGeom>
+          <a:noFill/>
+        </p:spPr>
+        <p:txBody>
+          <a:bodyPr wrap="square" lIns="0" rIns="0" tIns="0" bIns="0" anchor="t">
+            <a:spAutoFit/>
+          </a:bodyPr>
+          <a:lstStyle/>
+          <a:p>
+            <a:pPr algn="l">
+              <a:lnSpc>
+                <a:spcPct val="112000"/>
+              </a:lnSpc>
+              <a:spcAft>
+                <a:spcPts val="0"/>
+              </a:spcAft>
+            </a:pPr>
+            <a:r>
+              <a:rPr sz="1000" b="1">
+                <a:solidFill>
+                  <a:srgbClr val="2FD8B4"/>
+                </a:solidFill>
+                <a:latin typeface="Consolas"/>
+              </a:rPr>
+              <a:t>PHASE 09  ·  EXPLAINABILITY</a:t>
+            </a:r>
+          </a:p>
+        </p:txBody>
+      </p:sp>
+      <p:sp>
+        <p:nvSpPr>
+          <p:cNvPr id="4" name="TextBox 3"/>
+          <p:cNvSpPr txBox="1"/>
+          <p:nvPr/>
+        </p:nvSpPr>
+        <p:spPr>
+          <a:xfrm>
+            <a:off x="566928" y="576072"/>
+            <a:ext cx="11057839" cy="475488"/>
+          </a:xfrm>
+          <a:prstGeom prst="rect">
+            <a:avLst/>
+          </a:prstGeom>
+          <a:noFill/>
+        </p:spPr>
+        <p:txBody>
+          <a:bodyPr wrap="square" lIns="0" rIns="0" tIns="0" bIns="0" anchor="t">
+            <a:spAutoFit/>
+          </a:bodyPr>
+          <a:lstStyle/>
+          <a:p>
+            <a:pPr algn="l">
+              <a:lnSpc>
+                <a:spcPct val="112000"/>
+              </a:lnSpc>
+              <a:spcAft>
+                <a:spcPts val="0"/>
+              </a:spcAft>
+            </a:pPr>
+            <a:r>
+              <a:rPr sz="2600" b="1">
+                <a:solidFill>
+                  <a:srgbClr val="EAF0F7"/>
+                </a:solidFill>
+                <a:latin typeface="Segoe UI"/>
+              </a:rPr>
+              <a:t>Why the model flags a customer</a:t>
+            </a:r>
+          </a:p>
+        </p:txBody>
+      </p:sp>
+      <p:sp>
+        <p:nvSpPr>
+          <p:cNvPr id="5" name="TextBox 4"/>
+          <p:cNvSpPr txBox="1"/>
+          <p:nvPr/>
+        </p:nvSpPr>
+        <p:spPr>
+          <a:xfrm>
+            <a:off x="566928" y="1060704"/>
+            <a:ext cx="11057839" cy="274320"/>
+          </a:xfrm>
+          <a:prstGeom prst="rect">
+            <a:avLst/>
+          </a:prstGeom>
+          <a:noFill/>
+        </p:spPr>
+        <p:txBody>
+          <a:bodyPr wrap="square" lIns="0" rIns="0" tIns="0" bIns="0" anchor="t">
+            <a:spAutoFit/>
+          </a:bodyPr>
+          <a:lstStyle/>
+          <a:p>
+            <a:pPr algn="l">
+              <a:lnSpc>
+                <a:spcPct val="112000"/>
+              </a:lnSpc>
+              <a:spcAft>
+                <a:spcPts val="0"/>
+              </a:spcAft>
+            </a:pPr>
+            <a:r>
+              <a:rPr sz="1250" b="0">
+                <a:solidFill>
+                  <a:srgbClr val="8CA0BE"/>
+                </a:solidFill>
+                <a:latin typeface="Segoe UI"/>
+              </a:rPr>
+              <a:t>The profile of the high-risk band, and a per-customer explanation in the app</a:t>
+            </a:r>
+          </a:p>
+        </p:txBody>
+      </p:sp>
+      <p:sp>
+        <p:nvSpPr>
+          <p:cNvPr id="6" name="Rectangle 5"/>
+          <p:cNvSpPr/>
+          <p:nvPr/>
+        </p:nvSpPr>
+        <p:spPr>
+          <a:xfrm>
+            <a:off x="566928" y="1371600"/>
+            <a:ext cx="11057839" cy="12801"/>
+          </a:xfrm>
+          <a:prstGeom prst="rect">
+            <a:avLst/>
+          </a:prstGeom>
+          <a:solidFill>
+            <a:srgbClr val="223049"/>
+          </a:solidFill>
+          <a:ln>
+            <a:noFill/>
+          </a:ln>
+          <a:effectLst/>
+        </p:spPr>
+        <p:style>
+          <a:lnRef idx="1">
+            <a:schemeClr val="accent1"/>
+          </a:lnRef>
+          <a:fillRef idx="3">
+            <a:schemeClr val="accent1"/>
+          </a:fillRef>
+          <a:effectRef idx="2">
+            <a:schemeClr val="accent1"/>
+          </a:effectRef>
+          <a:fontRef idx="minor">
+            <a:schemeClr val="lt1"/>
+          </a:fontRef>
+        </p:style>
+        <p:txBody>
+          <a:bodyPr rtlCol="0" anchor="ctr"/>
+          <a:lstStyle/>
+          <a:p>
+            <a:pPr algn="ctr"/>
+          </a:p>
+        </p:txBody>
+      </p:sp>
+      <p:pic>
+        <p:nvPicPr>
+          <p:cNvPr id="7" name="Picture 6" descr="chart_high_risk_profile.png"/>
+          <p:cNvPicPr>
+            <a:picLocks noChangeAspect="1"/>
+          </p:cNvPicPr>
+          <p:nvPr/>
+        </p:nvPicPr>
+        <p:blipFill>
+          <a:blip r:embed="rId2"/>
+          <a:stretch>
+            <a:fillRect/>
+          </a:stretch>
+        </p:blipFill>
+        <p:spPr>
+          <a:xfrm>
+            <a:off x="566928" y="1517904"/>
+            <a:ext cx="7315200" cy="3673712"/>
+          </a:xfrm>
+          <a:prstGeom prst="rect">
+            <a:avLst/>
+          </a:prstGeom>
+        </p:spPr>
+      </p:pic>
+      <p:sp>
+        <p:nvSpPr>
+          <p:cNvPr id="8" name="Rounded Rectangle 7"/>
+          <p:cNvSpPr/>
+          <p:nvPr/>
+        </p:nvSpPr>
+        <p:spPr>
+          <a:xfrm>
+            <a:off x="8147303" y="1517904"/>
+            <a:ext cx="3477463" cy="2276856"/>
+          </a:xfrm>
+          <a:prstGeom prst="roundRect">
+            <a:avLst>
+              <a:gd name="adj" fmla="val 8000"/>
+            </a:avLst>
+          </a:prstGeom>
+          <a:solidFill>
+            <a:srgbClr val="111A2C"/>
+          </a:solidFill>
+          <a:ln w="12700">
+            <a:solidFill>
+              <a:srgbClr val="223049"/>
+            </a:solidFill>
+          </a:ln>
+          <a:effectLst/>
+        </p:spPr>
+        <p:style>
+          <a:lnRef idx="1">
+            <a:schemeClr val="accent1"/>
+          </a:lnRef>
+          <a:fillRef idx="3">
+            <a:schemeClr val="accent1"/>
+          </a:fillRef>
+          <a:effectRef idx="2">
+            <a:schemeClr val="accent1"/>
+          </a:effectRef>
+          <a:fontRef idx="minor">
+            <a:schemeClr val="lt1"/>
+          </a:fontRef>
+        </p:style>
+        <p:txBody>
+          <a:bodyPr rtlCol="0" anchor="ctr"/>
+          <a:lstStyle/>
+          <a:p>
+            <a:pPr algn="ctr"/>
+          </a:p>
+        </p:txBody>
+      </p:sp>
+      <p:sp>
+        <p:nvSpPr>
+          <p:cNvPr id="9" name="TextBox 8"/>
+          <p:cNvSpPr txBox="1"/>
+          <p:nvPr/>
+        </p:nvSpPr>
+        <p:spPr>
+          <a:xfrm>
+            <a:off x="8330183" y="1664207"/>
+            <a:ext cx="3111703" cy="1984248"/>
+          </a:xfrm>
+          <a:prstGeom prst="rect">
+            <a:avLst/>
+          </a:prstGeom>
+          <a:noFill/>
+        </p:spPr>
+        <p:txBody>
+          <a:bodyPr wrap="square" lIns="0" rIns="0" tIns="0" bIns="0" anchor="t">
+            <a:spAutoFit/>
+          </a:bodyPr>
+          <a:lstStyle/>
+          <a:p>
+            <a:pPr algn="l">
+              <a:lnSpc>
+                <a:spcPct val="112000"/>
+              </a:lnSpc>
+              <a:spcAft>
+                <a:spcPts val="600"/>
+              </a:spcAft>
+            </a:pPr>
+            <a:r>
+              <a:rPr sz="1050" b="1">
+                <a:solidFill>
+                  <a:srgbClr val="2FD8B4"/>
+                </a:solidFill>
+                <a:latin typeface="Consolas"/>
+              </a:rPr>
+              <a:t>PER-CUSTOMER EXPLANATION</a:t>
+            </a:r>
+          </a:p>
+          <a:p>
+            <a:pPr algn="l">
+              <a:lnSpc>
+                <a:spcPct val="118000"/>
+              </a:lnSpc>
+              <a:spcAft>
+                <a:spcPts val="0"/>
+              </a:spcAft>
+            </a:pPr>
+            <a:r>
+              <a:rPr sz="1060" b="0">
+                <a:solidFill>
+                  <a:srgbClr val="EAF0F7"/>
+                </a:solidFill>
+                <a:latin typeface="Segoe UI"/>
+              </a:rPr>
+              <a:t>For each prediction the console shows the top drivers, computed as coefficient × customer value — the honest linear explanation for a logistic model, with human labels like "Fiber optic internet" or "Account tenure".</a:t>
+            </a:r>
+          </a:p>
+        </p:txBody>
+      </p:sp>
+      <p:sp>
+        <p:nvSpPr>
+          <p:cNvPr id="10" name="Rounded Rectangle 9"/>
+          <p:cNvSpPr/>
+          <p:nvPr/>
+        </p:nvSpPr>
+        <p:spPr>
+          <a:xfrm>
+            <a:off x="8147303" y="3941063"/>
+            <a:ext cx="3477463" cy="2276856"/>
+          </a:xfrm>
+          <a:prstGeom prst="roundRect">
+            <a:avLst>
+              <a:gd name="adj" fmla="val 8000"/>
+            </a:avLst>
+          </a:prstGeom>
+          <a:solidFill>
+            <a:srgbClr val="162136"/>
+          </a:solidFill>
+          <a:ln w="15240">
+            <a:solidFill>
+              <a:srgbClr val="F5A623"/>
+            </a:solidFill>
+          </a:ln>
+          <a:effectLst/>
+        </p:spPr>
+        <p:style>
+          <a:lnRef idx="1">
+            <a:schemeClr val="accent1"/>
+          </a:lnRef>
+          <a:fillRef idx="3">
+            <a:schemeClr val="accent1"/>
+          </a:fillRef>
+          <a:effectRef idx="2">
+            <a:schemeClr val="accent1"/>
+          </a:effectRef>
+          <a:fontRef idx="minor">
+            <a:schemeClr val="lt1"/>
+          </a:fontRef>
+        </p:style>
+        <p:txBody>
+          <a:bodyPr rtlCol="0" anchor="ctr"/>
+          <a:lstStyle/>
+          <a:p>
+            <a:pPr algn="ctr"/>
+          </a:p>
+        </p:txBody>
+      </p:sp>
+      <p:sp>
+        <p:nvSpPr>
+          <p:cNvPr id="11" name="TextBox 10"/>
+          <p:cNvSpPr txBox="1"/>
+          <p:nvPr/>
+        </p:nvSpPr>
+        <p:spPr>
+          <a:xfrm>
+            <a:off x="8330183" y="4069079"/>
+            <a:ext cx="3111703" cy="2039111"/>
+          </a:xfrm>
+          <a:prstGeom prst="rect">
+            <a:avLst/>
+          </a:prstGeom>
+          <a:noFill/>
+        </p:spPr>
+        <p:txBody>
+          <a:bodyPr wrap="square" lIns="0" rIns="0" tIns="0" bIns="0" anchor="t">
+            <a:spAutoFit/>
+          </a:bodyPr>
+          <a:lstStyle/>
+          <a:p>
+            <a:pPr algn="l">
+              <a:lnSpc>
+                <a:spcPct val="112000"/>
+              </a:lnSpc>
+              <a:spcAft>
+                <a:spcPts val="300"/>
+              </a:spcAft>
+            </a:pPr>
+            <a:r>
+              <a:rPr sz="1150" b="1">
+                <a:solidFill>
+                  <a:srgbClr val="F5A623"/>
+                </a:solidFill>
+                <a:latin typeface="Segoe UI"/>
+              </a:rPr>
+              <a:t>ON SHAP — STATED PRECISELY</a:t>
+            </a:r>
+          </a:p>
+          <a:p>
+            <a:pPr algn="l">
+              <a:lnSpc>
+                <a:spcPct val="116000"/>
+              </a:lnSpc>
+              <a:spcAft>
+                <a:spcPts val="0"/>
+              </a:spcAft>
+            </a:pPr>
+            <a:r>
+              <a:rPr sz="1080" b="0">
+                <a:solidFill>
+                  <a:srgbClr val="EAF0F7"/>
+                </a:solidFill>
+                <a:latin typeface="Segoe UI"/>
+              </a:rPr>
+              <a:t>SHAP was explored during the project; summary, bar, dependence and waterfall plots are in the repository. Production explanation is aligned to the deployed Logistic Regression instead — accurate for a linear model, and it costs nothing at request time.</a:t>
+            </a:r>
+          </a:p>
+        </p:txBody>
+      </p:sp>
+      <p:sp>
+        <p:nvSpPr>
+          <p:cNvPr id="12" name="Rectangle 11"/>
+          <p:cNvSpPr/>
+          <p:nvPr/>
+        </p:nvSpPr>
+        <p:spPr>
+          <a:xfrm>
+            <a:off x="566928" y="6309360"/>
+            <a:ext cx="743145" cy="43891"/>
+          </a:xfrm>
+          <a:prstGeom prst="rect">
+            <a:avLst/>
+          </a:prstGeom>
+          <a:solidFill>
+            <a:srgbClr val="223049"/>
+          </a:solidFill>
+          <a:ln>
+            <a:noFill/>
+          </a:ln>
+          <a:effectLst/>
+        </p:spPr>
+        <p:style>
+          <a:lnRef idx="1">
+            <a:schemeClr val="accent1"/>
+          </a:lnRef>
+          <a:fillRef idx="3">
+            <a:schemeClr val="accent1"/>
+          </a:fillRef>
+          <a:effectRef idx="2">
+            <a:schemeClr val="accent1"/>
+          </a:effectRef>
+          <a:fontRef idx="minor">
+            <a:schemeClr val="lt1"/>
+          </a:fontRef>
+        </p:style>
+        <p:txBody>
+          <a:bodyPr rtlCol="0" anchor="ctr"/>
+          <a:lstStyle/>
+          <a:p>
+            <a:pPr algn="ctr"/>
+          </a:p>
+        </p:txBody>
+      </p:sp>
+      <p:sp>
+        <p:nvSpPr>
+          <p:cNvPr id="13" name="Rectangle 12"/>
+          <p:cNvSpPr/>
+          <p:nvPr/>
+        </p:nvSpPr>
+        <p:spPr>
+          <a:xfrm>
+            <a:off x="1360365" y="6309360"/>
+            <a:ext cx="743145" cy="43891"/>
+          </a:xfrm>
+          <a:prstGeom prst="rect">
+            <a:avLst/>
+          </a:prstGeom>
+          <a:solidFill>
+            <a:srgbClr val="223049"/>
+          </a:solidFill>
+          <a:ln>
+            <a:noFill/>
+          </a:ln>
+          <a:effectLst/>
+        </p:spPr>
+        <p:style>
+          <a:lnRef idx="1">
+            <a:schemeClr val="accent1"/>
+          </a:lnRef>
+          <a:fillRef idx="3">
+            <a:schemeClr val="accent1"/>
+          </a:fillRef>
+          <a:effectRef idx="2">
+            <a:schemeClr val="accent1"/>
+          </a:effectRef>
+          <a:fontRef idx="minor">
+            <a:schemeClr val="lt1"/>
+          </a:fontRef>
+        </p:style>
+        <p:txBody>
+          <a:bodyPr rtlCol="0" anchor="ctr"/>
+          <a:lstStyle/>
+          <a:p>
+            <a:pPr algn="ctr"/>
+          </a:p>
+        </p:txBody>
+      </p:sp>
+      <p:sp>
+        <p:nvSpPr>
+          <p:cNvPr id="14" name="Rectangle 13"/>
+          <p:cNvSpPr/>
+          <p:nvPr/>
+        </p:nvSpPr>
+        <p:spPr>
+          <a:xfrm>
+            <a:off x="2153803" y="6309360"/>
+            <a:ext cx="743145" cy="43891"/>
+          </a:xfrm>
+          <a:prstGeom prst="rect">
+            <a:avLst/>
+          </a:prstGeom>
+          <a:solidFill>
+            <a:srgbClr val="223049"/>
+          </a:solidFill>
+          <a:ln>
+            <a:noFill/>
+          </a:ln>
+          <a:effectLst/>
+        </p:spPr>
+        <p:style>
+          <a:lnRef idx="1">
+            <a:schemeClr val="accent1"/>
+          </a:lnRef>
+          <a:fillRef idx="3">
+            <a:schemeClr val="accent1"/>
+          </a:fillRef>
+          <a:effectRef idx="2">
+            <a:schemeClr val="accent1"/>
+          </a:effectRef>
+          <a:fontRef idx="minor">
+            <a:schemeClr val="lt1"/>
+          </a:fontRef>
+        </p:style>
+        <p:txBody>
+          <a:bodyPr rtlCol="0" anchor="ctr"/>
+          <a:lstStyle/>
+          <a:p>
+            <a:pPr algn="ctr"/>
+          </a:p>
+        </p:txBody>
+      </p:sp>
+      <p:sp>
+        <p:nvSpPr>
+          <p:cNvPr id="15" name="Rectangle 14"/>
+          <p:cNvSpPr/>
+          <p:nvPr/>
+        </p:nvSpPr>
+        <p:spPr>
+          <a:xfrm>
+            <a:off x="2947241" y="6309360"/>
+            <a:ext cx="743145" cy="43891"/>
+          </a:xfrm>
+          <a:prstGeom prst="rect">
+            <a:avLst/>
+          </a:prstGeom>
+          <a:solidFill>
+            <a:srgbClr val="223049"/>
+          </a:solidFill>
+          <a:ln>
+            <a:noFill/>
+          </a:ln>
+          <a:effectLst/>
+        </p:spPr>
+        <p:style>
+          <a:lnRef idx="1">
+            <a:schemeClr val="accent1"/>
+          </a:lnRef>
+          <a:fillRef idx="3">
+            <a:schemeClr val="accent1"/>
+          </a:fillRef>
+          <a:effectRef idx="2">
+            <a:schemeClr val="accent1"/>
+          </a:effectRef>
+          <a:fontRef idx="minor">
+            <a:schemeClr val="lt1"/>
+          </a:fontRef>
+        </p:style>
+        <p:txBody>
+          <a:bodyPr rtlCol="0" anchor="ctr"/>
+          <a:lstStyle/>
+          <a:p>
+            <a:pPr algn="ctr"/>
+          </a:p>
+        </p:txBody>
+      </p:sp>
+      <p:sp>
+        <p:nvSpPr>
+          <p:cNvPr id="16" name="Rectangle 15"/>
+          <p:cNvSpPr/>
+          <p:nvPr/>
+        </p:nvSpPr>
+        <p:spPr>
+          <a:xfrm>
+            <a:off x="3740679" y="6309360"/>
+            <a:ext cx="743145" cy="43891"/>
+          </a:xfrm>
+          <a:prstGeom prst="rect">
+            <a:avLst/>
+          </a:prstGeom>
+          <a:solidFill>
+            <a:srgbClr val="223049"/>
+          </a:solidFill>
+          <a:ln>
+            <a:noFill/>
+          </a:ln>
+          <a:effectLst/>
+        </p:spPr>
+        <p:style>
+          <a:lnRef idx="1">
+            <a:schemeClr val="accent1"/>
+          </a:lnRef>
+          <a:fillRef idx="3">
+            <a:schemeClr val="accent1"/>
+          </a:fillRef>
+          <a:effectRef idx="2">
+            <a:schemeClr val="accent1"/>
+          </a:effectRef>
+          <a:fontRef idx="minor">
+            <a:schemeClr val="lt1"/>
+          </a:fontRef>
+        </p:style>
+        <p:txBody>
+          <a:bodyPr rtlCol="0" anchor="ctr"/>
+          <a:lstStyle/>
+          <a:p>
+            <a:pPr algn="ctr"/>
+          </a:p>
+        </p:txBody>
+      </p:sp>
+      <p:sp>
+        <p:nvSpPr>
+          <p:cNvPr id="17" name="Rectangle 16"/>
+          <p:cNvSpPr/>
+          <p:nvPr/>
+        </p:nvSpPr>
+        <p:spPr>
+          <a:xfrm>
+            <a:off x="4534117" y="6309360"/>
+            <a:ext cx="743145" cy="43891"/>
+          </a:xfrm>
+          <a:prstGeom prst="rect">
+            <a:avLst/>
+          </a:prstGeom>
+          <a:solidFill>
+            <a:srgbClr val="223049"/>
+          </a:solidFill>
+          <a:ln>
+            <a:noFill/>
+          </a:ln>
+          <a:effectLst/>
+        </p:spPr>
+        <p:style>
+          <a:lnRef idx="1">
+            <a:schemeClr val="accent1"/>
+          </a:lnRef>
+          <a:fillRef idx="3">
+            <a:schemeClr val="accent1"/>
+          </a:fillRef>
+          <a:effectRef idx="2">
+            <a:schemeClr val="accent1"/>
+          </a:effectRef>
+          <a:fontRef idx="minor">
+            <a:schemeClr val="lt1"/>
+          </a:fontRef>
+        </p:style>
+        <p:txBody>
+          <a:bodyPr rtlCol="0" anchor="ctr"/>
+          <a:lstStyle/>
+          <a:p>
+            <a:pPr algn="ctr"/>
+          </a:p>
+        </p:txBody>
+      </p:sp>
+      <p:sp>
+        <p:nvSpPr>
+          <p:cNvPr id="18" name="Rectangle 17"/>
+          <p:cNvSpPr/>
+          <p:nvPr/>
+        </p:nvSpPr>
+        <p:spPr>
+          <a:xfrm>
+            <a:off x="5327555" y="6309360"/>
+            <a:ext cx="743145" cy="43891"/>
+          </a:xfrm>
+          <a:prstGeom prst="rect">
+            <a:avLst/>
+          </a:prstGeom>
+          <a:solidFill>
+            <a:srgbClr val="223049"/>
+          </a:solidFill>
+          <a:ln>
+            <a:noFill/>
+          </a:ln>
+          <a:effectLst/>
+        </p:spPr>
+        <p:style>
+          <a:lnRef idx="1">
+            <a:schemeClr val="accent1"/>
+          </a:lnRef>
+          <a:fillRef idx="3">
+            <a:schemeClr val="accent1"/>
+          </a:fillRef>
+          <a:effectRef idx="2">
+            <a:schemeClr val="accent1"/>
+          </a:effectRef>
+          <a:fontRef idx="minor">
+            <a:schemeClr val="lt1"/>
+          </a:fontRef>
+        </p:style>
+        <p:txBody>
+          <a:bodyPr rtlCol="0" anchor="ctr"/>
+          <a:lstStyle/>
+          <a:p>
+            <a:pPr algn="ctr"/>
+          </a:p>
+        </p:txBody>
+      </p:sp>
+      <p:sp>
+        <p:nvSpPr>
+          <p:cNvPr id="19" name="Rectangle 18"/>
+          <p:cNvSpPr/>
+          <p:nvPr/>
+        </p:nvSpPr>
+        <p:spPr>
+          <a:xfrm>
+            <a:off x="6120993" y="6309360"/>
+            <a:ext cx="743145" cy="43891"/>
+          </a:xfrm>
+          <a:prstGeom prst="rect">
+            <a:avLst/>
+          </a:prstGeom>
+          <a:solidFill>
+            <a:srgbClr val="223049"/>
+          </a:solidFill>
+          <a:ln>
+            <a:noFill/>
+          </a:ln>
+          <a:effectLst/>
+        </p:spPr>
+        <p:style>
+          <a:lnRef idx="1">
+            <a:schemeClr val="accent1"/>
+          </a:lnRef>
+          <a:fillRef idx="3">
+            <a:schemeClr val="accent1"/>
+          </a:fillRef>
+          <a:effectRef idx="2">
+            <a:schemeClr val="accent1"/>
+          </a:effectRef>
+          <a:fontRef idx="minor">
+            <a:schemeClr val="lt1"/>
+          </a:fontRef>
+        </p:style>
+        <p:txBody>
+          <a:bodyPr rtlCol="0" anchor="ctr"/>
+          <a:lstStyle/>
+          <a:p>
+            <a:pPr algn="ctr"/>
+          </a:p>
+        </p:txBody>
+      </p:sp>
+      <p:sp>
+        <p:nvSpPr>
+          <p:cNvPr id="20" name="Rectangle 19"/>
+          <p:cNvSpPr/>
+          <p:nvPr/>
+        </p:nvSpPr>
+        <p:spPr>
+          <a:xfrm>
+            <a:off x="6914431" y="6296558"/>
+            <a:ext cx="743145" cy="68580"/>
+          </a:xfrm>
+          <a:prstGeom prst="rect">
+            <a:avLst/>
+          </a:prstGeom>
+          <a:solidFill>
+            <a:srgbClr val="2FD8B4"/>
+          </a:solidFill>
+          <a:ln>
+            <a:noFill/>
+          </a:ln>
+          <a:effectLst/>
+        </p:spPr>
+        <p:style>
+          <a:lnRef idx="1">
+            <a:schemeClr val="accent1"/>
+          </a:lnRef>
+          <a:fillRef idx="3">
+            <a:schemeClr val="accent1"/>
+          </a:fillRef>
+          <a:effectRef idx="2">
+            <a:schemeClr val="accent1"/>
+          </a:effectRef>
+          <a:fontRef idx="minor">
+            <a:schemeClr val="lt1"/>
+          </a:fontRef>
+        </p:style>
+        <p:txBody>
+          <a:bodyPr rtlCol="0" anchor="ctr"/>
+          <a:lstStyle/>
+          <a:p>
+            <a:pPr algn="ctr"/>
+          </a:p>
+        </p:txBody>
+      </p:sp>
+      <p:sp>
+        <p:nvSpPr>
+          <p:cNvPr id="21" name="Rectangle 20"/>
+          <p:cNvSpPr/>
+          <p:nvPr/>
+        </p:nvSpPr>
+        <p:spPr>
+          <a:xfrm>
+            <a:off x="7707869" y="6309360"/>
+            <a:ext cx="743145" cy="43891"/>
+          </a:xfrm>
+          <a:prstGeom prst="rect">
+            <a:avLst/>
+          </a:prstGeom>
+          <a:solidFill>
+            <a:srgbClr val="223049"/>
+          </a:solidFill>
+          <a:ln>
+            <a:noFill/>
+          </a:ln>
+          <a:effectLst/>
+        </p:spPr>
+        <p:style>
+          <a:lnRef idx="1">
+            <a:schemeClr val="accent1"/>
+          </a:lnRef>
+          <a:fillRef idx="3">
+            <a:schemeClr val="accent1"/>
+          </a:fillRef>
+          <a:effectRef idx="2">
+            <a:schemeClr val="accent1"/>
+          </a:effectRef>
+          <a:fontRef idx="minor">
+            <a:schemeClr val="lt1"/>
+          </a:fontRef>
+        </p:style>
+        <p:txBody>
+          <a:bodyPr rtlCol="0" anchor="ctr"/>
+          <a:lstStyle/>
+          <a:p>
+            <a:pPr algn="ctr"/>
+          </a:p>
+        </p:txBody>
+      </p:sp>
+      <p:sp>
+        <p:nvSpPr>
+          <p:cNvPr id="22" name="Rectangle 21"/>
+          <p:cNvSpPr/>
+          <p:nvPr/>
+        </p:nvSpPr>
+        <p:spPr>
+          <a:xfrm>
+            <a:off x="8501307" y="6309360"/>
+            <a:ext cx="743145" cy="43891"/>
+          </a:xfrm>
+          <a:prstGeom prst="rect">
+            <a:avLst/>
+          </a:prstGeom>
+          <a:solidFill>
+            <a:srgbClr val="223049"/>
+          </a:solidFill>
+          <a:ln>
+            <a:noFill/>
+          </a:ln>
+          <a:effectLst/>
+        </p:spPr>
+        <p:style>
+          <a:lnRef idx="1">
+            <a:schemeClr val="accent1"/>
+          </a:lnRef>
+          <a:fillRef idx="3">
+            <a:schemeClr val="accent1"/>
+          </a:fillRef>
+          <a:effectRef idx="2">
+            <a:schemeClr val="accent1"/>
+          </a:effectRef>
+          <a:fontRef idx="minor">
+            <a:schemeClr val="lt1"/>
+          </a:fontRef>
+        </p:style>
+        <p:txBody>
+          <a:bodyPr rtlCol="0" anchor="ctr"/>
+          <a:lstStyle/>
+          <a:p>
+            <a:pPr algn="ctr"/>
+          </a:p>
+        </p:txBody>
+      </p:sp>
+      <p:sp>
+        <p:nvSpPr>
+          <p:cNvPr id="23" name="Rectangle 22"/>
+          <p:cNvSpPr/>
+          <p:nvPr/>
+        </p:nvSpPr>
+        <p:spPr>
+          <a:xfrm>
+            <a:off x="9294745" y="6309360"/>
+            <a:ext cx="743145" cy="43891"/>
+          </a:xfrm>
+          <a:prstGeom prst="rect">
+            <a:avLst/>
+          </a:prstGeom>
+          <a:solidFill>
+            <a:srgbClr val="223049"/>
+          </a:solidFill>
+          <a:ln>
+            <a:noFill/>
+          </a:ln>
+          <a:effectLst/>
+        </p:spPr>
+        <p:style>
+          <a:lnRef idx="1">
+            <a:schemeClr val="accent1"/>
+          </a:lnRef>
+          <a:fillRef idx="3">
+            <a:schemeClr val="accent1"/>
+          </a:fillRef>
+          <a:effectRef idx="2">
+            <a:schemeClr val="accent1"/>
+          </a:effectRef>
+          <a:fontRef idx="minor">
+            <a:schemeClr val="lt1"/>
+          </a:fontRef>
+        </p:style>
+        <p:txBody>
+          <a:bodyPr rtlCol="0" anchor="ctr"/>
+          <a:lstStyle/>
+          <a:p>
+            <a:pPr algn="ctr"/>
+          </a:p>
+        </p:txBody>
+      </p:sp>
+      <p:sp>
+        <p:nvSpPr>
+          <p:cNvPr id="24" name="Rectangle 23"/>
+          <p:cNvSpPr/>
+          <p:nvPr/>
+        </p:nvSpPr>
+        <p:spPr>
+          <a:xfrm>
+            <a:off x="10088183" y="6309360"/>
+            <a:ext cx="743145" cy="43891"/>
+          </a:xfrm>
+          <a:prstGeom prst="rect">
+            <a:avLst/>
+          </a:prstGeom>
+          <a:solidFill>
+            <a:srgbClr val="223049"/>
+          </a:solidFill>
+          <a:ln>
+            <a:noFill/>
+          </a:ln>
+          <a:effectLst/>
+        </p:spPr>
+        <p:style>
+          <a:lnRef idx="1">
+            <a:schemeClr val="accent1"/>
+          </a:lnRef>
+          <a:fillRef idx="3">
+            <a:schemeClr val="accent1"/>
+          </a:fillRef>
+          <a:effectRef idx="2">
+            <a:schemeClr val="accent1"/>
+          </a:effectRef>
+          <a:fontRef idx="minor">
+            <a:schemeClr val="lt1"/>
+          </a:fontRef>
+        </p:style>
+        <p:txBody>
+          <a:bodyPr rtlCol="0" anchor="ctr"/>
+          <a:lstStyle/>
+          <a:p>
+            <a:pPr algn="ctr"/>
+          </a:p>
+        </p:txBody>
+      </p:sp>
+      <p:sp>
+        <p:nvSpPr>
+          <p:cNvPr id="25" name="Rectangle 24"/>
+          <p:cNvSpPr/>
+          <p:nvPr/>
+        </p:nvSpPr>
+        <p:spPr>
+          <a:xfrm>
+            <a:off x="10881621" y="6309360"/>
+            <a:ext cx="743145" cy="43891"/>
+          </a:xfrm>
+          <a:prstGeom prst="rect">
+            <a:avLst/>
+          </a:prstGeom>
+          <a:solidFill>
+            <a:srgbClr val="223049"/>
+          </a:solidFill>
+          <a:ln>
+            <a:noFill/>
+          </a:ln>
+          <a:effectLst/>
+        </p:spPr>
+        <p:style>
+          <a:lnRef idx="1">
+            <a:schemeClr val="accent1"/>
+          </a:lnRef>
+          <a:fillRef idx="3">
+            <a:schemeClr val="accent1"/>
+          </a:fillRef>
+          <a:effectRef idx="2">
+            <a:schemeClr val="accent1"/>
+          </a:effectRef>
+          <a:fontRef idx="minor">
+            <a:schemeClr val="lt1"/>
+          </a:fontRef>
+        </p:style>
+        <p:txBody>
+          <a:bodyPr rtlCol="0" anchor="ctr"/>
+          <a:lstStyle/>
+          <a:p>
+            <a:pPr algn="ctr"/>
+          </a:p>
+        </p:txBody>
+      </p:sp>
+      <p:sp>
+        <p:nvSpPr>
+          <p:cNvPr id="26" name="Rectangle 25"/>
+          <p:cNvSpPr/>
+          <p:nvPr/>
+        </p:nvSpPr>
+        <p:spPr>
+          <a:xfrm>
+            <a:off x="566928" y="6455664"/>
+            <a:ext cx="11057839" cy="9144"/>
+          </a:xfrm>
+          <a:prstGeom prst="rect">
+            <a:avLst/>
+          </a:prstGeom>
+          <a:solidFill>
+            <a:srgbClr val="223049"/>
+          </a:solidFill>
+          <a:ln>
+            <a:noFill/>
+          </a:ln>
+          <a:effectLst/>
+        </p:spPr>
+        <p:style>
+          <a:lnRef idx="1">
+            <a:schemeClr val="accent1"/>
+          </a:lnRef>
+          <a:fillRef idx="3">
+            <a:schemeClr val="accent1"/>
+          </a:fillRef>
+          <a:effectRef idx="2">
+            <a:schemeClr val="accent1"/>
+          </a:effectRef>
+          <a:fontRef idx="minor">
+            <a:schemeClr val="lt1"/>
+          </a:fontRef>
+        </p:style>
+        <p:txBody>
+          <a:bodyPr rtlCol="0" anchor="ctr"/>
+          <a:lstStyle/>
+          <a:p>
+            <a:pPr algn="ctr"/>
+          </a:p>
+        </p:txBody>
+      </p:sp>
+      <p:sp>
+        <p:nvSpPr>
+          <p:cNvPr id="27" name="TextBox 26"/>
+          <p:cNvSpPr txBox="1"/>
+          <p:nvPr/>
+        </p:nvSpPr>
+        <p:spPr>
+          <a:xfrm>
+            <a:off x="566928" y="6510528"/>
+            <a:ext cx="9509760" cy="219456"/>
+          </a:xfrm>
+          <a:prstGeom prst="rect">
+            <a:avLst/>
+          </a:prstGeom>
+          <a:noFill/>
+        </p:spPr>
+        <p:txBody>
+          <a:bodyPr wrap="square" lIns="0" rIns="0" tIns="0" bIns="0" anchor="t">
+            <a:spAutoFit/>
+          </a:bodyPr>
+          <a:lstStyle/>
+          <a:p>
+            <a:pPr algn="l">
+              <a:lnSpc>
+                <a:spcPct val="112000"/>
+              </a:lnSpc>
+              <a:spcAft>
+                <a:spcPts val="0"/>
+              </a:spcAft>
+            </a:pPr>
+            <a:r>
+              <a:rPr sz="900" b="0">
+                <a:solidFill>
+                  <a:srgbClr val="8CA0BE"/>
+                </a:solidFill>
+                <a:latin typeface="Segoe UI"/>
+              </a:rPr>
+              <a:t>RetainIQ · Signal Ops Console   ·   PHASE 09 · EXPLAINABILITY</a:t>
+            </a:r>
+          </a:p>
+        </p:txBody>
+      </p:sp>
+      <p:sp>
+        <p:nvSpPr>
+          <p:cNvPr id="28" name="TextBox 27"/>
+          <p:cNvSpPr txBox="1"/>
+          <p:nvPr/>
+        </p:nvSpPr>
+        <p:spPr>
+          <a:xfrm>
+            <a:off x="10527487" y="6510528"/>
+            <a:ext cx="1097280" cy="219456"/>
+          </a:xfrm>
+          <a:prstGeom prst="rect">
+            <a:avLst/>
+          </a:prstGeom>
+          <a:noFill/>
+        </p:spPr>
+        <p:txBody>
+          <a:bodyPr wrap="square" lIns="0" rIns="0" tIns="0" bIns="0" anchor="t">
+            <a:spAutoFit/>
+          </a:bodyPr>
+          <a:lstStyle/>
+          <a:p>
+            <a:pPr algn="r">
+              <a:lnSpc>
+                <a:spcPct val="112000"/>
+              </a:lnSpc>
+              <a:spcAft>
+                <a:spcPts val="0"/>
+              </a:spcAft>
+            </a:pPr>
+            <a:r>
+              <a:rPr sz="900" b="0">
+                <a:solidFill>
+                  <a:srgbClr val="8CA0BE"/>
+                </a:solidFill>
+                <a:latin typeface="Consolas"/>
+              </a:rPr>
+              <a:t>12</a:t>
+            </a:r>
+          </a:p>
+        </p:txBody>
+      </p:sp>
+    </p:spTree>
+  </p:cSld>
+  <p:clrMapOvr>
+    <a:masterClrMapping/>
+  </p:clrMapOvr>
+</p:sld>
+</file>
+
+<file path=ppt/slides/slide13.xml><?xml version="1.0" encoding="utf-8"?>
+<p:sld xmlns:a="http://schemas.openxmlformats.org/drawingml/2006/main" xmlns:p="http://schemas.openxmlformats.org/presentationml/2006/main" xmlns:r="http://schemas.openxmlformats.org/officeDocument/2006/relationships">
+  <p:cSld>
+    <p:spTree>
+      <p:nvGrpSpPr>
+        <p:cNvPr id="1" name=""/>
+        <p:cNvGrpSpPr/>
+        <p:nvPr/>
+      </p:nvGrpSpPr>
+      <p:grpSpPr/>
+      <p:sp>
+        <p:nvSpPr>
+          <p:cNvPr id="2" name="Rectangle 1"/>
+          <p:cNvSpPr/>
+          <p:nvPr/>
+        </p:nvSpPr>
+        <p:spPr>
+          <a:xfrm>
+            <a:off x="0" y="0"/>
+            <a:ext cx="12191695" cy="6858000"/>
+          </a:xfrm>
+          <a:prstGeom prst="rect">
+            <a:avLst/>
+          </a:prstGeom>
+          <a:solidFill>
+            <a:srgbClr val="0A0F1C"/>
+          </a:solidFill>
+          <a:ln>
+            <a:noFill/>
+          </a:ln>
+          <a:effectLst/>
+        </p:spPr>
+        <p:style>
+          <a:lnRef idx="1">
+            <a:schemeClr val="accent1"/>
+          </a:lnRef>
+          <a:fillRef idx="3">
+            <a:schemeClr val="accent1"/>
+          </a:fillRef>
+          <a:effectRef idx="2">
+            <a:schemeClr val="accent1"/>
+          </a:effectRef>
+          <a:fontRef idx="minor">
+            <a:schemeClr val="lt1"/>
+          </a:fontRef>
+        </p:style>
+        <p:txBody>
+          <a:bodyPr rtlCol="0" anchor="ctr"/>
+          <a:lstStyle/>
+          <a:p>
+            <a:pPr algn="ctr"/>
+          </a:p>
+        </p:txBody>
+      </p:sp>
+      <p:sp>
+        <p:nvSpPr>
+          <p:cNvPr id="3" name="TextBox 2"/>
+          <p:cNvSpPr txBox="1"/>
+          <p:nvPr/>
+        </p:nvSpPr>
+        <p:spPr>
+          <a:xfrm>
+            <a:off x="566928" y="365760"/>
+            <a:ext cx="8229600" cy="237744"/>
+          </a:xfrm>
+          <a:prstGeom prst="rect">
+            <a:avLst/>
+          </a:prstGeom>
+          <a:noFill/>
+        </p:spPr>
+        <p:txBody>
+          <a:bodyPr wrap="square" lIns="0" rIns="0" tIns="0" bIns="0" anchor="t">
+            <a:spAutoFit/>
+          </a:bodyPr>
+          <a:lstStyle/>
+          <a:p>
+            <a:pPr algn="l">
+              <a:lnSpc>
+                <a:spcPct val="112000"/>
+              </a:lnSpc>
+              <a:spcAft>
+                <a:spcPts val="0"/>
+              </a:spcAft>
+            </a:pPr>
+            <a:r>
+              <a:rPr sz="1000" b="1">
+                <a:solidFill>
+                  <a:srgbClr val="2FD8B4"/>
+                </a:solidFill>
+                <a:latin typeface="Consolas"/>
+              </a:rPr>
+              <a:t>PHASE 10  ·  RISK SEGMENTATION</a:t>
+            </a:r>
+          </a:p>
+        </p:txBody>
+      </p:sp>
+      <p:sp>
+        <p:nvSpPr>
+          <p:cNvPr id="4" name="TextBox 3"/>
+          <p:cNvSpPr txBox="1"/>
+          <p:nvPr/>
+        </p:nvSpPr>
+        <p:spPr>
+          <a:xfrm>
+            <a:off x="566928" y="576072"/>
+            <a:ext cx="11057839" cy="475488"/>
+          </a:xfrm>
+          <a:prstGeom prst="rect">
+            <a:avLst/>
+          </a:prstGeom>
+          <a:noFill/>
+        </p:spPr>
+        <p:txBody>
+          <a:bodyPr wrap="square" lIns="0" rIns="0" tIns="0" bIns="0" anchor="t">
+            <a:spAutoFit/>
+          </a:bodyPr>
+          <a:lstStyle/>
+          <a:p>
+            <a:pPr algn="l">
+              <a:lnSpc>
+                <a:spcPct val="112000"/>
+              </a:lnSpc>
+              <a:spcAft>
+                <a:spcPts val="0"/>
+              </a:spcAft>
+            </a:pPr>
+            <a:r>
+              <a:rPr sz="2600" b="1">
+                <a:solidFill>
+                  <a:srgbClr val="EAF0F7"/>
+                </a:solidFill>
+                <a:latin typeface="Segoe UI"/>
+              </a:rPr>
+              <a:t>Turning a probability into a work queue</a:t>
+            </a:r>
+          </a:p>
+        </p:txBody>
+      </p:sp>
+      <p:sp>
+        <p:nvSpPr>
+          <p:cNvPr id="5" name="TextBox 4"/>
+          <p:cNvSpPr txBox="1"/>
+          <p:nvPr/>
+        </p:nvSpPr>
+        <p:spPr>
+          <a:xfrm>
+            <a:off x="566928" y="1060704"/>
+            <a:ext cx="11057839" cy="274320"/>
+          </a:xfrm>
+          <a:prstGeom prst="rect">
+            <a:avLst/>
+          </a:prstGeom>
+          <a:noFill/>
+        </p:spPr>
+        <p:txBody>
+          <a:bodyPr wrap="square" lIns="0" rIns="0" tIns="0" bIns="0" anchor="t">
+            <a:spAutoFit/>
+          </a:bodyPr>
+          <a:lstStyle/>
+          <a:p>
+            <a:pPr algn="l">
+              <a:lnSpc>
+                <a:spcPct val="112000"/>
+              </a:lnSpc>
+              <a:spcAft>
+                <a:spcPts val="0"/>
+              </a:spcAft>
+            </a:pPr>
+            <a:r>
+              <a:rPr sz="1250" b="0">
+                <a:solidFill>
+                  <a:srgbClr val="8CA0BE"/>
+                </a:solidFill>
+                <a:latin typeface="Segoe UI"/>
+              </a:rPr>
+              <a:t>Every scored customer lands in one of three operational bands</a:t>
+            </a:r>
+          </a:p>
+        </p:txBody>
+      </p:sp>
+      <p:sp>
+        <p:nvSpPr>
+          <p:cNvPr id="6" name="Rectangle 5"/>
+          <p:cNvSpPr/>
+          <p:nvPr/>
+        </p:nvSpPr>
+        <p:spPr>
+          <a:xfrm>
+            <a:off x="566928" y="1371600"/>
+            <a:ext cx="11057839" cy="12801"/>
+          </a:xfrm>
+          <a:prstGeom prst="rect">
+            <a:avLst/>
+          </a:prstGeom>
+          <a:solidFill>
+            <a:srgbClr val="223049"/>
+          </a:solidFill>
+          <a:ln>
+            <a:noFill/>
+          </a:ln>
+          <a:effectLst/>
+        </p:spPr>
+        <p:style>
+          <a:lnRef idx="1">
+            <a:schemeClr val="accent1"/>
+          </a:lnRef>
+          <a:fillRef idx="3">
+            <a:schemeClr val="accent1"/>
+          </a:fillRef>
+          <a:effectRef idx="2">
+            <a:schemeClr val="accent1"/>
+          </a:effectRef>
+          <a:fontRef idx="minor">
+            <a:schemeClr val="lt1"/>
+          </a:fontRef>
+        </p:style>
+        <p:txBody>
+          <a:bodyPr rtlCol="0" anchor="ctr"/>
+          <a:lstStyle/>
+          <a:p>
+            <a:pPr algn="ctr"/>
+          </a:p>
+        </p:txBody>
+      </p:sp>
+      <p:sp>
+        <p:nvSpPr>
+          <p:cNvPr id="7" name="Rounded Rectangle 6"/>
+          <p:cNvSpPr/>
+          <p:nvPr/>
+        </p:nvSpPr>
+        <p:spPr>
+          <a:xfrm>
+            <a:off x="566928" y="1517904"/>
+            <a:ext cx="3539642" cy="914400"/>
+          </a:xfrm>
+          <a:prstGeom prst="roundRect">
+            <a:avLst>
+              <a:gd name="adj" fmla="val 8000"/>
+            </a:avLst>
+          </a:prstGeom>
+          <a:solidFill>
+            <a:srgbClr val="111A2C"/>
+          </a:solidFill>
+          <a:ln w="15240">
+            <a:solidFill>
+              <a:srgbClr val="2FD8B4"/>
+            </a:solidFill>
+          </a:ln>
+          <a:effectLst/>
+        </p:spPr>
+        <p:style>
+          <a:lnRef idx="1">
+            <a:schemeClr val="accent1"/>
+          </a:lnRef>
+          <a:fillRef idx="3">
+            <a:schemeClr val="accent1"/>
+          </a:fillRef>
+          <a:effectRef idx="2">
+            <a:schemeClr val="accent1"/>
+          </a:effectRef>
+          <a:fontRef idx="minor">
+            <a:schemeClr val="lt1"/>
+          </a:fontRef>
+        </p:style>
+        <p:txBody>
+          <a:bodyPr rtlCol="0" anchor="ctr"/>
+          <a:lstStyle/>
+          <a:p>
+            <a:pPr algn="ctr"/>
+          </a:p>
+        </p:txBody>
+      </p:sp>
+      <p:sp>
+        <p:nvSpPr>
+          <p:cNvPr id="8" name="TextBox 7"/>
+          <p:cNvSpPr txBox="1"/>
+          <p:nvPr/>
+        </p:nvSpPr>
+        <p:spPr>
+          <a:xfrm>
+            <a:off x="768096" y="1664207"/>
+            <a:ext cx="3137306" cy="621792"/>
+          </a:xfrm>
+          <a:prstGeom prst="rect">
+            <a:avLst/>
+          </a:prstGeom>
+          <a:noFill/>
+        </p:spPr>
+        <p:txBody>
+          <a:bodyPr wrap="square" lIns="0" rIns="0" tIns="0" bIns="0" anchor="t">
+            <a:spAutoFit/>
+          </a:bodyPr>
+          <a:lstStyle/>
+          <a:p>
+            <a:pPr algn="l">
+              <a:lnSpc>
+                <a:spcPct val="112000"/>
+              </a:lnSpc>
+              <a:spcAft>
+                <a:spcPts val="200"/>
+              </a:spcAft>
+            </a:pPr>
+            <a:r>
+              <a:rPr sz="1150" b="1">
+                <a:solidFill>
+                  <a:srgbClr val="2FD8B4"/>
+                </a:solidFill>
+                <a:latin typeface="Consolas"/>
+              </a:rPr>
+              <a:t>&lt; 30%   LOW RISK</a:t>
+            </a:r>
+          </a:p>
+          <a:p>
+            <a:pPr algn="l">
+              <a:lnSpc>
+                <a:spcPct val="112000"/>
+              </a:lnSpc>
+              <a:spcAft>
+                <a:spcPts val="0"/>
+              </a:spcAft>
+            </a:pPr>
+            <a:r>
+              <a:rPr sz="1250" b="0">
+                <a:solidFill>
+                  <a:srgbClr val="EAF0F7"/>
+                </a:solidFill>
+                <a:latin typeface="Segoe UI"/>
+              </a:rPr>
+              <a:t>4,435 customers</a:t>
+            </a:r>
+          </a:p>
+        </p:txBody>
+      </p:sp>
+      <p:sp>
+        <p:nvSpPr>
+          <p:cNvPr id="9" name="Rounded Rectangle 8"/>
+          <p:cNvSpPr/>
+          <p:nvPr/>
+        </p:nvSpPr>
+        <p:spPr>
+          <a:xfrm>
+            <a:off x="4326026" y="1517904"/>
+            <a:ext cx="3539642" cy="914400"/>
+          </a:xfrm>
+          <a:prstGeom prst="roundRect">
+            <a:avLst>
+              <a:gd name="adj" fmla="val 8000"/>
+            </a:avLst>
+          </a:prstGeom>
+          <a:solidFill>
+            <a:srgbClr val="111A2C"/>
+          </a:solidFill>
+          <a:ln w="15240">
+            <a:solidFill>
+              <a:srgbClr val="F5A623"/>
+            </a:solidFill>
+          </a:ln>
+          <a:effectLst/>
+        </p:spPr>
+        <p:style>
+          <a:lnRef idx="1">
+            <a:schemeClr val="accent1"/>
+          </a:lnRef>
+          <a:fillRef idx="3">
+            <a:schemeClr val="accent1"/>
+          </a:fillRef>
+          <a:effectRef idx="2">
+            <a:schemeClr val="accent1"/>
+          </a:effectRef>
+          <a:fontRef idx="minor">
+            <a:schemeClr val="lt1"/>
+          </a:fontRef>
+        </p:style>
+        <p:txBody>
+          <a:bodyPr rtlCol="0" anchor="ctr"/>
+          <a:lstStyle/>
+          <a:p>
+            <a:pPr algn="ctr"/>
+          </a:p>
+        </p:txBody>
+      </p:sp>
+      <p:sp>
+        <p:nvSpPr>
+          <p:cNvPr id="10" name="TextBox 9"/>
+          <p:cNvSpPr txBox="1"/>
+          <p:nvPr/>
+        </p:nvSpPr>
+        <p:spPr>
+          <a:xfrm>
+            <a:off x="4527194" y="1664207"/>
+            <a:ext cx="3137306" cy="621792"/>
+          </a:xfrm>
+          <a:prstGeom prst="rect">
+            <a:avLst/>
+          </a:prstGeom>
+          <a:noFill/>
+        </p:spPr>
+        <p:txBody>
+          <a:bodyPr wrap="square" lIns="0" rIns="0" tIns="0" bIns="0" anchor="t">
+            <a:spAutoFit/>
+          </a:bodyPr>
+          <a:lstStyle/>
+          <a:p>
+            <a:pPr algn="l">
+              <a:lnSpc>
+                <a:spcPct val="112000"/>
+              </a:lnSpc>
+              <a:spcAft>
+                <a:spcPts val="200"/>
+              </a:spcAft>
+            </a:pPr>
+            <a:r>
+              <a:rPr sz="1150" b="1">
+                <a:solidFill>
+                  <a:srgbClr val="F5A623"/>
+                </a:solidFill>
+                <a:latin typeface="Consolas"/>
+              </a:rPr>
+              <a:t>30 – 60%   MEDIUM RISK</a:t>
+            </a:r>
+          </a:p>
+          <a:p>
+            <a:pPr algn="l">
+              <a:lnSpc>
+                <a:spcPct val="112000"/>
+              </a:lnSpc>
+              <a:spcAft>
+                <a:spcPts val="0"/>
+              </a:spcAft>
+            </a:pPr>
+            <a:r>
+              <a:rPr sz="1250" b="0">
+                <a:solidFill>
+                  <a:srgbClr val="EAF0F7"/>
+                </a:solidFill>
+                <a:latin typeface="Segoe UI"/>
+              </a:rPr>
+              <a:t>1,473 customers</a:t>
+            </a:r>
+          </a:p>
+        </p:txBody>
+      </p:sp>
+      <p:sp>
+        <p:nvSpPr>
+          <p:cNvPr id="11" name="Rounded Rectangle 10"/>
+          <p:cNvSpPr/>
+          <p:nvPr/>
+        </p:nvSpPr>
+        <p:spPr>
+          <a:xfrm>
+            <a:off x="8085124" y="1517904"/>
+            <a:ext cx="3539642" cy="914400"/>
+          </a:xfrm>
+          <a:prstGeom prst="roundRect">
+            <a:avLst>
+              <a:gd name="adj" fmla="val 8000"/>
+            </a:avLst>
+          </a:prstGeom>
+          <a:solidFill>
+            <a:srgbClr val="111A2C"/>
+          </a:solidFill>
+          <a:ln w="15240">
+            <a:solidFill>
+              <a:srgbClr val="FF5C6C"/>
+            </a:solidFill>
+          </a:ln>
+          <a:effectLst/>
+        </p:spPr>
+        <p:style>
+          <a:lnRef idx="1">
+            <a:schemeClr val="accent1"/>
+          </a:lnRef>
+          <a:fillRef idx="3">
+            <a:schemeClr val="accent1"/>
+          </a:fillRef>
+          <a:effectRef idx="2">
+            <a:schemeClr val="accent1"/>
+          </a:effectRef>
+          <a:fontRef idx="minor">
+            <a:schemeClr val="lt1"/>
+          </a:fontRef>
+        </p:style>
+        <p:txBody>
+          <a:bodyPr rtlCol="0" anchor="ctr"/>
+          <a:lstStyle/>
+          <a:p>
+            <a:pPr algn="ctr"/>
+          </a:p>
+        </p:txBody>
+      </p:sp>
+      <p:sp>
+        <p:nvSpPr>
+          <p:cNvPr id="12" name="TextBox 11"/>
+          <p:cNvSpPr txBox="1"/>
+          <p:nvPr/>
+        </p:nvSpPr>
+        <p:spPr>
+          <a:xfrm>
+            <a:off x="8286292" y="1664207"/>
+            <a:ext cx="3137306" cy="621792"/>
+          </a:xfrm>
+          <a:prstGeom prst="rect">
+            <a:avLst/>
+          </a:prstGeom>
+          <a:noFill/>
+        </p:spPr>
+        <p:txBody>
+          <a:bodyPr wrap="square" lIns="0" rIns="0" tIns="0" bIns="0" anchor="t">
+            <a:spAutoFit/>
+          </a:bodyPr>
+          <a:lstStyle/>
+          <a:p>
+            <a:pPr algn="l">
+              <a:lnSpc>
+                <a:spcPct val="112000"/>
+              </a:lnSpc>
+              <a:spcAft>
+                <a:spcPts val="200"/>
+              </a:spcAft>
+            </a:pPr>
+            <a:r>
+              <a:rPr sz="1150" b="1">
+                <a:solidFill>
+                  <a:srgbClr val="FF5C6C"/>
+                </a:solidFill>
+                <a:latin typeface="Consolas"/>
+              </a:rPr>
+              <a:t>≥ 60%   HIGH RISK</a:t>
+            </a:r>
+          </a:p>
+          <a:p>
+            <a:pPr algn="l">
+              <a:lnSpc>
+                <a:spcPct val="112000"/>
+              </a:lnSpc>
+              <a:spcAft>
+                <a:spcPts val="0"/>
+              </a:spcAft>
+            </a:pPr>
+            <a:r>
+              <a:rPr sz="1250" b="0">
+                <a:solidFill>
+                  <a:srgbClr val="EAF0F7"/>
+                </a:solidFill>
+                <a:latin typeface="Segoe UI"/>
+              </a:rPr>
+              <a:t>1,135 customers</a:t>
+            </a:r>
+          </a:p>
+        </p:txBody>
+      </p:sp>
+      <p:pic>
+        <p:nvPicPr>
+          <p:cNvPr id="13" name="Picture 12" descr="chart_risk_bands.png"/>
+          <p:cNvPicPr>
+            <a:picLocks noChangeAspect="1"/>
+          </p:cNvPicPr>
+          <p:nvPr/>
+        </p:nvPicPr>
+        <p:blipFill>
+          <a:blip r:embed="rId2"/>
+          <a:stretch>
+            <a:fillRect/>
+          </a:stretch>
+        </p:blipFill>
+        <p:spPr>
+          <a:xfrm>
+            <a:off x="566928" y="2596896"/>
+            <a:ext cx="7059168" cy="3473831"/>
+          </a:xfrm>
+          <a:prstGeom prst="rect">
+            <a:avLst/>
+          </a:prstGeom>
+        </p:spPr>
+      </p:pic>
+      <p:sp>
+        <p:nvSpPr>
+          <p:cNvPr id="14" name="Rounded Rectangle 13"/>
+          <p:cNvSpPr/>
+          <p:nvPr/>
+        </p:nvSpPr>
+        <p:spPr>
+          <a:xfrm>
+            <a:off x="7882127" y="2651760"/>
+            <a:ext cx="3742639" cy="1709928"/>
+          </a:xfrm>
+          <a:prstGeom prst="roundRect">
+            <a:avLst>
+              <a:gd name="adj" fmla="val 8000"/>
+            </a:avLst>
+          </a:prstGeom>
+          <a:solidFill>
+            <a:srgbClr val="162136"/>
+          </a:solidFill>
+          <a:ln w="15240">
+            <a:solidFill>
+              <a:srgbClr val="2FD8B4"/>
+            </a:solidFill>
+          </a:ln>
+          <a:effectLst/>
+        </p:spPr>
+        <p:style>
+          <a:lnRef idx="1">
+            <a:schemeClr val="accent1"/>
+          </a:lnRef>
+          <a:fillRef idx="3">
+            <a:schemeClr val="accent1"/>
+          </a:fillRef>
+          <a:effectRef idx="2">
+            <a:schemeClr val="accent1"/>
+          </a:effectRef>
+          <a:fontRef idx="minor">
+            <a:schemeClr val="lt1"/>
+          </a:fontRef>
+        </p:style>
+        <p:txBody>
+          <a:bodyPr rtlCol="0" anchor="ctr"/>
+          <a:lstStyle/>
+          <a:p>
+            <a:pPr algn="ctr"/>
+          </a:p>
+        </p:txBody>
+      </p:sp>
+      <p:sp>
+        <p:nvSpPr>
+          <p:cNvPr id="15" name="TextBox 14"/>
+          <p:cNvSpPr txBox="1"/>
+          <p:nvPr/>
+        </p:nvSpPr>
+        <p:spPr>
+          <a:xfrm>
+            <a:off x="8065007" y="2798064"/>
+            <a:ext cx="3376879" cy="1417319"/>
+          </a:xfrm>
+          <a:prstGeom prst="rect">
+            <a:avLst/>
+          </a:prstGeom>
+          <a:noFill/>
+        </p:spPr>
+        <p:txBody>
+          <a:bodyPr wrap="square" lIns="0" rIns="0" tIns="0" bIns="0" anchor="t">
+            <a:spAutoFit/>
+          </a:bodyPr>
+          <a:lstStyle/>
+          <a:p>
+            <a:pPr algn="l">
+              <a:lnSpc>
+                <a:spcPct val="112000"/>
+              </a:lnSpc>
+              <a:spcAft>
+                <a:spcPts val="500"/>
+              </a:spcAft>
+            </a:pPr>
+            <a:r>
+              <a:rPr sz="1050" b="1">
+                <a:solidFill>
+                  <a:srgbClr val="2FD8B4"/>
+                </a:solidFill>
+                <a:latin typeface="Consolas"/>
+              </a:rPr>
+              <a:t>VALIDATION</a:t>
+            </a:r>
+          </a:p>
+          <a:p>
+            <a:pPr algn="l">
+              <a:lnSpc>
+                <a:spcPct val="118000"/>
+              </a:lnSpc>
+              <a:spcAft>
+                <a:spcPts val="0"/>
+              </a:spcAft>
+            </a:pPr>
+            <a:r>
+              <a:rPr sz="1060" b="0">
+                <a:solidFill>
+                  <a:srgbClr val="EAF0F7"/>
+                </a:solidFill>
+                <a:latin typeface="Segoe UI"/>
+              </a:rPr>
+              <a:t>The bands track reality: actual churn is 9.5% in low risk, 42.0% in medium and 73.0% in high risk. The segmentation is not decoration — it orders the portfolio correctly.</a:t>
+            </a:r>
+          </a:p>
+        </p:txBody>
+      </p:sp>
+      <p:sp>
+        <p:nvSpPr>
+          <p:cNvPr id="16" name="Rounded Rectangle 15"/>
+          <p:cNvSpPr/>
+          <p:nvPr/>
+        </p:nvSpPr>
+        <p:spPr>
+          <a:xfrm>
+            <a:off x="7882127" y="4507992"/>
+            <a:ext cx="3742639" cy="1709928"/>
+          </a:xfrm>
+          <a:prstGeom prst="roundRect">
+            <a:avLst>
+              <a:gd name="adj" fmla="val 8000"/>
+            </a:avLst>
+          </a:prstGeom>
+          <a:solidFill>
+            <a:srgbClr val="111A2C"/>
+          </a:solidFill>
+          <a:ln w="15240">
+            <a:solidFill>
+              <a:srgbClr val="FF5C6C"/>
+            </a:solidFill>
+          </a:ln>
+          <a:effectLst/>
+        </p:spPr>
+        <p:style>
+          <a:lnRef idx="1">
+            <a:schemeClr val="accent1"/>
+          </a:lnRef>
+          <a:fillRef idx="3">
+            <a:schemeClr val="accent1"/>
+          </a:fillRef>
+          <a:effectRef idx="2">
+            <a:schemeClr val="accent1"/>
+          </a:effectRef>
+          <a:fontRef idx="minor">
+            <a:schemeClr val="lt1"/>
+          </a:fontRef>
+        </p:style>
+        <p:txBody>
+          <a:bodyPr rtlCol="0" anchor="ctr"/>
+          <a:lstStyle/>
+          <a:p>
+            <a:pPr algn="ctr"/>
+          </a:p>
+        </p:txBody>
+      </p:sp>
+      <p:sp>
+        <p:nvSpPr>
+          <p:cNvPr id="17" name="TextBox 16"/>
+          <p:cNvSpPr txBox="1"/>
+          <p:nvPr/>
+        </p:nvSpPr>
+        <p:spPr>
+          <a:xfrm>
+            <a:off x="8065007" y="4654296"/>
+            <a:ext cx="3376879" cy="1417319"/>
+          </a:xfrm>
+          <a:prstGeom prst="rect">
+            <a:avLst/>
+          </a:prstGeom>
+          <a:noFill/>
+        </p:spPr>
+        <p:txBody>
+          <a:bodyPr wrap="square" lIns="0" rIns="0" tIns="0" bIns="0" anchor="t">
+            <a:spAutoFit/>
+          </a:bodyPr>
+          <a:lstStyle/>
+          <a:p>
+            <a:pPr algn="l">
+              <a:lnSpc>
+                <a:spcPct val="112000"/>
+              </a:lnSpc>
+              <a:spcAft>
+                <a:spcPts val="500"/>
+              </a:spcAft>
+            </a:pPr>
+            <a:r>
+              <a:rPr sz="1050" b="1">
+                <a:solidFill>
+                  <a:srgbClr val="FF5C6C"/>
+                </a:solidFill>
+                <a:latin typeface="Consolas"/>
+              </a:rPr>
+              <a:t>THE OPERATIONAL PAYOFF</a:t>
+            </a:r>
+          </a:p>
+          <a:p>
+            <a:pPr algn="l">
+              <a:lnSpc>
+                <a:spcPct val="118000"/>
+              </a:lnSpc>
+              <a:spcAft>
+                <a:spcPts val="0"/>
+              </a:spcAft>
+            </a:pPr>
+            <a:r>
+              <a:rPr sz="1060" b="0">
+                <a:solidFill>
+                  <a:srgbClr val="EAF0F7"/>
+                </a:solidFill>
+                <a:latin typeface="Segoe UI"/>
+              </a:rPr>
+              <a:t>Instead of calling 7,043 customers, the team starts with 1,135 — 16.1% of the base, where 73% will actually leave — carrying $92,539 of recurring monthly charges.</a:t>
+            </a:r>
+          </a:p>
+        </p:txBody>
+      </p:sp>
+      <p:sp>
+        <p:nvSpPr>
+          <p:cNvPr id="18" name="Rectangle 17"/>
+          <p:cNvSpPr/>
+          <p:nvPr/>
+        </p:nvSpPr>
+        <p:spPr>
+          <a:xfrm>
+            <a:off x="566928" y="6309360"/>
+            <a:ext cx="743145" cy="43891"/>
+          </a:xfrm>
+          <a:prstGeom prst="rect">
+            <a:avLst/>
+          </a:prstGeom>
+          <a:solidFill>
+            <a:srgbClr val="223049"/>
+          </a:solidFill>
+          <a:ln>
+            <a:noFill/>
+          </a:ln>
+          <a:effectLst/>
+        </p:spPr>
+        <p:style>
+          <a:lnRef idx="1">
+            <a:schemeClr val="accent1"/>
+          </a:lnRef>
+          <a:fillRef idx="3">
+            <a:schemeClr val="accent1"/>
+          </a:fillRef>
+          <a:effectRef idx="2">
+            <a:schemeClr val="accent1"/>
+          </a:effectRef>
+          <a:fontRef idx="minor">
+            <a:schemeClr val="lt1"/>
+          </a:fontRef>
+        </p:style>
+        <p:txBody>
+          <a:bodyPr rtlCol="0" anchor="ctr"/>
+          <a:lstStyle/>
+          <a:p>
+            <a:pPr algn="ctr"/>
+          </a:p>
+        </p:txBody>
+      </p:sp>
+      <p:sp>
+        <p:nvSpPr>
+          <p:cNvPr id="19" name="Rectangle 18"/>
+          <p:cNvSpPr/>
+          <p:nvPr/>
+        </p:nvSpPr>
+        <p:spPr>
+          <a:xfrm>
+            <a:off x="1360365" y="6309360"/>
+            <a:ext cx="743145" cy="43891"/>
+          </a:xfrm>
+          <a:prstGeom prst="rect">
+            <a:avLst/>
+          </a:prstGeom>
+          <a:solidFill>
+            <a:srgbClr val="223049"/>
+          </a:solidFill>
+          <a:ln>
+            <a:noFill/>
+          </a:ln>
+          <a:effectLst/>
+        </p:spPr>
+        <p:style>
+          <a:lnRef idx="1">
+            <a:schemeClr val="accent1"/>
+          </a:lnRef>
+          <a:fillRef idx="3">
+            <a:schemeClr val="accent1"/>
+          </a:fillRef>
+          <a:effectRef idx="2">
+            <a:schemeClr val="accent1"/>
+          </a:effectRef>
+          <a:fontRef idx="minor">
+            <a:schemeClr val="lt1"/>
+          </a:fontRef>
+        </p:style>
+        <p:txBody>
+          <a:bodyPr rtlCol="0" anchor="ctr"/>
+          <a:lstStyle/>
+          <a:p>
+            <a:pPr algn="ctr"/>
+          </a:p>
+        </p:txBody>
+      </p:sp>
+      <p:sp>
+        <p:nvSpPr>
+          <p:cNvPr id="20" name="Rectangle 19"/>
+          <p:cNvSpPr/>
+          <p:nvPr/>
+        </p:nvSpPr>
+        <p:spPr>
+          <a:xfrm>
+            <a:off x="2153803" y="6309360"/>
+            <a:ext cx="743145" cy="43891"/>
+          </a:xfrm>
+          <a:prstGeom prst="rect">
+            <a:avLst/>
+          </a:prstGeom>
+          <a:solidFill>
+            <a:srgbClr val="223049"/>
+          </a:solidFill>
+          <a:ln>
+            <a:noFill/>
+          </a:ln>
+          <a:effectLst/>
+        </p:spPr>
+        <p:style>
+          <a:lnRef idx="1">
+            <a:schemeClr val="accent1"/>
+          </a:lnRef>
+          <a:fillRef idx="3">
+            <a:schemeClr val="accent1"/>
+          </a:fillRef>
+          <a:effectRef idx="2">
+            <a:schemeClr val="accent1"/>
+          </a:effectRef>
+          <a:fontRef idx="minor">
+            <a:schemeClr val="lt1"/>
+          </a:fontRef>
+        </p:style>
+        <p:txBody>
+          <a:bodyPr rtlCol="0" anchor="ctr"/>
+          <a:lstStyle/>
+          <a:p>
+            <a:pPr algn="ctr"/>
+          </a:p>
+        </p:txBody>
+      </p:sp>
+      <p:sp>
+        <p:nvSpPr>
+          <p:cNvPr id="21" name="Rectangle 20"/>
+          <p:cNvSpPr/>
+          <p:nvPr/>
+        </p:nvSpPr>
+        <p:spPr>
+          <a:xfrm>
+            <a:off x="2947241" y="6309360"/>
+            <a:ext cx="743145" cy="43891"/>
+          </a:xfrm>
+          <a:prstGeom prst="rect">
+            <a:avLst/>
+          </a:prstGeom>
+          <a:solidFill>
+            <a:srgbClr val="223049"/>
+          </a:solidFill>
+          <a:ln>
+            <a:noFill/>
+          </a:ln>
+          <a:effectLst/>
+        </p:spPr>
+        <p:style>
+          <a:lnRef idx="1">
+            <a:schemeClr val="accent1"/>
+          </a:lnRef>
+          <a:fillRef idx="3">
+            <a:schemeClr val="accent1"/>
+          </a:fillRef>
+          <a:effectRef idx="2">
+            <a:schemeClr val="accent1"/>
+          </a:effectRef>
+          <a:fontRef idx="minor">
+            <a:schemeClr val="lt1"/>
+          </a:fontRef>
+        </p:style>
+        <p:txBody>
+          <a:bodyPr rtlCol="0" anchor="ctr"/>
+          <a:lstStyle/>
+          <a:p>
+            <a:pPr algn="ctr"/>
+          </a:p>
+        </p:txBody>
+      </p:sp>
+      <p:sp>
+        <p:nvSpPr>
+          <p:cNvPr id="22" name="Rectangle 21"/>
+          <p:cNvSpPr/>
+          <p:nvPr/>
+        </p:nvSpPr>
+        <p:spPr>
+          <a:xfrm>
+            <a:off x="3740679" y="6309360"/>
+            <a:ext cx="743145" cy="43891"/>
+          </a:xfrm>
+          <a:prstGeom prst="rect">
+            <a:avLst/>
+          </a:prstGeom>
+          <a:solidFill>
+            <a:srgbClr val="223049"/>
+          </a:solidFill>
+          <a:ln>
+            <a:noFill/>
+          </a:ln>
+          <a:effectLst/>
+        </p:spPr>
+        <p:style>
+          <a:lnRef idx="1">
+            <a:schemeClr val="accent1"/>
+          </a:lnRef>
+          <a:fillRef idx="3">
+            <a:schemeClr val="accent1"/>
+          </a:fillRef>
+          <a:effectRef idx="2">
+            <a:schemeClr val="accent1"/>
+          </a:effectRef>
+          <a:fontRef idx="minor">
+            <a:schemeClr val="lt1"/>
+          </a:fontRef>
+        </p:style>
+        <p:txBody>
+          <a:bodyPr rtlCol="0" anchor="ctr"/>
+          <a:lstStyle/>
+          <a:p>
+            <a:pPr algn="ctr"/>
+          </a:p>
+        </p:txBody>
+      </p:sp>
+      <p:sp>
+        <p:nvSpPr>
+          <p:cNvPr id="23" name="Rectangle 22"/>
+          <p:cNvSpPr/>
+          <p:nvPr/>
+        </p:nvSpPr>
+        <p:spPr>
+          <a:xfrm>
+            <a:off x="4534117" y="6309360"/>
+            <a:ext cx="743145" cy="43891"/>
+          </a:xfrm>
+          <a:prstGeom prst="rect">
+            <a:avLst/>
+          </a:prstGeom>
+          <a:solidFill>
+            <a:srgbClr val="223049"/>
+          </a:solidFill>
+          <a:ln>
+            <a:noFill/>
+          </a:ln>
+          <a:effectLst/>
+        </p:spPr>
+        <p:style>
+          <a:lnRef idx="1">
+            <a:schemeClr val="accent1"/>
+          </a:lnRef>
+          <a:fillRef idx="3">
+            <a:schemeClr val="accent1"/>
+          </a:fillRef>
+          <a:effectRef idx="2">
+            <a:schemeClr val="accent1"/>
+          </a:effectRef>
+          <a:fontRef idx="minor">
+            <a:schemeClr val="lt1"/>
+          </a:fontRef>
+        </p:style>
+        <p:txBody>
+          <a:bodyPr rtlCol="0" anchor="ctr"/>
+          <a:lstStyle/>
+          <a:p>
+            <a:pPr algn="ctr"/>
+          </a:p>
+        </p:txBody>
+      </p:sp>
+      <p:sp>
+        <p:nvSpPr>
+          <p:cNvPr id="24" name="Rectangle 23"/>
+          <p:cNvSpPr/>
+          <p:nvPr/>
+        </p:nvSpPr>
+        <p:spPr>
+          <a:xfrm>
+            <a:off x="5327555" y="6309360"/>
+            <a:ext cx="743145" cy="43891"/>
+          </a:xfrm>
+          <a:prstGeom prst="rect">
+            <a:avLst/>
+          </a:prstGeom>
+          <a:solidFill>
+            <a:srgbClr val="223049"/>
+          </a:solidFill>
+          <a:ln>
+            <a:noFill/>
+          </a:ln>
+          <a:effectLst/>
+        </p:spPr>
+        <p:style>
+          <a:lnRef idx="1">
+            <a:schemeClr val="accent1"/>
+          </a:lnRef>
+          <a:fillRef idx="3">
+            <a:schemeClr val="accent1"/>
+          </a:fillRef>
+          <a:effectRef idx="2">
+            <a:schemeClr val="accent1"/>
+          </a:effectRef>
+          <a:fontRef idx="minor">
+            <a:schemeClr val="lt1"/>
+          </a:fontRef>
+        </p:style>
+        <p:txBody>
+          <a:bodyPr rtlCol="0" anchor="ctr"/>
+          <a:lstStyle/>
+          <a:p>
+            <a:pPr algn="ctr"/>
+          </a:p>
+        </p:txBody>
+      </p:sp>
+      <p:sp>
+        <p:nvSpPr>
+          <p:cNvPr id="25" name="Rectangle 24"/>
+          <p:cNvSpPr/>
+          <p:nvPr/>
+        </p:nvSpPr>
+        <p:spPr>
+          <a:xfrm>
+            <a:off x="6120993" y="6309360"/>
+            <a:ext cx="743145" cy="43891"/>
+          </a:xfrm>
+          <a:prstGeom prst="rect">
+            <a:avLst/>
+          </a:prstGeom>
+          <a:solidFill>
+            <a:srgbClr val="223049"/>
+          </a:solidFill>
+          <a:ln>
+            <a:noFill/>
+          </a:ln>
+          <a:effectLst/>
+        </p:spPr>
+        <p:style>
+          <a:lnRef idx="1">
+            <a:schemeClr val="accent1"/>
+          </a:lnRef>
+          <a:fillRef idx="3">
+            <a:schemeClr val="accent1"/>
+          </a:fillRef>
+          <a:effectRef idx="2">
+            <a:schemeClr val="accent1"/>
+          </a:effectRef>
+          <a:fontRef idx="minor">
+            <a:schemeClr val="lt1"/>
+          </a:fontRef>
+        </p:style>
+        <p:txBody>
+          <a:bodyPr rtlCol="0" anchor="ctr"/>
+          <a:lstStyle/>
+          <a:p>
+            <a:pPr algn="ctr"/>
+          </a:p>
+        </p:txBody>
+      </p:sp>
+      <p:sp>
+        <p:nvSpPr>
+          <p:cNvPr id="26" name="Rectangle 25"/>
+          <p:cNvSpPr/>
+          <p:nvPr/>
+        </p:nvSpPr>
+        <p:spPr>
+          <a:xfrm>
+            <a:off x="6914431" y="6309360"/>
+            <a:ext cx="743145" cy="43891"/>
+          </a:xfrm>
+          <a:prstGeom prst="rect">
+            <a:avLst/>
+          </a:prstGeom>
+          <a:solidFill>
+            <a:srgbClr val="223049"/>
+          </a:solidFill>
+          <a:ln>
+            <a:noFill/>
+          </a:ln>
+          <a:effectLst/>
+        </p:spPr>
+        <p:style>
+          <a:lnRef idx="1">
+            <a:schemeClr val="accent1"/>
+          </a:lnRef>
+          <a:fillRef idx="3">
+            <a:schemeClr val="accent1"/>
+          </a:fillRef>
+          <a:effectRef idx="2">
+            <a:schemeClr val="accent1"/>
+          </a:effectRef>
+          <a:fontRef idx="minor">
+            <a:schemeClr val="lt1"/>
+          </a:fontRef>
+        </p:style>
+        <p:txBody>
+          <a:bodyPr rtlCol="0" anchor="ctr"/>
+          <a:lstStyle/>
+          <a:p>
+            <a:pPr algn="ctr"/>
+          </a:p>
+        </p:txBody>
+      </p:sp>
+      <p:sp>
+        <p:nvSpPr>
+          <p:cNvPr id="27" name="Rectangle 26"/>
+          <p:cNvSpPr/>
+          <p:nvPr/>
+        </p:nvSpPr>
+        <p:spPr>
+          <a:xfrm>
+            <a:off x="7707869" y="6296558"/>
+            <a:ext cx="743145" cy="68580"/>
+          </a:xfrm>
+          <a:prstGeom prst="rect">
+            <a:avLst/>
+          </a:prstGeom>
+          <a:solidFill>
+            <a:srgbClr val="2FD8B4"/>
+          </a:solidFill>
+          <a:ln>
+            <a:noFill/>
+          </a:ln>
+          <a:effectLst/>
+        </p:spPr>
+        <p:style>
+          <a:lnRef idx="1">
+            <a:schemeClr val="accent1"/>
+          </a:lnRef>
+          <a:fillRef idx="3">
+            <a:schemeClr val="accent1"/>
+          </a:fillRef>
+          <a:effectRef idx="2">
+            <a:schemeClr val="accent1"/>
+          </a:effectRef>
+          <a:fontRef idx="minor">
+            <a:schemeClr val="lt1"/>
+          </a:fontRef>
+        </p:style>
+        <p:txBody>
+          <a:bodyPr rtlCol="0" anchor="ctr"/>
+          <a:lstStyle/>
+          <a:p>
+            <a:pPr algn="ctr"/>
+          </a:p>
+        </p:txBody>
+      </p:sp>
+      <p:sp>
+        <p:nvSpPr>
+          <p:cNvPr id="28" name="Rectangle 27"/>
+          <p:cNvSpPr/>
+          <p:nvPr/>
+        </p:nvSpPr>
+        <p:spPr>
+          <a:xfrm>
+            <a:off x="8501307" y="6309360"/>
+            <a:ext cx="743145" cy="43891"/>
+          </a:xfrm>
+          <a:prstGeom prst="rect">
+            <a:avLst/>
+          </a:prstGeom>
+          <a:solidFill>
+            <a:srgbClr val="223049"/>
+          </a:solidFill>
+          <a:ln>
+            <a:noFill/>
+          </a:ln>
+          <a:effectLst/>
+        </p:spPr>
+        <p:style>
+          <a:lnRef idx="1">
+            <a:schemeClr val="accent1"/>
+          </a:lnRef>
+          <a:fillRef idx="3">
+            <a:schemeClr val="accent1"/>
+          </a:fillRef>
+          <a:effectRef idx="2">
+            <a:schemeClr val="accent1"/>
+          </a:effectRef>
+          <a:fontRef idx="minor">
+            <a:schemeClr val="lt1"/>
+          </a:fontRef>
+        </p:style>
+        <p:txBody>
+          <a:bodyPr rtlCol="0" anchor="ctr"/>
+          <a:lstStyle/>
+          <a:p>
+            <a:pPr algn="ctr"/>
+          </a:p>
+        </p:txBody>
+      </p:sp>
+      <p:sp>
+        <p:nvSpPr>
+          <p:cNvPr id="29" name="Rectangle 28"/>
+          <p:cNvSpPr/>
+          <p:nvPr/>
+        </p:nvSpPr>
+        <p:spPr>
+          <a:xfrm>
+            <a:off x="9294745" y="6309360"/>
+            <a:ext cx="743145" cy="43891"/>
+          </a:xfrm>
+          <a:prstGeom prst="rect">
+            <a:avLst/>
+          </a:prstGeom>
+          <a:solidFill>
+            <a:srgbClr val="223049"/>
+          </a:solidFill>
+          <a:ln>
+            <a:noFill/>
+          </a:ln>
+          <a:effectLst/>
+        </p:spPr>
+        <p:style>
+          <a:lnRef idx="1">
+            <a:schemeClr val="accent1"/>
+          </a:lnRef>
+          <a:fillRef idx="3">
+            <a:schemeClr val="accent1"/>
+          </a:fillRef>
+          <a:effectRef idx="2">
+            <a:schemeClr val="accent1"/>
+          </a:effectRef>
+          <a:fontRef idx="minor">
+            <a:schemeClr val="lt1"/>
+          </a:fontRef>
+        </p:style>
+        <p:txBody>
+          <a:bodyPr rtlCol="0" anchor="ctr"/>
+          <a:lstStyle/>
+          <a:p>
+            <a:pPr algn="ctr"/>
+          </a:p>
+        </p:txBody>
+      </p:sp>
+      <p:sp>
+        <p:nvSpPr>
+          <p:cNvPr id="30" name="Rectangle 29"/>
+          <p:cNvSpPr/>
+          <p:nvPr/>
+        </p:nvSpPr>
+        <p:spPr>
+          <a:xfrm>
+            <a:off x="10088183" y="6309360"/>
+            <a:ext cx="743145" cy="43891"/>
+          </a:xfrm>
+          <a:prstGeom prst="rect">
+            <a:avLst/>
+          </a:prstGeom>
+          <a:solidFill>
+            <a:srgbClr val="223049"/>
+          </a:solidFill>
+          <a:ln>
+            <a:noFill/>
+          </a:ln>
+          <a:effectLst/>
+        </p:spPr>
+        <p:style>
+          <a:lnRef idx="1">
+            <a:schemeClr val="accent1"/>
+          </a:lnRef>
+          <a:fillRef idx="3">
+            <a:schemeClr val="accent1"/>
+          </a:fillRef>
+          <a:effectRef idx="2">
+            <a:schemeClr val="accent1"/>
+          </a:effectRef>
+          <a:fontRef idx="minor">
+            <a:schemeClr val="lt1"/>
+          </a:fontRef>
+        </p:style>
+        <p:txBody>
+          <a:bodyPr rtlCol="0" anchor="ctr"/>
+          <a:lstStyle/>
+          <a:p>
+            <a:pPr algn="ctr"/>
+          </a:p>
+        </p:txBody>
+      </p:sp>
+      <p:sp>
+        <p:nvSpPr>
+          <p:cNvPr id="31" name="Rectangle 30"/>
+          <p:cNvSpPr/>
+          <p:nvPr/>
+        </p:nvSpPr>
+        <p:spPr>
+          <a:xfrm>
+            <a:off x="10881621" y="6309360"/>
+            <a:ext cx="743145" cy="43891"/>
+          </a:xfrm>
+          <a:prstGeom prst="rect">
+            <a:avLst/>
+          </a:prstGeom>
+          <a:solidFill>
+            <a:srgbClr val="223049"/>
+          </a:solidFill>
+          <a:ln>
+            <a:noFill/>
+          </a:ln>
+          <a:effectLst/>
+        </p:spPr>
+        <p:style>
+          <a:lnRef idx="1">
+            <a:schemeClr val="accent1"/>
+          </a:lnRef>
+          <a:fillRef idx="3">
+            <a:schemeClr val="accent1"/>
+          </a:fillRef>
+          <a:effectRef idx="2">
+            <a:schemeClr val="accent1"/>
+          </a:effectRef>
+          <a:fontRef idx="minor">
+            <a:schemeClr val="lt1"/>
+          </a:fontRef>
+        </p:style>
+        <p:txBody>
+          <a:bodyPr rtlCol="0" anchor="ctr"/>
+          <a:lstStyle/>
+          <a:p>
+            <a:pPr algn="ctr"/>
+          </a:p>
+        </p:txBody>
+      </p:sp>
+      <p:sp>
+        <p:nvSpPr>
+          <p:cNvPr id="32" name="Rectangle 31"/>
+          <p:cNvSpPr/>
+          <p:nvPr/>
+        </p:nvSpPr>
+        <p:spPr>
+          <a:xfrm>
+            <a:off x="566928" y="6455664"/>
+            <a:ext cx="11057839" cy="9144"/>
+          </a:xfrm>
+          <a:prstGeom prst="rect">
+            <a:avLst/>
+          </a:prstGeom>
+          <a:solidFill>
+            <a:srgbClr val="223049"/>
+          </a:solidFill>
+          <a:ln>
+            <a:noFill/>
+          </a:ln>
+          <a:effectLst/>
+        </p:spPr>
+        <p:style>
+          <a:lnRef idx="1">
+            <a:schemeClr val="accent1"/>
+          </a:lnRef>
+          <a:fillRef idx="3">
+            <a:schemeClr val="accent1"/>
+          </a:fillRef>
+          <a:effectRef idx="2">
+            <a:schemeClr val="accent1"/>
+          </a:effectRef>
+          <a:fontRef idx="minor">
+            <a:schemeClr val="lt1"/>
+          </a:fontRef>
+        </p:style>
+        <p:txBody>
+          <a:bodyPr rtlCol="0" anchor="ctr"/>
+          <a:lstStyle/>
+          <a:p>
+            <a:pPr algn="ctr"/>
+          </a:p>
+        </p:txBody>
+      </p:sp>
+      <p:sp>
+        <p:nvSpPr>
+          <p:cNvPr id="33" name="TextBox 32"/>
+          <p:cNvSpPr txBox="1"/>
+          <p:nvPr/>
+        </p:nvSpPr>
+        <p:spPr>
+          <a:xfrm>
+            <a:off x="566928" y="6510528"/>
+            <a:ext cx="9509760" cy="219456"/>
+          </a:xfrm>
+          <a:prstGeom prst="rect">
+            <a:avLst/>
+          </a:prstGeom>
+          <a:noFill/>
+        </p:spPr>
+        <p:txBody>
+          <a:bodyPr wrap="square" lIns="0" rIns="0" tIns="0" bIns="0" anchor="t">
+            <a:spAutoFit/>
+          </a:bodyPr>
+          <a:lstStyle/>
+          <a:p>
+            <a:pPr algn="l">
+              <a:lnSpc>
+                <a:spcPct val="112000"/>
+              </a:lnSpc>
+              <a:spcAft>
+                <a:spcPts val="0"/>
+              </a:spcAft>
+            </a:pPr>
+            <a:r>
+              <a:rPr sz="900" b="0">
+                <a:solidFill>
+                  <a:srgbClr val="8CA0BE"/>
+                </a:solidFill>
+                <a:latin typeface="Segoe UI"/>
+              </a:rPr>
+              <a:t>RetainIQ · Signal Ops Console   ·   PHASE 10 · RISK SEGMENTATION</a:t>
+            </a:r>
+          </a:p>
+        </p:txBody>
+      </p:sp>
+      <p:sp>
+        <p:nvSpPr>
+          <p:cNvPr id="34" name="TextBox 33"/>
+          <p:cNvSpPr txBox="1"/>
+          <p:nvPr/>
+        </p:nvSpPr>
+        <p:spPr>
+          <a:xfrm>
+            <a:off x="10527487" y="6510528"/>
+            <a:ext cx="1097280" cy="219456"/>
+          </a:xfrm>
+          <a:prstGeom prst="rect">
+            <a:avLst/>
+          </a:prstGeom>
+          <a:noFill/>
+        </p:spPr>
+        <p:txBody>
+          <a:bodyPr wrap="square" lIns="0" rIns="0" tIns="0" bIns="0" anchor="t">
+            <a:spAutoFit/>
+          </a:bodyPr>
+          <a:lstStyle/>
+          <a:p>
+            <a:pPr algn="r">
+              <a:lnSpc>
+                <a:spcPct val="112000"/>
+              </a:lnSpc>
+              <a:spcAft>
+                <a:spcPts val="0"/>
+              </a:spcAft>
+            </a:pPr>
+            <a:r>
+              <a:rPr sz="900" b="0">
+                <a:solidFill>
+                  <a:srgbClr val="8CA0BE"/>
+                </a:solidFill>
+                <a:latin typeface="Consolas"/>
+              </a:rPr>
+              <a:t>13</a:t>
+            </a:r>
+          </a:p>
+        </p:txBody>
+      </p:sp>
+    </p:spTree>
+  </p:cSld>
+  <p:clrMapOvr>
+    <a:masterClrMapping/>
+  </p:clrMapOvr>
+</p:sld>
+</file>
+
+<file path=ppt/slides/slide14.xml><?xml version="1.0" encoding="utf-8"?>
+<p:sld xmlns:a="http://schemas.openxmlformats.org/drawingml/2006/main" xmlns:p="http://schemas.openxmlformats.org/presentationml/2006/main" xmlns:r="http://schemas.openxmlformats.org/officeDocument/2006/relationships">
+  <p:cSld>
+    <p:spTree>
+      <p:nvGrpSpPr>
+        <p:cNvPr id="1" name=""/>
+        <p:cNvGrpSpPr/>
+        <p:nvPr/>
+      </p:nvGrpSpPr>
+      <p:grpSpPr/>
+      <p:sp>
+        <p:nvSpPr>
+          <p:cNvPr id="2" name="Rectangle 1"/>
+          <p:cNvSpPr/>
+          <p:nvPr/>
+        </p:nvSpPr>
+        <p:spPr>
+          <a:xfrm>
+            <a:off x="0" y="0"/>
+            <a:ext cx="12191695" cy="6858000"/>
+          </a:xfrm>
+          <a:prstGeom prst="rect">
+            <a:avLst/>
+          </a:prstGeom>
+          <a:solidFill>
+            <a:srgbClr val="0A0F1C"/>
+          </a:solidFill>
+          <a:ln>
+            <a:noFill/>
+          </a:ln>
+          <a:effectLst/>
+        </p:spPr>
+        <p:style>
+          <a:lnRef idx="1">
+            <a:schemeClr val="accent1"/>
+          </a:lnRef>
+          <a:fillRef idx="3">
+            <a:schemeClr val="accent1"/>
+          </a:fillRef>
+          <a:effectRef idx="2">
+            <a:schemeClr val="accent1"/>
+          </a:effectRef>
+          <a:fontRef idx="minor">
+            <a:schemeClr val="lt1"/>
+          </a:fontRef>
+        </p:style>
+        <p:txBody>
+          <a:bodyPr rtlCol="0" anchor="ctr"/>
+          <a:lstStyle/>
+          <a:p>
+            <a:pPr algn="ctr"/>
+          </a:p>
+        </p:txBody>
+      </p:sp>
+      <p:sp>
+        <p:nvSpPr>
+          <p:cNvPr id="3" name="TextBox 2"/>
+          <p:cNvSpPr txBox="1"/>
+          <p:nvPr/>
+        </p:nvSpPr>
+        <p:spPr>
+          <a:xfrm>
+            <a:off x="566928" y="365760"/>
+            <a:ext cx="8229600" cy="237744"/>
+          </a:xfrm>
+          <a:prstGeom prst="rect">
+            <a:avLst/>
+          </a:prstGeom>
+          <a:noFill/>
+        </p:spPr>
+        <p:txBody>
+          <a:bodyPr wrap="square" lIns="0" rIns="0" tIns="0" bIns="0" anchor="t">
+            <a:spAutoFit/>
+          </a:bodyPr>
+          <a:lstStyle/>
+          <a:p>
+            <a:pPr algn="l">
+              <a:lnSpc>
+                <a:spcPct val="112000"/>
+              </a:lnSpc>
+              <a:spcAft>
+                <a:spcPts val="0"/>
+              </a:spcAft>
+            </a:pPr>
+            <a:r>
+              <a:rPr sz="1000" b="1">
+                <a:solidFill>
+                  <a:srgbClr val="2FD8B4"/>
+                </a:solidFill>
+                <a:latin typeface="Consolas"/>
+              </a:rPr>
+              <a:t>PHASE 11  ·  RETENTION INTELLIGENCE</a:t>
+            </a:r>
+          </a:p>
+        </p:txBody>
+      </p:sp>
+      <p:sp>
+        <p:nvSpPr>
+          <p:cNvPr id="4" name="TextBox 3"/>
+          <p:cNvSpPr txBox="1"/>
+          <p:nvPr/>
+        </p:nvSpPr>
+        <p:spPr>
+          <a:xfrm>
+            <a:off x="566928" y="576072"/>
+            <a:ext cx="11057839" cy="475488"/>
+          </a:xfrm>
+          <a:prstGeom prst="rect">
+            <a:avLst/>
+          </a:prstGeom>
+          <a:noFill/>
+        </p:spPr>
+        <p:txBody>
+          <a:bodyPr wrap="square" lIns="0" rIns="0" tIns="0" bIns="0" anchor="t">
+            <a:spAutoFit/>
+          </a:bodyPr>
+          <a:lstStyle/>
+          <a:p>
+            <a:pPr algn="l">
+              <a:lnSpc>
+                <a:spcPct val="112000"/>
+              </a:lnSpc>
+              <a:spcAft>
+                <a:spcPts val="0"/>
+              </a:spcAft>
+            </a:pPr>
+            <a:r>
+              <a:rPr sz="2600" b="1">
+                <a:solidFill>
+                  <a:srgbClr val="EAF0F7"/>
+                </a:solidFill>
+                <a:latin typeface="Segoe UI"/>
+              </a:rPr>
+              <a:t>From risk to action — and to money</a:t>
+            </a:r>
+          </a:p>
+        </p:txBody>
+      </p:sp>
+      <p:sp>
+        <p:nvSpPr>
+          <p:cNvPr id="5" name="TextBox 4"/>
+          <p:cNvSpPr txBox="1"/>
+          <p:nvPr/>
+        </p:nvSpPr>
+        <p:spPr>
+          <a:xfrm>
+            <a:off x="566928" y="1060704"/>
+            <a:ext cx="11057839" cy="274320"/>
+          </a:xfrm>
+          <a:prstGeom prst="rect">
+            <a:avLst/>
+          </a:prstGeom>
+          <a:noFill/>
+        </p:spPr>
+        <p:txBody>
+          <a:bodyPr wrap="square" lIns="0" rIns="0" tIns="0" bIns="0" anchor="t">
+            <a:spAutoFit/>
+          </a:bodyPr>
+          <a:lstStyle/>
+          <a:p>
+            <a:pPr algn="l">
+              <a:lnSpc>
+                <a:spcPct val="112000"/>
+              </a:lnSpc>
+              <a:spcAft>
+                <a:spcPts val="0"/>
+              </a:spcAft>
+            </a:pPr>
+            <a:r>
+              <a:rPr sz="1250" b="0">
+                <a:solidFill>
+                  <a:srgbClr val="8CA0BE"/>
+                </a:solidFill>
+                <a:latin typeface="Segoe UI"/>
+              </a:rPr>
+              <a:t>2,608 at-risk customers each received a specific recommendation</a:t>
+            </a:r>
+          </a:p>
+        </p:txBody>
+      </p:sp>
+      <p:sp>
+        <p:nvSpPr>
+          <p:cNvPr id="6" name="Rectangle 5"/>
+          <p:cNvSpPr/>
+          <p:nvPr/>
+        </p:nvSpPr>
+        <p:spPr>
+          <a:xfrm>
+            <a:off x="566928" y="1371600"/>
+            <a:ext cx="11057839" cy="12801"/>
+          </a:xfrm>
+          <a:prstGeom prst="rect">
+            <a:avLst/>
+          </a:prstGeom>
+          <a:solidFill>
+            <a:srgbClr val="223049"/>
+          </a:solidFill>
+          <a:ln>
+            <a:noFill/>
+          </a:ln>
+          <a:effectLst/>
+        </p:spPr>
+        <p:style>
+          <a:lnRef idx="1">
+            <a:schemeClr val="accent1"/>
+          </a:lnRef>
+          <a:fillRef idx="3">
+            <a:schemeClr val="accent1"/>
+          </a:fillRef>
+          <a:effectRef idx="2">
+            <a:schemeClr val="accent1"/>
+          </a:effectRef>
+          <a:fontRef idx="minor">
+            <a:schemeClr val="lt1"/>
+          </a:fontRef>
+        </p:style>
+        <p:txBody>
+          <a:bodyPr rtlCol="0" anchor="ctr"/>
+          <a:lstStyle/>
+          <a:p>
+            <a:pPr algn="ctr"/>
+          </a:p>
+        </p:txBody>
+      </p:sp>
+      <p:pic>
+        <p:nvPicPr>
+          <p:cNvPr id="7" name="Picture 6" descr="chart_revenue.png"/>
+          <p:cNvPicPr>
+            <a:picLocks noChangeAspect="1"/>
+          </p:cNvPicPr>
+          <p:nvPr/>
+        </p:nvPicPr>
+        <p:blipFill>
+          <a:blip r:embed="rId2"/>
+          <a:stretch>
+            <a:fillRect/>
+          </a:stretch>
+        </p:blipFill>
+        <p:spPr>
+          <a:xfrm>
+            <a:off x="566928" y="1517904"/>
+            <a:ext cx="6492239" cy="2818792"/>
+          </a:xfrm>
+          <a:prstGeom prst="rect">
+            <a:avLst/>
+          </a:prstGeom>
+        </p:spPr>
+      </p:pic>
+      <p:sp>
+        <p:nvSpPr>
+          <p:cNvPr id="8" name="Rounded Rectangle 7"/>
+          <p:cNvSpPr/>
+          <p:nvPr/>
+        </p:nvSpPr>
+        <p:spPr>
+          <a:xfrm>
+            <a:off x="7269480" y="1517904"/>
+            <a:ext cx="4352544" cy="4700016"/>
+          </a:xfrm>
+          <a:prstGeom prst="roundRect">
+            <a:avLst>
+              <a:gd name="adj" fmla="val 8000"/>
+            </a:avLst>
+          </a:prstGeom>
+          <a:solidFill>
+            <a:srgbClr val="111A2C"/>
+          </a:solidFill>
+          <a:ln w="12700">
+            <a:solidFill>
+              <a:srgbClr val="223049"/>
+            </a:solidFill>
+          </a:ln>
+          <a:effectLst/>
+        </p:spPr>
+        <p:style>
+          <a:lnRef idx="1">
+            <a:schemeClr val="accent1"/>
+          </a:lnRef>
+          <a:fillRef idx="3">
+            <a:schemeClr val="accent1"/>
+          </a:fillRef>
+          <a:effectRef idx="2">
+            <a:schemeClr val="accent1"/>
+          </a:effectRef>
+          <a:fontRef idx="minor">
+            <a:schemeClr val="lt1"/>
+          </a:fontRef>
+        </p:style>
+        <p:txBody>
+          <a:bodyPr rtlCol="0" anchor="ctr"/>
+          <a:lstStyle/>
+          <a:p>
+            <a:pPr algn="ctr"/>
+          </a:p>
+        </p:txBody>
+      </p:sp>
+      <p:sp>
+        <p:nvSpPr>
+          <p:cNvPr id="9" name="TextBox 8"/>
+          <p:cNvSpPr txBox="1"/>
+          <p:nvPr/>
+        </p:nvSpPr>
+        <p:spPr>
+          <a:xfrm>
+            <a:off x="7452360" y="1682495"/>
+            <a:ext cx="4023360" cy="4370831"/>
+          </a:xfrm>
+          <a:prstGeom prst="rect">
+            <a:avLst/>
+          </a:prstGeom>
+          <a:noFill/>
+        </p:spPr>
+        <p:txBody>
+          <a:bodyPr wrap="square" lIns="0" rIns="0" tIns="0" bIns="0" anchor="t">
+            <a:spAutoFit/>
+          </a:bodyPr>
+          <a:lstStyle/>
+          <a:p>
+            <a:pPr algn="l">
+              <a:lnSpc>
+                <a:spcPct val="112000"/>
+              </a:lnSpc>
+              <a:spcAft>
+                <a:spcPts val="700"/>
+              </a:spcAft>
+            </a:pPr>
+            <a:r>
+              <a:rPr sz="1050" b="1">
+                <a:solidFill>
+                  <a:srgbClr val="2FD8B4"/>
+                </a:solidFill>
+                <a:latin typeface="Consolas"/>
+              </a:rPr>
+              <a:t>RECOMMENDATIONS ISSUED (FULL PORTFOLIO)</a:t>
+            </a:r>
+          </a:p>
+          <a:p>
+            <a:pPr algn="l">
+              <a:lnSpc>
+                <a:spcPct val="112000"/>
+              </a:lnSpc>
+              <a:spcAft>
+                <a:spcPts val="300"/>
+              </a:spcAft>
+            </a:pPr>
+            <a:r>
+              <a:rPr sz="1040" b="0">
+                <a:solidFill>
+                  <a:srgbClr val="EAF0F7"/>
+                </a:solidFill>
+                <a:latin typeface="Consolas"/>
+              </a:rPr>
+              <a:t>Promote Long-Term Contract            792</a:t>
+            </a:r>
+          </a:p>
+          <a:p>
+            <a:pPr algn="l">
+              <a:lnSpc>
+                <a:spcPct val="112000"/>
+              </a:lnSpc>
+              <a:spcAft>
+                <a:spcPts val="300"/>
+              </a:spcAft>
+            </a:pPr>
+            <a:r>
+              <a:rPr sz="1040" b="0">
+                <a:solidFill>
+                  <a:srgbClr val="EAF0F7"/>
+                </a:solidFill>
+                <a:latin typeface="Consolas"/>
+              </a:rPr>
+              <a:t>5% Discount Offer                            663</a:t>
+            </a:r>
+          </a:p>
+          <a:p>
+            <a:pPr algn="l">
+              <a:lnSpc>
+                <a:spcPct val="112000"/>
+              </a:lnSpc>
+              <a:spcAft>
+                <a:spcPts val="300"/>
+              </a:spcAft>
+            </a:pPr>
+            <a:r>
+              <a:rPr sz="1040" b="0">
+                <a:solidFill>
+                  <a:srgbClr val="EAF0F7"/>
+                </a:solidFill>
+                <a:latin typeface="Consolas"/>
+              </a:rPr>
+              <a:t>Offer 15% Discount                          658</a:t>
+            </a:r>
+          </a:p>
+          <a:p>
+            <a:pPr algn="l">
+              <a:lnSpc>
+                <a:spcPct val="112000"/>
+              </a:lnSpc>
+              <a:spcAft>
+                <a:spcPts val="300"/>
+              </a:spcAft>
+            </a:pPr>
+            <a:r>
+              <a:rPr sz="1040" b="0">
+                <a:solidFill>
+                  <a:srgbClr val="EAF0F7"/>
+                </a:solidFill>
+                <a:latin typeface="Consolas"/>
+              </a:rPr>
+              <a:t>Welcome Retention Package          430</a:t>
+            </a:r>
+          </a:p>
+          <a:p>
+            <a:pPr algn="l">
+              <a:lnSpc>
+                <a:spcPct val="112000"/>
+              </a:lnSpc>
+              <a:spcAft>
+                <a:spcPts val="300"/>
+              </a:spcAft>
+            </a:pPr>
+            <a:r>
+              <a:rPr sz="1040" b="0">
+                <a:solidFill>
+                  <a:srgbClr val="EAF0F7"/>
+                </a:solidFill>
+                <a:latin typeface="Consolas"/>
+              </a:rPr>
+              <a:t>Free Online Security                       45</a:t>
+            </a:r>
+          </a:p>
+          <a:p>
+            <a:pPr algn="l">
+              <a:lnSpc>
+                <a:spcPct val="112000"/>
+              </a:lnSpc>
+              <a:spcAft>
+                <a:spcPts val="300"/>
+              </a:spcAft>
+            </a:pPr>
+            <a:r>
+              <a:rPr sz="1040" b="0">
+                <a:solidFill>
+                  <a:srgbClr val="EAF0F7"/>
+                </a:solidFill>
+                <a:latin typeface="Consolas"/>
+              </a:rPr>
+              <a:t>Switch to Autopay / Check-in          18</a:t>
+            </a:r>
+          </a:p>
+          <a:p>
+            <a:pPr algn="l">
+              <a:lnSpc>
+                <a:spcPct val="112000"/>
+              </a:lnSpc>
+              <a:spcAft>
+                <a:spcPts val="800"/>
+              </a:spcAft>
+            </a:pPr>
+            <a:r>
+              <a:rPr sz="1040" b="0">
+                <a:solidFill>
+                  <a:srgbClr val="EAF0F7"/>
+                </a:solidFill>
+                <a:latin typeface="Consolas"/>
+              </a:rPr>
+              <a:t>Free Premium Support                      2</a:t>
+            </a:r>
+          </a:p>
+          <a:p>
+            <a:pPr algn="l">
+              <a:lnSpc>
+                <a:spcPct val="116000"/>
+              </a:lnSpc>
+              <a:spcAft>
+                <a:spcPts val="0"/>
+              </a:spcAft>
+            </a:pPr>
+            <a:r>
+              <a:rPr sz="1019" b="0">
+                <a:solidFill>
+                  <a:srgbClr val="8CA0BE"/>
+                </a:solidFill>
+                <a:latin typeface="Segoe UI"/>
+              </a:rPr>
+              <a:t>Driven by each customer's own risk factors — a month-to-month customer with no security gets a different offer than a loyal high-value one.</a:t>
+            </a:r>
+          </a:p>
+        </p:txBody>
+      </p:sp>
+      <p:sp>
+        <p:nvSpPr>
+          <p:cNvPr id="10" name="Rounded Rectangle 9"/>
+          <p:cNvSpPr/>
+          <p:nvPr/>
+        </p:nvSpPr>
+        <p:spPr>
+          <a:xfrm>
+            <a:off x="566928" y="4718304"/>
+            <a:ext cx="6492240" cy="1499615"/>
+          </a:xfrm>
+          <a:prstGeom prst="roundRect">
+            <a:avLst>
+              <a:gd name="adj" fmla="val 8000"/>
+            </a:avLst>
+          </a:prstGeom>
+          <a:solidFill>
+            <a:srgbClr val="162136"/>
+          </a:solidFill>
+          <a:ln w="15240">
+            <a:solidFill>
+              <a:srgbClr val="F5A623"/>
+            </a:solidFill>
+          </a:ln>
+          <a:effectLst/>
+        </p:spPr>
+        <p:style>
+          <a:lnRef idx="1">
+            <a:schemeClr val="accent1"/>
+          </a:lnRef>
+          <a:fillRef idx="3">
+            <a:schemeClr val="accent1"/>
+          </a:fillRef>
+          <a:effectRef idx="2">
+            <a:schemeClr val="accent1"/>
+          </a:effectRef>
+          <a:fontRef idx="minor">
+            <a:schemeClr val="lt1"/>
+          </a:fontRef>
+        </p:style>
+        <p:txBody>
+          <a:bodyPr rtlCol="0" anchor="ctr"/>
+          <a:lstStyle/>
+          <a:p>
+            <a:pPr algn="ctr"/>
+          </a:p>
+        </p:txBody>
+      </p:sp>
+      <p:sp>
+        <p:nvSpPr>
+          <p:cNvPr id="11" name="TextBox 10"/>
+          <p:cNvSpPr txBox="1"/>
+          <p:nvPr/>
+        </p:nvSpPr>
+        <p:spPr>
+          <a:xfrm>
+            <a:off x="749808" y="4846320"/>
+            <a:ext cx="6126479" cy="1261871"/>
+          </a:xfrm>
+          <a:prstGeom prst="rect">
+            <a:avLst/>
+          </a:prstGeom>
+          <a:noFill/>
+        </p:spPr>
+        <p:txBody>
+          <a:bodyPr wrap="square" lIns="0" rIns="0" tIns="0" bIns="0" anchor="t">
+            <a:spAutoFit/>
+          </a:bodyPr>
+          <a:lstStyle/>
+          <a:p>
+            <a:pPr algn="l">
+              <a:lnSpc>
+                <a:spcPct val="112000"/>
+              </a:lnSpc>
+              <a:spcAft>
+                <a:spcPts val="300"/>
+              </a:spcAft>
+            </a:pPr>
+            <a:r>
+              <a:rPr sz="1150" b="1">
+                <a:solidFill>
+                  <a:srgbClr val="F5A623"/>
+                </a:solidFill>
+                <a:latin typeface="Segoe UI"/>
+              </a:rPr>
+              <a:t>SPEAK PRECISELY ABOUT THIS NUMBER</a:t>
+            </a:r>
+          </a:p>
+          <a:p>
+            <a:pPr algn="l">
+              <a:lnSpc>
+                <a:spcPct val="116000"/>
+              </a:lnSpc>
+              <a:spcAft>
+                <a:spcPts val="0"/>
+              </a:spcAft>
+            </a:pPr>
+            <a:r>
+              <a:rPr sz="1080" b="0">
+                <a:solidFill>
+                  <a:srgbClr val="EAF0F7"/>
+                </a:solidFill>
+                <a:latin typeface="Segoe UI"/>
+              </a:rPr>
+              <a:t>RetainIQ reports monthly revenue at risk — the recurring charges sitting inside flagged customers. $92,539/month in high risk, $200,302 including medium. It is exposure, not money already saved.</a:t>
+            </a:r>
+          </a:p>
+        </p:txBody>
+      </p:sp>
+      <p:sp>
+        <p:nvSpPr>
+          <p:cNvPr id="12" name="Rounded Rectangle 11"/>
+          <p:cNvSpPr/>
+          <p:nvPr/>
+        </p:nvSpPr>
+        <p:spPr>
+          <a:xfrm>
+            <a:off x="7269480" y="4718304"/>
+            <a:ext cx="4352544" cy="1499615"/>
+          </a:xfrm>
+          <a:prstGeom prst="roundRect">
+            <a:avLst>
+              <a:gd name="adj" fmla="val 8000"/>
+            </a:avLst>
+          </a:prstGeom>
+          <a:solidFill>
+            <a:srgbClr val="111A2C"/>
+          </a:solidFill>
+          <a:ln w="12700">
+            <a:solidFill>
+              <a:srgbClr val="223049"/>
+            </a:solidFill>
+          </a:ln>
+          <a:effectLst/>
+        </p:spPr>
+        <p:style>
+          <a:lnRef idx="1">
+            <a:schemeClr val="accent1"/>
+          </a:lnRef>
+          <a:fillRef idx="3">
+            <a:schemeClr val="accent1"/>
+          </a:fillRef>
+          <a:effectRef idx="2">
+            <a:schemeClr val="accent1"/>
+          </a:effectRef>
+          <a:fontRef idx="minor">
+            <a:schemeClr val="lt1"/>
+          </a:fontRef>
+        </p:style>
+        <p:txBody>
+          <a:bodyPr rtlCol="0" anchor="ctr"/>
+          <a:lstStyle/>
+          <a:p>
+            <a:pPr algn="ctr"/>
+          </a:p>
+        </p:txBody>
+      </p:sp>
+      <p:sp>
+        <p:nvSpPr>
+          <p:cNvPr id="13" name="TextBox 12"/>
+          <p:cNvSpPr txBox="1"/>
+          <p:nvPr/>
+        </p:nvSpPr>
+        <p:spPr>
+          <a:xfrm>
+            <a:off x="7452360" y="4864608"/>
+            <a:ext cx="4023360" cy="1207007"/>
+          </a:xfrm>
+          <a:prstGeom prst="rect">
+            <a:avLst/>
+          </a:prstGeom>
+          <a:noFill/>
+        </p:spPr>
+        <p:txBody>
+          <a:bodyPr wrap="square" lIns="0" rIns="0" tIns="0" bIns="0" anchor="t">
+            <a:spAutoFit/>
+          </a:bodyPr>
+          <a:lstStyle/>
+          <a:p>
+            <a:pPr algn="l">
+              <a:lnSpc>
+                <a:spcPct val="112000"/>
+              </a:lnSpc>
+              <a:spcAft>
+                <a:spcPts val="500"/>
+              </a:spcAft>
+            </a:pPr>
+            <a:r>
+              <a:rPr sz="1050" b="1">
+                <a:solidFill>
+                  <a:srgbClr val="2FD8B4"/>
+                </a:solidFill>
+                <a:latin typeface="Consolas"/>
+              </a:rPr>
+              <a:t>DECISION FRAMEWORK</a:t>
+            </a:r>
+          </a:p>
+          <a:p>
+            <a:pPr algn="l">
+              <a:lnSpc>
+                <a:spcPct val="118000"/>
+              </a:lnSpc>
+              <a:spcAft>
+                <a:spcPts val="0"/>
+              </a:spcAft>
+            </a:pPr>
+            <a:r>
+              <a:rPr sz="1040" b="0">
+                <a:solidFill>
+                  <a:srgbClr val="EAF0F7"/>
+                </a:solidFill>
+                <a:latin typeface="Segoe UI"/>
+              </a:rPr>
+              <a:t>Data → insight → prediction → explanation → action → business value. The platform deliberately does not stop at step three.</a:t>
+            </a:r>
+          </a:p>
+        </p:txBody>
+      </p:sp>
+      <p:sp>
+        <p:nvSpPr>
+          <p:cNvPr id="14" name="Rectangle 13"/>
+          <p:cNvSpPr/>
+          <p:nvPr/>
+        </p:nvSpPr>
+        <p:spPr>
+          <a:xfrm>
+            <a:off x="566928" y="6309360"/>
+            <a:ext cx="743145" cy="43891"/>
+          </a:xfrm>
+          <a:prstGeom prst="rect">
+            <a:avLst/>
+          </a:prstGeom>
+          <a:solidFill>
+            <a:srgbClr val="223049"/>
+          </a:solidFill>
+          <a:ln>
+            <a:noFill/>
+          </a:ln>
+          <a:effectLst/>
+        </p:spPr>
+        <p:style>
+          <a:lnRef idx="1">
+            <a:schemeClr val="accent1"/>
+          </a:lnRef>
+          <a:fillRef idx="3">
+            <a:schemeClr val="accent1"/>
+          </a:fillRef>
+          <a:effectRef idx="2">
+            <a:schemeClr val="accent1"/>
+          </a:effectRef>
+          <a:fontRef idx="minor">
+            <a:schemeClr val="lt1"/>
+          </a:fontRef>
+        </p:style>
+        <p:txBody>
+          <a:bodyPr rtlCol="0" anchor="ctr"/>
+          <a:lstStyle/>
+          <a:p>
+            <a:pPr algn="ctr"/>
+          </a:p>
+        </p:txBody>
+      </p:sp>
+      <p:sp>
+        <p:nvSpPr>
+          <p:cNvPr id="15" name="Rectangle 14"/>
+          <p:cNvSpPr/>
+          <p:nvPr/>
+        </p:nvSpPr>
+        <p:spPr>
+          <a:xfrm>
+            <a:off x="1360365" y="6309360"/>
+            <a:ext cx="743145" cy="43891"/>
+          </a:xfrm>
+          <a:prstGeom prst="rect">
+            <a:avLst/>
+          </a:prstGeom>
+          <a:solidFill>
+            <a:srgbClr val="223049"/>
+          </a:solidFill>
+          <a:ln>
+            <a:noFill/>
+          </a:ln>
+          <a:effectLst/>
+        </p:spPr>
+        <p:style>
+          <a:lnRef idx="1">
+            <a:schemeClr val="accent1"/>
+          </a:lnRef>
+          <a:fillRef idx="3">
+            <a:schemeClr val="accent1"/>
+          </a:fillRef>
+          <a:effectRef idx="2">
+            <a:schemeClr val="accent1"/>
+          </a:effectRef>
+          <a:fontRef idx="minor">
+            <a:schemeClr val="lt1"/>
+          </a:fontRef>
+        </p:style>
+        <p:txBody>
+          <a:bodyPr rtlCol="0" anchor="ctr"/>
+          <a:lstStyle/>
+          <a:p>
+            <a:pPr algn="ctr"/>
+          </a:p>
+        </p:txBody>
+      </p:sp>
+      <p:sp>
+        <p:nvSpPr>
+          <p:cNvPr id="16" name="Rectangle 15"/>
+          <p:cNvSpPr/>
+          <p:nvPr/>
+        </p:nvSpPr>
+        <p:spPr>
+          <a:xfrm>
+            <a:off x="2153803" y="6309360"/>
+            <a:ext cx="743145" cy="43891"/>
+          </a:xfrm>
+          <a:prstGeom prst="rect">
+            <a:avLst/>
+          </a:prstGeom>
+          <a:solidFill>
+            <a:srgbClr val="223049"/>
+          </a:solidFill>
+          <a:ln>
+            <a:noFill/>
+          </a:ln>
+          <a:effectLst/>
+        </p:spPr>
+        <p:style>
+          <a:lnRef idx="1">
+            <a:schemeClr val="accent1"/>
+          </a:lnRef>
+          <a:fillRef idx="3">
+            <a:schemeClr val="accent1"/>
+          </a:fillRef>
+          <a:effectRef idx="2">
+            <a:schemeClr val="accent1"/>
+          </a:effectRef>
+          <a:fontRef idx="minor">
+            <a:schemeClr val="lt1"/>
+          </a:fontRef>
+        </p:style>
+        <p:txBody>
+          <a:bodyPr rtlCol="0" anchor="ctr"/>
+          <a:lstStyle/>
+          <a:p>
+            <a:pPr algn="ctr"/>
+          </a:p>
+        </p:txBody>
+      </p:sp>
+      <p:sp>
+        <p:nvSpPr>
+          <p:cNvPr id="17" name="Rectangle 16"/>
+          <p:cNvSpPr/>
+          <p:nvPr/>
+        </p:nvSpPr>
+        <p:spPr>
+          <a:xfrm>
+            <a:off x="2947241" y="6309360"/>
+            <a:ext cx="743145" cy="43891"/>
+          </a:xfrm>
+          <a:prstGeom prst="rect">
+            <a:avLst/>
+          </a:prstGeom>
+          <a:solidFill>
+            <a:srgbClr val="223049"/>
+          </a:solidFill>
+          <a:ln>
+            <a:noFill/>
+          </a:ln>
+          <a:effectLst/>
+        </p:spPr>
+        <p:style>
+          <a:lnRef idx="1">
+            <a:schemeClr val="accent1"/>
+          </a:lnRef>
+          <a:fillRef idx="3">
+            <a:schemeClr val="accent1"/>
+          </a:fillRef>
+          <a:effectRef idx="2">
+            <a:schemeClr val="accent1"/>
+          </a:effectRef>
+          <a:fontRef idx="minor">
+            <a:schemeClr val="lt1"/>
+          </a:fontRef>
+        </p:style>
+        <p:txBody>
+          <a:bodyPr rtlCol="0" anchor="ctr"/>
+          <a:lstStyle/>
+          <a:p>
+            <a:pPr algn="ctr"/>
+          </a:p>
+        </p:txBody>
+      </p:sp>
+      <p:sp>
+        <p:nvSpPr>
+          <p:cNvPr id="18" name="Rectangle 17"/>
+          <p:cNvSpPr/>
+          <p:nvPr/>
+        </p:nvSpPr>
+        <p:spPr>
+          <a:xfrm>
+            <a:off x="3740679" y="6309360"/>
+            <a:ext cx="743145" cy="43891"/>
+          </a:xfrm>
+          <a:prstGeom prst="rect">
+            <a:avLst/>
+          </a:prstGeom>
+          <a:solidFill>
+            <a:srgbClr val="223049"/>
+          </a:solidFill>
+          <a:ln>
+            <a:noFill/>
+          </a:ln>
+          <a:effectLst/>
+        </p:spPr>
+        <p:style>
+          <a:lnRef idx="1">
+            <a:schemeClr val="accent1"/>
+          </a:lnRef>
+          <a:fillRef idx="3">
+            <a:schemeClr val="accent1"/>
+          </a:fillRef>
+          <a:effectRef idx="2">
+            <a:schemeClr val="accent1"/>
+          </a:effectRef>
+          <a:fontRef idx="minor">
+            <a:schemeClr val="lt1"/>
+          </a:fontRef>
+        </p:style>
+        <p:txBody>
+          <a:bodyPr rtlCol="0" anchor="ctr"/>
+          <a:lstStyle/>
+          <a:p>
+            <a:pPr algn="ctr"/>
+          </a:p>
+        </p:txBody>
+      </p:sp>
+      <p:sp>
+        <p:nvSpPr>
+          <p:cNvPr id="19" name="Rectangle 18"/>
+          <p:cNvSpPr/>
+          <p:nvPr/>
+        </p:nvSpPr>
+        <p:spPr>
+          <a:xfrm>
+            <a:off x="4534117" y="6309360"/>
+            <a:ext cx="743145" cy="43891"/>
+          </a:xfrm>
+          <a:prstGeom prst="rect">
+            <a:avLst/>
+          </a:prstGeom>
+          <a:solidFill>
+            <a:srgbClr val="223049"/>
+          </a:solidFill>
+          <a:ln>
+            <a:noFill/>
+          </a:ln>
+          <a:effectLst/>
+        </p:spPr>
+        <p:style>
+          <a:lnRef idx="1">
+            <a:schemeClr val="accent1"/>
+          </a:lnRef>
+          <a:fillRef idx="3">
+            <a:schemeClr val="accent1"/>
+          </a:fillRef>
+          <a:effectRef idx="2">
+            <a:schemeClr val="accent1"/>
+          </a:effectRef>
+          <a:fontRef idx="minor">
+            <a:schemeClr val="lt1"/>
+          </a:fontRef>
+        </p:style>
+        <p:txBody>
+          <a:bodyPr rtlCol="0" anchor="ctr"/>
+          <a:lstStyle/>
+          <a:p>
+            <a:pPr algn="ctr"/>
+          </a:p>
+        </p:txBody>
+      </p:sp>
+      <p:sp>
+        <p:nvSpPr>
+          <p:cNvPr id="20" name="Rectangle 19"/>
+          <p:cNvSpPr/>
+          <p:nvPr/>
+        </p:nvSpPr>
+        <p:spPr>
+          <a:xfrm>
+            <a:off x="5327555" y="6309360"/>
+            <a:ext cx="743145" cy="43891"/>
+          </a:xfrm>
+          <a:prstGeom prst="rect">
+            <a:avLst/>
+          </a:prstGeom>
+          <a:solidFill>
+            <a:srgbClr val="223049"/>
+          </a:solidFill>
+          <a:ln>
+            <a:noFill/>
+          </a:ln>
+          <a:effectLst/>
+        </p:spPr>
+        <p:style>
+          <a:lnRef idx="1">
+            <a:schemeClr val="accent1"/>
+          </a:lnRef>
+          <a:fillRef idx="3">
+            <a:schemeClr val="accent1"/>
+          </a:fillRef>
+          <a:effectRef idx="2">
+            <a:schemeClr val="accent1"/>
+          </a:effectRef>
+          <a:fontRef idx="minor">
+            <a:schemeClr val="lt1"/>
+          </a:fontRef>
+        </p:style>
+        <p:txBody>
+          <a:bodyPr rtlCol="0" anchor="ctr"/>
+          <a:lstStyle/>
+          <a:p>
+            <a:pPr algn="ctr"/>
+          </a:p>
+        </p:txBody>
+      </p:sp>
+      <p:sp>
+        <p:nvSpPr>
+          <p:cNvPr id="21" name="Rectangle 20"/>
+          <p:cNvSpPr/>
+          <p:nvPr/>
+        </p:nvSpPr>
+        <p:spPr>
+          <a:xfrm>
+            <a:off x="6120993" y="6309360"/>
+            <a:ext cx="743145" cy="43891"/>
+          </a:xfrm>
+          <a:prstGeom prst="rect">
+            <a:avLst/>
+          </a:prstGeom>
+          <a:solidFill>
+            <a:srgbClr val="223049"/>
+          </a:solidFill>
+          <a:ln>
+            <a:noFill/>
+          </a:ln>
+          <a:effectLst/>
+        </p:spPr>
+        <p:style>
+          <a:lnRef idx="1">
+            <a:schemeClr val="accent1"/>
+          </a:lnRef>
+          <a:fillRef idx="3">
+            <a:schemeClr val="accent1"/>
+          </a:fillRef>
+          <a:effectRef idx="2">
+            <a:schemeClr val="accent1"/>
+          </a:effectRef>
+          <a:fontRef idx="minor">
+            <a:schemeClr val="lt1"/>
+          </a:fontRef>
+        </p:style>
+        <p:txBody>
+          <a:bodyPr rtlCol="0" anchor="ctr"/>
+          <a:lstStyle/>
+          <a:p>
+            <a:pPr algn="ctr"/>
+          </a:p>
+        </p:txBody>
+      </p:sp>
+      <p:sp>
+        <p:nvSpPr>
+          <p:cNvPr id="22" name="Rectangle 21"/>
+          <p:cNvSpPr/>
+          <p:nvPr/>
+        </p:nvSpPr>
+        <p:spPr>
+          <a:xfrm>
+            <a:off x="6914431" y="6309360"/>
+            <a:ext cx="743145" cy="43891"/>
+          </a:xfrm>
+          <a:prstGeom prst="rect">
+            <a:avLst/>
+          </a:prstGeom>
+          <a:solidFill>
+            <a:srgbClr val="223049"/>
+          </a:solidFill>
+          <a:ln>
+            <a:noFill/>
+          </a:ln>
+          <a:effectLst/>
+        </p:spPr>
+        <p:style>
+          <a:lnRef idx="1">
+            <a:schemeClr val="accent1"/>
+          </a:lnRef>
+          <a:fillRef idx="3">
+            <a:schemeClr val="accent1"/>
+          </a:fillRef>
+          <a:effectRef idx="2">
+            <a:schemeClr val="accent1"/>
+          </a:effectRef>
+          <a:fontRef idx="minor">
+            <a:schemeClr val="lt1"/>
+          </a:fontRef>
+        </p:style>
+        <p:txBody>
+          <a:bodyPr rtlCol="0" anchor="ctr"/>
+          <a:lstStyle/>
+          <a:p>
+            <a:pPr algn="ctr"/>
+          </a:p>
+        </p:txBody>
+      </p:sp>
+      <p:sp>
+        <p:nvSpPr>
+          <p:cNvPr id="23" name="Rectangle 22"/>
+          <p:cNvSpPr/>
+          <p:nvPr/>
+        </p:nvSpPr>
+        <p:spPr>
+          <a:xfrm>
+            <a:off x="7707869" y="6309360"/>
+            <a:ext cx="743145" cy="43891"/>
+          </a:xfrm>
+          <a:prstGeom prst="rect">
+            <a:avLst/>
+          </a:prstGeom>
+          <a:solidFill>
+            <a:srgbClr val="223049"/>
+          </a:solidFill>
+          <a:ln>
+            <a:noFill/>
+          </a:ln>
+          <a:effectLst/>
+        </p:spPr>
+        <p:style>
+          <a:lnRef idx="1">
+            <a:schemeClr val="accent1"/>
+          </a:lnRef>
+          <a:fillRef idx="3">
+            <a:schemeClr val="accent1"/>
+          </a:fillRef>
+          <a:effectRef idx="2">
+            <a:schemeClr val="accent1"/>
+          </a:effectRef>
+          <a:fontRef idx="minor">
+            <a:schemeClr val="lt1"/>
+          </a:fontRef>
+        </p:style>
+        <p:txBody>
+          <a:bodyPr rtlCol="0" anchor="ctr"/>
+          <a:lstStyle/>
+          <a:p>
+            <a:pPr algn="ctr"/>
+          </a:p>
+        </p:txBody>
+      </p:sp>
+      <p:sp>
+        <p:nvSpPr>
+          <p:cNvPr id="24" name="Rectangle 23"/>
+          <p:cNvSpPr/>
+          <p:nvPr/>
+        </p:nvSpPr>
+        <p:spPr>
+          <a:xfrm>
+            <a:off x="8501307" y="6296558"/>
+            <a:ext cx="743145" cy="68580"/>
+          </a:xfrm>
+          <a:prstGeom prst="rect">
+            <a:avLst/>
+          </a:prstGeom>
+          <a:solidFill>
+            <a:srgbClr val="2FD8B4"/>
+          </a:solidFill>
+          <a:ln>
+            <a:noFill/>
+          </a:ln>
+          <a:effectLst/>
+        </p:spPr>
+        <p:style>
+          <a:lnRef idx="1">
+            <a:schemeClr val="accent1"/>
+          </a:lnRef>
+          <a:fillRef idx="3">
+            <a:schemeClr val="accent1"/>
+          </a:fillRef>
+          <a:effectRef idx="2">
+            <a:schemeClr val="accent1"/>
+          </a:effectRef>
+          <a:fontRef idx="minor">
+            <a:schemeClr val="lt1"/>
+          </a:fontRef>
+        </p:style>
+        <p:txBody>
+          <a:bodyPr rtlCol="0" anchor="ctr"/>
+          <a:lstStyle/>
+          <a:p>
+            <a:pPr algn="ctr"/>
+          </a:p>
+        </p:txBody>
+      </p:sp>
+      <p:sp>
+        <p:nvSpPr>
+          <p:cNvPr id="25" name="Rectangle 24"/>
+          <p:cNvSpPr/>
+          <p:nvPr/>
+        </p:nvSpPr>
+        <p:spPr>
+          <a:xfrm>
+            <a:off x="9294745" y="6309360"/>
+            <a:ext cx="743145" cy="43891"/>
+          </a:xfrm>
+          <a:prstGeom prst="rect">
+            <a:avLst/>
+          </a:prstGeom>
+          <a:solidFill>
+            <a:srgbClr val="223049"/>
+          </a:solidFill>
+          <a:ln>
+            <a:noFill/>
+          </a:ln>
+          <a:effectLst/>
+        </p:spPr>
+        <p:style>
+          <a:lnRef idx="1">
+            <a:schemeClr val="accent1"/>
+          </a:lnRef>
+          <a:fillRef idx="3">
+            <a:schemeClr val="accent1"/>
+          </a:fillRef>
+          <a:effectRef idx="2">
+            <a:schemeClr val="accent1"/>
+          </a:effectRef>
+          <a:fontRef idx="minor">
+            <a:schemeClr val="lt1"/>
+          </a:fontRef>
+        </p:style>
+        <p:txBody>
+          <a:bodyPr rtlCol="0" anchor="ctr"/>
+          <a:lstStyle/>
+          <a:p>
+            <a:pPr algn="ctr"/>
+          </a:p>
+        </p:txBody>
+      </p:sp>
+      <p:sp>
+        <p:nvSpPr>
+          <p:cNvPr id="26" name="Rectangle 25"/>
+          <p:cNvSpPr/>
+          <p:nvPr/>
+        </p:nvSpPr>
+        <p:spPr>
+          <a:xfrm>
+            <a:off x="10088183" y="6309360"/>
+            <a:ext cx="743145" cy="43891"/>
+          </a:xfrm>
+          <a:prstGeom prst="rect">
+            <a:avLst/>
+          </a:prstGeom>
+          <a:solidFill>
+            <a:srgbClr val="223049"/>
+          </a:solidFill>
+          <a:ln>
+            <a:noFill/>
+          </a:ln>
+          <a:effectLst/>
+        </p:spPr>
+        <p:style>
+          <a:lnRef idx="1">
+            <a:schemeClr val="accent1"/>
+          </a:lnRef>
+          <a:fillRef idx="3">
+            <a:schemeClr val="accent1"/>
+          </a:fillRef>
+          <a:effectRef idx="2">
+            <a:schemeClr val="accent1"/>
+          </a:effectRef>
+          <a:fontRef idx="minor">
+            <a:schemeClr val="lt1"/>
+          </a:fontRef>
+        </p:style>
+        <p:txBody>
+          <a:bodyPr rtlCol="0" anchor="ctr"/>
+          <a:lstStyle/>
+          <a:p>
+            <a:pPr algn="ctr"/>
+          </a:p>
+        </p:txBody>
+      </p:sp>
+      <p:sp>
+        <p:nvSpPr>
+          <p:cNvPr id="27" name="Rectangle 26"/>
+          <p:cNvSpPr/>
+          <p:nvPr/>
+        </p:nvSpPr>
+        <p:spPr>
+          <a:xfrm>
+            <a:off x="10881621" y="6309360"/>
+            <a:ext cx="743145" cy="43891"/>
+          </a:xfrm>
+          <a:prstGeom prst="rect">
+            <a:avLst/>
+          </a:prstGeom>
+          <a:solidFill>
+            <a:srgbClr val="223049"/>
+          </a:solidFill>
+          <a:ln>
+            <a:noFill/>
+          </a:ln>
+          <a:effectLst/>
+        </p:spPr>
+        <p:style>
+          <a:lnRef idx="1">
+            <a:schemeClr val="accent1"/>
+          </a:lnRef>
+          <a:fillRef idx="3">
+            <a:schemeClr val="accent1"/>
+          </a:fillRef>
+          <a:effectRef idx="2">
+            <a:schemeClr val="accent1"/>
+          </a:effectRef>
+          <a:fontRef idx="minor">
+            <a:schemeClr val="lt1"/>
+          </a:fontRef>
+        </p:style>
+        <p:txBody>
+          <a:bodyPr rtlCol="0" anchor="ctr"/>
+          <a:lstStyle/>
+          <a:p>
+            <a:pPr algn="ctr"/>
+          </a:p>
+        </p:txBody>
+      </p:sp>
+      <p:sp>
+        <p:nvSpPr>
+          <p:cNvPr id="28" name="Rectangle 27"/>
+          <p:cNvSpPr/>
+          <p:nvPr/>
+        </p:nvSpPr>
+        <p:spPr>
+          <a:xfrm>
+            <a:off x="566928" y="6455664"/>
+            <a:ext cx="11057839" cy="9144"/>
+          </a:xfrm>
+          <a:prstGeom prst="rect">
+            <a:avLst/>
+          </a:prstGeom>
+          <a:solidFill>
+            <a:srgbClr val="223049"/>
+          </a:solidFill>
+          <a:ln>
+            <a:noFill/>
+          </a:ln>
+          <a:effectLst/>
+        </p:spPr>
+        <p:style>
+          <a:lnRef idx="1">
+            <a:schemeClr val="accent1"/>
+          </a:lnRef>
+          <a:fillRef idx="3">
+            <a:schemeClr val="accent1"/>
+          </a:fillRef>
+          <a:effectRef idx="2">
+            <a:schemeClr val="accent1"/>
+          </a:effectRef>
+          <a:fontRef idx="minor">
+            <a:schemeClr val="lt1"/>
+          </a:fontRef>
+        </p:style>
+        <p:txBody>
+          <a:bodyPr rtlCol="0" anchor="ctr"/>
+          <a:lstStyle/>
+          <a:p>
+            <a:pPr algn="ctr"/>
+          </a:p>
+        </p:txBody>
+      </p:sp>
+      <p:sp>
+        <p:nvSpPr>
+          <p:cNvPr id="29" name="TextBox 28"/>
+          <p:cNvSpPr txBox="1"/>
+          <p:nvPr/>
+        </p:nvSpPr>
+        <p:spPr>
+          <a:xfrm>
+            <a:off x="566928" y="6510528"/>
+            <a:ext cx="9509760" cy="219456"/>
+          </a:xfrm>
+          <a:prstGeom prst="rect">
+            <a:avLst/>
+          </a:prstGeom>
+          <a:noFill/>
+        </p:spPr>
+        <p:txBody>
+          <a:bodyPr wrap="square" lIns="0" rIns="0" tIns="0" bIns="0" anchor="t">
+            <a:spAutoFit/>
+          </a:bodyPr>
+          <a:lstStyle/>
+          <a:p>
+            <a:pPr algn="l">
+              <a:lnSpc>
+                <a:spcPct val="112000"/>
+              </a:lnSpc>
+              <a:spcAft>
+                <a:spcPts val="0"/>
+              </a:spcAft>
+            </a:pPr>
+            <a:r>
+              <a:rPr sz="900" b="0">
+                <a:solidFill>
+                  <a:srgbClr val="8CA0BE"/>
+                </a:solidFill>
+                <a:latin typeface="Segoe UI"/>
+              </a:rPr>
+              <a:t>RetainIQ · Signal Ops Console   ·   PHASE 11 · RETENTION INTELLIGENCE</a:t>
+            </a:r>
+          </a:p>
+        </p:txBody>
+      </p:sp>
+      <p:sp>
+        <p:nvSpPr>
+          <p:cNvPr id="30" name="TextBox 29"/>
+          <p:cNvSpPr txBox="1"/>
+          <p:nvPr/>
+        </p:nvSpPr>
+        <p:spPr>
+          <a:xfrm>
+            <a:off x="10527487" y="6510528"/>
+            <a:ext cx="1097280" cy="219456"/>
+          </a:xfrm>
+          <a:prstGeom prst="rect">
+            <a:avLst/>
+          </a:prstGeom>
+          <a:noFill/>
+        </p:spPr>
+        <p:txBody>
+          <a:bodyPr wrap="square" lIns="0" rIns="0" tIns="0" bIns="0" anchor="t">
+            <a:spAutoFit/>
+          </a:bodyPr>
+          <a:lstStyle/>
+          <a:p>
+            <a:pPr algn="r">
+              <a:lnSpc>
+                <a:spcPct val="112000"/>
+              </a:lnSpc>
+              <a:spcAft>
+                <a:spcPts val="0"/>
+              </a:spcAft>
+            </a:pPr>
+            <a:r>
+              <a:rPr sz="900" b="0">
+                <a:solidFill>
+                  <a:srgbClr val="8CA0BE"/>
+                </a:solidFill>
+                <a:latin typeface="Consolas"/>
+              </a:rPr>
+              <a:t>14</a:t>
+            </a:r>
+          </a:p>
+        </p:txBody>
+      </p:sp>
+    </p:spTree>
+  </p:cSld>
+  <p:clrMapOvr>
+    <a:masterClrMapping/>
+  </p:clrMapOvr>
+</p:sld>
+</file>
+
+<file path=ppt/slides/slide15.xml><?xml version="1.0" encoding="utf-8"?>
+<p:sld xmlns:a="http://schemas.openxmlformats.org/drawingml/2006/main" xmlns:p="http://schemas.openxmlformats.org/presentationml/2006/main" xmlns:r="http://schemas.openxmlformats.org/officeDocument/2006/relationships">
+  <p:cSld>
+    <p:spTree>
+      <p:nvGrpSpPr>
+        <p:cNvPr id="1" name=""/>
+        <p:cNvGrpSpPr/>
+        <p:nvPr/>
+      </p:nvGrpSpPr>
+      <p:grpSpPr/>
+      <p:sp>
+        <p:nvSpPr>
+          <p:cNvPr id="2" name="Rectangle 1"/>
+          <p:cNvSpPr/>
+          <p:nvPr/>
+        </p:nvSpPr>
+        <p:spPr>
+          <a:xfrm>
+            <a:off x="0" y="0"/>
+            <a:ext cx="12191695" cy="6858000"/>
+          </a:xfrm>
+          <a:prstGeom prst="rect">
+            <a:avLst/>
+          </a:prstGeom>
+          <a:solidFill>
+            <a:srgbClr val="0A0F1C"/>
+          </a:solidFill>
+          <a:ln>
+            <a:noFill/>
+          </a:ln>
+          <a:effectLst/>
+        </p:spPr>
+        <p:style>
+          <a:lnRef idx="1">
+            <a:schemeClr val="accent1"/>
+          </a:lnRef>
+          <a:fillRef idx="3">
+            <a:schemeClr val="accent1"/>
+          </a:fillRef>
+          <a:effectRef idx="2">
+            <a:schemeClr val="accent1"/>
+          </a:effectRef>
+          <a:fontRef idx="minor">
+            <a:schemeClr val="lt1"/>
+          </a:fontRef>
+        </p:style>
+        <p:txBody>
+          <a:bodyPr rtlCol="0" anchor="ctr"/>
+          <a:lstStyle/>
+          <a:p>
+            <a:pPr algn="ctr"/>
+          </a:p>
+        </p:txBody>
+      </p:sp>
+      <p:sp>
+        <p:nvSpPr>
+          <p:cNvPr id="3" name="TextBox 2"/>
+          <p:cNvSpPr txBox="1"/>
+          <p:nvPr/>
+        </p:nvSpPr>
+        <p:spPr>
+          <a:xfrm>
+            <a:off x="566928" y="365760"/>
+            <a:ext cx="8229600" cy="237744"/>
+          </a:xfrm>
+          <a:prstGeom prst="rect">
+            <a:avLst/>
+          </a:prstGeom>
+          <a:noFill/>
+        </p:spPr>
+        <p:txBody>
+          <a:bodyPr wrap="square" lIns="0" rIns="0" tIns="0" bIns="0" anchor="t">
+            <a:spAutoFit/>
+          </a:bodyPr>
+          <a:lstStyle/>
+          <a:p>
+            <a:pPr algn="l">
+              <a:lnSpc>
+                <a:spcPct val="112000"/>
+              </a:lnSpc>
+              <a:spcAft>
+                <a:spcPts val="0"/>
+              </a:spcAft>
+            </a:pPr>
+            <a:r>
+              <a:rPr sz="1000" b="1">
+                <a:solidFill>
+                  <a:srgbClr val="2FD8B4"/>
+                </a:solidFill>
+                <a:latin typeface="Consolas"/>
+              </a:rPr>
+              <a:t>PHASE 12  ·  BUSINESS INTELLIGENCE</a:t>
+            </a:r>
+          </a:p>
+        </p:txBody>
+      </p:sp>
+      <p:sp>
+        <p:nvSpPr>
+          <p:cNvPr id="4" name="TextBox 3"/>
+          <p:cNvSpPr txBox="1"/>
+          <p:nvPr/>
+        </p:nvSpPr>
+        <p:spPr>
+          <a:xfrm>
+            <a:off x="566928" y="576072"/>
+            <a:ext cx="11057839" cy="475488"/>
+          </a:xfrm>
+          <a:prstGeom prst="rect">
+            <a:avLst/>
+          </a:prstGeom>
+          <a:noFill/>
+        </p:spPr>
+        <p:txBody>
+          <a:bodyPr wrap="square" lIns="0" rIns="0" tIns="0" bIns="0" anchor="t">
+            <a:spAutoFit/>
+          </a:bodyPr>
+          <a:lstStyle/>
+          <a:p>
+            <a:pPr algn="l">
+              <a:lnSpc>
+                <a:spcPct val="112000"/>
+              </a:lnSpc>
+              <a:spcAft>
+                <a:spcPts val="0"/>
+              </a:spcAft>
+            </a:pPr>
+            <a:r>
+              <a:rPr sz="2600" b="1">
+                <a:solidFill>
+                  <a:srgbClr val="EAF0F7"/>
+                </a:solidFill>
+                <a:latin typeface="Segoe UI"/>
+              </a:rPr>
+              <a:t>The descriptive layer beneath the predictions</a:t>
+            </a:r>
+          </a:p>
+        </p:txBody>
+      </p:sp>
+      <p:sp>
+        <p:nvSpPr>
+          <p:cNvPr id="5" name="TextBox 4"/>
+          <p:cNvSpPr txBox="1"/>
+          <p:nvPr/>
+        </p:nvSpPr>
+        <p:spPr>
+          <a:xfrm>
+            <a:off x="566928" y="1060704"/>
+            <a:ext cx="11057839" cy="274320"/>
+          </a:xfrm>
+          <a:prstGeom prst="rect">
+            <a:avLst/>
+          </a:prstGeom>
+          <a:noFill/>
+        </p:spPr>
+        <p:txBody>
+          <a:bodyPr wrap="square" lIns="0" rIns="0" tIns="0" bIns="0" anchor="t">
+            <a:spAutoFit/>
+          </a:bodyPr>
+          <a:lstStyle/>
+          <a:p>
+            <a:pPr algn="l">
+              <a:lnSpc>
+                <a:spcPct val="112000"/>
+              </a:lnSpc>
+              <a:spcAft>
+                <a:spcPts val="0"/>
+              </a:spcAft>
+            </a:pPr>
+            <a:r>
+              <a:rPr sz="1250" b="0">
+                <a:solidFill>
+                  <a:srgbClr val="8CA0BE"/>
+                </a:solidFill>
+                <a:latin typeface="Segoe UI"/>
+              </a:rPr>
+              <a:t>A four-page Power BI dashboard for the people who fund the retention team</a:t>
+            </a:r>
+          </a:p>
+        </p:txBody>
+      </p:sp>
+      <p:sp>
+        <p:nvSpPr>
+          <p:cNvPr id="6" name="Rectangle 5"/>
+          <p:cNvSpPr/>
+          <p:nvPr/>
+        </p:nvSpPr>
+        <p:spPr>
+          <a:xfrm>
+            <a:off x="566928" y="1371600"/>
+            <a:ext cx="11057839" cy="12801"/>
+          </a:xfrm>
+          <a:prstGeom prst="rect">
+            <a:avLst/>
+          </a:prstGeom>
+          <a:solidFill>
+            <a:srgbClr val="223049"/>
+          </a:solidFill>
+          <a:ln>
+            <a:noFill/>
+          </a:ln>
+          <a:effectLst/>
+        </p:spPr>
+        <p:style>
+          <a:lnRef idx="1">
+            <a:schemeClr val="accent1"/>
+          </a:lnRef>
+          <a:fillRef idx="3">
+            <a:schemeClr val="accent1"/>
+          </a:fillRef>
+          <a:effectRef idx="2">
+            <a:schemeClr val="accent1"/>
+          </a:effectRef>
+          <a:fontRef idx="minor">
+            <a:schemeClr val="lt1"/>
+          </a:fontRef>
+        </p:style>
+        <p:txBody>
+          <a:bodyPr rtlCol="0" anchor="ctr"/>
+          <a:lstStyle/>
+          <a:p>
+            <a:pPr algn="ctr"/>
+          </a:p>
+        </p:txBody>
+      </p:sp>
+      <p:sp>
+        <p:nvSpPr>
+          <p:cNvPr id="7" name="Rounded Rectangle 6"/>
+          <p:cNvSpPr/>
+          <p:nvPr/>
+        </p:nvSpPr>
+        <p:spPr>
+          <a:xfrm>
+            <a:off x="693491" y="1517904"/>
+            <a:ext cx="5233273" cy="2980944"/>
+          </a:xfrm>
+          <a:prstGeom prst="roundRect">
+            <a:avLst>
+              <a:gd name="adj" fmla="val 8000"/>
+            </a:avLst>
+          </a:prstGeom>
+          <a:solidFill>
+            <a:srgbClr val="FFFFFF"/>
+          </a:solidFill>
+          <a:ln w="12700">
+            <a:solidFill>
+              <a:srgbClr val="223049"/>
+            </a:solidFill>
+          </a:ln>
+          <a:effectLst/>
+        </p:spPr>
+        <p:style>
+          <a:lnRef idx="1">
+            <a:schemeClr val="accent1"/>
+          </a:lnRef>
+          <a:fillRef idx="3">
+            <a:schemeClr val="accent1"/>
+          </a:fillRef>
+          <a:effectRef idx="2">
+            <a:schemeClr val="accent1"/>
+          </a:effectRef>
+          <a:fontRef idx="minor">
+            <a:schemeClr val="lt1"/>
+          </a:fontRef>
+        </p:style>
+        <p:txBody>
+          <a:bodyPr rtlCol="0" anchor="ctr"/>
+          <a:lstStyle/>
+          <a:p>
+            <a:pPr algn="ctr"/>
+          </a:p>
+        </p:txBody>
+      </p:sp>
+      <p:pic>
+        <p:nvPicPr>
+          <p:cNvPr id="8" name="Picture 7" descr="page1_executive_overview.png.png"/>
+          <p:cNvPicPr>
+            <a:picLocks noChangeAspect="1"/>
+          </p:cNvPicPr>
+          <p:nvPr/>
+        </p:nvPicPr>
+        <p:blipFill>
+          <a:blip r:embed="rId2"/>
+          <a:stretch>
+            <a:fillRect/>
+          </a:stretch>
+        </p:blipFill>
+        <p:spPr>
+          <a:xfrm>
+            <a:off x="775787" y="1600200"/>
+            <a:ext cx="5068681" cy="2816351"/>
+          </a:xfrm>
+          <a:prstGeom prst="rect">
+            <a:avLst/>
+          </a:prstGeom>
+        </p:spPr>
+      </p:pic>
+      <p:sp>
+        <p:nvSpPr>
+          <p:cNvPr id="9" name="Rounded Rectangle 8"/>
+          <p:cNvSpPr/>
+          <p:nvPr/>
+        </p:nvSpPr>
+        <p:spPr>
+          <a:xfrm>
+            <a:off x="6453835" y="1517904"/>
+            <a:ext cx="5234025" cy="2980944"/>
+          </a:xfrm>
+          <a:prstGeom prst="roundRect">
+            <a:avLst>
+              <a:gd name="adj" fmla="val 8000"/>
+            </a:avLst>
+          </a:prstGeom>
+          <a:solidFill>
+            <a:srgbClr val="FFFFFF"/>
+          </a:solidFill>
+          <a:ln w="12700">
+            <a:solidFill>
+              <a:srgbClr val="223049"/>
+            </a:solidFill>
+          </a:ln>
+          <a:effectLst/>
+        </p:spPr>
+        <p:style>
+          <a:lnRef idx="1">
+            <a:schemeClr val="accent1"/>
+          </a:lnRef>
+          <a:fillRef idx="3">
+            <a:schemeClr val="accent1"/>
+          </a:fillRef>
+          <a:effectRef idx="2">
+            <a:schemeClr val="accent1"/>
+          </a:effectRef>
+          <a:fontRef idx="minor">
+            <a:schemeClr val="lt1"/>
+          </a:fontRef>
+        </p:style>
+        <p:txBody>
+          <a:bodyPr rtlCol="0" anchor="ctr"/>
+          <a:lstStyle/>
+          <a:p>
+            <a:pPr algn="ctr"/>
+          </a:p>
+        </p:txBody>
+      </p:sp>
+      <p:pic>
+        <p:nvPicPr>
+          <p:cNvPr id="10" name="Picture 9" descr="page3_risk_intelligence.png.png"/>
+          <p:cNvPicPr>
+            <a:picLocks noChangeAspect="1"/>
+          </p:cNvPicPr>
+          <p:nvPr/>
+        </p:nvPicPr>
+        <p:blipFill>
+          <a:blip r:embed="rId3"/>
+          <a:stretch>
+            <a:fillRect/>
+          </a:stretch>
+        </p:blipFill>
+        <p:spPr>
+          <a:xfrm>
+            <a:off x="6536131" y="1600200"/>
+            <a:ext cx="5069433" cy="2816351"/>
+          </a:xfrm>
+          <a:prstGeom prst="rect">
+            <a:avLst/>
+          </a:prstGeom>
+        </p:spPr>
+      </p:pic>
+      <p:sp>
+        <p:nvSpPr>
+          <p:cNvPr id="11" name="Rounded Rectangle 10"/>
+          <p:cNvSpPr/>
+          <p:nvPr/>
+        </p:nvSpPr>
+        <p:spPr>
+          <a:xfrm>
+            <a:off x="566928" y="4608576"/>
+            <a:ext cx="2641015" cy="1188720"/>
+          </a:xfrm>
+          <a:prstGeom prst="roundRect">
+            <a:avLst>
+              <a:gd name="adj" fmla="val 8000"/>
+            </a:avLst>
+          </a:prstGeom>
+          <a:solidFill>
+            <a:srgbClr val="111A2C"/>
+          </a:solidFill>
+          <a:ln w="12700">
+            <a:solidFill>
+              <a:srgbClr val="223049"/>
+            </a:solidFill>
+          </a:ln>
+          <a:effectLst/>
+        </p:spPr>
+        <p:style>
+          <a:lnRef idx="1">
+            <a:schemeClr val="accent1"/>
+          </a:lnRef>
+          <a:fillRef idx="3">
+            <a:schemeClr val="accent1"/>
+          </a:fillRef>
+          <a:effectRef idx="2">
+            <a:schemeClr val="accent1"/>
+          </a:effectRef>
+          <a:fontRef idx="minor">
+            <a:schemeClr val="lt1"/>
+          </a:fontRef>
+        </p:style>
+        <p:txBody>
+          <a:bodyPr rtlCol="0" anchor="ctr"/>
+          <a:lstStyle/>
+          <a:p>
+            <a:pPr algn="ctr"/>
+          </a:p>
+        </p:txBody>
+      </p:sp>
+      <p:sp>
+        <p:nvSpPr>
+          <p:cNvPr id="12" name="Rectangle 11"/>
+          <p:cNvSpPr/>
+          <p:nvPr/>
+        </p:nvSpPr>
+        <p:spPr>
+          <a:xfrm>
+            <a:off x="566928" y="4736592"/>
+            <a:ext cx="32004" cy="932688"/>
+          </a:xfrm>
+          <a:prstGeom prst="rect">
+            <a:avLst/>
+          </a:prstGeom>
+          <a:solidFill>
+            <a:srgbClr val="2FD8B4"/>
+          </a:solidFill>
+          <a:ln>
+            <a:noFill/>
+          </a:ln>
+          <a:effectLst/>
+        </p:spPr>
+        <p:style>
+          <a:lnRef idx="1">
+            <a:schemeClr val="accent1"/>
+          </a:lnRef>
+          <a:fillRef idx="3">
+            <a:schemeClr val="accent1"/>
+          </a:fillRef>
+          <a:effectRef idx="2">
+            <a:schemeClr val="accent1"/>
+          </a:effectRef>
+          <a:fontRef idx="minor">
+            <a:schemeClr val="lt1"/>
+          </a:fontRef>
+        </p:style>
+        <p:txBody>
+          <a:bodyPr rtlCol="0" anchor="ctr"/>
+          <a:lstStyle/>
+          <a:p>
+            <a:pPr algn="ctr"/>
+          </a:p>
+        </p:txBody>
+      </p:sp>
+      <p:sp>
+        <p:nvSpPr>
+          <p:cNvPr id="13" name="TextBox 12"/>
+          <p:cNvSpPr txBox="1"/>
+          <p:nvPr/>
+        </p:nvSpPr>
+        <p:spPr>
+          <a:xfrm>
+            <a:off x="749808" y="4754880"/>
+            <a:ext cx="2256967" cy="914400"/>
+          </a:xfrm>
+          <a:prstGeom prst="rect">
+            <a:avLst/>
+          </a:prstGeom>
+          <a:noFill/>
+        </p:spPr>
+        <p:txBody>
+          <a:bodyPr wrap="square" lIns="0" rIns="0" tIns="0" bIns="0" anchor="t">
+            <a:spAutoFit/>
+          </a:bodyPr>
+          <a:lstStyle/>
+          <a:p>
+            <a:pPr algn="l">
+              <a:lnSpc>
+                <a:spcPct val="112000"/>
+              </a:lnSpc>
+              <a:spcAft>
+                <a:spcPts val="400"/>
+              </a:spcAft>
+            </a:pPr>
+            <a:r>
+              <a:rPr sz="1150" b="1">
+                <a:solidFill>
+                  <a:srgbClr val="2FD8B4"/>
+                </a:solidFill>
+                <a:latin typeface="Segoe UI"/>
+              </a:rPr>
+              <a:t>Executive overview</a:t>
+            </a:r>
+          </a:p>
+          <a:p>
+            <a:pPr algn="l">
+              <a:lnSpc>
+                <a:spcPct val="116000"/>
+              </a:lnSpc>
+              <a:spcAft>
+                <a:spcPts val="0"/>
+              </a:spcAft>
+            </a:pPr>
+            <a:r>
+              <a:rPr sz="1000" b="0">
+                <a:solidFill>
+                  <a:srgbClr val="EAF0F7"/>
+                </a:solidFill>
+                <a:latin typeface="Segoe UI"/>
+              </a:rPr>
+              <a:t>Portfolio KPIs, churn rate and revenue in one view for management.</a:t>
+            </a:r>
+          </a:p>
+        </p:txBody>
+      </p:sp>
+      <p:sp>
+        <p:nvSpPr>
+          <p:cNvPr id="14" name="Rounded Rectangle 13"/>
+          <p:cNvSpPr/>
+          <p:nvPr/>
+        </p:nvSpPr>
+        <p:spPr>
+          <a:xfrm>
+            <a:off x="3372535" y="4608576"/>
+            <a:ext cx="2641015" cy="1188720"/>
+          </a:xfrm>
+          <a:prstGeom prst="roundRect">
+            <a:avLst>
+              <a:gd name="adj" fmla="val 8000"/>
+            </a:avLst>
+          </a:prstGeom>
+          <a:solidFill>
+            <a:srgbClr val="111A2C"/>
+          </a:solidFill>
+          <a:ln w="12700">
+            <a:solidFill>
+              <a:srgbClr val="223049"/>
+            </a:solidFill>
+          </a:ln>
+          <a:effectLst/>
+        </p:spPr>
+        <p:style>
+          <a:lnRef idx="1">
+            <a:schemeClr val="accent1"/>
+          </a:lnRef>
+          <a:fillRef idx="3">
+            <a:schemeClr val="accent1"/>
+          </a:fillRef>
+          <a:effectRef idx="2">
+            <a:schemeClr val="accent1"/>
+          </a:effectRef>
+          <a:fontRef idx="minor">
+            <a:schemeClr val="lt1"/>
+          </a:fontRef>
+        </p:style>
+        <p:txBody>
+          <a:bodyPr rtlCol="0" anchor="ctr"/>
+          <a:lstStyle/>
+          <a:p>
+            <a:pPr algn="ctr"/>
+          </a:p>
+        </p:txBody>
+      </p:sp>
+      <p:sp>
+        <p:nvSpPr>
+          <p:cNvPr id="15" name="Rectangle 14"/>
+          <p:cNvSpPr/>
+          <p:nvPr/>
+        </p:nvSpPr>
+        <p:spPr>
+          <a:xfrm>
+            <a:off x="3372535" y="4736592"/>
+            <a:ext cx="32004" cy="932688"/>
+          </a:xfrm>
+          <a:prstGeom prst="rect">
+            <a:avLst/>
+          </a:prstGeom>
+          <a:solidFill>
+            <a:srgbClr val="4C8DFF"/>
+          </a:solidFill>
+          <a:ln>
+            <a:noFill/>
+          </a:ln>
+          <a:effectLst/>
+        </p:spPr>
+        <p:style>
+          <a:lnRef idx="1">
+            <a:schemeClr val="accent1"/>
+          </a:lnRef>
+          <a:fillRef idx="3">
+            <a:schemeClr val="accent1"/>
+          </a:fillRef>
+          <a:effectRef idx="2">
+            <a:schemeClr val="accent1"/>
+          </a:effectRef>
+          <a:fontRef idx="minor">
+            <a:schemeClr val="lt1"/>
+          </a:fontRef>
+        </p:style>
+        <p:txBody>
+          <a:bodyPr rtlCol="0" anchor="ctr"/>
+          <a:lstStyle/>
+          <a:p>
+            <a:pPr algn="ctr"/>
+          </a:p>
+        </p:txBody>
+      </p:sp>
+      <p:sp>
+        <p:nvSpPr>
+          <p:cNvPr id="16" name="TextBox 15"/>
+          <p:cNvSpPr txBox="1"/>
+          <p:nvPr/>
+        </p:nvSpPr>
+        <p:spPr>
+          <a:xfrm>
+            <a:off x="3555415" y="4754880"/>
+            <a:ext cx="2256967" cy="914400"/>
+          </a:xfrm>
+          <a:prstGeom prst="rect">
+            <a:avLst/>
+          </a:prstGeom>
+          <a:noFill/>
+        </p:spPr>
+        <p:txBody>
+          <a:bodyPr wrap="square" lIns="0" rIns="0" tIns="0" bIns="0" anchor="t">
+            <a:spAutoFit/>
+          </a:bodyPr>
+          <a:lstStyle/>
+          <a:p>
+            <a:pPr algn="l">
+              <a:lnSpc>
+                <a:spcPct val="112000"/>
+              </a:lnSpc>
+              <a:spcAft>
+                <a:spcPts val="400"/>
+              </a:spcAft>
+            </a:pPr>
+            <a:r>
+              <a:rPr sz="1150" b="1">
+                <a:solidFill>
+                  <a:srgbClr val="4C8DFF"/>
+                </a:solidFill>
+                <a:latin typeface="Segoe UI"/>
+              </a:rPr>
+              <a:t>Customer insights</a:t>
+            </a:r>
+          </a:p>
+          <a:p>
+            <a:pPr algn="l">
+              <a:lnSpc>
+                <a:spcPct val="116000"/>
+              </a:lnSpc>
+              <a:spcAft>
+                <a:spcPts val="0"/>
+              </a:spcAft>
+            </a:pPr>
+            <a:r>
+              <a:rPr sz="1000" b="0">
+                <a:solidFill>
+                  <a:srgbClr val="EAF0F7"/>
+                </a:solidFill>
+                <a:latin typeface="Segoe UI"/>
+              </a:rPr>
+              <a:t>Where churn concentrates — contract, tenure, service mix.</a:t>
+            </a:r>
+          </a:p>
+        </p:txBody>
+      </p:sp>
+      <p:sp>
+        <p:nvSpPr>
+          <p:cNvPr id="17" name="Rounded Rectangle 16"/>
+          <p:cNvSpPr/>
+          <p:nvPr/>
+        </p:nvSpPr>
+        <p:spPr>
+          <a:xfrm>
+            <a:off x="6178143" y="4608576"/>
+            <a:ext cx="2641015" cy="1188720"/>
+          </a:xfrm>
+          <a:prstGeom prst="roundRect">
+            <a:avLst>
+              <a:gd name="adj" fmla="val 8000"/>
+            </a:avLst>
+          </a:prstGeom>
+          <a:solidFill>
+            <a:srgbClr val="111A2C"/>
+          </a:solidFill>
+          <a:ln w="12700">
+            <a:solidFill>
+              <a:srgbClr val="223049"/>
+            </a:solidFill>
+          </a:ln>
+          <a:effectLst/>
+        </p:spPr>
+        <p:style>
+          <a:lnRef idx="1">
+            <a:schemeClr val="accent1"/>
+          </a:lnRef>
+          <a:fillRef idx="3">
+            <a:schemeClr val="accent1"/>
+          </a:fillRef>
+          <a:effectRef idx="2">
+            <a:schemeClr val="accent1"/>
+          </a:effectRef>
+          <a:fontRef idx="minor">
+            <a:schemeClr val="lt1"/>
+          </a:fontRef>
+        </p:style>
+        <p:txBody>
+          <a:bodyPr rtlCol="0" anchor="ctr"/>
+          <a:lstStyle/>
+          <a:p>
+            <a:pPr algn="ctr"/>
+          </a:p>
+        </p:txBody>
+      </p:sp>
+      <p:sp>
+        <p:nvSpPr>
+          <p:cNvPr id="18" name="Rectangle 17"/>
+          <p:cNvSpPr/>
+          <p:nvPr/>
+        </p:nvSpPr>
+        <p:spPr>
+          <a:xfrm>
+            <a:off x="6178143" y="4736592"/>
+            <a:ext cx="32004" cy="932688"/>
+          </a:xfrm>
+          <a:prstGeom prst="rect">
+            <a:avLst/>
+          </a:prstGeom>
+          <a:solidFill>
+            <a:srgbClr val="F5A623"/>
+          </a:solidFill>
+          <a:ln>
+            <a:noFill/>
+          </a:ln>
+          <a:effectLst/>
+        </p:spPr>
+        <p:style>
+          <a:lnRef idx="1">
+            <a:schemeClr val="accent1"/>
+          </a:lnRef>
+          <a:fillRef idx="3">
+            <a:schemeClr val="accent1"/>
+          </a:fillRef>
+          <a:effectRef idx="2">
+            <a:schemeClr val="accent1"/>
+          </a:effectRef>
+          <a:fontRef idx="minor">
+            <a:schemeClr val="lt1"/>
+          </a:fontRef>
+        </p:style>
+        <p:txBody>
+          <a:bodyPr rtlCol="0" anchor="ctr"/>
+          <a:lstStyle/>
+          <a:p>
+            <a:pPr algn="ctr"/>
+          </a:p>
+        </p:txBody>
+      </p:sp>
+      <p:sp>
+        <p:nvSpPr>
+          <p:cNvPr id="19" name="TextBox 18"/>
+          <p:cNvSpPr txBox="1"/>
+          <p:nvPr/>
+        </p:nvSpPr>
+        <p:spPr>
+          <a:xfrm>
+            <a:off x="6361023" y="4754880"/>
+            <a:ext cx="2256967" cy="914400"/>
+          </a:xfrm>
+          <a:prstGeom prst="rect">
+            <a:avLst/>
+          </a:prstGeom>
+          <a:noFill/>
+        </p:spPr>
+        <p:txBody>
+          <a:bodyPr wrap="square" lIns="0" rIns="0" tIns="0" bIns="0" anchor="t">
+            <a:spAutoFit/>
+          </a:bodyPr>
+          <a:lstStyle/>
+          <a:p>
+            <a:pPr algn="l">
+              <a:lnSpc>
+                <a:spcPct val="112000"/>
+              </a:lnSpc>
+              <a:spcAft>
+                <a:spcPts val="400"/>
+              </a:spcAft>
+            </a:pPr>
+            <a:r>
+              <a:rPr sz="1150" b="1">
+                <a:solidFill>
+                  <a:srgbClr val="F5A623"/>
+                </a:solidFill>
+                <a:latin typeface="Segoe UI"/>
+              </a:rPr>
+              <a:t>Risk intelligence</a:t>
+            </a:r>
+          </a:p>
+          <a:p>
+            <a:pPr algn="l">
+              <a:lnSpc>
+                <a:spcPct val="116000"/>
+              </a:lnSpc>
+              <a:spcAft>
+                <a:spcPts val="0"/>
+              </a:spcAft>
+            </a:pPr>
+            <a:r>
+              <a:rPr sz="1000" b="0">
+                <a:solidFill>
+                  <a:srgbClr val="EAF0F7"/>
+                </a:solidFill>
+                <a:latin typeface="Segoe UI"/>
+              </a:rPr>
+              <a:t>The scored risk distribution carried into BI.</a:t>
+            </a:r>
+          </a:p>
+        </p:txBody>
+      </p:sp>
+      <p:sp>
+        <p:nvSpPr>
+          <p:cNvPr id="20" name="Rounded Rectangle 19"/>
+          <p:cNvSpPr/>
+          <p:nvPr/>
+        </p:nvSpPr>
+        <p:spPr>
+          <a:xfrm>
+            <a:off x="8983751" y="4608576"/>
+            <a:ext cx="2641015" cy="1188720"/>
+          </a:xfrm>
+          <a:prstGeom prst="roundRect">
+            <a:avLst>
+              <a:gd name="adj" fmla="val 8000"/>
+            </a:avLst>
+          </a:prstGeom>
+          <a:solidFill>
+            <a:srgbClr val="111A2C"/>
+          </a:solidFill>
+          <a:ln w="12700">
+            <a:solidFill>
+              <a:srgbClr val="223049"/>
+            </a:solidFill>
+          </a:ln>
+          <a:effectLst/>
+        </p:spPr>
+        <p:style>
+          <a:lnRef idx="1">
+            <a:schemeClr val="accent1"/>
+          </a:lnRef>
+          <a:fillRef idx="3">
+            <a:schemeClr val="accent1"/>
+          </a:fillRef>
+          <a:effectRef idx="2">
+            <a:schemeClr val="accent1"/>
+          </a:effectRef>
+          <a:fontRef idx="minor">
+            <a:schemeClr val="lt1"/>
+          </a:fontRef>
+        </p:style>
+        <p:txBody>
+          <a:bodyPr rtlCol="0" anchor="ctr"/>
+          <a:lstStyle/>
+          <a:p>
+            <a:pPr algn="ctr"/>
+          </a:p>
+        </p:txBody>
+      </p:sp>
+      <p:sp>
+        <p:nvSpPr>
+          <p:cNvPr id="21" name="Rectangle 20"/>
+          <p:cNvSpPr/>
+          <p:nvPr/>
+        </p:nvSpPr>
+        <p:spPr>
+          <a:xfrm>
+            <a:off x="8983751" y="4736592"/>
+            <a:ext cx="32004" cy="932688"/>
+          </a:xfrm>
+          <a:prstGeom prst="rect">
+            <a:avLst/>
+          </a:prstGeom>
+          <a:solidFill>
+            <a:srgbClr val="FF5C6C"/>
+          </a:solidFill>
+          <a:ln>
+            <a:noFill/>
+          </a:ln>
+          <a:effectLst/>
+        </p:spPr>
+        <p:style>
+          <a:lnRef idx="1">
+            <a:schemeClr val="accent1"/>
+          </a:lnRef>
+          <a:fillRef idx="3">
+            <a:schemeClr val="accent1"/>
+          </a:fillRef>
+          <a:effectRef idx="2">
+            <a:schemeClr val="accent1"/>
+          </a:effectRef>
+          <a:fontRef idx="minor">
+            <a:schemeClr val="lt1"/>
+          </a:fontRef>
+        </p:style>
+        <p:txBody>
+          <a:bodyPr rtlCol="0" anchor="ctr"/>
+          <a:lstStyle/>
+          <a:p>
+            <a:pPr algn="ctr"/>
+          </a:p>
+        </p:txBody>
+      </p:sp>
+      <p:sp>
+        <p:nvSpPr>
+          <p:cNvPr id="22" name="TextBox 21"/>
+          <p:cNvSpPr txBox="1"/>
+          <p:nvPr/>
+        </p:nvSpPr>
+        <p:spPr>
+          <a:xfrm>
+            <a:off x="9166631" y="4754880"/>
+            <a:ext cx="2256967" cy="914400"/>
+          </a:xfrm>
+          <a:prstGeom prst="rect">
+            <a:avLst/>
+          </a:prstGeom>
+          <a:noFill/>
+        </p:spPr>
+        <p:txBody>
+          <a:bodyPr wrap="square" lIns="0" rIns="0" tIns="0" bIns="0" anchor="t">
+            <a:spAutoFit/>
+          </a:bodyPr>
+          <a:lstStyle/>
+          <a:p>
+            <a:pPr algn="l">
+              <a:lnSpc>
+                <a:spcPct val="112000"/>
+              </a:lnSpc>
+              <a:spcAft>
+                <a:spcPts val="400"/>
+              </a:spcAft>
+            </a:pPr>
+            <a:r>
+              <a:rPr sz="1150" b="1">
+                <a:solidFill>
+                  <a:srgbClr val="FF5C6C"/>
+                </a:solidFill>
+                <a:latin typeface="Segoe UI"/>
+              </a:rPr>
+              <a:t>Retention strategy</a:t>
+            </a:r>
+          </a:p>
+          <a:p>
+            <a:pPr algn="l">
+              <a:lnSpc>
+                <a:spcPct val="116000"/>
+              </a:lnSpc>
+              <a:spcAft>
+                <a:spcPts val="0"/>
+              </a:spcAft>
+            </a:pPr>
+            <a:r>
+              <a:rPr sz="1000" b="0">
+                <a:solidFill>
+                  <a:srgbClr val="EAF0F7"/>
+                </a:solidFill>
+                <a:latin typeface="Segoe UI"/>
+              </a:rPr>
+              <a:t>Which actions are recommended, and to how many customers.</a:t>
+            </a:r>
+          </a:p>
+        </p:txBody>
+      </p:sp>
+      <p:sp>
+        <p:nvSpPr>
+          <p:cNvPr id="23" name="Rounded Rectangle 22"/>
+          <p:cNvSpPr/>
+          <p:nvPr/>
+        </p:nvSpPr>
+        <p:spPr>
+          <a:xfrm>
+            <a:off x="566928" y="5907024"/>
+            <a:ext cx="11057839" cy="310896"/>
+          </a:xfrm>
+          <a:prstGeom prst="roundRect">
+            <a:avLst>
+              <a:gd name="adj" fmla="val 8000"/>
+            </a:avLst>
+          </a:prstGeom>
+          <a:solidFill>
+            <a:srgbClr val="162136"/>
+          </a:solidFill>
+          <a:ln w="12700">
+            <a:solidFill>
+              <a:srgbClr val="4C8DFF"/>
+            </a:solidFill>
+          </a:ln>
+          <a:effectLst/>
+        </p:spPr>
+        <p:style>
+          <a:lnRef idx="1">
+            <a:schemeClr val="accent1"/>
+          </a:lnRef>
+          <a:fillRef idx="3">
+            <a:schemeClr val="accent1"/>
+          </a:fillRef>
+          <a:effectRef idx="2">
+            <a:schemeClr val="accent1"/>
+          </a:effectRef>
+          <a:fontRef idx="minor">
+            <a:schemeClr val="lt1"/>
+          </a:fontRef>
+        </p:style>
+        <p:txBody>
+          <a:bodyPr rtlCol="0" anchor="ctr"/>
+          <a:lstStyle/>
+          <a:p>
+            <a:pPr algn="ctr"/>
+          </a:p>
+        </p:txBody>
+      </p:sp>
+      <p:sp>
+        <p:nvSpPr>
+          <p:cNvPr id="24" name="TextBox 23"/>
+          <p:cNvSpPr txBox="1"/>
+          <p:nvPr/>
+        </p:nvSpPr>
+        <p:spPr>
+          <a:xfrm>
+            <a:off x="749808" y="5925312"/>
+            <a:ext cx="10692079" cy="274320"/>
+          </a:xfrm>
+          <a:prstGeom prst="rect">
+            <a:avLst/>
+          </a:prstGeom>
+          <a:noFill/>
+        </p:spPr>
+        <p:txBody>
+          <a:bodyPr wrap="square" lIns="0" rIns="0" tIns="0" bIns="0" anchor="ctr">
+            <a:spAutoFit/>
+          </a:bodyPr>
+          <a:lstStyle/>
+          <a:p>
+            <a:pPr algn="l">
+              <a:lnSpc>
+                <a:spcPct val="112000"/>
+              </a:lnSpc>
+              <a:spcAft>
+                <a:spcPts val="0"/>
+              </a:spcAft>
+            </a:pPr>
+            <a:r>
+              <a:rPr sz="1050" b="1" u="sng">
+                <a:solidFill>
+                  <a:srgbClr val="4C8DFF"/>
+                </a:solidFill>
+                <a:latin typeface="Consolas"/>
+                <a:hlinkClick r:id="rId4"/>
+              </a:rPr>
+              <a:t>OPEN THE EDITABLE POWER BI TEMPLATE (.PBIT)  ↗</a:t>
+            </a:r>
+          </a:p>
+        </p:txBody>
+      </p:sp>
+      <p:sp>
+        <p:nvSpPr>
+          <p:cNvPr id="25" name="Rectangle 24"/>
+          <p:cNvSpPr/>
+          <p:nvPr/>
+        </p:nvSpPr>
+        <p:spPr>
+          <a:xfrm>
+            <a:off x="566928" y="6309360"/>
+            <a:ext cx="743145" cy="43891"/>
+          </a:xfrm>
+          <a:prstGeom prst="rect">
+            <a:avLst/>
+          </a:prstGeom>
+          <a:solidFill>
+            <a:srgbClr val="223049"/>
+          </a:solidFill>
+          <a:ln>
+            <a:noFill/>
+          </a:ln>
+          <a:effectLst/>
+        </p:spPr>
+        <p:style>
+          <a:lnRef idx="1">
+            <a:schemeClr val="accent1"/>
+          </a:lnRef>
+          <a:fillRef idx="3">
+            <a:schemeClr val="accent1"/>
+          </a:fillRef>
+          <a:effectRef idx="2">
+            <a:schemeClr val="accent1"/>
+          </a:effectRef>
+          <a:fontRef idx="minor">
+            <a:schemeClr val="lt1"/>
+          </a:fontRef>
+        </p:style>
+        <p:txBody>
+          <a:bodyPr rtlCol="0" anchor="ctr"/>
+          <a:lstStyle/>
+          <a:p>
+            <a:pPr algn="ctr"/>
+          </a:p>
+        </p:txBody>
+      </p:sp>
+      <p:sp>
+        <p:nvSpPr>
+          <p:cNvPr id="26" name="Rectangle 25"/>
+          <p:cNvSpPr/>
+          <p:nvPr/>
+        </p:nvSpPr>
+        <p:spPr>
+          <a:xfrm>
+            <a:off x="1360365" y="6309360"/>
+            <a:ext cx="743145" cy="43891"/>
+          </a:xfrm>
+          <a:prstGeom prst="rect">
+            <a:avLst/>
+          </a:prstGeom>
+          <a:solidFill>
+            <a:srgbClr val="223049"/>
+          </a:solidFill>
+          <a:ln>
+            <a:noFill/>
+          </a:ln>
+          <a:effectLst/>
+        </p:spPr>
+        <p:style>
+          <a:lnRef idx="1">
+            <a:schemeClr val="accent1"/>
+          </a:lnRef>
+          <a:fillRef idx="3">
+            <a:schemeClr val="accent1"/>
+          </a:fillRef>
+          <a:effectRef idx="2">
+            <a:schemeClr val="accent1"/>
+          </a:effectRef>
+          <a:fontRef idx="minor">
+            <a:schemeClr val="lt1"/>
+          </a:fontRef>
+        </p:style>
+        <p:txBody>
+          <a:bodyPr rtlCol="0" anchor="ctr"/>
+          <a:lstStyle/>
+          <a:p>
+            <a:pPr algn="ctr"/>
+          </a:p>
+        </p:txBody>
+      </p:sp>
+      <p:sp>
+        <p:nvSpPr>
+          <p:cNvPr id="27" name="Rectangle 26"/>
+          <p:cNvSpPr/>
+          <p:nvPr/>
+        </p:nvSpPr>
+        <p:spPr>
+          <a:xfrm>
+            <a:off x="2153803" y="6309360"/>
+            <a:ext cx="743145" cy="43891"/>
+          </a:xfrm>
+          <a:prstGeom prst="rect">
+            <a:avLst/>
+          </a:prstGeom>
+          <a:solidFill>
+            <a:srgbClr val="223049"/>
+          </a:solidFill>
+          <a:ln>
+            <a:noFill/>
+          </a:ln>
+          <a:effectLst/>
+        </p:spPr>
+        <p:style>
+          <a:lnRef idx="1">
+            <a:schemeClr val="accent1"/>
+          </a:lnRef>
+          <a:fillRef idx="3">
+            <a:schemeClr val="accent1"/>
+          </a:fillRef>
+          <a:effectRef idx="2">
+            <a:schemeClr val="accent1"/>
+          </a:effectRef>
+          <a:fontRef idx="minor">
+            <a:schemeClr val="lt1"/>
+          </a:fontRef>
+        </p:style>
+        <p:txBody>
+          <a:bodyPr rtlCol="0" anchor="ctr"/>
+          <a:lstStyle/>
+          <a:p>
+            <a:pPr algn="ctr"/>
+          </a:p>
+        </p:txBody>
+      </p:sp>
+      <p:sp>
+        <p:nvSpPr>
+          <p:cNvPr id="28" name="Rectangle 27"/>
+          <p:cNvSpPr/>
+          <p:nvPr/>
+        </p:nvSpPr>
+        <p:spPr>
+          <a:xfrm>
+            <a:off x="2947241" y="6309360"/>
+            <a:ext cx="743145" cy="43891"/>
+          </a:xfrm>
+          <a:prstGeom prst="rect">
+            <a:avLst/>
+          </a:prstGeom>
+          <a:solidFill>
+            <a:srgbClr val="223049"/>
+          </a:solidFill>
+          <a:ln>
+            <a:noFill/>
+          </a:ln>
+          <a:effectLst/>
+        </p:spPr>
+        <p:style>
+          <a:lnRef idx="1">
+            <a:schemeClr val="accent1"/>
+          </a:lnRef>
+          <a:fillRef idx="3">
+            <a:schemeClr val="accent1"/>
+          </a:fillRef>
+          <a:effectRef idx="2">
+            <a:schemeClr val="accent1"/>
+          </a:effectRef>
+          <a:fontRef idx="minor">
+            <a:schemeClr val="lt1"/>
+          </a:fontRef>
+        </p:style>
+        <p:txBody>
+          <a:bodyPr rtlCol="0" anchor="ctr"/>
+          <a:lstStyle/>
+          <a:p>
+            <a:pPr algn="ctr"/>
+          </a:p>
+        </p:txBody>
+      </p:sp>
+      <p:sp>
+        <p:nvSpPr>
+          <p:cNvPr id="29" name="Rectangle 28"/>
+          <p:cNvSpPr/>
+          <p:nvPr/>
+        </p:nvSpPr>
+        <p:spPr>
+          <a:xfrm>
+            <a:off x="3740679" y="6309360"/>
+            <a:ext cx="743145" cy="43891"/>
+          </a:xfrm>
+          <a:prstGeom prst="rect">
+            <a:avLst/>
+          </a:prstGeom>
+          <a:solidFill>
+            <a:srgbClr val="223049"/>
+          </a:solidFill>
+          <a:ln>
+            <a:noFill/>
+          </a:ln>
+          <a:effectLst/>
+        </p:spPr>
+        <p:style>
+          <a:lnRef idx="1">
+            <a:schemeClr val="accent1"/>
+          </a:lnRef>
+          <a:fillRef idx="3">
+            <a:schemeClr val="accent1"/>
+          </a:fillRef>
+          <a:effectRef idx="2">
+            <a:schemeClr val="accent1"/>
+          </a:effectRef>
+          <a:fontRef idx="minor">
+            <a:schemeClr val="lt1"/>
+          </a:fontRef>
+        </p:style>
+        <p:txBody>
+          <a:bodyPr rtlCol="0" anchor="ctr"/>
+          <a:lstStyle/>
+          <a:p>
+            <a:pPr algn="ctr"/>
+          </a:p>
+        </p:txBody>
+      </p:sp>
+      <p:sp>
+        <p:nvSpPr>
+          <p:cNvPr id="30" name="Rectangle 29"/>
+          <p:cNvSpPr/>
+          <p:nvPr/>
+        </p:nvSpPr>
+        <p:spPr>
+          <a:xfrm>
+            <a:off x="4534117" y="6309360"/>
+            <a:ext cx="743145" cy="43891"/>
+          </a:xfrm>
+          <a:prstGeom prst="rect">
+            <a:avLst/>
+          </a:prstGeom>
+          <a:solidFill>
+            <a:srgbClr val="223049"/>
+          </a:solidFill>
+          <a:ln>
+            <a:noFill/>
+          </a:ln>
+          <a:effectLst/>
+        </p:spPr>
+        <p:style>
+          <a:lnRef idx="1">
+            <a:schemeClr val="accent1"/>
+          </a:lnRef>
+          <a:fillRef idx="3">
+            <a:schemeClr val="accent1"/>
+          </a:fillRef>
+          <a:effectRef idx="2">
+            <a:schemeClr val="accent1"/>
+          </a:effectRef>
+          <a:fontRef idx="minor">
+            <a:schemeClr val="lt1"/>
+          </a:fontRef>
+        </p:style>
+        <p:txBody>
+          <a:bodyPr rtlCol="0" anchor="ctr"/>
+          <a:lstStyle/>
+          <a:p>
+            <a:pPr algn="ctr"/>
+          </a:p>
+        </p:txBody>
+      </p:sp>
+      <p:sp>
+        <p:nvSpPr>
+          <p:cNvPr id="31" name="Rectangle 30"/>
+          <p:cNvSpPr/>
+          <p:nvPr/>
+        </p:nvSpPr>
+        <p:spPr>
+          <a:xfrm>
+            <a:off x="5327555" y="6309360"/>
+            <a:ext cx="743145" cy="43891"/>
+          </a:xfrm>
+          <a:prstGeom prst="rect">
+            <a:avLst/>
+          </a:prstGeom>
+          <a:solidFill>
+            <a:srgbClr val="223049"/>
+          </a:solidFill>
+          <a:ln>
+            <a:noFill/>
+          </a:ln>
+          <a:effectLst/>
+        </p:spPr>
+        <p:style>
+          <a:lnRef idx="1">
+            <a:schemeClr val="accent1"/>
+          </a:lnRef>
+          <a:fillRef idx="3">
+            <a:schemeClr val="accent1"/>
+          </a:fillRef>
+          <a:effectRef idx="2">
+            <a:schemeClr val="accent1"/>
+          </a:effectRef>
+          <a:fontRef idx="minor">
+            <a:schemeClr val="lt1"/>
+          </a:fontRef>
+        </p:style>
+        <p:txBody>
+          <a:bodyPr rtlCol="0" anchor="ctr"/>
+          <a:lstStyle/>
+          <a:p>
+            <a:pPr algn="ctr"/>
+          </a:p>
+        </p:txBody>
+      </p:sp>
+      <p:sp>
+        <p:nvSpPr>
+          <p:cNvPr id="32" name="Rectangle 31"/>
+          <p:cNvSpPr/>
+          <p:nvPr/>
+        </p:nvSpPr>
+        <p:spPr>
+          <a:xfrm>
+            <a:off x="6120993" y="6309360"/>
+            <a:ext cx="743145" cy="43891"/>
+          </a:xfrm>
+          <a:prstGeom prst="rect">
+            <a:avLst/>
+          </a:prstGeom>
+          <a:solidFill>
+            <a:srgbClr val="223049"/>
+          </a:solidFill>
+          <a:ln>
+            <a:noFill/>
+          </a:ln>
+          <a:effectLst/>
+        </p:spPr>
+        <p:style>
+          <a:lnRef idx="1">
+            <a:schemeClr val="accent1"/>
+          </a:lnRef>
+          <a:fillRef idx="3">
+            <a:schemeClr val="accent1"/>
+          </a:fillRef>
+          <a:effectRef idx="2">
+            <a:schemeClr val="accent1"/>
+          </a:effectRef>
+          <a:fontRef idx="minor">
+            <a:schemeClr val="lt1"/>
+          </a:fontRef>
+        </p:style>
+        <p:txBody>
+          <a:bodyPr rtlCol="0" anchor="ctr"/>
+          <a:lstStyle/>
+          <a:p>
+            <a:pPr algn="ctr"/>
+          </a:p>
+        </p:txBody>
+      </p:sp>
+      <p:sp>
+        <p:nvSpPr>
+          <p:cNvPr id="33" name="Rectangle 32"/>
+          <p:cNvSpPr/>
+          <p:nvPr/>
+        </p:nvSpPr>
+        <p:spPr>
+          <a:xfrm>
+            <a:off x="6914431" y="6309360"/>
+            <a:ext cx="743145" cy="43891"/>
+          </a:xfrm>
+          <a:prstGeom prst="rect">
+            <a:avLst/>
+          </a:prstGeom>
+          <a:solidFill>
+            <a:srgbClr val="223049"/>
+          </a:solidFill>
+          <a:ln>
+            <a:noFill/>
+          </a:ln>
+          <a:effectLst/>
+        </p:spPr>
+        <p:style>
+          <a:lnRef idx="1">
+            <a:schemeClr val="accent1"/>
+          </a:lnRef>
+          <a:fillRef idx="3">
+            <a:schemeClr val="accent1"/>
+          </a:fillRef>
+          <a:effectRef idx="2">
+            <a:schemeClr val="accent1"/>
+          </a:effectRef>
+          <a:fontRef idx="minor">
+            <a:schemeClr val="lt1"/>
+          </a:fontRef>
+        </p:style>
+        <p:txBody>
+          <a:bodyPr rtlCol="0" anchor="ctr"/>
+          <a:lstStyle/>
+          <a:p>
+            <a:pPr algn="ctr"/>
+          </a:p>
+        </p:txBody>
+      </p:sp>
+      <p:sp>
+        <p:nvSpPr>
+          <p:cNvPr id="34" name="Rectangle 33"/>
+          <p:cNvSpPr/>
+          <p:nvPr/>
+        </p:nvSpPr>
+        <p:spPr>
+          <a:xfrm>
+            <a:off x="7707869" y="6309360"/>
+            <a:ext cx="743145" cy="43891"/>
+          </a:xfrm>
+          <a:prstGeom prst="rect">
+            <a:avLst/>
+          </a:prstGeom>
+          <a:solidFill>
+            <a:srgbClr val="223049"/>
+          </a:solidFill>
+          <a:ln>
+            <a:noFill/>
+          </a:ln>
+          <a:effectLst/>
+        </p:spPr>
+        <p:style>
+          <a:lnRef idx="1">
+            <a:schemeClr val="accent1"/>
+          </a:lnRef>
+          <a:fillRef idx="3">
+            <a:schemeClr val="accent1"/>
+          </a:fillRef>
+          <a:effectRef idx="2">
+            <a:schemeClr val="accent1"/>
+          </a:effectRef>
+          <a:fontRef idx="minor">
+            <a:schemeClr val="lt1"/>
+          </a:fontRef>
+        </p:style>
+        <p:txBody>
+          <a:bodyPr rtlCol="0" anchor="ctr"/>
+          <a:lstStyle/>
+          <a:p>
+            <a:pPr algn="ctr"/>
+          </a:p>
+        </p:txBody>
+      </p:sp>
+      <p:sp>
+        <p:nvSpPr>
+          <p:cNvPr id="35" name="Rectangle 34"/>
+          <p:cNvSpPr/>
+          <p:nvPr/>
+        </p:nvSpPr>
+        <p:spPr>
+          <a:xfrm>
+            <a:off x="8501307" y="6309360"/>
+            <a:ext cx="743145" cy="43891"/>
+          </a:xfrm>
+          <a:prstGeom prst="rect">
+            <a:avLst/>
+          </a:prstGeom>
+          <a:solidFill>
+            <a:srgbClr val="223049"/>
+          </a:solidFill>
+          <a:ln>
+            <a:noFill/>
+          </a:ln>
+          <a:effectLst/>
+        </p:spPr>
+        <p:style>
+          <a:lnRef idx="1">
+            <a:schemeClr val="accent1"/>
+          </a:lnRef>
+          <a:fillRef idx="3">
+            <a:schemeClr val="accent1"/>
+          </a:fillRef>
+          <a:effectRef idx="2">
+            <a:schemeClr val="accent1"/>
+          </a:effectRef>
+          <a:fontRef idx="minor">
+            <a:schemeClr val="lt1"/>
+          </a:fontRef>
+        </p:style>
+        <p:txBody>
+          <a:bodyPr rtlCol="0" anchor="ctr"/>
+          <a:lstStyle/>
+          <a:p>
+            <a:pPr algn="ctr"/>
+          </a:p>
+        </p:txBody>
+      </p:sp>
+      <p:sp>
+        <p:nvSpPr>
+          <p:cNvPr id="36" name="Rectangle 35"/>
+          <p:cNvSpPr/>
+          <p:nvPr/>
+        </p:nvSpPr>
+        <p:spPr>
+          <a:xfrm>
+            <a:off x="9294745" y="6296558"/>
+            <a:ext cx="743145" cy="68580"/>
+          </a:xfrm>
+          <a:prstGeom prst="rect">
+            <a:avLst/>
+          </a:prstGeom>
+          <a:solidFill>
+            <a:srgbClr val="2FD8B4"/>
+          </a:solidFill>
+          <a:ln>
+            <a:noFill/>
+          </a:ln>
+          <a:effectLst/>
+        </p:spPr>
+        <p:style>
+          <a:lnRef idx="1">
+            <a:schemeClr val="accent1"/>
+          </a:lnRef>
+          <a:fillRef idx="3">
+            <a:schemeClr val="accent1"/>
+          </a:fillRef>
+          <a:effectRef idx="2">
+            <a:schemeClr val="accent1"/>
+          </a:effectRef>
+          <a:fontRef idx="minor">
+            <a:schemeClr val="lt1"/>
+          </a:fontRef>
+        </p:style>
+        <p:txBody>
+          <a:bodyPr rtlCol="0" anchor="ctr"/>
+          <a:lstStyle/>
+          <a:p>
+            <a:pPr algn="ctr"/>
+          </a:p>
+        </p:txBody>
+      </p:sp>
+      <p:sp>
+        <p:nvSpPr>
+          <p:cNvPr id="37" name="Rectangle 36"/>
+          <p:cNvSpPr/>
+          <p:nvPr/>
+        </p:nvSpPr>
+        <p:spPr>
+          <a:xfrm>
+            <a:off x="10088183" y="6309360"/>
+            <a:ext cx="743145" cy="43891"/>
+          </a:xfrm>
+          <a:prstGeom prst="rect">
+            <a:avLst/>
+          </a:prstGeom>
+          <a:solidFill>
+            <a:srgbClr val="223049"/>
+          </a:solidFill>
+          <a:ln>
+            <a:noFill/>
+          </a:ln>
+          <a:effectLst/>
+        </p:spPr>
+        <p:style>
+          <a:lnRef idx="1">
+            <a:schemeClr val="accent1"/>
+          </a:lnRef>
+          <a:fillRef idx="3">
+            <a:schemeClr val="accent1"/>
+          </a:fillRef>
+          <a:effectRef idx="2">
+            <a:schemeClr val="accent1"/>
+          </a:effectRef>
+          <a:fontRef idx="minor">
+            <a:schemeClr val="lt1"/>
+          </a:fontRef>
+        </p:style>
+        <p:txBody>
+          <a:bodyPr rtlCol="0" anchor="ctr"/>
+          <a:lstStyle/>
+          <a:p>
+            <a:pPr algn="ctr"/>
+          </a:p>
+        </p:txBody>
+      </p:sp>
+      <p:sp>
+        <p:nvSpPr>
+          <p:cNvPr id="38" name="Rectangle 37"/>
+          <p:cNvSpPr/>
+          <p:nvPr/>
+        </p:nvSpPr>
+        <p:spPr>
+          <a:xfrm>
+            <a:off x="10881621" y="6309360"/>
+            <a:ext cx="743145" cy="43891"/>
+          </a:xfrm>
+          <a:prstGeom prst="rect">
+            <a:avLst/>
+          </a:prstGeom>
+          <a:solidFill>
+            <a:srgbClr val="223049"/>
+          </a:solidFill>
+          <a:ln>
+            <a:noFill/>
+          </a:ln>
+          <a:effectLst/>
+        </p:spPr>
+        <p:style>
+          <a:lnRef idx="1">
+            <a:schemeClr val="accent1"/>
+          </a:lnRef>
+          <a:fillRef idx="3">
+            <a:schemeClr val="accent1"/>
+          </a:fillRef>
+          <a:effectRef idx="2">
+            <a:schemeClr val="accent1"/>
+          </a:effectRef>
+          <a:fontRef idx="minor">
+            <a:schemeClr val="lt1"/>
+          </a:fontRef>
+        </p:style>
+        <p:txBody>
+          <a:bodyPr rtlCol="0" anchor="ctr"/>
+          <a:lstStyle/>
+          <a:p>
+            <a:pPr algn="ctr"/>
+          </a:p>
+        </p:txBody>
+      </p:sp>
+      <p:sp>
+        <p:nvSpPr>
+          <p:cNvPr id="39" name="Rectangle 38"/>
+          <p:cNvSpPr/>
+          <p:nvPr/>
+        </p:nvSpPr>
+        <p:spPr>
+          <a:xfrm>
+            <a:off x="566928" y="6455664"/>
+            <a:ext cx="11057839" cy="9144"/>
+          </a:xfrm>
+          <a:prstGeom prst="rect">
+            <a:avLst/>
+          </a:prstGeom>
+          <a:solidFill>
+            <a:srgbClr val="223049"/>
+          </a:solidFill>
+          <a:ln>
+            <a:noFill/>
+          </a:ln>
+          <a:effectLst/>
+        </p:spPr>
+        <p:style>
+          <a:lnRef idx="1">
+            <a:schemeClr val="accent1"/>
+          </a:lnRef>
+          <a:fillRef idx="3">
+            <a:schemeClr val="accent1"/>
+          </a:fillRef>
+          <a:effectRef idx="2">
+            <a:schemeClr val="accent1"/>
+          </a:effectRef>
+          <a:fontRef idx="minor">
+            <a:schemeClr val="lt1"/>
+          </a:fontRef>
+        </p:style>
+        <p:txBody>
+          <a:bodyPr rtlCol="0" anchor="ctr"/>
+          <a:lstStyle/>
+          <a:p>
+            <a:pPr algn="ctr"/>
+          </a:p>
+        </p:txBody>
+      </p:sp>
+      <p:sp>
+        <p:nvSpPr>
+          <p:cNvPr id="40" name="TextBox 39"/>
+          <p:cNvSpPr txBox="1"/>
+          <p:nvPr/>
+        </p:nvSpPr>
+        <p:spPr>
+          <a:xfrm>
+            <a:off x="566928" y="6510528"/>
+            <a:ext cx="9509760" cy="219456"/>
+          </a:xfrm>
+          <a:prstGeom prst="rect">
+            <a:avLst/>
+          </a:prstGeom>
+          <a:noFill/>
+        </p:spPr>
+        <p:txBody>
+          <a:bodyPr wrap="square" lIns="0" rIns="0" tIns="0" bIns="0" anchor="t">
+            <a:spAutoFit/>
+          </a:bodyPr>
+          <a:lstStyle/>
+          <a:p>
+            <a:pPr algn="l">
+              <a:lnSpc>
+                <a:spcPct val="112000"/>
+              </a:lnSpc>
+              <a:spcAft>
+                <a:spcPts val="0"/>
+              </a:spcAft>
+            </a:pPr>
+            <a:r>
+              <a:rPr sz="900" b="0">
+                <a:solidFill>
+                  <a:srgbClr val="8CA0BE"/>
+                </a:solidFill>
+                <a:latin typeface="Segoe UI"/>
+              </a:rPr>
+              <a:t>RetainIQ · Signal Ops Console   ·   PHASE 12 · BUSINESS INTELLIGENCE</a:t>
+            </a:r>
+          </a:p>
+        </p:txBody>
+      </p:sp>
+      <p:sp>
+        <p:nvSpPr>
+          <p:cNvPr id="41" name="TextBox 40"/>
+          <p:cNvSpPr txBox="1"/>
+          <p:nvPr/>
+        </p:nvSpPr>
+        <p:spPr>
+          <a:xfrm>
+            <a:off x="10527487" y="6510528"/>
+            <a:ext cx="1097280" cy="219456"/>
+          </a:xfrm>
+          <a:prstGeom prst="rect">
+            <a:avLst/>
+          </a:prstGeom>
+          <a:noFill/>
+        </p:spPr>
+        <p:txBody>
+          <a:bodyPr wrap="square" lIns="0" rIns="0" tIns="0" bIns="0" anchor="t">
+            <a:spAutoFit/>
+          </a:bodyPr>
+          <a:lstStyle/>
+          <a:p>
+            <a:pPr algn="r">
+              <a:lnSpc>
+                <a:spcPct val="112000"/>
+              </a:lnSpc>
+              <a:spcAft>
+                <a:spcPts val="0"/>
+              </a:spcAft>
+            </a:pPr>
+            <a:r>
+              <a:rPr sz="900" b="0">
+                <a:solidFill>
+                  <a:srgbClr val="8CA0BE"/>
+                </a:solidFill>
+                <a:latin typeface="Consolas"/>
+              </a:rPr>
+              <a:t>15</a:t>
+            </a:r>
+          </a:p>
+        </p:txBody>
+      </p:sp>
+    </p:spTree>
+  </p:cSld>
+  <p:clrMapOvr>
+    <a:masterClrMapping/>
+  </p:clrMapOvr>
+</p:sld>
+</file>
+
+<file path=ppt/slides/slide16.xml><?xml version="1.0" encoding="utf-8"?>
+<p:sld xmlns:a="http://schemas.openxmlformats.org/drawingml/2006/main" xmlns:p="http://schemas.openxmlformats.org/presentationml/2006/main" xmlns:r="http://schemas.openxmlformats.org/officeDocument/2006/relationships">
+  <p:cSld>
+    <p:spTree>
+      <p:nvGrpSpPr>
+        <p:cNvPr id="1" name=""/>
+        <p:cNvGrpSpPr/>
+        <p:nvPr/>
+      </p:nvGrpSpPr>
+      <p:grpSpPr/>
+      <p:sp>
+        <p:nvSpPr>
+          <p:cNvPr id="2" name="Rectangle 1"/>
+          <p:cNvSpPr/>
+          <p:nvPr/>
+        </p:nvSpPr>
+        <p:spPr>
+          <a:xfrm>
+            <a:off x="0" y="0"/>
+            <a:ext cx="12191695" cy="6858000"/>
+          </a:xfrm>
+          <a:prstGeom prst="rect">
+            <a:avLst/>
+          </a:prstGeom>
+          <a:solidFill>
+            <a:srgbClr val="0A0F1C"/>
+          </a:solidFill>
+          <a:ln>
+            <a:noFill/>
+          </a:ln>
+          <a:effectLst/>
+        </p:spPr>
+        <p:style>
+          <a:lnRef idx="1">
+            <a:schemeClr val="accent1"/>
+          </a:lnRef>
+          <a:fillRef idx="3">
+            <a:schemeClr val="accent1"/>
+          </a:fillRef>
+          <a:effectRef idx="2">
+            <a:schemeClr val="accent1"/>
+          </a:effectRef>
+          <a:fontRef idx="minor">
+            <a:schemeClr val="lt1"/>
+          </a:fontRef>
+        </p:style>
+        <p:txBody>
+          <a:bodyPr rtlCol="0" anchor="ctr"/>
+          <a:lstStyle/>
+          <a:p>
+            <a:pPr algn="ctr"/>
+          </a:p>
+        </p:txBody>
+      </p:sp>
+      <p:sp>
+        <p:nvSpPr>
+          <p:cNvPr id="3" name="TextBox 2"/>
+          <p:cNvSpPr txBox="1"/>
+          <p:nvPr/>
+        </p:nvSpPr>
+        <p:spPr>
+          <a:xfrm>
+            <a:off x="566928" y="365760"/>
+            <a:ext cx="8229600" cy="237744"/>
+          </a:xfrm>
+          <a:prstGeom prst="rect">
+            <a:avLst/>
+          </a:prstGeom>
+          <a:noFill/>
+        </p:spPr>
+        <p:txBody>
+          <a:bodyPr wrap="square" lIns="0" rIns="0" tIns="0" bIns="0" anchor="t">
+            <a:spAutoFit/>
+          </a:bodyPr>
+          <a:lstStyle/>
+          <a:p>
+            <a:pPr algn="l">
+              <a:lnSpc>
+                <a:spcPct val="112000"/>
+              </a:lnSpc>
+              <a:spcAft>
+                <a:spcPts val="0"/>
+              </a:spcAft>
+            </a:pPr>
+            <a:r>
+              <a:rPr sz="1000" b="1">
+                <a:solidFill>
+                  <a:srgbClr val="2FD8B4"/>
+                </a:solidFill>
+                <a:latin typeface="Consolas"/>
+              </a:rPr>
+              <a:t>PHASE 13  ·  WEB APPLICATION</a:t>
+            </a:r>
+          </a:p>
+        </p:txBody>
+      </p:sp>
+      <p:sp>
+        <p:nvSpPr>
+          <p:cNvPr id="4" name="TextBox 3"/>
+          <p:cNvSpPr txBox="1"/>
+          <p:nvPr/>
+        </p:nvSpPr>
+        <p:spPr>
+          <a:xfrm>
+            <a:off x="566928" y="576072"/>
+            <a:ext cx="11057839" cy="475488"/>
+          </a:xfrm>
+          <a:prstGeom prst="rect">
+            <a:avLst/>
+          </a:prstGeom>
+          <a:noFill/>
+        </p:spPr>
+        <p:txBody>
+          <a:bodyPr wrap="square" lIns="0" rIns="0" tIns="0" bIns="0" anchor="t">
+            <a:spAutoFit/>
+          </a:bodyPr>
+          <a:lstStyle/>
+          <a:p>
+            <a:pPr algn="l">
+              <a:lnSpc>
+                <a:spcPct val="112000"/>
+              </a:lnSpc>
+              <a:spcAft>
+                <a:spcPts val="0"/>
+              </a:spcAft>
+            </a:pPr>
+            <a:r>
+              <a:rPr sz="2600" b="1">
+                <a:solidFill>
+                  <a:srgbClr val="EAF0F7"/>
+                </a:solidFill>
+                <a:latin typeface="Segoe UI"/>
+              </a:rPr>
+              <a:t>The product: a Signal Ops Console</a:t>
+            </a:r>
+          </a:p>
+        </p:txBody>
+      </p:sp>
+      <p:sp>
+        <p:nvSpPr>
+          <p:cNvPr id="5" name="TextBox 4"/>
+          <p:cNvSpPr txBox="1"/>
+          <p:nvPr/>
+        </p:nvSpPr>
+        <p:spPr>
+          <a:xfrm>
+            <a:off x="566928" y="1060704"/>
+            <a:ext cx="11057839" cy="274320"/>
+          </a:xfrm>
+          <a:prstGeom prst="rect">
+            <a:avLst/>
+          </a:prstGeom>
+          <a:noFill/>
+        </p:spPr>
+        <p:txBody>
+          <a:bodyPr wrap="square" lIns="0" rIns="0" tIns="0" bIns="0" anchor="t">
+            <a:spAutoFit/>
+          </a:bodyPr>
+          <a:lstStyle/>
+          <a:p>
+            <a:pPr algn="l">
+              <a:lnSpc>
+                <a:spcPct val="112000"/>
+              </a:lnSpc>
+              <a:spcAft>
+                <a:spcPts val="0"/>
+              </a:spcAft>
+            </a:pPr>
+            <a:r>
+              <a:rPr sz="1250" b="0">
+                <a:solidFill>
+                  <a:srgbClr val="8CA0BE"/>
+                </a:solidFill>
+                <a:latin typeface="Segoe UI"/>
+              </a:rPr>
+              <a:t>A working Flask application — bulk scoring, dashboard, private reports</a:t>
+            </a:r>
+          </a:p>
+        </p:txBody>
+      </p:sp>
+      <p:sp>
+        <p:nvSpPr>
+          <p:cNvPr id="6" name="Rectangle 5"/>
+          <p:cNvSpPr/>
+          <p:nvPr/>
+        </p:nvSpPr>
+        <p:spPr>
+          <a:xfrm>
+            <a:off x="566928" y="1371600"/>
+            <a:ext cx="11057839" cy="12801"/>
+          </a:xfrm>
+          <a:prstGeom prst="rect">
+            <a:avLst/>
+          </a:prstGeom>
+          <a:solidFill>
+            <a:srgbClr val="223049"/>
+          </a:solidFill>
+          <a:ln>
+            <a:noFill/>
+          </a:ln>
+          <a:effectLst/>
+        </p:spPr>
+        <p:style>
+          <a:lnRef idx="1">
+            <a:schemeClr val="accent1"/>
+          </a:lnRef>
+          <a:fillRef idx="3">
+            <a:schemeClr val="accent1"/>
+          </a:fillRef>
+          <a:effectRef idx="2">
+            <a:schemeClr val="accent1"/>
+          </a:effectRef>
+          <a:fontRef idx="minor">
+            <a:schemeClr val="lt1"/>
+          </a:fontRef>
+        </p:style>
+        <p:txBody>
+          <a:bodyPr rtlCol="0" anchor="ctr"/>
+          <a:lstStyle/>
+          <a:p>
+            <a:pPr algn="ctr"/>
+          </a:p>
+        </p:txBody>
+      </p:sp>
+      <p:pic>
+        <p:nvPicPr>
+          <p:cNvPr id="7" name="Picture 6" descr="06.prediction_dashboard.png"/>
+          <p:cNvPicPr>
+            <a:picLocks noChangeAspect="1"/>
+          </p:cNvPicPr>
+          <p:nvPr/>
+        </p:nvPicPr>
+        <p:blipFill>
+          <a:blip r:embed="rId2"/>
+          <a:stretch>
+            <a:fillRect/>
+          </a:stretch>
+        </p:blipFill>
+        <p:spPr>
+          <a:xfrm>
+            <a:off x="566928" y="1517904"/>
+            <a:ext cx="4644813" cy="3531648"/>
+          </a:xfrm>
+          <a:prstGeom prst="rect">
+            <a:avLst/>
+          </a:prstGeom>
+        </p:spPr>
+      </p:pic>
+      <p:pic>
+        <p:nvPicPr>
+          <p:cNvPr id="8" name="Picture 7" descr="04.Bulk_prediction.png"/>
+          <p:cNvPicPr>
+            <a:picLocks noChangeAspect="1"/>
+          </p:cNvPicPr>
+          <p:nvPr/>
+        </p:nvPicPr>
+        <p:blipFill>
+          <a:blip r:embed="rId3"/>
+          <a:stretch>
+            <a:fillRect/>
+          </a:stretch>
+        </p:blipFill>
+        <p:spPr>
+          <a:xfrm>
+            <a:off x="5412909" y="1517904"/>
+            <a:ext cx="6211857" cy="3531648"/>
+          </a:xfrm>
+          <a:prstGeom prst="rect">
+            <a:avLst/>
+          </a:prstGeom>
+        </p:spPr>
+      </p:pic>
+      <p:sp>
+        <p:nvSpPr>
+          <p:cNvPr id="9" name="Rounded Rectangle 8"/>
+          <p:cNvSpPr/>
+          <p:nvPr/>
+        </p:nvSpPr>
+        <p:spPr>
+          <a:xfrm>
+            <a:off x="566928" y="5193791"/>
+            <a:ext cx="11057839" cy="1024127"/>
+          </a:xfrm>
+          <a:prstGeom prst="roundRect">
+            <a:avLst>
+              <a:gd name="adj" fmla="val 8000"/>
+            </a:avLst>
+          </a:prstGeom>
+          <a:solidFill>
+            <a:srgbClr val="111A2C"/>
+          </a:solidFill>
+          <a:ln w="12700">
+            <a:solidFill>
+              <a:srgbClr val="223049"/>
+            </a:solidFill>
+          </a:ln>
+          <a:effectLst/>
+        </p:spPr>
+        <p:style>
+          <a:lnRef idx="1">
+            <a:schemeClr val="accent1"/>
+          </a:lnRef>
+          <a:fillRef idx="3">
+            <a:schemeClr val="accent1"/>
+          </a:fillRef>
+          <a:effectRef idx="2">
+            <a:schemeClr val="accent1"/>
+          </a:effectRef>
+          <a:fontRef idx="minor">
+            <a:schemeClr val="lt1"/>
+          </a:fontRef>
+        </p:style>
+        <p:txBody>
+          <a:bodyPr rtlCol="0" anchor="ctr"/>
+          <a:lstStyle/>
+          <a:p>
+            <a:pPr algn="ctr"/>
+          </a:p>
+        </p:txBody>
+      </p:sp>
+      <p:sp>
+        <p:nvSpPr>
+          <p:cNvPr id="10" name="TextBox 9"/>
+          <p:cNvSpPr txBox="1"/>
+          <p:nvPr/>
+        </p:nvSpPr>
+        <p:spPr>
+          <a:xfrm>
+            <a:off x="786384" y="5321807"/>
+            <a:ext cx="8570671" cy="786383"/>
+          </a:xfrm>
+          <a:prstGeom prst="rect">
+            <a:avLst/>
+          </a:prstGeom>
+          <a:noFill/>
+        </p:spPr>
+        <p:txBody>
+          <a:bodyPr wrap="square" lIns="0" rIns="0" tIns="0" bIns="0" anchor="t">
+            <a:spAutoFit/>
+          </a:bodyPr>
+          <a:lstStyle/>
+          <a:p>
+            <a:pPr algn="l">
+              <a:lnSpc>
+                <a:spcPct val="112000"/>
+              </a:lnSpc>
+              <a:spcAft>
+                <a:spcPts val="400"/>
+              </a:spcAft>
+            </a:pPr>
+            <a:r>
+              <a:rPr sz="980" b="1">
+                <a:solidFill>
+                  <a:srgbClr val="2FD8B4"/>
+                </a:solidFill>
+                <a:latin typeface="Consolas"/>
+              </a:rPr>
+              <a:t>WHAT A REVIEWER DOES</a:t>
+            </a:r>
+          </a:p>
+          <a:p>
+            <a:pPr algn="l">
+              <a:lnSpc>
+                <a:spcPct val="116000"/>
+              </a:lnSpc>
+              <a:spcAft>
+                <a:spcPts val="0"/>
+              </a:spcAft>
+            </a:pPr>
+            <a:r>
+              <a:rPr sz="1040" b="0">
+                <a:solidFill>
+                  <a:srgbClr val="EAF0F7"/>
+                </a:solidFill>
+                <a:latin typeface="Segoe UI"/>
+              </a:rPr>
+              <a:t>Upload a CSV  →  validate the file before scoring  →  score the whole portfolio
+Read churn rate, risk split and revenue at risk  →  drill into a customer  →  download a private report</a:t>
+            </a:r>
+          </a:p>
+        </p:txBody>
+      </p:sp>
+      <p:sp>
+        <p:nvSpPr>
+          <p:cNvPr id="11" name="TextBox 10"/>
+          <p:cNvSpPr txBox="1"/>
+          <p:nvPr/>
+        </p:nvSpPr>
+        <p:spPr>
+          <a:xfrm>
+            <a:off x="9613087" y="5321807"/>
+            <a:ext cx="2011680" cy="310896"/>
+          </a:xfrm>
+          <a:prstGeom prst="rect">
+            <a:avLst/>
+          </a:prstGeom>
+          <a:noFill/>
+        </p:spPr>
+        <p:txBody>
+          <a:bodyPr wrap="square" lIns="0" rIns="0" tIns="0" bIns="0" anchor="t">
+            <a:spAutoFit/>
+          </a:bodyPr>
+          <a:lstStyle/>
+          <a:p>
+            <a:pPr algn="r">
+              <a:lnSpc>
+                <a:spcPct val="112000"/>
+              </a:lnSpc>
+              <a:spcAft>
+                <a:spcPts val="0"/>
+              </a:spcAft>
+            </a:pPr>
+            <a:r>
+              <a:rPr sz="840" b="1">
+                <a:solidFill>
+                  <a:srgbClr val="8CA0BE"/>
+                </a:solidFill>
+                <a:latin typeface="Consolas"/>
+              </a:rPr>
+              <a:t>REPORTS ARE PRIVATE — SCOPED BY SIGNED COOKIE</a:t>
+            </a:r>
+          </a:p>
+        </p:txBody>
+      </p:sp>
+      <p:sp>
+        <p:nvSpPr>
+          <p:cNvPr id="12" name="Rectangle 11"/>
+          <p:cNvSpPr/>
+          <p:nvPr/>
+        </p:nvSpPr>
+        <p:spPr>
+          <a:xfrm>
+            <a:off x="566928" y="6309360"/>
+            <a:ext cx="743145" cy="43891"/>
+          </a:xfrm>
+          <a:prstGeom prst="rect">
+            <a:avLst/>
+          </a:prstGeom>
+          <a:solidFill>
+            <a:srgbClr val="223049"/>
+          </a:solidFill>
+          <a:ln>
+            <a:noFill/>
+          </a:ln>
+          <a:effectLst/>
+        </p:spPr>
+        <p:style>
+          <a:lnRef idx="1">
+            <a:schemeClr val="accent1"/>
+          </a:lnRef>
+          <a:fillRef idx="3">
+            <a:schemeClr val="accent1"/>
+          </a:fillRef>
+          <a:effectRef idx="2">
+            <a:schemeClr val="accent1"/>
+          </a:effectRef>
+          <a:fontRef idx="minor">
+            <a:schemeClr val="lt1"/>
+          </a:fontRef>
+        </p:style>
+        <p:txBody>
+          <a:bodyPr rtlCol="0" anchor="ctr"/>
+          <a:lstStyle/>
+          <a:p>
+            <a:pPr algn="ctr"/>
+          </a:p>
+        </p:txBody>
+      </p:sp>
+      <p:sp>
+        <p:nvSpPr>
+          <p:cNvPr id="13" name="Rectangle 12"/>
+          <p:cNvSpPr/>
+          <p:nvPr/>
+        </p:nvSpPr>
+        <p:spPr>
+          <a:xfrm>
+            <a:off x="1360365" y="6309360"/>
+            <a:ext cx="743145" cy="43891"/>
+          </a:xfrm>
+          <a:prstGeom prst="rect">
+            <a:avLst/>
+          </a:prstGeom>
+          <a:solidFill>
+            <a:srgbClr val="223049"/>
+          </a:solidFill>
+          <a:ln>
+            <a:noFill/>
+          </a:ln>
+          <a:effectLst/>
+        </p:spPr>
+        <p:style>
+          <a:lnRef idx="1">
+            <a:schemeClr val="accent1"/>
+          </a:lnRef>
+          <a:fillRef idx="3">
+            <a:schemeClr val="accent1"/>
+          </a:fillRef>
+          <a:effectRef idx="2">
+            <a:schemeClr val="accent1"/>
+          </a:effectRef>
+          <a:fontRef idx="minor">
+            <a:schemeClr val="lt1"/>
+          </a:fontRef>
+        </p:style>
+        <p:txBody>
+          <a:bodyPr rtlCol="0" anchor="ctr"/>
+          <a:lstStyle/>
+          <a:p>
+            <a:pPr algn="ctr"/>
+          </a:p>
+        </p:txBody>
+      </p:sp>
+      <p:sp>
+        <p:nvSpPr>
+          <p:cNvPr id="14" name="Rectangle 13"/>
+          <p:cNvSpPr/>
+          <p:nvPr/>
+        </p:nvSpPr>
+        <p:spPr>
+          <a:xfrm>
+            <a:off x="2153803" y="6309360"/>
+            <a:ext cx="743145" cy="43891"/>
+          </a:xfrm>
+          <a:prstGeom prst="rect">
+            <a:avLst/>
+          </a:prstGeom>
+          <a:solidFill>
+            <a:srgbClr val="223049"/>
+          </a:solidFill>
+          <a:ln>
+            <a:noFill/>
+          </a:ln>
+          <a:effectLst/>
+        </p:spPr>
+        <p:style>
+          <a:lnRef idx="1">
+            <a:schemeClr val="accent1"/>
+          </a:lnRef>
+          <a:fillRef idx="3">
+            <a:schemeClr val="accent1"/>
+          </a:fillRef>
+          <a:effectRef idx="2">
+            <a:schemeClr val="accent1"/>
+          </a:effectRef>
+          <a:fontRef idx="minor">
+            <a:schemeClr val="lt1"/>
+          </a:fontRef>
+        </p:style>
+        <p:txBody>
+          <a:bodyPr rtlCol="0" anchor="ctr"/>
+          <a:lstStyle/>
+          <a:p>
+            <a:pPr algn="ctr"/>
+          </a:p>
+        </p:txBody>
+      </p:sp>
+      <p:sp>
+        <p:nvSpPr>
+          <p:cNvPr id="15" name="Rectangle 14"/>
+          <p:cNvSpPr/>
+          <p:nvPr/>
+        </p:nvSpPr>
+        <p:spPr>
+          <a:xfrm>
+            <a:off x="2947241" y="6309360"/>
+            <a:ext cx="743145" cy="43891"/>
+          </a:xfrm>
+          <a:prstGeom prst="rect">
+            <a:avLst/>
+          </a:prstGeom>
+          <a:solidFill>
+            <a:srgbClr val="223049"/>
+          </a:solidFill>
+          <a:ln>
+            <a:noFill/>
+          </a:ln>
+          <a:effectLst/>
+        </p:spPr>
+        <p:style>
+          <a:lnRef idx="1">
+            <a:schemeClr val="accent1"/>
+          </a:lnRef>
+          <a:fillRef idx="3">
+            <a:schemeClr val="accent1"/>
+          </a:fillRef>
+          <a:effectRef idx="2">
+            <a:schemeClr val="accent1"/>
+          </a:effectRef>
+          <a:fontRef idx="minor">
+            <a:schemeClr val="lt1"/>
+          </a:fontRef>
+        </p:style>
+        <p:txBody>
+          <a:bodyPr rtlCol="0" anchor="ctr"/>
+          <a:lstStyle/>
+          <a:p>
+            <a:pPr algn="ctr"/>
+          </a:p>
+        </p:txBody>
+      </p:sp>
+      <p:sp>
+        <p:nvSpPr>
+          <p:cNvPr id="16" name="Rectangle 15"/>
+          <p:cNvSpPr/>
+          <p:nvPr/>
+        </p:nvSpPr>
+        <p:spPr>
+          <a:xfrm>
+            <a:off x="3740679" y="6309360"/>
+            <a:ext cx="743145" cy="43891"/>
+          </a:xfrm>
+          <a:prstGeom prst="rect">
+            <a:avLst/>
+          </a:prstGeom>
+          <a:solidFill>
+            <a:srgbClr val="223049"/>
+          </a:solidFill>
+          <a:ln>
+            <a:noFill/>
+          </a:ln>
+          <a:effectLst/>
+        </p:spPr>
+        <p:style>
+          <a:lnRef idx="1">
+            <a:schemeClr val="accent1"/>
+          </a:lnRef>
+          <a:fillRef idx="3">
+            <a:schemeClr val="accent1"/>
+          </a:fillRef>
+          <a:effectRef idx="2">
+            <a:schemeClr val="accent1"/>
+          </a:effectRef>
+          <a:fontRef idx="minor">
+            <a:schemeClr val="lt1"/>
+          </a:fontRef>
+        </p:style>
+        <p:txBody>
+          <a:bodyPr rtlCol="0" anchor="ctr"/>
+          <a:lstStyle/>
+          <a:p>
+            <a:pPr algn="ctr"/>
+          </a:p>
+        </p:txBody>
+      </p:sp>
+      <p:sp>
+        <p:nvSpPr>
+          <p:cNvPr id="17" name="Rectangle 16"/>
+          <p:cNvSpPr/>
+          <p:nvPr/>
+        </p:nvSpPr>
+        <p:spPr>
+          <a:xfrm>
+            <a:off x="4534117" y="6309360"/>
+            <a:ext cx="743145" cy="43891"/>
+          </a:xfrm>
+          <a:prstGeom prst="rect">
+            <a:avLst/>
+          </a:prstGeom>
+          <a:solidFill>
+            <a:srgbClr val="223049"/>
+          </a:solidFill>
+          <a:ln>
+            <a:noFill/>
+          </a:ln>
+          <a:effectLst/>
+        </p:spPr>
+        <p:style>
+          <a:lnRef idx="1">
+            <a:schemeClr val="accent1"/>
+          </a:lnRef>
+          <a:fillRef idx="3">
+            <a:schemeClr val="accent1"/>
+          </a:fillRef>
+          <a:effectRef idx="2">
+            <a:schemeClr val="accent1"/>
+          </a:effectRef>
+          <a:fontRef idx="minor">
+            <a:schemeClr val="lt1"/>
+          </a:fontRef>
+        </p:style>
+        <p:txBody>
+          <a:bodyPr rtlCol="0" anchor="ctr"/>
+          <a:lstStyle/>
+          <a:p>
+            <a:pPr algn="ctr"/>
+          </a:p>
+        </p:txBody>
+      </p:sp>
+      <p:sp>
+        <p:nvSpPr>
+          <p:cNvPr id="18" name="Rectangle 17"/>
+          <p:cNvSpPr/>
+          <p:nvPr/>
+        </p:nvSpPr>
+        <p:spPr>
+          <a:xfrm>
+            <a:off x="5327555" y="6309360"/>
+            <a:ext cx="743145" cy="43891"/>
+          </a:xfrm>
+          <a:prstGeom prst="rect">
+            <a:avLst/>
+          </a:prstGeom>
+          <a:solidFill>
+            <a:srgbClr val="223049"/>
+          </a:solidFill>
+          <a:ln>
+            <a:noFill/>
+          </a:ln>
+          <a:effectLst/>
+        </p:spPr>
+        <p:style>
+          <a:lnRef idx="1">
+            <a:schemeClr val="accent1"/>
+          </a:lnRef>
+          <a:fillRef idx="3">
+            <a:schemeClr val="accent1"/>
+          </a:fillRef>
+          <a:effectRef idx="2">
+            <a:schemeClr val="accent1"/>
+          </a:effectRef>
+          <a:fontRef idx="minor">
+            <a:schemeClr val="lt1"/>
+          </a:fontRef>
+        </p:style>
+        <p:txBody>
+          <a:bodyPr rtlCol="0" anchor="ctr"/>
+          <a:lstStyle/>
+          <a:p>
+            <a:pPr algn="ctr"/>
+          </a:p>
+        </p:txBody>
+      </p:sp>
+      <p:sp>
+        <p:nvSpPr>
+          <p:cNvPr id="19" name="Rectangle 18"/>
+          <p:cNvSpPr/>
+          <p:nvPr/>
+        </p:nvSpPr>
+        <p:spPr>
+          <a:xfrm>
+            <a:off x="6120993" y="6309360"/>
+            <a:ext cx="743145" cy="43891"/>
+          </a:xfrm>
+          <a:prstGeom prst="rect">
+            <a:avLst/>
+          </a:prstGeom>
+          <a:solidFill>
+            <a:srgbClr val="223049"/>
+          </a:solidFill>
+          <a:ln>
+            <a:noFill/>
+          </a:ln>
+          <a:effectLst/>
+        </p:spPr>
+        <p:style>
+          <a:lnRef idx="1">
+            <a:schemeClr val="accent1"/>
+          </a:lnRef>
+          <a:fillRef idx="3">
+            <a:schemeClr val="accent1"/>
+          </a:fillRef>
+          <a:effectRef idx="2">
+            <a:schemeClr val="accent1"/>
+          </a:effectRef>
+          <a:fontRef idx="minor">
+            <a:schemeClr val="lt1"/>
+          </a:fontRef>
+        </p:style>
+        <p:txBody>
+          <a:bodyPr rtlCol="0" anchor="ctr"/>
+          <a:lstStyle/>
+          <a:p>
+            <a:pPr algn="ctr"/>
+          </a:p>
+        </p:txBody>
+      </p:sp>
+      <p:sp>
+        <p:nvSpPr>
+          <p:cNvPr id="20" name="Rectangle 19"/>
+          <p:cNvSpPr/>
+          <p:nvPr/>
+        </p:nvSpPr>
+        <p:spPr>
+          <a:xfrm>
+            <a:off x="6914431" y="6309360"/>
+            <a:ext cx="743145" cy="43891"/>
+          </a:xfrm>
+          <a:prstGeom prst="rect">
+            <a:avLst/>
+          </a:prstGeom>
+          <a:solidFill>
+            <a:srgbClr val="223049"/>
+          </a:solidFill>
+          <a:ln>
+            <a:noFill/>
+          </a:ln>
+          <a:effectLst/>
+        </p:spPr>
+        <p:style>
+          <a:lnRef idx="1">
+            <a:schemeClr val="accent1"/>
+          </a:lnRef>
+          <a:fillRef idx="3">
+            <a:schemeClr val="accent1"/>
+          </a:fillRef>
+          <a:effectRef idx="2">
+            <a:schemeClr val="accent1"/>
+          </a:effectRef>
+          <a:fontRef idx="minor">
+            <a:schemeClr val="lt1"/>
+          </a:fontRef>
+        </p:style>
+        <p:txBody>
+          <a:bodyPr rtlCol="0" anchor="ctr"/>
+          <a:lstStyle/>
+          <a:p>
+            <a:pPr algn="ctr"/>
+          </a:p>
+        </p:txBody>
+      </p:sp>
+      <p:sp>
+        <p:nvSpPr>
+          <p:cNvPr id="21" name="Rectangle 20"/>
+          <p:cNvSpPr/>
+          <p:nvPr/>
+        </p:nvSpPr>
+        <p:spPr>
+          <a:xfrm>
+            <a:off x="7707869" y="6309360"/>
+            <a:ext cx="743145" cy="43891"/>
+          </a:xfrm>
+          <a:prstGeom prst="rect">
+            <a:avLst/>
+          </a:prstGeom>
+          <a:solidFill>
+            <a:srgbClr val="223049"/>
+          </a:solidFill>
+          <a:ln>
+            <a:noFill/>
+          </a:ln>
+          <a:effectLst/>
+        </p:spPr>
+        <p:style>
+          <a:lnRef idx="1">
+            <a:schemeClr val="accent1"/>
+          </a:lnRef>
+          <a:fillRef idx="3">
+            <a:schemeClr val="accent1"/>
+          </a:fillRef>
+          <a:effectRef idx="2">
+            <a:schemeClr val="accent1"/>
+          </a:effectRef>
+          <a:fontRef idx="minor">
+            <a:schemeClr val="lt1"/>
+          </a:fontRef>
+        </p:style>
+        <p:txBody>
+          <a:bodyPr rtlCol="0" anchor="ctr"/>
+          <a:lstStyle/>
+          <a:p>
+            <a:pPr algn="ctr"/>
+          </a:p>
+        </p:txBody>
+      </p:sp>
+      <p:sp>
+        <p:nvSpPr>
+          <p:cNvPr id="22" name="Rectangle 21"/>
+          <p:cNvSpPr/>
+          <p:nvPr/>
+        </p:nvSpPr>
+        <p:spPr>
+          <a:xfrm>
+            <a:off x="8501307" y="6309360"/>
+            <a:ext cx="743145" cy="43891"/>
+          </a:xfrm>
+          <a:prstGeom prst="rect">
+            <a:avLst/>
+          </a:prstGeom>
+          <a:solidFill>
+            <a:srgbClr val="223049"/>
+          </a:solidFill>
+          <a:ln>
+            <a:noFill/>
+          </a:ln>
+          <a:effectLst/>
+        </p:spPr>
+        <p:style>
+          <a:lnRef idx="1">
+            <a:schemeClr val="accent1"/>
+          </a:lnRef>
+          <a:fillRef idx="3">
+            <a:schemeClr val="accent1"/>
+          </a:fillRef>
+          <a:effectRef idx="2">
+            <a:schemeClr val="accent1"/>
+          </a:effectRef>
+          <a:fontRef idx="minor">
+            <a:schemeClr val="lt1"/>
+          </a:fontRef>
+        </p:style>
+        <p:txBody>
+          <a:bodyPr rtlCol="0" anchor="ctr"/>
+          <a:lstStyle/>
+          <a:p>
+            <a:pPr algn="ctr"/>
+          </a:p>
+        </p:txBody>
+      </p:sp>
+      <p:sp>
+        <p:nvSpPr>
+          <p:cNvPr id="23" name="Rectangle 22"/>
+          <p:cNvSpPr/>
+          <p:nvPr/>
+        </p:nvSpPr>
+        <p:spPr>
+          <a:xfrm>
+            <a:off x="9294745" y="6309360"/>
+            <a:ext cx="743145" cy="43891"/>
+          </a:xfrm>
+          <a:prstGeom prst="rect">
+            <a:avLst/>
+          </a:prstGeom>
+          <a:solidFill>
+            <a:srgbClr val="223049"/>
+          </a:solidFill>
+          <a:ln>
+            <a:noFill/>
+          </a:ln>
+          <a:effectLst/>
+        </p:spPr>
+        <p:style>
+          <a:lnRef idx="1">
+            <a:schemeClr val="accent1"/>
+          </a:lnRef>
+          <a:fillRef idx="3">
+            <a:schemeClr val="accent1"/>
+          </a:fillRef>
+          <a:effectRef idx="2">
+            <a:schemeClr val="accent1"/>
+          </a:effectRef>
+          <a:fontRef idx="minor">
+            <a:schemeClr val="lt1"/>
+          </a:fontRef>
+        </p:style>
+        <p:txBody>
+          <a:bodyPr rtlCol="0" anchor="ctr"/>
+          <a:lstStyle/>
+          <a:p>
+            <a:pPr algn="ctr"/>
+          </a:p>
+        </p:txBody>
+      </p:sp>
+      <p:sp>
+        <p:nvSpPr>
+          <p:cNvPr id="24" name="Rectangle 23"/>
+          <p:cNvSpPr/>
+          <p:nvPr/>
+        </p:nvSpPr>
+        <p:spPr>
+          <a:xfrm>
+            <a:off x="10088183" y="6296558"/>
+            <a:ext cx="743145" cy="68580"/>
+          </a:xfrm>
+          <a:prstGeom prst="rect">
+            <a:avLst/>
+          </a:prstGeom>
+          <a:solidFill>
+            <a:srgbClr val="2FD8B4"/>
+          </a:solidFill>
+          <a:ln>
+            <a:noFill/>
+          </a:ln>
+          <a:effectLst/>
+        </p:spPr>
+        <p:style>
+          <a:lnRef idx="1">
+            <a:schemeClr val="accent1"/>
+          </a:lnRef>
+          <a:fillRef idx="3">
+            <a:schemeClr val="accent1"/>
+          </a:fillRef>
+          <a:effectRef idx="2">
+            <a:schemeClr val="accent1"/>
+          </a:effectRef>
+          <a:fontRef idx="minor">
+            <a:schemeClr val="lt1"/>
+          </a:fontRef>
+        </p:style>
+        <p:txBody>
+          <a:bodyPr rtlCol="0" anchor="ctr"/>
+          <a:lstStyle/>
+          <a:p>
+            <a:pPr algn="ctr"/>
+          </a:p>
+        </p:txBody>
+      </p:sp>
+      <p:sp>
+        <p:nvSpPr>
+          <p:cNvPr id="25" name="Rectangle 24"/>
+          <p:cNvSpPr/>
+          <p:nvPr/>
+        </p:nvSpPr>
+        <p:spPr>
+          <a:xfrm>
+            <a:off x="10881621" y="6309360"/>
+            <a:ext cx="743145" cy="43891"/>
+          </a:xfrm>
+          <a:prstGeom prst="rect">
+            <a:avLst/>
+          </a:prstGeom>
+          <a:solidFill>
+            <a:srgbClr val="223049"/>
+          </a:solidFill>
+          <a:ln>
+            <a:noFill/>
+          </a:ln>
+          <a:effectLst/>
+        </p:spPr>
+        <p:style>
+          <a:lnRef idx="1">
+            <a:schemeClr val="accent1"/>
+          </a:lnRef>
+          <a:fillRef idx="3">
+            <a:schemeClr val="accent1"/>
+          </a:fillRef>
+          <a:effectRef idx="2">
+            <a:schemeClr val="accent1"/>
+          </a:effectRef>
+          <a:fontRef idx="minor">
+            <a:schemeClr val="lt1"/>
+          </a:fontRef>
+        </p:style>
+        <p:txBody>
+          <a:bodyPr rtlCol="0" anchor="ctr"/>
+          <a:lstStyle/>
+          <a:p>
+            <a:pPr algn="ctr"/>
+          </a:p>
+        </p:txBody>
+      </p:sp>
+      <p:sp>
+        <p:nvSpPr>
+          <p:cNvPr id="26" name="Rectangle 25"/>
+          <p:cNvSpPr/>
+          <p:nvPr/>
+        </p:nvSpPr>
+        <p:spPr>
+          <a:xfrm>
+            <a:off x="566928" y="6455664"/>
+            <a:ext cx="11057839" cy="9144"/>
+          </a:xfrm>
+          <a:prstGeom prst="rect">
+            <a:avLst/>
+          </a:prstGeom>
+          <a:solidFill>
+            <a:srgbClr val="223049"/>
+          </a:solidFill>
+          <a:ln>
+            <a:noFill/>
+          </a:ln>
+          <a:effectLst/>
+        </p:spPr>
+        <p:style>
+          <a:lnRef idx="1">
+            <a:schemeClr val="accent1"/>
+          </a:lnRef>
+          <a:fillRef idx="3">
+            <a:schemeClr val="accent1"/>
+          </a:fillRef>
+          <a:effectRef idx="2">
+            <a:schemeClr val="accent1"/>
+          </a:effectRef>
+          <a:fontRef idx="minor">
+            <a:schemeClr val="lt1"/>
+          </a:fontRef>
+        </p:style>
+        <p:txBody>
+          <a:bodyPr rtlCol="0" anchor="ctr"/>
+          <a:lstStyle/>
+          <a:p>
+            <a:pPr algn="ctr"/>
+          </a:p>
+        </p:txBody>
+      </p:sp>
+      <p:sp>
+        <p:nvSpPr>
+          <p:cNvPr id="27" name="TextBox 26"/>
+          <p:cNvSpPr txBox="1"/>
+          <p:nvPr/>
+        </p:nvSpPr>
+        <p:spPr>
+          <a:xfrm>
+            <a:off x="566928" y="6510528"/>
+            <a:ext cx="9509760" cy="219456"/>
+          </a:xfrm>
+          <a:prstGeom prst="rect">
+            <a:avLst/>
+          </a:prstGeom>
+          <a:noFill/>
+        </p:spPr>
+        <p:txBody>
+          <a:bodyPr wrap="square" lIns="0" rIns="0" tIns="0" bIns="0" anchor="t">
+            <a:spAutoFit/>
+          </a:bodyPr>
+          <a:lstStyle/>
+          <a:p>
+            <a:pPr algn="l">
+              <a:lnSpc>
+                <a:spcPct val="112000"/>
+              </a:lnSpc>
+              <a:spcAft>
+                <a:spcPts val="0"/>
+              </a:spcAft>
+            </a:pPr>
+            <a:r>
+              <a:rPr sz="900" b="0">
+                <a:solidFill>
+                  <a:srgbClr val="8CA0BE"/>
+                </a:solidFill>
+                <a:latin typeface="Segoe UI"/>
+              </a:rPr>
+              <a:t>RetainIQ · Signal Ops Console   ·   PHASE 13 · WEB APPLICATION</a:t>
+            </a:r>
+          </a:p>
+        </p:txBody>
+      </p:sp>
+      <p:sp>
+        <p:nvSpPr>
+          <p:cNvPr id="28" name="TextBox 27"/>
+          <p:cNvSpPr txBox="1"/>
+          <p:nvPr/>
+        </p:nvSpPr>
+        <p:spPr>
+          <a:xfrm>
+            <a:off x="10527487" y="6510528"/>
+            <a:ext cx="1097280" cy="219456"/>
+          </a:xfrm>
+          <a:prstGeom prst="rect">
+            <a:avLst/>
+          </a:prstGeom>
+          <a:noFill/>
+        </p:spPr>
+        <p:txBody>
+          <a:bodyPr wrap="square" lIns="0" rIns="0" tIns="0" bIns="0" anchor="t">
+            <a:spAutoFit/>
+          </a:bodyPr>
+          <a:lstStyle/>
+          <a:p>
+            <a:pPr algn="r">
+              <a:lnSpc>
+                <a:spcPct val="112000"/>
+              </a:lnSpc>
+              <a:spcAft>
+                <a:spcPts val="0"/>
+              </a:spcAft>
+            </a:pPr>
+            <a:r>
+              <a:rPr sz="900" b="0">
+                <a:solidFill>
+                  <a:srgbClr val="8CA0BE"/>
+                </a:solidFill>
+                <a:latin typeface="Consolas"/>
+              </a:rPr>
+              <a:t>16</a:t>
             </a:r>
           </a:p>
         </p:txBody>

--- a/presentation/RetainIQ_Project_Review.pptx
+++ b/presentation/RetainIQ_Project_Review.pptx
@@ -21,6 +21,10 @@
     <p:sldId id="269" r:id="rId21"/>
     <p:sldId id="270" r:id="rId22"/>
     <p:sldId id="271" r:id="rId23"/>
+    <p:sldId id="272" r:id="rId24"/>
+    <p:sldId id="273" r:id="rId25"/>
+    <p:sldId id="274" r:id="rId26"/>
+    <p:sldId id="275" r:id="rId27"/>
   </p:sldIdLst>
   <p:sldSz cx="12191695" cy="6858000" type="screen4x3"/>
   <p:notesSz cx="6858000" cy="9144000"/>
@@ -1274,6 +1278,326 @@
 </p:notes>
 </file>
 
+<file path=ppt/notesSlides/notesSlide17.xml><?xml version="1.0" encoding="utf-8"?>
+<p:notes xmlns:a="http://schemas.openxmlformats.org/drawingml/2006/main" xmlns:p="http://schemas.openxmlformats.org/presentationml/2006/main" xmlns:r="http://schemas.openxmlformats.org/officeDocument/2006/relationships">
+  <p:cSld>
+    <p:spTree>
+      <p:nvGrpSpPr>
+        <p:cNvPr id="1" name=""/>
+        <p:cNvGrpSpPr/>
+        <p:nvPr/>
+      </p:nvGrpSpPr>
+      <p:grpSpPr>
+        <a:xfrm>
+          <a:off x="0" y="0"/>
+          <a:ext cx="0" cy="0"/>
+          <a:chOff x="0" y="0"/>
+          <a:chExt cx="0" cy="0"/>
+        </a:xfrm>
+      </p:grpSpPr>
+      <p:sp>
+        <p:nvSpPr>
+          <p:cNvPr id="2" name="Slide Image Placeholder 1"/>
+          <p:cNvSpPr>
+            <a:spLocks noGrp="1"/>
+          </p:cNvSpPr>
+          <p:nvPr>
+            <p:ph type="sldImg" idx="2"/>
+          </p:nvPr>
+        </p:nvSpPr>
+        <p:spPr/>
+      </p:sp>
+      <p:sp>
+        <p:nvSpPr>
+          <p:cNvPr id="3" name="Notes Placeholder 2"/>
+          <p:cNvSpPr>
+            <a:spLocks noGrp="1"/>
+          </p:cNvSpPr>
+          <p:nvPr>
+            <p:ph type="body" idx="3" sz="quarter"/>
+          </p:nvPr>
+        </p:nvSpPr>
+        <p:spPr/>
+        <p:txBody>
+          <a:bodyPr/>
+          <a:lstStyle/>
+          <a:p>
+            <a:r>
+              <a:t>(9:45–10:10) Don't list technology here — that's the next slide. This slide is</a:t>
+            </a:r>
+          </a:p>
+          <a:p>
+            <a:r>
+              <a:t>about the production problems, which is what actually separates a notebook from</a:t>
+            </a:r>
+          </a:p>
+          <a:p>
+            <a:r>
+              <a:t>a deployed service.</a:t>
+            </a:r>
+          </a:p>
+          <a:p>
+            <a:r>
+              <a:t>"Four things broke or nearly broke when this left my laptop: slow scoring hitting</a:t>
+            </a:r>
+          </a:p>
+          <a:p>
+            <a:r>
+              <a:t>the worker timeout, the model being reloaded per request, memory creeping until</a:t>
+            </a:r>
+          </a:p>
+          <a:p>
+            <a:r>
+              <a:t>the platform killed the worker, and the free tier sleeping."</a:t>
+            </a:r>
+          </a:p>
+          <a:p>
+            <a:r>
+              <a:t>Then the honest operational note: "which means if you scan the QR at the end, and</a:t>
+            </a:r>
+          </a:p>
+          <a:p>
+            <a:r>
+              <a:t>the app has been idle, you'll wait about a minute for it to wake up. I'll warm it</a:t>
+            </a:r>
+          </a:p>
+          <a:p>
+            <a:r>
+              <a:t>before we start."</a:t>
+            </a:r>
+          </a:p>
+        </p:txBody>
+      </p:sp>
+      <p:sp>
+        <p:nvSpPr>
+          <p:cNvPr id="4" name="Slide Number Placeholder 3"/>
+          <p:cNvSpPr>
+            <a:spLocks noGrp="1"/>
+          </p:cNvSpPr>
+          <p:nvPr>
+            <p:ph type="sldNum" idx="5" sz="quarter"/>
+          </p:nvPr>
+        </p:nvSpPr>
+        <p:spPr/>
+      </p:sp>
+    </p:spTree>
+  </p:cSld>
+  <p:clrMapOvr>
+    <a:masterClrMapping/>
+  </p:clrMapOvr>
+</p:notes>
+</file>
+
+<file path=ppt/notesSlides/notesSlide18.xml><?xml version="1.0" encoding="utf-8"?>
+<p:notes xmlns:a="http://schemas.openxmlformats.org/drawingml/2006/main" xmlns:p="http://schemas.openxmlformats.org/presentationml/2006/main" xmlns:r="http://schemas.openxmlformats.org/officeDocument/2006/relationships">
+  <p:cSld>
+    <p:spTree>
+      <p:nvGrpSpPr>
+        <p:cNvPr id="1" name=""/>
+        <p:cNvGrpSpPr/>
+        <p:nvPr/>
+      </p:nvGrpSpPr>
+      <p:grpSpPr>
+        <a:xfrm>
+          <a:off x="0" y="0"/>
+          <a:ext cx="0" cy="0"/>
+          <a:chOff x="0" y="0"/>
+          <a:chExt cx="0" cy="0"/>
+        </a:xfrm>
+      </p:grpSpPr>
+      <p:sp>
+        <p:nvSpPr>
+          <p:cNvPr id="2" name="Slide Image Placeholder 1"/>
+          <p:cNvSpPr>
+            <a:spLocks noGrp="1"/>
+          </p:cNvSpPr>
+          <p:nvPr>
+            <p:ph type="sldImg" idx="2"/>
+          </p:nvPr>
+        </p:nvSpPr>
+        <p:spPr/>
+      </p:sp>
+      <p:sp>
+        <p:nvSpPr>
+          <p:cNvPr id="3" name="Notes Placeholder 2"/>
+          <p:cNvSpPr>
+            <a:spLocks noGrp="1"/>
+          </p:cNvSpPr>
+          <p:nvPr>
+            <p:ph type="body" idx="3" sz="quarter"/>
+          </p:nvPr>
+        </p:nvSpPr>
+        <p:spPr/>
+        <p:txBody>
+          <a:bodyPr/>
+          <a:lstStyle/>
+          <a:p>
+            <a:r>
+              <a:t>(10:10–10:35) Use the logos as visual anchors; do not read the lists line by line.</a:t>
+            </a:r>
+          </a:p>
+          <a:p>
+            <a:r>
+              <a:t>"Python, pandas and NumPy handle the data. Scikit-learn trains the deployed</a:t>
+            </a:r>
+          </a:p>
+          <a:p>
+            <a:r>
+              <a:t>Logistic Regression; Flask and FastAPI expose it; Docker, Render and GitHub carry</a:t>
+            </a:r>
+          </a:p>
+          <a:p>
+            <a:r>
+              <a:t>it to production; Power BI presents the business view."</a:t>
+            </a:r>
+          </a:p>
+          <a:p>
+            <a:r>
+              <a:t>SHAP was explored only in research; the production explanations come from the</a:t>
+            </a:r>
+          </a:p>
+          <a:p>
+            <a:r>
+              <a:t>Logistic Regression coefficients. One shared Python package keeps training and</a:t>
+            </a:r>
+          </a:p>
+          <a:p>
+            <a:r>
+              <a:t>serving on the same preprocessing and scoring path.</a:t>
+            </a:r>
+          </a:p>
+        </p:txBody>
+      </p:sp>
+      <p:sp>
+        <p:nvSpPr>
+          <p:cNvPr id="4" name="Slide Number Placeholder 3"/>
+          <p:cNvSpPr>
+            <a:spLocks noGrp="1"/>
+          </p:cNvSpPr>
+          <p:nvPr>
+            <p:ph type="sldNum" idx="5" sz="quarter"/>
+          </p:nvPr>
+        </p:nvSpPr>
+        <p:spPr/>
+      </p:sp>
+    </p:spTree>
+  </p:cSld>
+  <p:clrMapOvr>
+    <a:masterClrMapping/>
+  </p:clrMapOvr>
+</p:notes>
+</file>
+
+<file path=ppt/notesSlides/notesSlide19.xml><?xml version="1.0" encoding="utf-8"?>
+<p:notes xmlns:a="http://schemas.openxmlformats.org/drawingml/2006/main" xmlns:p="http://schemas.openxmlformats.org/presentationml/2006/main" xmlns:r="http://schemas.openxmlformats.org/officeDocument/2006/relationships">
+  <p:cSld>
+    <p:spTree>
+      <p:nvGrpSpPr>
+        <p:cNvPr id="1" name=""/>
+        <p:cNvGrpSpPr/>
+        <p:nvPr/>
+      </p:nvGrpSpPr>
+      <p:grpSpPr>
+        <a:xfrm>
+          <a:off x="0" y="0"/>
+          <a:ext cx="0" cy="0"/>
+          <a:chOff x="0" y="0"/>
+          <a:chExt cx="0" cy="0"/>
+        </a:xfrm>
+      </p:grpSpPr>
+      <p:sp>
+        <p:nvSpPr>
+          <p:cNvPr id="2" name="Slide Image Placeholder 1"/>
+          <p:cNvSpPr>
+            <a:spLocks noGrp="1"/>
+          </p:cNvSpPr>
+          <p:nvPr>
+            <p:ph type="sldImg" idx="2"/>
+          </p:nvPr>
+        </p:nvSpPr>
+        <p:spPr/>
+      </p:sp>
+      <p:sp>
+        <p:nvSpPr>
+          <p:cNvPr id="3" name="Notes Placeholder 2"/>
+          <p:cNvSpPr>
+            <a:spLocks noGrp="1"/>
+          </p:cNvSpPr>
+          <p:nvPr>
+            <p:ph type="body" idx="3" sz="quarter"/>
+          </p:nvPr>
+        </p:nvSpPr>
+        <p:spPr/>
+        <p:txBody>
+          <a:bodyPr/>
+          <a:lstStyle/>
+          <a:p>
+            <a:r>
+              <a:t>(10:35–11:05) Most students hide this slide. Put it up and read it.</a:t>
+            </a:r>
+          </a:p>
+          <a:p>
+            <a:r>
+              <a:t>"Three things I would not do with this model today. I wouldn't trust it on a</a:t>
+            </a:r>
+          </a:p>
+          <a:p>
+            <a:r>
+              <a:t>different market — it has only ever seen one telecom. I wouldn't quote revenue as</a:t>
+            </a:r>
+          </a:p>
+          <a:p>
+            <a:r>
+              <a:t>savings, only as exposure. And I wouldn't ship a retention campaign aimed at</a:t>
+            </a:r>
+          </a:p>
+          <a:p>
+            <a:r>
+              <a:t>senior citizens without a bias audit — they churn at 41.7%, nearly double the</a:t>
+            </a:r>
+          </a:p>
+          <a:p>
+            <a:r>
+              <a:t>base rate, so a risk-optimising model will concentrate offers on them."</a:t>
+            </a:r>
+          </a:p>
+          <a:p>
+            <a:r>
+              <a:t>Then close the loop: "and the fix for the recall number is already measured — 0.35</a:t>
+            </a:r>
+          </a:p>
+          <a:p>
+            <a:r>
+              <a:t>catches 71.7%. That's the next cycle, which starts back at Phase 02 with drift</a:t>
+            </a:r>
+          </a:p>
+          <a:p>
+            <a:r>
+              <a:t>monitoring."</a:t>
+            </a:r>
+          </a:p>
+        </p:txBody>
+      </p:sp>
+      <p:sp>
+        <p:nvSpPr>
+          <p:cNvPr id="4" name="Slide Number Placeholder 3"/>
+          <p:cNvSpPr>
+            <a:spLocks noGrp="1"/>
+          </p:cNvSpPr>
+          <p:nvPr>
+            <p:ph type="sldNum" idx="5" sz="quarter"/>
+          </p:nvPr>
+        </p:nvSpPr>
+        <p:spPr/>
+      </p:sp>
+    </p:spTree>
+  </p:cSld>
+  <p:clrMapOvr>
+    <a:masterClrMapping/>
+  </p:clrMapOvr>
+</p:notes>
+</file>
+
 <file path=ppt/notesSlides/notesSlide2.xml><?xml version="1.0" encoding="utf-8"?>
 <p:notes xmlns:a="http://schemas.openxmlformats.org/drawingml/2006/main" xmlns:p="http://schemas.openxmlformats.org/presentationml/2006/main" xmlns:r="http://schemas.openxmlformats.org/officeDocument/2006/relationships">
   <p:cSld>
@@ -1345,6 +1669,152 @@
           <a:p>
             <a:r>
               <a:t>Promise the structure and then keep it. Do not narrate every box.</a:t>
+            </a:r>
+          </a:p>
+        </p:txBody>
+      </p:sp>
+      <p:sp>
+        <p:nvSpPr>
+          <p:cNvPr id="4" name="Slide Number Placeholder 3"/>
+          <p:cNvSpPr>
+            <a:spLocks noGrp="1"/>
+          </p:cNvSpPr>
+          <p:nvPr>
+            <p:ph type="sldNum" idx="5" sz="quarter"/>
+          </p:nvPr>
+        </p:nvSpPr>
+        <p:spPr/>
+      </p:sp>
+    </p:spTree>
+  </p:cSld>
+  <p:clrMapOvr>
+    <a:masterClrMapping/>
+  </p:clrMapOvr>
+</p:notes>
+</file>
+
+<file path=ppt/notesSlides/notesSlide20.xml><?xml version="1.0" encoding="utf-8"?>
+<p:notes xmlns:a="http://schemas.openxmlformats.org/drawingml/2006/main" xmlns:p="http://schemas.openxmlformats.org/presentationml/2006/main" xmlns:r="http://schemas.openxmlformats.org/officeDocument/2006/relationships">
+  <p:cSld>
+    <p:spTree>
+      <p:nvGrpSpPr>
+        <p:cNvPr id="1" name=""/>
+        <p:cNvGrpSpPr/>
+        <p:nvPr/>
+      </p:nvGrpSpPr>
+      <p:grpSpPr>
+        <a:xfrm>
+          <a:off x="0" y="0"/>
+          <a:ext cx="0" cy="0"/>
+          <a:chOff x="0" y="0"/>
+          <a:chExt cx="0" cy="0"/>
+        </a:xfrm>
+      </p:grpSpPr>
+      <p:sp>
+        <p:nvSpPr>
+          <p:cNvPr id="2" name="Slide Image Placeholder 1"/>
+          <p:cNvSpPr>
+            <a:spLocks noGrp="1"/>
+          </p:cNvSpPr>
+          <p:nvPr>
+            <p:ph type="sldImg" idx="2"/>
+          </p:nvPr>
+        </p:nvSpPr>
+        <p:spPr/>
+      </p:sp>
+      <p:sp>
+        <p:nvSpPr>
+          <p:cNvPr id="3" name="Notes Placeholder 2"/>
+          <p:cNvSpPr>
+            <a:spLocks noGrp="1"/>
+          </p:cNvSpPr>
+          <p:nvPr>
+            <p:ph type="body" idx="3" sz="quarter"/>
+          </p:nvPr>
+        </p:nvSpPr>
+        <p:spPr/>
+        <p:txBody>
+          <a:bodyPr/>
+          <a:lstStyle/>
+          <a:p>
+            <a:r>
+              <a:t>CLOSING (11:05–11:30) Leave this slide up for questions. It puts the live URL and</a:t>
+            </a:r>
+          </a:p>
+          <a:p>
+            <a:r>
+              <a:t>a scannable QR in front of the examiner and ends on the thesis, not a tool list.</a:t>
+            </a:r>
+          </a:p>
+          <a:p>
+            <a:r>
+              <a:t>"The contribution isn't the 80% — it's that a probability becomes a prioritised,</a:t>
+            </a:r>
+          </a:p>
+          <a:p>
+            <a:r>
+              <a:t>explained, costed action, in a product a retention team can actually open. Thank</a:t>
+            </a:r>
+          </a:p>
+          <a:p>
+            <a:r>
+              <a:t>you — happy to take questions."</a:t>
+            </a:r>
+          </a:p>
+          <a:p>
+            <a:r>
+              <a:t>Offer the demo: "if you'd like, I can upload a customer file and score it live."</a:t>
+            </a:r>
+          </a:p>
+          <a:p>
+            <a:r>
+              <a:t>Remember the free tier sleeps — warm the app before you present.</a:t>
+            </a:r>
+          </a:p>
+          <a:p/>
+          <a:p>
+            <a:r>
+              <a:t>LIKELY QUESTIONS</a:t>
+            </a:r>
+          </a:p>
+          <a:p>
+            <a:r>
+              <a:t>· Why not deep learning? 1,409 test rows and a largely linear signal; the four-way</a:t>
+            </a:r>
+          </a:p>
+          <a:p>
+            <a:r>
+              <a:t>  benchmark supports the simpler model, and it stays explainable.</a:t>
+            </a:r>
+          </a:p>
+          <a:p>
+            <a:r>
+              <a:t>· Why is recall low? The 0.5 threshold is a default. Phase 08 shows 0.35 catches</a:t>
+            </a:r>
+          </a:p>
+          <a:p>
+            <a:r>
+              <a:t>  71.7%, and balanced class weights reach 77.81% recall at identical ROC-AUC.</a:t>
+            </a:r>
+          </a:p>
+          <a:p>
+            <a:r>
+              <a:t>· Isn't revenue-at-risk optimistic? It's exposure, not savings — the deck and the</a:t>
+            </a:r>
+          </a:p>
+          <a:p>
+            <a:r>
+              <a:t>  app both say so; validating it needs a live campaign.</a:t>
+            </a:r>
+          </a:p>
+          <a:p>
+            <a:r>
+              <a:t>· How do you know it isn't leakage? Churn Score, Reason, Category and Status are</a:t>
+            </a:r>
+          </a:p>
+          <a:p>
+            <a:r>
+              <a:t>  post-outcome fields and were dropped before training.</a:t>
             </a:r>
           </a:p>
         </p:txBody>
@@ -18310,6 +18780,5881 @@
 </p:sld>
 </file>
 
+<file path=ppt/slides/slide17.xml><?xml version="1.0" encoding="utf-8"?>
+<p:sld xmlns:a="http://schemas.openxmlformats.org/drawingml/2006/main" xmlns:p="http://schemas.openxmlformats.org/presentationml/2006/main" xmlns:r="http://schemas.openxmlformats.org/officeDocument/2006/relationships">
+  <p:cSld>
+    <p:spTree>
+      <p:nvGrpSpPr>
+        <p:cNvPr id="1" name=""/>
+        <p:cNvGrpSpPr/>
+        <p:nvPr/>
+      </p:nvGrpSpPr>
+      <p:grpSpPr/>
+      <p:sp>
+        <p:nvSpPr>
+          <p:cNvPr id="2" name="Rectangle 1"/>
+          <p:cNvSpPr/>
+          <p:nvPr/>
+        </p:nvSpPr>
+        <p:spPr>
+          <a:xfrm>
+            <a:off x="0" y="0"/>
+            <a:ext cx="12191695" cy="6858000"/>
+          </a:xfrm>
+          <a:prstGeom prst="rect">
+            <a:avLst/>
+          </a:prstGeom>
+          <a:solidFill>
+            <a:srgbClr val="0A0F1C"/>
+          </a:solidFill>
+          <a:ln>
+            <a:noFill/>
+          </a:ln>
+          <a:effectLst/>
+        </p:spPr>
+        <p:style>
+          <a:lnRef idx="1">
+            <a:schemeClr val="accent1"/>
+          </a:lnRef>
+          <a:fillRef idx="3">
+            <a:schemeClr val="accent1"/>
+          </a:fillRef>
+          <a:effectRef idx="2">
+            <a:schemeClr val="accent1"/>
+          </a:effectRef>
+          <a:fontRef idx="minor">
+            <a:schemeClr val="lt1"/>
+          </a:fontRef>
+        </p:style>
+        <p:txBody>
+          <a:bodyPr rtlCol="0" anchor="ctr"/>
+          <a:lstStyle/>
+          <a:p>
+            <a:pPr algn="ctr"/>
+          </a:p>
+        </p:txBody>
+      </p:sp>
+      <p:sp>
+        <p:nvSpPr>
+          <p:cNvPr id="3" name="TextBox 2"/>
+          <p:cNvSpPr txBox="1"/>
+          <p:nvPr/>
+        </p:nvSpPr>
+        <p:spPr>
+          <a:xfrm>
+            <a:off x="566928" y="365760"/>
+            <a:ext cx="8229600" cy="237744"/>
+          </a:xfrm>
+          <a:prstGeom prst="rect">
+            <a:avLst/>
+          </a:prstGeom>
+          <a:noFill/>
+        </p:spPr>
+        <p:txBody>
+          <a:bodyPr wrap="square" lIns="0" rIns="0" tIns="0" bIns="0" anchor="t">
+            <a:spAutoFit/>
+          </a:bodyPr>
+          <a:lstStyle/>
+          <a:p>
+            <a:pPr algn="l">
+              <a:lnSpc>
+                <a:spcPct val="112000"/>
+              </a:lnSpc>
+              <a:spcAft>
+                <a:spcPts val="0"/>
+              </a:spcAft>
+            </a:pPr>
+            <a:r>
+              <a:rPr sz="1000" b="1">
+                <a:solidFill>
+                  <a:srgbClr val="2FD8B4"/>
+                </a:solidFill>
+                <a:latin typeface="Consolas"/>
+              </a:rPr>
+              <a:t>PHASE 14  ·  DEPLOYMENT</a:t>
+            </a:r>
+          </a:p>
+        </p:txBody>
+      </p:sp>
+      <p:sp>
+        <p:nvSpPr>
+          <p:cNvPr id="4" name="TextBox 3"/>
+          <p:cNvSpPr txBox="1"/>
+          <p:nvPr/>
+        </p:nvSpPr>
+        <p:spPr>
+          <a:xfrm>
+            <a:off x="566928" y="576072"/>
+            <a:ext cx="11057839" cy="475488"/>
+          </a:xfrm>
+          <a:prstGeom prst="rect">
+            <a:avLst/>
+          </a:prstGeom>
+          <a:noFill/>
+        </p:spPr>
+        <p:txBody>
+          <a:bodyPr wrap="square" lIns="0" rIns="0" tIns="0" bIns="0" anchor="t">
+            <a:spAutoFit/>
+          </a:bodyPr>
+          <a:lstStyle/>
+          <a:p>
+            <a:pPr algn="l">
+              <a:lnSpc>
+                <a:spcPct val="112000"/>
+              </a:lnSpc>
+              <a:spcAft>
+                <a:spcPts val="0"/>
+              </a:spcAft>
+            </a:pPr>
+            <a:r>
+              <a:rPr sz="2600" b="1">
+                <a:solidFill>
+                  <a:srgbClr val="EAF0F7"/>
+                </a:solidFill>
+                <a:latin typeface="Segoe UI"/>
+              </a:rPr>
+              <a:t>Making it survive production</a:t>
+            </a:r>
+          </a:p>
+        </p:txBody>
+      </p:sp>
+      <p:sp>
+        <p:nvSpPr>
+          <p:cNvPr id="5" name="TextBox 4"/>
+          <p:cNvSpPr txBox="1"/>
+          <p:nvPr/>
+        </p:nvSpPr>
+        <p:spPr>
+          <a:xfrm>
+            <a:off x="566928" y="1060704"/>
+            <a:ext cx="11057839" cy="274320"/>
+          </a:xfrm>
+          <a:prstGeom prst="rect">
+            <a:avLst/>
+          </a:prstGeom>
+          <a:noFill/>
+        </p:spPr>
+        <p:txBody>
+          <a:bodyPr wrap="square" lIns="0" rIns="0" tIns="0" bIns="0" anchor="t">
+            <a:spAutoFit/>
+          </a:bodyPr>
+          <a:lstStyle/>
+          <a:p>
+            <a:pPr algn="l">
+              <a:lnSpc>
+                <a:spcPct val="112000"/>
+              </a:lnSpc>
+              <a:spcAft>
+                <a:spcPts val="0"/>
+              </a:spcAft>
+            </a:pPr>
+            <a:r>
+              <a:rPr sz="1250" b="0">
+                <a:solidFill>
+                  <a:srgbClr val="8CA0BE"/>
+                </a:solidFill>
+                <a:latin typeface="Segoe UI"/>
+              </a:rPr>
+              <a:t>Free-tier hosting is unforgiving — these are the four problems it creates</a:t>
+            </a:r>
+          </a:p>
+        </p:txBody>
+      </p:sp>
+      <p:sp>
+        <p:nvSpPr>
+          <p:cNvPr id="6" name="Rectangle 5"/>
+          <p:cNvSpPr/>
+          <p:nvPr/>
+        </p:nvSpPr>
+        <p:spPr>
+          <a:xfrm>
+            <a:off x="566928" y="1371600"/>
+            <a:ext cx="11057839" cy="12801"/>
+          </a:xfrm>
+          <a:prstGeom prst="rect">
+            <a:avLst/>
+          </a:prstGeom>
+          <a:solidFill>
+            <a:srgbClr val="223049"/>
+          </a:solidFill>
+          <a:ln>
+            <a:noFill/>
+          </a:ln>
+          <a:effectLst/>
+        </p:spPr>
+        <p:style>
+          <a:lnRef idx="1">
+            <a:schemeClr val="accent1"/>
+          </a:lnRef>
+          <a:fillRef idx="3">
+            <a:schemeClr val="accent1"/>
+          </a:fillRef>
+          <a:effectRef idx="2">
+            <a:schemeClr val="accent1"/>
+          </a:effectRef>
+          <a:fontRef idx="minor">
+            <a:schemeClr val="lt1"/>
+          </a:fontRef>
+        </p:style>
+        <p:txBody>
+          <a:bodyPr rtlCol="0" anchor="ctr"/>
+          <a:lstStyle/>
+          <a:p>
+            <a:pPr algn="ctr"/>
+          </a:p>
+        </p:txBody>
+      </p:sp>
+      <p:sp>
+        <p:nvSpPr>
+          <p:cNvPr id="7" name="Rounded Rectangle 6"/>
+          <p:cNvSpPr/>
+          <p:nvPr/>
+        </p:nvSpPr>
+        <p:spPr>
+          <a:xfrm>
+            <a:off x="566928" y="1517904"/>
+            <a:ext cx="5410047" cy="1773935"/>
+          </a:xfrm>
+          <a:prstGeom prst="roundRect">
+            <a:avLst>
+              <a:gd name="adj" fmla="val 8000"/>
+            </a:avLst>
+          </a:prstGeom>
+          <a:solidFill>
+            <a:srgbClr val="111A2C"/>
+          </a:solidFill>
+          <a:ln w="12700">
+            <a:solidFill>
+              <a:srgbClr val="223049"/>
+            </a:solidFill>
+          </a:ln>
+          <a:effectLst/>
+        </p:spPr>
+        <p:style>
+          <a:lnRef idx="1">
+            <a:schemeClr val="accent1"/>
+          </a:lnRef>
+          <a:fillRef idx="3">
+            <a:schemeClr val="accent1"/>
+          </a:fillRef>
+          <a:effectRef idx="2">
+            <a:schemeClr val="accent1"/>
+          </a:effectRef>
+          <a:fontRef idx="minor">
+            <a:schemeClr val="lt1"/>
+          </a:fontRef>
+        </p:style>
+        <p:txBody>
+          <a:bodyPr rtlCol="0" anchor="ctr"/>
+          <a:lstStyle/>
+          <a:p>
+            <a:pPr algn="ctr"/>
+          </a:p>
+        </p:txBody>
+      </p:sp>
+      <p:sp>
+        <p:nvSpPr>
+          <p:cNvPr id="8" name="Rectangle 7"/>
+          <p:cNvSpPr/>
+          <p:nvPr/>
+        </p:nvSpPr>
+        <p:spPr>
+          <a:xfrm>
+            <a:off x="566928" y="1664207"/>
+            <a:ext cx="32004" cy="1481327"/>
+          </a:xfrm>
+          <a:prstGeom prst="rect">
+            <a:avLst/>
+          </a:prstGeom>
+          <a:solidFill>
+            <a:srgbClr val="2FD8B4"/>
+          </a:solidFill>
+          <a:ln>
+            <a:noFill/>
+          </a:ln>
+          <a:effectLst/>
+        </p:spPr>
+        <p:style>
+          <a:lnRef idx="1">
+            <a:schemeClr val="accent1"/>
+          </a:lnRef>
+          <a:fillRef idx="3">
+            <a:schemeClr val="accent1"/>
+          </a:fillRef>
+          <a:effectRef idx="2">
+            <a:schemeClr val="accent1"/>
+          </a:effectRef>
+          <a:fontRef idx="minor">
+            <a:schemeClr val="lt1"/>
+          </a:fontRef>
+        </p:style>
+        <p:txBody>
+          <a:bodyPr rtlCol="0" anchor="ctr"/>
+          <a:lstStyle/>
+          <a:p>
+            <a:pPr algn="ctr"/>
+          </a:p>
+        </p:txBody>
+      </p:sp>
+      <p:sp>
+        <p:nvSpPr>
+          <p:cNvPr id="9" name="TextBox 8"/>
+          <p:cNvSpPr txBox="1"/>
+          <p:nvPr/>
+        </p:nvSpPr>
+        <p:spPr>
+          <a:xfrm>
+            <a:off x="786384" y="1682495"/>
+            <a:ext cx="4952847" cy="1444751"/>
+          </a:xfrm>
+          <a:prstGeom prst="rect">
+            <a:avLst/>
+          </a:prstGeom>
+          <a:noFill/>
+        </p:spPr>
+        <p:txBody>
+          <a:bodyPr wrap="square" lIns="0" rIns="0" tIns="0" bIns="0" anchor="t">
+            <a:spAutoFit/>
+          </a:bodyPr>
+          <a:lstStyle/>
+          <a:p>
+            <a:pPr algn="l">
+              <a:lnSpc>
+                <a:spcPct val="112000"/>
+              </a:lnSpc>
+              <a:spcAft>
+                <a:spcPts val="400"/>
+              </a:spcAft>
+            </a:pPr>
+            <a:r>
+              <a:rPr sz="1200" b="1">
+                <a:solidFill>
+                  <a:srgbClr val="EAF0F7"/>
+                </a:solidFill>
+                <a:latin typeface="Segoe UI"/>
+              </a:rPr>
+              <a:t>Slow scoring on a shared CPU</a:t>
+            </a:r>
+          </a:p>
+          <a:p>
+            <a:pPr algn="l">
+              <a:lnSpc>
+                <a:spcPct val="116000"/>
+              </a:lnSpc>
+              <a:spcAft>
+                <a:spcPts val="500"/>
+              </a:spcAft>
+            </a:pPr>
+            <a:r>
+              <a:rPr sz="1019" b="0">
+                <a:solidFill>
+                  <a:srgbClr val="8CA0BE"/>
+                </a:solidFill>
+                <a:latin typeface="Segoe UI"/>
+              </a:rPr>
+              <a:t>A large CSV can take far longer than the default 30-second worker timeout, so the worker is killed mid-request and the browser shows a 502.</a:t>
+            </a:r>
+          </a:p>
+          <a:p>
+            <a:pPr algn="l">
+              <a:lnSpc>
+                <a:spcPct val="112000"/>
+              </a:lnSpc>
+              <a:spcAft>
+                <a:spcPts val="0"/>
+              </a:spcAft>
+            </a:pPr>
+            <a:r>
+              <a:rPr sz="1040" b="1">
+                <a:solidFill>
+                  <a:srgbClr val="2FD8B4"/>
+                </a:solidFill>
+                <a:latin typeface="Consolas"/>
+              </a:rPr>
+              <a:t>→ fixed by 300-second timeout</a:t>
+            </a:r>
+          </a:p>
+        </p:txBody>
+      </p:sp>
+      <p:sp>
+        <p:nvSpPr>
+          <p:cNvPr id="10" name="Rounded Rectangle 9"/>
+          <p:cNvSpPr/>
+          <p:nvPr/>
+        </p:nvSpPr>
+        <p:spPr>
+          <a:xfrm>
+            <a:off x="6214719" y="1517904"/>
+            <a:ext cx="5410047" cy="1773935"/>
+          </a:xfrm>
+          <a:prstGeom prst="roundRect">
+            <a:avLst>
+              <a:gd name="adj" fmla="val 8000"/>
+            </a:avLst>
+          </a:prstGeom>
+          <a:solidFill>
+            <a:srgbClr val="111A2C"/>
+          </a:solidFill>
+          <a:ln w="12700">
+            <a:solidFill>
+              <a:srgbClr val="223049"/>
+            </a:solidFill>
+          </a:ln>
+          <a:effectLst/>
+        </p:spPr>
+        <p:style>
+          <a:lnRef idx="1">
+            <a:schemeClr val="accent1"/>
+          </a:lnRef>
+          <a:fillRef idx="3">
+            <a:schemeClr val="accent1"/>
+          </a:fillRef>
+          <a:effectRef idx="2">
+            <a:schemeClr val="accent1"/>
+          </a:effectRef>
+          <a:fontRef idx="minor">
+            <a:schemeClr val="lt1"/>
+          </a:fontRef>
+        </p:style>
+        <p:txBody>
+          <a:bodyPr rtlCol="0" anchor="ctr"/>
+          <a:lstStyle/>
+          <a:p>
+            <a:pPr algn="ctr"/>
+          </a:p>
+        </p:txBody>
+      </p:sp>
+      <p:sp>
+        <p:nvSpPr>
+          <p:cNvPr id="11" name="Rectangle 10"/>
+          <p:cNvSpPr/>
+          <p:nvPr/>
+        </p:nvSpPr>
+        <p:spPr>
+          <a:xfrm>
+            <a:off x="6214719" y="1664207"/>
+            <a:ext cx="32004" cy="1481327"/>
+          </a:xfrm>
+          <a:prstGeom prst="rect">
+            <a:avLst/>
+          </a:prstGeom>
+          <a:solidFill>
+            <a:srgbClr val="2FD8B4"/>
+          </a:solidFill>
+          <a:ln>
+            <a:noFill/>
+          </a:ln>
+          <a:effectLst/>
+        </p:spPr>
+        <p:style>
+          <a:lnRef idx="1">
+            <a:schemeClr val="accent1"/>
+          </a:lnRef>
+          <a:fillRef idx="3">
+            <a:schemeClr val="accent1"/>
+          </a:fillRef>
+          <a:effectRef idx="2">
+            <a:schemeClr val="accent1"/>
+          </a:effectRef>
+          <a:fontRef idx="minor">
+            <a:schemeClr val="lt1"/>
+          </a:fontRef>
+        </p:style>
+        <p:txBody>
+          <a:bodyPr rtlCol="0" anchor="ctr"/>
+          <a:lstStyle/>
+          <a:p>
+            <a:pPr algn="ctr"/>
+          </a:p>
+        </p:txBody>
+      </p:sp>
+      <p:sp>
+        <p:nvSpPr>
+          <p:cNvPr id="12" name="TextBox 11"/>
+          <p:cNvSpPr txBox="1"/>
+          <p:nvPr/>
+        </p:nvSpPr>
+        <p:spPr>
+          <a:xfrm>
+            <a:off x="6434175" y="1682495"/>
+            <a:ext cx="4952847" cy="1444751"/>
+          </a:xfrm>
+          <a:prstGeom prst="rect">
+            <a:avLst/>
+          </a:prstGeom>
+          <a:noFill/>
+        </p:spPr>
+        <p:txBody>
+          <a:bodyPr wrap="square" lIns="0" rIns="0" tIns="0" bIns="0" anchor="t">
+            <a:spAutoFit/>
+          </a:bodyPr>
+          <a:lstStyle/>
+          <a:p>
+            <a:pPr algn="l">
+              <a:lnSpc>
+                <a:spcPct val="112000"/>
+              </a:lnSpc>
+              <a:spcAft>
+                <a:spcPts val="400"/>
+              </a:spcAft>
+            </a:pPr>
+            <a:r>
+              <a:rPr sz="1200" b="1">
+                <a:solidFill>
+                  <a:srgbClr val="EAF0F7"/>
+                </a:solidFill>
+                <a:latin typeface="Segoe UI"/>
+              </a:rPr>
+              <a:t>Reloading the model per request</a:t>
+            </a:r>
+          </a:p>
+          <a:p>
+            <a:pPr algn="l">
+              <a:lnSpc>
+                <a:spcPct val="116000"/>
+              </a:lnSpc>
+              <a:spcAft>
+                <a:spcPts val="500"/>
+              </a:spcAft>
+            </a:pPr>
+            <a:r>
+              <a:rPr sz="1019" b="0">
+                <a:solidFill>
+                  <a:srgbClr val="8CA0BE"/>
+                </a:solidFill>
+                <a:latin typeface="Segoe UI"/>
+              </a:rPr>
+              <a:t>Reading the pickled model on every request wastes the little memory the instance has.</a:t>
+            </a:r>
+          </a:p>
+          <a:p>
+            <a:pPr algn="l">
+              <a:lnSpc>
+                <a:spcPct val="112000"/>
+              </a:lnSpc>
+              <a:spcAft>
+                <a:spcPts val="0"/>
+              </a:spcAft>
+            </a:pPr>
+            <a:r>
+              <a:rPr sz="1040" b="1">
+                <a:solidFill>
+                  <a:srgbClr val="2FD8B4"/>
+                </a:solidFill>
+                <a:latin typeface="Consolas"/>
+              </a:rPr>
+              <a:t>→ fixed by worker preload</a:t>
+            </a:r>
+          </a:p>
+        </p:txBody>
+      </p:sp>
+      <p:sp>
+        <p:nvSpPr>
+          <p:cNvPr id="13" name="Rounded Rectangle 12"/>
+          <p:cNvSpPr/>
+          <p:nvPr/>
+        </p:nvSpPr>
+        <p:spPr>
+          <a:xfrm>
+            <a:off x="566928" y="3438144"/>
+            <a:ext cx="5410047" cy="1773935"/>
+          </a:xfrm>
+          <a:prstGeom prst="roundRect">
+            <a:avLst>
+              <a:gd name="adj" fmla="val 8000"/>
+            </a:avLst>
+          </a:prstGeom>
+          <a:solidFill>
+            <a:srgbClr val="111A2C"/>
+          </a:solidFill>
+          <a:ln w="12700">
+            <a:solidFill>
+              <a:srgbClr val="223049"/>
+            </a:solidFill>
+          </a:ln>
+          <a:effectLst/>
+        </p:spPr>
+        <p:style>
+          <a:lnRef idx="1">
+            <a:schemeClr val="accent1"/>
+          </a:lnRef>
+          <a:fillRef idx="3">
+            <a:schemeClr val="accent1"/>
+          </a:fillRef>
+          <a:effectRef idx="2">
+            <a:schemeClr val="accent1"/>
+          </a:effectRef>
+          <a:fontRef idx="minor">
+            <a:schemeClr val="lt1"/>
+          </a:fontRef>
+        </p:style>
+        <p:txBody>
+          <a:bodyPr rtlCol="0" anchor="ctr"/>
+          <a:lstStyle/>
+          <a:p>
+            <a:pPr algn="ctr"/>
+          </a:p>
+        </p:txBody>
+      </p:sp>
+      <p:sp>
+        <p:nvSpPr>
+          <p:cNvPr id="14" name="Rectangle 13"/>
+          <p:cNvSpPr/>
+          <p:nvPr/>
+        </p:nvSpPr>
+        <p:spPr>
+          <a:xfrm>
+            <a:off x="566928" y="3584448"/>
+            <a:ext cx="32004" cy="1481327"/>
+          </a:xfrm>
+          <a:prstGeom prst="rect">
+            <a:avLst/>
+          </a:prstGeom>
+          <a:solidFill>
+            <a:srgbClr val="2FD8B4"/>
+          </a:solidFill>
+          <a:ln>
+            <a:noFill/>
+          </a:ln>
+          <a:effectLst/>
+        </p:spPr>
+        <p:style>
+          <a:lnRef idx="1">
+            <a:schemeClr val="accent1"/>
+          </a:lnRef>
+          <a:fillRef idx="3">
+            <a:schemeClr val="accent1"/>
+          </a:fillRef>
+          <a:effectRef idx="2">
+            <a:schemeClr val="accent1"/>
+          </a:effectRef>
+          <a:fontRef idx="minor">
+            <a:schemeClr val="lt1"/>
+          </a:fontRef>
+        </p:style>
+        <p:txBody>
+          <a:bodyPr rtlCol="0" anchor="ctr"/>
+          <a:lstStyle/>
+          <a:p>
+            <a:pPr algn="ctr"/>
+          </a:p>
+        </p:txBody>
+      </p:sp>
+      <p:sp>
+        <p:nvSpPr>
+          <p:cNvPr id="15" name="TextBox 14"/>
+          <p:cNvSpPr txBox="1"/>
+          <p:nvPr/>
+        </p:nvSpPr>
+        <p:spPr>
+          <a:xfrm>
+            <a:off x="786384" y="3602736"/>
+            <a:ext cx="4952847" cy="1444751"/>
+          </a:xfrm>
+          <a:prstGeom prst="rect">
+            <a:avLst/>
+          </a:prstGeom>
+          <a:noFill/>
+        </p:spPr>
+        <p:txBody>
+          <a:bodyPr wrap="square" lIns="0" rIns="0" tIns="0" bIns="0" anchor="t">
+            <a:spAutoFit/>
+          </a:bodyPr>
+          <a:lstStyle/>
+          <a:p>
+            <a:pPr algn="l">
+              <a:lnSpc>
+                <a:spcPct val="112000"/>
+              </a:lnSpc>
+              <a:spcAft>
+                <a:spcPts val="400"/>
+              </a:spcAft>
+            </a:pPr>
+            <a:r>
+              <a:rPr sz="1200" b="1">
+                <a:solidFill>
+                  <a:srgbClr val="EAF0F7"/>
+                </a:solidFill>
+                <a:latin typeface="Segoe UI"/>
+              </a:rPr>
+              <a:t>Memory creeping past the limit</a:t>
+            </a:r>
+          </a:p>
+          <a:p>
+            <a:pPr algn="l">
+              <a:lnSpc>
+                <a:spcPct val="116000"/>
+              </a:lnSpc>
+              <a:spcAft>
+                <a:spcPts val="500"/>
+              </a:spcAft>
+            </a:pPr>
+            <a:r>
+              <a:rPr sz="1019" b="0">
+                <a:solidFill>
+                  <a:srgbClr val="8CA0BE"/>
+                </a:solidFill>
+                <a:latin typeface="Segoe UI"/>
+              </a:rPr>
+              <a:t>A long-lived worker grows until the platform OOM-kills it, which surfaces as a random error.</a:t>
+            </a:r>
+          </a:p>
+          <a:p>
+            <a:pPr algn="l">
+              <a:lnSpc>
+                <a:spcPct val="112000"/>
+              </a:lnSpc>
+              <a:spcAft>
+                <a:spcPts val="0"/>
+              </a:spcAft>
+            </a:pPr>
+            <a:r>
+              <a:rPr sz="1040" b="1">
+                <a:solidFill>
+                  <a:srgbClr val="2FD8B4"/>
+                </a:solidFill>
+                <a:latin typeface="Consolas"/>
+              </a:rPr>
+              <a:t>→ fixed by request recycling</a:t>
+            </a:r>
+          </a:p>
+        </p:txBody>
+      </p:sp>
+      <p:sp>
+        <p:nvSpPr>
+          <p:cNvPr id="16" name="Rounded Rectangle 15"/>
+          <p:cNvSpPr/>
+          <p:nvPr/>
+        </p:nvSpPr>
+        <p:spPr>
+          <a:xfrm>
+            <a:off x="6214719" y="3438144"/>
+            <a:ext cx="5410047" cy="1773935"/>
+          </a:xfrm>
+          <a:prstGeom prst="roundRect">
+            <a:avLst>
+              <a:gd name="adj" fmla="val 8000"/>
+            </a:avLst>
+          </a:prstGeom>
+          <a:solidFill>
+            <a:srgbClr val="111A2C"/>
+          </a:solidFill>
+          <a:ln w="12700">
+            <a:solidFill>
+              <a:srgbClr val="223049"/>
+            </a:solidFill>
+          </a:ln>
+          <a:effectLst/>
+        </p:spPr>
+        <p:style>
+          <a:lnRef idx="1">
+            <a:schemeClr val="accent1"/>
+          </a:lnRef>
+          <a:fillRef idx="3">
+            <a:schemeClr val="accent1"/>
+          </a:fillRef>
+          <a:effectRef idx="2">
+            <a:schemeClr val="accent1"/>
+          </a:effectRef>
+          <a:fontRef idx="minor">
+            <a:schemeClr val="lt1"/>
+          </a:fontRef>
+        </p:style>
+        <p:txBody>
+          <a:bodyPr rtlCol="0" anchor="ctr"/>
+          <a:lstStyle/>
+          <a:p>
+            <a:pPr algn="ctr"/>
+          </a:p>
+        </p:txBody>
+      </p:sp>
+      <p:sp>
+        <p:nvSpPr>
+          <p:cNvPr id="17" name="Rectangle 16"/>
+          <p:cNvSpPr/>
+          <p:nvPr/>
+        </p:nvSpPr>
+        <p:spPr>
+          <a:xfrm>
+            <a:off x="6214719" y="3584448"/>
+            <a:ext cx="32004" cy="1481327"/>
+          </a:xfrm>
+          <a:prstGeom prst="rect">
+            <a:avLst/>
+          </a:prstGeom>
+          <a:solidFill>
+            <a:srgbClr val="F5A623"/>
+          </a:solidFill>
+          <a:ln>
+            <a:noFill/>
+          </a:ln>
+          <a:effectLst/>
+        </p:spPr>
+        <p:style>
+          <a:lnRef idx="1">
+            <a:schemeClr val="accent1"/>
+          </a:lnRef>
+          <a:fillRef idx="3">
+            <a:schemeClr val="accent1"/>
+          </a:fillRef>
+          <a:effectRef idx="2">
+            <a:schemeClr val="accent1"/>
+          </a:effectRef>
+          <a:fontRef idx="minor">
+            <a:schemeClr val="lt1"/>
+          </a:fontRef>
+        </p:style>
+        <p:txBody>
+          <a:bodyPr rtlCol="0" anchor="ctr"/>
+          <a:lstStyle/>
+          <a:p>
+            <a:pPr algn="ctr"/>
+          </a:p>
+        </p:txBody>
+      </p:sp>
+      <p:sp>
+        <p:nvSpPr>
+          <p:cNvPr id="18" name="TextBox 17"/>
+          <p:cNvSpPr txBox="1"/>
+          <p:nvPr/>
+        </p:nvSpPr>
+        <p:spPr>
+          <a:xfrm>
+            <a:off x="6434175" y="3602736"/>
+            <a:ext cx="4952847" cy="1444751"/>
+          </a:xfrm>
+          <a:prstGeom prst="rect">
+            <a:avLst/>
+          </a:prstGeom>
+          <a:noFill/>
+        </p:spPr>
+        <p:txBody>
+          <a:bodyPr wrap="square" lIns="0" rIns="0" tIns="0" bIns="0" anchor="t">
+            <a:spAutoFit/>
+          </a:bodyPr>
+          <a:lstStyle/>
+          <a:p>
+            <a:pPr algn="l">
+              <a:lnSpc>
+                <a:spcPct val="112000"/>
+              </a:lnSpc>
+              <a:spcAft>
+                <a:spcPts val="400"/>
+              </a:spcAft>
+            </a:pPr>
+            <a:r>
+              <a:rPr sz="1200" b="1">
+                <a:solidFill>
+                  <a:srgbClr val="EAF0F7"/>
+                </a:solidFill>
+                <a:latin typeface="Segoe UI"/>
+              </a:rPr>
+              <a:t>The free tier sleeps</a:t>
+            </a:r>
+          </a:p>
+          <a:p>
+            <a:pPr algn="l">
+              <a:lnSpc>
+                <a:spcPct val="116000"/>
+              </a:lnSpc>
+              <a:spcAft>
+                <a:spcPts val="500"/>
+              </a:spcAft>
+            </a:pPr>
+            <a:r>
+              <a:rPr sz="1019" b="0">
+                <a:solidFill>
+                  <a:srgbClr val="8CA0BE"/>
+                </a:solidFill>
+                <a:latin typeface="Segoe UI"/>
+              </a:rPr>
+              <a:t>An idle instance is suspended, so the first visitor waits for a cold start.</a:t>
+            </a:r>
+          </a:p>
+          <a:p>
+            <a:pPr algn="l">
+              <a:lnSpc>
+                <a:spcPct val="112000"/>
+              </a:lnSpc>
+              <a:spcAft>
+                <a:spcPts val="0"/>
+              </a:spcAft>
+            </a:pPr>
+            <a:r>
+              <a:rPr sz="1040" b="1">
+                <a:solidFill>
+                  <a:srgbClr val="F5A623"/>
+                </a:solidFill>
+                <a:latin typeface="Consolas"/>
+              </a:rPr>
+              <a:t>→ fixed by warm it before demoing</a:t>
+            </a:r>
+          </a:p>
+        </p:txBody>
+      </p:sp>
+      <p:sp>
+        <p:nvSpPr>
+          <p:cNvPr id="19" name="Rounded Rectangle 18"/>
+          <p:cNvSpPr/>
+          <p:nvPr/>
+        </p:nvSpPr>
+        <p:spPr>
+          <a:xfrm>
+            <a:off x="566928" y="5358383"/>
+            <a:ext cx="11057839" cy="859535"/>
+          </a:xfrm>
+          <a:prstGeom prst="roundRect">
+            <a:avLst>
+              <a:gd name="adj" fmla="val 8000"/>
+            </a:avLst>
+          </a:prstGeom>
+          <a:solidFill>
+            <a:srgbClr val="162136"/>
+          </a:solidFill>
+          <a:ln w="15240">
+            <a:solidFill>
+              <a:srgbClr val="4C8DFF"/>
+            </a:solidFill>
+          </a:ln>
+          <a:effectLst/>
+        </p:spPr>
+        <p:style>
+          <a:lnRef idx="1">
+            <a:schemeClr val="accent1"/>
+          </a:lnRef>
+          <a:fillRef idx="3">
+            <a:schemeClr val="accent1"/>
+          </a:fillRef>
+          <a:effectRef idx="2">
+            <a:schemeClr val="accent1"/>
+          </a:effectRef>
+          <a:fontRef idx="minor">
+            <a:schemeClr val="lt1"/>
+          </a:fontRef>
+        </p:style>
+        <p:txBody>
+          <a:bodyPr rtlCol="0" anchor="ctr"/>
+          <a:lstStyle/>
+          <a:p>
+            <a:pPr algn="ctr"/>
+          </a:p>
+        </p:txBody>
+      </p:sp>
+      <p:sp>
+        <p:nvSpPr>
+          <p:cNvPr id="20" name="TextBox 19"/>
+          <p:cNvSpPr txBox="1"/>
+          <p:nvPr/>
+        </p:nvSpPr>
+        <p:spPr>
+          <a:xfrm>
+            <a:off x="749808" y="5486399"/>
+            <a:ext cx="10692079" cy="621791"/>
+          </a:xfrm>
+          <a:prstGeom prst="rect">
+            <a:avLst/>
+          </a:prstGeom>
+          <a:noFill/>
+        </p:spPr>
+        <p:txBody>
+          <a:bodyPr wrap="square" lIns="0" rIns="0" tIns="0" bIns="0" anchor="t">
+            <a:spAutoFit/>
+          </a:bodyPr>
+          <a:lstStyle/>
+          <a:p>
+            <a:pPr algn="l">
+              <a:lnSpc>
+                <a:spcPct val="112000"/>
+              </a:lnSpc>
+              <a:spcAft>
+                <a:spcPts val="300"/>
+              </a:spcAft>
+            </a:pPr>
+            <a:r>
+              <a:rPr sz="1150" b="1">
+                <a:solidFill>
+                  <a:srgbClr val="4C8DFF"/>
+                </a:solidFill>
+                <a:latin typeface="Segoe UI"/>
+              </a:rPr>
+              <a:t>SHIPPED AS</a:t>
+            </a:r>
+          </a:p>
+          <a:p>
+            <a:pPr algn="l">
+              <a:lnSpc>
+                <a:spcPct val="116000"/>
+              </a:lnSpc>
+              <a:spcAft>
+                <a:spcPts val="0"/>
+              </a:spcAft>
+            </a:pPr>
+            <a:r>
+              <a:rPr sz="1080" b="0">
+                <a:solidFill>
+                  <a:srgbClr val="EAF0F7"/>
+                </a:solidFill>
+                <a:latin typeface="Segoe UI"/>
+              </a:rPr>
+              <a:t>Gunicorn with a threaded worker · Dockerfile and Procfile · version-pinned requirements · hosted on Render, where the application answers at the URL on the closing slide.</a:t>
+            </a:r>
+          </a:p>
+        </p:txBody>
+      </p:sp>
+      <p:sp>
+        <p:nvSpPr>
+          <p:cNvPr id="21" name="Rectangle 20"/>
+          <p:cNvSpPr/>
+          <p:nvPr/>
+        </p:nvSpPr>
+        <p:spPr>
+          <a:xfrm>
+            <a:off x="566928" y="6309360"/>
+            <a:ext cx="743145" cy="43891"/>
+          </a:xfrm>
+          <a:prstGeom prst="rect">
+            <a:avLst/>
+          </a:prstGeom>
+          <a:solidFill>
+            <a:srgbClr val="223049"/>
+          </a:solidFill>
+          <a:ln>
+            <a:noFill/>
+          </a:ln>
+          <a:effectLst/>
+        </p:spPr>
+        <p:style>
+          <a:lnRef idx="1">
+            <a:schemeClr val="accent1"/>
+          </a:lnRef>
+          <a:fillRef idx="3">
+            <a:schemeClr val="accent1"/>
+          </a:fillRef>
+          <a:effectRef idx="2">
+            <a:schemeClr val="accent1"/>
+          </a:effectRef>
+          <a:fontRef idx="minor">
+            <a:schemeClr val="lt1"/>
+          </a:fontRef>
+        </p:style>
+        <p:txBody>
+          <a:bodyPr rtlCol="0" anchor="ctr"/>
+          <a:lstStyle/>
+          <a:p>
+            <a:pPr algn="ctr"/>
+          </a:p>
+        </p:txBody>
+      </p:sp>
+      <p:sp>
+        <p:nvSpPr>
+          <p:cNvPr id="22" name="Rectangle 21"/>
+          <p:cNvSpPr/>
+          <p:nvPr/>
+        </p:nvSpPr>
+        <p:spPr>
+          <a:xfrm>
+            <a:off x="1360365" y="6309360"/>
+            <a:ext cx="743145" cy="43891"/>
+          </a:xfrm>
+          <a:prstGeom prst="rect">
+            <a:avLst/>
+          </a:prstGeom>
+          <a:solidFill>
+            <a:srgbClr val="223049"/>
+          </a:solidFill>
+          <a:ln>
+            <a:noFill/>
+          </a:ln>
+          <a:effectLst/>
+        </p:spPr>
+        <p:style>
+          <a:lnRef idx="1">
+            <a:schemeClr val="accent1"/>
+          </a:lnRef>
+          <a:fillRef idx="3">
+            <a:schemeClr val="accent1"/>
+          </a:fillRef>
+          <a:effectRef idx="2">
+            <a:schemeClr val="accent1"/>
+          </a:effectRef>
+          <a:fontRef idx="minor">
+            <a:schemeClr val="lt1"/>
+          </a:fontRef>
+        </p:style>
+        <p:txBody>
+          <a:bodyPr rtlCol="0" anchor="ctr"/>
+          <a:lstStyle/>
+          <a:p>
+            <a:pPr algn="ctr"/>
+          </a:p>
+        </p:txBody>
+      </p:sp>
+      <p:sp>
+        <p:nvSpPr>
+          <p:cNvPr id="23" name="Rectangle 22"/>
+          <p:cNvSpPr/>
+          <p:nvPr/>
+        </p:nvSpPr>
+        <p:spPr>
+          <a:xfrm>
+            <a:off x="2153803" y="6309360"/>
+            <a:ext cx="743145" cy="43891"/>
+          </a:xfrm>
+          <a:prstGeom prst="rect">
+            <a:avLst/>
+          </a:prstGeom>
+          <a:solidFill>
+            <a:srgbClr val="223049"/>
+          </a:solidFill>
+          <a:ln>
+            <a:noFill/>
+          </a:ln>
+          <a:effectLst/>
+        </p:spPr>
+        <p:style>
+          <a:lnRef idx="1">
+            <a:schemeClr val="accent1"/>
+          </a:lnRef>
+          <a:fillRef idx="3">
+            <a:schemeClr val="accent1"/>
+          </a:fillRef>
+          <a:effectRef idx="2">
+            <a:schemeClr val="accent1"/>
+          </a:effectRef>
+          <a:fontRef idx="minor">
+            <a:schemeClr val="lt1"/>
+          </a:fontRef>
+        </p:style>
+        <p:txBody>
+          <a:bodyPr rtlCol="0" anchor="ctr"/>
+          <a:lstStyle/>
+          <a:p>
+            <a:pPr algn="ctr"/>
+          </a:p>
+        </p:txBody>
+      </p:sp>
+      <p:sp>
+        <p:nvSpPr>
+          <p:cNvPr id="24" name="Rectangle 23"/>
+          <p:cNvSpPr/>
+          <p:nvPr/>
+        </p:nvSpPr>
+        <p:spPr>
+          <a:xfrm>
+            <a:off x="2947241" y="6309360"/>
+            <a:ext cx="743145" cy="43891"/>
+          </a:xfrm>
+          <a:prstGeom prst="rect">
+            <a:avLst/>
+          </a:prstGeom>
+          <a:solidFill>
+            <a:srgbClr val="223049"/>
+          </a:solidFill>
+          <a:ln>
+            <a:noFill/>
+          </a:ln>
+          <a:effectLst/>
+        </p:spPr>
+        <p:style>
+          <a:lnRef idx="1">
+            <a:schemeClr val="accent1"/>
+          </a:lnRef>
+          <a:fillRef idx="3">
+            <a:schemeClr val="accent1"/>
+          </a:fillRef>
+          <a:effectRef idx="2">
+            <a:schemeClr val="accent1"/>
+          </a:effectRef>
+          <a:fontRef idx="minor">
+            <a:schemeClr val="lt1"/>
+          </a:fontRef>
+        </p:style>
+        <p:txBody>
+          <a:bodyPr rtlCol="0" anchor="ctr"/>
+          <a:lstStyle/>
+          <a:p>
+            <a:pPr algn="ctr"/>
+          </a:p>
+        </p:txBody>
+      </p:sp>
+      <p:sp>
+        <p:nvSpPr>
+          <p:cNvPr id="25" name="Rectangle 24"/>
+          <p:cNvSpPr/>
+          <p:nvPr/>
+        </p:nvSpPr>
+        <p:spPr>
+          <a:xfrm>
+            <a:off x="3740679" y="6309360"/>
+            <a:ext cx="743145" cy="43891"/>
+          </a:xfrm>
+          <a:prstGeom prst="rect">
+            <a:avLst/>
+          </a:prstGeom>
+          <a:solidFill>
+            <a:srgbClr val="223049"/>
+          </a:solidFill>
+          <a:ln>
+            <a:noFill/>
+          </a:ln>
+          <a:effectLst/>
+        </p:spPr>
+        <p:style>
+          <a:lnRef idx="1">
+            <a:schemeClr val="accent1"/>
+          </a:lnRef>
+          <a:fillRef idx="3">
+            <a:schemeClr val="accent1"/>
+          </a:fillRef>
+          <a:effectRef idx="2">
+            <a:schemeClr val="accent1"/>
+          </a:effectRef>
+          <a:fontRef idx="minor">
+            <a:schemeClr val="lt1"/>
+          </a:fontRef>
+        </p:style>
+        <p:txBody>
+          <a:bodyPr rtlCol="0" anchor="ctr"/>
+          <a:lstStyle/>
+          <a:p>
+            <a:pPr algn="ctr"/>
+          </a:p>
+        </p:txBody>
+      </p:sp>
+      <p:sp>
+        <p:nvSpPr>
+          <p:cNvPr id="26" name="Rectangle 25"/>
+          <p:cNvSpPr/>
+          <p:nvPr/>
+        </p:nvSpPr>
+        <p:spPr>
+          <a:xfrm>
+            <a:off x="4534117" y="6309360"/>
+            <a:ext cx="743145" cy="43891"/>
+          </a:xfrm>
+          <a:prstGeom prst="rect">
+            <a:avLst/>
+          </a:prstGeom>
+          <a:solidFill>
+            <a:srgbClr val="223049"/>
+          </a:solidFill>
+          <a:ln>
+            <a:noFill/>
+          </a:ln>
+          <a:effectLst/>
+        </p:spPr>
+        <p:style>
+          <a:lnRef idx="1">
+            <a:schemeClr val="accent1"/>
+          </a:lnRef>
+          <a:fillRef idx="3">
+            <a:schemeClr val="accent1"/>
+          </a:fillRef>
+          <a:effectRef idx="2">
+            <a:schemeClr val="accent1"/>
+          </a:effectRef>
+          <a:fontRef idx="minor">
+            <a:schemeClr val="lt1"/>
+          </a:fontRef>
+        </p:style>
+        <p:txBody>
+          <a:bodyPr rtlCol="0" anchor="ctr"/>
+          <a:lstStyle/>
+          <a:p>
+            <a:pPr algn="ctr"/>
+          </a:p>
+        </p:txBody>
+      </p:sp>
+      <p:sp>
+        <p:nvSpPr>
+          <p:cNvPr id="27" name="Rectangle 26"/>
+          <p:cNvSpPr/>
+          <p:nvPr/>
+        </p:nvSpPr>
+        <p:spPr>
+          <a:xfrm>
+            <a:off x="5327555" y="6309360"/>
+            <a:ext cx="743145" cy="43891"/>
+          </a:xfrm>
+          <a:prstGeom prst="rect">
+            <a:avLst/>
+          </a:prstGeom>
+          <a:solidFill>
+            <a:srgbClr val="223049"/>
+          </a:solidFill>
+          <a:ln>
+            <a:noFill/>
+          </a:ln>
+          <a:effectLst/>
+        </p:spPr>
+        <p:style>
+          <a:lnRef idx="1">
+            <a:schemeClr val="accent1"/>
+          </a:lnRef>
+          <a:fillRef idx="3">
+            <a:schemeClr val="accent1"/>
+          </a:fillRef>
+          <a:effectRef idx="2">
+            <a:schemeClr val="accent1"/>
+          </a:effectRef>
+          <a:fontRef idx="minor">
+            <a:schemeClr val="lt1"/>
+          </a:fontRef>
+        </p:style>
+        <p:txBody>
+          <a:bodyPr rtlCol="0" anchor="ctr"/>
+          <a:lstStyle/>
+          <a:p>
+            <a:pPr algn="ctr"/>
+          </a:p>
+        </p:txBody>
+      </p:sp>
+      <p:sp>
+        <p:nvSpPr>
+          <p:cNvPr id="28" name="Rectangle 27"/>
+          <p:cNvSpPr/>
+          <p:nvPr/>
+        </p:nvSpPr>
+        <p:spPr>
+          <a:xfrm>
+            <a:off x="6120993" y="6309360"/>
+            <a:ext cx="743145" cy="43891"/>
+          </a:xfrm>
+          <a:prstGeom prst="rect">
+            <a:avLst/>
+          </a:prstGeom>
+          <a:solidFill>
+            <a:srgbClr val="223049"/>
+          </a:solidFill>
+          <a:ln>
+            <a:noFill/>
+          </a:ln>
+          <a:effectLst/>
+        </p:spPr>
+        <p:style>
+          <a:lnRef idx="1">
+            <a:schemeClr val="accent1"/>
+          </a:lnRef>
+          <a:fillRef idx="3">
+            <a:schemeClr val="accent1"/>
+          </a:fillRef>
+          <a:effectRef idx="2">
+            <a:schemeClr val="accent1"/>
+          </a:effectRef>
+          <a:fontRef idx="minor">
+            <a:schemeClr val="lt1"/>
+          </a:fontRef>
+        </p:style>
+        <p:txBody>
+          <a:bodyPr rtlCol="0" anchor="ctr"/>
+          <a:lstStyle/>
+          <a:p>
+            <a:pPr algn="ctr"/>
+          </a:p>
+        </p:txBody>
+      </p:sp>
+      <p:sp>
+        <p:nvSpPr>
+          <p:cNvPr id="29" name="Rectangle 28"/>
+          <p:cNvSpPr/>
+          <p:nvPr/>
+        </p:nvSpPr>
+        <p:spPr>
+          <a:xfrm>
+            <a:off x="6914431" y="6309360"/>
+            <a:ext cx="743145" cy="43891"/>
+          </a:xfrm>
+          <a:prstGeom prst="rect">
+            <a:avLst/>
+          </a:prstGeom>
+          <a:solidFill>
+            <a:srgbClr val="223049"/>
+          </a:solidFill>
+          <a:ln>
+            <a:noFill/>
+          </a:ln>
+          <a:effectLst/>
+        </p:spPr>
+        <p:style>
+          <a:lnRef idx="1">
+            <a:schemeClr val="accent1"/>
+          </a:lnRef>
+          <a:fillRef idx="3">
+            <a:schemeClr val="accent1"/>
+          </a:fillRef>
+          <a:effectRef idx="2">
+            <a:schemeClr val="accent1"/>
+          </a:effectRef>
+          <a:fontRef idx="minor">
+            <a:schemeClr val="lt1"/>
+          </a:fontRef>
+        </p:style>
+        <p:txBody>
+          <a:bodyPr rtlCol="0" anchor="ctr"/>
+          <a:lstStyle/>
+          <a:p>
+            <a:pPr algn="ctr"/>
+          </a:p>
+        </p:txBody>
+      </p:sp>
+      <p:sp>
+        <p:nvSpPr>
+          <p:cNvPr id="30" name="Rectangle 29"/>
+          <p:cNvSpPr/>
+          <p:nvPr/>
+        </p:nvSpPr>
+        <p:spPr>
+          <a:xfrm>
+            <a:off x="7707869" y="6309360"/>
+            <a:ext cx="743145" cy="43891"/>
+          </a:xfrm>
+          <a:prstGeom prst="rect">
+            <a:avLst/>
+          </a:prstGeom>
+          <a:solidFill>
+            <a:srgbClr val="223049"/>
+          </a:solidFill>
+          <a:ln>
+            <a:noFill/>
+          </a:ln>
+          <a:effectLst/>
+        </p:spPr>
+        <p:style>
+          <a:lnRef idx="1">
+            <a:schemeClr val="accent1"/>
+          </a:lnRef>
+          <a:fillRef idx="3">
+            <a:schemeClr val="accent1"/>
+          </a:fillRef>
+          <a:effectRef idx="2">
+            <a:schemeClr val="accent1"/>
+          </a:effectRef>
+          <a:fontRef idx="minor">
+            <a:schemeClr val="lt1"/>
+          </a:fontRef>
+        </p:style>
+        <p:txBody>
+          <a:bodyPr rtlCol="0" anchor="ctr"/>
+          <a:lstStyle/>
+          <a:p>
+            <a:pPr algn="ctr"/>
+          </a:p>
+        </p:txBody>
+      </p:sp>
+      <p:sp>
+        <p:nvSpPr>
+          <p:cNvPr id="31" name="Rectangle 30"/>
+          <p:cNvSpPr/>
+          <p:nvPr/>
+        </p:nvSpPr>
+        <p:spPr>
+          <a:xfrm>
+            <a:off x="8501307" y="6309360"/>
+            <a:ext cx="743145" cy="43891"/>
+          </a:xfrm>
+          <a:prstGeom prst="rect">
+            <a:avLst/>
+          </a:prstGeom>
+          <a:solidFill>
+            <a:srgbClr val="223049"/>
+          </a:solidFill>
+          <a:ln>
+            <a:noFill/>
+          </a:ln>
+          <a:effectLst/>
+        </p:spPr>
+        <p:style>
+          <a:lnRef idx="1">
+            <a:schemeClr val="accent1"/>
+          </a:lnRef>
+          <a:fillRef idx="3">
+            <a:schemeClr val="accent1"/>
+          </a:fillRef>
+          <a:effectRef idx="2">
+            <a:schemeClr val="accent1"/>
+          </a:effectRef>
+          <a:fontRef idx="minor">
+            <a:schemeClr val="lt1"/>
+          </a:fontRef>
+        </p:style>
+        <p:txBody>
+          <a:bodyPr rtlCol="0" anchor="ctr"/>
+          <a:lstStyle/>
+          <a:p>
+            <a:pPr algn="ctr"/>
+          </a:p>
+        </p:txBody>
+      </p:sp>
+      <p:sp>
+        <p:nvSpPr>
+          <p:cNvPr id="32" name="Rectangle 31"/>
+          <p:cNvSpPr/>
+          <p:nvPr/>
+        </p:nvSpPr>
+        <p:spPr>
+          <a:xfrm>
+            <a:off x="9294745" y="6309360"/>
+            <a:ext cx="743145" cy="43891"/>
+          </a:xfrm>
+          <a:prstGeom prst="rect">
+            <a:avLst/>
+          </a:prstGeom>
+          <a:solidFill>
+            <a:srgbClr val="223049"/>
+          </a:solidFill>
+          <a:ln>
+            <a:noFill/>
+          </a:ln>
+          <a:effectLst/>
+        </p:spPr>
+        <p:style>
+          <a:lnRef idx="1">
+            <a:schemeClr val="accent1"/>
+          </a:lnRef>
+          <a:fillRef idx="3">
+            <a:schemeClr val="accent1"/>
+          </a:fillRef>
+          <a:effectRef idx="2">
+            <a:schemeClr val="accent1"/>
+          </a:effectRef>
+          <a:fontRef idx="minor">
+            <a:schemeClr val="lt1"/>
+          </a:fontRef>
+        </p:style>
+        <p:txBody>
+          <a:bodyPr rtlCol="0" anchor="ctr"/>
+          <a:lstStyle/>
+          <a:p>
+            <a:pPr algn="ctr"/>
+          </a:p>
+        </p:txBody>
+      </p:sp>
+      <p:sp>
+        <p:nvSpPr>
+          <p:cNvPr id="33" name="Rectangle 32"/>
+          <p:cNvSpPr/>
+          <p:nvPr/>
+        </p:nvSpPr>
+        <p:spPr>
+          <a:xfrm>
+            <a:off x="10088183" y="6309360"/>
+            <a:ext cx="743145" cy="43891"/>
+          </a:xfrm>
+          <a:prstGeom prst="rect">
+            <a:avLst/>
+          </a:prstGeom>
+          <a:solidFill>
+            <a:srgbClr val="223049"/>
+          </a:solidFill>
+          <a:ln>
+            <a:noFill/>
+          </a:ln>
+          <a:effectLst/>
+        </p:spPr>
+        <p:style>
+          <a:lnRef idx="1">
+            <a:schemeClr val="accent1"/>
+          </a:lnRef>
+          <a:fillRef idx="3">
+            <a:schemeClr val="accent1"/>
+          </a:fillRef>
+          <a:effectRef idx="2">
+            <a:schemeClr val="accent1"/>
+          </a:effectRef>
+          <a:fontRef idx="minor">
+            <a:schemeClr val="lt1"/>
+          </a:fontRef>
+        </p:style>
+        <p:txBody>
+          <a:bodyPr rtlCol="0" anchor="ctr"/>
+          <a:lstStyle/>
+          <a:p>
+            <a:pPr algn="ctr"/>
+          </a:p>
+        </p:txBody>
+      </p:sp>
+      <p:sp>
+        <p:nvSpPr>
+          <p:cNvPr id="34" name="Rectangle 33"/>
+          <p:cNvSpPr/>
+          <p:nvPr/>
+        </p:nvSpPr>
+        <p:spPr>
+          <a:xfrm>
+            <a:off x="10881621" y="6296558"/>
+            <a:ext cx="743145" cy="68580"/>
+          </a:xfrm>
+          <a:prstGeom prst="rect">
+            <a:avLst/>
+          </a:prstGeom>
+          <a:solidFill>
+            <a:srgbClr val="2FD8B4"/>
+          </a:solidFill>
+          <a:ln>
+            <a:noFill/>
+          </a:ln>
+          <a:effectLst/>
+        </p:spPr>
+        <p:style>
+          <a:lnRef idx="1">
+            <a:schemeClr val="accent1"/>
+          </a:lnRef>
+          <a:fillRef idx="3">
+            <a:schemeClr val="accent1"/>
+          </a:fillRef>
+          <a:effectRef idx="2">
+            <a:schemeClr val="accent1"/>
+          </a:effectRef>
+          <a:fontRef idx="minor">
+            <a:schemeClr val="lt1"/>
+          </a:fontRef>
+        </p:style>
+        <p:txBody>
+          <a:bodyPr rtlCol="0" anchor="ctr"/>
+          <a:lstStyle/>
+          <a:p>
+            <a:pPr algn="ctr"/>
+          </a:p>
+        </p:txBody>
+      </p:sp>
+      <p:sp>
+        <p:nvSpPr>
+          <p:cNvPr id="35" name="Rectangle 34"/>
+          <p:cNvSpPr/>
+          <p:nvPr/>
+        </p:nvSpPr>
+        <p:spPr>
+          <a:xfrm>
+            <a:off x="566928" y="6455664"/>
+            <a:ext cx="11057839" cy="9144"/>
+          </a:xfrm>
+          <a:prstGeom prst="rect">
+            <a:avLst/>
+          </a:prstGeom>
+          <a:solidFill>
+            <a:srgbClr val="223049"/>
+          </a:solidFill>
+          <a:ln>
+            <a:noFill/>
+          </a:ln>
+          <a:effectLst/>
+        </p:spPr>
+        <p:style>
+          <a:lnRef idx="1">
+            <a:schemeClr val="accent1"/>
+          </a:lnRef>
+          <a:fillRef idx="3">
+            <a:schemeClr val="accent1"/>
+          </a:fillRef>
+          <a:effectRef idx="2">
+            <a:schemeClr val="accent1"/>
+          </a:effectRef>
+          <a:fontRef idx="minor">
+            <a:schemeClr val="lt1"/>
+          </a:fontRef>
+        </p:style>
+        <p:txBody>
+          <a:bodyPr rtlCol="0" anchor="ctr"/>
+          <a:lstStyle/>
+          <a:p>
+            <a:pPr algn="ctr"/>
+          </a:p>
+        </p:txBody>
+      </p:sp>
+      <p:sp>
+        <p:nvSpPr>
+          <p:cNvPr id="36" name="TextBox 35"/>
+          <p:cNvSpPr txBox="1"/>
+          <p:nvPr/>
+        </p:nvSpPr>
+        <p:spPr>
+          <a:xfrm>
+            <a:off x="566928" y="6510528"/>
+            <a:ext cx="9509760" cy="219456"/>
+          </a:xfrm>
+          <a:prstGeom prst="rect">
+            <a:avLst/>
+          </a:prstGeom>
+          <a:noFill/>
+        </p:spPr>
+        <p:txBody>
+          <a:bodyPr wrap="square" lIns="0" rIns="0" tIns="0" bIns="0" anchor="t">
+            <a:spAutoFit/>
+          </a:bodyPr>
+          <a:lstStyle/>
+          <a:p>
+            <a:pPr algn="l">
+              <a:lnSpc>
+                <a:spcPct val="112000"/>
+              </a:lnSpc>
+              <a:spcAft>
+                <a:spcPts val="0"/>
+              </a:spcAft>
+            </a:pPr>
+            <a:r>
+              <a:rPr sz="900" b="0">
+                <a:solidFill>
+                  <a:srgbClr val="8CA0BE"/>
+                </a:solidFill>
+                <a:latin typeface="Segoe UI"/>
+              </a:rPr>
+              <a:t>RetainIQ · Signal Ops Console   ·   PHASE 14 · DEPLOYMENT</a:t>
+            </a:r>
+          </a:p>
+        </p:txBody>
+      </p:sp>
+      <p:sp>
+        <p:nvSpPr>
+          <p:cNvPr id="37" name="TextBox 36"/>
+          <p:cNvSpPr txBox="1"/>
+          <p:nvPr/>
+        </p:nvSpPr>
+        <p:spPr>
+          <a:xfrm>
+            <a:off x="10527487" y="6510528"/>
+            <a:ext cx="1097280" cy="219456"/>
+          </a:xfrm>
+          <a:prstGeom prst="rect">
+            <a:avLst/>
+          </a:prstGeom>
+          <a:noFill/>
+        </p:spPr>
+        <p:txBody>
+          <a:bodyPr wrap="square" lIns="0" rIns="0" tIns="0" bIns="0" anchor="t">
+            <a:spAutoFit/>
+          </a:bodyPr>
+          <a:lstStyle/>
+          <a:p>
+            <a:pPr algn="r">
+              <a:lnSpc>
+                <a:spcPct val="112000"/>
+              </a:lnSpc>
+              <a:spcAft>
+                <a:spcPts val="0"/>
+              </a:spcAft>
+            </a:pPr>
+            <a:r>
+              <a:rPr sz="900" b="0">
+                <a:solidFill>
+                  <a:srgbClr val="8CA0BE"/>
+                </a:solidFill>
+                <a:latin typeface="Consolas"/>
+              </a:rPr>
+              <a:t>17</a:t>
+            </a:r>
+          </a:p>
+        </p:txBody>
+      </p:sp>
+    </p:spTree>
+  </p:cSld>
+  <p:clrMapOvr>
+    <a:masterClrMapping/>
+  </p:clrMapOvr>
+</p:sld>
+</file>
+
+<file path=ppt/slides/slide18.xml><?xml version="1.0" encoding="utf-8"?>
+<p:sld xmlns:a="http://schemas.openxmlformats.org/drawingml/2006/main" xmlns:p="http://schemas.openxmlformats.org/presentationml/2006/main" xmlns:r="http://schemas.openxmlformats.org/officeDocument/2006/relationships">
+  <p:cSld>
+    <p:spTree>
+      <p:nvGrpSpPr>
+        <p:cNvPr id="1" name=""/>
+        <p:cNvGrpSpPr/>
+        <p:nvPr/>
+      </p:nvGrpSpPr>
+      <p:grpSpPr/>
+      <p:sp>
+        <p:nvSpPr>
+          <p:cNvPr id="2" name="Rectangle 1"/>
+          <p:cNvSpPr/>
+          <p:nvPr/>
+        </p:nvSpPr>
+        <p:spPr>
+          <a:xfrm>
+            <a:off x="0" y="0"/>
+            <a:ext cx="12191695" cy="6858000"/>
+          </a:xfrm>
+          <a:prstGeom prst="rect">
+            <a:avLst/>
+          </a:prstGeom>
+          <a:solidFill>
+            <a:srgbClr val="0A0F1C"/>
+          </a:solidFill>
+          <a:ln>
+            <a:noFill/>
+          </a:ln>
+          <a:effectLst/>
+        </p:spPr>
+        <p:style>
+          <a:lnRef idx="1">
+            <a:schemeClr val="accent1"/>
+          </a:lnRef>
+          <a:fillRef idx="3">
+            <a:schemeClr val="accent1"/>
+          </a:fillRef>
+          <a:effectRef idx="2">
+            <a:schemeClr val="accent1"/>
+          </a:effectRef>
+          <a:fontRef idx="minor">
+            <a:schemeClr val="lt1"/>
+          </a:fontRef>
+        </p:style>
+        <p:txBody>
+          <a:bodyPr rtlCol="0" anchor="ctr"/>
+          <a:lstStyle/>
+          <a:p>
+            <a:pPr algn="ctr"/>
+          </a:p>
+        </p:txBody>
+      </p:sp>
+      <p:sp>
+        <p:nvSpPr>
+          <p:cNvPr id="3" name="TextBox 2"/>
+          <p:cNvSpPr txBox="1"/>
+          <p:nvPr/>
+        </p:nvSpPr>
+        <p:spPr>
+          <a:xfrm>
+            <a:off x="566928" y="365760"/>
+            <a:ext cx="8229600" cy="237744"/>
+          </a:xfrm>
+          <a:prstGeom prst="rect">
+            <a:avLst/>
+          </a:prstGeom>
+          <a:noFill/>
+        </p:spPr>
+        <p:txBody>
+          <a:bodyPr wrap="square" lIns="0" rIns="0" tIns="0" bIns="0" anchor="t">
+            <a:spAutoFit/>
+          </a:bodyPr>
+          <a:lstStyle/>
+          <a:p>
+            <a:pPr algn="l">
+              <a:lnSpc>
+                <a:spcPct val="112000"/>
+              </a:lnSpc>
+              <a:spcAft>
+                <a:spcPts val="0"/>
+              </a:spcAft>
+            </a:pPr>
+            <a:r>
+              <a:rPr sz="1000" b="1">
+                <a:solidFill>
+                  <a:srgbClr val="2FD8B4"/>
+                </a:solidFill>
+                <a:latin typeface="Consolas"/>
+              </a:rPr>
+              <a:t>TECHNOLOGY STACK</a:t>
+            </a:r>
+          </a:p>
+        </p:txBody>
+      </p:sp>
+      <p:sp>
+        <p:nvSpPr>
+          <p:cNvPr id="4" name="TextBox 3"/>
+          <p:cNvSpPr txBox="1"/>
+          <p:nvPr/>
+        </p:nvSpPr>
+        <p:spPr>
+          <a:xfrm>
+            <a:off x="566928" y="576072"/>
+            <a:ext cx="11057839" cy="475488"/>
+          </a:xfrm>
+          <a:prstGeom prst="rect">
+            <a:avLst/>
+          </a:prstGeom>
+          <a:noFill/>
+        </p:spPr>
+        <p:txBody>
+          <a:bodyPr wrap="square" lIns="0" rIns="0" tIns="0" bIns="0" anchor="t">
+            <a:spAutoFit/>
+          </a:bodyPr>
+          <a:lstStyle/>
+          <a:p>
+            <a:pPr algn="l">
+              <a:lnSpc>
+                <a:spcPct val="112000"/>
+              </a:lnSpc>
+              <a:spcAft>
+                <a:spcPts val="0"/>
+              </a:spcAft>
+            </a:pPr>
+            <a:r>
+              <a:rPr sz="2600" b="1">
+                <a:solidFill>
+                  <a:srgbClr val="EAF0F7"/>
+                </a:solidFill>
+                <a:latin typeface="Segoe UI"/>
+              </a:rPr>
+              <a:t>Tools behind the RetainIQ workflow</a:t>
+            </a:r>
+          </a:p>
+        </p:txBody>
+      </p:sp>
+      <p:sp>
+        <p:nvSpPr>
+          <p:cNvPr id="5" name="TextBox 4"/>
+          <p:cNvSpPr txBox="1"/>
+          <p:nvPr/>
+        </p:nvSpPr>
+        <p:spPr>
+          <a:xfrm>
+            <a:off x="566928" y="1060704"/>
+            <a:ext cx="11057839" cy="274320"/>
+          </a:xfrm>
+          <a:prstGeom prst="rect">
+            <a:avLst/>
+          </a:prstGeom>
+          <a:noFill/>
+        </p:spPr>
+        <p:txBody>
+          <a:bodyPr wrap="square" lIns="0" rIns="0" tIns="0" bIns="0" anchor="t">
+            <a:spAutoFit/>
+          </a:bodyPr>
+          <a:lstStyle/>
+          <a:p>
+            <a:pPr algn="l">
+              <a:lnSpc>
+                <a:spcPct val="112000"/>
+              </a:lnSpc>
+              <a:spcAft>
+                <a:spcPts val="0"/>
+              </a:spcAft>
+            </a:pPr>
+            <a:r>
+              <a:rPr sz="1250" b="0">
+                <a:solidFill>
+                  <a:srgbClr val="8CA0BE"/>
+                </a:solidFill>
+                <a:latin typeface="Segoe UI"/>
+              </a:rPr>
+              <a:t>A shared Python path keeps model training and live scoring in sync</a:t>
+            </a:r>
+          </a:p>
+        </p:txBody>
+      </p:sp>
+      <p:sp>
+        <p:nvSpPr>
+          <p:cNvPr id="6" name="Rectangle 5"/>
+          <p:cNvSpPr/>
+          <p:nvPr/>
+        </p:nvSpPr>
+        <p:spPr>
+          <a:xfrm>
+            <a:off x="566928" y="1371600"/>
+            <a:ext cx="11057839" cy="12801"/>
+          </a:xfrm>
+          <a:prstGeom prst="rect">
+            <a:avLst/>
+          </a:prstGeom>
+          <a:solidFill>
+            <a:srgbClr val="223049"/>
+          </a:solidFill>
+          <a:ln>
+            <a:noFill/>
+          </a:ln>
+          <a:effectLst/>
+        </p:spPr>
+        <p:style>
+          <a:lnRef idx="1">
+            <a:schemeClr val="accent1"/>
+          </a:lnRef>
+          <a:fillRef idx="3">
+            <a:schemeClr val="accent1"/>
+          </a:fillRef>
+          <a:effectRef idx="2">
+            <a:schemeClr val="accent1"/>
+          </a:effectRef>
+          <a:fontRef idx="minor">
+            <a:schemeClr val="lt1"/>
+          </a:fontRef>
+        </p:style>
+        <p:txBody>
+          <a:bodyPr rtlCol="0" anchor="ctr"/>
+          <a:lstStyle/>
+          <a:p>
+            <a:pPr algn="ctr"/>
+          </a:p>
+        </p:txBody>
+      </p:sp>
+      <p:sp>
+        <p:nvSpPr>
+          <p:cNvPr id="7" name="Rounded Rectangle 6"/>
+          <p:cNvSpPr/>
+          <p:nvPr/>
+        </p:nvSpPr>
+        <p:spPr>
+          <a:xfrm>
+            <a:off x="566928" y="1517904"/>
+            <a:ext cx="2834640" cy="4700016"/>
+          </a:xfrm>
+          <a:prstGeom prst="roundRect">
+            <a:avLst>
+              <a:gd name="adj" fmla="val 8000"/>
+            </a:avLst>
+          </a:prstGeom>
+          <a:solidFill>
+            <a:srgbClr val="111A2C"/>
+          </a:solidFill>
+          <a:ln w="12700">
+            <a:solidFill>
+              <a:srgbClr val="223049"/>
+            </a:solidFill>
+          </a:ln>
+          <a:effectLst/>
+        </p:spPr>
+        <p:style>
+          <a:lnRef idx="1">
+            <a:schemeClr val="accent1"/>
+          </a:lnRef>
+          <a:fillRef idx="3">
+            <a:schemeClr val="accent1"/>
+          </a:fillRef>
+          <a:effectRef idx="2">
+            <a:schemeClr val="accent1"/>
+          </a:effectRef>
+          <a:fontRef idx="minor">
+            <a:schemeClr val="lt1"/>
+          </a:fontRef>
+        </p:style>
+        <p:txBody>
+          <a:bodyPr rtlCol="0" anchor="ctr"/>
+          <a:lstStyle/>
+          <a:p>
+            <a:pPr algn="ctr"/>
+          </a:p>
+        </p:txBody>
+      </p:sp>
+      <p:sp>
+        <p:nvSpPr>
+          <p:cNvPr id="8" name="TextBox 7"/>
+          <p:cNvSpPr txBox="1"/>
+          <p:nvPr/>
+        </p:nvSpPr>
+        <p:spPr>
+          <a:xfrm>
+            <a:off x="713232" y="1627631"/>
+            <a:ext cx="2542032" cy="219456"/>
+          </a:xfrm>
+          <a:prstGeom prst="rect">
+            <a:avLst/>
+          </a:prstGeom>
+          <a:noFill/>
+        </p:spPr>
+        <p:txBody>
+          <a:bodyPr wrap="square" lIns="0" rIns="0" tIns="0" bIns="0" anchor="t">
+            <a:spAutoFit/>
+          </a:bodyPr>
+          <a:lstStyle/>
+          <a:p>
+            <a:pPr algn="l">
+              <a:lnSpc>
+                <a:spcPct val="112000"/>
+              </a:lnSpc>
+              <a:spcAft>
+                <a:spcPts val="0"/>
+              </a:spcAft>
+            </a:pPr>
+            <a:r>
+              <a:rPr sz="980" b="1">
+                <a:solidFill>
+                  <a:srgbClr val="8CA0BE"/>
+                </a:solidFill>
+                <a:latin typeface="Consolas"/>
+              </a:rPr>
+              <a:t>TOOLS USED</a:t>
+            </a:r>
+          </a:p>
+        </p:txBody>
+      </p:sp>
+      <p:sp>
+        <p:nvSpPr>
+          <p:cNvPr id="9" name="Rounded Rectangle 8"/>
+          <p:cNvSpPr/>
+          <p:nvPr/>
+        </p:nvSpPr>
+        <p:spPr>
+          <a:xfrm>
+            <a:off x="713232" y="1947672"/>
+            <a:ext cx="1216152" cy="932688"/>
+          </a:xfrm>
+          <a:prstGeom prst="roundRect">
+            <a:avLst>
+              <a:gd name="adj" fmla="val 8000"/>
+            </a:avLst>
+          </a:prstGeom>
+          <a:solidFill>
+            <a:srgbClr val="162136"/>
+          </a:solidFill>
+          <a:ln w="12700">
+            <a:solidFill>
+              <a:srgbClr val="1A2540"/>
+            </a:solidFill>
+          </a:ln>
+          <a:effectLst/>
+        </p:spPr>
+        <p:style>
+          <a:lnRef idx="1">
+            <a:schemeClr val="accent1"/>
+          </a:lnRef>
+          <a:fillRef idx="3">
+            <a:schemeClr val="accent1"/>
+          </a:fillRef>
+          <a:effectRef idx="2">
+            <a:schemeClr val="accent1"/>
+          </a:effectRef>
+          <a:fontRef idx="minor">
+            <a:schemeClr val="lt1"/>
+          </a:fontRef>
+        </p:style>
+        <p:txBody>
+          <a:bodyPr rtlCol="0" anchor="ctr"/>
+          <a:lstStyle/>
+          <a:p>
+            <a:pPr algn="ctr"/>
+          </a:p>
+        </p:txBody>
+      </p:sp>
+      <p:pic>
+        <p:nvPicPr>
+          <p:cNvPr id="10" name="Picture 9" descr="python.png"/>
+          <p:cNvPicPr>
+            <a:picLocks noChangeAspect="1"/>
+          </p:cNvPicPr>
+          <p:nvPr/>
+        </p:nvPicPr>
+        <p:blipFill>
+          <a:blip r:embed="rId2"/>
+          <a:stretch>
+            <a:fillRect/>
+          </a:stretch>
+        </p:blipFill>
+        <p:spPr>
+          <a:xfrm>
+            <a:off x="1129284" y="2029967"/>
+            <a:ext cx="384048" cy="384048"/>
+          </a:xfrm>
+          <a:prstGeom prst="rect">
+            <a:avLst/>
+          </a:prstGeom>
+        </p:spPr>
+      </p:pic>
+      <p:sp>
+        <p:nvSpPr>
+          <p:cNvPr id="11" name="TextBox 10"/>
+          <p:cNvSpPr txBox="1"/>
+          <p:nvPr/>
+        </p:nvSpPr>
+        <p:spPr>
+          <a:xfrm>
+            <a:off x="758952" y="2478024"/>
+            <a:ext cx="1124712" cy="228600"/>
+          </a:xfrm>
+          <a:prstGeom prst="rect">
+            <a:avLst/>
+          </a:prstGeom>
+          <a:noFill/>
+        </p:spPr>
+        <p:txBody>
+          <a:bodyPr wrap="square" lIns="0" rIns="0" tIns="0" bIns="0" anchor="t">
+            <a:spAutoFit/>
+          </a:bodyPr>
+          <a:lstStyle/>
+          <a:p>
+            <a:pPr algn="ctr">
+              <a:lnSpc>
+                <a:spcPct val="112000"/>
+              </a:lnSpc>
+              <a:spcAft>
+                <a:spcPts val="0"/>
+              </a:spcAft>
+            </a:pPr>
+            <a:r>
+              <a:rPr sz="919" b="1">
+                <a:solidFill>
+                  <a:srgbClr val="EAF0F7"/>
+                </a:solidFill>
+                <a:latin typeface="Segoe UI"/>
+              </a:rPr>
+              <a:t>Python</a:t>
+            </a:r>
+          </a:p>
+        </p:txBody>
+      </p:sp>
+      <p:sp>
+        <p:nvSpPr>
+          <p:cNvPr id="12" name="Rounded Rectangle 11"/>
+          <p:cNvSpPr/>
+          <p:nvPr/>
+        </p:nvSpPr>
+        <p:spPr>
+          <a:xfrm>
+            <a:off x="2039112" y="1947672"/>
+            <a:ext cx="1216152" cy="932688"/>
+          </a:xfrm>
+          <a:prstGeom prst="roundRect">
+            <a:avLst>
+              <a:gd name="adj" fmla="val 8000"/>
+            </a:avLst>
+          </a:prstGeom>
+          <a:solidFill>
+            <a:srgbClr val="162136"/>
+          </a:solidFill>
+          <a:ln w="12700">
+            <a:solidFill>
+              <a:srgbClr val="1A2540"/>
+            </a:solidFill>
+          </a:ln>
+          <a:effectLst/>
+        </p:spPr>
+        <p:style>
+          <a:lnRef idx="1">
+            <a:schemeClr val="accent1"/>
+          </a:lnRef>
+          <a:fillRef idx="3">
+            <a:schemeClr val="accent1"/>
+          </a:fillRef>
+          <a:effectRef idx="2">
+            <a:schemeClr val="accent1"/>
+          </a:effectRef>
+          <a:fontRef idx="minor">
+            <a:schemeClr val="lt1"/>
+          </a:fontRef>
+        </p:style>
+        <p:txBody>
+          <a:bodyPr rtlCol="0" anchor="ctr"/>
+          <a:lstStyle/>
+          <a:p>
+            <a:pPr algn="ctr"/>
+          </a:p>
+        </p:txBody>
+      </p:sp>
+      <p:pic>
+        <p:nvPicPr>
+          <p:cNvPr id="13" name="Picture 12" descr="pandas.png"/>
+          <p:cNvPicPr>
+            <a:picLocks noChangeAspect="1"/>
+          </p:cNvPicPr>
+          <p:nvPr/>
+        </p:nvPicPr>
+        <p:blipFill>
+          <a:blip r:embed="rId3"/>
+          <a:stretch>
+            <a:fillRect/>
+          </a:stretch>
+        </p:blipFill>
+        <p:spPr>
+          <a:xfrm>
+            <a:off x="2455164" y="2029967"/>
+            <a:ext cx="384048" cy="384048"/>
+          </a:xfrm>
+          <a:prstGeom prst="rect">
+            <a:avLst/>
+          </a:prstGeom>
+        </p:spPr>
+      </p:pic>
+      <p:sp>
+        <p:nvSpPr>
+          <p:cNvPr id="14" name="TextBox 13"/>
+          <p:cNvSpPr txBox="1"/>
+          <p:nvPr/>
+        </p:nvSpPr>
+        <p:spPr>
+          <a:xfrm>
+            <a:off x="2084832" y="2478024"/>
+            <a:ext cx="1124712" cy="228600"/>
+          </a:xfrm>
+          <a:prstGeom prst="rect">
+            <a:avLst/>
+          </a:prstGeom>
+          <a:noFill/>
+        </p:spPr>
+        <p:txBody>
+          <a:bodyPr wrap="square" lIns="0" rIns="0" tIns="0" bIns="0" anchor="t">
+            <a:spAutoFit/>
+          </a:bodyPr>
+          <a:lstStyle/>
+          <a:p>
+            <a:pPr algn="ctr">
+              <a:lnSpc>
+                <a:spcPct val="112000"/>
+              </a:lnSpc>
+              <a:spcAft>
+                <a:spcPts val="0"/>
+              </a:spcAft>
+            </a:pPr>
+            <a:r>
+              <a:rPr sz="919" b="1">
+                <a:solidFill>
+                  <a:srgbClr val="EAF0F7"/>
+                </a:solidFill>
+                <a:latin typeface="Segoe UI"/>
+              </a:rPr>
+              <a:t>Pandas</a:t>
+            </a:r>
+          </a:p>
+        </p:txBody>
+      </p:sp>
+      <p:sp>
+        <p:nvSpPr>
+          <p:cNvPr id="15" name="Rounded Rectangle 14"/>
+          <p:cNvSpPr/>
+          <p:nvPr/>
+        </p:nvSpPr>
+        <p:spPr>
+          <a:xfrm>
+            <a:off x="713232" y="2953512"/>
+            <a:ext cx="1216152" cy="932688"/>
+          </a:xfrm>
+          <a:prstGeom prst="roundRect">
+            <a:avLst>
+              <a:gd name="adj" fmla="val 8000"/>
+            </a:avLst>
+          </a:prstGeom>
+          <a:solidFill>
+            <a:srgbClr val="162136"/>
+          </a:solidFill>
+          <a:ln w="12700">
+            <a:solidFill>
+              <a:srgbClr val="1A2540"/>
+            </a:solidFill>
+          </a:ln>
+          <a:effectLst/>
+        </p:spPr>
+        <p:style>
+          <a:lnRef idx="1">
+            <a:schemeClr val="accent1"/>
+          </a:lnRef>
+          <a:fillRef idx="3">
+            <a:schemeClr val="accent1"/>
+          </a:fillRef>
+          <a:effectRef idx="2">
+            <a:schemeClr val="accent1"/>
+          </a:effectRef>
+          <a:fontRef idx="minor">
+            <a:schemeClr val="lt1"/>
+          </a:fontRef>
+        </p:style>
+        <p:txBody>
+          <a:bodyPr rtlCol="0" anchor="ctr"/>
+          <a:lstStyle/>
+          <a:p>
+            <a:pPr algn="ctr"/>
+          </a:p>
+        </p:txBody>
+      </p:sp>
+      <p:pic>
+        <p:nvPicPr>
+          <p:cNvPr id="16" name="Picture 15" descr="scikitlearn.png"/>
+          <p:cNvPicPr>
+            <a:picLocks noChangeAspect="1"/>
+          </p:cNvPicPr>
+          <p:nvPr/>
+        </p:nvPicPr>
+        <p:blipFill>
+          <a:blip r:embed="rId4"/>
+          <a:stretch>
+            <a:fillRect/>
+          </a:stretch>
+        </p:blipFill>
+        <p:spPr>
+          <a:xfrm>
+            <a:off x="1129284" y="3035808"/>
+            <a:ext cx="384048" cy="384048"/>
+          </a:xfrm>
+          <a:prstGeom prst="rect">
+            <a:avLst/>
+          </a:prstGeom>
+        </p:spPr>
+      </p:pic>
+      <p:sp>
+        <p:nvSpPr>
+          <p:cNvPr id="17" name="TextBox 16"/>
+          <p:cNvSpPr txBox="1"/>
+          <p:nvPr/>
+        </p:nvSpPr>
+        <p:spPr>
+          <a:xfrm>
+            <a:off x="758952" y="3483864"/>
+            <a:ext cx="1124712" cy="228600"/>
+          </a:xfrm>
+          <a:prstGeom prst="rect">
+            <a:avLst/>
+          </a:prstGeom>
+          <a:noFill/>
+        </p:spPr>
+        <p:txBody>
+          <a:bodyPr wrap="square" lIns="0" rIns="0" tIns="0" bIns="0" anchor="t">
+            <a:spAutoFit/>
+          </a:bodyPr>
+          <a:lstStyle/>
+          <a:p>
+            <a:pPr algn="ctr">
+              <a:lnSpc>
+                <a:spcPct val="112000"/>
+              </a:lnSpc>
+              <a:spcAft>
+                <a:spcPts val="0"/>
+              </a:spcAft>
+            </a:pPr>
+            <a:r>
+              <a:rPr sz="919" b="1">
+                <a:solidFill>
+                  <a:srgbClr val="EAF0F7"/>
+                </a:solidFill>
+                <a:latin typeface="Segoe UI"/>
+              </a:rPr>
+              <a:t>Scikit-learn</a:t>
+            </a:r>
+          </a:p>
+        </p:txBody>
+      </p:sp>
+      <p:sp>
+        <p:nvSpPr>
+          <p:cNvPr id="18" name="Rounded Rectangle 17"/>
+          <p:cNvSpPr/>
+          <p:nvPr/>
+        </p:nvSpPr>
+        <p:spPr>
+          <a:xfrm>
+            <a:off x="2039112" y="2953512"/>
+            <a:ext cx="1216152" cy="932688"/>
+          </a:xfrm>
+          <a:prstGeom prst="roundRect">
+            <a:avLst>
+              <a:gd name="adj" fmla="val 8000"/>
+            </a:avLst>
+          </a:prstGeom>
+          <a:solidFill>
+            <a:srgbClr val="162136"/>
+          </a:solidFill>
+          <a:ln w="12700">
+            <a:solidFill>
+              <a:srgbClr val="1A2540"/>
+            </a:solidFill>
+          </a:ln>
+          <a:effectLst/>
+        </p:spPr>
+        <p:style>
+          <a:lnRef idx="1">
+            <a:schemeClr val="accent1"/>
+          </a:lnRef>
+          <a:fillRef idx="3">
+            <a:schemeClr val="accent1"/>
+          </a:fillRef>
+          <a:effectRef idx="2">
+            <a:schemeClr val="accent1"/>
+          </a:effectRef>
+          <a:fontRef idx="minor">
+            <a:schemeClr val="lt1"/>
+          </a:fontRef>
+        </p:style>
+        <p:txBody>
+          <a:bodyPr rtlCol="0" anchor="ctr"/>
+          <a:lstStyle/>
+          <a:p>
+            <a:pPr algn="ctr"/>
+          </a:p>
+        </p:txBody>
+      </p:sp>
+      <p:pic>
+        <p:nvPicPr>
+          <p:cNvPr id="19" name="Picture 18" descr="flask.png"/>
+          <p:cNvPicPr>
+            <a:picLocks noChangeAspect="1"/>
+          </p:cNvPicPr>
+          <p:nvPr/>
+        </p:nvPicPr>
+        <p:blipFill>
+          <a:blip r:embed="rId5"/>
+          <a:stretch>
+            <a:fillRect/>
+          </a:stretch>
+        </p:blipFill>
+        <p:spPr>
+          <a:xfrm>
+            <a:off x="2455164" y="3035808"/>
+            <a:ext cx="384048" cy="384048"/>
+          </a:xfrm>
+          <a:prstGeom prst="rect">
+            <a:avLst/>
+          </a:prstGeom>
+        </p:spPr>
+      </p:pic>
+      <p:sp>
+        <p:nvSpPr>
+          <p:cNvPr id="20" name="TextBox 19"/>
+          <p:cNvSpPr txBox="1"/>
+          <p:nvPr/>
+        </p:nvSpPr>
+        <p:spPr>
+          <a:xfrm>
+            <a:off x="2084832" y="3483864"/>
+            <a:ext cx="1124712" cy="228600"/>
+          </a:xfrm>
+          <a:prstGeom prst="rect">
+            <a:avLst/>
+          </a:prstGeom>
+          <a:noFill/>
+        </p:spPr>
+        <p:txBody>
+          <a:bodyPr wrap="square" lIns="0" rIns="0" tIns="0" bIns="0" anchor="t">
+            <a:spAutoFit/>
+          </a:bodyPr>
+          <a:lstStyle/>
+          <a:p>
+            <a:pPr algn="ctr">
+              <a:lnSpc>
+                <a:spcPct val="112000"/>
+              </a:lnSpc>
+              <a:spcAft>
+                <a:spcPts val="0"/>
+              </a:spcAft>
+            </a:pPr>
+            <a:r>
+              <a:rPr sz="919" b="1">
+                <a:solidFill>
+                  <a:srgbClr val="EAF0F7"/>
+                </a:solidFill>
+                <a:latin typeface="Segoe UI"/>
+              </a:rPr>
+              <a:t>Flask</a:t>
+            </a:r>
+          </a:p>
+        </p:txBody>
+      </p:sp>
+      <p:sp>
+        <p:nvSpPr>
+          <p:cNvPr id="21" name="Rounded Rectangle 20"/>
+          <p:cNvSpPr/>
+          <p:nvPr/>
+        </p:nvSpPr>
+        <p:spPr>
+          <a:xfrm>
+            <a:off x="713232" y="3959352"/>
+            <a:ext cx="1216152" cy="932688"/>
+          </a:xfrm>
+          <a:prstGeom prst="roundRect">
+            <a:avLst>
+              <a:gd name="adj" fmla="val 8000"/>
+            </a:avLst>
+          </a:prstGeom>
+          <a:solidFill>
+            <a:srgbClr val="162136"/>
+          </a:solidFill>
+          <a:ln w="12700">
+            <a:solidFill>
+              <a:srgbClr val="1A2540"/>
+            </a:solidFill>
+          </a:ln>
+          <a:effectLst/>
+        </p:spPr>
+        <p:style>
+          <a:lnRef idx="1">
+            <a:schemeClr val="accent1"/>
+          </a:lnRef>
+          <a:fillRef idx="3">
+            <a:schemeClr val="accent1"/>
+          </a:fillRef>
+          <a:effectRef idx="2">
+            <a:schemeClr val="accent1"/>
+          </a:effectRef>
+          <a:fontRef idx="minor">
+            <a:schemeClr val="lt1"/>
+          </a:fontRef>
+        </p:style>
+        <p:txBody>
+          <a:bodyPr rtlCol="0" anchor="ctr"/>
+          <a:lstStyle/>
+          <a:p>
+            <a:pPr algn="ctr"/>
+          </a:p>
+        </p:txBody>
+      </p:sp>
+      <p:pic>
+        <p:nvPicPr>
+          <p:cNvPr id="22" name="Picture 21" descr="fastapi.png"/>
+          <p:cNvPicPr>
+            <a:picLocks noChangeAspect="1"/>
+          </p:cNvPicPr>
+          <p:nvPr/>
+        </p:nvPicPr>
+        <p:blipFill>
+          <a:blip r:embed="rId6"/>
+          <a:stretch>
+            <a:fillRect/>
+          </a:stretch>
+        </p:blipFill>
+        <p:spPr>
+          <a:xfrm>
+            <a:off x="1129284" y="4041648"/>
+            <a:ext cx="384048" cy="384048"/>
+          </a:xfrm>
+          <a:prstGeom prst="rect">
+            <a:avLst/>
+          </a:prstGeom>
+        </p:spPr>
+      </p:pic>
+      <p:sp>
+        <p:nvSpPr>
+          <p:cNvPr id="23" name="TextBox 22"/>
+          <p:cNvSpPr txBox="1"/>
+          <p:nvPr/>
+        </p:nvSpPr>
+        <p:spPr>
+          <a:xfrm>
+            <a:off x="758952" y="4489704"/>
+            <a:ext cx="1124712" cy="228600"/>
+          </a:xfrm>
+          <a:prstGeom prst="rect">
+            <a:avLst/>
+          </a:prstGeom>
+          <a:noFill/>
+        </p:spPr>
+        <p:txBody>
+          <a:bodyPr wrap="square" lIns="0" rIns="0" tIns="0" bIns="0" anchor="t">
+            <a:spAutoFit/>
+          </a:bodyPr>
+          <a:lstStyle/>
+          <a:p>
+            <a:pPr algn="ctr">
+              <a:lnSpc>
+                <a:spcPct val="112000"/>
+              </a:lnSpc>
+              <a:spcAft>
+                <a:spcPts val="0"/>
+              </a:spcAft>
+            </a:pPr>
+            <a:r>
+              <a:rPr sz="919" b="1">
+                <a:solidFill>
+                  <a:srgbClr val="EAF0F7"/>
+                </a:solidFill>
+                <a:latin typeface="Segoe UI"/>
+              </a:rPr>
+              <a:t>FastAPI</a:t>
+            </a:r>
+          </a:p>
+        </p:txBody>
+      </p:sp>
+      <p:sp>
+        <p:nvSpPr>
+          <p:cNvPr id="24" name="Rounded Rectangle 23"/>
+          <p:cNvSpPr/>
+          <p:nvPr/>
+        </p:nvSpPr>
+        <p:spPr>
+          <a:xfrm>
+            <a:off x="2039112" y="3959352"/>
+            <a:ext cx="1216152" cy="932688"/>
+          </a:xfrm>
+          <a:prstGeom prst="roundRect">
+            <a:avLst>
+              <a:gd name="adj" fmla="val 8000"/>
+            </a:avLst>
+          </a:prstGeom>
+          <a:solidFill>
+            <a:srgbClr val="162136"/>
+          </a:solidFill>
+          <a:ln w="12700">
+            <a:solidFill>
+              <a:srgbClr val="1A2540"/>
+            </a:solidFill>
+          </a:ln>
+          <a:effectLst/>
+        </p:spPr>
+        <p:style>
+          <a:lnRef idx="1">
+            <a:schemeClr val="accent1"/>
+          </a:lnRef>
+          <a:fillRef idx="3">
+            <a:schemeClr val="accent1"/>
+          </a:fillRef>
+          <a:effectRef idx="2">
+            <a:schemeClr val="accent1"/>
+          </a:effectRef>
+          <a:fontRef idx="minor">
+            <a:schemeClr val="lt1"/>
+          </a:fontRef>
+        </p:style>
+        <p:txBody>
+          <a:bodyPr rtlCol="0" anchor="ctr"/>
+          <a:lstStyle/>
+          <a:p>
+            <a:pPr algn="ctr"/>
+          </a:p>
+        </p:txBody>
+      </p:sp>
+      <p:pic>
+        <p:nvPicPr>
+          <p:cNvPr id="25" name="Picture 24" descr="docker.png"/>
+          <p:cNvPicPr>
+            <a:picLocks noChangeAspect="1"/>
+          </p:cNvPicPr>
+          <p:nvPr/>
+        </p:nvPicPr>
+        <p:blipFill>
+          <a:blip r:embed="rId7"/>
+          <a:stretch>
+            <a:fillRect/>
+          </a:stretch>
+        </p:blipFill>
+        <p:spPr>
+          <a:xfrm>
+            <a:off x="2455164" y="4041648"/>
+            <a:ext cx="384048" cy="384048"/>
+          </a:xfrm>
+          <a:prstGeom prst="rect">
+            <a:avLst/>
+          </a:prstGeom>
+        </p:spPr>
+      </p:pic>
+      <p:sp>
+        <p:nvSpPr>
+          <p:cNvPr id="26" name="TextBox 25"/>
+          <p:cNvSpPr txBox="1"/>
+          <p:nvPr/>
+        </p:nvSpPr>
+        <p:spPr>
+          <a:xfrm>
+            <a:off x="2084832" y="4489704"/>
+            <a:ext cx="1124712" cy="228600"/>
+          </a:xfrm>
+          <a:prstGeom prst="rect">
+            <a:avLst/>
+          </a:prstGeom>
+          <a:noFill/>
+        </p:spPr>
+        <p:txBody>
+          <a:bodyPr wrap="square" lIns="0" rIns="0" tIns="0" bIns="0" anchor="t">
+            <a:spAutoFit/>
+          </a:bodyPr>
+          <a:lstStyle/>
+          <a:p>
+            <a:pPr algn="ctr">
+              <a:lnSpc>
+                <a:spcPct val="112000"/>
+              </a:lnSpc>
+              <a:spcAft>
+                <a:spcPts val="0"/>
+              </a:spcAft>
+            </a:pPr>
+            <a:r>
+              <a:rPr sz="919" b="1">
+                <a:solidFill>
+                  <a:srgbClr val="EAF0F7"/>
+                </a:solidFill>
+                <a:latin typeface="Segoe UI"/>
+              </a:rPr>
+              <a:t>Docker</a:t>
+            </a:r>
+          </a:p>
+        </p:txBody>
+      </p:sp>
+      <p:sp>
+        <p:nvSpPr>
+          <p:cNvPr id="27" name="Rounded Rectangle 26"/>
+          <p:cNvSpPr/>
+          <p:nvPr/>
+        </p:nvSpPr>
+        <p:spPr>
+          <a:xfrm>
+            <a:off x="713232" y="4965192"/>
+            <a:ext cx="1216152" cy="932688"/>
+          </a:xfrm>
+          <a:prstGeom prst="roundRect">
+            <a:avLst>
+              <a:gd name="adj" fmla="val 8000"/>
+            </a:avLst>
+          </a:prstGeom>
+          <a:solidFill>
+            <a:srgbClr val="162136"/>
+          </a:solidFill>
+          <a:ln w="12700">
+            <a:solidFill>
+              <a:srgbClr val="1A2540"/>
+            </a:solidFill>
+          </a:ln>
+          <a:effectLst/>
+        </p:spPr>
+        <p:style>
+          <a:lnRef idx="1">
+            <a:schemeClr val="accent1"/>
+          </a:lnRef>
+          <a:fillRef idx="3">
+            <a:schemeClr val="accent1"/>
+          </a:fillRef>
+          <a:effectRef idx="2">
+            <a:schemeClr val="accent1"/>
+          </a:effectRef>
+          <a:fontRef idx="minor">
+            <a:schemeClr val="lt1"/>
+          </a:fontRef>
+        </p:style>
+        <p:txBody>
+          <a:bodyPr rtlCol="0" anchor="ctr"/>
+          <a:lstStyle/>
+          <a:p>
+            <a:pPr algn="ctr"/>
+          </a:p>
+        </p:txBody>
+      </p:sp>
+      <p:pic>
+        <p:nvPicPr>
+          <p:cNvPr id="28" name="Picture 27" descr="powerbi.png"/>
+          <p:cNvPicPr>
+            <a:picLocks noChangeAspect="1"/>
+          </p:cNvPicPr>
+          <p:nvPr/>
+        </p:nvPicPr>
+        <p:blipFill>
+          <a:blip r:embed="rId8"/>
+          <a:stretch>
+            <a:fillRect/>
+          </a:stretch>
+        </p:blipFill>
+        <p:spPr>
+          <a:xfrm>
+            <a:off x="1177360" y="5047488"/>
+            <a:ext cx="287895" cy="384048"/>
+          </a:xfrm>
+          <a:prstGeom prst="rect">
+            <a:avLst/>
+          </a:prstGeom>
+        </p:spPr>
+      </p:pic>
+      <p:sp>
+        <p:nvSpPr>
+          <p:cNvPr id="29" name="TextBox 28"/>
+          <p:cNvSpPr txBox="1"/>
+          <p:nvPr/>
+        </p:nvSpPr>
+        <p:spPr>
+          <a:xfrm>
+            <a:off x="758952" y="5495544"/>
+            <a:ext cx="1124712" cy="228600"/>
+          </a:xfrm>
+          <a:prstGeom prst="rect">
+            <a:avLst/>
+          </a:prstGeom>
+          <a:noFill/>
+        </p:spPr>
+        <p:txBody>
+          <a:bodyPr wrap="square" lIns="0" rIns="0" tIns="0" bIns="0" anchor="t">
+            <a:spAutoFit/>
+          </a:bodyPr>
+          <a:lstStyle/>
+          <a:p>
+            <a:pPr algn="ctr">
+              <a:lnSpc>
+                <a:spcPct val="112000"/>
+              </a:lnSpc>
+              <a:spcAft>
+                <a:spcPts val="0"/>
+              </a:spcAft>
+            </a:pPr>
+            <a:r>
+              <a:rPr sz="919" b="1">
+                <a:solidFill>
+                  <a:srgbClr val="EAF0F7"/>
+                </a:solidFill>
+                <a:latin typeface="Segoe UI"/>
+              </a:rPr>
+              <a:t>Power BI</a:t>
+            </a:r>
+          </a:p>
+        </p:txBody>
+      </p:sp>
+      <p:sp>
+        <p:nvSpPr>
+          <p:cNvPr id="30" name="Rounded Rectangle 29"/>
+          <p:cNvSpPr/>
+          <p:nvPr/>
+        </p:nvSpPr>
+        <p:spPr>
+          <a:xfrm>
+            <a:off x="2039112" y="4965192"/>
+            <a:ext cx="1216152" cy="932688"/>
+          </a:xfrm>
+          <a:prstGeom prst="roundRect">
+            <a:avLst>
+              <a:gd name="adj" fmla="val 8000"/>
+            </a:avLst>
+          </a:prstGeom>
+          <a:solidFill>
+            <a:srgbClr val="162136"/>
+          </a:solidFill>
+          <a:ln w="12700">
+            <a:solidFill>
+              <a:srgbClr val="1A2540"/>
+            </a:solidFill>
+          </a:ln>
+          <a:effectLst/>
+        </p:spPr>
+        <p:style>
+          <a:lnRef idx="1">
+            <a:schemeClr val="accent1"/>
+          </a:lnRef>
+          <a:fillRef idx="3">
+            <a:schemeClr val="accent1"/>
+          </a:fillRef>
+          <a:effectRef idx="2">
+            <a:schemeClr val="accent1"/>
+          </a:effectRef>
+          <a:fontRef idx="minor">
+            <a:schemeClr val="lt1"/>
+          </a:fontRef>
+        </p:style>
+        <p:txBody>
+          <a:bodyPr rtlCol="0" anchor="ctr"/>
+          <a:lstStyle/>
+          <a:p>
+            <a:pPr algn="ctr"/>
+          </a:p>
+        </p:txBody>
+      </p:sp>
+      <p:pic>
+        <p:nvPicPr>
+          <p:cNvPr id="31" name="Picture 30" descr="github.png"/>
+          <p:cNvPicPr>
+            <a:picLocks noChangeAspect="1"/>
+          </p:cNvPicPr>
+          <p:nvPr/>
+        </p:nvPicPr>
+        <p:blipFill>
+          <a:blip r:embed="rId9"/>
+          <a:stretch>
+            <a:fillRect/>
+          </a:stretch>
+        </p:blipFill>
+        <p:spPr>
+          <a:xfrm>
+            <a:off x="2455164" y="5047488"/>
+            <a:ext cx="384048" cy="384048"/>
+          </a:xfrm>
+          <a:prstGeom prst="rect">
+            <a:avLst/>
+          </a:prstGeom>
+        </p:spPr>
+      </p:pic>
+      <p:sp>
+        <p:nvSpPr>
+          <p:cNvPr id="32" name="TextBox 31"/>
+          <p:cNvSpPr txBox="1"/>
+          <p:nvPr/>
+        </p:nvSpPr>
+        <p:spPr>
+          <a:xfrm>
+            <a:off x="2084832" y="5495544"/>
+            <a:ext cx="1124712" cy="228600"/>
+          </a:xfrm>
+          <a:prstGeom prst="rect">
+            <a:avLst/>
+          </a:prstGeom>
+          <a:noFill/>
+        </p:spPr>
+        <p:txBody>
+          <a:bodyPr wrap="square" lIns="0" rIns="0" tIns="0" bIns="0" anchor="t">
+            <a:spAutoFit/>
+          </a:bodyPr>
+          <a:lstStyle/>
+          <a:p>
+            <a:pPr algn="ctr">
+              <a:lnSpc>
+                <a:spcPct val="112000"/>
+              </a:lnSpc>
+              <a:spcAft>
+                <a:spcPts val="0"/>
+              </a:spcAft>
+            </a:pPr>
+            <a:r>
+              <a:rPr sz="919" b="1">
+                <a:solidFill>
+                  <a:srgbClr val="EAF0F7"/>
+                </a:solidFill>
+                <a:latin typeface="Segoe UI"/>
+              </a:rPr>
+              <a:t>GitHub</a:t>
+            </a:r>
+          </a:p>
+        </p:txBody>
+      </p:sp>
+      <p:sp>
+        <p:nvSpPr>
+          <p:cNvPr id="33" name="Rounded Rectangle 32"/>
+          <p:cNvSpPr/>
+          <p:nvPr/>
+        </p:nvSpPr>
+        <p:spPr>
+          <a:xfrm>
+            <a:off x="3584448" y="1517904"/>
+            <a:ext cx="8040319" cy="1078992"/>
+          </a:xfrm>
+          <a:prstGeom prst="roundRect">
+            <a:avLst>
+              <a:gd name="adj" fmla="val 8000"/>
+            </a:avLst>
+          </a:prstGeom>
+          <a:solidFill>
+            <a:srgbClr val="111A2C"/>
+          </a:solidFill>
+          <a:ln w="12700">
+            <a:solidFill>
+              <a:srgbClr val="223049"/>
+            </a:solidFill>
+          </a:ln>
+          <a:effectLst/>
+        </p:spPr>
+        <p:style>
+          <a:lnRef idx="1">
+            <a:schemeClr val="accent1"/>
+          </a:lnRef>
+          <a:fillRef idx="3">
+            <a:schemeClr val="accent1"/>
+          </a:fillRef>
+          <a:effectRef idx="2">
+            <a:schemeClr val="accent1"/>
+          </a:effectRef>
+          <a:fontRef idx="minor">
+            <a:schemeClr val="lt1"/>
+          </a:fontRef>
+        </p:style>
+        <p:txBody>
+          <a:bodyPr rtlCol="0" anchor="ctr"/>
+          <a:lstStyle/>
+          <a:p>
+            <a:pPr algn="ctr"/>
+          </a:p>
+        </p:txBody>
+      </p:sp>
+      <p:sp>
+        <p:nvSpPr>
+          <p:cNvPr id="34" name="Rectangle 33"/>
+          <p:cNvSpPr/>
+          <p:nvPr/>
+        </p:nvSpPr>
+        <p:spPr>
+          <a:xfrm>
+            <a:off x="3584448" y="1517904"/>
+            <a:ext cx="41148" cy="1078992"/>
+          </a:xfrm>
+          <a:prstGeom prst="rect">
+            <a:avLst/>
+          </a:prstGeom>
+          <a:solidFill>
+            <a:srgbClr val="2FD8B4"/>
+          </a:solidFill>
+          <a:ln>
+            <a:noFill/>
+          </a:ln>
+          <a:effectLst/>
+        </p:spPr>
+        <p:style>
+          <a:lnRef idx="1">
+            <a:schemeClr val="accent1"/>
+          </a:lnRef>
+          <a:fillRef idx="3">
+            <a:schemeClr val="accent1"/>
+          </a:fillRef>
+          <a:effectRef idx="2">
+            <a:schemeClr val="accent1"/>
+          </a:effectRef>
+          <a:fontRef idx="minor">
+            <a:schemeClr val="lt1"/>
+          </a:fontRef>
+        </p:style>
+        <p:txBody>
+          <a:bodyPr rtlCol="0" anchor="ctr"/>
+          <a:lstStyle/>
+          <a:p>
+            <a:pPr algn="ctr"/>
+          </a:p>
+        </p:txBody>
+      </p:sp>
+      <p:sp>
+        <p:nvSpPr>
+          <p:cNvPr id="35" name="TextBox 34"/>
+          <p:cNvSpPr txBox="1"/>
+          <p:nvPr/>
+        </p:nvSpPr>
+        <p:spPr>
+          <a:xfrm>
+            <a:off x="3785616" y="1645919"/>
+            <a:ext cx="7656271" cy="841247"/>
+          </a:xfrm>
+          <a:prstGeom prst="rect">
+            <a:avLst/>
+          </a:prstGeom>
+          <a:noFill/>
+        </p:spPr>
+        <p:txBody>
+          <a:bodyPr wrap="square" lIns="0" rIns="0" tIns="0" bIns="0" anchor="t">
+            <a:spAutoFit/>
+          </a:bodyPr>
+          <a:lstStyle/>
+          <a:p>
+            <a:pPr algn="l">
+              <a:lnSpc>
+                <a:spcPct val="112000"/>
+              </a:lnSpc>
+              <a:spcAft>
+                <a:spcPts val="500"/>
+              </a:spcAft>
+            </a:pPr>
+            <a:r>
+              <a:rPr sz="1019" b="1">
+                <a:solidFill>
+                  <a:srgbClr val="2FD8B4"/>
+                </a:solidFill>
+                <a:latin typeface="Consolas"/>
+              </a:rPr>
+              <a:t>LANGUAGE &amp; DATA</a:t>
+            </a:r>
+          </a:p>
+          <a:p>
+            <a:pPr algn="l">
+              <a:lnSpc>
+                <a:spcPct val="118000"/>
+              </a:lnSpc>
+              <a:spcAft>
+                <a:spcPts val="0"/>
+              </a:spcAft>
+            </a:pPr>
+            <a:r>
+              <a:rPr sz="1270" b="0">
+                <a:solidFill>
+                  <a:srgbClr val="EAF0F7"/>
+                </a:solidFill>
+                <a:latin typeface="Segoe UI"/>
+              </a:rPr>
+              <a:t>Python 3.11 · Pandas · NumPy · SQL Server · SQLAlchemy</a:t>
+            </a:r>
+          </a:p>
+        </p:txBody>
+      </p:sp>
+      <p:sp>
+        <p:nvSpPr>
+          <p:cNvPr id="36" name="Rounded Rectangle 35"/>
+          <p:cNvSpPr/>
+          <p:nvPr/>
+        </p:nvSpPr>
+        <p:spPr>
+          <a:xfrm>
+            <a:off x="3584448" y="2724911"/>
+            <a:ext cx="8040319" cy="1078992"/>
+          </a:xfrm>
+          <a:prstGeom prst="roundRect">
+            <a:avLst>
+              <a:gd name="adj" fmla="val 8000"/>
+            </a:avLst>
+          </a:prstGeom>
+          <a:solidFill>
+            <a:srgbClr val="111A2C"/>
+          </a:solidFill>
+          <a:ln w="12700">
+            <a:solidFill>
+              <a:srgbClr val="223049"/>
+            </a:solidFill>
+          </a:ln>
+          <a:effectLst/>
+        </p:spPr>
+        <p:style>
+          <a:lnRef idx="1">
+            <a:schemeClr val="accent1"/>
+          </a:lnRef>
+          <a:fillRef idx="3">
+            <a:schemeClr val="accent1"/>
+          </a:fillRef>
+          <a:effectRef idx="2">
+            <a:schemeClr val="accent1"/>
+          </a:effectRef>
+          <a:fontRef idx="minor">
+            <a:schemeClr val="lt1"/>
+          </a:fontRef>
+        </p:style>
+        <p:txBody>
+          <a:bodyPr rtlCol="0" anchor="ctr"/>
+          <a:lstStyle/>
+          <a:p>
+            <a:pPr algn="ctr"/>
+          </a:p>
+        </p:txBody>
+      </p:sp>
+      <p:sp>
+        <p:nvSpPr>
+          <p:cNvPr id="37" name="Rectangle 36"/>
+          <p:cNvSpPr/>
+          <p:nvPr/>
+        </p:nvSpPr>
+        <p:spPr>
+          <a:xfrm>
+            <a:off x="3584448" y="2724911"/>
+            <a:ext cx="41148" cy="1078992"/>
+          </a:xfrm>
+          <a:prstGeom prst="rect">
+            <a:avLst/>
+          </a:prstGeom>
+          <a:solidFill>
+            <a:srgbClr val="F5A623"/>
+          </a:solidFill>
+          <a:ln>
+            <a:noFill/>
+          </a:ln>
+          <a:effectLst/>
+        </p:spPr>
+        <p:style>
+          <a:lnRef idx="1">
+            <a:schemeClr val="accent1"/>
+          </a:lnRef>
+          <a:fillRef idx="3">
+            <a:schemeClr val="accent1"/>
+          </a:fillRef>
+          <a:effectRef idx="2">
+            <a:schemeClr val="accent1"/>
+          </a:effectRef>
+          <a:fontRef idx="minor">
+            <a:schemeClr val="lt1"/>
+          </a:fontRef>
+        </p:style>
+        <p:txBody>
+          <a:bodyPr rtlCol="0" anchor="ctr"/>
+          <a:lstStyle/>
+          <a:p>
+            <a:pPr algn="ctr"/>
+          </a:p>
+        </p:txBody>
+      </p:sp>
+      <p:sp>
+        <p:nvSpPr>
+          <p:cNvPr id="38" name="TextBox 37"/>
+          <p:cNvSpPr txBox="1"/>
+          <p:nvPr/>
+        </p:nvSpPr>
+        <p:spPr>
+          <a:xfrm>
+            <a:off x="3785616" y="2852927"/>
+            <a:ext cx="7656271" cy="841247"/>
+          </a:xfrm>
+          <a:prstGeom prst="rect">
+            <a:avLst/>
+          </a:prstGeom>
+          <a:noFill/>
+        </p:spPr>
+        <p:txBody>
+          <a:bodyPr wrap="square" lIns="0" rIns="0" tIns="0" bIns="0" anchor="t">
+            <a:spAutoFit/>
+          </a:bodyPr>
+          <a:lstStyle/>
+          <a:p>
+            <a:pPr algn="l">
+              <a:lnSpc>
+                <a:spcPct val="112000"/>
+              </a:lnSpc>
+              <a:spcAft>
+                <a:spcPts val="500"/>
+              </a:spcAft>
+            </a:pPr>
+            <a:r>
+              <a:rPr sz="1019" b="1">
+                <a:solidFill>
+                  <a:srgbClr val="F5A623"/>
+                </a:solidFill>
+                <a:latin typeface="Consolas"/>
+              </a:rPr>
+              <a:t>MACHINE LEARNING</a:t>
+            </a:r>
+          </a:p>
+          <a:p>
+            <a:pPr algn="l">
+              <a:lnSpc>
+                <a:spcPct val="118000"/>
+              </a:lnSpc>
+              <a:spcAft>
+                <a:spcPts val="0"/>
+              </a:spcAft>
+            </a:pPr>
+            <a:r>
+              <a:rPr sz="1270" b="0">
+                <a:solidFill>
+                  <a:srgbClr val="EAF0F7"/>
+                </a:solidFill>
+                <a:latin typeface="Segoe UI"/>
+              </a:rPr>
+              <a:t>Scikit-learn · Logistic Regression (deployed) · Random Forest</a:t>
+            </a:r>
+          </a:p>
+          <a:p>
+            <a:pPr algn="l">
+              <a:lnSpc>
+                <a:spcPct val="118000"/>
+              </a:lnSpc>
+              <a:spcAft>
+                <a:spcPts val="0"/>
+              </a:spcAft>
+            </a:pPr>
+            <a:r>
+              <a:rPr sz="1270" b="0">
+                <a:solidFill>
+                  <a:srgbClr val="EAF0F7"/>
+                </a:solidFill>
+                <a:latin typeface="Segoe UI"/>
+              </a:rPr>
+              <a:t>XGBoost · LightGBM · Joblib · SHAP (research only)</a:t>
+            </a:r>
+          </a:p>
+        </p:txBody>
+      </p:sp>
+      <p:sp>
+        <p:nvSpPr>
+          <p:cNvPr id="39" name="Rounded Rectangle 38"/>
+          <p:cNvSpPr/>
+          <p:nvPr/>
+        </p:nvSpPr>
+        <p:spPr>
+          <a:xfrm>
+            <a:off x="3584448" y="3931920"/>
+            <a:ext cx="8040319" cy="1078992"/>
+          </a:xfrm>
+          <a:prstGeom prst="roundRect">
+            <a:avLst>
+              <a:gd name="adj" fmla="val 8000"/>
+            </a:avLst>
+          </a:prstGeom>
+          <a:solidFill>
+            <a:srgbClr val="111A2C"/>
+          </a:solidFill>
+          <a:ln w="12700">
+            <a:solidFill>
+              <a:srgbClr val="223049"/>
+            </a:solidFill>
+          </a:ln>
+          <a:effectLst/>
+        </p:spPr>
+        <p:style>
+          <a:lnRef idx="1">
+            <a:schemeClr val="accent1"/>
+          </a:lnRef>
+          <a:fillRef idx="3">
+            <a:schemeClr val="accent1"/>
+          </a:fillRef>
+          <a:effectRef idx="2">
+            <a:schemeClr val="accent1"/>
+          </a:effectRef>
+          <a:fontRef idx="minor">
+            <a:schemeClr val="lt1"/>
+          </a:fontRef>
+        </p:style>
+        <p:txBody>
+          <a:bodyPr rtlCol="0" anchor="ctr"/>
+          <a:lstStyle/>
+          <a:p>
+            <a:pPr algn="ctr"/>
+          </a:p>
+        </p:txBody>
+      </p:sp>
+      <p:sp>
+        <p:nvSpPr>
+          <p:cNvPr id="40" name="Rectangle 39"/>
+          <p:cNvSpPr/>
+          <p:nvPr/>
+        </p:nvSpPr>
+        <p:spPr>
+          <a:xfrm>
+            <a:off x="3584448" y="3931920"/>
+            <a:ext cx="41148" cy="1078992"/>
+          </a:xfrm>
+          <a:prstGeom prst="rect">
+            <a:avLst/>
+          </a:prstGeom>
+          <a:solidFill>
+            <a:srgbClr val="4C8DFF"/>
+          </a:solidFill>
+          <a:ln>
+            <a:noFill/>
+          </a:ln>
+          <a:effectLst/>
+        </p:spPr>
+        <p:style>
+          <a:lnRef idx="1">
+            <a:schemeClr val="accent1"/>
+          </a:lnRef>
+          <a:fillRef idx="3">
+            <a:schemeClr val="accent1"/>
+          </a:fillRef>
+          <a:effectRef idx="2">
+            <a:schemeClr val="accent1"/>
+          </a:effectRef>
+          <a:fontRef idx="minor">
+            <a:schemeClr val="lt1"/>
+          </a:fontRef>
+        </p:style>
+        <p:txBody>
+          <a:bodyPr rtlCol="0" anchor="ctr"/>
+          <a:lstStyle/>
+          <a:p>
+            <a:pPr algn="ctr"/>
+          </a:p>
+        </p:txBody>
+      </p:sp>
+      <p:sp>
+        <p:nvSpPr>
+          <p:cNvPr id="41" name="TextBox 40"/>
+          <p:cNvSpPr txBox="1"/>
+          <p:nvPr/>
+        </p:nvSpPr>
+        <p:spPr>
+          <a:xfrm>
+            <a:off x="3785616" y="4059935"/>
+            <a:ext cx="7656271" cy="841247"/>
+          </a:xfrm>
+          <a:prstGeom prst="rect">
+            <a:avLst/>
+          </a:prstGeom>
+          <a:noFill/>
+        </p:spPr>
+        <p:txBody>
+          <a:bodyPr wrap="square" lIns="0" rIns="0" tIns="0" bIns="0" anchor="t">
+            <a:spAutoFit/>
+          </a:bodyPr>
+          <a:lstStyle/>
+          <a:p>
+            <a:pPr algn="l">
+              <a:lnSpc>
+                <a:spcPct val="112000"/>
+              </a:lnSpc>
+              <a:spcAft>
+                <a:spcPts val="500"/>
+              </a:spcAft>
+            </a:pPr>
+            <a:r>
+              <a:rPr sz="1019" b="1">
+                <a:solidFill>
+                  <a:srgbClr val="4C8DFF"/>
+                </a:solidFill>
+                <a:latin typeface="Consolas"/>
+              </a:rPr>
+              <a:t>WEB APPLICATION</a:t>
+            </a:r>
+          </a:p>
+          <a:p>
+            <a:pPr algn="l">
+              <a:lnSpc>
+                <a:spcPct val="118000"/>
+              </a:lnSpc>
+              <a:spcAft>
+                <a:spcPts val="0"/>
+              </a:spcAft>
+            </a:pPr>
+            <a:r>
+              <a:rPr sz="1270" b="0">
+                <a:solidFill>
+                  <a:srgbClr val="EAF0F7"/>
+                </a:solidFill>
+                <a:latin typeface="Segoe UI"/>
+              </a:rPr>
+              <a:t>Flask · Jinja2 · HTML5/CSS3 · Vanilla JavaScript · Gunicorn</a:t>
+            </a:r>
+          </a:p>
+        </p:txBody>
+      </p:sp>
+      <p:sp>
+        <p:nvSpPr>
+          <p:cNvPr id="42" name="Rounded Rectangle 41"/>
+          <p:cNvSpPr/>
+          <p:nvPr/>
+        </p:nvSpPr>
+        <p:spPr>
+          <a:xfrm>
+            <a:off x="3584448" y="5138927"/>
+            <a:ext cx="8040319" cy="1078992"/>
+          </a:xfrm>
+          <a:prstGeom prst="roundRect">
+            <a:avLst>
+              <a:gd name="adj" fmla="val 8000"/>
+            </a:avLst>
+          </a:prstGeom>
+          <a:solidFill>
+            <a:srgbClr val="111A2C"/>
+          </a:solidFill>
+          <a:ln w="12700">
+            <a:solidFill>
+              <a:srgbClr val="223049"/>
+            </a:solidFill>
+          </a:ln>
+          <a:effectLst/>
+        </p:spPr>
+        <p:style>
+          <a:lnRef idx="1">
+            <a:schemeClr val="accent1"/>
+          </a:lnRef>
+          <a:fillRef idx="3">
+            <a:schemeClr val="accent1"/>
+          </a:fillRef>
+          <a:effectRef idx="2">
+            <a:schemeClr val="accent1"/>
+          </a:effectRef>
+          <a:fontRef idx="minor">
+            <a:schemeClr val="lt1"/>
+          </a:fontRef>
+        </p:style>
+        <p:txBody>
+          <a:bodyPr rtlCol="0" anchor="ctr"/>
+          <a:lstStyle/>
+          <a:p>
+            <a:pPr algn="ctr"/>
+          </a:p>
+        </p:txBody>
+      </p:sp>
+      <p:sp>
+        <p:nvSpPr>
+          <p:cNvPr id="43" name="Rectangle 42"/>
+          <p:cNvSpPr/>
+          <p:nvPr/>
+        </p:nvSpPr>
+        <p:spPr>
+          <a:xfrm>
+            <a:off x="3584448" y="5138927"/>
+            <a:ext cx="41148" cy="1078992"/>
+          </a:xfrm>
+          <a:prstGeom prst="rect">
+            <a:avLst/>
+          </a:prstGeom>
+          <a:solidFill>
+            <a:srgbClr val="FF5C6C"/>
+          </a:solidFill>
+          <a:ln>
+            <a:noFill/>
+          </a:ln>
+          <a:effectLst/>
+        </p:spPr>
+        <p:style>
+          <a:lnRef idx="1">
+            <a:schemeClr val="accent1"/>
+          </a:lnRef>
+          <a:fillRef idx="3">
+            <a:schemeClr val="accent1"/>
+          </a:fillRef>
+          <a:effectRef idx="2">
+            <a:schemeClr val="accent1"/>
+          </a:effectRef>
+          <a:fontRef idx="minor">
+            <a:schemeClr val="lt1"/>
+          </a:fontRef>
+        </p:style>
+        <p:txBody>
+          <a:bodyPr rtlCol="0" anchor="ctr"/>
+          <a:lstStyle/>
+          <a:p>
+            <a:pPr algn="ctr"/>
+          </a:p>
+        </p:txBody>
+      </p:sp>
+      <p:sp>
+        <p:nvSpPr>
+          <p:cNvPr id="44" name="TextBox 43"/>
+          <p:cNvSpPr txBox="1"/>
+          <p:nvPr/>
+        </p:nvSpPr>
+        <p:spPr>
+          <a:xfrm>
+            <a:off x="3785616" y="5266943"/>
+            <a:ext cx="7656271" cy="841247"/>
+          </a:xfrm>
+          <a:prstGeom prst="rect">
+            <a:avLst/>
+          </a:prstGeom>
+          <a:noFill/>
+        </p:spPr>
+        <p:txBody>
+          <a:bodyPr wrap="square" lIns="0" rIns="0" tIns="0" bIns="0" anchor="t">
+            <a:spAutoFit/>
+          </a:bodyPr>
+          <a:lstStyle/>
+          <a:p>
+            <a:pPr algn="l">
+              <a:lnSpc>
+                <a:spcPct val="112000"/>
+              </a:lnSpc>
+              <a:spcAft>
+                <a:spcPts val="500"/>
+              </a:spcAft>
+            </a:pPr>
+            <a:r>
+              <a:rPr sz="1019" b="1">
+                <a:solidFill>
+                  <a:srgbClr val="FF5C6C"/>
+                </a:solidFill>
+                <a:latin typeface="Consolas"/>
+              </a:rPr>
+              <a:t>API &amp; DELIVERY</a:t>
+            </a:r>
+          </a:p>
+          <a:p>
+            <a:pPr algn="l">
+              <a:lnSpc>
+                <a:spcPct val="118000"/>
+              </a:lnSpc>
+              <a:spcAft>
+                <a:spcPts val="0"/>
+              </a:spcAft>
+            </a:pPr>
+            <a:r>
+              <a:rPr sz="1270" b="0">
+                <a:solidFill>
+                  <a:srgbClr val="EAF0F7"/>
+                </a:solidFill>
+                <a:latin typeface="Segoe UI"/>
+              </a:rPr>
+              <a:t>FastAPI + Pydantic · Docker · Render · Git/GitHub</a:t>
+            </a:r>
+          </a:p>
+          <a:p>
+            <a:pPr algn="l">
+              <a:lnSpc>
+                <a:spcPct val="118000"/>
+              </a:lnSpc>
+              <a:spcAft>
+                <a:spcPts val="0"/>
+              </a:spcAft>
+            </a:pPr>
+            <a:r>
+              <a:rPr sz="1270" b="0">
+                <a:solidFill>
+                  <a:srgbClr val="EAF0F7"/>
+                </a:solidFill>
+                <a:latin typeface="Segoe UI"/>
+              </a:rPr>
+              <a:t>Power BI · .pbix report · .pbit template</a:t>
+            </a:r>
+          </a:p>
+        </p:txBody>
+      </p:sp>
+      <p:sp>
+        <p:nvSpPr>
+          <p:cNvPr id="45" name="Rectangle 44"/>
+          <p:cNvSpPr/>
+          <p:nvPr/>
+        </p:nvSpPr>
+        <p:spPr>
+          <a:xfrm>
+            <a:off x="566928" y="6309360"/>
+            <a:ext cx="743145" cy="43891"/>
+          </a:xfrm>
+          <a:prstGeom prst="rect">
+            <a:avLst/>
+          </a:prstGeom>
+          <a:solidFill>
+            <a:srgbClr val="2FD8B4"/>
+          </a:solidFill>
+          <a:ln>
+            <a:noFill/>
+          </a:ln>
+          <a:effectLst/>
+        </p:spPr>
+        <p:style>
+          <a:lnRef idx="1">
+            <a:schemeClr val="accent1"/>
+          </a:lnRef>
+          <a:fillRef idx="3">
+            <a:schemeClr val="accent1"/>
+          </a:fillRef>
+          <a:effectRef idx="2">
+            <a:schemeClr val="accent1"/>
+          </a:effectRef>
+          <a:fontRef idx="minor">
+            <a:schemeClr val="lt1"/>
+          </a:fontRef>
+        </p:style>
+        <p:txBody>
+          <a:bodyPr rtlCol="0" anchor="ctr"/>
+          <a:lstStyle/>
+          <a:p>
+            <a:pPr algn="ctr"/>
+          </a:p>
+        </p:txBody>
+      </p:sp>
+      <p:sp>
+        <p:nvSpPr>
+          <p:cNvPr id="46" name="Rectangle 45"/>
+          <p:cNvSpPr/>
+          <p:nvPr/>
+        </p:nvSpPr>
+        <p:spPr>
+          <a:xfrm>
+            <a:off x="1360365" y="6309360"/>
+            <a:ext cx="743145" cy="43891"/>
+          </a:xfrm>
+          <a:prstGeom prst="rect">
+            <a:avLst/>
+          </a:prstGeom>
+          <a:solidFill>
+            <a:srgbClr val="2FD8B4"/>
+          </a:solidFill>
+          <a:ln>
+            <a:noFill/>
+          </a:ln>
+          <a:effectLst/>
+        </p:spPr>
+        <p:style>
+          <a:lnRef idx="1">
+            <a:schemeClr val="accent1"/>
+          </a:lnRef>
+          <a:fillRef idx="3">
+            <a:schemeClr val="accent1"/>
+          </a:fillRef>
+          <a:effectRef idx="2">
+            <a:schemeClr val="accent1"/>
+          </a:effectRef>
+          <a:fontRef idx="minor">
+            <a:schemeClr val="lt1"/>
+          </a:fontRef>
+        </p:style>
+        <p:txBody>
+          <a:bodyPr rtlCol="0" anchor="ctr"/>
+          <a:lstStyle/>
+          <a:p>
+            <a:pPr algn="ctr"/>
+          </a:p>
+        </p:txBody>
+      </p:sp>
+      <p:sp>
+        <p:nvSpPr>
+          <p:cNvPr id="47" name="Rectangle 46"/>
+          <p:cNvSpPr/>
+          <p:nvPr/>
+        </p:nvSpPr>
+        <p:spPr>
+          <a:xfrm>
+            <a:off x="2153803" y="6309360"/>
+            <a:ext cx="743145" cy="43891"/>
+          </a:xfrm>
+          <a:prstGeom prst="rect">
+            <a:avLst/>
+          </a:prstGeom>
+          <a:solidFill>
+            <a:srgbClr val="2FD8B4"/>
+          </a:solidFill>
+          <a:ln>
+            <a:noFill/>
+          </a:ln>
+          <a:effectLst/>
+        </p:spPr>
+        <p:style>
+          <a:lnRef idx="1">
+            <a:schemeClr val="accent1"/>
+          </a:lnRef>
+          <a:fillRef idx="3">
+            <a:schemeClr val="accent1"/>
+          </a:fillRef>
+          <a:effectRef idx="2">
+            <a:schemeClr val="accent1"/>
+          </a:effectRef>
+          <a:fontRef idx="minor">
+            <a:schemeClr val="lt1"/>
+          </a:fontRef>
+        </p:style>
+        <p:txBody>
+          <a:bodyPr rtlCol="0" anchor="ctr"/>
+          <a:lstStyle/>
+          <a:p>
+            <a:pPr algn="ctr"/>
+          </a:p>
+        </p:txBody>
+      </p:sp>
+      <p:sp>
+        <p:nvSpPr>
+          <p:cNvPr id="48" name="Rectangle 47"/>
+          <p:cNvSpPr/>
+          <p:nvPr/>
+        </p:nvSpPr>
+        <p:spPr>
+          <a:xfrm>
+            <a:off x="2947241" y="6309360"/>
+            <a:ext cx="743145" cy="43891"/>
+          </a:xfrm>
+          <a:prstGeom prst="rect">
+            <a:avLst/>
+          </a:prstGeom>
+          <a:solidFill>
+            <a:srgbClr val="2FD8B4"/>
+          </a:solidFill>
+          <a:ln>
+            <a:noFill/>
+          </a:ln>
+          <a:effectLst/>
+        </p:spPr>
+        <p:style>
+          <a:lnRef idx="1">
+            <a:schemeClr val="accent1"/>
+          </a:lnRef>
+          <a:fillRef idx="3">
+            <a:schemeClr val="accent1"/>
+          </a:fillRef>
+          <a:effectRef idx="2">
+            <a:schemeClr val="accent1"/>
+          </a:effectRef>
+          <a:fontRef idx="minor">
+            <a:schemeClr val="lt1"/>
+          </a:fontRef>
+        </p:style>
+        <p:txBody>
+          <a:bodyPr rtlCol="0" anchor="ctr"/>
+          <a:lstStyle/>
+          <a:p>
+            <a:pPr algn="ctr"/>
+          </a:p>
+        </p:txBody>
+      </p:sp>
+      <p:sp>
+        <p:nvSpPr>
+          <p:cNvPr id="49" name="Rectangle 48"/>
+          <p:cNvSpPr/>
+          <p:nvPr/>
+        </p:nvSpPr>
+        <p:spPr>
+          <a:xfrm>
+            <a:off x="3740679" y="6309360"/>
+            <a:ext cx="743145" cy="43891"/>
+          </a:xfrm>
+          <a:prstGeom prst="rect">
+            <a:avLst/>
+          </a:prstGeom>
+          <a:solidFill>
+            <a:srgbClr val="2FD8B4"/>
+          </a:solidFill>
+          <a:ln>
+            <a:noFill/>
+          </a:ln>
+          <a:effectLst/>
+        </p:spPr>
+        <p:style>
+          <a:lnRef idx="1">
+            <a:schemeClr val="accent1"/>
+          </a:lnRef>
+          <a:fillRef idx="3">
+            <a:schemeClr val="accent1"/>
+          </a:fillRef>
+          <a:effectRef idx="2">
+            <a:schemeClr val="accent1"/>
+          </a:effectRef>
+          <a:fontRef idx="minor">
+            <a:schemeClr val="lt1"/>
+          </a:fontRef>
+        </p:style>
+        <p:txBody>
+          <a:bodyPr rtlCol="0" anchor="ctr"/>
+          <a:lstStyle/>
+          <a:p>
+            <a:pPr algn="ctr"/>
+          </a:p>
+        </p:txBody>
+      </p:sp>
+      <p:sp>
+        <p:nvSpPr>
+          <p:cNvPr id="50" name="Rectangle 49"/>
+          <p:cNvSpPr/>
+          <p:nvPr/>
+        </p:nvSpPr>
+        <p:spPr>
+          <a:xfrm>
+            <a:off x="4534117" y="6309360"/>
+            <a:ext cx="743145" cy="43891"/>
+          </a:xfrm>
+          <a:prstGeom prst="rect">
+            <a:avLst/>
+          </a:prstGeom>
+          <a:solidFill>
+            <a:srgbClr val="2FD8B4"/>
+          </a:solidFill>
+          <a:ln>
+            <a:noFill/>
+          </a:ln>
+          <a:effectLst/>
+        </p:spPr>
+        <p:style>
+          <a:lnRef idx="1">
+            <a:schemeClr val="accent1"/>
+          </a:lnRef>
+          <a:fillRef idx="3">
+            <a:schemeClr val="accent1"/>
+          </a:fillRef>
+          <a:effectRef idx="2">
+            <a:schemeClr val="accent1"/>
+          </a:effectRef>
+          <a:fontRef idx="minor">
+            <a:schemeClr val="lt1"/>
+          </a:fontRef>
+        </p:style>
+        <p:txBody>
+          <a:bodyPr rtlCol="0" anchor="ctr"/>
+          <a:lstStyle/>
+          <a:p>
+            <a:pPr algn="ctr"/>
+          </a:p>
+        </p:txBody>
+      </p:sp>
+      <p:sp>
+        <p:nvSpPr>
+          <p:cNvPr id="51" name="Rectangle 50"/>
+          <p:cNvSpPr/>
+          <p:nvPr/>
+        </p:nvSpPr>
+        <p:spPr>
+          <a:xfrm>
+            <a:off x="5327555" y="6309360"/>
+            <a:ext cx="743145" cy="43891"/>
+          </a:xfrm>
+          <a:prstGeom prst="rect">
+            <a:avLst/>
+          </a:prstGeom>
+          <a:solidFill>
+            <a:srgbClr val="2FD8B4"/>
+          </a:solidFill>
+          <a:ln>
+            <a:noFill/>
+          </a:ln>
+          <a:effectLst/>
+        </p:spPr>
+        <p:style>
+          <a:lnRef idx="1">
+            <a:schemeClr val="accent1"/>
+          </a:lnRef>
+          <a:fillRef idx="3">
+            <a:schemeClr val="accent1"/>
+          </a:fillRef>
+          <a:effectRef idx="2">
+            <a:schemeClr val="accent1"/>
+          </a:effectRef>
+          <a:fontRef idx="minor">
+            <a:schemeClr val="lt1"/>
+          </a:fontRef>
+        </p:style>
+        <p:txBody>
+          <a:bodyPr rtlCol="0" anchor="ctr"/>
+          <a:lstStyle/>
+          <a:p>
+            <a:pPr algn="ctr"/>
+          </a:p>
+        </p:txBody>
+      </p:sp>
+      <p:sp>
+        <p:nvSpPr>
+          <p:cNvPr id="52" name="Rectangle 51"/>
+          <p:cNvSpPr/>
+          <p:nvPr/>
+        </p:nvSpPr>
+        <p:spPr>
+          <a:xfrm>
+            <a:off x="6120993" y="6309360"/>
+            <a:ext cx="743145" cy="43891"/>
+          </a:xfrm>
+          <a:prstGeom prst="rect">
+            <a:avLst/>
+          </a:prstGeom>
+          <a:solidFill>
+            <a:srgbClr val="2FD8B4"/>
+          </a:solidFill>
+          <a:ln>
+            <a:noFill/>
+          </a:ln>
+          <a:effectLst/>
+        </p:spPr>
+        <p:style>
+          <a:lnRef idx="1">
+            <a:schemeClr val="accent1"/>
+          </a:lnRef>
+          <a:fillRef idx="3">
+            <a:schemeClr val="accent1"/>
+          </a:fillRef>
+          <a:effectRef idx="2">
+            <a:schemeClr val="accent1"/>
+          </a:effectRef>
+          <a:fontRef idx="minor">
+            <a:schemeClr val="lt1"/>
+          </a:fontRef>
+        </p:style>
+        <p:txBody>
+          <a:bodyPr rtlCol="0" anchor="ctr"/>
+          <a:lstStyle/>
+          <a:p>
+            <a:pPr algn="ctr"/>
+          </a:p>
+        </p:txBody>
+      </p:sp>
+      <p:sp>
+        <p:nvSpPr>
+          <p:cNvPr id="53" name="Rectangle 52"/>
+          <p:cNvSpPr/>
+          <p:nvPr/>
+        </p:nvSpPr>
+        <p:spPr>
+          <a:xfrm>
+            <a:off x="6914431" y="6309360"/>
+            <a:ext cx="743145" cy="43891"/>
+          </a:xfrm>
+          <a:prstGeom prst="rect">
+            <a:avLst/>
+          </a:prstGeom>
+          <a:solidFill>
+            <a:srgbClr val="2FD8B4"/>
+          </a:solidFill>
+          <a:ln>
+            <a:noFill/>
+          </a:ln>
+          <a:effectLst/>
+        </p:spPr>
+        <p:style>
+          <a:lnRef idx="1">
+            <a:schemeClr val="accent1"/>
+          </a:lnRef>
+          <a:fillRef idx="3">
+            <a:schemeClr val="accent1"/>
+          </a:fillRef>
+          <a:effectRef idx="2">
+            <a:schemeClr val="accent1"/>
+          </a:effectRef>
+          <a:fontRef idx="minor">
+            <a:schemeClr val="lt1"/>
+          </a:fontRef>
+        </p:style>
+        <p:txBody>
+          <a:bodyPr rtlCol="0" anchor="ctr"/>
+          <a:lstStyle/>
+          <a:p>
+            <a:pPr algn="ctr"/>
+          </a:p>
+        </p:txBody>
+      </p:sp>
+      <p:sp>
+        <p:nvSpPr>
+          <p:cNvPr id="54" name="Rectangle 53"/>
+          <p:cNvSpPr/>
+          <p:nvPr/>
+        </p:nvSpPr>
+        <p:spPr>
+          <a:xfrm>
+            <a:off x="7707869" y="6309360"/>
+            <a:ext cx="743145" cy="43891"/>
+          </a:xfrm>
+          <a:prstGeom prst="rect">
+            <a:avLst/>
+          </a:prstGeom>
+          <a:solidFill>
+            <a:srgbClr val="2FD8B4"/>
+          </a:solidFill>
+          <a:ln>
+            <a:noFill/>
+          </a:ln>
+          <a:effectLst/>
+        </p:spPr>
+        <p:style>
+          <a:lnRef idx="1">
+            <a:schemeClr val="accent1"/>
+          </a:lnRef>
+          <a:fillRef idx="3">
+            <a:schemeClr val="accent1"/>
+          </a:fillRef>
+          <a:effectRef idx="2">
+            <a:schemeClr val="accent1"/>
+          </a:effectRef>
+          <a:fontRef idx="minor">
+            <a:schemeClr val="lt1"/>
+          </a:fontRef>
+        </p:style>
+        <p:txBody>
+          <a:bodyPr rtlCol="0" anchor="ctr"/>
+          <a:lstStyle/>
+          <a:p>
+            <a:pPr algn="ctr"/>
+          </a:p>
+        </p:txBody>
+      </p:sp>
+      <p:sp>
+        <p:nvSpPr>
+          <p:cNvPr id="55" name="Rectangle 54"/>
+          <p:cNvSpPr/>
+          <p:nvPr/>
+        </p:nvSpPr>
+        <p:spPr>
+          <a:xfrm>
+            <a:off x="8501307" y="6309360"/>
+            <a:ext cx="743145" cy="43891"/>
+          </a:xfrm>
+          <a:prstGeom prst="rect">
+            <a:avLst/>
+          </a:prstGeom>
+          <a:solidFill>
+            <a:srgbClr val="2FD8B4"/>
+          </a:solidFill>
+          <a:ln>
+            <a:noFill/>
+          </a:ln>
+          <a:effectLst/>
+        </p:spPr>
+        <p:style>
+          <a:lnRef idx="1">
+            <a:schemeClr val="accent1"/>
+          </a:lnRef>
+          <a:fillRef idx="3">
+            <a:schemeClr val="accent1"/>
+          </a:fillRef>
+          <a:effectRef idx="2">
+            <a:schemeClr val="accent1"/>
+          </a:effectRef>
+          <a:fontRef idx="minor">
+            <a:schemeClr val="lt1"/>
+          </a:fontRef>
+        </p:style>
+        <p:txBody>
+          <a:bodyPr rtlCol="0" anchor="ctr"/>
+          <a:lstStyle/>
+          <a:p>
+            <a:pPr algn="ctr"/>
+          </a:p>
+        </p:txBody>
+      </p:sp>
+      <p:sp>
+        <p:nvSpPr>
+          <p:cNvPr id="56" name="Rectangle 55"/>
+          <p:cNvSpPr/>
+          <p:nvPr/>
+        </p:nvSpPr>
+        <p:spPr>
+          <a:xfrm>
+            <a:off x="9294745" y="6309360"/>
+            <a:ext cx="743145" cy="43891"/>
+          </a:xfrm>
+          <a:prstGeom prst="rect">
+            <a:avLst/>
+          </a:prstGeom>
+          <a:solidFill>
+            <a:srgbClr val="2FD8B4"/>
+          </a:solidFill>
+          <a:ln>
+            <a:noFill/>
+          </a:ln>
+          <a:effectLst/>
+        </p:spPr>
+        <p:style>
+          <a:lnRef idx="1">
+            <a:schemeClr val="accent1"/>
+          </a:lnRef>
+          <a:fillRef idx="3">
+            <a:schemeClr val="accent1"/>
+          </a:fillRef>
+          <a:effectRef idx="2">
+            <a:schemeClr val="accent1"/>
+          </a:effectRef>
+          <a:fontRef idx="minor">
+            <a:schemeClr val="lt1"/>
+          </a:fontRef>
+        </p:style>
+        <p:txBody>
+          <a:bodyPr rtlCol="0" anchor="ctr"/>
+          <a:lstStyle/>
+          <a:p>
+            <a:pPr algn="ctr"/>
+          </a:p>
+        </p:txBody>
+      </p:sp>
+      <p:sp>
+        <p:nvSpPr>
+          <p:cNvPr id="57" name="Rectangle 56"/>
+          <p:cNvSpPr/>
+          <p:nvPr/>
+        </p:nvSpPr>
+        <p:spPr>
+          <a:xfrm>
+            <a:off x="10088183" y="6309360"/>
+            <a:ext cx="743145" cy="43891"/>
+          </a:xfrm>
+          <a:prstGeom prst="rect">
+            <a:avLst/>
+          </a:prstGeom>
+          <a:solidFill>
+            <a:srgbClr val="2FD8B4"/>
+          </a:solidFill>
+          <a:ln>
+            <a:noFill/>
+          </a:ln>
+          <a:effectLst/>
+        </p:spPr>
+        <p:style>
+          <a:lnRef idx="1">
+            <a:schemeClr val="accent1"/>
+          </a:lnRef>
+          <a:fillRef idx="3">
+            <a:schemeClr val="accent1"/>
+          </a:fillRef>
+          <a:effectRef idx="2">
+            <a:schemeClr val="accent1"/>
+          </a:effectRef>
+          <a:fontRef idx="minor">
+            <a:schemeClr val="lt1"/>
+          </a:fontRef>
+        </p:style>
+        <p:txBody>
+          <a:bodyPr rtlCol="0" anchor="ctr"/>
+          <a:lstStyle/>
+          <a:p>
+            <a:pPr algn="ctr"/>
+          </a:p>
+        </p:txBody>
+      </p:sp>
+      <p:sp>
+        <p:nvSpPr>
+          <p:cNvPr id="58" name="Rectangle 57"/>
+          <p:cNvSpPr/>
+          <p:nvPr/>
+        </p:nvSpPr>
+        <p:spPr>
+          <a:xfrm>
+            <a:off x="10881621" y="6309360"/>
+            <a:ext cx="743145" cy="43891"/>
+          </a:xfrm>
+          <a:prstGeom prst="rect">
+            <a:avLst/>
+          </a:prstGeom>
+          <a:solidFill>
+            <a:srgbClr val="2FD8B4"/>
+          </a:solidFill>
+          <a:ln>
+            <a:noFill/>
+          </a:ln>
+          <a:effectLst/>
+        </p:spPr>
+        <p:style>
+          <a:lnRef idx="1">
+            <a:schemeClr val="accent1"/>
+          </a:lnRef>
+          <a:fillRef idx="3">
+            <a:schemeClr val="accent1"/>
+          </a:fillRef>
+          <a:effectRef idx="2">
+            <a:schemeClr val="accent1"/>
+          </a:effectRef>
+          <a:fontRef idx="minor">
+            <a:schemeClr val="lt1"/>
+          </a:fontRef>
+        </p:style>
+        <p:txBody>
+          <a:bodyPr rtlCol="0" anchor="ctr"/>
+          <a:lstStyle/>
+          <a:p>
+            <a:pPr algn="ctr"/>
+          </a:p>
+        </p:txBody>
+      </p:sp>
+      <p:sp>
+        <p:nvSpPr>
+          <p:cNvPr id="59" name="Rectangle 58"/>
+          <p:cNvSpPr/>
+          <p:nvPr/>
+        </p:nvSpPr>
+        <p:spPr>
+          <a:xfrm>
+            <a:off x="566928" y="6455664"/>
+            <a:ext cx="11057839" cy="9144"/>
+          </a:xfrm>
+          <a:prstGeom prst="rect">
+            <a:avLst/>
+          </a:prstGeom>
+          <a:solidFill>
+            <a:srgbClr val="223049"/>
+          </a:solidFill>
+          <a:ln>
+            <a:noFill/>
+          </a:ln>
+          <a:effectLst/>
+        </p:spPr>
+        <p:style>
+          <a:lnRef idx="1">
+            <a:schemeClr val="accent1"/>
+          </a:lnRef>
+          <a:fillRef idx="3">
+            <a:schemeClr val="accent1"/>
+          </a:fillRef>
+          <a:effectRef idx="2">
+            <a:schemeClr val="accent1"/>
+          </a:effectRef>
+          <a:fontRef idx="minor">
+            <a:schemeClr val="lt1"/>
+          </a:fontRef>
+        </p:style>
+        <p:txBody>
+          <a:bodyPr rtlCol="0" anchor="ctr"/>
+          <a:lstStyle/>
+          <a:p>
+            <a:pPr algn="ctr"/>
+          </a:p>
+        </p:txBody>
+      </p:sp>
+      <p:sp>
+        <p:nvSpPr>
+          <p:cNvPr id="60" name="TextBox 59"/>
+          <p:cNvSpPr txBox="1"/>
+          <p:nvPr/>
+        </p:nvSpPr>
+        <p:spPr>
+          <a:xfrm>
+            <a:off x="566928" y="6510528"/>
+            <a:ext cx="9509760" cy="219456"/>
+          </a:xfrm>
+          <a:prstGeom prst="rect">
+            <a:avLst/>
+          </a:prstGeom>
+          <a:noFill/>
+        </p:spPr>
+        <p:txBody>
+          <a:bodyPr wrap="square" lIns="0" rIns="0" tIns="0" bIns="0" anchor="t">
+            <a:spAutoFit/>
+          </a:bodyPr>
+          <a:lstStyle/>
+          <a:p>
+            <a:pPr algn="l">
+              <a:lnSpc>
+                <a:spcPct val="112000"/>
+              </a:lnSpc>
+              <a:spcAft>
+                <a:spcPts val="0"/>
+              </a:spcAft>
+            </a:pPr>
+            <a:r>
+              <a:rPr sz="900" b="0">
+                <a:solidFill>
+                  <a:srgbClr val="8CA0BE"/>
+                </a:solidFill>
+                <a:latin typeface="Segoe UI"/>
+              </a:rPr>
+              <a:t>RetainIQ · Signal Ops Console</a:t>
+            </a:r>
+          </a:p>
+        </p:txBody>
+      </p:sp>
+      <p:sp>
+        <p:nvSpPr>
+          <p:cNvPr id="61" name="TextBox 60"/>
+          <p:cNvSpPr txBox="1"/>
+          <p:nvPr/>
+        </p:nvSpPr>
+        <p:spPr>
+          <a:xfrm>
+            <a:off x="10527487" y="6510528"/>
+            <a:ext cx="1097280" cy="219456"/>
+          </a:xfrm>
+          <a:prstGeom prst="rect">
+            <a:avLst/>
+          </a:prstGeom>
+          <a:noFill/>
+        </p:spPr>
+        <p:txBody>
+          <a:bodyPr wrap="square" lIns="0" rIns="0" tIns="0" bIns="0" anchor="t">
+            <a:spAutoFit/>
+          </a:bodyPr>
+          <a:lstStyle/>
+          <a:p>
+            <a:pPr algn="r">
+              <a:lnSpc>
+                <a:spcPct val="112000"/>
+              </a:lnSpc>
+              <a:spcAft>
+                <a:spcPts val="0"/>
+              </a:spcAft>
+            </a:pPr>
+            <a:r>
+              <a:rPr sz="900" b="0">
+                <a:solidFill>
+                  <a:srgbClr val="8CA0BE"/>
+                </a:solidFill>
+                <a:latin typeface="Consolas"/>
+              </a:rPr>
+              <a:t>18</a:t>
+            </a:r>
+          </a:p>
+        </p:txBody>
+      </p:sp>
+    </p:spTree>
+  </p:cSld>
+  <p:clrMapOvr>
+    <a:masterClrMapping/>
+  </p:clrMapOvr>
+</p:sld>
+</file>
+
+<file path=ppt/slides/slide19.xml><?xml version="1.0" encoding="utf-8"?>
+<p:sld xmlns:a="http://schemas.openxmlformats.org/drawingml/2006/main" xmlns:p="http://schemas.openxmlformats.org/presentationml/2006/main" xmlns:r="http://schemas.openxmlformats.org/officeDocument/2006/relationships">
+  <p:cSld>
+    <p:spTree>
+      <p:nvGrpSpPr>
+        <p:cNvPr id="1" name=""/>
+        <p:cNvGrpSpPr/>
+        <p:nvPr/>
+      </p:nvGrpSpPr>
+      <p:grpSpPr/>
+      <p:sp>
+        <p:nvSpPr>
+          <p:cNvPr id="2" name="Rectangle 1"/>
+          <p:cNvSpPr/>
+          <p:nvPr/>
+        </p:nvSpPr>
+        <p:spPr>
+          <a:xfrm>
+            <a:off x="0" y="0"/>
+            <a:ext cx="12191695" cy="6858000"/>
+          </a:xfrm>
+          <a:prstGeom prst="rect">
+            <a:avLst/>
+          </a:prstGeom>
+          <a:solidFill>
+            <a:srgbClr val="0A0F1C"/>
+          </a:solidFill>
+          <a:ln>
+            <a:noFill/>
+          </a:ln>
+          <a:effectLst/>
+        </p:spPr>
+        <p:style>
+          <a:lnRef idx="1">
+            <a:schemeClr val="accent1"/>
+          </a:lnRef>
+          <a:fillRef idx="3">
+            <a:schemeClr val="accent1"/>
+          </a:fillRef>
+          <a:effectRef idx="2">
+            <a:schemeClr val="accent1"/>
+          </a:effectRef>
+          <a:fontRef idx="minor">
+            <a:schemeClr val="lt1"/>
+          </a:fontRef>
+        </p:style>
+        <p:txBody>
+          <a:bodyPr rtlCol="0" anchor="ctr"/>
+          <a:lstStyle/>
+          <a:p>
+            <a:pPr algn="ctr"/>
+          </a:p>
+        </p:txBody>
+      </p:sp>
+      <p:sp>
+        <p:nvSpPr>
+          <p:cNvPr id="3" name="TextBox 2"/>
+          <p:cNvSpPr txBox="1"/>
+          <p:nvPr/>
+        </p:nvSpPr>
+        <p:spPr>
+          <a:xfrm>
+            <a:off x="566928" y="365760"/>
+            <a:ext cx="8229600" cy="237744"/>
+          </a:xfrm>
+          <a:prstGeom prst="rect">
+            <a:avLst/>
+          </a:prstGeom>
+          <a:noFill/>
+        </p:spPr>
+        <p:txBody>
+          <a:bodyPr wrap="square" lIns="0" rIns="0" tIns="0" bIns="0" anchor="t">
+            <a:spAutoFit/>
+          </a:bodyPr>
+          <a:lstStyle/>
+          <a:p>
+            <a:pPr algn="l">
+              <a:lnSpc>
+                <a:spcPct val="112000"/>
+              </a:lnSpc>
+              <a:spcAft>
+                <a:spcPts val="0"/>
+              </a:spcAft>
+            </a:pPr>
+            <a:r>
+              <a:rPr sz="1000" b="1">
+                <a:solidFill>
+                  <a:srgbClr val="2FD8B4"/>
+                </a:solidFill>
+                <a:latin typeface="Consolas"/>
+              </a:rPr>
+              <a:t>RESPONSIBLE AI, LIMITS &amp; THE NEXT CYCLE</a:t>
+            </a:r>
+          </a:p>
+        </p:txBody>
+      </p:sp>
+      <p:sp>
+        <p:nvSpPr>
+          <p:cNvPr id="4" name="TextBox 3"/>
+          <p:cNvSpPr txBox="1"/>
+          <p:nvPr/>
+        </p:nvSpPr>
+        <p:spPr>
+          <a:xfrm>
+            <a:off x="566928" y="576072"/>
+            <a:ext cx="11057839" cy="475488"/>
+          </a:xfrm>
+          <a:prstGeom prst="rect">
+            <a:avLst/>
+          </a:prstGeom>
+          <a:noFill/>
+        </p:spPr>
+        <p:txBody>
+          <a:bodyPr wrap="square" lIns="0" rIns="0" tIns="0" bIns="0" anchor="t">
+            <a:spAutoFit/>
+          </a:bodyPr>
+          <a:lstStyle/>
+          <a:p>
+            <a:pPr algn="l">
+              <a:lnSpc>
+                <a:spcPct val="112000"/>
+              </a:lnSpc>
+              <a:spcAft>
+                <a:spcPts val="0"/>
+              </a:spcAft>
+            </a:pPr>
+            <a:r>
+              <a:rPr sz="2600" b="1">
+                <a:solidFill>
+                  <a:srgbClr val="EAF0F7"/>
+                </a:solidFill>
+                <a:latin typeface="Segoe UI"/>
+              </a:rPr>
+              <a:t>What this model should not be trusted with</a:t>
+            </a:r>
+          </a:p>
+        </p:txBody>
+      </p:sp>
+      <p:sp>
+        <p:nvSpPr>
+          <p:cNvPr id="5" name="TextBox 4"/>
+          <p:cNvSpPr txBox="1"/>
+          <p:nvPr/>
+        </p:nvSpPr>
+        <p:spPr>
+          <a:xfrm>
+            <a:off x="566928" y="1060704"/>
+            <a:ext cx="11057839" cy="274320"/>
+          </a:xfrm>
+          <a:prstGeom prst="rect">
+            <a:avLst/>
+          </a:prstGeom>
+          <a:noFill/>
+        </p:spPr>
+        <p:txBody>
+          <a:bodyPr wrap="square" lIns="0" rIns="0" tIns="0" bIns="0" anchor="t">
+            <a:spAutoFit/>
+          </a:bodyPr>
+          <a:lstStyle/>
+          <a:p>
+            <a:pPr algn="l">
+              <a:lnSpc>
+                <a:spcPct val="112000"/>
+              </a:lnSpc>
+              <a:spcAft>
+                <a:spcPts val="0"/>
+              </a:spcAft>
+            </a:pPr>
+            <a:r>
+              <a:rPr sz="1250" b="0">
+                <a:solidFill>
+                  <a:srgbClr val="8CA0BE"/>
+                </a:solidFill>
+                <a:latin typeface="Segoe UI"/>
+              </a:rPr>
+              <a:t>Where it breaks, who it might treat unfairly, and what the next cycle fixes</a:t>
+            </a:r>
+          </a:p>
+        </p:txBody>
+      </p:sp>
+      <p:sp>
+        <p:nvSpPr>
+          <p:cNvPr id="6" name="Rectangle 5"/>
+          <p:cNvSpPr/>
+          <p:nvPr/>
+        </p:nvSpPr>
+        <p:spPr>
+          <a:xfrm>
+            <a:off x="566928" y="1371600"/>
+            <a:ext cx="11057839" cy="12801"/>
+          </a:xfrm>
+          <a:prstGeom prst="rect">
+            <a:avLst/>
+          </a:prstGeom>
+          <a:solidFill>
+            <a:srgbClr val="223049"/>
+          </a:solidFill>
+          <a:ln>
+            <a:noFill/>
+          </a:ln>
+          <a:effectLst/>
+        </p:spPr>
+        <p:style>
+          <a:lnRef idx="1">
+            <a:schemeClr val="accent1"/>
+          </a:lnRef>
+          <a:fillRef idx="3">
+            <a:schemeClr val="accent1"/>
+          </a:fillRef>
+          <a:effectRef idx="2">
+            <a:schemeClr val="accent1"/>
+          </a:effectRef>
+          <a:fontRef idx="minor">
+            <a:schemeClr val="lt1"/>
+          </a:fontRef>
+        </p:style>
+        <p:txBody>
+          <a:bodyPr rtlCol="0" anchor="ctr"/>
+          <a:lstStyle/>
+          <a:p>
+            <a:pPr algn="ctr"/>
+          </a:p>
+        </p:txBody>
+      </p:sp>
+      <p:sp>
+        <p:nvSpPr>
+          <p:cNvPr id="7" name="Rounded Rectangle 6"/>
+          <p:cNvSpPr/>
+          <p:nvPr/>
+        </p:nvSpPr>
+        <p:spPr>
+          <a:xfrm>
+            <a:off x="566928" y="1517904"/>
+            <a:ext cx="3527450" cy="4700016"/>
+          </a:xfrm>
+          <a:prstGeom prst="roundRect">
+            <a:avLst>
+              <a:gd name="adj" fmla="val 8000"/>
+            </a:avLst>
+          </a:prstGeom>
+          <a:solidFill>
+            <a:srgbClr val="111A2C"/>
+          </a:solidFill>
+          <a:ln w="15240">
+            <a:solidFill>
+              <a:srgbClr val="F5A623"/>
+            </a:solidFill>
+          </a:ln>
+          <a:effectLst/>
+        </p:spPr>
+        <p:style>
+          <a:lnRef idx="1">
+            <a:schemeClr val="accent1"/>
+          </a:lnRef>
+          <a:fillRef idx="3">
+            <a:schemeClr val="accent1"/>
+          </a:fillRef>
+          <a:effectRef idx="2">
+            <a:schemeClr val="accent1"/>
+          </a:effectRef>
+          <a:fontRef idx="minor">
+            <a:schemeClr val="lt1"/>
+          </a:fontRef>
+        </p:style>
+        <p:txBody>
+          <a:bodyPr rtlCol="0" anchor="ctr"/>
+          <a:lstStyle/>
+          <a:p>
+            <a:pPr algn="ctr"/>
+          </a:p>
+        </p:txBody>
+      </p:sp>
+      <p:sp>
+        <p:nvSpPr>
+          <p:cNvPr id="8" name="TextBox 7"/>
+          <p:cNvSpPr txBox="1"/>
+          <p:nvPr/>
+        </p:nvSpPr>
+        <p:spPr>
+          <a:xfrm>
+            <a:off x="768096" y="1682495"/>
+            <a:ext cx="3125114" cy="4370831"/>
+          </a:xfrm>
+          <a:prstGeom prst="rect">
+            <a:avLst/>
+          </a:prstGeom>
+          <a:noFill/>
+        </p:spPr>
+        <p:txBody>
+          <a:bodyPr wrap="square" lIns="0" rIns="0" tIns="0" bIns="0" anchor="t">
+            <a:spAutoFit/>
+          </a:bodyPr>
+          <a:lstStyle/>
+          <a:p>
+            <a:pPr algn="l">
+              <a:lnSpc>
+                <a:spcPct val="112000"/>
+              </a:lnSpc>
+              <a:spcAft>
+                <a:spcPts val="700"/>
+              </a:spcAft>
+            </a:pPr>
+            <a:r>
+              <a:rPr sz="1100" b="1">
+                <a:solidFill>
+                  <a:srgbClr val="F5A623"/>
+                </a:solidFill>
+                <a:latin typeface="Consolas"/>
+              </a:rPr>
+              <a:t>LIMITATIONS — STATED PLAINLY</a:t>
+            </a:r>
+          </a:p>
+          <a:p>
+            <a:pPr algn="l">
+              <a:lnSpc>
+                <a:spcPct val="116000"/>
+              </a:lnSpc>
+              <a:spcAft>
+                <a:spcPts val="500"/>
+              </a:spcAft>
+            </a:pPr>
+            <a:r>
+              <a:rPr sz="1060" b="0">
+                <a:solidFill>
+                  <a:srgbClr val="EAF0F7"/>
+                </a:solidFill>
+                <a:latin typeface="Segoe UI"/>
+              </a:rPr>
+              <a:t>▸  Trained on historical data from one telecom; behaviour may not transfer</a:t>
+            </a:r>
+          </a:p>
+          <a:p>
+            <a:pPr algn="l">
+              <a:lnSpc>
+                <a:spcPct val="116000"/>
+              </a:lnSpc>
+              <a:spcAft>
+                <a:spcPts val="500"/>
+              </a:spcAft>
+            </a:pPr>
+            <a:r>
+              <a:rPr sz="1060" b="0">
+                <a:solidFill>
+                  <a:srgbClr val="EAF0F7"/>
+                </a:solidFill>
+                <a:latin typeface="Segoe UI"/>
+              </a:rPr>
+              <a:t>▸  56.95% recall at the deployed threshold — two in five churners missed</a:t>
+            </a:r>
+          </a:p>
+          <a:p>
+            <a:pPr algn="l">
+              <a:lnSpc>
+                <a:spcPct val="116000"/>
+              </a:lnSpc>
+              <a:spcAft>
+                <a:spcPts val="500"/>
+              </a:spcAft>
+            </a:pPr>
+            <a:r>
+              <a:rPr sz="1060" b="0">
+                <a:solidFill>
+                  <a:srgbClr val="EAF0F7"/>
+                </a:solidFill>
+                <a:latin typeface="Segoe UI"/>
+              </a:rPr>
+              <a:t>▸  No live behavioural feed, no drift monitoring, no automatic retraining</a:t>
+            </a:r>
+          </a:p>
+          <a:p>
+            <a:pPr algn="l">
+              <a:lnSpc>
+                <a:spcPct val="116000"/>
+              </a:lnSpc>
+              <a:spcAft>
+                <a:spcPts val="500"/>
+              </a:spcAft>
+            </a:pPr>
+            <a:r>
+              <a:rPr sz="1060" b="0">
+                <a:solidFill>
+                  <a:srgbClr val="EAF0F7"/>
+                </a:solidFill>
+                <a:latin typeface="Segoe UI"/>
+              </a:rPr>
+              <a:t>▸  Probabilities are not guarantees; recommendations are decision support</a:t>
+            </a:r>
+          </a:p>
+          <a:p>
+            <a:pPr algn="l">
+              <a:lnSpc>
+                <a:spcPct val="116000"/>
+              </a:lnSpc>
+              <a:spcAft>
+                <a:spcPts val="0"/>
+              </a:spcAft>
+            </a:pPr>
+            <a:r>
+              <a:rPr sz="1060" b="0">
+                <a:solidFill>
+                  <a:srgbClr val="EAF0F7"/>
+                </a:solidFill>
+                <a:latin typeface="Segoe UI"/>
+              </a:rPr>
+              <a:t>▸  Revenue figures are exposure, not realised savings</a:t>
+            </a:r>
+          </a:p>
+        </p:txBody>
+      </p:sp>
+      <p:sp>
+        <p:nvSpPr>
+          <p:cNvPr id="9" name="Rounded Rectangle 8"/>
+          <p:cNvSpPr/>
+          <p:nvPr/>
+        </p:nvSpPr>
+        <p:spPr>
+          <a:xfrm>
+            <a:off x="4332122" y="1517904"/>
+            <a:ext cx="3527450" cy="4700016"/>
+          </a:xfrm>
+          <a:prstGeom prst="roundRect">
+            <a:avLst>
+              <a:gd name="adj" fmla="val 8000"/>
+            </a:avLst>
+          </a:prstGeom>
+          <a:solidFill>
+            <a:srgbClr val="111A2C"/>
+          </a:solidFill>
+          <a:ln w="15240">
+            <a:solidFill>
+              <a:srgbClr val="FF5C6C"/>
+            </a:solidFill>
+          </a:ln>
+          <a:effectLst/>
+        </p:spPr>
+        <p:style>
+          <a:lnRef idx="1">
+            <a:schemeClr val="accent1"/>
+          </a:lnRef>
+          <a:fillRef idx="3">
+            <a:schemeClr val="accent1"/>
+          </a:fillRef>
+          <a:effectRef idx="2">
+            <a:schemeClr val="accent1"/>
+          </a:effectRef>
+          <a:fontRef idx="minor">
+            <a:schemeClr val="lt1"/>
+          </a:fontRef>
+        </p:style>
+        <p:txBody>
+          <a:bodyPr rtlCol="0" anchor="ctr"/>
+          <a:lstStyle/>
+          <a:p>
+            <a:pPr algn="ctr"/>
+          </a:p>
+        </p:txBody>
+      </p:sp>
+      <p:sp>
+        <p:nvSpPr>
+          <p:cNvPr id="10" name="TextBox 9"/>
+          <p:cNvSpPr txBox="1"/>
+          <p:nvPr/>
+        </p:nvSpPr>
+        <p:spPr>
+          <a:xfrm>
+            <a:off x="4533290" y="1682495"/>
+            <a:ext cx="3125114" cy="4370831"/>
+          </a:xfrm>
+          <a:prstGeom prst="rect">
+            <a:avLst/>
+          </a:prstGeom>
+          <a:noFill/>
+        </p:spPr>
+        <p:txBody>
+          <a:bodyPr wrap="square" lIns="0" rIns="0" tIns="0" bIns="0" anchor="t">
+            <a:spAutoFit/>
+          </a:bodyPr>
+          <a:lstStyle/>
+          <a:p>
+            <a:pPr algn="l">
+              <a:lnSpc>
+                <a:spcPct val="112000"/>
+              </a:lnSpc>
+              <a:spcAft>
+                <a:spcPts val="700"/>
+              </a:spcAft>
+            </a:pPr>
+            <a:r>
+              <a:rPr sz="1100" b="1">
+                <a:solidFill>
+                  <a:srgbClr val="FF5C6C"/>
+                </a:solidFill>
+                <a:latin typeface="Consolas"/>
+              </a:rPr>
+              <a:t>FAIRNESS — AN OPEN QUESTION</a:t>
+            </a:r>
+          </a:p>
+          <a:p>
+            <a:pPr algn="l">
+              <a:lnSpc>
+                <a:spcPct val="116000"/>
+              </a:lnSpc>
+              <a:spcAft>
+                <a:spcPts val="500"/>
+              </a:spcAft>
+            </a:pPr>
+            <a:r>
+              <a:rPr sz="1060" b="0">
+                <a:solidFill>
+                  <a:srgbClr val="EAF0F7"/>
+                </a:solidFill>
+                <a:latin typeface="Segoe UI"/>
+              </a:rPr>
+              <a:t>▸  Senior citizens churn at 41.7% — nearly double the base rate. A model optimising for churn risk will systematically concentrate its retention offers on them.</a:t>
+            </a:r>
+          </a:p>
+          <a:p>
+            <a:pPr algn="l">
+              <a:lnSpc>
+                <a:spcPct val="116000"/>
+              </a:lnSpc>
+              <a:spcAft>
+                <a:spcPts val="500"/>
+              </a:spcAft>
+            </a:pPr>
+            <a:r>
+              <a:rPr sz="1060" b="0">
+                <a:solidFill>
+                  <a:srgbClr val="EAF0F7"/>
+                </a:solidFill>
+                <a:latin typeface="Segoe UI"/>
+              </a:rPr>
+              <a:t>▸  A blanket discount aimed at that group is not neutral; it can read as exploitative pricing.</a:t>
+            </a:r>
+          </a:p>
+          <a:p>
+            <a:pPr algn="l">
+              <a:lnSpc>
+                <a:spcPct val="116000"/>
+              </a:lnSpc>
+              <a:spcAft>
+                <a:spcPts val="0"/>
+              </a:spcAft>
+            </a:pPr>
+            <a:r>
+              <a:rPr sz="1060" b="0">
+                <a:solidFill>
+                  <a:srgbClr val="EAF0F7"/>
+                </a:solidFill>
+                <a:latin typeface="Segoe UI"/>
+              </a:rPr>
+              <a:t>▸  No bias audit has been run. Before this touched real customers, that would be a prerequisite, not a nice-to-have.</a:t>
+            </a:r>
+          </a:p>
+        </p:txBody>
+      </p:sp>
+      <p:sp>
+        <p:nvSpPr>
+          <p:cNvPr id="11" name="Rounded Rectangle 10"/>
+          <p:cNvSpPr/>
+          <p:nvPr/>
+        </p:nvSpPr>
+        <p:spPr>
+          <a:xfrm>
+            <a:off x="8097316" y="1517904"/>
+            <a:ext cx="3527450" cy="4700016"/>
+          </a:xfrm>
+          <a:prstGeom prst="roundRect">
+            <a:avLst>
+              <a:gd name="adj" fmla="val 8000"/>
+            </a:avLst>
+          </a:prstGeom>
+          <a:solidFill>
+            <a:srgbClr val="111A2C"/>
+          </a:solidFill>
+          <a:ln w="15240">
+            <a:solidFill>
+              <a:srgbClr val="4C8DFF"/>
+            </a:solidFill>
+          </a:ln>
+          <a:effectLst/>
+        </p:spPr>
+        <p:style>
+          <a:lnRef idx="1">
+            <a:schemeClr val="accent1"/>
+          </a:lnRef>
+          <a:fillRef idx="3">
+            <a:schemeClr val="accent1"/>
+          </a:fillRef>
+          <a:effectRef idx="2">
+            <a:schemeClr val="accent1"/>
+          </a:effectRef>
+          <a:fontRef idx="minor">
+            <a:schemeClr val="lt1"/>
+          </a:fontRef>
+        </p:style>
+        <p:txBody>
+          <a:bodyPr rtlCol="0" anchor="ctr"/>
+          <a:lstStyle/>
+          <a:p>
+            <a:pPr algn="ctr"/>
+          </a:p>
+        </p:txBody>
+      </p:sp>
+      <p:sp>
+        <p:nvSpPr>
+          <p:cNvPr id="12" name="TextBox 11"/>
+          <p:cNvSpPr txBox="1"/>
+          <p:nvPr/>
+        </p:nvSpPr>
+        <p:spPr>
+          <a:xfrm>
+            <a:off x="8298484" y="1682495"/>
+            <a:ext cx="3125114" cy="4370831"/>
+          </a:xfrm>
+          <a:prstGeom prst="rect">
+            <a:avLst/>
+          </a:prstGeom>
+          <a:noFill/>
+        </p:spPr>
+        <p:txBody>
+          <a:bodyPr wrap="square" lIns="0" rIns="0" tIns="0" bIns="0" anchor="t">
+            <a:spAutoFit/>
+          </a:bodyPr>
+          <a:lstStyle/>
+          <a:p>
+            <a:pPr algn="l">
+              <a:lnSpc>
+                <a:spcPct val="112000"/>
+              </a:lnSpc>
+              <a:spcAft>
+                <a:spcPts val="700"/>
+              </a:spcAft>
+            </a:pPr>
+            <a:r>
+              <a:rPr sz="1100" b="1">
+                <a:solidFill>
+                  <a:srgbClr val="4C8DFF"/>
+                </a:solidFill>
+                <a:latin typeface="Consolas"/>
+              </a:rPr>
+              <a:t>THE NEXT CYCLE</a:t>
+            </a:r>
+          </a:p>
+          <a:p>
+            <a:pPr algn="l">
+              <a:lnSpc>
+                <a:spcPct val="116000"/>
+              </a:lnSpc>
+              <a:spcAft>
+                <a:spcPts val="500"/>
+              </a:spcAft>
+            </a:pPr>
+            <a:r>
+              <a:rPr sz="1060" b="0">
+                <a:solidFill>
+                  <a:srgbClr val="EAF0F7"/>
+                </a:solidFill>
+                <a:latin typeface="Segoe UI"/>
+              </a:rPr>
+              <a:t>▸  Move the operating point deliberately — 0.35 catches 71.7% of churners at no cost to F1</a:t>
+            </a:r>
+          </a:p>
+          <a:p>
+            <a:pPr algn="l">
+              <a:lnSpc>
+                <a:spcPct val="116000"/>
+              </a:lnSpc>
+              <a:spcAft>
+                <a:spcPts val="500"/>
+              </a:spcAft>
+            </a:pPr>
+            <a:r>
+              <a:rPr sz="1060" b="0">
+                <a:solidFill>
+                  <a:srgbClr val="EAF0F7"/>
+                </a:solidFill>
+                <a:latin typeface="Segoe UI"/>
+              </a:rPr>
+              <a:t>▸  Decide the threshold with the business: a wasted offer is cheap, a lost customer is not</a:t>
+            </a:r>
+          </a:p>
+          <a:p>
+            <a:pPr algn="l">
+              <a:lnSpc>
+                <a:spcPct val="116000"/>
+              </a:lnSpc>
+              <a:spcAft>
+                <a:spcPts val="500"/>
+              </a:spcAft>
+            </a:pPr>
+            <a:r>
+              <a:rPr sz="1060" b="0">
+                <a:solidFill>
+                  <a:srgbClr val="EAF0F7"/>
+                </a:solidFill>
+                <a:latin typeface="Segoe UI"/>
+              </a:rPr>
+              <a:t>▸  Bias audit across age and other protected attributes</a:t>
+            </a:r>
+          </a:p>
+          <a:p>
+            <a:pPr algn="l">
+              <a:lnSpc>
+                <a:spcPct val="116000"/>
+              </a:lnSpc>
+              <a:spcAft>
+                <a:spcPts val="0"/>
+              </a:spcAft>
+            </a:pPr>
+            <a:r>
+              <a:rPr sz="1060" b="0">
+                <a:solidFill>
+                  <a:srgbClr val="EAF0F7"/>
+                </a:solidFill>
+                <a:latin typeface="Segoe UI"/>
+              </a:rPr>
+              <a:t>▸  Drift detection and scheduled retraining — which sends the project back to Phase 02</a:t>
+            </a:r>
+          </a:p>
+        </p:txBody>
+      </p:sp>
+      <p:sp>
+        <p:nvSpPr>
+          <p:cNvPr id="13" name="Rectangle 12"/>
+          <p:cNvSpPr/>
+          <p:nvPr/>
+        </p:nvSpPr>
+        <p:spPr>
+          <a:xfrm>
+            <a:off x="566928" y="6309360"/>
+            <a:ext cx="743145" cy="43891"/>
+          </a:xfrm>
+          <a:prstGeom prst="rect">
+            <a:avLst/>
+          </a:prstGeom>
+          <a:solidFill>
+            <a:srgbClr val="2FD8B4"/>
+          </a:solidFill>
+          <a:ln>
+            <a:noFill/>
+          </a:ln>
+          <a:effectLst/>
+        </p:spPr>
+        <p:style>
+          <a:lnRef idx="1">
+            <a:schemeClr val="accent1"/>
+          </a:lnRef>
+          <a:fillRef idx="3">
+            <a:schemeClr val="accent1"/>
+          </a:fillRef>
+          <a:effectRef idx="2">
+            <a:schemeClr val="accent1"/>
+          </a:effectRef>
+          <a:fontRef idx="minor">
+            <a:schemeClr val="lt1"/>
+          </a:fontRef>
+        </p:style>
+        <p:txBody>
+          <a:bodyPr rtlCol="0" anchor="ctr"/>
+          <a:lstStyle/>
+          <a:p>
+            <a:pPr algn="ctr"/>
+          </a:p>
+        </p:txBody>
+      </p:sp>
+      <p:sp>
+        <p:nvSpPr>
+          <p:cNvPr id="14" name="Rectangle 13"/>
+          <p:cNvSpPr/>
+          <p:nvPr/>
+        </p:nvSpPr>
+        <p:spPr>
+          <a:xfrm>
+            <a:off x="1360365" y="6309360"/>
+            <a:ext cx="743145" cy="43891"/>
+          </a:xfrm>
+          <a:prstGeom prst="rect">
+            <a:avLst/>
+          </a:prstGeom>
+          <a:solidFill>
+            <a:srgbClr val="2FD8B4"/>
+          </a:solidFill>
+          <a:ln>
+            <a:noFill/>
+          </a:ln>
+          <a:effectLst/>
+        </p:spPr>
+        <p:style>
+          <a:lnRef idx="1">
+            <a:schemeClr val="accent1"/>
+          </a:lnRef>
+          <a:fillRef idx="3">
+            <a:schemeClr val="accent1"/>
+          </a:fillRef>
+          <a:effectRef idx="2">
+            <a:schemeClr val="accent1"/>
+          </a:effectRef>
+          <a:fontRef idx="minor">
+            <a:schemeClr val="lt1"/>
+          </a:fontRef>
+        </p:style>
+        <p:txBody>
+          <a:bodyPr rtlCol="0" anchor="ctr"/>
+          <a:lstStyle/>
+          <a:p>
+            <a:pPr algn="ctr"/>
+          </a:p>
+        </p:txBody>
+      </p:sp>
+      <p:sp>
+        <p:nvSpPr>
+          <p:cNvPr id="15" name="Rectangle 14"/>
+          <p:cNvSpPr/>
+          <p:nvPr/>
+        </p:nvSpPr>
+        <p:spPr>
+          <a:xfrm>
+            <a:off x="2153803" y="6309360"/>
+            <a:ext cx="743145" cy="43891"/>
+          </a:xfrm>
+          <a:prstGeom prst="rect">
+            <a:avLst/>
+          </a:prstGeom>
+          <a:solidFill>
+            <a:srgbClr val="2FD8B4"/>
+          </a:solidFill>
+          <a:ln>
+            <a:noFill/>
+          </a:ln>
+          <a:effectLst/>
+        </p:spPr>
+        <p:style>
+          <a:lnRef idx="1">
+            <a:schemeClr val="accent1"/>
+          </a:lnRef>
+          <a:fillRef idx="3">
+            <a:schemeClr val="accent1"/>
+          </a:fillRef>
+          <a:effectRef idx="2">
+            <a:schemeClr val="accent1"/>
+          </a:effectRef>
+          <a:fontRef idx="minor">
+            <a:schemeClr val="lt1"/>
+          </a:fontRef>
+        </p:style>
+        <p:txBody>
+          <a:bodyPr rtlCol="0" anchor="ctr"/>
+          <a:lstStyle/>
+          <a:p>
+            <a:pPr algn="ctr"/>
+          </a:p>
+        </p:txBody>
+      </p:sp>
+      <p:sp>
+        <p:nvSpPr>
+          <p:cNvPr id="16" name="Rectangle 15"/>
+          <p:cNvSpPr/>
+          <p:nvPr/>
+        </p:nvSpPr>
+        <p:spPr>
+          <a:xfrm>
+            <a:off x="2947241" y="6309360"/>
+            <a:ext cx="743145" cy="43891"/>
+          </a:xfrm>
+          <a:prstGeom prst="rect">
+            <a:avLst/>
+          </a:prstGeom>
+          <a:solidFill>
+            <a:srgbClr val="2FD8B4"/>
+          </a:solidFill>
+          <a:ln>
+            <a:noFill/>
+          </a:ln>
+          <a:effectLst/>
+        </p:spPr>
+        <p:style>
+          <a:lnRef idx="1">
+            <a:schemeClr val="accent1"/>
+          </a:lnRef>
+          <a:fillRef idx="3">
+            <a:schemeClr val="accent1"/>
+          </a:fillRef>
+          <a:effectRef idx="2">
+            <a:schemeClr val="accent1"/>
+          </a:effectRef>
+          <a:fontRef idx="minor">
+            <a:schemeClr val="lt1"/>
+          </a:fontRef>
+        </p:style>
+        <p:txBody>
+          <a:bodyPr rtlCol="0" anchor="ctr"/>
+          <a:lstStyle/>
+          <a:p>
+            <a:pPr algn="ctr"/>
+          </a:p>
+        </p:txBody>
+      </p:sp>
+      <p:sp>
+        <p:nvSpPr>
+          <p:cNvPr id="17" name="Rectangle 16"/>
+          <p:cNvSpPr/>
+          <p:nvPr/>
+        </p:nvSpPr>
+        <p:spPr>
+          <a:xfrm>
+            <a:off x="3740679" y="6309360"/>
+            <a:ext cx="743145" cy="43891"/>
+          </a:xfrm>
+          <a:prstGeom prst="rect">
+            <a:avLst/>
+          </a:prstGeom>
+          <a:solidFill>
+            <a:srgbClr val="2FD8B4"/>
+          </a:solidFill>
+          <a:ln>
+            <a:noFill/>
+          </a:ln>
+          <a:effectLst/>
+        </p:spPr>
+        <p:style>
+          <a:lnRef idx="1">
+            <a:schemeClr val="accent1"/>
+          </a:lnRef>
+          <a:fillRef idx="3">
+            <a:schemeClr val="accent1"/>
+          </a:fillRef>
+          <a:effectRef idx="2">
+            <a:schemeClr val="accent1"/>
+          </a:effectRef>
+          <a:fontRef idx="minor">
+            <a:schemeClr val="lt1"/>
+          </a:fontRef>
+        </p:style>
+        <p:txBody>
+          <a:bodyPr rtlCol="0" anchor="ctr"/>
+          <a:lstStyle/>
+          <a:p>
+            <a:pPr algn="ctr"/>
+          </a:p>
+        </p:txBody>
+      </p:sp>
+      <p:sp>
+        <p:nvSpPr>
+          <p:cNvPr id="18" name="Rectangle 17"/>
+          <p:cNvSpPr/>
+          <p:nvPr/>
+        </p:nvSpPr>
+        <p:spPr>
+          <a:xfrm>
+            <a:off x="4534117" y="6309360"/>
+            <a:ext cx="743145" cy="43891"/>
+          </a:xfrm>
+          <a:prstGeom prst="rect">
+            <a:avLst/>
+          </a:prstGeom>
+          <a:solidFill>
+            <a:srgbClr val="2FD8B4"/>
+          </a:solidFill>
+          <a:ln>
+            <a:noFill/>
+          </a:ln>
+          <a:effectLst/>
+        </p:spPr>
+        <p:style>
+          <a:lnRef idx="1">
+            <a:schemeClr val="accent1"/>
+          </a:lnRef>
+          <a:fillRef idx="3">
+            <a:schemeClr val="accent1"/>
+          </a:fillRef>
+          <a:effectRef idx="2">
+            <a:schemeClr val="accent1"/>
+          </a:effectRef>
+          <a:fontRef idx="minor">
+            <a:schemeClr val="lt1"/>
+          </a:fontRef>
+        </p:style>
+        <p:txBody>
+          <a:bodyPr rtlCol="0" anchor="ctr"/>
+          <a:lstStyle/>
+          <a:p>
+            <a:pPr algn="ctr"/>
+          </a:p>
+        </p:txBody>
+      </p:sp>
+      <p:sp>
+        <p:nvSpPr>
+          <p:cNvPr id="19" name="Rectangle 18"/>
+          <p:cNvSpPr/>
+          <p:nvPr/>
+        </p:nvSpPr>
+        <p:spPr>
+          <a:xfrm>
+            <a:off x="5327555" y="6309360"/>
+            <a:ext cx="743145" cy="43891"/>
+          </a:xfrm>
+          <a:prstGeom prst="rect">
+            <a:avLst/>
+          </a:prstGeom>
+          <a:solidFill>
+            <a:srgbClr val="2FD8B4"/>
+          </a:solidFill>
+          <a:ln>
+            <a:noFill/>
+          </a:ln>
+          <a:effectLst/>
+        </p:spPr>
+        <p:style>
+          <a:lnRef idx="1">
+            <a:schemeClr val="accent1"/>
+          </a:lnRef>
+          <a:fillRef idx="3">
+            <a:schemeClr val="accent1"/>
+          </a:fillRef>
+          <a:effectRef idx="2">
+            <a:schemeClr val="accent1"/>
+          </a:effectRef>
+          <a:fontRef idx="minor">
+            <a:schemeClr val="lt1"/>
+          </a:fontRef>
+        </p:style>
+        <p:txBody>
+          <a:bodyPr rtlCol="0" anchor="ctr"/>
+          <a:lstStyle/>
+          <a:p>
+            <a:pPr algn="ctr"/>
+          </a:p>
+        </p:txBody>
+      </p:sp>
+      <p:sp>
+        <p:nvSpPr>
+          <p:cNvPr id="20" name="Rectangle 19"/>
+          <p:cNvSpPr/>
+          <p:nvPr/>
+        </p:nvSpPr>
+        <p:spPr>
+          <a:xfrm>
+            <a:off x="6120993" y="6309360"/>
+            <a:ext cx="743145" cy="43891"/>
+          </a:xfrm>
+          <a:prstGeom prst="rect">
+            <a:avLst/>
+          </a:prstGeom>
+          <a:solidFill>
+            <a:srgbClr val="2FD8B4"/>
+          </a:solidFill>
+          <a:ln>
+            <a:noFill/>
+          </a:ln>
+          <a:effectLst/>
+        </p:spPr>
+        <p:style>
+          <a:lnRef idx="1">
+            <a:schemeClr val="accent1"/>
+          </a:lnRef>
+          <a:fillRef idx="3">
+            <a:schemeClr val="accent1"/>
+          </a:fillRef>
+          <a:effectRef idx="2">
+            <a:schemeClr val="accent1"/>
+          </a:effectRef>
+          <a:fontRef idx="minor">
+            <a:schemeClr val="lt1"/>
+          </a:fontRef>
+        </p:style>
+        <p:txBody>
+          <a:bodyPr rtlCol="0" anchor="ctr"/>
+          <a:lstStyle/>
+          <a:p>
+            <a:pPr algn="ctr"/>
+          </a:p>
+        </p:txBody>
+      </p:sp>
+      <p:sp>
+        <p:nvSpPr>
+          <p:cNvPr id="21" name="Rectangle 20"/>
+          <p:cNvSpPr/>
+          <p:nvPr/>
+        </p:nvSpPr>
+        <p:spPr>
+          <a:xfrm>
+            <a:off x="6914431" y="6309360"/>
+            <a:ext cx="743145" cy="43891"/>
+          </a:xfrm>
+          <a:prstGeom prst="rect">
+            <a:avLst/>
+          </a:prstGeom>
+          <a:solidFill>
+            <a:srgbClr val="2FD8B4"/>
+          </a:solidFill>
+          <a:ln>
+            <a:noFill/>
+          </a:ln>
+          <a:effectLst/>
+        </p:spPr>
+        <p:style>
+          <a:lnRef idx="1">
+            <a:schemeClr val="accent1"/>
+          </a:lnRef>
+          <a:fillRef idx="3">
+            <a:schemeClr val="accent1"/>
+          </a:fillRef>
+          <a:effectRef idx="2">
+            <a:schemeClr val="accent1"/>
+          </a:effectRef>
+          <a:fontRef idx="minor">
+            <a:schemeClr val="lt1"/>
+          </a:fontRef>
+        </p:style>
+        <p:txBody>
+          <a:bodyPr rtlCol="0" anchor="ctr"/>
+          <a:lstStyle/>
+          <a:p>
+            <a:pPr algn="ctr"/>
+          </a:p>
+        </p:txBody>
+      </p:sp>
+      <p:sp>
+        <p:nvSpPr>
+          <p:cNvPr id="22" name="Rectangle 21"/>
+          <p:cNvSpPr/>
+          <p:nvPr/>
+        </p:nvSpPr>
+        <p:spPr>
+          <a:xfrm>
+            <a:off x="7707869" y="6309360"/>
+            <a:ext cx="743145" cy="43891"/>
+          </a:xfrm>
+          <a:prstGeom prst="rect">
+            <a:avLst/>
+          </a:prstGeom>
+          <a:solidFill>
+            <a:srgbClr val="2FD8B4"/>
+          </a:solidFill>
+          <a:ln>
+            <a:noFill/>
+          </a:ln>
+          <a:effectLst/>
+        </p:spPr>
+        <p:style>
+          <a:lnRef idx="1">
+            <a:schemeClr val="accent1"/>
+          </a:lnRef>
+          <a:fillRef idx="3">
+            <a:schemeClr val="accent1"/>
+          </a:fillRef>
+          <a:effectRef idx="2">
+            <a:schemeClr val="accent1"/>
+          </a:effectRef>
+          <a:fontRef idx="minor">
+            <a:schemeClr val="lt1"/>
+          </a:fontRef>
+        </p:style>
+        <p:txBody>
+          <a:bodyPr rtlCol="0" anchor="ctr"/>
+          <a:lstStyle/>
+          <a:p>
+            <a:pPr algn="ctr"/>
+          </a:p>
+        </p:txBody>
+      </p:sp>
+      <p:sp>
+        <p:nvSpPr>
+          <p:cNvPr id="23" name="Rectangle 22"/>
+          <p:cNvSpPr/>
+          <p:nvPr/>
+        </p:nvSpPr>
+        <p:spPr>
+          <a:xfrm>
+            <a:off x="8501307" y="6309360"/>
+            <a:ext cx="743145" cy="43891"/>
+          </a:xfrm>
+          <a:prstGeom prst="rect">
+            <a:avLst/>
+          </a:prstGeom>
+          <a:solidFill>
+            <a:srgbClr val="2FD8B4"/>
+          </a:solidFill>
+          <a:ln>
+            <a:noFill/>
+          </a:ln>
+          <a:effectLst/>
+        </p:spPr>
+        <p:style>
+          <a:lnRef idx="1">
+            <a:schemeClr val="accent1"/>
+          </a:lnRef>
+          <a:fillRef idx="3">
+            <a:schemeClr val="accent1"/>
+          </a:fillRef>
+          <a:effectRef idx="2">
+            <a:schemeClr val="accent1"/>
+          </a:effectRef>
+          <a:fontRef idx="minor">
+            <a:schemeClr val="lt1"/>
+          </a:fontRef>
+        </p:style>
+        <p:txBody>
+          <a:bodyPr rtlCol="0" anchor="ctr"/>
+          <a:lstStyle/>
+          <a:p>
+            <a:pPr algn="ctr"/>
+          </a:p>
+        </p:txBody>
+      </p:sp>
+      <p:sp>
+        <p:nvSpPr>
+          <p:cNvPr id="24" name="Rectangle 23"/>
+          <p:cNvSpPr/>
+          <p:nvPr/>
+        </p:nvSpPr>
+        <p:spPr>
+          <a:xfrm>
+            <a:off x="9294745" y="6309360"/>
+            <a:ext cx="743145" cy="43891"/>
+          </a:xfrm>
+          <a:prstGeom prst="rect">
+            <a:avLst/>
+          </a:prstGeom>
+          <a:solidFill>
+            <a:srgbClr val="2FD8B4"/>
+          </a:solidFill>
+          <a:ln>
+            <a:noFill/>
+          </a:ln>
+          <a:effectLst/>
+        </p:spPr>
+        <p:style>
+          <a:lnRef idx="1">
+            <a:schemeClr val="accent1"/>
+          </a:lnRef>
+          <a:fillRef idx="3">
+            <a:schemeClr val="accent1"/>
+          </a:fillRef>
+          <a:effectRef idx="2">
+            <a:schemeClr val="accent1"/>
+          </a:effectRef>
+          <a:fontRef idx="minor">
+            <a:schemeClr val="lt1"/>
+          </a:fontRef>
+        </p:style>
+        <p:txBody>
+          <a:bodyPr rtlCol="0" anchor="ctr"/>
+          <a:lstStyle/>
+          <a:p>
+            <a:pPr algn="ctr"/>
+          </a:p>
+        </p:txBody>
+      </p:sp>
+      <p:sp>
+        <p:nvSpPr>
+          <p:cNvPr id="25" name="Rectangle 24"/>
+          <p:cNvSpPr/>
+          <p:nvPr/>
+        </p:nvSpPr>
+        <p:spPr>
+          <a:xfrm>
+            <a:off x="10088183" y="6309360"/>
+            <a:ext cx="743145" cy="43891"/>
+          </a:xfrm>
+          <a:prstGeom prst="rect">
+            <a:avLst/>
+          </a:prstGeom>
+          <a:solidFill>
+            <a:srgbClr val="2FD8B4"/>
+          </a:solidFill>
+          <a:ln>
+            <a:noFill/>
+          </a:ln>
+          <a:effectLst/>
+        </p:spPr>
+        <p:style>
+          <a:lnRef idx="1">
+            <a:schemeClr val="accent1"/>
+          </a:lnRef>
+          <a:fillRef idx="3">
+            <a:schemeClr val="accent1"/>
+          </a:fillRef>
+          <a:effectRef idx="2">
+            <a:schemeClr val="accent1"/>
+          </a:effectRef>
+          <a:fontRef idx="minor">
+            <a:schemeClr val="lt1"/>
+          </a:fontRef>
+        </p:style>
+        <p:txBody>
+          <a:bodyPr rtlCol="0" anchor="ctr"/>
+          <a:lstStyle/>
+          <a:p>
+            <a:pPr algn="ctr"/>
+          </a:p>
+        </p:txBody>
+      </p:sp>
+      <p:sp>
+        <p:nvSpPr>
+          <p:cNvPr id="26" name="Rectangle 25"/>
+          <p:cNvSpPr/>
+          <p:nvPr/>
+        </p:nvSpPr>
+        <p:spPr>
+          <a:xfrm>
+            <a:off x="10881621" y="6309360"/>
+            <a:ext cx="743145" cy="43891"/>
+          </a:xfrm>
+          <a:prstGeom prst="rect">
+            <a:avLst/>
+          </a:prstGeom>
+          <a:solidFill>
+            <a:srgbClr val="2FD8B4"/>
+          </a:solidFill>
+          <a:ln>
+            <a:noFill/>
+          </a:ln>
+          <a:effectLst/>
+        </p:spPr>
+        <p:style>
+          <a:lnRef idx="1">
+            <a:schemeClr val="accent1"/>
+          </a:lnRef>
+          <a:fillRef idx="3">
+            <a:schemeClr val="accent1"/>
+          </a:fillRef>
+          <a:effectRef idx="2">
+            <a:schemeClr val="accent1"/>
+          </a:effectRef>
+          <a:fontRef idx="minor">
+            <a:schemeClr val="lt1"/>
+          </a:fontRef>
+        </p:style>
+        <p:txBody>
+          <a:bodyPr rtlCol="0" anchor="ctr"/>
+          <a:lstStyle/>
+          <a:p>
+            <a:pPr algn="ctr"/>
+          </a:p>
+        </p:txBody>
+      </p:sp>
+      <p:sp>
+        <p:nvSpPr>
+          <p:cNvPr id="27" name="Rectangle 26"/>
+          <p:cNvSpPr/>
+          <p:nvPr/>
+        </p:nvSpPr>
+        <p:spPr>
+          <a:xfrm>
+            <a:off x="566928" y="6455664"/>
+            <a:ext cx="11057839" cy="9144"/>
+          </a:xfrm>
+          <a:prstGeom prst="rect">
+            <a:avLst/>
+          </a:prstGeom>
+          <a:solidFill>
+            <a:srgbClr val="223049"/>
+          </a:solidFill>
+          <a:ln>
+            <a:noFill/>
+          </a:ln>
+          <a:effectLst/>
+        </p:spPr>
+        <p:style>
+          <a:lnRef idx="1">
+            <a:schemeClr val="accent1"/>
+          </a:lnRef>
+          <a:fillRef idx="3">
+            <a:schemeClr val="accent1"/>
+          </a:fillRef>
+          <a:effectRef idx="2">
+            <a:schemeClr val="accent1"/>
+          </a:effectRef>
+          <a:fontRef idx="minor">
+            <a:schemeClr val="lt1"/>
+          </a:fontRef>
+        </p:style>
+        <p:txBody>
+          <a:bodyPr rtlCol="0" anchor="ctr"/>
+          <a:lstStyle/>
+          <a:p>
+            <a:pPr algn="ctr"/>
+          </a:p>
+        </p:txBody>
+      </p:sp>
+      <p:sp>
+        <p:nvSpPr>
+          <p:cNvPr id="28" name="TextBox 27"/>
+          <p:cNvSpPr txBox="1"/>
+          <p:nvPr/>
+        </p:nvSpPr>
+        <p:spPr>
+          <a:xfrm>
+            <a:off x="566928" y="6510528"/>
+            <a:ext cx="9509760" cy="219456"/>
+          </a:xfrm>
+          <a:prstGeom prst="rect">
+            <a:avLst/>
+          </a:prstGeom>
+          <a:noFill/>
+        </p:spPr>
+        <p:txBody>
+          <a:bodyPr wrap="square" lIns="0" rIns="0" tIns="0" bIns="0" anchor="t">
+            <a:spAutoFit/>
+          </a:bodyPr>
+          <a:lstStyle/>
+          <a:p>
+            <a:pPr algn="l">
+              <a:lnSpc>
+                <a:spcPct val="112000"/>
+              </a:lnSpc>
+              <a:spcAft>
+                <a:spcPts val="0"/>
+              </a:spcAft>
+            </a:pPr>
+            <a:r>
+              <a:rPr sz="900" b="0">
+                <a:solidFill>
+                  <a:srgbClr val="8CA0BE"/>
+                </a:solidFill>
+                <a:latin typeface="Segoe UI"/>
+              </a:rPr>
+              <a:t>RetainIQ · Signal Ops Console</a:t>
+            </a:r>
+          </a:p>
+        </p:txBody>
+      </p:sp>
+      <p:sp>
+        <p:nvSpPr>
+          <p:cNvPr id="29" name="TextBox 28"/>
+          <p:cNvSpPr txBox="1"/>
+          <p:nvPr/>
+        </p:nvSpPr>
+        <p:spPr>
+          <a:xfrm>
+            <a:off x="10527487" y="6510528"/>
+            <a:ext cx="1097280" cy="219456"/>
+          </a:xfrm>
+          <a:prstGeom prst="rect">
+            <a:avLst/>
+          </a:prstGeom>
+          <a:noFill/>
+        </p:spPr>
+        <p:txBody>
+          <a:bodyPr wrap="square" lIns="0" rIns="0" tIns="0" bIns="0" anchor="t">
+            <a:spAutoFit/>
+          </a:bodyPr>
+          <a:lstStyle/>
+          <a:p>
+            <a:pPr algn="r">
+              <a:lnSpc>
+                <a:spcPct val="112000"/>
+              </a:lnSpc>
+              <a:spcAft>
+                <a:spcPts val="0"/>
+              </a:spcAft>
+            </a:pPr>
+            <a:r>
+              <a:rPr sz="900" b="0">
+                <a:solidFill>
+                  <a:srgbClr val="8CA0BE"/>
+                </a:solidFill>
+                <a:latin typeface="Consolas"/>
+              </a:rPr>
+              <a:t>19</a:t>
+            </a:r>
+          </a:p>
+        </p:txBody>
+      </p:sp>
+    </p:spTree>
+  </p:cSld>
+  <p:clrMapOvr>
+    <a:masterClrMapping/>
+  </p:clrMapOvr>
+</p:sld>
+</file>
+
 <file path=ppt/slides/slide2.xml><?xml version="1.0" encoding="utf-8"?>
 <p:sld xmlns:a="http://schemas.openxmlformats.org/drawingml/2006/main" xmlns:p="http://schemas.openxmlformats.org/presentationml/2006/main" xmlns:r="http://schemas.openxmlformats.org/officeDocument/2006/relationships">
   <p:cSld>
@@ -19407,6 +25752,1096 @@
                 <a:latin typeface="Consolas"/>
               </a:rPr>
               <a:t>02</a:t>
+            </a:r>
+          </a:p>
+        </p:txBody>
+      </p:sp>
+    </p:spTree>
+  </p:cSld>
+  <p:clrMapOvr>
+    <a:masterClrMapping/>
+  </p:clrMapOvr>
+</p:sld>
+</file>
+
+<file path=ppt/slides/slide20.xml><?xml version="1.0" encoding="utf-8"?>
+<p:sld xmlns:a="http://schemas.openxmlformats.org/drawingml/2006/main" xmlns:p="http://schemas.openxmlformats.org/presentationml/2006/main" xmlns:r="http://schemas.openxmlformats.org/officeDocument/2006/relationships">
+  <p:cSld>
+    <p:spTree>
+      <p:nvGrpSpPr>
+        <p:cNvPr id="1" name=""/>
+        <p:cNvGrpSpPr/>
+        <p:nvPr/>
+      </p:nvGrpSpPr>
+      <p:grpSpPr/>
+      <p:sp>
+        <p:nvSpPr>
+          <p:cNvPr id="2" name="Rectangle 1"/>
+          <p:cNvSpPr/>
+          <p:nvPr/>
+        </p:nvSpPr>
+        <p:spPr>
+          <a:xfrm>
+            <a:off x="0" y="0"/>
+            <a:ext cx="12191695" cy="6858000"/>
+          </a:xfrm>
+          <a:prstGeom prst="rect">
+            <a:avLst/>
+          </a:prstGeom>
+          <a:solidFill>
+            <a:srgbClr val="0A0F1C"/>
+          </a:solidFill>
+          <a:ln>
+            <a:noFill/>
+          </a:ln>
+          <a:effectLst/>
+        </p:spPr>
+        <p:style>
+          <a:lnRef idx="1">
+            <a:schemeClr val="accent1"/>
+          </a:lnRef>
+          <a:fillRef idx="3">
+            <a:schemeClr val="accent1"/>
+          </a:fillRef>
+          <a:effectRef idx="2">
+            <a:schemeClr val="accent1"/>
+          </a:effectRef>
+          <a:fontRef idx="minor">
+            <a:schemeClr val="lt1"/>
+          </a:fontRef>
+        </p:style>
+        <p:txBody>
+          <a:bodyPr rtlCol="0" anchor="ctr"/>
+          <a:lstStyle/>
+          <a:p>
+            <a:pPr algn="ctr"/>
+          </a:p>
+        </p:txBody>
+      </p:sp>
+      <p:sp>
+        <p:nvSpPr>
+          <p:cNvPr id="3" name="Rectangle 2"/>
+          <p:cNvSpPr/>
+          <p:nvPr/>
+        </p:nvSpPr>
+        <p:spPr>
+          <a:xfrm>
+            <a:off x="0" y="0"/>
+            <a:ext cx="12191695" cy="77724"/>
+          </a:xfrm>
+          <a:prstGeom prst="rect">
+            <a:avLst/>
+          </a:prstGeom>
+          <a:solidFill>
+            <a:srgbClr val="2FD8B4"/>
+          </a:solidFill>
+          <a:ln>
+            <a:noFill/>
+          </a:ln>
+          <a:effectLst/>
+        </p:spPr>
+        <p:style>
+          <a:lnRef idx="1">
+            <a:schemeClr val="accent1"/>
+          </a:lnRef>
+          <a:fillRef idx="3">
+            <a:schemeClr val="accent1"/>
+          </a:fillRef>
+          <a:effectRef idx="2">
+            <a:schemeClr val="accent1"/>
+          </a:effectRef>
+          <a:fontRef idx="minor">
+            <a:schemeClr val="lt1"/>
+          </a:fontRef>
+        </p:style>
+        <p:txBody>
+          <a:bodyPr rtlCol="0" anchor="ctr"/>
+          <a:lstStyle/>
+          <a:p>
+            <a:pPr algn="ctr"/>
+          </a:p>
+        </p:txBody>
+      </p:sp>
+      <p:sp>
+        <p:nvSpPr>
+          <p:cNvPr id="4" name="TextBox 3"/>
+          <p:cNvSpPr txBox="1"/>
+          <p:nvPr/>
+        </p:nvSpPr>
+        <p:spPr>
+          <a:xfrm>
+            <a:off x="566928" y="365760"/>
+            <a:ext cx="8229600" cy="237744"/>
+          </a:xfrm>
+          <a:prstGeom prst="rect">
+            <a:avLst/>
+          </a:prstGeom>
+          <a:noFill/>
+        </p:spPr>
+        <p:txBody>
+          <a:bodyPr wrap="square" lIns="0" rIns="0" tIns="0" bIns="0" anchor="t">
+            <a:spAutoFit/>
+          </a:bodyPr>
+          <a:lstStyle/>
+          <a:p>
+            <a:pPr algn="l">
+              <a:lnSpc>
+                <a:spcPct val="112000"/>
+              </a:lnSpc>
+              <a:spcAft>
+                <a:spcPts val="0"/>
+              </a:spcAft>
+            </a:pPr>
+            <a:r>
+              <a:rPr sz="1000" b="1">
+                <a:solidFill>
+                  <a:srgbClr val="2FD8B4"/>
+                </a:solidFill>
+                <a:latin typeface="Consolas"/>
+              </a:rPr>
+              <a:t>THANK YOU</a:t>
+            </a:r>
+          </a:p>
+        </p:txBody>
+      </p:sp>
+      <p:sp>
+        <p:nvSpPr>
+          <p:cNvPr id="5" name="TextBox 4"/>
+          <p:cNvSpPr txBox="1"/>
+          <p:nvPr/>
+        </p:nvSpPr>
+        <p:spPr>
+          <a:xfrm>
+            <a:off x="566928" y="576072"/>
+            <a:ext cx="11057839" cy="475488"/>
+          </a:xfrm>
+          <a:prstGeom prst="rect">
+            <a:avLst/>
+          </a:prstGeom>
+          <a:noFill/>
+        </p:spPr>
+        <p:txBody>
+          <a:bodyPr wrap="square" lIns="0" rIns="0" tIns="0" bIns="0" anchor="t">
+            <a:spAutoFit/>
+          </a:bodyPr>
+          <a:lstStyle/>
+          <a:p>
+            <a:pPr algn="l">
+              <a:lnSpc>
+                <a:spcPct val="112000"/>
+              </a:lnSpc>
+              <a:spcAft>
+                <a:spcPts val="0"/>
+              </a:spcAft>
+            </a:pPr>
+            <a:r>
+              <a:rPr sz="2600" b="1">
+                <a:solidFill>
+                  <a:srgbClr val="EAF0F7"/>
+                </a:solidFill>
+                <a:latin typeface="Segoe UI"/>
+              </a:rPr>
+              <a:t>See it running</a:t>
+            </a:r>
+          </a:p>
+        </p:txBody>
+      </p:sp>
+      <p:sp>
+        <p:nvSpPr>
+          <p:cNvPr id="6" name="TextBox 5"/>
+          <p:cNvSpPr txBox="1"/>
+          <p:nvPr/>
+        </p:nvSpPr>
+        <p:spPr>
+          <a:xfrm>
+            <a:off x="566928" y="1060704"/>
+            <a:ext cx="11057839" cy="274320"/>
+          </a:xfrm>
+          <a:prstGeom prst="rect">
+            <a:avLst/>
+          </a:prstGeom>
+          <a:noFill/>
+        </p:spPr>
+        <p:txBody>
+          <a:bodyPr wrap="square" lIns="0" rIns="0" tIns="0" bIns="0" anchor="t">
+            <a:spAutoFit/>
+          </a:bodyPr>
+          <a:lstStyle/>
+          <a:p>
+            <a:pPr algn="l">
+              <a:lnSpc>
+                <a:spcPct val="112000"/>
+              </a:lnSpc>
+              <a:spcAft>
+                <a:spcPts val="0"/>
+              </a:spcAft>
+            </a:pPr>
+            <a:r>
+              <a:rPr sz="1250" b="0">
+                <a:solidFill>
+                  <a:srgbClr val="8CA0BE"/>
+                </a:solidFill>
+                <a:latin typeface="Segoe UI"/>
+              </a:rPr>
+              <a:t>Scan to open the live application and score a customer portfolio</a:t>
+            </a:r>
+          </a:p>
+        </p:txBody>
+      </p:sp>
+      <p:sp>
+        <p:nvSpPr>
+          <p:cNvPr id="7" name="Rectangle 6"/>
+          <p:cNvSpPr/>
+          <p:nvPr/>
+        </p:nvSpPr>
+        <p:spPr>
+          <a:xfrm>
+            <a:off x="566928" y="1371600"/>
+            <a:ext cx="11057839" cy="12801"/>
+          </a:xfrm>
+          <a:prstGeom prst="rect">
+            <a:avLst/>
+          </a:prstGeom>
+          <a:solidFill>
+            <a:srgbClr val="223049"/>
+          </a:solidFill>
+          <a:ln>
+            <a:noFill/>
+          </a:ln>
+          <a:effectLst/>
+        </p:spPr>
+        <p:style>
+          <a:lnRef idx="1">
+            <a:schemeClr val="accent1"/>
+          </a:lnRef>
+          <a:fillRef idx="3">
+            <a:schemeClr val="accent1"/>
+          </a:fillRef>
+          <a:effectRef idx="2">
+            <a:schemeClr val="accent1"/>
+          </a:effectRef>
+          <a:fontRef idx="minor">
+            <a:schemeClr val="lt1"/>
+          </a:fontRef>
+        </p:style>
+        <p:txBody>
+          <a:bodyPr rtlCol="0" anchor="ctr"/>
+          <a:lstStyle/>
+          <a:p>
+            <a:pPr algn="ctr"/>
+          </a:p>
+        </p:txBody>
+      </p:sp>
+      <p:sp>
+        <p:nvSpPr>
+          <p:cNvPr id="8" name="Rounded Rectangle 7"/>
+          <p:cNvSpPr/>
+          <p:nvPr/>
+        </p:nvSpPr>
+        <p:spPr>
+          <a:xfrm>
+            <a:off x="566928" y="1517904"/>
+            <a:ext cx="5321808" cy="3968496"/>
+          </a:xfrm>
+          <a:prstGeom prst="roundRect">
+            <a:avLst>
+              <a:gd name="adj" fmla="val 8000"/>
+            </a:avLst>
+          </a:prstGeom>
+          <a:solidFill>
+            <a:srgbClr val="111A2C"/>
+          </a:solidFill>
+          <a:ln w="17780">
+            <a:solidFill>
+              <a:srgbClr val="2FD8B4"/>
+            </a:solidFill>
+          </a:ln>
+          <a:effectLst/>
+        </p:spPr>
+        <p:style>
+          <a:lnRef idx="1">
+            <a:schemeClr val="accent1"/>
+          </a:lnRef>
+          <a:fillRef idx="3">
+            <a:schemeClr val="accent1"/>
+          </a:fillRef>
+          <a:effectRef idx="2">
+            <a:schemeClr val="accent1"/>
+          </a:effectRef>
+          <a:fontRef idx="minor">
+            <a:schemeClr val="lt1"/>
+          </a:fontRef>
+        </p:style>
+        <p:txBody>
+          <a:bodyPr rtlCol="0" anchor="ctr"/>
+          <a:lstStyle/>
+          <a:p>
+            <a:pPr algn="ctr"/>
+          </a:p>
+        </p:txBody>
+      </p:sp>
+      <p:sp>
+        <p:nvSpPr>
+          <p:cNvPr id="9" name="TextBox 8"/>
+          <p:cNvSpPr txBox="1"/>
+          <p:nvPr/>
+        </p:nvSpPr>
+        <p:spPr>
+          <a:xfrm>
+            <a:off x="822960" y="1737360"/>
+            <a:ext cx="4809744" cy="3529584"/>
+          </a:xfrm>
+          <a:prstGeom prst="rect">
+            <a:avLst/>
+          </a:prstGeom>
+          <a:noFill/>
+        </p:spPr>
+        <p:txBody>
+          <a:bodyPr wrap="square" lIns="0" rIns="0" tIns="0" bIns="0" anchor="t">
+            <a:spAutoFit/>
+          </a:bodyPr>
+          <a:lstStyle/>
+          <a:p>
+            <a:pPr algn="l">
+              <a:lnSpc>
+                <a:spcPct val="112000"/>
+              </a:lnSpc>
+              <a:spcAft>
+                <a:spcPts val="800"/>
+              </a:spcAft>
+            </a:pPr>
+            <a:r>
+              <a:rPr sz="1050" b="1">
+                <a:solidFill>
+                  <a:srgbClr val="2FD8B4"/>
+                </a:solidFill>
+                <a:latin typeface="Consolas"/>
+              </a:rPr>
+              <a:t>LIVE APPLICATION</a:t>
+            </a:r>
+          </a:p>
+          <a:p>
+            <a:pPr algn="l">
+              <a:lnSpc>
+                <a:spcPct val="116000"/>
+              </a:lnSpc>
+              <a:spcAft>
+                <a:spcPts val="1000"/>
+              </a:spcAft>
+            </a:pPr>
+            <a:r>
+              <a:rPr sz="1100" b="1" u="sng">
+                <a:solidFill>
+                  <a:srgbClr val="4C8DFF"/>
+                </a:solidFill>
+                <a:latin typeface="Segoe UI"/>
+                <a:hlinkClick r:id="rId2"/>
+              </a:rPr>
+              <a:t>retainiq-predictive-customer-retention-zq6x.onrender.com</a:t>
+            </a:r>
+          </a:p>
+          <a:p>
+            <a:pPr algn="l">
+              <a:lnSpc>
+                <a:spcPct val="120000"/>
+              </a:lnSpc>
+              <a:spcAft>
+                <a:spcPts val="1200"/>
+              </a:spcAft>
+            </a:pPr>
+            <a:r>
+              <a:rPr sz="1080" b="0">
+                <a:solidFill>
+                  <a:srgbClr val="8CA0BE"/>
+                </a:solidFill>
+                <a:latin typeface="Segoe UI"/>
+              </a:rPr>
+              <a:t>Bulk score a customer CSV, read the dashboard, and download a private report. The model, risk bands, explanations and recommendations run live — the same code paths that produced every figure in this deck.</a:t>
+            </a:r>
+          </a:p>
+          <a:p>
+            <a:pPr algn="l">
+              <a:lnSpc>
+                <a:spcPct val="112000"/>
+              </a:lnSpc>
+              <a:spcAft>
+                <a:spcPts val="500"/>
+              </a:spcAft>
+            </a:pPr>
+            <a:r>
+              <a:rPr sz="1050" b="1">
+                <a:solidFill>
+                  <a:srgbClr val="4C8DFF"/>
+                </a:solidFill>
+                <a:latin typeface="Consolas"/>
+              </a:rPr>
+              <a:t>SOURCE CODE</a:t>
+            </a:r>
+          </a:p>
+          <a:p>
+            <a:pPr algn="l">
+              <a:lnSpc>
+                <a:spcPct val="116000"/>
+              </a:lnSpc>
+              <a:spcAft>
+                <a:spcPts val="1200"/>
+              </a:spcAft>
+            </a:pPr>
+            <a:r>
+              <a:rPr sz="1060" b="0" u="sng">
+                <a:solidFill>
+                  <a:srgbClr val="4C8DFF"/>
+                </a:solidFill>
+                <a:latin typeface="Consolas"/>
+                <a:hlinkClick r:id="rId3"/>
+              </a:rPr>
+              <a:t>github.com/Logesh0247/RetainIQ_Signal_Ops_Console</a:t>
+            </a:r>
+          </a:p>
+          <a:p>
+            <a:pPr algn="l">
+              <a:lnSpc>
+                <a:spcPct val="118000"/>
+              </a:lnSpc>
+              <a:spcAft>
+                <a:spcPts val="1000"/>
+              </a:spcAft>
+            </a:pPr>
+            <a:r>
+              <a:rPr sz="1040" b="0">
+                <a:solidFill>
+                  <a:srgbClr val="8CA0BE"/>
+                </a:solidFill>
+                <a:latin typeface="Segoe UI"/>
+              </a:rPr>
+              <a:t>Notebooks 01–09, the Flask console, the FastAPI wrapper and the nine-test suite are all in the repository.</a:t>
+            </a:r>
+          </a:p>
+          <a:p>
+            <a:pPr algn="l">
+              <a:lnSpc>
+                <a:spcPct val="118000"/>
+              </a:lnSpc>
+              <a:spcAft>
+                <a:spcPts val="0"/>
+              </a:spcAft>
+            </a:pPr>
+            <a:r>
+              <a:rPr sz="1040" b="0">
+                <a:solidFill>
+                  <a:srgbClr val="F5A623"/>
+                </a:solidFill>
+                <a:latin typeface="Segoe UI"/>
+              </a:rPr>
+              <a:t>The host is a free tier — open it once a minute before the review so the first scan is instant.</a:t>
+            </a:r>
+          </a:p>
+        </p:txBody>
+      </p:sp>
+      <p:sp>
+        <p:nvSpPr>
+          <p:cNvPr id="10" name="Rounded Rectangle 9"/>
+          <p:cNvSpPr/>
+          <p:nvPr/>
+        </p:nvSpPr>
+        <p:spPr>
+          <a:xfrm>
+            <a:off x="5980176" y="1517904"/>
+            <a:ext cx="2724912" cy="3968496"/>
+          </a:xfrm>
+          <a:prstGeom prst="roundRect">
+            <a:avLst>
+              <a:gd name="adj" fmla="val 8000"/>
+            </a:avLst>
+          </a:prstGeom>
+          <a:solidFill>
+            <a:srgbClr val="FFFFFF"/>
+          </a:solidFill>
+          <a:ln w="12700">
+            <a:solidFill>
+              <a:srgbClr val="223049"/>
+            </a:solidFill>
+          </a:ln>
+          <a:effectLst/>
+        </p:spPr>
+        <p:style>
+          <a:lnRef idx="1">
+            <a:schemeClr val="accent1"/>
+          </a:lnRef>
+          <a:fillRef idx="3">
+            <a:schemeClr val="accent1"/>
+          </a:fillRef>
+          <a:effectRef idx="2">
+            <a:schemeClr val="accent1"/>
+          </a:effectRef>
+          <a:fontRef idx="minor">
+            <a:schemeClr val="lt1"/>
+          </a:fontRef>
+        </p:style>
+        <p:txBody>
+          <a:bodyPr rtlCol="0" anchor="ctr"/>
+          <a:lstStyle/>
+          <a:p>
+            <a:pPr algn="ctr"/>
+          </a:p>
+        </p:txBody>
+      </p:sp>
+      <p:pic>
+        <p:nvPicPr>
+          <p:cNvPr id="11" name="Picture 10" descr="qr_live_app.png"/>
+          <p:cNvPicPr>
+            <a:picLocks noChangeAspect="1"/>
+          </p:cNvPicPr>
+          <p:nvPr/>
+        </p:nvPicPr>
+        <p:blipFill>
+          <a:blip r:embed="rId4"/>
+          <a:stretch>
+            <a:fillRect/>
+          </a:stretch>
+        </p:blipFill>
+        <p:spPr>
+          <a:xfrm>
+            <a:off x="6035040" y="1719072"/>
+            <a:ext cx="2615184" cy="2615184"/>
+          </a:xfrm>
+          <a:prstGeom prst="rect">
+            <a:avLst/>
+          </a:prstGeom>
+        </p:spPr>
+      </p:pic>
+      <p:sp>
+        <p:nvSpPr>
+          <p:cNvPr id="12" name="TextBox 11"/>
+          <p:cNvSpPr txBox="1"/>
+          <p:nvPr/>
+        </p:nvSpPr>
+        <p:spPr>
+          <a:xfrm>
+            <a:off x="6126480" y="4864608"/>
+            <a:ext cx="2432304" cy="475488"/>
+          </a:xfrm>
+          <a:prstGeom prst="rect">
+            <a:avLst/>
+          </a:prstGeom>
+          <a:noFill/>
+        </p:spPr>
+        <p:txBody>
+          <a:bodyPr wrap="square" lIns="0" rIns="0" tIns="0" bIns="0" anchor="t">
+            <a:spAutoFit/>
+          </a:bodyPr>
+          <a:lstStyle/>
+          <a:p>
+            <a:pPr algn="ctr">
+              <a:lnSpc>
+                <a:spcPct val="112000"/>
+              </a:lnSpc>
+              <a:spcAft>
+                <a:spcPts val="200"/>
+              </a:spcAft>
+            </a:pPr>
+            <a:r>
+              <a:rPr sz="950" b="1">
+                <a:solidFill>
+                  <a:srgbClr val="0A0F1C"/>
+                </a:solidFill>
+                <a:latin typeface="Consolas"/>
+              </a:rPr>
+              <a:t>SCAN FOR THE</a:t>
+            </a:r>
+          </a:p>
+          <a:p>
+            <a:pPr algn="ctr">
+              <a:lnSpc>
+                <a:spcPct val="112000"/>
+              </a:lnSpc>
+              <a:spcAft>
+                <a:spcPts val="0"/>
+              </a:spcAft>
+            </a:pPr>
+            <a:r>
+              <a:rPr sz="950" b="1">
+                <a:solidFill>
+                  <a:srgbClr val="0A0F1C"/>
+                </a:solidFill>
+                <a:latin typeface="Consolas"/>
+              </a:rPr>
+              <a:t>LIVE APPLICATION</a:t>
+            </a:r>
+          </a:p>
+        </p:txBody>
+      </p:sp>
+      <p:sp>
+        <p:nvSpPr>
+          <p:cNvPr id="13" name="Rounded Rectangle 12"/>
+          <p:cNvSpPr/>
+          <p:nvPr/>
+        </p:nvSpPr>
+        <p:spPr>
+          <a:xfrm>
+            <a:off x="8796528" y="1517904"/>
+            <a:ext cx="2825496" cy="3968496"/>
+          </a:xfrm>
+          <a:prstGeom prst="roundRect">
+            <a:avLst>
+              <a:gd name="adj" fmla="val 8000"/>
+            </a:avLst>
+          </a:prstGeom>
+          <a:solidFill>
+            <a:srgbClr val="111A2C"/>
+          </a:solidFill>
+          <a:ln w="12700">
+            <a:solidFill>
+              <a:srgbClr val="223049"/>
+            </a:solidFill>
+          </a:ln>
+          <a:effectLst/>
+        </p:spPr>
+        <p:style>
+          <a:lnRef idx="1">
+            <a:schemeClr val="accent1"/>
+          </a:lnRef>
+          <a:fillRef idx="3">
+            <a:schemeClr val="accent1"/>
+          </a:fillRef>
+          <a:effectRef idx="2">
+            <a:schemeClr val="accent1"/>
+          </a:effectRef>
+          <a:fontRef idx="minor">
+            <a:schemeClr val="lt1"/>
+          </a:fontRef>
+        </p:style>
+        <p:txBody>
+          <a:bodyPr rtlCol="0" anchor="ctr"/>
+          <a:lstStyle/>
+          <a:p>
+            <a:pPr algn="ctr"/>
+          </a:p>
+        </p:txBody>
+      </p:sp>
+      <p:pic>
+        <p:nvPicPr>
+          <p:cNvPr id="14" name="Picture 13" descr="qr_repository.png"/>
+          <p:cNvPicPr>
+            <a:picLocks noChangeAspect="1"/>
+          </p:cNvPicPr>
+          <p:nvPr/>
+        </p:nvPicPr>
+        <p:blipFill>
+          <a:blip r:embed="rId5"/>
+          <a:stretch>
+            <a:fillRect/>
+          </a:stretch>
+        </p:blipFill>
+        <p:spPr>
+          <a:xfrm>
+            <a:off x="9637776" y="1737360"/>
+            <a:ext cx="1143000" cy="1143000"/>
+          </a:xfrm>
+          <a:prstGeom prst="rect">
+            <a:avLst/>
+          </a:prstGeom>
+        </p:spPr>
+      </p:pic>
+      <p:sp>
+        <p:nvSpPr>
+          <p:cNvPr id="15" name="TextBox 14"/>
+          <p:cNvSpPr txBox="1"/>
+          <p:nvPr/>
+        </p:nvSpPr>
+        <p:spPr>
+          <a:xfrm>
+            <a:off x="8979408" y="1773936"/>
+            <a:ext cx="603504" cy="914400"/>
+          </a:xfrm>
+          <a:prstGeom prst="rect">
+            <a:avLst/>
+          </a:prstGeom>
+          <a:noFill/>
+        </p:spPr>
+        <p:txBody>
+          <a:bodyPr wrap="square" lIns="0" rIns="0" tIns="0" bIns="0" anchor="t">
+            <a:spAutoFit/>
+          </a:bodyPr>
+          <a:lstStyle/>
+          <a:p>
+            <a:pPr algn="l">
+              <a:lnSpc>
+                <a:spcPct val="112000"/>
+              </a:lnSpc>
+              <a:spcAft>
+                <a:spcPts val="300"/>
+              </a:spcAft>
+            </a:pPr>
+            <a:r>
+              <a:rPr sz="850" b="1">
+                <a:solidFill>
+                  <a:srgbClr val="8CA0BE"/>
+                </a:solidFill>
+                <a:latin typeface="Consolas"/>
+              </a:rPr>
+              <a:t>SOURCE</a:t>
+            </a:r>
+          </a:p>
+          <a:p>
+            <a:pPr algn="l">
+              <a:lnSpc>
+                <a:spcPct val="112000"/>
+              </a:lnSpc>
+              <a:spcAft>
+                <a:spcPts val="0"/>
+              </a:spcAft>
+            </a:pPr>
+            <a:r>
+              <a:rPr sz="850" b="1">
+                <a:solidFill>
+                  <a:srgbClr val="8CA0BE"/>
+                </a:solidFill>
+                <a:latin typeface="Consolas"/>
+              </a:rPr>
+              <a:t>REPO</a:t>
+            </a:r>
+          </a:p>
+        </p:txBody>
+      </p:sp>
+      <p:sp>
+        <p:nvSpPr>
+          <p:cNvPr id="16" name="TextBox 15"/>
+          <p:cNvSpPr txBox="1"/>
+          <p:nvPr/>
+        </p:nvSpPr>
+        <p:spPr>
+          <a:xfrm>
+            <a:off x="8979408" y="2999232"/>
+            <a:ext cx="2459736" cy="2194560"/>
+          </a:xfrm>
+          <a:prstGeom prst="rect">
+            <a:avLst/>
+          </a:prstGeom>
+          <a:noFill/>
+        </p:spPr>
+        <p:txBody>
+          <a:bodyPr wrap="square" lIns="0" rIns="0" tIns="0" bIns="0" anchor="t">
+            <a:spAutoFit/>
+          </a:bodyPr>
+          <a:lstStyle/>
+          <a:p>
+            <a:pPr algn="l">
+              <a:lnSpc>
+                <a:spcPct val="112000"/>
+              </a:lnSpc>
+              <a:spcAft>
+                <a:spcPts val="500"/>
+              </a:spcAft>
+            </a:pPr>
+            <a:r>
+              <a:rPr sz="1900" b="1">
+                <a:solidFill>
+                  <a:srgbClr val="EAF0F7"/>
+                </a:solidFill>
+                <a:latin typeface="Segoe UI"/>
+              </a:rPr>
+              <a:t>Thank you</a:t>
+            </a:r>
+          </a:p>
+          <a:p>
+            <a:pPr algn="l">
+              <a:lnSpc>
+                <a:spcPct val="112000"/>
+              </a:lnSpc>
+              <a:spcAft>
+                <a:spcPts val="1000"/>
+              </a:spcAft>
+            </a:pPr>
+            <a:r>
+              <a:rPr sz="1100" b="0">
+                <a:solidFill>
+                  <a:srgbClr val="2FD8B4"/>
+                </a:solidFill>
+                <a:latin typeface="Segoe UI"/>
+              </a:rPr>
+              <a:t>Questions welcome.</a:t>
+            </a:r>
+          </a:p>
+          <a:p>
+            <a:pPr algn="l">
+              <a:lnSpc>
+                <a:spcPct val="118000"/>
+              </a:lnSpc>
+              <a:spcAft>
+                <a:spcPts val="0"/>
+              </a:spcAft>
+            </a:pPr>
+            <a:r>
+              <a:rPr sz="1040" b="0">
+                <a:solidFill>
+                  <a:srgbClr val="8CA0BE"/>
+                </a:solidFill>
+                <a:latin typeface="Segoe UI"/>
+              </a:rPr>
+              <a:t>RetainIQ — from a churn probability to a prioritised, explained, costed retention action.</a:t>
+            </a:r>
+          </a:p>
+        </p:txBody>
+      </p:sp>
+      <p:sp>
+        <p:nvSpPr>
+          <p:cNvPr id="17" name="Rectangle 16"/>
+          <p:cNvSpPr/>
+          <p:nvPr/>
+        </p:nvSpPr>
+        <p:spPr>
+          <a:xfrm>
+            <a:off x="10104120" y="4795113"/>
+            <a:ext cx="89382" cy="170992"/>
+          </a:xfrm>
+          <a:prstGeom prst="rect">
+            <a:avLst/>
+          </a:prstGeom>
+          <a:solidFill>
+            <a:srgbClr val="2FD8B4"/>
+          </a:solidFill>
+          <a:ln>
+            <a:noFill/>
+          </a:ln>
+          <a:effectLst/>
+        </p:spPr>
+        <p:style>
+          <a:lnRef idx="1">
+            <a:schemeClr val="accent1"/>
+          </a:lnRef>
+          <a:fillRef idx="3">
+            <a:schemeClr val="accent1"/>
+          </a:fillRef>
+          <a:effectRef idx="2">
+            <a:schemeClr val="accent1"/>
+          </a:effectRef>
+          <a:fontRef idx="minor">
+            <a:schemeClr val="lt1"/>
+          </a:fontRef>
+        </p:style>
+        <p:txBody>
+          <a:bodyPr rtlCol="0" anchor="ctr"/>
+          <a:lstStyle/>
+          <a:p>
+            <a:pPr algn="ctr"/>
+          </a:p>
+        </p:txBody>
+      </p:sp>
+      <p:sp>
+        <p:nvSpPr>
+          <p:cNvPr id="18" name="Rectangle 17"/>
+          <p:cNvSpPr/>
+          <p:nvPr/>
+        </p:nvSpPr>
+        <p:spPr>
+          <a:xfrm>
+            <a:off x="10259568" y="4670755"/>
+            <a:ext cx="89382" cy="295351"/>
+          </a:xfrm>
+          <a:prstGeom prst="rect">
+            <a:avLst/>
+          </a:prstGeom>
+          <a:solidFill>
+            <a:srgbClr val="2FD8B4"/>
+          </a:solidFill>
+          <a:ln>
+            <a:noFill/>
+          </a:ln>
+          <a:effectLst/>
+        </p:spPr>
+        <p:style>
+          <a:lnRef idx="1">
+            <a:schemeClr val="accent1"/>
+          </a:lnRef>
+          <a:fillRef idx="3">
+            <a:schemeClr val="accent1"/>
+          </a:fillRef>
+          <a:effectRef idx="2">
+            <a:schemeClr val="accent1"/>
+          </a:effectRef>
+          <a:fontRef idx="minor">
+            <a:schemeClr val="lt1"/>
+          </a:fontRef>
+        </p:style>
+        <p:txBody>
+          <a:bodyPr rtlCol="0" anchor="ctr"/>
+          <a:lstStyle/>
+          <a:p>
+            <a:pPr algn="ctr"/>
+          </a:p>
+        </p:txBody>
+      </p:sp>
+      <p:sp>
+        <p:nvSpPr>
+          <p:cNvPr id="19" name="Rectangle 18"/>
+          <p:cNvSpPr/>
+          <p:nvPr/>
+        </p:nvSpPr>
+        <p:spPr>
+          <a:xfrm>
+            <a:off x="10415016" y="4546396"/>
+            <a:ext cx="89382" cy="419709"/>
+          </a:xfrm>
+          <a:prstGeom prst="rect">
+            <a:avLst/>
+          </a:prstGeom>
+          <a:solidFill>
+            <a:srgbClr val="2FD8B4"/>
+          </a:solidFill>
+          <a:ln>
+            <a:noFill/>
+          </a:ln>
+          <a:effectLst/>
+        </p:spPr>
+        <p:style>
+          <a:lnRef idx="1">
+            <a:schemeClr val="accent1"/>
+          </a:lnRef>
+          <a:fillRef idx="3">
+            <a:schemeClr val="accent1"/>
+          </a:fillRef>
+          <a:effectRef idx="2">
+            <a:schemeClr val="accent1"/>
+          </a:effectRef>
+          <a:fontRef idx="minor">
+            <a:schemeClr val="lt1"/>
+          </a:fontRef>
+        </p:style>
+        <p:txBody>
+          <a:bodyPr rtlCol="0" anchor="ctr"/>
+          <a:lstStyle/>
+          <a:p>
+            <a:pPr algn="ctr"/>
+          </a:p>
+        </p:txBody>
+      </p:sp>
+      <p:sp>
+        <p:nvSpPr>
+          <p:cNvPr id="20" name="Rectangle 19"/>
+          <p:cNvSpPr/>
+          <p:nvPr/>
+        </p:nvSpPr>
+        <p:spPr>
+          <a:xfrm>
+            <a:off x="10570464" y="4422038"/>
+            <a:ext cx="89382" cy="544068"/>
+          </a:xfrm>
+          <a:prstGeom prst="rect">
+            <a:avLst/>
+          </a:prstGeom>
+          <a:solidFill>
+            <a:srgbClr val="2FD8B4"/>
+          </a:solidFill>
+          <a:ln>
+            <a:noFill/>
+          </a:ln>
+          <a:effectLst/>
+        </p:spPr>
+        <p:style>
+          <a:lnRef idx="1">
+            <a:schemeClr val="accent1"/>
+          </a:lnRef>
+          <a:fillRef idx="3">
+            <a:schemeClr val="accent1"/>
+          </a:fillRef>
+          <a:effectRef idx="2">
+            <a:schemeClr val="accent1"/>
+          </a:effectRef>
+          <a:fontRef idx="minor">
+            <a:schemeClr val="lt1"/>
+          </a:fontRef>
+        </p:style>
+        <p:txBody>
+          <a:bodyPr rtlCol="0" anchor="ctr"/>
+          <a:lstStyle/>
+          <a:p>
+            <a:pPr algn="ctr"/>
+          </a:p>
+        </p:txBody>
+      </p:sp>
+      <p:sp>
+        <p:nvSpPr>
+          <p:cNvPr id="21" name="Rectangle 20"/>
+          <p:cNvSpPr/>
+          <p:nvPr/>
+        </p:nvSpPr>
+        <p:spPr>
+          <a:xfrm>
+            <a:off x="10725912" y="4297680"/>
+            <a:ext cx="89382" cy="668426"/>
+          </a:xfrm>
+          <a:prstGeom prst="rect">
+            <a:avLst/>
+          </a:prstGeom>
+          <a:solidFill>
+            <a:srgbClr val="2FD8B4"/>
+          </a:solidFill>
+          <a:ln>
+            <a:noFill/>
+          </a:ln>
+          <a:effectLst/>
+        </p:spPr>
+        <p:style>
+          <a:lnRef idx="1">
+            <a:schemeClr val="accent1"/>
+          </a:lnRef>
+          <a:fillRef idx="3">
+            <a:schemeClr val="accent1"/>
+          </a:fillRef>
+          <a:effectRef idx="2">
+            <a:schemeClr val="accent1"/>
+          </a:effectRef>
+          <a:fontRef idx="minor">
+            <a:schemeClr val="lt1"/>
+          </a:fontRef>
+        </p:style>
+        <p:txBody>
+          <a:bodyPr rtlCol="0" anchor="ctr"/>
+          <a:lstStyle/>
+          <a:p>
+            <a:pPr algn="ctr"/>
+          </a:p>
+        </p:txBody>
+      </p:sp>
+      <p:sp>
+        <p:nvSpPr>
+          <p:cNvPr id="22" name="TextBox 21"/>
+          <p:cNvSpPr txBox="1"/>
+          <p:nvPr/>
+        </p:nvSpPr>
+        <p:spPr>
+          <a:xfrm>
+            <a:off x="566928" y="5669280"/>
+            <a:ext cx="11057839" cy="548640"/>
+          </a:xfrm>
+          <a:prstGeom prst="rect">
+            <a:avLst/>
+          </a:prstGeom>
+          <a:noFill/>
+        </p:spPr>
+        <p:txBody>
+          <a:bodyPr wrap="square" lIns="0" rIns="0" tIns="0" bIns="0" anchor="t">
+            <a:spAutoFit/>
+          </a:bodyPr>
+          <a:lstStyle/>
+          <a:p>
+            <a:pPr algn="l">
+              <a:lnSpc>
+                <a:spcPct val="112000"/>
+              </a:lnSpc>
+              <a:spcAft>
+                <a:spcPts val="0"/>
+              </a:spcAft>
+            </a:pPr>
+            <a:r>
+              <a:rPr sz="1050" b="0">
+                <a:solidFill>
+                  <a:srgbClr val="8CA0BE"/>
+                </a:solidFill>
+                <a:latin typeface="Consolas"/>
+              </a:rPr>
+              <a:t>Logesh S.  ·  B.Sc. Data Science  ·  RetainIQ Signal Ops Console  ·  80.34% accuracy  ·  84.91% ROC-AUC</a:t>
             </a:r>
           </a:p>
         </p:txBody>

--- a/presentation/RetainIQ_Project_Review.pptx
+++ b/presentation/RetainIQ_Project_Review.pptx
@@ -26111,11 +26111,12 @@
               </a:spcAft>
             </a:pPr>
             <a:r>
-              <a:rPr sz="1050" b="1">
+              <a:rPr sz="1050" b="1" u="sng">
                 <a:solidFill>
                   <a:srgbClr val="2FD8B4"/>
                 </a:solidFill>
                 <a:latin typeface="Consolas"/>
+                <a:hlinkClick r:id="rId2"/>
               </a:rPr>
               <a:t>LIVE APPLICATION</a:t>
             </a:r>
@@ -26169,11 +26170,12 @@
               </a:spcAft>
             </a:pPr>
             <a:r>
-              <a:rPr sz="1050" b="1">
+              <a:rPr sz="1050" b="1" u="sng">
                 <a:solidFill>
                   <a:srgbClr val="4C8DFF"/>
                 </a:solidFill>
                 <a:latin typeface="Consolas"/>
+                <a:hlinkClick r:id="rId3"/>
               </a:rPr>
               <a:t>SOURCE CODE</a:t>
             </a:r>

--- a/presentation/RetainIQ_Project_Review.pptx
+++ b/presentation/RetainIQ_Project_Review.pptx
@@ -1884,27 +1884,48 @@
           <a:lstStyle/>
           <a:p>
             <a:r>
-              <a:t>(1:05–1:55) Frame the pain, then the four questions — they structure the entire</a:t>
-            </a:r>
-          </a:p>
-          <a:p>
-            <a:r>
-              <a:t>solution. Finish on the donut: "Notice the trap. If I predict nobody churns I'm</a:t>
-            </a:r>
-          </a:p>
-          <a:p>
-            <a:r>
-              <a:t>73.46% accurate and completely useless. That single number is why no model in</a:t>
-            </a:r>
-          </a:p>
-          <a:p>
-            <a:r>
-              <a:t>this deck is chosen on accuracy."</a:t>
-            </a:r>
-          </a:p>
-          <a:p>
-            <a:r>
-              <a:t>That line earns credibility early and sets up Phase 07.</a:t>
+              <a:t>(1:05–1:55) Make clear this is a comparison between two layers in this project,</a:t>
+            </a:r>
+          </a:p>
+          <a:p>
+            <a:r>
+              <a:t>not a claim that RetainIQ replaces an external product. Power BI is useful for</a:t>
+            </a:r>
+          </a:p>
+          <a:p>
+            <a:r>
+              <a:t>portfolio and segment monitoring: where is churn concentrated? The Signal Ops</a:t>
+            </a:r>
+          </a:p>
+          <a:p>
+            <a:r>
+              <a:t>Console adds a different capability: upload customers, score each row with the</a:t>
+            </a:r>
+          </a:p>
+          <a:p>
+            <a:r>
+              <a:t>deployed Logistic Regression, assign a risk tier, show coefficient-based drivers</a:t>
+            </a:r>
+          </a:p>
+          <a:p>
+            <a:r>
+              <a:t>and a rule-based suggestion, then export the work for review.</a:t>
+            </a:r>
+          </a:p>
+          <a:p/>
+          <a:p>
+            <a:r>
+              <a:t>The two layers are complementary. Close with the caveat: recommendations are</a:t>
+            </a:r>
+          </a:p>
+          <a:p>
+            <a:r>
+              <a:t>decision support; no campaign uplift has been measured, and revenue is framed as</a:t>
+            </a:r>
+          </a:p>
+          <a:p>
+            <a:r>
+              <a:t>at risk rather than saved.</a:t>
             </a:r>
           </a:p>
         </p:txBody>
@@ -26989,7 +27010,7 @@
                 </a:solidFill>
                 <a:latin typeface="Segoe UI"/>
               </a:rPr>
-              <a:t>The problem: retention is still reactive</a:t>
+              <a:t>What RetainIQ adds to the existing project</a:t>
             </a:r>
           </a:p>
         </p:txBody>
@@ -27031,7 +27052,7 @@
                 </a:solidFill>
                 <a:latin typeface="Segoe UI"/>
               </a:rPr>
-              <a:t>Reports explain what happened. They do not say who leaves next.</a:t>
+              <a:t>Power BI gives a portfolio view; the Signal Ops Console adds customer-level scoring and review.</a:t>
             </a:r>
           </a:p>
         </p:txBody>
@@ -27082,14 +27103,106 @@
       </p:sp>
       <p:sp>
         <p:nvSpPr>
-          <p:cNvPr id="7" name="TextBox 6"/>
+          <p:cNvPr id="7" name="Rounded Rectangle 6"/>
+          <p:cNvSpPr/>
+          <p:nvPr/>
+        </p:nvSpPr>
+        <p:spPr>
+          <a:xfrm>
+            <a:off x="566928" y="1517904"/>
+            <a:ext cx="5428335" cy="3429000"/>
+          </a:xfrm>
+          <a:prstGeom prst="roundRect">
+            <a:avLst>
+              <a:gd name="adj" fmla="val 8000"/>
+            </a:avLst>
+          </a:prstGeom>
+          <a:solidFill>
+            <a:srgbClr val="111A2C"/>
+          </a:solidFill>
+          <a:ln w="12700">
+            <a:solidFill>
+              <a:srgbClr val="223049"/>
+            </a:solidFill>
+          </a:ln>
+          <a:effectLst/>
+        </p:spPr>
+        <p:style>
+          <a:lnRef idx="1">
+            <a:schemeClr val="accent1"/>
+          </a:lnRef>
+          <a:fillRef idx="3">
+            <a:schemeClr val="accent1"/>
+          </a:fillRef>
+          <a:effectRef idx="2">
+            <a:schemeClr val="accent1"/>
+          </a:effectRef>
+          <a:fontRef idx="minor">
+            <a:schemeClr val="lt1"/>
+          </a:fontRef>
+        </p:style>
+        <p:txBody>
+          <a:bodyPr rtlCol="0" anchor="ctr"/>
+          <a:lstStyle/>
+          <a:p>
+            <a:pPr algn="ctr"/>
+          </a:p>
+        </p:txBody>
+      </p:sp>
+      <p:sp>
+        <p:nvSpPr>
+          <p:cNvPr id="8" name="Rectangle 7"/>
+          <p:cNvSpPr/>
+          <p:nvPr/>
+        </p:nvSpPr>
+        <p:spPr>
+          <a:xfrm>
+            <a:off x="566928" y="1517904"/>
+            <a:ext cx="41148" cy="3429000"/>
+          </a:xfrm>
+          <a:prstGeom prst="rect">
+            <a:avLst/>
+          </a:prstGeom>
+          <a:solidFill>
+            <a:srgbClr val="4C8DFF"/>
+          </a:solidFill>
+          <a:ln>
+            <a:noFill/>
+          </a:ln>
+          <a:effectLst/>
+        </p:spPr>
+        <p:style>
+          <a:lnRef idx="1">
+            <a:schemeClr val="accent1"/>
+          </a:lnRef>
+          <a:fillRef idx="3">
+            <a:schemeClr val="accent1"/>
+          </a:fillRef>
+          <a:effectRef idx="2">
+            <a:schemeClr val="accent1"/>
+          </a:effectRef>
+          <a:fontRef idx="minor">
+            <a:schemeClr val="lt1"/>
+          </a:fontRef>
+        </p:style>
+        <p:txBody>
+          <a:bodyPr rtlCol="0" anchor="ctr"/>
+          <a:lstStyle/>
+          <a:p>
+            <a:pPr algn="ctr"/>
+          </a:p>
+        </p:txBody>
+      </p:sp>
+      <p:sp>
+        <p:nvSpPr>
+          <p:cNvPr id="9" name="TextBox 8"/>
           <p:cNvSpPr txBox="1"/>
           <p:nvPr/>
         </p:nvSpPr>
         <p:spPr>
           <a:xfrm>
-            <a:off x="566928" y="1517904"/>
-            <a:ext cx="5989320" cy="2194560"/>
+            <a:off x="786384" y="1719072"/>
+            <a:ext cx="4989423" cy="3063240"/>
           </a:xfrm>
           <a:prstGeom prst="rect">
             <a:avLst/>
@@ -27107,132 +27220,107 @@
                 <a:spcPct val="112000"/>
               </a:lnSpc>
               <a:spcAft>
-                <a:spcPts val="100"/>
+                <a:spcPts val="800"/>
               </a:spcAft>
             </a:pPr>
             <a:r>
-              <a:rPr sz="1150" b="1">
+              <a:rPr sz="1080" b="1">
                 <a:solidFill>
-                  <a:srgbClr val="2FD8B4"/>
+                  <a:srgbClr val="4C8DFF"/>
                 </a:solidFill>
-                <a:latin typeface="Segoe UI"/>
+                <a:latin typeface="Consolas"/>
               </a:rPr>
-              <a:t>▸  Churn compounds.</a:t>
+              <a:t>EXISTING · POWER BI</a:t>
             </a:r>
           </a:p>
           <a:p>
             <a:pPr algn="l">
               <a:lnSpc>
-                <a:spcPct val="118000"/>
+                <a:spcPct val="112000"/>
               </a:lnSpc>
               <a:spcAft>
-                <a:spcPts val="0"/>
+                <a:spcPts val="1300"/>
               </a:spcAft>
             </a:pPr>
             <a:r>
-              <a:rPr sz="1100" b="0">
+              <a:rPr sz="1500" b="1">
                 <a:solidFill>
                   <a:srgbClr val="EAF0F7"/>
                 </a:solidFill>
                 <a:latin typeface="Segoe UI"/>
               </a:rPr>
-              <a:t>     26.54% of this customer base churned — 1,869 of 7,043 customers.</a:t>
+              <a:t>Portfolio reporting</a:t>
             </a:r>
           </a:p>
           <a:p>
             <a:pPr algn="l">
               <a:lnSpc>
-                <a:spcPct val="112000"/>
+                <a:spcPct val="122000"/>
               </a:lnSpc>
-              <a:spcBef>
-                <a:spcPts val="800"/>
-              </a:spcBef>
               <a:spcAft>
-                <a:spcPts val="100"/>
+                <a:spcPts val="1100"/>
               </a:spcAft>
             </a:pPr>
             <a:r>
-              <a:rPr sz="1150" b="1">
-                <a:solidFill>
-                  <a:srgbClr val="2FD8B4"/>
-                </a:solidFill>
-                <a:latin typeface="Segoe UI"/>
-              </a:rPr>
-              <a:t>▸  Dashboards describe, they do not prioritise.</a:t>
-            </a:r>
-          </a:p>
-          <a:p>
-            <a:pPr algn="l">
-              <a:lnSpc>
-                <a:spcPct val="118000"/>
-              </a:lnSpc>
-              <a:spcAft>
-                <a:spcPts val="0"/>
-              </a:spcAft>
-            </a:pPr>
-            <a:r>
-              <a:rPr sz="1100" b="0">
+              <a:rPr sz="1260" b="0">
                 <a:solidFill>
                   <a:srgbClr val="EAF0F7"/>
                 </a:solidFill>
                 <a:latin typeface="Segoe UI"/>
               </a:rPr>
-              <a:t>     Knowing last quarter's churn rate does not tell a retention team whom to call today.</a:t>
+              <a:t>•  Aggregates historical churn and portfolio KPIs.</a:t>
             </a:r>
           </a:p>
           <a:p>
             <a:pPr algn="l">
               <a:lnSpc>
-                <a:spcPct val="112000"/>
+                <a:spcPct val="122000"/>
               </a:lnSpc>
-              <a:spcBef>
-                <a:spcPts val="800"/>
-              </a:spcBef>
               <a:spcAft>
-                <a:spcPts val="100"/>
+                <a:spcPts val="1100"/>
               </a:spcAft>
             </a:pPr>
             <a:r>
-              <a:rPr sz="1150" b="1">
-                <a:solidFill>
-                  <a:srgbClr val="2FD8B4"/>
-                </a:solidFill>
-                <a:latin typeface="Segoe UI"/>
-              </a:rPr>
-              <a:t>▸  Generic campaigns waste budget.</a:t>
-            </a:r>
-          </a:p>
-          <a:p>
-            <a:pPr algn="l">
-              <a:lnSpc>
-                <a:spcPct val="118000"/>
-              </a:lnSpc>
-              <a:spcAft>
-                <a:spcPts val="0"/>
-              </a:spcAft>
-            </a:pPr>
-            <a:r>
-              <a:rPr sz="1100" b="0">
+              <a:rPr sz="1260" b="0">
                 <a:solidFill>
                   <a:srgbClr val="EAF0F7"/>
                 </a:solidFill>
                 <a:latin typeface="Segoe UI"/>
               </a:rPr>
-              <a:t>     Blanket offers discount loyal customers and still miss the ones about to leave.</a:t>
-            </a:r>
-          </a:p>
-        </p:txBody>
-      </p:sp>
-      <p:sp>
-        <p:nvSpPr>
-          <p:cNvPr id="8" name="Rounded Rectangle 7"/>
-          <p:cNvSpPr/>
-          <p:nvPr/>
-        </p:nvSpPr>
-        <p:spPr>
-          <a:xfrm>
-            <a:off x="566928" y="3895344"/>
-            <a:ext cx="2889504" cy="1097280"/>
+              <a:t>•  Compares patterns across contract, tenure and service.</a:t>
+            </a:r>
+          </a:p>
+          <a:p>
+            <a:pPr algn="l">
+              <a:lnSpc>
+                <a:spcPct val="122000"/>
+              </a:lnSpc>
+              <a:spcAft>
+                <a:spcPts val="1100"/>
+              </a:spcAft>
+            </a:pPr>
+            <a:r>
+              <a:rPr sz="1260" b="0">
+                <a:solidFill>
+                  <a:srgbClr val="EAF0F7"/>
+                </a:solidFill>
+                <a:latin typeface="Segoe UI"/>
+              </a:rPr>
+              <a:t>•  Answers: where is churn concentrated?</a:t>
+            </a:r>
+          </a:p>
+        </p:txBody>
+      </p:sp>
+      <p:sp>
+        <p:nvSpPr>
+          <p:cNvPr id="10" name="Rounded Rectangle 9"/>
+          <p:cNvSpPr/>
+          <p:nvPr/>
+        </p:nvSpPr>
+        <p:spPr>
+          <a:xfrm>
+            <a:off x="6196431" y="1517904"/>
+            <a:ext cx="5428335" cy="3429000"/>
           </a:xfrm>
           <a:prstGeom prst="roundRect">
             <a:avLst>
@@ -27273,20 +27361,20 @@
       </p:sp>
       <p:sp>
         <p:nvSpPr>
-          <p:cNvPr id="9" name="Rectangle 8"/>
-          <p:cNvSpPr/>
-          <p:nvPr/>
-        </p:nvSpPr>
-        <p:spPr>
-          <a:xfrm>
-            <a:off x="566928" y="4041648"/>
-            <a:ext cx="32004" cy="804671"/>
-          </a:xfrm>
-          <a:prstGeom prst="rect">
-            <a:avLst/>
-          </a:prstGeom>
-          <a:solidFill>
-            <a:srgbClr val="4C8DFF"/>
+          <p:cNvPr id="11" name="Rectangle 10"/>
+          <p:cNvSpPr/>
+          <p:nvPr/>
+        </p:nvSpPr>
+        <p:spPr>
+          <a:xfrm>
+            <a:off x="6196431" y="1517904"/>
+            <a:ext cx="41148" cy="3429000"/>
+          </a:xfrm>
+          <a:prstGeom prst="rect">
+            <a:avLst/>
+          </a:prstGeom>
+          <a:solidFill>
+            <a:srgbClr val="2FD8B4"/>
           </a:solidFill>
           <a:ln>
             <a:noFill/>
@@ -27317,14 +27405,14 @@
       </p:sp>
       <p:sp>
         <p:nvSpPr>
-          <p:cNvPr id="10" name="TextBox 9"/>
+          <p:cNvPr id="12" name="TextBox 11"/>
           <p:cNvSpPr txBox="1"/>
           <p:nvPr/>
         </p:nvSpPr>
         <p:spPr>
           <a:xfrm>
-            <a:off x="768096" y="4059935"/>
-            <a:ext cx="2578608" cy="786383"/>
+            <a:off x="6415887" y="1719072"/>
+            <a:ext cx="4989423" cy="3063240"/>
           </a:xfrm>
           <a:prstGeom prst="rect">
             <a:avLst/>
@@ -27342,50 +27430,126 @@
                 <a:spcPct val="112000"/>
               </a:lnSpc>
               <a:spcAft>
-                <a:spcPts val="300"/>
+                <a:spcPts val="800"/>
               </a:spcAft>
             </a:pPr>
             <a:r>
-              <a:rPr sz="1200" b="1">
+              <a:rPr sz="1080" b="1">
+                <a:solidFill>
+                  <a:srgbClr val="2FD8B4"/>
+                </a:solidFill>
+                <a:latin typeface="Consolas"/>
+              </a:rPr>
+              <a:t>NEW · RETAINIQ SIGNAL OPS</a:t>
+            </a:r>
+          </a:p>
+          <a:p>
+            <a:pPr algn="l">
+              <a:lnSpc>
+                <a:spcPct val="112000"/>
+              </a:lnSpc>
+              <a:spcAft>
+                <a:spcPts val="1300"/>
+              </a:spcAft>
+            </a:pPr>
+            <a:r>
+              <a:rPr sz="1500" b="1">
                 <a:solidFill>
                   <a:srgbClr val="EAF0F7"/>
                 </a:solidFill>
                 <a:latin typeface="Segoe UI"/>
               </a:rPr>
-              <a:t>Who is likely to churn?</a:t>
+              <a:t>Customer-level decision support</a:t>
             </a:r>
           </a:p>
           <a:p>
             <a:pPr algn="l">
               <a:lnSpc>
-                <a:spcPct val="114000"/>
+                <a:spcPct val="122000"/>
               </a:lnSpc>
               <a:spcAft>
-                <a:spcPts val="0"/>
+                <a:spcPts val="1100"/>
               </a:spcAft>
             </a:pPr>
             <a:r>
-              <a:rPr sz="980" b="0">
+              <a:rPr sz="1260" b="0">
                 <a:solidFill>
-                  <a:srgbClr val="8CA0BE"/>
+                  <a:srgbClr val="EAF0F7"/>
                 </a:solidFill>
                 <a:latin typeface="Segoe UI"/>
               </a:rPr>
-              <a:t>Predicted churn probability per customer</a:t>
-            </a:r>
-          </a:p>
-        </p:txBody>
-      </p:sp>
-      <p:sp>
-        <p:nvSpPr>
-          <p:cNvPr id="11" name="Rounded Rectangle 10"/>
-          <p:cNvSpPr/>
-          <p:nvPr/>
-        </p:nvSpPr>
-        <p:spPr>
-          <a:xfrm>
-            <a:off x="3621024" y="3895344"/>
-            <a:ext cx="2889504" cy="1097280"/>
+              <a:t>•  Scores uploaded rows with the deployed Logistic Regression.</a:t>
+            </a:r>
+          </a:p>
+          <a:p>
+            <a:pPr algn="l">
+              <a:lnSpc>
+                <a:spcPct val="122000"/>
+              </a:lnSpc>
+              <a:spcAft>
+                <a:spcPts val="1100"/>
+              </a:spcAft>
+            </a:pPr>
+            <a:r>
+              <a:rPr sz="1260" b="0">
+                <a:solidFill>
+                  <a:srgbClr val="EAF0F7"/>
+                </a:solidFill>
+                <a:latin typeface="Segoe UI"/>
+              </a:rPr>
+              <a:t>•  Returns churn probability and a Low / Medium / High risk tier.</a:t>
+            </a:r>
+          </a:p>
+          <a:p>
+            <a:pPr algn="l">
+              <a:lnSpc>
+                <a:spcPct val="122000"/>
+              </a:lnSpc>
+              <a:spcAft>
+                <a:spcPts val="1100"/>
+              </a:spcAft>
+            </a:pPr>
+            <a:r>
+              <a:rPr sz="1260" b="0">
+                <a:solidFill>
+                  <a:srgbClr val="EAF0F7"/>
+                </a:solidFill>
+                <a:latin typeface="Segoe UI"/>
+              </a:rPr>
+              <a:t>•  Shows coefficient-based drivers and rule-based suggestions.</a:t>
+            </a:r>
+          </a:p>
+          <a:p>
+            <a:pPr algn="l">
+              <a:lnSpc>
+                <a:spcPct val="122000"/>
+              </a:lnSpc>
+              <a:spcAft>
+                <a:spcPts val="1100"/>
+              </a:spcAft>
+            </a:pPr>
+            <a:r>
+              <a:rPr sz="1260" b="0">
+                <a:solidFill>
+                  <a:srgbClr val="EAF0F7"/>
+                </a:solidFill>
+                <a:latin typeface="Segoe UI"/>
+              </a:rPr>
+              <a:t>•  Supports bulk review and private report downloads.</a:t>
+            </a:r>
+          </a:p>
+        </p:txBody>
+      </p:sp>
+      <p:sp>
+        <p:nvSpPr>
+          <p:cNvPr id="13" name="Rounded Rectangle 12"/>
+          <p:cNvSpPr/>
+          <p:nvPr/>
+        </p:nvSpPr>
+        <p:spPr>
+          <a:xfrm>
+            <a:off x="566928" y="5093208"/>
+            <a:ext cx="11057839" cy="731520"/>
           </a:xfrm>
           <a:prstGeom prst="roundRect">
             <a:avLst>
@@ -27393,11 +27557,11 @@
             </a:avLst>
           </a:prstGeom>
           <a:solidFill>
-            <a:srgbClr val="111A2C"/>
-          </a:solidFill>
-          <a:ln w="12700">
+            <a:srgbClr val="162136"/>
+          </a:solidFill>
+          <a:ln w="13970">
             <a:solidFill>
-              <a:srgbClr val="223049"/>
+              <a:srgbClr val="2FD8B4"/>
             </a:solidFill>
           </a:ln>
           <a:effectLst/>
@@ -27426,58 +27590,14 @@
       </p:sp>
       <p:sp>
         <p:nvSpPr>
-          <p:cNvPr id="12" name="Rectangle 11"/>
-          <p:cNvSpPr/>
-          <p:nvPr/>
-        </p:nvSpPr>
-        <p:spPr>
-          <a:xfrm>
-            <a:off x="3621024" y="4041648"/>
-            <a:ext cx="32004" cy="804671"/>
-          </a:xfrm>
-          <a:prstGeom prst="rect">
-            <a:avLst/>
-          </a:prstGeom>
-          <a:solidFill>
-            <a:srgbClr val="F5A623"/>
-          </a:solidFill>
-          <a:ln>
-            <a:noFill/>
-          </a:ln>
-          <a:effectLst/>
-        </p:spPr>
-        <p:style>
-          <a:lnRef idx="1">
-            <a:schemeClr val="accent1"/>
-          </a:lnRef>
-          <a:fillRef idx="3">
-            <a:schemeClr val="accent1"/>
-          </a:fillRef>
-          <a:effectRef idx="2">
-            <a:schemeClr val="accent1"/>
-          </a:effectRef>
-          <a:fontRef idx="minor">
-            <a:schemeClr val="lt1"/>
-          </a:fontRef>
-        </p:style>
-        <p:txBody>
-          <a:bodyPr rtlCol="0" anchor="ctr"/>
-          <a:lstStyle/>
-          <a:p>
-            <a:pPr algn="ctr"/>
-          </a:p>
-        </p:txBody>
-      </p:sp>
-      <p:sp>
-        <p:nvSpPr>
-          <p:cNvPr id="13" name="TextBox 12"/>
+          <p:cNvPr id="14" name="TextBox 13"/>
           <p:cNvSpPr txBox="1"/>
           <p:nvPr/>
         </p:nvSpPr>
         <p:spPr>
           <a:xfrm>
-            <a:off x="3822191" y="4059935"/>
-            <a:ext cx="2578608" cy="786383"/>
+            <a:off x="768096" y="5184648"/>
+            <a:ext cx="10655503" cy="566928"/>
           </a:xfrm>
           <a:prstGeom prst="rect">
             <a:avLst/>
@@ -27495,367 +27615,19 @@
                 <a:spcPct val="112000"/>
               </a:lnSpc>
               <a:spcAft>
-                <a:spcPts val="300"/>
+                <a:spcPts val="600"/>
               </a:spcAft>
             </a:pPr>
             <a:r>
-              <a:rPr sz="1200" b="1">
+              <a:rPr sz="1440" b="1">
                 <a:solidFill>
                   <a:srgbClr val="EAF0F7"/>
                 </a:solidFill>
                 <a:latin typeface="Segoe UI"/>
               </a:rPr>
-              <a:t>Why are they at risk?</a:t>
-            </a:r>
-          </a:p>
-          <a:p>
-            <a:pPr algn="l">
-              <a:lnSpc>
-                <a:spcPct val="114000"/>
-              </a:lnSpc>
-              <a:spcAft>
-                <a:spcPts val="0"/>
-              </a:spcAft>
-            </a:pPr>
-            <a:r>
-              <a:rPr sz="980" b="0">
-                <a:solidFill>
-                  <a:srgbClr val="8CA0BE"/>
-                </a:solidFill>
-                <a:latin typeface="Segoe UI"/>
-              </a:rPr>
-              <a:t>Feature contributions behind each prediction</a:t>
-            </a:r>
-          </a:p>
-        </p:txBody>
-      </p:sp>
-      <p:sp>
-        <p:nvSpPr>
-          <p:cNvPr id="14" name="Rounded Rectangle 13"/>
-          <p:cNvSpPr/>
-          <p:nvPr/>
-        </p:nvSpPr>
-        <p:spPr>
-          <a:xfrm>
-            <a:off x="566928" y="5120640"/>
-            <a:ext cx="2889504" cy="1097280"/>
-          </a:xfrm>
-          <a:prstGeom prst="roundRect">
-            <a:avLst>
-              <a:gd name="adj" fmla="val 8000"/>
-            </a:avLst>
-          </a:prstGeom>
-          <a:solidFill>
-            <a:srgbClr val="111A2C"/>
-          </a:solidFill>
-          <a:ln w="12700">
-            <a:solidFill>
-              <a:srgbClr val="223049"/>
-            </a:solidFill>
-          </a:ln>
-          <a:effectLst/>
-        </p:spPr>
-        <p:style>
-          <a:lnRef idx="1">
-            <a:schemeClr val="accent1"/>
-          </a:lnRef>
-          <a:fillRef idx="3">
-            <a:schemeClr val="accent1"/>
-          </a:fillRef>
-          <a:effectRef idx="2">
-            <a:schemeClr val="accent1"/>
-          </a:effectRef>
-          <a:fontRef idx="minor">
-            <a:schemeClr val="lt1"/>
-          </a:fontRef>
-        </p:style>
-        <p:txBody>
-          <a:bodyPr rtlCol="0" anchor="ctr"/>
-          <a:lstStyle/>
-          <a:p>
-            <a:pPr algn="ctr"/>
-          </a:p>
-        </p:txBody>
-      </p:sp>
-      <p:sp>
-        <p:nvSpPr>
-          <p:cNvPr id="15" name="Rectangle 14"/>
-          <p:cNvSpPr/>
-          <p:nvPr/>
-        </p:nvSpPr>
-        <p:spPr>
-          <a:xfrm>
-            <a:off x="566928" y="5266944"/>
-            <a:ext cx="32004" cy="804671"/>
-          </a:xfrm>
-          <a:prstGeom prst="rect">
-            <a:avLst/>
-          </a:prstGeom>
-          <a:solidFill>
-            <a:srgbClr val="2FD8B4"/>
-          </a:solidFill>
-          <a:ln>
-            <a:noFill/>
-          </a:ln>
-          <a:effectLst/>
-        </p:spPr>
-        <p:style>
-          <a:lnRef idx="1">
-            <a:schemeClr val="accent1"/>
-          </a:lnRef>
-          <a:fillRef idx="3">
-            <a:schemeClr val="accent1"/>
-          </a:fillRef>
-          <a:effectRef idx="2">
-            <a:schemeClr val="accent1"/>
-          </a:effectRef>
-          <a:fontRef idx="minor">
-            <a:schemeClr val="lt1"/>
-          </a:fontRef>
-        </p:style>
-        <p:txBody>
-          <a:bodyPr rtlCol="0" anchor="ctr"/>
-          <a:lstStyle/>
-          <a:p>
-            <a:pPr algn="ctr"/>
-          </a:p>
-        </p:txBody>
-      </p:sp>
-      <p:sp>
-        <p:nvSpPr>
-          <p:cNvPr id="16" name="TextBox 15"/>
-          <p:cNvSpPr txBox="1"/>
-          <p:nvPr/>
-        </p:nvSpPr>
-        <p:spPr>
-          <a:xfrm>
-            <a:off x="768096" y="5285231"/>
-            <a:ext cx="2578608" cy="786383"/>
-          </a:xfrm>
-          <a:prstGeom prst="rect">
-            <a:avLst/>
-          </a:prstGeom>
-          <a:noFill/>
-        </p:spPr>
-        <p:txBody>
-          <a:bodyPr wrap="square" lIns="0" rIns="0" tIns="0" bIns="0" anchor="t">
-            <a:spAutoFit/>
-          </a:bodyPr>
-          <a:lstStyle/>
-          <a:p>
-            <a:pPr algn="l">
-              <a:lnSpc>
-                <a:spcPct val="112000"/>
-              </a:lnSpc>
-              <a:spcAft>
-                <a:spcPts val="300"/>
-              </a:spcAft>
-            </a:pPr>
-            <a:r>
-              <a:rPr sz="1200" b="1">
-                <a:solidFill>
-                  <a:srgbClr val="EAF0F7"/>
-                </a:solidFill>
-                <a:latin typeface="Segoe UI"/>
-              </a:rPr>
-              <a:t>What should we do?</a:t>
-            </a:r>
-          </a:p>
-          <a:p>
-            <a:pPr algn="l">
-              <a:lnSpc>
-                <a:spcPct val="114000"/>
-              </a:lnSpc>
-              <a:spcAft>
-                <a:spcPts val="0"/>
-              </a:spcAft>
-            </a:pPr>
-            <a:r>
-              <a:rPr sz="980" b="0">
-                <a:solidFill>
-                  <a:srgbClr val="8CA0BE"/>
-                </a:solidFill>
-                <a:latin typeface="Segoe UI"/>
-              </a:rPr>
-              <a:t>A retention action matched to the risk drivers</a:t>
-            </a:r>
-          </a:p>
-        </p:txBody>
-      </p:sp>
-      <p:sp>
-        <p:nvSpPr>
-          <p:cNvPr id="17" name="Rounded Rectangle 16"/>
-          <p:cNvSpPr/>
-          <p:nvPr/>
-        </p:nvSpPr>
-        <p:spPr>
-          <a:xfrm>
-            <a:off x="3621024" y="5120640"/>
-            <a:ext cx="2889504" cy="1097280"/>
-          </a:xfrm>
-          <a:prstGeom prst="roundRect">
-            <a:avLst>
-              <a:gd name="adj" fmla="val 8000"/>
-            </a:avLst>
-          </a:prstGeom>
-          <a:solidFill>
-            <a:srgbClr val="111A2C"/>
-          </a:solidFill>
-          <a:ln w="12700">
-            <a:solidFill>
-              <a:srgbClr val="223049"/>
-            </a:solidFill>
-          </a:ln>
-          <a:effectLst/>
-        </p:spPr>
-        <p:style>
-          <a:lnRef idx="1">
-            <a:schemeClr val="accent1"/>
-          </a:lnRef>
-          <a:fillRef idx="3">
-            <a:schemeClr val="accent1"/>
-          </a:fillRef>
-          <a:effectRef idx="2">
-            <a:schemeClr val="accent1"/>
-          </a:effectRef>
-          <a:fontRef idx="minor">
-            <a:schemeClr val="lt1"/>
-          </a:fontRef>
-        </p:style>
-        <p:txBody>
-          <a:bodyPr rtlCol="0" anchor="ctr"/>
-          <a:lstStyle/>
-          <a:p>
-            <a:pPr algn="ctr"/>
-          </a:p>
-        </p:txBody>
-      </p:sp>
-      <p:sp>
-        <p:nvSpPr>
-          <p:cNvPr id="18" name="Rectangle 17"/>
-          <p:cNvSpPr/>
-          <p:nvPr/>
-        </p:nvSpPr>
-        <p:spPr>
-          <a:xfrm>
-            <a:off x="3621024" y="5266944"/>
-            <a:ext cx="32004" cy="804671"/>
-          </a:xfrm>
-          <a:prstGeom prst="rect">
-            <a:avLst/>
-          </a:prstGeom>
-          <a:solidFill>
-            <a:srgbClr val="FF5C6C"/>
-          </a:solidFill>
-          <a:ln>
-            <a:noFill/>
-          </a:ln>
-          <a:effectLst/>
-        </p:spPr>
-        <p:style>
-          <a:lnRef idx="1">
-            <a:schemeClr val="accent1"/>
-          </a:lnRef>
-          <a:fillRef idx="3">
-            <a:schemeClr val="accent1"/>
-          </a:fillRef>
-          <a:effectRef idx="2">
-            <a:schemeClr val="accent1"/>
-          </a:effectRef>
-          <a:fontRef idx="minor">
-            <a:schemeClr val="lt1"/>
-          </a:fontRef>
-        </p:style>
-        <p:txBody>
-          <a:bodyPr rtlCol="0" anchor="ctr"/>
-          <a:lstStyle/>
-          <a:p>
-            <a:pPr algn="ctr"/>
-          </a:p>
-        </p:txBody>
-      </p:sp>
-      <p:sp>
-        <p:nvSpPr>
-          <p:cNvPr id="19" name="TextBox 18"/>
-          <p:cNvSpPr txBox="1"/>
-          <p:nvPr/>
-        </p:nvSpPr>
-        <p:spPr>
-          <a:xfrm>
-            <a:off x="3822191" y="5285231"/>
-            <a:ext cx="2578608" cy="786383"/>
-          </a:xfrm>
-          <a:prstGeom prst="rect">
-            <a:avLst/>
-          </a:prstGeom>
-          <a:noFill/>
-        </p:spPr>
-        <p:txBody>
-          <a:bodyPr wrap="square" lIns="0" rIns="0" tIns="0" bIns="0" anchor="t">
-            <a:spAutoFit/>
-          </a:bodyPr>
-          <a:lstStyle/>
-          <a:p>
-            <a:pPr algn="l">
-              <a:lnSpc>
-                <a:spcPct val="112000"/>
-              </a:lnSpc>
-              <a:spcAft>
-                <a:spcPts val="300"/>
-              </a:spcAft>
-            </a:pPr>
-            <a:r>
-              <a:rPr sz="1200" b="1">
-                <a:solidFill>
-                  <a:srgbClr val="EAF0F7"/>
-                </a:solidFill>
-                <a:latin typeface="Segoe UI"/>
-              </a:rPr>
-              <a:t>What is at stake?</a:t>
-            </a:r>
-          </a:p>
-          <a:p>
-            <a:pPr algn="l">
-              <a:lnSpc>
-                <a:spcPct val="114000"/>
-              </a:lnSpc>
-              <a:spcAft>
-                <a:spcPts val="0"/>
-              </a:spcAft>
-            </a:pPr>
-            <a:r>
-              <a:rPr sz="980" b="0">
-                <a:solidFill>
-                  <a:srgbClr val="8CA0BE"/>
-                </a:solidFill>
-                <a:latin typeface="Segoe UI"/>
-              </a:rPr>
-              <a:t>Monthly recurring revenue exposed in each risk band</a:t>
-            </a:r>
-          </a:p>
-        </p:txBody>
-      </p:sp>
-      <p:sp>
-        <p:nvSpPr>
-          <p:cNvPr id="20" name="TextBox 19"/>
-          <p:cNvSpPr txBox="1"/>
-          <p:nvPr/>
-        </p:nvSpPr>
-        <p:spPr>
-          <a:xfrm>
-            <a:off x="7187184" y="1700784"/>
-            <a:ext cx="4206240" cy="274320"/>
-          </a:xfrm>
-          <a:prstGeom prst="rect">
-            <a:avLst/>
-          </a:prstGeom>
-          <a:noFill/>
-        </p:spPr>
-        <p:txBody>
-          <a:bodyPr wrap="square" lIns="0" rIns="0" tIns="0" bIns="0" anchor="t">
-            <a:spAutoFit/>
-          </a:bodyPr>
-          <a:lstStyle/>
+              <a:t>POWER BI monitors the portfolio. RETAINIQ prioritises new customer uploads for review.</a:t>
+            </a:r>
+          </a:p>
           <a:p>
             <a:pPr algn="l">
               <a:lnSpc>
@@ -27866,753 +27638,27 @@
               </a:spcAft>
             </a:pPr>
             <a:r>
-              <a:rPr sz="1050" b="1">
+              <a:rPr sz="1120" b="0">
                 <a:solidFill>
-                  <a:srgbClr val="8CA0BE"/>
-                </a:solidFill>
-                <a:latin typeface="Consolas"/>
-              </a:rPr>
-              <a:t>THE BASE RATE</a:t>
-            </a:r>
-          </a:p>
-        </p:txBody>
-      </p:sp>
-      <p:pic>
-        <p:nvPicPr>
-          <p:cNvPr id="21" name="Picture 20" descr="chart_churn_split.png"/>
-          <p:cNvPicPr>
-            <a:picLocks noChangeAspect="1"/>
-          </p:cNvPicPr>
-          <p:nvPr/>
-        </p:nvPicPr>
-        <p:blipFill>
-          <a:blip r:embed="rId2"/>
-          <a:stretch>
-            <a:fillRect/>
-          </a:stretch>
-        </p:blipFill>
-        <p:spPr>
-          <a:xfrm>
-            <a:off x="7511796" y="1956815"/>
-            <a:ext cx="3566159" cy="3566159"/>
-          </a:xfrm>
-          <a:prstGeom prst="rect">
-            <a:avLst/>
-          </a:prstGeom>
-        </p:spPr>
-      </p:pic>
-      <p:sp>
-        <p:nvSpPr>
-          <p:cNvPr id="22" name="TextBox 21"/>
-          <p:cNvSpPr txBox="1"/>
-          <p:nvPr/>
-        </p:nvSpPr>
-        <p:spPr>
-          <a:xfrm>
-            <a:off x="7187184" y="5614416"/>
-            <a:ext cx="4206240" cy="603504"/>
-          </a:xfrm>
-          <a:prstGeom prst="rect">
-            <a:avLst/>
-          </a:prstGeom>
-          <a:noFill/>
-        </p:spPr>
-        <p:txBody>
-          <a:bodyPr wrap="square" lIns="0" rIns="0" tIns="0" bIns="0" anchor="t">
-            <a:spAutoFit/>
-          </a:bodyPr>
-          <a:lstStyle/>
-          <a:p>
-            <a:pPr algn="l">
-              <a:lnSpc>
-                <a:spcPct val="116000"/>
-              </a:lnSpc>
-              <a:spcAft>
-                <a:spcPts val="0"/>
-              </a:spcAft>
-            </a:pPr>
-            <a:r>
-              <a:rPr sz="1050" b="0">
-                <a:solidFill>
-                  <a:srgbClr val="8CA0BE"/>
+                  <a:srgbClr val="2FD8B4"/>
                 </a:solidFill>
                 <a:latin typeface="Segoe UI"/>
               </a:rPr>
-              <a:t>1,869 churned · 5,174 retained of 7,043. Predicting "nobody churns" is already 73.46% accurate — which is why accuracy alone decides nothing here.</a:t>
-            </a:r>
-          </a:p>
-        </p:txBody>
-      </p:sp>
-      <p:sp>
-        <p:nvSpPr>
-          <p:cNvPr id="23" name="Rectangle 22"/>
-          <p:cNvSpPr/>
-          <p:nvPr/>
-        </p:nvSpPr>
-        <p:spPr>
-          <a:xfrm>
-            <a:off x="566928" y="6296558"/>
-            <a:ext cx="743145" cy="68580"/>
-          </a:xfrm>
-          <a:prstGeom prst="rect">
-            <a:avLst/>
-          </a:prstGeom>
-          <a:solidFill>
-            <a:srgbClr val="2FD8B4"/>
-          </a:solidFill>
-          <a:ln>
-            <a:noFill/>
-          </a:ln>
-          <a:effectLst/>
-        </p:spPr>
-        <p:style>
-          <a:lnRef idx="1">
-            <a:schemeClr val="accent1"/>
-          </a:lnRef>
-          <a:fillRef idx="3">
-            <a:schemeClr val="accent1"/>
-          </a:fillRef>
-          <a:effectRef idx="2">
-            <a:schemeClr val="accent1"/>
-          </a:effectRef>
-          <a:fontRef idx="minor">
-            <a:schemeClr val="lt1"/>
-          </a:fontRef>
-        </p:style>
-        <p:txBody>
-          <a:bodyPr rtlCol="0" anchor="ctr"/>
-          <a:lstStyle/>
-          <a:p>
-            <a:pPr algn="ctr"/>
-          </a:p>
-        </p:txBody>
-      </p:sp>
-      <p:sp>
-        <p:nvSpPr>
-          <p:cNvPr id="24" name="Rectangle 23"/>
-          <p:cNvSpPr/>
-          <p:nvPr/>
-        </p:nvSpPr>
-        <p:spPr>
-          <a:xfrm>
-            <a:off x="1360365" y="6309360"/>
-            <a:ext cx="743145" cy="43891"/>
-          </a:xfrm>
-          <a:prstGeom prst="rect">
-            <a:avLst/>
-          </a:prstGeom>
-          <a:solidFill>
-            <a:srgbClr val="223049"/>
-          </a:solidFill>
-          <a:ln>
-            <a:noFill/>
-          </a:ln>
-          <a:effectLst/>
-        </p:spPr>
-        <p:style>
-          <a:lnRef idx="1">
-            <a:schemeClr val="accent1"/>
-          </a:lnRef>
-          <a:fillRef idx="3">
-            <a:schemeClr val="accent1"/>
-          </a:fillRef>
-          <a:effectRef idx="2">
-            <a:schemeClr val="accent1"/>
-          </a:effectRef>
-          <a:fontRef idx="minor">
-            <a:schemeClr val="lt1"/>
-          </a:fontRef>
-        </p:style>
-        <p:txBody>
-          <a:bodyPr rtlCol="0" anchor="ctr"/>
-          <a:lstStyle/>
-          <a:p>
-            <a:pPr algn="ctr"/>
-          </a:p>
-        </p:txBody>
-      </p:sp>
-      <p:sp>
-        <p:nvSpPr>
-          <p:cNvPr id="25" name="Rectangle 24"/>
-          <p:cNvSpPr/>
-          <p:nvPr/>
-        </p:nvSpPr>
-        <p:spPr>
-          <a:xfrm>
-            <a:off x="2153803" y="6309360"/>
-            <a:ext cx="743145" cy="43891"/>
-          </a:xfrm>
-          <a:prstGeom prst="rect">
-            <a:avLst/>
-          </a:prstGeom>
-          <a:solidFill>
-            <a:srgbClr val="223049"/>
-          </a:solidFill>
-          <a:ln>
-            <a:noFill/>
-          </a:ln>
-          <a:effectLst/>
-        </p:spPr>
-        <p:style>
-          <a:lnRef idx="1">
-            <a:schemeClr val="accent1"/>
-          </a:lnRef>
-          <a:fillRef idx="3">
-            <a:schemeClr val="accent1"/>
-          </a:fillRef>
-          <a:effectRef idx="2">
-            <a:schemeClr val="accent1"/>
-          </a:effectRef>
-          <a:fontRef idx="minor">
-            <a:schemeClr val="lt1"/>
-          </a:fontRef>
-        </p:style>
-        <p:txBody>
-          <a:bodyPr rtlCol="0" anchor="ctr"/>
-          <a:lstStyle/>
-          <a:p>
-            <a:pPr algn="ctr"/>
-          </a:p>
-        </p:txBody>
-      </p:sp>
-      <p:sp>
-        <p:nvSpPr>
-          <p:cNvPr id="26" name="Rectangle 25"/>
-          <p:cNvSpPr/>
-          <p:nvPr/>
-        </p:nvSpPr>
-        <p:spPr>
-          <a:xfrm>
-            <a:off x="2947241" y="6309360"/>
-            <a:ext cx="743145" cy="43891"/>
-          </a:xfrm>
-          <a:prstGeom prst="rect">
-            <a:avLst/>
-          </a:prstGeom>
-          <a:solidFill>
-            <a:srgbClr val="223049"/>
-          </a:solidFill>
-          <a:ln>
-            <a:noFill/>
-          </a:ln>
-          <a:effectLst/>
-        </p:spPr>
-        <p:style>
-          <a:lnRef idx="1">
-            <a:schemeClr val="accent1"/>
-          </a:lnRef>
-          <a:fillRef idx="3">
-            <a:schemeClr val="accent1"/>
-          </a:fillRef>
-          <a:effectRef idx="2">
-            <a:schemeClr val="accent1"/>
-          </a:effectRef>
-          <a:fontRef idx="minor">
-            <a:schemeClr val="lt1"/>
-          </a:fontRef>
-        </p:style>
-        <p:txBody>
-          <a:bodyPr rtlCol="0" anchor="ctr"/>
-          <a:lstStyle/>
-          <a:p>
-            <a:pPr algn="ctr"/>
-          </a:p>
-        </p:txBody>
-      </p:sp>
-      <p:sp>
-        <p:nvSpPr>
-          <p:cNvPr id="27" name="Rectangle 26"/>
-          <p:cNvSpPr/>
-          <p:nvPr/>
-        </p:nvSpPr>
-        <p:spPr>
-          <a:xfrm>
-            <a:off x="3740679" y="6309360"/>
-            <a:ext cx="743145" cy="43891"/>
-          </a:xfrm>
-          <a:prstGeom prst="rect">
-            <a:avLst/>
-          </a:prstGeom>
-          <a:solidFill>
-            <a:srgbClr val="223049"/>
-          </a:solidFill>
-          <a:ln>
-            <a:noFill/>
-          </a:ln>
-          <a:effectLst/>
-        </p:spPr>
-        <p:style>
-          <a:lnRef idx="1">
-            <a:schemeClr val="accent1"/>
-          </a:lnRef>
-          <a:fillRef idx="3">
-            <a:schemeClr val="accent1"/>
-          </a:fillRef>
-          <a:effectRef idx="2">
-            <a:schemeClr val="accent1"/>
-          </a:effectRef>
-          <a:fontRef idx="minor">
-            <a:schemeClr val="lt1"/>
-          </a:fontRef>
-        </p:style>
-        <p:txBody>
-          <a:bodyPr rtlCol="0" anchor="ctr"/>
-          <a:lstStyle/>
-          <a:p>
-            <a:pPr algn="ctr"/>
-          </a:p>
-        </p:txBody>
-      </p:sp>
-      <p:sp>
-        <p:nvSpPr>
-          <p:cNvPr id="28" name="Rectangle 27"/>
-          <p:cNvSpPr/>
-          <p:nvPr/>
-        </p:nvSpPr>
-        <p:spPr>
-          <a:xfrm>
-            <a:off x="4534117" y="6309360"/>
-            <a:ext cx="743145" cy="43891"/>
-          </a:xfrm>
-          <a:prstGeom prst="rect">
-            <a:avLst/>
-          </a:prstGeom>
-          <a:solidFill>
-            <a:srgbClr val="223049"/>
-          </a:solidFill>
-          <a:ln>
-            <a:noFill/>
-          </a:ln>
-          <a:effectLst/>
-        </p:spPr>
-        <p:style>
-          <a:lnRef idx="1">
-            <a:schemeClr val="accent1"/>
-          </a:lnRef>
-          <a:fillRef idx="3">
-            <a:schemeClr val="accent1"/>
-          </a:fillRef>
-          <a:effectRef idx="2">
-            <a:schemeClr val="accent1"/>
-          </a:effectRef>
-          <a:fontRef idx="minor">
-            <a:schemeClr val="lt1"/>
-          </a:fontRef>
-        </p:style>
-        <p:txBody>
-          <a:bodyPr rtlCol="0" anchor="ctr"/>
-          <a:lstStyle/>
-          <a:p>
-            <a:pPr algn="ctr"/>
-          </a:p>
-        </p:txBody>
-      </p:sp>
-      <p:sp>
-        <p:nvSpPr>
-          <p:cNvPr id="29" name="Rectangle 28"/>
-          <p:cNvSpPr/>
-          <p:nvPr/>
-        </p:nvSpPr>
-        <p:spPr>
-          <a:xfrm>
-            <a:off x="5327555" y="6309360"/>
-            <a:ext cx="743145" cy="43891"/>
-          </a:xfrm>
-          <a:prstGeom prst="rect">
-            <a:avLst/>
-          </a:prstGeom>
-          <a:solidFill>
-            <a:srgbClr val="223049"/>
-          </a:solidFill>
-          <a:ln>
-            <a:noFill/>
-          </a:ln>
-          <a:effectLst/>
-        </p:spPr>
-        <p:style>
-          <a:lnRef idx="1">
-            <a:schemeClr val="accent1"/>
-          </a:lnRef>
-          <a:fillRef idx="3">
-            <a:schemeClr val="accent1"/>
-          </a:fillRef>
-          <a:effectRef idx="2">
-            <a:schemeClr val="accent1"/>
-          </a:effectRef>
-          <a:fontRef idx="minor">
-            <a:schemeClr val="lt1"/>
-          </a:fontRef>
-        </p:style>
-        <p:txBody>
-          <a:bodyPr rtlCol="0" anchor="ctr"/>
-          <a:lstStyle/>
-          <a:p>
-            <a:pPr algn="ctr"/>
-          </a:p>
-        </p:txBody>
-      </p:sp>
-      <p:sp>
-        <p:nvSpPr>
-          <p:cNvPr id="30" name="Rectangle 29"/>
-          <p:cNvSpPr/>
-          <p:nvPr/>
-        </p:nvSpPr>
-        <p:spPr>
-          <a:xfrm>
-            <a:off x="6120993" y="6309360"/>
-            <a:ext cx="743145" cy="43891"/>
-          </a:xfrm>
-          <a:prstGeom prst="rect">
-            <a:avLst/>
-          </a:prstGeom>
-          <a:solidFill>
-            <a:srgbClr val="223049"/>
-          </a:solidFill>
-          <a:ln>
-            <a:noFill/>
-          </a:ln>
-          <a:effectLst/>
-        </p:spPr>
-        <p:style>
-          <a:lnRef idx="1">
-            <a:schemeClr val="accent1"/>
-          </a:lnRef>
-          <a:fillRef idx="3">
-            <a:schemeClr val="accent1"/>
-          </a:fillRef>
-          <a:effectRef idx="2">
-            <a:schemeClr val="accent1"/>
-          </a:effectRef>
-          <a:fontRef idx="minor">
-            <a:schemeClr val="lt1"/>
-          </a:fontRef>
-        </p:style>
-        <p:txBody>
-          <a:bodyPr rtlCol="0" anchor="ctr"/>
-          <a:lstStyle/>
-          <a:p>
-            <a:pPr algn="ctr"/>
-          </a:p>
-        </p:txBody>
-      </p:sp>
-      <p:sp>
-        <p:nvSpPr>
-          <p:cNvPr id="31" name="Rectangle 30"/>
-          <p:cNvSpPr/>
-          <p:nvPr/>
-        </p:nvSpPr>
-        <p:spPr>
-          <a:xfrm>
-            <a:off x="6914431" y="6309360"/>
-            <a:ext cx="743145" cy="43891"/>
-          </a:xfrm>
-          <a:prstGeom prst="rect">
-            <a:avLst/>
-          </a:prstGeom>
-          <a:solidFill>
-            <a:srgbClr val="223049"/>
-          </a:solidFill>
-          <a:ln>
-            <a:noFill/>
-          </a:ln>
-          <a:effectLst/>
-        </p:spPr>
-        <p:style>
-          <a:lnRef idx="1">
-            <a:schemeClr val="accent1"/>
-          </a:lnRef>
-          <a:fillRef idx="3">
-            <a:schemeClr val="accent1"/>
-          </a:fillRef>
-          <a:effectRef idx="2">
-            <a:schemeClr val="accent1"/>
-          </a:effectRef>
-          <a:fontRef idx="minor">
-            <a:schemeClr val="lt1"/>
-          </a:fontRef>
-        </p:style>
-        <p:txBody>
-          <a:bodyPr rtlCol="0" anchor="ctr"/>
-          <a:lstStyle/>
-          <a:p>
-            <a:pPr algn="ctr"/>
-          </a:p>
-        </p:txBody>
-      </p:sp>
-      <p:sp>
-        <p:nvSpPr>
-          <p:cNvPr id="32" name="Rectangle 31"/>
-          <p:cNvSpPr/>
-          <p:nvPr/>
-        </p:nvSpPr>
-        <p:spPr>
-          <a:xfrm>
-            <a:off x="7707869" y="6309360"/>
-            <a:ext cx="743145" cy="43891"/>
-          </a:xfrm>
-          <a:prstGeom prst="rect">
-            <a:avLst/>
-          </a:prstGeom>
-          <a:solidFill>
-            <a:srgbClr val="223049"/>
-          </a:solidFill>
-          <a:ln>
-            <a:noFill/>
-          </a:ln>
-          <a:effectLst/>
-        </p:spPr>
-        <p:style>
-          <a:lnRef idx="1">
-            <a:schemeClr val="accent1"/>
-          </a:lnRef>
-          <a:fillRef idx="3">
-            <a:schemeClr val="accent1"/>
-          </a:fillRef>
-          <a:effectRef idx="2">
-            <a:schemeClr val="accent1"/>
-          </a:effectRef>
-          <a:fontRef idx="minor">
-            <a:schemeClr val="lt1"/>
-          </a:fontRef>
-        </p:style>
-        <p:txBody>
-          <a:bodyPr rtlCol="0" anchor="ctr"/>
-          <a:lstStyle/>
-          <a:p>
-            <a:pPr algn="ctr"/>
-          </a:p>
-        </p:txBody>
-      </p:sp>
-      <p:sp>
-        <p:nvSpPr>
-          <p:cNvPr id="33" name="Rectangle 32"/>
-          <p:cNvSpPr/>
-          <p:nvPr/>
-        </p:nvSpPr>
-        <p:spPr>
-          <a:xfrm>
-            <a:off x="8501307" y="6309360"/>
-            <a:ext cx="743145" cy="43891"/>
-          </a:xfrm>
-          <a:prstGeom prst="rect">
-            <a:avLst/>
-          </a:prstGeom>
-          <a:solidFill>
-            <a:srgbClr val="223049"/>
-          </a:solidFill>
-          <a:ln>
-            <a:noFill/>
-          </a:ln>
-          <a:effectLst/>
-        </p:spPr>
-        <p:style>
-          <a:lnRef idx="1">
-            <a:schemeClr val="accent1"/>
-          </a:lnRef>
-          <a:fillRef idx="3">
-            <a:schemeClr val="accent1"/>
-          </a:fillRef>
-          <a:effectRef idx="2">
-            <a:schemeClr val="accent1"/>
-          </a:effectRef>
-          <a:fontRef idx="minor">
-            <a:schemeClr val="lt1"/>
-          </a:fontRef>
-        </p:style>
-        <p:txBody>
-          <a:bodyPr rtlCol="0" anchor="ctr"/>
-          <a:lstStyle/>
-          <a:p>
-            <a:pPr algn="ctr"/>
-          </a:p>
-        </p:txBody>
-      </p:sp>
-      <p:sp>
-        <p:nvSpPr>
-          <p:cNvPr id="34" name="Rectangle 33"/>
-          <p:cNvSpPr/>
-          <p:nvPr/>
-        </p:nvSpPr>
-        <p:spPr>
-          <a:xfrm>
-            <a:off x="9294745" y="6309360"/>
-            <a:ext cx="743145" cy="43891"/>
-          </a:xfrm>
-          <a:prstGeom prst="rect">
-            <a:avLst/>
-          </a:prstGeom>
-          <a:solidFill>
-            <a:srgbClr val="223049"/>
-          </a:solidFill>
-          <a:ln>
-            <a:noFill/>
-          </a:ln>
-          <a:effectLst/>
-        </p:spPr>
-        <p:style>
-          <a:lnRef idx="1">
-            <a:schemeClr val="accent1"/>
-          </a:lnRef>
-          <a:fillRef idx="3">
-            <a:schemeClr val="accent1"/>
-          </a:fillRef>
-          <a:effectRef idx="2">
-            <a:schemeClr val="accent1"/>
-          </a:effectRef>
-          <a:fontRef idx="minor">
-            <a:schemeClr val="lt1"/>
-          </a:fontRef>
-        </p:style>
-        <p:txBody>
-          <a:bodyPr rtlCol="0" anchor="ctr"/>
-          <a:lstStyle/>
-          <a:p>
-            <a:pPr algn="ctr"/>
-          </a:p>
-        </p:txBody>
-      </p:sp>
-      <p:sp>
-        <p:nvSpPr>
-          <p:cNvPr id="35" name="Rectangle 34"/>
-          <p:cNvSpPr/>
-          <p:nvPr/>
-        </p:nvSpPr>
-        <p:spPr>
-          <a:xfrm>
-            <a:off x="10088183" y="6309360"/>
-            <a:ext cx="743145" cy="43891"/>
-          </a:xfrm>
-          <a:prstGeom prst="rect">
-            <a:avLst/>
-          </a:prstGeom>
-          <a:solidFill>
-            <a:srgbClr val="223049"/>
-          </a:solidFill>
-          <a:ln>
-            <a:noFill/>
-          </a:ln>
-          <a:effectLst/>
-        </p:spPr>
-        <p:style>
-          <a:lnRef idx="1">
-            <a:schemeClr val="accent1"/>
-          </a:lnRef>
-          <a:fillRef idx="3">
-            <a:schemeClr val="accent1"/>
-          </a:fillRef>
-          <a:effectRef idx="2">
-            <a:schemeClr val="accent1"/>
-          </a:effectRef>
-          <a:fontRef idx="minor">
-            <a:schemeClr val="lt1"/>
-          </a:fontRef>
-        </p:style>
-        <p:txBody>
-          <a:bodyPr rtlCol="0" anchor="ctr"/>
-          <a:lstStyle/>
-          <a:p>
-            <a:pPr algn="ctr"/>
-          </a:p>
-        </p:txBody>
-      </p:sp>
-      <p:sp>
-        <p:nvSpPr>
-          <p:cNvPr id="36" name="Rectangle 35"/>
-          <p:cNvSpPr/>
-          <p:nvPr/>
-        </p:nvSpPr>
-        <p:spPr>
-          <a:xfrm>
-            <a:off x="10881621" y="6309360"/>
-            <a:ext cx="743145" cy="43891"/>
-          </a:xfrm>
-          <a:prstGeom prst="rect">
-            <a:avLst/>
-          </a:prstGeom>
-          <a:solidFill>
-            <a:srgbClr val="223049"/>
-          </a:solidFill>
-          <a:ln>
-            <a:noFill/>
-          </a:ln>
-          <a:effectLst/>
-        </p:spPr>
-        <p:style>
-          <a:lnRef idx="1">
-            <a:schemeClr val="accent1"/>
-          </a:lnRef>
-          <a:fillRef idx="3">
-            <a:schemeClr val="accent1"/>
-          </a:fillRef>
-          <a:effectRef idx="2">
-            <a:schemeClr val="accent1"/>
-          </a:effectRef>
-          <a:fontRef idx="minor">
-            <a:schemeClr val="lt1"/>
-          </a:fontRef>
-        </p:style>
-        <p:txBody>
-          <a:bodyPr rtlCol="0" anchor="ctr"/>
-          <a:lstStyle/>
-          <a:p>
-            <a:pPr algn="ctr"/>
-          </a:p>
-        </p:txBody>
-      </p:sp>
-      <p:sp>
-        <p:nvSpPr>
-          <p:cNvPr id="37" name="Rectangle 36"/>
-          <p:cNvSpPr/>
-          <p:nvPr/>
-        </p:nvSpPr>
-        <p:spPr>
-          <a:xfrm>
-            <a:off x="566928" y="6455664"/>
-            <a:ext cx="11057839" cy="9144"/>
-          </a:xfrm>
-          <a:prstGeom prst="rect">
-            <a:avLst/>
-          </a:prstGeom>
-          <a:solidFill>
-            <a:srgbClr val="223049"/>
-          </a:solidFill>
-          <a:ln>
-            <a:noFill/>
-          </a:ln>
-          <a:effectLst/>
-        </p:spPr>
-        <p:style>
-          <a:lnRef idx="1">
-            <a:schemeClr val="accent1"/>
-          </a:lnRef>
-          <a:fillRef idx="3">
-            <a:schemeClr val="accent1"/>
-          </a:fillRef>
-          <a:effectRef idx="2">
-            <a:schemeClr val="accent1"/>
-          </a:effectRef>
-          <a:fontRef idx="minor">
-            <a:schemeClr val="lt1"/>
-          </a:fontRef>
-        </p:style>
-        <p:txBody>
-          <a:bodyPr rtlCol="0" anchor="ctr"/>
-          <a:lstStyle/>
-          <a:p>
-            <a:pPr algn="ctr"/>
-          </a:p>
-        </p:txBody>
-      </p:sp>
-      <p:sp>
-        <p:nvSpPr>
-          <p:cNvPr id="38" name="TextBox 37"/>
+              <a:t>Complementary layers: reporting → risk priority → driver → suggested next step.</a:t>
+            </a:r>
+          </a:p>
+        </p:txBody>
+      </p:sp>
+      <p:sp>
+        <p:nvSpPr>
+          <p:cNvPr id="15" name="TextBox 14"/>
           <p:cNvSpPr txBox="1"/>
           <p:nvPr/>
         </p:nvSpPr>
         <p:spPr>
           <a:xfrm>
-            <a:off x="566928" y="6510528"/>
-            <a:ext cx="9509760" cy="219456"/>
+            <a:off x="566928" y="5897880"/>
+            <a:ext cx="11057839" cy="274320"/>
           </a:xfrm>
           <a:prstGeom prst="rect">
             <a:avLst/>
@@ -28634,6 +27680,708 @@
               </a:spcAft>
             </a:pPr>
             <a:r>
+              <a:rPr sz="1030" b="0">
+                <a:solidFill>
+                  <a:srgbClr val="8CA0BE"/>
+                </a:solidFill>
+                <a:latin typeface="Segoe UI"/>
+              </a:rPr>
+              <a:t>Decision support only: campaign uplift has not been measured; revenue figures are exposure, not confirmed savings.</a:t>
+            </a:r>
+          </a:p>
+        </p:txBody>
+      </p:sp>
+      <p:sp>
+        <p:nvSpPr>
+          <p:cNvPr id="16" name="Rectangle 15"/>
+          <p:cNvSpPr/>
+          <p:nvPr/>
+        </p:nvSpPr>
+        <p:spPr>
+          <a:xfrm>
+            <a:off x="566928" y="6296558"/>
+            <a:ext cx="743145" cy="68580"/>
+          </a:xfrm>
+          <a:prstGeom prst="rect">
+            <a:avLst/>
+          </a:prstGeom>
+          <a:solidFill>
+            <a:srgbClr val="2FD8B4"/>
+          </a:solidFill>
+          <a:ln>
+            <a:noFill/>
+          </a:ln>
+          <a:effectLst/>
+        </p:spPr>
+        <p:style>
+          <a:lnRef idx="1">
+            <a:schemeClr val="accent1"/>
+          </a:lnRef>
+          <a:fillRef idx="3">
+            <a:schemeClr val="accent1"/>
+          </a:fillRef>
+          <a:effectRef idx="2">
+            <a:schemeClr val="accent1"/>
+          </a:effectRef>
+          <a:fontRef idx="minor">
+            <a:schemeClr val="lt1"/>
+          </a:fontRef>
+        </p:style>
+        <p:txBody>
+          <a:bodyPr rtlCol="0" anchor="ctr"/>
+          <a:lstStyle/>
+          <a:p>
+            <a:pPr algn="ctr"/>
+          </a:p>
+        </p:txBody>
+      </p:sp>
+      <p:sp>
+        <p:nvSpPr>
+          <p:cNvPr id="17" name="Rectangle 16"/>
+          <p:cNvSpPr/>
+          <p:nvPr/>
+        </p:nvSpPr>
+        <p:spPr>
+          <a:xfrm>
+            <a:off x="1360365" y="6309360"/>
+            <a:ext cx="743145" cy="43891"/>
+          </a:xfrm>
+          <a:prstGeom prst="rect">
+            <a:avLst/>
+          </a:prstGeom>
+          <a:solidFill>
+            <a:srgbClr val="223049"/>
+          </a:solidFill>
+          <a:ln>
+            <a:noFill/>
+          </a:ln>
+          <a:effectLst/>
+        </p:spPr>
+        <p:style>
+          <a:lnRef idx="1">
+            <a:schemeClr val="accent1"/>
+          </a:lnRef>
+          <a:fillRef idx="3">
+            <a:schemeClr val="accent1"/>
+          </a:fillRef>
+          <a:effectRef idx="2">
+            <a:schemeClr val="accent1"/>
+          </a:effectRef>
+          <a:fontRef idx="minor">
+            <a:schemeClr val="lt1"/>
+          </a:fontRef>
+        </p:style>
+        <p:txBody>
+          <a:bodyPr rtlCol="0" anchor="ctr"/>
+          <a:lstStyle/>
+          <a:p>
+            <a:pPr algn="ctr"/>
+          </a:p>
+        </p:txBody>
+      </p:sp>
+      <p:sp>
+        <p:nvSpPr>
+          <p:cNvPr id="18" name="Rectangle 17"/>
+          <p:cNvSpPr/>
+          <p:nvPr/>
+        </p:nvSpPr>
+        <p:spPr>
+          <a:xfrm>
+            <a:off x="2153803" y="6309360"/>
+            <a:ext cx="743145" cy="43891"/>
+          </a:xfrm>
+          <a:prstGeom prst="rect">
+            <a:avLst/>
+          </a:prstGeom>
+          <a:solidFill>
+            <a:srgbClr val="223049"/>
+          </a:solidFill>
+          <a:ln>
+            <a:noFill/>
+          </a:ln>
+          <a:effectLst/>
+        </p:spPr>
+        <p:style>
+          <a:lnRef idx="1">
+            <a:schemeClr val="accent1"/>
+          </a:lnRef>
+          <a:fillRef idx="3">
+            <a:schemeClr val="accent1"/>
+          </a:fillRef>
+          <a:effectRef idx="2">
+            <a:schemeClr val="accent1"/>
+          </a:effectRef>
+          <a:fontRef idx="minor">
+            <a:schemeClr val="lt1"/>
+          </a:fontRef>
+        </p:style>
+        <p:txBody>
+          <a:bodyPr rtlCol="0" anchor="ctr"/>
+          <a:lstStyle/>
+          <a:p>
+            <a:pPr algn="ctr"/>
+          </a:p>
+        </p:txBody>
+      </p:sp>
+      <p:sp>
+        <p:nvSpPr>
+          <p:cNvPr id="19" name="Rectangle 18"/>
+          <p:cNvSpPr/>
+          <p:nvPr/>
+        </p:nvSpPr>
+        <p:spPr>
+          <a:xfrm>
+            <a:off x="2947241" y="6309360"/>
+            <a:ext cx="743145" cy="43891"/>
+          </a:xfrm>
+          <a:prstGeom prst="rect">
+            <a:avLst/>
+          </a:prstGeom>
+          <a:solidFill>
+            <a:srgbClr val="223049"/>
+          </a:solidFill>
+          <a:ln>
+            <a:noFill/>
+          </a:ln>
+          <a:effectLst/>
+        </p:spPr>
+        <p:style>
+          <a:lnRef idx="1">
+            <a:schemeClr val="accent1"/>
+          </a:lnRef>
+          <a:fillRef idx="3">
+            <a:schemeClr val="accent1"/>
+          </a:fillRef>
+          <a:effectRef idx="2">
+            <a:schemeClr val="accent1"/>
+          </a:effectRef>
+          <a:fontRef idx="minor">
+            <a:schemeClr val="lt1"/>
+          </a:fontRef>
+        </p:style>
+        <p:txBody>
+          <a:bodyPr rtlCol="0" anchor="ctr"/>
+          <a:lstStyle/>
+          <a:p>
+            <a:pPr algn="ctr"/>
+          </a:p>
+        </p:txBody>
+      </p:sp>
+      <p:sp>
+        <p:nvSpPr>
+          <p:cNvPr id="20" name="Rectangle 19"/>
+          <p:cNvSpPr/>
+          <p:nvPr/>
+        </p:nvSpPr>
+        <p:spPr>
+          <a:xfrm>
+            <a:off x="3740679" y="6309360"/>
+            <a:ext cx="743145" cy="43891"/>
+          </a:xfrm>
+          <a:prstGeom prst="rect">
+            <a:avLst/>
+          </a:prstGeom>
+          <a:solidFill>
+            <a:srgbClr val="223049"/>
+          </a:solidFill>
+          <a:ln>
+            <a:noFill/>
+          </a:ln>
+          <a:effectLst/>
+        </p:spPr>
+        <p:style>
+          <a:lnRef idx="1">
+            <a:schemeClr val="accent1"/>
+          </a:lnRef>
+          <a:fillRef idx="3">
+            <a:schemeClr val="accent1"/>
+          </a:fillRef>
+          <a:effectRef idx="2">
+            <a:schemeClr val="accent1"/>
+          </a:effectRef>
+          <a:fontRef idx="minor">
+            <a:schemeClr val="lt1"/>
+          </a:fontRef>
+        </p:style>
+        <p:txBody>
+          <a:bodyPr rtlCol="0" anchor="ctr"/>
+          <a:lstStyle/>
+          <a:p>
+            <a:pPr algn="ctr"/>
+          </a:p>
+        </p:txBody>
+      </p:sp>
+      <p:sp>
+        <p:nvSpPr>
+          <p:cNvPr id="21" name="Rectangle 20"/>
+          <p:cNvSpPr/>
+          <p:nvPr/>
+        </p:nvSpPr>
+        <p:spPr>
+          <a:xfrm>
+            <a:off x="4534117" y="6309360"/>
+            <a:ext cx="743145" cy="43891"/>
+          </a:xfrm>
+          <a:prstGeom prst="rect">
+            <a:avLst/>
+          </a:prstGeom>
+          <a:solidFill>
+            <a:srgbClr val="223049"/>
+          </a:solidFill>
+          <a:ln>
+            <a:noFill/>
+          </a:ln>
+          <a:effectLst/>
+        </p:spPr>
+        <p:style>
+          <a:lnRef idx="1">
+            <a:schemeClr val="accent1"/>
+          </a:lnRef>
+          <a:fillRef idx="3">
+            <a:schemeClr val="accent1"/>
+          </a:fillRef>
+          <a:effectRef idx="2">
+            <a:schemeClr val="accent1"/>
+          </a:effectRef>
+          <a:fontRef idx="minor">
+            <a:schemeClr val="lt1"/>
+          </a:fontRef>
+        </p:style>
+        <p:txBody>
+          <a:bodyPr rtlCol="0" anchor="ctr"/>
+          <a:lstStyle/>
+          <a:p>
+            <a:pPr algn="ctr"/>
+          </a:p>
+        </p:txBody>
+      </p:sp>
+      <p:sp>
+        <p:nvSpPr>
+          <p:cNvPr id="22" name="Rectangle 21"/>
+          <p:cNvSpPr/>
+          <p:nvPr/>
+        </p:nvSpPr>
+        <p:spPr>
+          <a:xfrm>
+            <a:off x="5327555" y="6309360"/>
+            <a:ext cx="743145" cy="43891"/>
+          </a:xfrm>
+          <a:prstGeom prst="rect">
+            <a:avLst/>
+          </a:prstGeom>
+          <a:solidFill>
+            <a:srgbClr val="223049"/>
+          </a:solidFill>
+          <a:ln>
+            <a:noFill/>
+          </a:ln>
+          <a:effectLst/>
+        </p:spPr>
+        <p:style>
+          <a:lnRef idx="1">
+            <a:schemeClr val="accent1"/>
+          </a:lnRef>
+          <a:fillRef idx="3">
+            <a:schemeClr val="accent1"/>
+          </a:fillRef>
+          <a:effectRef idx="2">
+            <a:schemeClr val="accent1"/>
+          </a:effectRef>
+          <a:fontRef idx="minor">
+            <a:schemeClr val="lt1"/>
+          </a:fontRef>
+        </p:style>
+        <p:txBody>
+          <a:bodyPr rtlCol="0" anchor="ctr"/>
+          <a:lstStyle/>
+          <a:p>
+            <a:pPr algn="ctr"/>
+          </a:p>
+        </p:txBody>
+      </p:sp>
+      <p:sp>
+        <p:nvSpPr>
+          <p:cNvPr id="23" name="Rectangle 22"/>
+          <p:cNvSpPr/>
+          <p:nvPr/>
+        </p:nvSpPr>
+        <p:spPr>
+          <a:xfrm>
+            <a:off x="6120993" y="6309360"/>
+            <a:ext cx="743145" cy="43891"/>
+          </a:xfrm>
+          <a:prstGeom prst="rect">
+            <a:avLst/>
+          </a:prstGeom>
+          <a:solidFill>
+            <a:srgbClr val="223049"/>
+          </a:solidFill>
+          <a:ln>
+            <a:noFill/>
+          </a:ln>
+          <a:effectLst/>
+        </p:spPr>
+        <p:style>
+          <a:lnRef idx="1">
+            <a:schemeClr val="accent1"/>
+          </a:lnRef>
+          <a:fillRef idx="3">
+            <a:schemeClr val="accent1"/>
+          </a:fillRef>
+          <a:effectRef idx="2">
+            <a:schemeClr val="accent1"/>
+          </a:effectRef>
+          <a:fontRef idx="minor">
+            <a:schemeClr val="lt1"/>
+          </a:fontRef>
+        </p:style>
+        <p:txBody>
+          <a:bodyPr rtlCol="0" anchor="ctr"/>
+          <a:lstStyle/>
+          <a:p>
+            <a:pPr algn="ctr"/>
+          </a:p>
+        </p:txBody>
+      </p:sp>
+      <p:sp>
+        <p:nvSpPr>
+          <p:cNvPr id="24" name="Rectangle 23"/>
+          <p:cNvSpPr/>
+          <p:nvPr/>
+        </p:nvSpPr>
+        <p:spPr>
+          <a:xfrm>
+            <a:off x="6914431" y="6309360"/>
+            <a:ext cx="743145" cy="43891"/>
+          </a:xfrm>
+          <a:prstGeom prst="rect">
+            <a:avLst/>
+          </a:prstGeom>
+          <a:solidFill>
+            <a:srgbClr val="223049"/>
+          </a:solidFill>
+          <a:ln>
+            <a:noFill/>
+          </a:ln>
+          <a:effectLst/>
+        </p:spPr>
+        <p:style>
+          <a:lnRef idx="1">
+            <a:schemeClr val="accent1"/>
+          </a:lnRef>
+          <a:fillRef idx="3">
+            <a:schemeClr val="accent1"/>
+          </a:fillRef>
+          <a:effectRef idx="2">
+            <a:schemeClr val="accent1"/>
+          </a:effectRef>
+          <a:fontRef idx="minor">
+            <a:schemeClr val="lt1"/>
+          </a:fontRef>
+        </p:style>
+        <p:txBody>
+          <a:bodyPr rtlCol="0" anchor="ctr"/>
+          <a:lstStyle/>
+          <a:p>
+            <a:pPr algn="ctr"/>
+          </a:p>
+        </p:txBody>
+      </p:sp>
+      <p:sp>
+        <p:nvSpPr>
+          <p:cNvPr id="25" name="Rectangle 24"/>
+          <p:cNvSpPr/>
+          <p:nvPr/>
+        </p:nvSpPr>
+        <p:spPr>
+          <a:xfrm>
+            <a:off x="7707869" y="6309360"/>
+            <a:ext cx="743145" cy="43891"/>
+          </a:xfrm>
+          <a:prstGeom prst="rect">
+            <a:avLst/>
+          </a:prstGeom>
+          <a:solidFill>
+            <a:srgbClr val="223049"/>
+          </a:solidFill>
+          <a:ln>
+            <a:noFill/>
+          </a:ln>
+          <a:effectLst/>
+        </p:spPr>
+        <p:style>
+          <a:lnRef idx="1">
+            <a:schemeClr val="accent1"/>
+          </a:lnRef>
+          <a:fillRef idx="3">
+            <a:schemeClr val="accent1"/>
+          </a:fillRef>
+          <a:effectRef idx="2">
+            <a:schemeClr val="accent1"/>
+          </a:effectRef>
+          <a:fontRef idx="minor">
+            <a:schemeClr val="lt1"/>
+          </a:fontRef>
+        </p:style>
+        <p:txBody>
+          <a:bodyPr rtlCol="0" anchor="ctr"/>
+          <a:lstStyle/>
+          <a:p>
+            <a:pPr algn="ctr"/>
+          </a:p>
+        </p:txBody>
+      </p:sp>
+      <p:sp>
+        <p:nvSpPr>
+          <p:cNvPr id="26" name="Rectangle 25"/>
+          <p:cNvSpPr/>
+          <p:nvPr/>
+        </p:nvSpPr>
+        <p:spPr>
+          <a:xfrm>
+            <a:off x="8501307" y="6309360"/>
+            <a:ext cx="743145" cy="43891"/>
+          </a:xfrm>
+          <a:prstGeom prst="rect">
+            <a:avLst/>
+          </a:prstGeom>
+          <a:solidFill>
+            <a:srgbClr val="223049"/>
+          </a:solidFill>
+          <a:ln>
+            <a:noFill/>
+          </a:ln>
+          <a:effectLst/>
+        </p:spPr>
+        <p:style>
+          <a:lnRef idx="1">
+            <a:schemeClr val="accent1"/>
+          </a:lnRef>
+          <a:fillRef idx="3">
+            <a:schemeClr val="accent1"/>
+          </a:fillRef>
+          <a:effectRef idx="2">
+            <a:schemeClr val="accent1"/>
+          </a:effectRef>
+          <a:fontRef idx="minor">
+            <a:schemeClr val="lt1"/>
+          </a:fontRef>
+        </p:style>
+        <p:txBody>
+          <a:bodyPr rtlCol="0" anchor="ctr"/>
+          <a:lstStyle/>
+          <a:p>
+            <a:pPr algn="ctr"/>
+          </a:p>
+        </p:txBody>
+      </p:sp>
+      <p:sp>
+        <p:nvSpPr>
+          <p:cNvPr id="27" name="Rectangle 26"/>
+          <p:cNvSpPr/>
+          <p:nvPr/>
+        </p:nvSpPr>
+        <p:spPr>
+          <a:xfrm>
+            <a:off x="9294745" y="6309360"/>
+            <a:ext cx="743145" cy="43891"/>
+          </a:xfrm>
+          <a:prstGeom prst="rect">
+            <a:avLst/>
+          </a:prstGeom>
+          <a:solidFill>
+            <a:srgbClr val="223049"/>
+          </a:solidFill>
+          <a:ln>
+            <a:noFill/>
+          </a:ln>
+          <a:effectLst/>
+        </p:spPr>
+        <p:style>
+          <a:lnRef idx="1">
+            <a:schemeClr val="accent1"/>
+          </a:lnRef>
+          <a:fillRef idx="3">
+            <a:schemeClr val="accent1"/>
+          </a:fillRef>
+          <a:effectRef idx="2">
+            <a:schemeClr val="accent1"/>
+          </a:effectRef>
+          <a:fontRef idx="minor">
+            <a:schemeClr val="lt1"/>
+          </a:fontRef>
+        </p:style>
+        <p:txBody>
+          <a:bodyPr rtlCol="0" anchor="ctr"/>
+          <a:lstStyle/>
+          <a:p>
+            <a:pPr algn="ctr"/>
+          </a:p>
+        </p:txBody>
+      </p:sp>
+      <p:sp>
+        <p:nvSpPr>
+          <p:cNvPr id="28" name="Rectangle 27"/>
+          <p:cNvSpPr/>
+          <p:nvPr/>
+        </p:nvSpPr>
+        <p:spPr>
+          <a:xfrm>
+            <a:off x="10088183" y="6309360"/>
+            <a:ext cx="743145" cy="43891"/>
+          </a:xfrm>
+          <a:prstGeom prst="rect">
+            <a:avLst/>
+          </a:prstGeom>
+          <a:solidFill>
+            <a:srgbClr val="223049"/>
+          </a:solidFill>
+          <a:ln>
+            <a:noFill/>
+          </a:ln>
+          <a:effectLst/>
+        </p:spPr>
+        <p:style>
+          <a:lnRef idx="1">
+            <a:schemeClr val="accent1"/>
+          </a:lnRef>
+          <a:fillRef idx="3">
+            <a:schemeClr val="accent1"/>
+          </a:fillRef>
+          <a:effectRef idx="2">
+            <a:schemeClr val="accent1"/>
+          </a:effectRef>
+          <a:fontRef idx="minor">
+            <a:schemeClr val="lt1"/>
+          </a:fontRef>
+        </p:style>
+        <p:txBody>
+          <a:bodyPr rtlCol="0" anchor="ctr"/>
+          <a:lstStyle/>
+          <a:p>
+            <a:pPr algn="ctr"/>
+          </a:p>
+        </p:txBody>
+      </p:sp>
+      <p:sp>
+        <p:nvSpPr>
+          <p:cNvPr id="29" name="Rectangle 28"/>
+          <p:cNvSpPr/>
+          <p:nvPr/>
+        </p:nvSpPr>
+        <p:spPr>
+          <a:xfrm>
+            <a:off x="10881621" y="6309360"/>
+            <a:ext cx="743145" cy="43891"/>
+          </a:xfrm>
+          <a:prstGeom prst="rect">
+            <a:avLst/>
+          </a:prstGeom>
+          <a:solidFill>
+            <a:srgbClr val="223049"/>
+          </a:solidFill>
+          <a:ln>
+            <a:noFill/>
+          </a:ln>
+          <a:effectLst/>
+        </p:spPr>
+        <p:style>
+          <a:lnRef idx="1">
+            <a:schemeClr val="accent1"/>
+          </a:lnRef>
+          <a:fillRef idx="3">
+            <a:schemeClr val="accent1"/>
+          </a:fillRef>
+          <a:effectRef idx="2">
+            <a:schemeClr val="accent1"/>
+          </a:effectRef>
+          <a:fontRef idx="minor">
+            <a:schemeClr val="lt1"/>
+          </a:fontRef>
+        </p:style>
+        <p:txBody>
+          <a:bodyPr rtlCol="0" anchor="ctr"/>
+          <a:lstStyle/>
+          <a:p>
+            <a:pPr algn="ctr"/>
+          </a:p>
+        </p:txBody>
+      </p:sp>
+      <p:sp>
+        <p:nvSpPr>
+          <p:cNvPr id="30" name="Rectangle 29"/>
+          <p:cNvSpPr/>
+          <p:nvPr/>
+        </p:nvSpPr>
+        <p:spPr>
+          <a:xfrm>
+            <a:off x="566928" y="6455664"/>
+            <a:ext cx="11057839" cy="9144"/>
+          </a:xfrm>
+          <a:prstGeom prst="rect">
+            <a:avLst/>
+          </a:prstGeom>
+          <a:solidFill>
+            <a:srgbClr val="223049"/>
+          </a:solidFill>
+          <a:ln>
+            <a:noFill/>
+          </a:ln>
+          <a:effectLst/>
+        </p:spPr>
+        <p:style>
+          <a:lnRef idx="1">
+            <a:schemeClr val="accent1"/>
+          </a:lnRef>
+          <a:fillRef idx="3">
+            <a:schemeClr val="accent1"/>
+          </a:fillRef>
+          <a:effectRef idx="2">
+            <a:schemeClr val="accent1"/>
+          </a:effectRef>
+          <a:fontRef idx="minor">
+            <a:schemeClr val="lt1"/>
+          </a:fontRef>
+        </p:style>
+        <p:txBody>
+          <a:bodyPr rtlCol="0" anchor="ctr"/>
+          <a:lstStyle/>
+          <a:p>
+            <a:pPr algn="ctr"/>
+          </a:p>
+        </p:txBody>
+      </p:sp>
+      <p:sp>
+        <p:nvSpPr>
+          <p:cNvPr id="31" name="TextBox 30"/>
+          <p:cNvSpPr txBox="1"/>
+          <p:nvPr/>
+        </p:nvSpPr>
+        <p:spPr>
+          <a:xfrm>
+            <a:off x="566928" y="6510528"/>
+            <a:ext cx="9509760" cy="219456"/>
+          </a:xfrm>
+          <a:prstGeom prst="rect">
+            <a:avLst/>
+          </a:prstGeom>
+          <a:noFill/>
+        </p:spPr>
+        <p:txBody>
+          <a:bodyPr wrap="square" lIns="0" rIns="0" tIns="0" bIns="0" anchor="t">
+            <a:spAutoFit/>
+          </a:bodyPr>
+          <a:lstStyle/>
+          <a:p>
+            <a:pPr algn="l">
+              <a:lnSpc>
+                <a:spcPct val="112000"/>
+              </a:lnSpc>
+              <a:spcAft>
+                <a:spcPts val="0"/>
+              </a:spcAft>
+            </a:pPr>
+            <a:r>
               <a:rPr sz="900" b="0">
                 <a:solidFill>
                   <a:srgbClr val="8CA0BE"/>
@@ -28647,7 +28395,7 @@
       </p:sp>
       <p:sp>
         <p:nvSpPr>
-          <p:cNvPr id="39" name="TextBox 38"/>
+          <p:cNvPr id="32" name="TextBox 31"/>
           <p:cNvSpPr txBox="1"/>
           <p:nvPr/>
         </p:nvSpPr>

--- a/presentation/RetainIQ_Project_Review.pptx
+++ b/presentation/RetainIQ_Project_Review.pptx
@@ -25145,7 +25145,7 @@
         <p:spPr>
           <a:xfrm>
             <a:off x="566928" y="1517904"/>
-            <a:ext cx="11057839" cy="3436210"/>
+            <a:ext cx="11057839" cy="3554506"/>
           </a:xfrm>
           <a:prstGeom prst="rect">
             <a:avLst/>

--- a/presentation/RetainIQ_Project_Review.pptx
+++ b/presentation/RetainIQ_Project_Review.pptx
@@ -25145,7 +25145,7 @@
         <p:spPr>
           <a:xfrm>
             <a:off x="566928" y="1517904"/>
-            <a:ext cx="11057839" cy="3554506"/>
+            <a:ext cx="11057839" cy="3948825"/>
           </a:xfrm>
           <a:prstGeom prst="rect">
             <a:avLst/>

--- a/presentation/RetainIQ_Project_Review.pptx
+++ b/presentation/RetainIQ_Project_Review.pptx
@@ -20784,7 +20784,7 @@
         <p:spPr>
           <a:xfrm>
             <a:off x="566928" y="1664207"/>
-            <a:ext cx="32004" cy="1481327"/>
+            <a:ext cx="41148" cy="1481327"/>
           </a:xfrm>
           <a:prstGeom prst="rect">
             <a:avLst/>
@@ -20827,8 +20827,8 @@
         </p:nvSpPr>
         <p:spPr>
           <a:xfrm>
-            <a:off x="786384" y="1682495"/>
-            <a:ext cx="4952847" cy="1444751"/>
+            <a:off x="731520" y="1719072"/>
+            <a:ext cx="621792" cy="384048"/>
           </a:xfrm>
           <a:prstGeom prst="rect">
             <a:avLst/>
@@ -20840,44 +20840,6 @@
             <a:spAutoFit/>
           </a:bodyPr>
           <a:lstStyle/>
-          <a:p>
-            <a:pPr algn="l">
-              <a:lnSpc>
-                <a:spcPct val="112000"/>
-              </a:lnSpc>
-              <a:spcAft>
-                <a:spcPts val="400"/>
-              </a:spcAft>
-            </a:pPr>
-            <a:r>
-              <a:rPr sz="1200" b="1">
-                <a:solidFill>
-                  <a:srgbClr val="EAF0F7"/>
-                </a:solidFill>
-                <a:latin typeface="Segoe UI"/>
-              </a:rPr>
-              <a:t>Slow scoring on a shared CPU</a:t>
-            </a:r>
-          </a:p>
-          <a:p>
-            <a:pPr algn="l">
-              <a:lnSpc>
-                <a:spcPct val="116000"/>
-              </a:lnSpc>
-              <a:spcAft>
-                <a:spcPts val="500"/>
-              </a:spcAft>
-            </a:pPr>
-            <a:r>
-              <a:rPr sz="1019" b="0">
-                <a:solidFill>
-                  <a:srgbClr val="8CA0BE"/>
-                </a:solidFill>
-                <a:latin typeface="Segoe UI"/>
-              </a:rPr>
-              <a:t>A large CSV can take far longer than the default 30-second worker timeout, so the worker is killed mid-request and the browser shows a 502.</a:t>
-            </a:r>
-          </a:p>
           <a:p>
             <a:pPr algn="l">
               <a:lnSpc>
@@ -20888,119 +20850,27 @@
               </a:spcAft>
             </a:pPr>
             <a:r>
-              <a:rPr sz="1040" b="1">
+              <a:rPr sz="2200" b="1">
                 <a:solidFill>
                   <a:srgbClr val="2FD8B4"/>
                 </a:solidFill>
                 <a:latin typeface="Consolas"/>
               </a:rPr>
-              <a:t>→ fixed by 300-second timeout</a:t>
-            </a:r>
-          </a:p>
-        </p:txBody>
-      </p:sp>
-      <p:sp>
-        <p:nvSpPr>
-          <p:cNvPr id="10" name="Rounded Rectangle 9"/>
-          <p:cNvSpPr/>
-          <p:nvPr/>
-        </p:nvSpPr>
-        <p:spPr>
-          <a:xfrm>
-            <a:off x="6214719" y="1517904"/>
-            <a:ext cx="5410047" cy="1773935"/>
-          </a:xfrm>
-          <a:prstGeom prst="roundRect">
-            <a:avLst>
-              <a:gd name="adj" fmla="val 8000"/>
-            </a:avLst>
-          </a:prstGeom>
-          <a:solidFill>
-            <a:srgbClr val="111A2C"/>
-          </a:solidFill>
-          <a:ln w="12700">
-            <a:solidFill>
-              <a:srgbClr val="223049"/>
-            </a:solidFill>
-          </a:ln>
-          <a:effectLst/>
-        </p:spPr>
-        <p:style>
-          <a:lnRef idx="1">
-            <a:schemeClr val="accent1"/>
-          </a:lnRef>
-          <a:fillRef idx="3">
-            <a:schemeClr val="accent1"/>
-          </a:fillRef>
-          <a:effectRef idx="2">
-            <a:schemeClr val="accent1"/>
-          </a:effectRef>
-          <a:fontRef idx="minor">
-            <a:schemeClr val="lt1"/>
-          </a:fontRef>
-        </p:style>
-        <p:txBody>
-          <a:bodyPr rtlCol="0" anchor="ctr"/>
-          <a:lstStyle/>
-          <a:p>
-            <a:pPr algn="ctr"/>
-          </a:p>
-        </p:txBody>
-      </p:sp>
-      <p:sp>
-        <p:nvSpPr>
-          <p:cNvPr id="11" name="Rectangle 10"/>
-          <p:cNvSpPr/>
-          <p:nvPr/>
-        </p:nvSpPr>
-        <p:spPr>
-          <a:xfrm>
-            <a:off x="6214719" y="1664207"/>
-            <a:ext cx="32004" cy="1481327"/>
-          </a:xfrm>
-          <a:prstGeom prst="rect">
-            <a:avLst/>
-          </a:prstGeom>
-          <a:solidFill>
-            <a:srgbClr val="2FD8B4"/>
-          </a:solidFill>
-          <a:ln>
-            <a:noFill/>
-          </a:ln>
-          <a:effectLst/>
-        </p:spPr>
-        <p:style>
-          <a:lnRef idx="1">
-            <a:schemeClr val="accent1"/>
-          </a:lnRef>
-          <a:fillRef idx="3">
-            <a:schemeClr val="accent1"/>
-          </a:fillRef>
-          <a:effectRef idx="2">
-            <a:schemeClr val="accent1"/>
-          </a:effectRef>
-          <a:fontRef idx="minor">
-            <a:schemeClr val="lt1"/>
-          </a:fontRef>
-        </p:style>
-        <p:txBody>
-          <a:bodyPr rtlCol="0" anchor="ctr"/>
-          <a:lstStyle/>
-          <a:p>
-            <a:pPr algn="ctr"/>
-          </a:p>
-        </p:txBody>
-      </p:sp>
-      <p:sp>
-        <p:nvSpPr>
-          <p:cNvPr id="12" name="TextBox 11"/>
+              <a:t>01</a:t>
+            </a:r>
+          </a:p>
+        </p:txBody>
+      </p:sp>
+      <p:sp>
+        <p:nvSpPr>
+          <p:cNvPr id="10" name="TextBox 9"/>
           <p:cNvSpPr txBox="1"/>
           <p:nvPr/>
         </p:nvSpPr>
         <p:spPr>
           <a:xfrm>
-            <a:off x="6434175" y="1682495"/>
-            <a:ext cx="4952847" cy="1444751"/>
+            <a:off x="731520" y="2221991"/>
+            <a:ext cx="749808" cy="256032"/>
           </a:xfrm>
           <a:prstGeom prst="rect">
             <a:avLst/>
@@ -21012,44 +20882,6 @@
             <a:spAutoFit/>
           </a:bodyPr>
           <a:lstStyle/>
-          <a:p>
-            <a:pPr algn="l">
-              <a:lnSpc>
-                <a:spcPct val="112000"/>
-              </a:lnSpc>
-              <a:spcAft>
-                <a:spcPts val="400"/>
-              </a:spcAft>
-            </a:pPr>
-            <a:r>
-              <a:rPr sz="1200" b="1">
-                <a:solidFill>
-                  <a:srgbClr val="EAF0F7"/>
-                </a:solidFill>
-                <a:latin typeface="Segoe UI"/>
-              </a:rPr>
-              <a:t>Reloading the model per request</a:t>
-            </a:r>
-          </a:p>
-          <a:p>
-            <a:pPr algn="l">
-              <a:lnSpc>
-                <a:spcPct val="116000"/>
-              </a:lnSpc>
-              <a:spcAft>
-                <a:spcPts val="500"/>
-              </a:spcAft>
-            </a:pPr>
-            <a:r>
-              <a:rPr sz="1019" b="0">
-                <a:solidFill>
-                  <a:srgbClr val="8CA0BE"/>
-                </a:solidFill>
-                <a:latin typeface="Segoe UI"/>
-              </a:rPr>
-              <a:t>Reading the pickled model on every request wastes the little memory the instance has.</a:t>
-            </a:r>
-          </a:p>
           <a:p>
             <a:pPr algn="l">
               <a:lnSpc>
@@ -21060,81 +20892,33 @@
               </a:spcAft>
             </a:pPr>
             <a:r>
-              <a:rPr sz="1040" b="1">
+              <a:rPr sz="819" b="1">
                 <a:solidFill>
-                  <a:srgbClr val="2FD8B4"/>
+                  <a:srgbClr val="8CA0BE"/>
                 </a:solidFill>
                 <a:latin typeface="Consolas"/>
               </a:rPr>
-              <a:t>→ fixed by worker preload</a:t>
-            </a:r>
-          </a:p>
-        </p:txBody>
-      </p:sp>
-      <p:sp>
-        <p:nvSpPr>
-          <p:cNvPr id="13" name="Rounded Rectangle 12"/>
-          <p:cNvSpPr/>
-          <p:nvPr/>
-        </p:nvSpPr>
-        <p:spPr>
-          <a:xfrm>
-            <a:off x="566928" y="3438144"/>
-            <a:ext cx="5410047" cy="1773935"/>
-          </a:xfrm>
-          <a:prstGeom prst="roundRect">
-            <a:avLst>
-              <a:gd name="adj" fmla="val 8000"/>
-            </a:avLst>
-          </a:prstGeom>
-          <a:solidFill>
-            <a:srgbClr val="111A2C"/>
-          </a:solidFill>
-          <a:ln w="12700">
-            <a:solidFill>
-              <a:srgbClr val="223049"/>
-            </a:solidFill>
-          </a:ln>
-          <a:effectLst/>
-        </p:spPr>
-        <p:style>
-          <a:lnRef idx="1">
-            <a:schemeClr val="accent1"/>
-          </a:lnRef>
-          <a:fillRef idx="3">
-            <a:schemeClr val="accent1"/>
-          </a:fillRef>
-          <a:effectRef idx="2">
-            <a:schemeClr val="accent1"/>
-          </a:effectRef>
-          <a:fontRef idx="minor">
-            <a:schemeClr val="lt1"/>
-          </a:fontRef>
-        </p:style>
-        <p:txBody>
-          <a:bodyPr rtlCol="0" anchor="ctr"/>
-          <a:lstStyle/>
-          <a:p>
-            <a:pPr algn="ctr"/>
-          </a:p>
-        </p:txBody>
-      </p:sp>
-      <p:sp>
-        <p:nvSpPr>
-          <p:cNvPr id="14" name="Rectangle 13"/>
-          <p:cNvSpPr/>
-          <p:nvPr/>
-        </p:nvSpPr>
-        <p:spPr>
-          <a:xfrm>
-            <a:off x="566928" y="3584448"/>
-            <a:ext cx="32004" cy="1481327"/>
-          </a:xfrm>
-          <a:prstGeom prst="rect">
-            <a:avLst/>
-          </a:prstGeom>
-          <a:solidFill>
-            <a:srgbClr val="2FD8B4"/>
+              <a:t>LATENCY</a:t>
+            </a:r>
+          </a:p>
+        </p:txBody>
+      </p:sp>
+      <p:sp>
+        <p:nvSpPr>
+          <p:cNvPr id="11" name="Rectangle 10"/>
+          <p:cNvSpPr/>
+          <p:nvPr/>
+        </p:nvSpPr>
+        <p:spPr>
+          <a:xfrm>
+            <a:off x="1481328" y="1700784"/>
+            <a:ext cx="22860" cy="1408175"/>
+          </a:xfrm>
+          <a:prstGeom prst="rect">
+            <a:avLst/>
+          </a:prstGeom>
+          <a:solidFill>
+            <a:srgbClr val="223049"/>
           </a:solidFill>
           <a:ln>
             <a:noFill/>
@@ -21165,14 +20949,14 @@
       </p:sp>
       <p:sp>
         <p:nvSpPr>
-          <p:cNvPr id="15" name="TextBox 14"/>
+          <p:cNvPr id="12" name="TextBox 11"/>
           <p:cNvSpPr txBox="1"/>
           <p:nvPr/>
         </p:nvSpPr>
         <p:spPr>
           <a:xfrm>
-            <a:off x="786384" y="3602736"/>
-            <a:ext cx="4952847" cy="1444751"/>
+            <a:off x="1645919" y="1682495"/>
+            <a:ext cx="4111599" cy="292608"/>
           </a:xfrm>
           <a:prstGeom prst="rect">
             <a:avLst/>
@@ -21184,44 +20968,6 @@
             <a:spAutoFit/>
           </a:bodyPr>
           <a:lstStyle/>
-          <a:p>
-            <a:pPr algn="l">
-              <a:lnSpc>
-                <a:spcPct val="112000"/>
-              </a:lnSpc>
-              <a:spcAft>
-                <a:spcPts val="400"/>
-              </a:spcAft>
-            </a:pPr>
-            <a:r>
-              <a:rPr sz="1200" b="1">
-                <a:solidFill>
-                  <a:srgbClr val="EAF0F7"/>
-                </a:solidFill>
-                <a:latin typeface="Segoe UI"/>
-              </a:rPr>
-              <a:t>Memory creeping past the limit</a:t>
-            </a:r>
-          </a:p>
-          <a:p>
-            <a:pPr algn="l">
-              <a:lnSpc>
-                <a:spcPct val="116000"/>
-              </a:lnSpc>
-              <a:spcAft>
-                <a:spcPts val="500"/>
-              </a:spcAft>
-            </a:pPr>
-            <a:r>
-              <a:rPr sz="1019" b="0">
-                <a:solidFill>
-                  <a:srgbClr val="8CA0BE"/>
-                </a:solidFill>
-                <a:latin typeface="Segoe UI"/>
-              </a:rPr>
-              <a:t>A long-lived worker grows until the platform OOM-kills it, which surfaces as a random error.</a:t>
-            </a:r>
-          </a:p>
           <a:p>
             <a:pPr algn="l">
               <a:lnSpc>
@@ -21232,168 +20978,128 @@
               </a:spcAft>
             </a:pPr>
             <a:r>
-              <a:rPr sz="1040" b="1">
-                <a:solidFill>
-                  <a:srgbClr val="2FD8B4"/>
-                </a:solidFill>
-                <a:latin typeface="Consolas"/>
-              </a:rPr>
-              <a:t>→ fixed by request recycling</a:t>
-            </a:r>
-          </a:p>
-        </p:txBody>
-      </p:sp>
-      <p:sp>
-        <p:nvSpPr>
-          <p:cNvPr id="16" name="Rounded Rectangle 15"/>
-          <p:cNvSpPr/>
-          <p:nvPr/>
-        </p:nvSpPr>
-        <p:spPr>
-          <a:xfrm>
-            <a:off x="6214719" y="3438144"/>
-            <a:ext cx="5410047" cy="1773935"/>
-          </a:xfrm>
-          <a:prstGeom prst="roundRect">
-            <a:avLst>
-              <a:gd name="adj" fmla="val 8000"/>
-            </a:avLst>
-          </a:prstGeom>
-          <a:solidFill>
-            <a:srgbClr val="111A2C"/>
-          </a:solidFill>
-          <a:ln w="12700">
-            <a:solidFill>
-              <a:srgbClr val="223049"/>
-            </a:solidFill>
-          </a:ln>
-          <a:effectLst/>
-        </p:spPr>
-        <p:style>
-          <a:lnRef idx="1">
-            <a:schemeClr val="accent1"/>
-          </a:lnRef>
-          <a:fillRef idx="3">
-            <a:schemeClr val="accent1"/>
-          </a:fillRef>
-          <a:effectRef idx="2">
-            <a:schemeClr val="accent1"/>
-          </a:effectRef>
-          <a:fontRef idx="minor">
-            <a:schemeClr val="lt1"/>
-          </a:fontRef>
-        </p:style>
-        <p:txBody>
-          <a:bodyPr rtlCol="0" anchor="ctr"/>
-          <a:lstStyle/>
-          <a:p>
-            <a:pPr algn="ctr"/>
-          </a:p>
-        </p:txBody>
-      </p:sp>
-      <p:sp>
-        <p:nvSpPr>
-          <p:cNvPr id="17" name="Rectangle 16"/>
-          <p:cNvSpPr/>
-          <p:nvPr/>
-        </p:nvSpPr>
-        <p:spPr>
-          <a:xfrm>
-            <a:off x="6214719" y="3584448"/>
-            <a:ext cx="32004" cy="1481327"/>
-          </a:xfrm>
-          <a:prstGeom prst="rect">
-            <a:avLst/>
-          </a:prstGeom>
-          <a:solidFill>
-            <a:srgbClr val="F5A623"/>
-          </a:solidFill>
-          <a:ln>
-            <a:noFill/>
-          </a:ln>
-          <a:effectLst/>
-        </p:spPr>
-        <p:style>
-          <a:lnRef idx="1">
-            <a:schemeClr val="accent1"/>
-          </a:lnRef>
-          <a:fillRef idx="3">
-            <a:schemeClr val="accent1"/>
-          </a:fillRef>
-          <a:effectRef idx="2">
-            <a:schemeClr val="accent1"/>
-          </a:effectRef>
-          <a:fontRef idx="minor">
-            <a:schemeClr val="lt1"/>
-          </a:fontRef>
-        </p:style>
-        <p:txBody>
-          <a:bodyPr rtlCol="0" anchor="ctr"/>
-          <a:lstStyle/>
-          <a:p>
-            <a:pPr algn="ctr"/>
-          </a:p>
-        </p:txBody>
-      </p:sp>
-      <p:sp>
-        <p:nvSpPr>
-          <p:cNvPr id="18" name="TextBox 17"/>
-          <p:cNvSpPr txBox="1"/>
-          <p:nvPr/>
-        </p:nvSpPr>
-        <p:spPr>
-          <a:xfrm>
-            <a:off x="6434175" y="3602736"/>
-            <a:ext cx="4952847" cy="1444751"/>
-          </a:xfrm>
-          <a:prstGeom prst="rect">
-            <a:avLst/>
-          </a:prstGeom>
-          <a:noFill/>
-        </p:spPr>
-        <p:txBody>
-          <a:bodyPr wrap="square" lIns="0" rIns="0" tIns="0" bIns="0" anchor="t">
-            <a:spAutoFit/>
-          </a:bodyPr>
-          <a:lstStyle/>
-          <a:p>
-            <a:pPr algn="l">
-              <a:lnSpc>
-                <a:spcPct val="112000"/>
-              </a:lnSpc>
-              <a:spcAft>
-                <a:spcPts val="400"/>
-              </a:spcAft>
-            </a:pPr>
-            <a:r>
-              <a:rPr sz="1200" b="1">
+              <a:rPr sz="1220" b="1">
                 <a:solidFill>
                   <a:srgbClr val="EAF0F7"/>
                 </a:solidFill>
                 <a:latin typeface="Segoe UI"/>
               </a:rPr>
-              <a:t>The free tier sleeps</a:t>
-            </a:r>
-          </a:p>
+              <a:t>Slow bulk scoring</a:t>
+            </a:r>
+          </a:p>
+        </p:txBody>
+      </p:sp>
+      <p:sp>
+        <p:nvSpPr>
+          <p:cNvPr id="13" name="TextBox 12"/>
+          <p:cNvSpPr txBox="1"/>
+          <p:nvPr/>
+        </p:nvSpPr>
+        <p:spPr>
+          <a:xfrm>
+            <a:off x="1645919" y="2029967"/>
+            <a:ext cx="4111599" cy="612648"/>
+          </a:xfrm>
+          <a:prstGeom prst="rect">
+            <a:avLst/>
+          </a:prstGeom>
+          <a:noFill/>
+        </p:spPr>
+        <p:txBody>
+          <a:bodyPr wrap="square" lIns="0" rIns="0" tIns="0" bIns="0" anchor="t">
+            <a:spAutoFit/>
+          </a:bodyPr>
+          <a:lstStyle/>
           <a:p>
             <a:pPr algn="l">
               <a:lnSpc>
                 <a:spcPct val="116000"/>
               </a:lnSpc>
               <a:spcAft>
-                <a:spcPts val="500"/>
+                <a:spcPts val="0"/>
               </a:spcAft>
             </a:pPr>
             <a:r>
-              <a:rPr sz="1019" b="0">
+              <a:rPr sz="1040" b="0">
                 <a:solidFill>
                   <a:srgbClr val="8CA0BE"/>
                 </a:solidFill>
                 <a:latin typeface="Segoe UI"/>
               </a:rPr>
-              <a:t>An idle instance is suspended, so the first visitor waits for a cold start.</a:t>
-            </a:r>
-          </a:p>
+              <a:t>A large CSV can outlast the default 30-second timeout, killing the worker and returning a 502.</a:t>
+            </a:r>
+          </a:p>
+        </p:txBody>
+      </p:sp>
+      <p:sp>
+        <p:nvSpPr>
+          <p:cNvPr id="14" name="Rounded Rectangle 13"/>
+          <p:cNvSpPr/>
+          <p:nvPr/>
+        </p:nvSpPr>
+        <p:spPr>
+          <a:xfrm>
+            <a:off x="1645919" y="2852927"/>
+            <a:ext cx="4111599" cy="274320"/>
+          </a:xfrm>
+          <a:prstGeom prst="roundRect">
+            <a:avLst>
+              <a:gd name="adj" fmla="val 8000"/>
+            </a:avLst>
+          </a:prstGeom>
+          <a:solidFill>
+            <a:srgbClr val="162136"/>
+          </a:solidFill>
+          <a:ln w="10160">
+            <a:solidFill>
+              <a:srgbClr val="2FD8B4"/>
+            </a:solidFill>
+          </a:ln>
+          <a:effectLst/>
+        </p:spPr>
+        <p:style>
+          <a:lnRef idx="1">
+            <a:schemeClr val="accent1"/>
+          </a:lnRef>
+          <a:fillRef idx="3">
+            <a:schemeClr val="accent1"/>
+          </a:fillRef>
+          <a:effectRef idx="2">
+            <a:schemeClr val="accent1"/>
+          </a:effectRef>
+          <a:fontRef idx="minor">
+            <a:schemeClr val="lt1"/>
+          </a:fontRef>
+        </p:style>
+        <p:txBody>
+          <a:bodyPr rtlCol="0" anchor="ctr"/>
+          <a:lstStyle/>
+          <a:p>
+            <a:pPr algn="ctr"/>
+          </a:p>
+        </p:txBody>
+      </p:sp>
+      <p:sp>
+        <p:nvSpPr>
+          <p:cNvPr id="15" name="TextBox 14"/>
+          <p:cNvSpPr txBox="1"/>
+          <p:nvPr/>
+        </p:nvSpPr>
+        <p:spPr>
+          <a:xfrm>
+            <a:off x="1755648" y="2884932"/>
+            <a:ext cx="3892143" cy="201168"/>
+          </a:xfrm>
+          <a:prstGeom prst="rect">
+            <a:avLst/>
+          </a:prstGeom>
+          <a:noFill/>
+        </p:spPr>
+        <p:txBody>
+          <a:bodyPr wrap="square" lIns="0" rIns="0" tIns="0" bIns="0" anchor="t">
+            <a:spAutoFit/>
+          </a:bodyPr>
+          <a:lstStyle/>
           <a:p>
             <a:pPr algn="l">
               <a:lnSpc>
@@ -21404,27 +21110,27 @@
               </a:spcAft>
             </a:pPr>
             <a:r>
-              <a:rPr sz="1040" b="1">
+              <a:rPr sz="890" b="1">
                 <a:solidFill>
-                  <a:srgbClr val="F5A623"/>
+                  <a:srgbClr val="2FD8B4"/>
                 </a:solidFill>
                 <a:latin typeface="Consolas"/>
               </a:rPr>
-              <a:t>→ fixed by warm it before demoing</a:t>
-            </a:r>
-          </a:p>
-        </p:txBody>
-      </p:sp>
-      <p:sp>
-        <p:nvSpPr>
-          <p:cNvPr id="19" name="Rounded Rectangle 18"/>
-          <p:cNvSpPr/>
-          <p:nvPr/>
-        </p:nvSpPr>
-        <p:spPr>
-          <a:xfrm>
-            <a:off x="566928" y="5358383"/>
-            <a:ext cx="11057839" cy="859535"/>
+              <a:t>→  TIMEOUT 300S</a:t>
+            </a:r>
+          </a:p>
+        </p:txBody>
+      </p:sp>
+      <p:sp>
+        <p:nvSpPr>
+          <p:cNvPr id="16" name="Rounded Rectangle 15"/>
+          <p:cNvSpPr/>
+          <p:nvPr/>
+        </p:nvSpPr>
+        <p:spPr>
+          <a:xfrm>
+            <a:off x="6214719" y="1517904"/>
+            <a:ext cx="5410047" cy="1773935"/>
           </a:xfrm>
           <a:prstGeom prst="roundRect">
             <a:avLst>
@@ -21432,11 +21138,11 @@
             </a:avLst>
           </a:prstGeom>
           <a:solidFill>
-            <a:srgbClr val="162136"/>
-          </a:solidFill>
-          <a:ln w="15240">
+            <a:srgbClr val="111A2C"/>
+          </a:solidFill>
+          <a:ln w="12700">
             <a:solidFill>
-              <a:srgbClr val="4C8DFF"/>
+              <a:srgbClr val="223049"/>
             </a:solidFill>
           </a:ln>
           <a:effectLst/>
@@ -21465,14 +21171,58 @@
       </p:sp>
       <p:sp>
         <p:nvSpPr>
-          <p:cNvPr id="20" name="TextBox 19"/>
+          <p:cNvPr id="17" name="Rectangle 16"/>
+          <p:cNvSpPr/>
+          <p:nvPr/>
+        </p:nvSpPr>
+        <p:spPr>
+          <a:xfrm>
+            <a:off x="6214719" y="1664207"/>
+            <a:ext cx="41148" cy="1481327"/>
+          </a:xfrm>
+          <a:prstGeom prst="rect">
+            <a:avLst/>
+          </a:prstGeom>
+          <a:solidFill>
+            <a:srgbClr val="2FD8B4"/>
+          </a:solidFill>
+          <a:ln>
+            <a:noFill/>
+          </a:ln>
+          <a:effectLst/>
+        </p:spPr>
+        <p:style>
+          <a:lnRef idx="1">
+            <a:schemeClr val="accent1"/>
+          </a:lnRef>
+          <a:fillRef idx="3">
+            <a:schemeClr val="accent1"/>
+          </a:fillRef>
+          <a:effectRef idx="2">
+            <a:schemeClr val="accent1"/>
+          </a:effectRef>
+          <a:fontRef idx="minor">
+            <a:schemeClr val="lt1"/>
+          </a:fontRef>
+        </p:style>
+        <p:txBody>
+          <a:bodyPr rtlCol="0" anchor="ctr"/>
+          <a:lstStyle/>
+          <a:p>
+            <a:pPr algn="ctr"/>
+          </a:p>
+        </p:txBody>
+      </p:sp>
+      <p:sp>
+        <p:nvSpPr>
+          <p:cNvPr id="18" name="TextBox 17"/>
           <p:cNvSpPr txBox="1"/>
           <p:nvPr/>
         </p:nvSpPr>
         <p:spPr>
           <a:xfrm>
-            <a:off x="749808" y="5486399"/>
-            <a:ext cx="10692079" cy="621791"/>
+            <a:off x="6379311" y="1719072"/>
+            <a:ext cx="621792" cy="384048"/>
           </a:xfrm>
           <a:prstGeom prst="rect">
             <a:avLst/>
@@ -21490,19 +21240,170 @@
                 <a:spcPct val="112000"/>
               </a:lnSpc>
               <a:spcAft>
-                <a:spcPts val="300"/>
+                <a:spcPts val="0"/>
               </a:spcAft>
             </a:pPr>
             <a:r>
-              <a:rPr sz="1150" b="1">
+              <a:rPr sz="2200" b="1">
                 <a:solidFill>
-                  <a:srgbClr val="4C8DFF"/>
+                  <a:srgbClr val="2FD8B4"/>
+                </a:solidFill>
+                <a:latin typeface="Consolas"/>
+              </a:rPr>
+              <a:t>02</a:t>
+            </a:r>
+          </a:p>
+        </p:txBody>
+      </p:sp>
+      <p:sp>
+        <p:nvSpPr>
+          <p:cNvPr id="19" name="TextBox 18"/>
+          <p:cNvSpPr txBox="1"/>
+          <p:nvPr/>
+        </p:nvSpPr>
+        <p:spPr>
+          <a:xfrm>
+            <a:off x="6379311" y="2221991"/>
+            <a:ext cx="749808" cy="256032"/>
+          </a:xfrm>
+          <a:prstGeom prst="rect">
+            <a:avLst/>
+          </a:prstGeom>
+          <a:noFill/>
+        </p:spPr>
+        <p:txBody>
+          <a:bodyPr wrap="square" lIns="0" rIns="0" tIns="0" bIns="0" anchor="t">
+            <a:spAutoFit/>
+          </a:bodyPr>
+          <a:lstStyle/>
+          <a:p>
+            <a:pPr algn="l">
+              <a:lnSpc>
+                <a:spcPct val="112000"/>
+              </a:lnSpc>
+              <a:spcAft>
+                <a:spcPts val="0"/>
+              </a:spcAft>
+            </a:pPr>
+            <a:r>
+              <a:rPr sz="819" b="1">
+                <a:solidFill>
+                  <a:srgbClr val="8CA0BE"/>
+                </a:solidFill>
+                <a:latin typeface="Consolas"/>
+              </a:rPr>
+              <a:t>MODEL LOAD</a:t>
+            </a:r>
+          </a:p>
+        </p:txBody>
+      </p:sp>
+      <p:sp>
+        <p:nvSpPr>
+          <p:cNvPr id="20" name="Rectangle 19"/>
+          <p:cNvSpPr/>
+          <p:nvPr/>
+        </p:nvSpPr>
+        <p:spPr>
+          <a:xfrm>
+            <a:off x="7129119" y="1700784"/>
+            <a:ext cx="22860" cy="1408175"/>
+          </a:xfrm>
+          <a:prstGeom prst="rect">
+            <a:avLst/>
+          </a:prstGeom>
+          <a:solidFill>
+            <a:srgbClr val="223049"/>
+          </a:solidFill>
+          <a:ln>
+            <a:noFill/>
+          </a:ln>
+          <a:effectLst/>
+        </p:spPr>
+        <p:style>
+          <a:lnRef idx="1">
+            <a:schemeClr val="accent1"/>
+          </a:lnRef>
+          <a:fillRef idx="3">
+            <a:schemeClr val="accent1"/>
+          </a:fillRef>
+          <a:effectRef idx="2">
+            <a:schemeClr val="accent1"/>
+          </a:effectRef>
+          <a:fontRef idx="minor">
+            <a:schemeClr val="lt1"/>
+          </a:fontRef>
+        </p:style>
+        <p:txBody>
+          <a:bodyPr rtlCol="0" anchor="ctr"/>
+          <a:lstStyle/>
+          <a:p>
+            <a:pPr algn="ctr"/>
+          </a:p>
+        </p:txBody>
+      </p:sp>
+      <p:sp>
+        <p:nvSpPr>
+          <p:cNvPr id="21" name="TextBox 20"/>
+          <p:cNvSpPr txBox="1"/>
+          <p:nvPr/>
+        </p:nvSpPr>
+        <p:spPr>
+          <a:xfrm>
+            <a:off x="7293711" y="1682495"/>
+            <a:ext cx="4111599" cy="292608"/>
+          </a:xfrm>
+          <a:prstGeom prst="rect">
+            <a:avLst/>
+          </a:prstGeom>
+          <a:noFill/>
+        </p:spPr>
+        <p:txBody>
+          <a:bodyPr wrap="square" lIns="0" rIns="0" tIns="0" bIns="0" anchor="t">
+            <a:spAutoFit/>
+          </a:bodyPr>
+          <a:lstStyle/>
+          <a:p>
+            <a:pPr algn="l">
+              <a:lnSpc>
+                <a:spcPct val="112000"/>
+              </a:lnSpc>
+              <a:spcAft>
+                <a:spcPts val="0"/>
+              </a:spcAft>
+            </a:pPr>
+            <a:r>
+              <a:rPr sz="1220" b="1">
+                <a:solidFill>
+                  <a:srgbClr val="EAF0F7"/>
                 </a:solidFill>
                 <a:latin typeface="Segoe UI"/>
               </a:rPr>
-              <a:t>SHIPPED AS</a:t>
-            </a:r>
-          </a:p>
+              <a:t>Reloading on every request</a:t>
+            </a:r>
+          </a:p>
+        </p:txBody>
+      </p:sp>
+      <p:sp>
+        <p:nvSpPr>
+          <p:cNvPr id="22" name="TextBox 21"/>
+          <p:cNvSpPr txBox="1"/>
+          <p:nvPr/>
+        </p:nvSpPr>
+        <p:spPr>
+          <a:xfrm>
+            <a:off x="7293711" y="2029967"/>
+            <a:ext cx="4111599" cy="612648"/>
+          </a:xfrm>
+          <a:prstGeom prst="rect">
+            <a:avLst/>
+          </a:prstGeom>
+          <a:noFill/>
+        </p:spPr>
+        <p:txBody>
+          <a:bodyPr wrap="square" lIns="0" rIns="0" tIns="0" bIns="0" anchor="t">
+            <a:spAutoFit/>
+          </a:bodyPr>
+          <a:lstStyle/>
           <a:p>
             <a:pPr algn="l">
               <a:lnSpc>
@@ -21513,687 +21414,75 @@
               </a:spcAft>
             </a:pPr>
             <a:r>
-              <a:rPr sz="1080" b="0">
+              <a:rPr sz="1040" b="0">
                 <a:solidFill>
-                  <a:srgbClr val="EAF0F7"/>
+                  <a:srgbClr val="8CA0BE"/>
                 </a:solidFill>
                 <a:latin typeface="Segoe UI"/>
               </a:rPr>
-              <a:t>Gunicorn with a threaded worker · Dockerfile and Procfile · version-pinned requirements · hosted on Render, where the application answers at the URL on the closing slide.</a:t>
-            </a:r>
-          </a:p>
-        </p:txBody>
-      </p:sp>
-      <p:sp>
-        <p:nvSpPr>
-          <p:cNvPr id="21" name="Rectangle 20"/>
-          <p:cNvSpPr/>
-          <p:nvPr/>
-        </p:nvSpPr>
-        <p:spPr>
-          <a:xfrm>
-            <a:off x="566928" y="6309360"/>
-            <a:ext cx="743145" cy="43891"/>
-          </a:xfrm>
-          <a:prstGeom prst="rect">
-            <a:avLst/>
-          </a:prstGeom>
-          <a:solidFill>
-            <a:srgbClr val="223049"/>
-          </a:solidFill>
-          <a:ln>
-            <a:noFill/>
-          </a:ln>
-          <a:effectLst/>
-        </p:spPr>
-        <p:style>
-          <a:lnRef idx="1">
-            <a:schemeClr val="accent1"/>
-          </a:lnRef>
-          <a:fillRef idx="3">
-            <a:schemeClr val="accent1"/>
-          </a:fillRef>
-          <a:effectRef idx="2">
-            <a:schemeClr val="accent1"/>
-          </a:effectRef>
-          <a:fontRef idx="minor">
-            <a:schemeClr val="lt1"/>
-          </a:fontRef>
-        </p:style>
-        <p:txBody>
-          <a:bodyPr rtlCol="0" anchor="ctr"/>
-          <a:lstStyle/>
-          <a:p>
-            <a:pPr algn="ctr"/>
-          </a:p>
-        </p:txBody>
-      </p:sp>
-      <p:sp>
-        <p:nvSpPr>
-          <p:cNvPr id="22" name="Rectangle 21"/>
-          <p:cNvSpPr/>
-          <p:nvPr/>
-        </p:nvSpPr>
-        <p:spPr>
-          <a:xfrm>
-            <a:off x="1360365" y="6309360"/>
-            <a:ext cx="743145" cy="43891"/>
-          </a:xfrm>
-          <a:prstGeom prst="rect">
-            <a:avLst/>
-          </a:prstGeom>
-          <a:solidFill>
-            <a:srgbClr val="223049"/>
-          </a:solidFill>
-          <a:ln>
-            <a:noFill/>
-          </a:ln>
-          <a:effectLst/>
-        </p:spPr>
-        <p:style>
-          <a:lnRef idx="1">
-            <a:schemeClr val="accent1"/>
-          </a:lnRef>
-          <a:fillRef idx="3">
-            <a:schemeClr val="accent1"/>
-          </a:fillRef>
-          <a:effectRef idx="2">
-            <a:schemeClr val="accent1"/>
-          </a:effectRef>
-          <a:fontRef idx="minor">
-            <a:schemeClr val="lt1"/>
-          </a:fontRef>
-        </p:style>
-        <p:txBody>
-          <a:bodyPr rtlCol="0" anchor="ctr"/>
-          <a:lstStyle/>
-          <a:p>
-            <a:pPr algn="ctr"/>
-          </a:p>
-        </p:txBody>
-      </p:sp>
-      <p:sp>
-        <p:nvSpPr>
-          <p:cNvPr id="23" name="Rectangle 22"/>
-          <p:cNvSpPr/>
-          <p:nvPr/>
-        </p:nvSpPr>
-        <p:spPr>
-          <a:xfrm>
-            <a:off x="2153803" y="6309360"/>
-            <a:ext cx="743145" cy="43891"/>
-          </a:xfrm>
-          <a:prstGeom prst="rect">
-            <a:avLst/>
-          </a:prstGeom>
-          <a:solidFill>
-            <a:srgbClr val="223049"/>
-          </a:solidFill>
-          <a:ln>
-            <a:noFill/>
-          </a:ln>
-          <a:effectLst/>
-        </p:spPr>
-        <p:style>
-          <a:lnRef idx="1">
-            <a:schemeClr val="accent1"/>
-          </a:lnRef>
-          <a:fillRef idx="3">
-            <a:schemeClr val="accent1"/>
-          </a:fillRef>
-          <a:effectRef idx="2">
-            <a:schemeClr val="accent1"/>
-          </a:effectRef>
-          <a:fontRef idx="minor">
-            <a:schemeClr val="lt1"/>
-          </a:fontRef>
-        </p:style>
-        <p:txBody>
-          <a:bodyPr rtlCol="0" anchor="ctr"/>
-          <a:lstStyle/>
-          <a:p>
-            <a:pPr algn="ctr"/>
-          </a:p>
-        </p:txBody>
-      </p:sp>
-      <p:sp>
-        <p:nvSpPr>
-          <p:cNvPr id="24" name="Rectangle 23"/>
-          <p:cNvSpPr/>
-          <p:nvPr/>
-        </p:nvSpPr>
-        <p:spPr>
-          <a:xfrm>
-            <a:off x="2947241" y="6309360"/>
-            <a:ext cx="743145" cy="43891"/>
-          </a:xfrm>
-          <a:prstGeom prst="rect">
-            <a:avLst/>
-          </a:prstGeom>
-          <a:solidFill>
-            <a:srgbClr val="223049"/>
-          </a:solidFill>
-          <a:ln>
-            <a:noFill/>
-          </a:ln>
-          <a:effectLst/>
-        </p:spPr>
-        <p:style>
-          <a:lnRef idx="1">
-            <a:schemeClr val="accent1"/>
-          </a:lnRef>
-          <a:fillRef idx="3">
-            <a:schemeClr val="accent1"/>
-          </a:fillRef>
-          <a:effectRef idx="2">
-            <a:schemeClr val="accent1"/>
-          </a:effectRef>
-          <a:fontRef idx="minor">
-            <a:schemeClr val="lt1"/>
-          </a:fontRef>
-        </p:style>
-        <p:txBody>
-          <a:bodyPr rtlCol="0" anchor="ctr"/>
-          <a:lstStyle/>
-          <a:p>
-            <a:pPr algn="ctr"/>
-          </a:p>
-        </p:txBody>
-      </p:sp>
-      <p:sp>
-        <p:nvSpPr>
-          <p:cNvPr id="25" name="Rectangle 24"/>
-          <p:cNvSpPr/>
-          <p:nvPr/>
-        </p:nvSpPr>
-        <p:spPr>
-          <a:xfrm>
-            <a:off x="3740679" y="6309360"/>
-            <a:ext cx="743145" cy="43891"/>
-          </a:xfrm>
-          <a:prstGeom prst="rect">
-            <a:avLst/>
-          </a:prstGeom>
-          <a:solidFill>
-            <a:srgbClr val="223049"/>
-          </a:solidFill>
-          <a:ln>
-            <a:noFill/>
-          </a:ln>
-          <a:effectLst/>
-        </p:spPr>
-        <p:style>
-          <a:lnRef idx="1">
-            <a:schemeClr val="accent1"/>
-          </a:lnRef>
-          <a:fillRef idx="3">
-            <a:schemeClr val="accent1"/>
-          </a:fillRef>
-          <a:effectRef idx="2">
-            <a:schemeClr val="accent1"/>
-          </a:effectRef>
-          <a:fontRef idx="minor">
-            <a:schemeClr val="lt1"/>
-          </a:fontRef>
-        </p:style>
-        <p:txBody>
-          <a:bodyPr rtlCol="0" anchor="ctr"/>
-          <a:lstStyle/>
-          <a:p>
-            <a:pPr algn="ctr"/>
-          </a:p>
-        </p:txBody>
-      </p:sp>
-      <p:sp>
-        <p:nvSpPr>
-          <p:cNvPr id="26" name="Rectangle 25"/>
-          <p:cNvSpPr/>
-          <p:nvPr/>
-        </p:nvSpPr>
-        <p:spPr>
-          <a:xfrm>
-            <a:off x="4534117" y="6309360"/>
-            <a:ext cx="743145" cy="43891"/>
-          </a:xfrm>
-          <a:prstGeom prst="rect">
-            <a:avLst/>
-          </a:prstGeom>
-          <a:solidFill>
-            <a:srgbClr val="223049"/>
-          </a:solidFill>
-          <a:ln>
-            <a:noFill/>
-          </a:ln>
-          <a:effectLst/>
-        </p:spPr>
-        <p:style>
-          <a:lnRef idx="1">
-            <a:schemeClr val="accent1"/>
-          </a:lnRef>
-          <a:fillRef idx="3">
-            <a:schemeClr val="accent1"/>
-          </a:fillRef>
-          <a:effectRef idx="2">
-            <a:schemeClr val="accent1"/>
-          </a:effectRef>
-          <a:fontRef idx="minor">
-            <a:schemeClr val="lt1"/>
-          </a:fontRef>
-        </p:style>
-        <p:txBody>
-          <a:bodyPr rtlCol="0" anchor="ctr"/>
-          <a:lstStyle/>
-          <a:p>
-            <a:pPr algn="ctr"/>
-          </a:p>
-        </p:txBody>
-      </p:sp>
-      <p:sp>
-        <p:nvSpPr>
-          <p:cNvPr id="27" name="Rectangle 26"/>
-          <p:cNvSpPr/>
-          <p:nvPr/>
-        </p:nvSpPr>
-        <p:spPr>
-          <a:xfrm>
-            <a:off x="5327555" y="6309360"/>
-            <a:ext cx="743145" cy="43891"/>
-          </a:xfrm>
-          <a:prstGeom prst="rect">
-            <a:avLst/>
-          </a:prstGeom>
-          <a:solidFill>
-            <a:srgbClr val="223049"/>
-          </a:solidFill>
-          <a:ln>
-            <a:noFill/>
-          </a:ln>
-          <a:effectLst/>
-        </p:spPr>
-        <p:style>
-          <a:lnRef idx="1">
-            <a:schemeClr val="accent1"/>
-          </a:lnRef>
-          <a:fillRef idx="3">
-            <a:schemeClr val="accent1"/>
-          </a:fillRef>
-          <a:effectRef idx="2">
-            <a:schemeClr val="accent1"/>
-          </a:effectRef>
-          <a:fontRef idx="minor">
-            <a:schemeClr val="lt1"/>
-          </a:fontRef>
-        </p:style>
-        <p:txBody>
-          <a:bodyPr rtlCol="0" anchor="ctr"/>
-          <a:lstStyle/>
-          <a:p>
-            <a:pPr algn="ctr"/>
-          </a:p>
-        </p:txBody>
-      </p:sp>
-      <p:sp>
-        <p:nvSpPr>
-          <p:cNvPr id="28" name="Rectangle 27"/>
-          <p:cNvSpPr/>
-          <p:nvPr/>
-        </p:nvSpPr>
-        <p:spPr>
-          <a:xfrm>
-            <a:off x="6120993" y="6309360"/>
-            <a:ext cx="743145" cy="43891"/>
-          </a:xfrm>
-          <a:prstGeom prst="rect">
-            <a:avLst/>
-          </a:prstGeom>
-          <a:solidFill>
-            <a:srgbClr val="223049"/>
-          </a:solidFill>
-          <a:ln>
-            <a:noFill/>
-          </a:ln>
-          <a:effectLst/>
-        </p:spPr>
-        <p:style>
-          <a:lnRef idx="1">
-            <a:schemeClr val="accent1"/>
-          </a:lnRef>
-          <a:fillRef idx="3">
-            <a:schemeClr val="accent1"/>
-          </a:fillRef>
-          <a:effectRef idx="2">
-            <a:schemeClr val="accent1"/>
-          </a:effectRef>
-          <a:fontRef idx="minor">
-            <a:schemeClr val="lt1"/>
-          </a:fontRef>
-        </p:style>
-        <p:txBody>
-          <a:bodyPr rtlCol="0" anchor="ctr"/>
-          <a:lstStyle/>
-          <a:p>
-            <a:pPr algn="ctr"/>
-          </a:p>
-        </p:txBody>
-      </p:sp>
-      <p:sp>
-        <p:nvSpPr>
-          <p:cNvPr id="29" name="Rectangle 28"/>
-          <p:cNvSpPr/>
-          <p:nvPr/>
-        </p:nvSpPr>
-        <p:spPr>
-          <a:xfrm>
-            <a:off x="6914431" y="6309360"/>
-            <a:ext cx="743145" cy="43891"/>
-          </a:xfrm>
-          <a:prstGeom prst="rect">
-            <a:avLst/>
-          </a:prstGeom>
-          <a:solidFill>
-            <a:srgbClr val="223049"/>
-          </a:solidFill>
-          <a:ln>
-            <a:noFill/>
-          </a:ln>
-          <a:effectLst/>
-        </p:spPr>
-        <p:style>
-          <a:lnRef idx="1">
-            <a:schemeClr val="accent1"/>
-          </a:lnRef>
-          <a:fillRef idx="3">
-            <a:schemeClr val="accent1"/>
-          </a:fillRef>
-          <a:effectRef idx="2">
-            <a:schemeClr val="accent1"/>
-          </a:effectRef>
-          <a:fontRef idx="minor">
-            <a:schemeClr val="lt1"/>
-          </a:fontRef>
-        </p:style>
-        <p:txBody>
-          <a:bodyPr rtlCol="0" anchor="ctr"/>
-          <a:lstStyle/>
-          <a:p>
-            <a:pPr algn="ctr"/>
-          </a:p>
-        </p:txBody>
-      </p:sp>
-      <p:sp>
-        <p:nvSpPr>
-          <p:cNvPr id="30" name="Rectangle 29"/>
-          <p:cNvSpPr/>
-          <p:nvPr/>
-        </p:nvSpPr>
-        <p:spPr>
-          <a:xfrm>
-            <a:off x="7707869" y="6309360"/>
-            <a:ext cx="743145" cy="43891"/>
-          </a:xfrm>
-          <a:prstGeom prst="rect">
-            <a:avLst/>
-          </a:prstGeom>
-          <a:solidFill>
-            <a:srgbClr val="223049"/>
-          </a:solidFill>
-          <a:ln>
-            <a:noFill/>
-          </a:ln>
-          <a:effectLst/>
-        </p:spPr>
-        <p:style>
-          <a:lnRef idx="1">
-            <a:schemeClr val="accent1"/>
-          </a:lnRef>
-          <a:fillRef idx="3">
-            <a:schemeClr val="accent1"/>
-          </a:fillRef>
-          <a:effectRef idx="2">
-            <a:schemeClr val="accent1"/>
-          </a:effectRef>
-          <a:fontRef idx="minor">
-            <a:schemeClr val="lt1"/>
-          </a:fontRef>
-        </p:style>
-        <p:txBody>
-          <a:bodyPr rtlCol="0" anchor="ctr"/>
-          <a:lstStyle/>
-          <a:p>
-            <a:pPr algn="ctr"/>
-          </a:p>
-        </p:txBody>
-      </p:sp>
-      <p:sp>
-        <p:nvSpPr>
-          <p:cNvPr id="31" name="Rectangle 30"/>
-          <p:cNvSpPr/>
-          <p:nvPr/>
-        </p:nvSpPr>
-        <p:spPr>
-          <a:xfrm>
-            <a:off x="8501307" y="6309360"/>
-            <a:ext cx="743145" cy="43891"/>
-          </a:xfrm>
-          <a:prstGeom prst="rect">
-            <a:avLst/>
-          </a:prstGeom>
-          <a:solidFill>
-            <a:srgbClr val="223049"/>
-          </a:solidFill>
-          <a:ln>
-            <a:noFill/>
-          </a:ln>
-          <a:effectLst/>
-        </p:spPr>
-        <p:style>
-          <a:lnRef idx="1">
-            <a:schemeClr val="accent1"/>
-          </a:lnRef>
-          <a:fillRef idx="3">
-            <a:schemeClr val="accent1"/>
-          </a:fillRef>
-          <a:effectRef idx="2">
-            <a:schemeClr val="accent1"/>
-          </a:effectRef>
-          <a:fontRef idx="minor">
-            <a:schemeClr val="lt1"/>
-          </a:fontRef>
-        </p:style>
-        <p:txBody>
-          <a:bodyPr rtlCol="0" anchor="ctr"/>
-          <a:lstStyle/>
-          <a:p>
-            <a:pPr algn="ctr"/>
-          </a:p>
-        </p:txBody>
-      </p:sp>
-      <p:sp>
-        <p:nvSpPr>
-          <p:cNvPr id="32" name="Rectangle 31"/>
-          <p:cNvSpPr/>
-          <p:nvPr/>
-        </p:nvSpPr>
-        <p:spPr>
-          <a:xfrm>
-            <a:off x="9294745" y="6309360"/>
-            <a:ext cx="743145" cy="43891"/>
-          </a:xfrm>
-          <a:prstGeom prst="rect">
-            <a:avLst/>
-          </a:prstGeom>
-          <a:solidFill>
-            <a:srgbClr val="223049"/>
-          </a:solidFill>
-          <a:ln>
-            <a:noFill/>
-          </a:ln>
-          <a:effectLst/>
-        </p:spPr>
-        <p:style>
-          <a:lnRef idx="1">
-            <a:schemeClr val="accent1"/>
-          </a:lnRef>
-          <a:fillRef idx="3">
-            <a:schemeClr val="accent1"/>
-          </a:fillRef>
-          <a:effectRef idx="2">
-            <a:schemeClr val="accent1"/>
-          </a:effectRef>
-          <a:fontRef idx="minor">
-            <a:schemeClr val="lt1"/>
-          </a:fontRef>
-        </p:style>
-        <p:txBody>
-          <a:bodyPr rtlCol="0" anchor="ctr"/>
-          <a:lstStyle/>
-          <a:p>
-            <a:pPr algn="ctr"/>
-          </a:p>
-        </p:txBody>
-      </p:sp>
-      <p:sp>
-        <p:nvSpPr>
-          <p:cNvPr id="33" name="Rectangle 32"/>
-          <p:cNvSpPr/>
-          <p:nvPr/>
-        </p:nvSpPr>
-        <p:spPr>
-          <a:xfrm>
-            <a:off x="10088183" y="6309360"/>
-            <a:ext cx="743145" cy="43891"/>
-          </a:xfrm>
-          <a:prstGeom prst="rect">
-            <a:avLst/>
-          </a:prstGeom>
-          <a:solidFill>
-            <a:srgbClr val="223049"/>
-          </a:solidFill>
-          <a:ln>
-            <a:noFill/>
-          </a:ln>
-          <a:effectLst/>
-        </p:spPr>
-        <p:style>
-          <a:lnRef idx="1">
-            <a:schemeClr val="accent1"/>
-          </a:lnRef>
-          <a:fillRef idx="3">
-            <a:schemeClr val="accent1"/>
-          </a:fillRef>
-          <a:effectRef idx="2">
-            <a:schemeClr val="accent1"/>
-          </a:effectRef>
-          <a:fontRef idx="minor">
-            <a:schemeClr val="lt1"/>
-          </a:fontRef>
-        </p:style>
-        <p:txBody>
-          <a:bodyPr rtlCol="0" anchor="ctr"/>
-          <a:lstStyle/>
-          <a:p>
-            <a:pPr algn="ctr"/>
-          </a:p>
-        </p:txBody>
-      </p:sp>
-      <p:sp>
-        <p:nvSpPr>
-          <p:cNvPr id="34" name="Rectangle 33"/>
-          <p:cNvSpPr/>
-          <p:nvPr/>
-        </p:nvSpPr>
-        <p:spPr>
-          <a:xfrm>
-            <a:off x="10881621" y="6296558"/>
-            <a:ext cx="743145" cy="68580"/>
-          </a:xfrm>
-          <a:prstGeom prst="rect">
-            <a:avLst/>
-          </a:prstGeom>
-          <a:solidFill>
-            <a:srgbClr val="2FD8B4"/>
-          </a:solidFill>
-          <a:ln>
-            <a:noFill/>
-          </a:ln>
-          <a:effectLst/>
-        </p:spPr>
-        <p:style>
-          <a:lnRef idx="1">
-            <a:schemeClr val="accent1"/>
-          </a:lnRef>
-          <a:fillRef idx="3">
-            <a:schemeClr val="accent1"/>
-          </a:fillRef>
-          <a:effectRef idx="2">
-            <a:schemeClr val="accent1"/>
-          </a:effectRef>
-          <a:fontRef idx="minor">
-            <a:schemeClr val="lt1"/>
-          </a:fontRef>
-        </p:style>
-        <p:txBody>
-          <a:bodyPr rtlCol="0" anchor="ctr"/>
-          <a:lstStyle/>
-          <a:p>
-            <a:pPr algn="ctr"/>
-          </a:p>
-        </p:txBody>
-      </p:sp>
-      <p:sp>
-        <p:nvSpPr>
-          <p:cNvPr id="35" name="Rectangle 34"/>
-          <p:cNvSpPr/>
-          <p:nvPr/>
-        </p:nvSpPr>
-        <p:spPr>
-          <a:xfrm>
-            <a:off x="566928" y="6455664"/>
-            <a:ext cx="11057839" cy="9144"/>
-          </a:xfrm>
-          <a:prstGeom prst="rect">
-            <a:avLst/>
-          </a:prstGeom>
-          <a:solidFill>
-            <a:srgbClr val="223049"/>
-          </a:solidFill>
-          <a:ln>
-            <a:noFill/>
-          </a:ln>
-          <a:effectLst/>
-        </p:spPr>
-        <p:style>
-          <a:lnRef idx="1">
-            <a:schemeClr val="accent1"/>
-          </a:lnRef>
-          <a:fillRef idx="3">
-            <a:schemeClr val="accent1"/>
-          </a:fillRef>
-          <a:effectRef idx="2">
-            <a:schemeClr val="accent1"/>
-          </a:effectRef>
-          <a:fontRef idx="minor">
-            <a:schemeClr val="lt1"/>
-          </a:fontRef>
-        </p:style>
-        <p:txBody>
-          <a:bodyPr rtlCol="0" anchor="ctr"/>
-          <a:lstStyle/>
-          <a:p>
-            <a:pPr algn="ctr"/>
-          </a:p>
-        </p:txBody>
-      </p:sp>
-      <p:sp>
-        <p:nvSpPr>
-          <p:cNvPr id="36" name="TextBox 35"/>
+              <a:t>Reading the model pickle for every request wastes scarce instance memory.</a:t>
+            </a:r>
+          </a:p>
+        </p:txBody>
+      </p:sp>
+      <p:sp>
+        <p:nvSpPr>
+          <p:cNvPr id="23" name="Rounded Rectangle 22"/>
+          <p:cNvSpPr/>
+          <p:nvPr/>
+        </p:nvSpPr>
+        <p:spPr>
+          <a:xfrm>
+            <a:off x="7293711" y="2852927"/>
+            <a:ext cx="4111599" cy="274320"/>
+          </a:xfrm>
+          <a:prstGeom prst="roundRect">
+            <a:avLst>
+              <a:gd name="adj" fmla="val 8000"/>
+            </a:avLst>
+          </a:prstGeom>
+          <a:solidFill>
+            <a:srgbClr val="162136"/>
+          </a:solidFill>
+          <a:ln w="10160">
+            <a:solidFill>
+              <a:srgbClr val="2FD8B4"/>
+            </a:solidFill>
+          </a:ln>
+          <a:effectLst/>
+        </p:spPr>
+        <p:style>
+          <a:lnRef idx="1">
+            <a:schemeClr val="accent1"/>
+          </a:lnRef>
+          <a:fillRef idx="3">
+            <a:schemeClr val="accent1"/>
+          </a:fillRef>
+          <a:effectRef idx="2">
+            <a:schemeClr val="accent1"/>
+          </a:effectRef>
+          <a:fontRef idx="minor">
+            <a:schemeClr val="lt1"/>
+          </a:fontRef>
+        </p:style>
+        <p:txBody>
+          <a:bodyPr rtlCol="0" anchor="ctr"/>
+          <a:lstStyle/>
+          <a:p>
+            <a:pPr algn="ctr"/>
+          </a:p>
+        </p:txBody>
+      </p:sp>
+      <p:sp>
+        <p:nvSpPr>
+          <p:cNvPr id="24" name="TextBox 23"/>
           <p:cNvSpPr txBox="1"/>
           <p:nvPr/>
         </p:nvSpPr>
         <p:spPr>
           <a:xfrm>
-            <a:off x="566928" y="6510528"/>
-            <a:ext cx="9509760" cy="219456"/>
+            <a:off x="7403439" y="2884932"/>
+            <a:ext cx="3892143" cy="201168"/>
           </a:xfrm>
           <a:prstGeom prst="rect">
             <a:avLst/>
@@ -22215,6 +21504,2037 @@
               </a:spcAft>
             </a:pPr>
             <a:r>
+              <a:rPr sz="890" b="1">
+                <a:solidFill>
+                  <a:srgbClr val="2FD8B4"/>
+                </a:solidFill>
+                <a:latin typeface="Consolas"/>
+              </a:rPr>
+              <a:t>→  GUNICORN PRELOAD</a:t>
+            </a:r>
+          </a:p>
+        </p:txBody>
+      </p:sp>
+      <p:sp>
+        <p:nvSpPr>
+          <p:cNvPr id="25" name="Rounded Rectangle 24"/>
+          <p:cNvSpPr/>
+          <p:nvPr/>
+        </p:nvSpPr>
+        <p:spPr>
+          <a:xfrm>
+            <a:off x="566928" y="3438144"/>
+            <a:ext cx="5410047" cy="1773935"/>
+          </a:xfrm>
+          <a:prstGeom prst="roundRect">
+            <a:avLst>
+              <a:gd name="adj" fmla="val 8000"/>
+            </a:avLst>
+          </a:prstGeom>
+          <a:solidFill>
+            <a:srgbClr val="111A2C"/>
+          </a:solidFill>
+          <a:ln w="12700">
+            <a:solidFill>
+              <a:srgbClr val="223049"/>
+            </a:solidFill>
+          </a:ln>
+          <a:effectLst/>
+        </p:spPr>
+        <p:style>
+          <a:lnRef idx="1">
+            <a:schemeClr val="accent1"/>
+          </a:lnRef>
+          <a:fillRef idx="3">
+            <a:schemeClr val="accent1"/>
+          </a:fillRef>
+          <a:effectRef idx="2">
+            <a:schemeClr val="accent1"/>
+          </a:effectRef>
+          <a:fontRef idx="minor">
+            <a:schemeClr val="lt1"/>
+          </a:fontRef>
+        </p:style>
+        <p:txBody>
+          <a:bodyPr rtlCol="0" anchor="ctr"/>
+          <a:lstStyle/>
+          <a:p>
+            <a:pPr algn="ctr"/>
+          </a:p>
+        </p:txBody>
+      </p:sp>
+      <p:sp>
+        <p:nvSpPr>
+          <p:cNvPr id="26" name="Rectangle 25"/>
+          <p:cNvSpPr/>
+          <p:nvPr/>
+        </p:nvSpPr>
+        <p:spPr>
+          <a:xfrm>
+            <a:off x="566928" y="3584448"/>
+            <a:ext cx="41148" cy="1481327"/>
+          </a:xfrm>
+          <a:prstGeom prst="rect">
+            <a:avLst/>
+          </a:prstGeom>
+          <a:solidFill>
+            <a:srgbClr val="2FD8B4"/>
+          </a:solidFill>
+          <a:ln>
+            <a:noFill/>
+          </a:ln>
+          <a:effectLst/>
+        </p:spPr>
+        <p:style>
+          <a:lnRef idx="1">
+            <a:schemeClr val="accent1"/>
+          </a:lnRef>
+          <a:fillRef idx="3">
+            <a:schemeClr val="accent1"/>
+          </a:fillRef>
+          <a:effectRef idx="2">
+            <a:schemeClr val="accent1"/>
+          </a:effectRef>
+          <a:fontRef idx="minor">
+            <a:schemeClr val="lt1"/>
+          </a:fontRef>
+        </p:style>
+        <p:txBody>
+          <a:bodyPr rtlCol="0" anchor="ctr"/>
+          <a:lstStyle/>
+          <a:p>
+            <a:pPr algn="ctr"/>
+          </a:p>
+        </p:txBody>
+      </p:sp>
+      <p:sp>
+        <p:nvSpPr>
+          <p:cNvPr id="27" name="TextBox 26"/>
+          <p:cNvSpPr txBox="1"/>
+          <p:nvPr/>
+        </p:nvSpPr>
+        <p:spPr>
+          <a:xfrm>
+            <a:off x="731520" y="3639312"/>
+            <a:ext cx="621792" cy="384048"/>
+          </a:xfrm>
+          <a:prstGeom prst="rect">
+            <a:avLst/>
+          </a:prstGeom>
+          <a:noFill/>
+        </p:spPr>
+        <p:txBody>
+          <a:bodyPr wrap="square" lIns="0" rIns="0" tIns="0" bIns="0" anchor="t">
+            <a:spAutoFit/>
+          </a:bodyPr>
+          <a:lstStyle/>
+          <a:p>
+            <a:pPr algn="l">
+              <a:lnSpc>
+                <a:spcPct val="112000"/>
+              </a:lnSpc>
+              <a:spcAft>
+                <a:spcPts val="0"/>
+              </a:spcAft>
+            </a:pPr>
+            <a:r>
+              <a:rPr sz="2200" b="1">
+                <a:solidFill>
+                  <a:srgbClr val="2FD8B4"/>
+                </a:solidFill>
+                <a:latin typeface="Consolas"/>
+              </a:rPr>
+              <a:t>03</a:t>
+            </a:r>
+          </a:p>
+        </p:txBody>
+      </p:sp>
+      <p:sp>
+        <p:nvSpPr>
+          <p:cNvPr id="28" name="TextBox 27"/>
+          <p:cNvSpPr txBox="1"/>
+          <p:nvPr/>
+        </p:nvSpPr>
+        <p:spPr>
+          <a:xfrm>
+            <a:off x="731520" y="4142231"/>
+            <a:ext cx="749808" cy="256032"/>
+          </a:xfrm>
+          <a:prstGeom prst="rect">
+            <a:avLst/>
+          </a:prstGeom>
+          <a:noFill/>
+        </p:spPr>
+        <p:txBody>
+          <a:bodyPr wrap="square" lIns="0" rIns="0" tIns="0" bIns="0" anchor="t">
+            <a:spAutoFit/>
+          </a:bodyPr>
+          <a:lstStyle/>
+          <a:p>
+            <a:pPr algn="l">
+              <a:lnSpc>
+                <a:spcPct val="112000"/>
+              </a:lnSpc>
+              <a:spcAft>
+                <a:spcPts val="0"/>
+              </a:spcAft>
+            </a:pPr>
+            <a:r>
+              <a:rPr sz="819" b="1">
+                <a:solidFill>
+                  <a:srgbClr val="8CA0BE"/>
+                </a:solidFill>
+                <a:latin typeface="Consolas"/>
+              </a:rPr>
+              <a:t>MEMORY</a:t>
+            </a:r>
+          </a:p>
+        </p:txBody>
+      </p:sp>
+      <p:sp>
+        <p:nvSpPr>
+          <p:cNvPr id="29" name="Rectangle 28"/>
+          <p:cNvSpPr/>
+          <p:nvPr/>
+        </p:nvSpPr>
+        <p:spPr>
+          <a:xfrm>
+            <a:off x="1481328" y="3621024"/>
+            <a:ext cx="22860" cy="1408175"/>
+          </a:xfrm>
+          <a:prstGeom prst="rect">
+            <a:avLst/>
+          </a:prstGeom>
+          <a:solidFill>
+            <a:srgbClr val="223049"/>
+          </a:solidFill>
+          <a:ln>
+            <a:noFill/>
+          </a:ln>
+          <a:effectLst/>
+        </p:spPr>
+        <p:style>
+          <a:lnRef idx="1">
+            <a:schemeClr val="accent1"/>
+          </a:lnRef>
+          <a:fillRef idx="3">
+            <a:schemeClr val="accent1"/>
+          </a:fillRef>
+          <a:effectRef idx="2">
+            <a:schemeClr val="accent1"/>
+          </a:effectRef>
+          <a:fontRef idx="minor">
+            <a:schemeClr val="lt1"/>
+          </a:fontRef>
+        </p:style>
+        <p:txBody>
+          <a:bodyPr rtlCol="0" anchor="ctr"/>
+          <a:lstStyle/>
+          <a:p>
+            <a:pPr algn="ctr"/>
+          </a:p>
+        </p:txBody>
+      </p:sp>
+      <p:sp>
+        <p:nvSpPr>
+          <p:cNvPr id="30" name="TextBox 29"/>
+          <p:cNvSpPr txBox="1"/>
+          <p:nvPr/>
+        </p:nvSpPr>
+        <p:spPr>
+          <a:xfrm>
+            <a:off x="1645919" y="3602736"/>
+            <a:ext cx="4111599" cy="292608"/>
+          </a:xfrm>
+          <a:prstGeom prst="rect">
+            <a:avLst/>
+          </a:prstGeom>
+          <a:noFill/>
+        </p:spPr>
+        <p:txBody>
+          <a:bodyPr wrap="square" lIns="0" rIns="0" tIns="0" bIns="0" anchor="t">
+            <a:spAutoFit/>
+          </a:bodyPr>
+          <a:lstStyle/>
+          <a:p>
+            <a:pPr algn="l">
+              <a:lnSpc>
+                <a:spcPct val="112000"/>
+              </a:lnSpc>
+              <a:spcAft>
+                <a:spcPts val="0"/>
+              </a:spcAft>
+            </a:pPr>
+            <a:r>
+              <a:rPr sz="1220" b="1">
+                <a:solidFill>
+                  <a:srgbClr val="EAF0F7"/>
+                </a:solidFill>
+                <a:latin typeface="Segoe UI"/>
+              </a:rPr>
+              <a:t>Long-lived workers grow</a:t>
+            </a:r>
+          </a:p>
+        </p:txBody>
+      </p:sp>
+      <p:sp>
+        <p:nvSpPr>
+          <p:cNvPr id="31" name="TextBox 30"/>
+          <p:cNvSpPr txBox="1"/>
+          <p:nvPr/>
+        </p:nvSpPr>
+        <p:spPr>
+          <a:xfrm>
+            <a:off x="1645919" y="3950208"/>
+            <a:ext cx="4111599" cy="612648"/>
+          </a:xfrm>
+          <a:prstGeom prst="rect">
+            <a:avLst/>
+          </a:prstGeom>
+          <a:noFill/>
+        </p:spPr>
+        <p:txBody>
+          <a:bodyPr wrap="square" lIns="0" rIns="0" tIns="0" bIns="0" anchor="t">
+            <a:spAutoFit/>
+          </a:bodyPr>
+          <a:lstStyle/>
+          <a:p>
+            <a:pPr algn="l">
+              <a:lnSpc>
+                <a:spcPct val="116000"/>
+              </a:lnSpc>
+              <a:spcAft>
+                <a:spcPts val="0"/>
+              </a:spcAft>
+            </a:pPr>
+            <a:r>
+              <a:rPr sz="1040" b="0">
+                <a:solidFill>
+                  <a:srgbClr val="8CA0BE"/>
+                </a:solidFill>
+                <a:latin typeface="Segoe UI"/>
+              </a:rPr>
+              <a:t>A worker can accumulate memory over time until the host kills the process.</a:t>
+            </a:r>
+          </a:p>
+        </p:txBody>
+      </p:sp>
+      <p:sp>
+        <p:nvSpPr>
+          <p:cNvPr id="32" name="Rounded Rectangle 31"/>
+          <p:cNvSpPr/>
+          <p:nvPr/>
+        </p:nvSpPr>
+        <p:spPr>
+          <a:xfrm>
+            <a:off x="1645919" y="4773167"/>
+            <a:ext cx="4111599" cy="274320"/>
+          </a:xfrm>
+          <a:prstGeom prst="roundRect">
+            <a:avLst>
+              <a:gd name="adj" fmla="val 8000"/>
+            </a:avLst>
+          </a:prstGeom>
+          <a:solidFill>
+            <a:srgbClr val="162136"/>
+          </a:solidFill>
+          <a:ln w="10160">
+            <a:solidFill>
+              <a:srgbClr val="2FD8B4"/>
+            </a:solidFill>
+          </a:ln>
+          <a:effectLst/>
+        </p:spPr>
+        <p:style>
+          <a:lnRef idx="1">
+            <a:schemeClr val="accent1"/>
+          </a:lnRef>
+          <a:fillRef idx="3">
+            <a:schemeClr val="accent1"/>
+          </a:fillRef>
+          <a:effectRef idx="2">
+            <a:schemeClr val="accent1"/>
+          </a:effectRef>
+          <a:fontRef idx="minor">
+            <a:schemeClr val="lt1"/>
+          </a:fontRef>
+        </p:style>
+        <p:txBody>
+          <a:bodyPr rtlCol="0" anchor="ctr"/>
+          <a:lstStyle/>
+          <a:p>
+            <a:pPr algn="ctr"/>
+          </a:p>
+        </p:txBody>
+      </p:sp>
+      <p:sp>
+        <p:nvSpPr>
+          <p:cNvPr id="33" name="TextBox 32"/>
+          <p:cNvSpPr txBox="1"/>
+          <p:nvPr/>
+        </p:nvSpPr>
+        <p:spPr>
+          <a:xfrm>
+            <a:off x="1755648" y="4805171"/>
+            <a:ext cx="3892143" cy="201168"/>
+          </a:xfrm>
+          <a:prstGeom prst="rect">
+            <a:avLst/>
+          </a:prstGeom>
+          <a:noFill/>
+        </p:spPr>
+        <p:txBody>
+          <a:bodyPr wrap="square" lIns="0" rIns="0" tIns="0" bIns="0" anchor="t">
+            <a:spAutoFit/>
+          </a:bodyPr>
+          <a:lstStyle/>
+          <a:p>
+            <a:pPr algn="l">
+              <a:lnSpc>
+                <a:spcPct val="112000"/>
+              </a:lnSpc>
+              <a:spcAft>
+                <a:spcPts val="0"/>
+              </a:spcAft>
+            </a:pPr>
+            <a:r>
+              <a:rPr sz="890" b="1">
+                <a:solidFill>
+                  <a:srgbClr val="2FD8B4"/>
+                </a:solidFill>
+                <a:latin typeface="Consolas"/>
+              </a:rPr>
+              <a:t>→  REQUEST RECYCLING</a:t>
+            </a:r>
+          </a:p>
+        </p:txBody>
+      </p:sp>
+      <p:sp>
+        <p:nvSpPr>
+          <p:cNvPr id="34" name="Rounded Rectangle 33"/>
+          <p:cNvSpPr/>
+          <p:nvPr/>
+        </p:nvSpPr>
+        <p:spPr>
+          <a:xfrm>
+            <a:off x="6214719" y="3438144"/>
+            <a:ext cx="5410047" cy="1773935"/>
+          </a:xfrm>
+          <a:prstGeom prst="roundRect">
+            <a:avLst>
+              <a:gd name="adj" fmla="val 8000"/>
+            </a:avLst>
+          </a:prstGeom>
+          <a:solidFill>
+            <a:srgbClr val="111A2C"/>
+          </a:solidFill>
+          <a:ln w="12700">
+            <a:solidFill>
+              <a:srgbClr val="223049"/>
+            </a:solidFill>
+          </a:ln>
+          <a:effectLst/>
+        </p:spPr>
+        <p:style>
+          <a:lnRef idx="1">
+            <a:schemeClr val="accent1"/>
+          </a:lnRef>
+          <a:fillRef idx="3">
+            <a:schemeClr val="accent1"/>
+          </a:fillRef>
+          <a:effectRef idx="2">
+            <a:schemeClr val="accent1"/>
+          </a:effectRef>
+          <a:fontRef idx="minor">
+            <a:schemeClr val="lt1"/>
+          </a:fontRef>
+        </p:style>
+        <p:txBody>
+          <a:bodyPr rtlCol="0" anchor="ctr"/>
+          <a:lstStyle/>
+          <a:p>
+            <a:pPr algn="ctr"/>
+          </a:p>
+        </p:txBody>
+      </p:sp>
+      <p:sp>
+        <p:nvSpPr>
+          <p:cNvPr id="35" name="Rectangle 34"/>
+          <p:cNvSpPr/>
+          <p:nvPr/>
+        </p:nvSpPr>
+        <p:spPr>
+          <a:xfrm>
+            <a:off x="6214719" y="3584448"/>
+            <a:ext cx="41148" cy="1481327"/>
+          </a:xfrm>
+          <a:prstGeom prst="rect">
+            <a:avLst/>
+          </a:prstGeom>
+          <a:solidFill>
+            <a:srgbClr val="F5A623"/>
+          </a:solidFill>
+          <a:ln>
+            <a:noFill/>
+          </a:ln>
+          <a:effectLst/>
+        </p:spPr>
+        <p:style>
+          <a:lnRef idx="1">
+            <a:schemeClr val="accent1"/>
+          </a:lnRef>
+          <a:fillRef idx="3">
+            <a:schemeClr val="accent1"/>
+          </a:fillRef>
+          <a:effectRef idx="2">
+            <a:schemeClr val="accent1"/>
+          </a:effectRef>
+          <a:fontRef idx="minor">
+            <a:schemeClr val="lt1"/>
+          </a:fontRef>
+        </p:style>
+        <p:txBody>
+          <a:bodyPr rtlCol="0" anchor="ctr"/>
+          <a:lstStyle/>
+          <a:p>
+            <a:pPr algn="ctr"/>
+          </a:p>
+        </p:txBody>
+      </p:sp>
+      <p:sp>
+        <p:nvSpPr>
+          <p:cNvPr id="36" name="TextBox 35"/>
+          <p:cNvSpPr txBox="1"/>
+          <p:nvPr/>
+        </p:nvSpPr>
+        <p:spPr>
+          <a:xfrm>
+            <a:off x="6379311" y="3639312"/>
+            <a:ext cx="621792" cy="384048"/>
+          </a:xfrm>
+          <a:prstGeom prst="rect">
+            <a:avLst/>
+          </a:prstGeom>
+          <a:noFill/>
+        </p:spPr>
+        <p:txBody>
+          <a:bodyPr wrap="square" lIns="0" rIns="0" tIns="0" bIns="0" anchor="t">
+            <a:spAutoFit/>
+          </a:bodyPr>
+          <a:lstStyle/>
+          <a:p>
+            <a:pPr algn="l">
+              <a:lnSpc>
+                <a:spcPct val="112000"/>
+              </a:lnSpc>
+              <a:spcAft>
+                <a:spcPts val="0"/>
+              </a:spcAft>
+            </a:pPr>
+            <a:r>
+              <a:rPr sz="2200" b="1">
+                <a:solidFill>
+                  <a:srgbClr val="F5A623"/>
+                </a:solidFill>
+                <a:latin typeface="Consolas"/>
+              </a:rPr>
+              <a:t>04</a:t>
+            </a:r>
+          </a:p>
+        </p:txBody>
+      </p:sp>
+      <p:sp>
+        <p:nvSpPr>
+          <p:cNvPr id="37" name="TextBox 36"/>
+          <p:cNvSpPr txBox="1"/>
+          <p:nvPr/>
+        </p:nvSpPr>
+        <p:spPr>
+          <a:xfrm>
+            <a:off x="6379311" y="4142231"/>
+            <a:ext cx="749808" cy="256032"/>
+          </a:xfrm>
+          <a:prstGeom prst="rect">
+            <a:avLst/>
+          </a:prstGeom>
+          <a:noFill/>
+        </p:spPr>
+        <p:txBody>
+          <a:bodyPr wrap="square" lIns="0" rIns="0" tIns="0" bIns="0" anchor="t">
+            <a:spAutoFit/>
+          </a:bodyPr>
+          <a:lstStyle/>
+          <a:p>
+            <a:pPr algn="l">
+              <a:lnSpc>
+                <a:spcPct val="112000"/>
+              </a:lnSpc>
+              <a:spcAft>
+                <a:spcPts val="0"/>
+              </a:spcAft>
+            </a:pPr>
+            <a:r>
+              <a:rPr sz="819" b="1">
+                <a:solidFill>
+                  <a:srgbClr val="8CA0BE"/>
+                </a:solidFill>
+                <a:latin typeface="Consolas"/>
+              </a:rPr>
+              <a:t>COLD START</a:t>
+            </a:r>
+          </a:p>
+        </p:txBody>
+      </p:sp>
+      <p:sp>
+        <p:nvSpPr>
+          <p:cNvPr id="38" name="Rectangle 37"/>
+          <p:cNvSpPr/>
+          <p:nvPr/>
+        </p:nvSpPr>
+        <p:spPr>
+          <a:xfrm>
+            <a:off x="7129119" y="3621024"/>
+            <a:ext cx="22860" cy="1408175"/>
+          </a:xfrm>
+          <a:prstGeom prst="rect">
+            <a:avLst/>
+          </a:prstGeom>
+          <a:solidFill>
+            <a:srgbClr val="223049"/>
+          </a:solidFill>
+          <a:ln>
+            <a:noFill/>
+          </a:ln>
+          <a:effectLst/>
+        </p:spPr>
+        <p:style>
+          <a:lnRef idx="1">
+            <a:schemeClr val="accent1"/>
+          </a:lnRef>
+          <a:fillRef idx="3">
+            <a:schemeClr val="accent1"/>
+          </a:fillRef>
+          <a:effectRef idx="2">
+            <a:schemeClr val="accent1"/>
+          </a:effectRef>
+          <a:fontRef idx="minor">
+            <a:schemeClr val="lt1"/>
+          </a:fontRef>
+        </p:style>
+        <p:txBody>
+          <a:bodyPr rtlCol="0" anchor="ctr"/>
+          <a:lstStyle/>
+          <a:p>
+            <a:pPr algn="ctr"/>
+          </a:p>
+        </p:txBody>
+      </p:sp>
+      <p:sp>
+        <p:nvSpPr>
+          <p:cNvPr id="39" name="TextBox 38"/>
+          <p:cNvSpPr txBox="1"/>
+          <p:nvPr/>
+        </p:nvSpPr>
+        <p:spPr>
+          <a:xfrm>
+            <a:off x="7293711" y="3602736"/>
+            <a:ext cx="4111599" cy="292608"/>
+          </a:xfrm>
+          <a:prstGeom prst="rect">
+            <a:avLst/>
+          </a:prstGeom>
+          <a:noFill/>
+        </p:spPr>
+        <p:txBody>
+          <a:bodyPr wrap="square" lIns="0" rIns="0" tIns="0" bIns="0" anchor="t">
+            <a:spAutoFit/>
+          </a:bodyPr>
+          <a:lstStyle/>
+          <a:p>
+            <a:pPr algn="l">
+              <a:lnSpc>
+                <a:spcPct val="112000"/>
+              </a:lnSpc>
+              <a:spcAft>
+                <a:spcPts val="0"/>
+              </a:spcAft>
+            </a:pPr>
+            <a:r>
+              <a:rPr sz="1220" b="1">
+                <a:solidFill>
+                  <a:srgbClr val="EAF0F7"/>
+                </a:solidFill>
+                <a:latin typeface="Segoe UI"/>
+              </a:rPr>
+              <a:t>The free tier sleeps</a:t>
+            </a:r>
+          </a:p>
+        </p:txBody>
+      </p:sp>
+      <p:sp>
+        <p:nvSpPr>
+          <p:cNvPr id="40" name="TextBox 39"/>
+          <p:cNvSpPr txBox="1"/>
+          <p:nvPr/>
+        </p:nvSpPr>
+        <p:spPr>
+          <a:xfrm>
+            <a:off x="7293711" y="3950208"/>
+            <a:ext cx="4111599" cy="612648"/>
+          </a:xfrm>
+          <a:prstGeom prst="rect">
+            <a:avLst/>
+          </a:prstGeom>
+          <a:noFill/>
+        </p:spPr>
+        <p:txBody>
+          <a:bodyPr wrap="square" lIns="0" rIns="0" tIns="0" bIns="0" anchor="t">
+            <a:spAutoFit/>
+          </a:bodyPr>
+          <a:lstStyle/>
+          <a:p>
+            <a:pPr algn="l">
+              <a:lnSpc>
+                <a:spcPct val="116000"/>
+              </a:lnSpc>
+              <a:spcAft>
+                <a:spcPts val="0"/>
+              </a:spcAft>
+            </a:pPr>
+            <a:r>
+              <a:rPr sz="1040" b="0">
+                <a:solidFill>
+                  <a:srgbClr val="8CA0BE"/>
+                </a:solidFill>
+                <a:latin typeface="Segoe UI"/>
+              </a:rPr>
+              <a:t>After idle time, the host suspends the app and the first visitor waits for a cold start.</a:t>
+            </a:r>
+          </a:p>
+        </p:txBody>
+      </p:sp>
+      <p:sp>
+        <p:nvSpPr>
+          <p:cNvPr id="41" name="Rounded Rectangle 40"/>
+          <p:cNvSpPr/>
+          <p:nvPr/>
+        </p:nvSpPr>
+        <p:spPr>
+          <a:xfrm>
+            <a:off x="7293711" y="4773167"/>
+            <a:ext cx="4111599" cy="274320"/>
+          </a:xfrm>
+          <a:prstGeom prst="roundRect">
+            <a:avLst>
+              <a:gd name="adj" fmla="val 8000"/>
+            </a:avLst>
+          </a:prstGeom>
+          <a:solidFill>
+            <a:srgbClr val="162136"/>
+          </a:solidFill>
+          <a:ln w="10160">
+            <a:solidFill>
+              <a:srgbClr val="F5A623"/>
+            </a:solidFill>
+          </a:ln>
+          <a:effectLst/>
+        </p:spPr>
+        <p:style>
+          <a:lnRef idx="1">
+            <a:schemeClr val="accent1"/>
+          </a:lnRef>
+          <a:fillRef idx="3">
+            <a:schemeClr val="accent1"/>
+          </a:fillRef>
+          <a:effectRef idx="2">
+            <a:schemeClr val="accent1"/>
+          </a:effectRef>
+          <a:fontRef idx="minor">
+            <a:schemeClr val="lt1"/>
+          </a:fontRef>
+        </p:style>
+        <p:txBody>
+          <a:bodyPr rtlCol="0" anchor="ctr"/>
+          <a:lstStyle/>
+          <a:p>
+            <a:pPr algn="ctr"/>
+          </a:p>
+        </p:txBody>
+      </p:sp>
+      <p:sp>
+        <p:nvSpPr>
+          <p:cNvPr id="42" name="TextBox 41"/>
+          <p:cNvSpPr txBox="1"/>
+          <p:nvPr/>
+        </p:nvSpPr>
+        <p:spPr>
+          <a:xfrm>
+            <a:off x="7403439" y="4805171"/>
+            <a:ext cx="3892143" cy="201168"/>
+          </a:xfrm>
+          <a:prstGeom prst="rect">
+            <a:avLst/>
+          </a:prstGeom>
+          <a:noFill/>
+        </p:spPr>
+        <p:txBody>
+          <a:bodyPr wrap="square" lIns="0" rIns="0" tIns="0" bIns="0" anchor="t">
+            <a:spAutoFit/>
+          </a:bodyPr>
+          <a:lstStyle/>
+          <a:p>
+            <a:pPr algn="l">
+              <a:lnSpc>
+                <a:spcPct val="112000"/>
+              </a:lnSpc>
+              <a:spcAft>
+                <a:spcPts val="0"/>
+              </a:spcAft>
+            </a:pPr>
+            <a:r>
+              <a:rPr sz="890" b="1">
+                <a:solidFill>
+                  <a:srgbClr val="F5A623"/>
+                </a:solidFill>
+                <a:latin typeface="Consolas"/>
+              </a:rPr>
+              <a:t>→  WARM BEFORE DEMO</a:t>
+            </a:r>
+          </a:p>
+        </p:txBody>
+      </p:sp>
+      <p:sp>
+        <p:nvSpPr>
+          <p:cNvPr id="43" name="Rounded Rectangle 42"/>
+          <p:cNvSpPr/>
+          <p:nvPr/>
+        </p:nvSpPr>
+        <p:spPr>
+          <a:xfrm>
+            <a:off x="566928" y="5358383"/>
+            <a:ext cx="11057839" cy="859535"/>
+          </a:xfrm>
+          <a:prstGeom prst="roundRect">
+            <a:avLst>
+              <a:gd name="adj" fmla="val 8000"/>
+            </a:avLst>
+          </a:prstGeom>
+          <a:solidFill>
+            <a:srgbClr val="162136"/>
+          </a:solidFill>
+          <a:ln w="13970">
+            <a:solidFill>
+              <a:srgbClr val="4C8DFF"/>
+            </a:solidFill>
+          </a:ln>
+          <a:effectLst/>
+        </p:spPr>
+        <p:style>
+          <a:lnRef idx="1">
+            <a:schemeClr val="accent1"/>
+          </a:lnRef>
+          <a:fillRef idx="3">
+            <a:schemeClr val="accent1"/>
+          </a:fillRef>
+          <a:effectRef idx="2">
+            <a:schemeClr val="accent1"/>
+          </a:effectRef>
+          <a:fontRef idx="minor">
+            <a:schemeClr val="lt1"/>
+          </a:fontRef>
+        </p:style>
+        <p:txBody>
+          <a:bodyPr rtlCol="0" anchor="ctr"/>
+          <a:lstStyle/>
+          <a:p>
+            <a:pPr algn="ctr"/>
+          </a:p>
+        </p:txBody>
+      </p:sp>
+      <p:sp>
+        <p:nvSpPr>
+          <p:cNvPr id="44" name="TextBox 43"/>
+          <p:cNvSpPr txBox="1"/>
+          <p:nvPr/>
+        </p:nvSpPr>
+        <p:spPr>
+          <a:xfrm>
+            <a:off x="749808" y="5678423"/>
+            <a:ext cx="1389888" cy="256032"/>
+          </a:xfrm>
+          <a:prstGeom prst="rect">
+            <a:avLst/>
+          </a:prstGeom>
+          <a:noFill/>
+        </p:spPr>
+        <p:txBody>
+          <a:bodyPr wrap="square" lIns="0" rIns="0" tIns="0" bIns="0" anchor="t">
+            <a:spAutoFit/>
+          </a:bodyPr>
+          <a:lstStyle/>
+          <a:p>
+            <a:pPr algn="l">
+              <a:lnSpc>
+                <a:spcPct val="112000"/>
+              </a:lnSpc>
+              <a:spcAft>
+                <a:spcPts val="0"/>
+              </a:spcAft>
+            </a:pPr>
+            <a:r>
+              <a:rPr sz="919" b="1">
+                <a:solidFill>
+                  <a:srgbClr val="4C8DFF"/>
+                </a:solidFill>
+                <a:latin typeface="Consolas"/>
+              </a:rPr>
+              <a:t>DEPLOYMENT
+STACK</a:t>
+            </a:r>
+          </a:p>
+        </p:txBody>
+      </p:sp>
+      <p:sp>
+        <p:nvSpPr>
+          <p:cNvPr id="45" name="Rounded Rectangle 44"/>
+          <p:cNvSpPr/>
+          <p:nvPr/>
+        </p:nvSpPr>
+        <p:spPr>
+          <a:xfrm>
+            <a:off x="2286000" y="5650992"/>
+            <a:ext cx="1554480" cy="292608"/>
+          </a:xfrm>
+          <a:prstGeom prst="roundRect">
+            <a:avLst>
+              <a:gd name="adj" fmla="val 8000"/>
+            </a:avLst>
+          </a:prstGeom>
+          <a:solidFill>
+            <a:srgbClr val="111A2C"/>
+          </a:solidFill>
+          <a:ln w="8890">
+            <a:solidFill>
+              <a:srgbClr val="223049"/>
+            </a:solidFill>
+          </a:ln>
+          <a:effectLst/>
+        </p:spPr>
+        <p:style>
+          <a:lnRef idx="1">
+            <a:schemeClr val="accent1"/>
+          </a:lnRef>
+          <a:fillRef idx="3">
+            <a:schemeClr val="accent1"/>
+          </a:fillRef>
+          <a:effectRef idx="2">
+            <a:schemeClr val="accent1"/>
+          </a:effectRef>
+          <a:fontRef idx="minor">
+            <a:schemeClr val="lt1"/>
+          </a:fontRef>
+        </p:style>
+        <p:txBody>
+          <a:bodyPr rtlCol="0" anchor="ctr"/>
+          <a:lstStyle/>
+          <a:p>
+            <a:pPr algn="ctr"/>
+          </a:p>
+        </p:txBody>
+      </p:sp>
+      <p:sp>
+        <p:nvSpPr>
+          <p:cNvPr id="46" name="TextBox 45"/>
+          <p:cNvSpPr txBox="1"/>
+          <p:nvPr/>
+        </p:nvSpPr>
+        <p:spPr>
+          <a:xfrm>
+            <a:off x="2359152" y="5692140"/>
+            <a:ext cx="1408176" cy="201168"/>
+          </a:xfrm>
+          <a:prstGeom prst="rect">
+            <a:avLst/>
+          </a:prstGeom>
+          <a:noFill/>
+        </p:spPr>
+        <p:txBody>
+          <a:bodyPr wrap="square" lIns="0" rIns="0" tIns="0" bIns="0" anchor="t">
+            <a:spAutoFit/>
+          </a:bodyPr>
+          <a:lstStyle/>
+          <a:p>
+            <a:pPr algn="l">
+              <a:lnSpc>
+                <a:spcPct val="112000"/>
+              </a:lnSpc>
+              <a:spcAft>
+                <a:spcPts val="0"/>
+              </a:spcAft>
+            </a:pPr>
+            <a:r>
+              <a:rPr sz="800" b="1">
+                <a:solidFill>
+                  <a:srgbClr val="2FD8B4"/>
+                </a:solidFill>
+                <a:latin typeface="Consolas"/>
+              </a:rPr>
+              <a:t>GUNICORN · GTHREAD</a:t>
+            </a:r>
+          </a:p>
+        </p:txBody>
+      </p:sp>
+      <p:sp>
+        <p:nvSpPr>
+          <p:cNvPr id="47" name="Rounded Rectangle 46"/>
+          <p:cNvSpPr/>
+          <p:nvPr/>
+        </p:nvSpPr>
+        <p:spPr>
+          <a:xfrm>
+            <a:off x="3931920" y="5650992"/>
+            <a:ext cx="1188720" cy="292608"/>
+          </a:xfrm>
+          <a:prstGeom prst="roundRect">
+            <a:avLst>
+              <a:gd name="adj" fmla="val 8000"/>
+            </a:avLst>
+          </a:prstGeom>
+          <a:solidFill>
+            <a:srgbClr val="111A2C"/>
+          </a:solidFill>
+          <a:ln w="8890">
+            <a:solidFill>
+              <a:srgbClr val="223049"/>
+            </a:solidFill>
+          </a:ln>
+          <a:effectLst/>
+        </p:spPr>
+        <p:style>
+          <a:lnRef idx="1">
+            <a:schemeClr val="accent1"/>
+          </a:lnRef>
+          <a:fillRef idx="3">
+            <a:schemeClr val="accent1"/>
+          </a:fillRef>
+          <a:effectRef idx="2">
+            <a:schemeClr val="accent1"/>
+          </a:effectRef>
+          <a:fontRef idx="minor">
+            <a:schemeClr val="lt1"/>
+          </a:fontRef>
+        </p:style>
+        <p:txBody>
+          <a:bodyPr rtlCol="0" anchor="ctr"/>
+          <a:lstStyle/>
+          <a:p>
+            <a:pPr algn="ctr"/>
+          </a:p>
+        </p:txBody>
+      </p:sp>
+      <p:sp>
+        <p:nvSpPr>
+          <p:cNvPr id="48" name="TextBox 47"/>
+          <p:cNvSpPr txBox="1"/>
+          <p:nvPr/>
+        </p:nvSpPr>
+        <p:spPr>
+          <a:xfrm>
+            <a:off x="4005072" y="5692140"/>
+            <a:ext cx="1042416" cy="201168"/>
+          </a:xfrm>
+          <a:prstGeom prst="rect">
+            <a:avLst/>
+          </a:prstGeom>
+          <a:noFill/>
+        </p:spPr>
+        <p:txBody>
+          <a:bodyPr wrap="square" lIns="0" rIns="0" tIns="0" bIns="0" anchor="t">
+            <a:spAutoFit/>
+          </a:bodyPr>
+          <a:lstStyle/>
+          <a:p>
+            <a:pPr algn="l">
+              <a:lnSpc>
+                <a:spcPct val="112000"/>
+              </a:lnSpc>
+              <a:spcAft>
+                <a:spcPts val="0"/>
+              </a:spcAft>
+            </a:pPr>
+            <a:r>
+              <a:rPr sz="800" b="1">
+                <a:solidFill>
+                  <a:srgbClr val="4C8DFF"/>
+                </a:solidFill>
+                <a:latin typeface="Consolas"/>
+              </a:rPr>
+              <a:t>TIMEOUT 300S</a:t>
+            </a:r>
+          </a:p>
+        </p:txBody>
+      </p:sp>
+      <p:sp>
+        <p:nvSpPr>
+          <p:cNvPr id="49" name="Rounded Rectangle 48"/>
+          <p:cNvSpPr/>
+          <p:nvPr/>
+        </p:nvSpPr>
+        <p:spPr>
+          <a:xfrm>
+            <a:off x="5212080" y="5650992"/>
+            <a:ext cx="1572768" cy="292608"/>
+          </a:xfrm>
+          <a:prstGeom prst="roundRect">
+            <a:avLst>
+              <a:gd name="adj" fmla="val 8000"/>
+            </a:avLst>
+          </a:prstGeom>
+          <a:solidFill>
+            <a:srgbClr val="111A2C"/>
+          </a:solidFill>
+          <a:ln w="8890">
+            <a:solidFill>
+              <a:srgbClr val="223049"/>
+            </a:solidFill>
+          </a:ln>
+          <a:effectLst/>
+        </p:spPr>
+        <p:style>
+          <a:lnRef idx="1">
+            <a:schemeClr val="accent1"/>
+          </a:lnRef>
+          <a:fillRef idx="3">
+            <a:schemeClr val="accent1"/>
+          </a:fillRef>
+          <a:effectRef idx="2">
+            <a:schemeClr val="accent1"/>
+          </a:effectRef>
+          <a:fontRef idx="minor">
+            <a:schemeClr val="lt1"/>
+          </a:fontRef>
+        </p:style>
+        <p:txBody>
+          <a:bodyPr rtlCol="0" anchor="ctr"/>
+          <a:lstStyle/>
+          <a:p>
+            <a:pPr algn="ctr"/>
+          </a:p>
+        </p:txBody>
+      </p:sp>
+      <p:sp>
+        <p:nvSpPr>
+          <p:cNvPr id="50" name="TextBox 49"/>
+          <p:cNvSpPr txBox="1"/>
+          <p:nvPr/>
+        </p:nvSpPr>
+        <p:spPr>
+          <a:xfrm>
+            <a:off x="5285232" y="5692140"/>
+            <a:ext cx="1426464" cy="201168"/>
+          </a:xfrm>
+          <a:prstGeom prst="rect">
+            <a:avLst/>
+          </a:prstGeom>
+          <a:noFill/>
+        </p:spPr>
+        <p:txBody>
+          <a:bodyPr wrap="square" lIns="0" rIns="0" tIns="0" bIns="0" anchor="t">
+            <a:spAutoFit/>
+          </a:bodyPr>
+          <a:lstStyle/>
+          <a:p>
+            <a:pPr algn="l">
+              <a:lnSpc>
+                <a:spcPct val="112000"/>
+              </a:lnSpc>
+              <a:spcAft>
+                <a:spcPts val="0"/>
+              </a:spcAft>
+            </a:pPr>
+            <a:r>
+              <a:rPr sz="800" b="1">
+                <a:solidFill>
+                  <a:srgbClr val="2FD8B4"/>
+                </a:solidFill>
+                <a:latin typeface="Consolas"/>
+              </a:rPr>
+              <a:t>PRELOAD + RECYCLE</a:t>
+            </a:r>
+          </a:p>
+        </p:txBody>
+      </p:sp>
+      <p:sp>
+        <p:nvSpPr>
+          <p:cNvPr id="51" name="Rounded Rectangle 50"/>
+          <p:cNvSpPr/>
+          <p:nvPr/>
+        </p:nvSpPr>
+        <p:spPr>
+          <a:xfrm>
+            <a:off x="6876288" y="5650992"/>
+            <a:ext cx="1755648" cy="292608"/>
+          </a:xfrm>
+          <a:prstGeom prst="roundRect">
+            <a:avLst>
+              <a:gd name="adj" fmla="val 8000"/>
+            </a:avLst>
+          </a:prstGeom>
+          <a:solidFill>
+            <a:srgbClr val="111A2C"/>
+          </a:solidFill>
+          <a:ln w="8890">
+            <a:solidFill>
+              <a:srgbClr val="223049"/>
+            </a:solidFill>
+          </a:ln>
+          <a:effectLst/>
+        </p:spPr>
+        <p:style>
+          <a:lnRef idx="1">
+            <a:schemeClr val="accent1"/>
+          </a:lnRef>
+          <a:fillRef idx="3">
+            <a:schemeClr val="accent1"/>
+          </a:fillRef>
+          <a:effectRef idx="2">
+            <a:schemeClr val="accent1"/>
+          </a:effectRef>
+          <a:fontRef idx="minor">
+            <a:schemeClr val="lt1"/>
+          </a:fontRef>
+        </p:style>
+        <p:txBody>
+          <a:bodyPr rtlCol="0" anchor="ctr"/>
+          <a:lstStyle/>
+          <a:p>
+            <a:pPr algn="ctr"/>
+          </a:p>
+        </p:txBody>
+      </p:sp>
+      <p:sp>
+        <p:nvSpPr>
+          <p:cNvPr id="52" name="TextBox 51"/>
+          <p:cNvSpPr txBox="1"/>
+          <p:nvPr/>
+        </p:nvSpPr>
+        <p:spPr>
+          <a:xfrm>
+            <a:off x="6949440" y="5692140"/>
+            <a:ext cx="1609344" cy="201168"/>
+          </a:xfrm>
+          <a:prstGeom prst="rect">
+            <a:avLst/>
+          </a:prstGeom>
+          <a:noFill/>
+        </p:spPr>
+        <p:txBody>
+          <a:bodyPr wrap="square" lIns="0" rIns="0" tIns="0" bIns="0" anchor="t">
+            <a:spAutoFit/>
+          </a:bodyPr>
+          <a:lstStyle/>
+          <a:p>
+            <a:pPr algn="l">
+              <a:lnSpc>
+                <a:spcPct val="112000"/>
+              </a:lnSpc>
+              <a:spcAft>
+                <a:spcPts val="0"/>
+              </a:spcAft>
+            </a:pPr>
+            <a:r>
+              <a:rPr sz="800" b="1">
+                <a:solidFill>
+                  <a:srgbClr val="4C8DFF"/>
+                </a:solidFill>
+                <a:latin typeface="Consolas"/>
+              </a:rPr>
+              <a:t>DOCKERFILE · PROCFILE</a:t>
+            </a:r>
+          </a:p>
+        </p:txBody>
+      </p:sp>
+      <p:sp>
+        <p:nvSpPr>
+          <p:cNvPr id="53" name="Rounded Rectangle 52"/>
+          <p:cNvSpPr/>
+          <p:nvPr/>
+        </p:nvSpPr>
+        <p:spPr>
+          <a:xfrm>
+            <a:off x="8723376" y="5650992"/>
+            <a:ext cx="1783080" cy="292608"/>
+          </a:xfrm>
+          <a:prstGeom prst="roundRect">
+            <a:avLst>
+              <a:gd name="adj" fmla="val 8000"/>
+            </a:avLst>
+          </a:prstGeom>
+          <a:solidFill>
+            <a:srgbClr val="111A2C"/>
+          </a:solidFill>
+          <a:ln w="8890">
+            <a:solidFill>
+              <a:srgbClr val="223049"/>
+            </a:solidFill>
+          </a:ln>
+          <a:effectLst/>
+        </p:spPr>
+        <p:style>
+          <a:lnRef idx="1">
+            <a:schemeClr val="accent1"/>
+          </a:lnRef>
+          <a:fillRef idx="3">
+            <a:schemeClr val="accent1"/>
+          </a:fillRef>
+          <a:effectRef idx="2">
+            <a:schemeClr val="accent1"/>
+          </a:effectRef>
+          <a:fontRef idx="minor">
+            <a:schemeClr val="lt1"/>
+          </a:fontRef>
+        </p:style>
+        <p:txBody>
+          <a:bodyPr rtlCol="0" anchor="ctr"/>
+          <a:lstStyle/>
+          <a:p>
+            <a:pPr algn="ctr"/>
+          </a:p>
+        </p:txBody>
+      </p:sp>
+      <p:sp>
+        <p:nvSpPr>
+          <p:cNvPr id="54" name="TextBox 53"/>
+          <p:cNvSpPr txBox="1"/>
+          <p:nvPr/>
+        </p:nvSpPr>
+        <p:spPr>
+          <a:xfrm>
+            <a:off x="8796528" y="5692140"/>
+            <a:ext cx="1636776" cy="201168"/>
+          </a:xfrm>
+          <a:prstGeom prst="rect">
+            <a:avLst/>
+          </a:prstGeom>
+          <a:noFill/>
+        </p:spPr>
+        <p:txBody>
+          <a:bodyPr wrap="square" lIns="0" rIns="0" tIns="0" bIns="0" anchor="t">
+            <a:spAutoFit/>
+          </a:bodyPr>
+          <a:lstStyle/>
+          <a:p>
+            <a:pPr algn="l">
+              <a:lnSpc>
+                <a:spcPct val="112000"/>
+              </a:lnSpc>
+              <a:spcAft>
+                <a:spcPts val="0"/>
+              </a:spcAft>
+            </a:pPr>
+            <a:r>
+              <a:rPr sz="800" b="1">
+                <a:solidFill>
+                  <a:srgbClr val="2FD8B4"/>
+                </a:solidFill>
+                <a:latin typeface="Consolas"/>
+              </a:rPr>
+              <a:t>PINNED REQS · RENDER</a:t>
+            </a:r>
+          </a:p>
+        </p:txBody>
+      </p:sp>
+      <p:sp>
+        <p:nvSpPr>
+          <p:cNvPr id="55" name="Rectangle 54"/>
+          <p:cNvSpPr/>
+          <p:nvPr/>
+        </p:nvSpPr>
+        <p:spPr>
+          <a:xfrm>
+            <a:off x="566928" y="6309360"/>
+            <a:ext cx="743145" cy="43891"/>
+          </a:xfrm>
+          <a:prstGeom prst="rect">
+            <a:avLst/>
+          </a:prstGeom>
+          <a:solidFill>
+            <a:srgbClr val="223049"/>
+          </a:solidFill>
+          <a:ln>
+            <a:noFill/>
+          </a:ln>
+          <a:effectLst/>
+        </p:spPr>
+        <p:style>
+          <a:lnRef idx="1">
+            <a:schemeClr val="accent1"/>
+          </a:lnRef>
+          <a:fillRef idx="3">
+            <a:schemeClr val="accent1"/>
+          </a:fillRef>
+          <a:effectRef idx="2">
+            <a:schemeClr val="accent1"/>
+          </a:effectRef>
+          <a:fontRef idx="minor">
+            <a:schemeClr val="lt1"/>
+          </a:fontRef>
+        </p:style>
+        <p:txBody>
+          <a:bodyPr rtlCol="0" anchor="ctr"/>
+          <a:lstStyle/>
+          <a:p>
+            <a:pPr algn="ctr"/>
+          </a:p>
+        </p:txBody>
+      </p:sp>
+      <p:sp>
+        <p:nvSpPr>
+          <p:cNvPr id="56" name="Rectangle 55"/>
+          <p:cNvSpPr/>
+          <p:nvPr/>
+        </p:nvSpPr>
+        <p:spPr>
+          <a:xfrm>
+            <a:off x="1360365" y="6309360"/>
+            <a:ext cx="743145" cy="43891"/>
+          </a:xfrm>
+          <a:prstGeom prst="rect">
+            <a:avLst/>
+          </a:prstGeom>
+          <a:solidFill>
+            <a:srgbClr val="223049"/>
+          </a:solidFill>
+          <a:ln>
+            <a:noFill/>
+          </a:ln>
+          <a:effectLst/>
+        </p:spPr>
+        <p:style>
+          <a:lnRef idx="1">
+            <a:schemeClr val="accent1"/>
+          </a:lnRef>
+          <a:fillRef idx="3">
+            <a:schemeClr val="accent1"/>
+          </a:fillRef>
+          <a:effectRef idx="2">
+            <a:schemeClr val="accent1"/>
+          </a:effectRef>
+          <a:fontRef idx="minor">
+            <a:schemeClr val="lt1"/>
+          </a:fontRef>
+        </p:style>
+        <p:txBody>
+          <a:bodyPr rtlCol="0" anchor="ctr"/>
+          <a:lstStyle/>
+          <a:p>
+            <a:pPr algn="ctr"/>
+          </a:p>
+        </p:txBody>
+      </p:sp>
+      <p:sp>
+        <p:nvSpPr>
+          <p:cNvPr id="57" name="Rectangle 56"/>
+          <p:cNvSpPr/>
+          <p:nvPr/>
+        </p:nvSpPr>
+        <p:spPr>
+          <a:xfrm>
+            <a:off x="2153803" y="6309360"/>
+            <a:ext cx="743145" cy="43891"/>
+          </a:xfrm>
+          <a:prstGeom prst="rect">
+            <a:avLst/>
+          </a:prstGeom>
+          <a:solidFill>
+            <a:srgbClr val="223049"/>
+          </a:solidFill>
+          <a:ln>
+            <a:noFill/>
+          </a:ln>
+          <a:effectLst/>
+        </p:spPr>
+        <p:style>
+          <a:lnRef idx="1">
+            <a:schemeClr val="accent1"/>
+          </a:lnRef>
+          <a:fillRef idx="3">
+            <a:schemeClr val="accent1"/>
+          </a:fillRef>
+          <a:effectRef idx="2">
+            <a:schemeClr val="accent1"/>
+          </a:effectRef>
+          <a:fontRef idx="minor">
+            <a:schemeClr val="lt1"/>
+          </a:fontRef>
+        </p:style>
+        <p:txBody>
+          <a:bodyPr rtlCol="0" anchor="ctr"/>
+          <a:lstStyle/>
+          <a:p>
+            <a:pPr algn="ctr"/>
+          </a:p>
+        </p:txBody>
+      </p:sp>
+      <p:sp>
+        <p:nvSpPr>
+          <p:cNvPr id="58" name="Rectangle 57"/>
+          <p:cNvSpPr/>
+          <p:nvPr/>
+        </p:nvSpPr>
+        <p:spPr>
+          <a:xfrm>
+            <a:off x="2947241" y="6309360"/>
+            <a:ext cx="743145" cy="43891"/>
+          </a:xfrm>
+          <a:prstGeom prst="rect">
+            <a:avLst/>
+          </a:prstGeom>
+          <a:solidFill>
+            <a:srgbClr val="223049"/>
+          </a:solidFill>
+          <a:ln>
+            <a:noFill/>
+          </a:ln>
+          <a:effectLst/>
+        </p:spPr>
+        <p:style>
+          <a:lnRef idx="1">
+            <a:schemeClr val="accent1"/>
+          </a:lnRef>
+          <a:fillRef idx="3">
+            <a:schemeClr val="accent1"/>
+          </a:fillRef>
+          <a:effectRef idx="2">
+            <a:schemeClr val="accent1"/>
+          </a:effectRef>
+          <a:fontRef idx="minor">
+            <a:schemeClr val="lt1"/>
+          </a:fontRef>
+        </p:style>
+        <p:txBody>
+          <a:bodyPr rtlCol="0" anchor="ctr"/>
+          <a:lstStyle/>
+          <a:p>
+            <a:pPr algn="ctr"/>
+          </a:p>
+        </p:txBody>
+      </p:sp>
+      <p:sp>
+        <p:nvSpPr>
+          <p:cNvPr id="59" name="Rectangle 58"/>
+          <p:cNvSpPr/>
+          <p:nvPr/>
+        </p:nvSpPr>
+        <p:spPr>
+          <a:xfrm>
+            <a:off x="3740679" y="6309360"/>
+            <a:ext cx="743145" cy="43891"/>
+          </a:xfrm>
+          <a:prstGeom prst="rect">
+            <a:avLst/>
+          </a:prstGeom>
+          <a:solidFill>
+            <a:srgbClr val="223049"/>
+          </a:solidFill>
+          <a:ln>
+            <a:noFill/>
+          </a:ln>
+          <a:effectLst/>
+        </p:spPr>
+        <p:style>
+          <a:lnRef idx="1">
+            <a:schemeClr val="accent1"/>
+          </a:lnRef>
+          <a:fillRef idx="3">
+            <a:schemeClr val="accent1"/>
+          </a:fillRef>
+          <a:effectRef idx="2">
+            <a:schemeClr val="accent1"/>
+          </a:effectRef>
+          <a:fontRef idx="minor">
+            <a:schemeClr val="lt1"/>
+          </a:fontRef>
+        </p:style>
+        <p:txBody>
+          <a:bodyPr rtlCol="0" anchor="ctr"/>
+          <a:lstStyle/>
+          <a:p>
+            <a:pPr algn="ctr"/>
+          </a:p>
+        </p:txBody>
+      </p:sp>
+      <p:sp>
+        <p:nvSpPr>
+          <p:cNvPr id="60" name="Rectangle 59"/>
+          <p:cNvSpPr/>
+          <p:nvPr/>
+        </p:nvSpPr>
+        <p:spPr>
+          <a:xfrm>
+            <a:off x="4534117" y="6309360"/>
+            <a:ext cx="743145" cy="43891"/>
+          </a:xfrm>
+          <a:prstGeom prst="rect">
+            <a:avLst/>
+          </a:prstGeom>
+          <a:solidFill>
+            <a:srgbClr val="223049"/>
+          </a:solidFill>
+          <a:ln>
+            <a:noFill/>
+          </a:ln>
+          <a:effectLst/>
+        </p:spPr>
+        <p:style>
+          <a:lnRef idx="1">
+            <a:schemeClr val="accent1"/>
+          </a:lnRef>
+          <a:fillRef idx="3">
+            <a:schemeClr val="accent1"/>
+          </a:fillRef>
+          <a:effectRef idx="2">
+            <a:schemeClr val="accent1"/>
+          </a:effectRef>
+          <a:fontRef idx="minor">
+            <a:schemeClr val="lt1"/>
+          </a:fontRef>
+        </p:style>
+        <p:txBody>
+          <a:bodyPr rtlCol="0" anchor="ctr"/>
+          <a:lstStyle/>
+          <a:p>
+            <a:pPr algn="ctr"/>
+          </a:p>
+        </p:txBody>
+      </p:sp>
+      <p:sp>
+        <p:nvSpPr>
+          <p:cNvPr id="61" name="Rectangle 60"/>
+          <p:cNvSpPr/>
+          <p:nvPr/>
+        </p:nvSpPr>
+        <p:spPr>
+          <a:xfrm>
+            <a:off x="5327555" y="6309360"/>
+            <a:ext cx="743145" cy="43891"/>
+          </a:xfrm>
+          <a:prstGeom prst="rect">
+            <a:avLst/>
+          </a:prstGeom>
+          <a:solidFill>
+            <a:srgbClr val="223049"/>
+          </a:solidFill>
+          <a:ln>
+            <a:noFill/>
+          </a:ln>
+          <a:effectLst/>
+        </p:spPr>
+        <p:style>
+          <a:lnRef idx="1">
+            <a:schemeClr val="accent1"/>
+          </a:lnRef>
+          <a:fillRef idx="3">
+            <a:schemeClr val="accent1"/>
+          </a:fillRef>
+          <a:effectRef idx="2">
+            <a:schemeClr val="accent1"/>
+          </a:effectRef>
+          <a:fontRef idx="minor">
+            <a:schemeClr val="lt1"/>
+          </a:fontRef>
+        </p:style>
+        <p:txBody>
+          <a:bodyPr rtlCol="0" anchor="ctr"/>
+          <a:lstStyle/>
+          <a:p>
+            <a:pPr algn="ctr"/>
+          </a:p>
+        </p:txBody>
+      </p:sp>
+      <p:sp>
+        <p:nvSpPr>
+          <p:cNvPr id="62" name="Rectangle 61"/>
+          <p:cNvSpPr/>
+          <p:nvPr/>
+        </p:nvSpPr>
+        <p:spPr>
+          <a:xfrm>
+            <a:off x="6120993" y="6309360"/>
+            <a:ext cx="743145" cy="43891"/>
+          </a:xfrm>
+          <a:prstGeom prst="rect">
+            <a:avLst/>
+          </a:prstGeom>
+          <a:solidFill>
+            <a:srgbClr val="223049"/>
+          </a:solidFill>
+          <a:ln>
+            <a:noFill/>
+          </a:ln>
+          <a:effectLst/>
+        </p:spPr>
+        <p:style>
+          <a:lnRef idx="1">
+            <a:schemeClr val="accent1"/>
+          </a:lnRef>
+          <a:fillRef idx="3">
+            <a:schemeClr val="accent1"/>
+          </a:fillRef>
+          <a:effectRef idx="2">
+            <a:schemeClr val="accent1"/>
+          </a:effectRef>
+          <a:fontRef idx="minor">
+            <a:schemeClr val="lt1"/>
+          </a:fontRef>
+        </p:style>
+        <p:txBody>
+          <a:bodyPr rtlCol="0" anchor="ctr"/>
+          <a:lstStyle/>
+          <a:p>
+            <a:pPr algn="ctr"/>
+          </a:p>
+        </p:txBody>
+      </p:sp>
+      <p:sp>
+        <p:nvSpPr>
+          <p:cNvPr id="63" name="Rectangle 62"/>
+          <p:cNvSpPr/>
+          <p:nvPr/>
+        </p:nvSpPr>
+        <p:spPr>
+          <a:xfrm>
+            <a:off x="6914431" y="6309360"/>
+            <a:ext cx="743145" cy="43891"/>
+          </a:xfrm>
+          <a:prstGeom prst="rect">
+            <a:avLst/>
+          </a:prstGeom>
+          <a:solidFill>
+            <a:srgbClr val="223049"/>
+          </a:solidFill>
+          <a:ln>
+            <a:noFill/>
+          </a:ln>
+          <a:effectLst/>
+        </p:spPr>
+        <p:style>
+          <a:lnRef idx="1">
+            <a:schemeClr val="accent1"/>
+          </a:lnRef>
+          <a:fillRef idx="3">
+            <a:schemeClr val="accent1"/>
+          </a:fillRef>
+          <a:effectRef idx="2">
+            <a:schemeClr val="accent1"/>
+          </a:effectRef>
+          <a:fontRef idx="minor">
+            <a:schemeClr val="lt1"/>
+          </a:fontRef>
+        </p:style>
+        <p:txBody>
+          <a:bodyPr rtlCol="0" anchor="ctr"/>
+          <a:lstStyle/>
+          <a:p>
+            <a:pPr algn="ctr"/>
+          </a:p>
+        </p:txBody>
+      </p:sp>
+      <p:sp>
+        <p:nvSpPr>
+          <p:cNvPr id="64" name="Rectangle 63"/>
+          <p:cNvSpPr/>
+          <p:nvPr/>
+        </p:nvSpPr>
+        <p:spPr>
+          <a:xfrm>
+            <a:off x="7707869" y="6309360"/>
+            <a:ext cx="743145" cy="43891"/>
+          </a:xfrm>
+          <a:prstGeom prst="rect">
+            <a:avLst/>
+          </a:prstGeom>
+          <a:solidFill>
+            <a:srgbClr val="223049"/>
+          </a:solidFill>
+          <a:ln>
+            <a:noFill/>
+          </a:ln>
+          <a:effectLst/>
+        </p:spPr>
+        <p:style>
+          <a:lnRef idx="1">
+            <a:schemeClr val="accent1"/>
+          </a:lnRef>
+          <a:fillRef idx="3">
+            <a:schemeClr val="accent1"/>
+          </a:fillRef>
+          <a:effectRef idx="2">
+            <a:schemeClr val="accent1"/>
+          </a:effectRef>
+          <a:fontRef idx="minor">
+            <a:schemeClr val="lt1"/>
+          </a:fontRef>
+        </p:style>
+        <p:txBody>
+          <a:bodyPr rtlCol="0" anchor="ctr"/>
+          <a:lstStyle/>
+          <a:p>
+            <a:pPr algn="ctr"/>
+          </a:p>
+        </p:txBody>
+      </p:sp>
+      <p:sp>
+        <p:nvSpPr>
+          <p:cNvPr id="65" name="Rectangle 64"/>
+          <p:cNvSpPr/>
+          <p:nvPr/>
+        </p:nvSpPr>
+        <p:spPr>
+          <a:xfrm>
+            <a:off x="8501307" y="6309360"/>
+            <a:ext cx="743145" cy="43891"/>
+          </a:xfrm>
+          <a:prstGeom prst="rect">
+            <a:avLst/>
+          </a:prstGeom>
+          <a:solidFill>
+            <a:srgbClr val="223049"/>
+          </a:solidFill>
+          <a:ln>
+            <a:noFill/>
+          </a:ln>
+          <a:effectLst/>
+        </p:spPr>
+        <p:style>
+          <a:lnRef idx="1">
+            <a:schemeClr val="accent1"/>
+          </a:lnRef>
+          <a:fillRef idx="3">
+            <a:schemeClr val="accent1"/>
+          </a:fillRef>
+          <a:effectRef idx="2">
+            <a:schemeClr val="accent1"/>
+          </a:effectRef>
+          <a:fontRef idx="minor">
+            <a:schemeClr val="lt1"/>
+          </a:fontRef>
+        </p:style>
+        <p:txBody>
+          <a:bodyPr rtlCol="0" anchor="ctr"/>
+          <a:lstStyle/>
+          <a:p>
+            <a:pPr algn="ctr"/>
+          </a:p>
+        </p:txBody>
+      </p:sp>
+      <p:sp>
+        <p:nvSpPr>
+          <p:cNvPr id="66" name="Rectangle 65"/>
+          <p:cNvSpPr/>
+          <p:nvPr/>
+        </p:nvSpPr>
+        <p:spPr>
+          <a:xfrm>
+            <a:off x="9294745" y="6309360"/>
+            <a:ext cx="743145" cy="43891"/>
+          </a:xfrm>
+          <a:prstGeom prst="rect">
+            <a:avLst/>
+          </a:prstGeom>
+          <a:solidFill>
+            <a:srgbClr val="223049"/>
+          </a:solidFill>
+          <a:ln>
+            <a:noFill/>
+          </a:ln>
+          <a:effectLst/>
+        </p:spPr>
+        <p:style>
+          <a:lnRef idx="1">
+            <a:schemeClr val="accent1"/>
+          </a:lnRef>
+          <a:fillRef idx="3">
+            <a:schemeClr val="accent1"/>
+          </a:fillRef>
+          <a:effectRef idx="2">
+            <a:schemeClr val="accent1"/>
+          </a:effectRef>
+          <a:fontRef idx="minor">
+            <a:schemeClr val="lt1"/>
+          </a:fontRef>
+        </p:style>
+        <p:txBody>
+          <a:bodyPr rtlCol="0" anchor="ctr"/>
+          <a:lstStyle/>
+          <a:p>
+            <a:pPr algn="ctr"/>
+          </a:p>
+        </p:txBody>
+      </p:sp>
+      <p:sp>
+        <p:nvSpPr>
+          <p:cNvPr id="67" name="Rectangle 66"/>
+          <p:cNvSpPr/>
+          <p:nvPr/>
+        </p:nvSpPr>
+        <p:spPr>
+          <a:xfrm>
+            <a:off x="10088183" y="6309360"/>
+            <a:ext cx="743145" cy="43891"/>
+          </a:xfrm>
+          <a:prstGeom prst="rect">
+            <a:avLst/>
+          </a:prstGeom>
+          <a:solidFill>
+            <a:srgbClr val="223049"/>
+          </a:solidFill>
+          <a:ln>
+            <a:noFill/>
+          </a:ln>
+          <a:effectLst/>
+        </p:spPr>
+        <p:style>
+          <a:lnRef idx="1">
+            <a:schemeClr val="accent1"/>
+          </a:lnRef>
+          <a:fillRef idx="3">
+            <a:schemeClr val="accent1"/>
+          </a:fillRef>
+          <a:effectRef idx="2">
+            <a:schemeClr val="accent1"/>
+          </a:effectRef>
+          <a:fontRef idx="minor">
+            <a:schemeClr val="lt1"/>
+          </a:fontRef>
+        </p:style>
+        <p:txBody>
+          <a:bodyPr rtlCol="0" anchor="ctr"/>
+          <a:lstStyle/>
+          <a:p>
+            <a:pPr algn="ctr"/>
+          </a:p>
+        </p:txBody>
+      </p:sp>
+      <p:sp>
+        <p:nvSpPr>
+          <p:cNvPr id="68" name="Rectangle 67"/>
+          <p:cNvSpPr/>
+          <p:nvPr/>
+        </p:nvSpPr>
+        <p:spPr>
+          <a:xfrm>
+            <a:off x="10881621" y="6296558"/>
+            <a:ext cx="743145" cy="68580"/>
+          </a:xfrm>
+          <a:prstGeom prst="rect">
+            <a:avLst/>
+          </a:prstGeom>
+          <a:solidFill>
+            <a:srgbClr val="2FD8B4"/>
+          </a:solidFill>
+          <a:ln>
+            <a:noFill/>
+          </a:ln>
+          <a:effectLst/>
+        </p:spPr>
+        <p:style>
+          <a:lnRef idx="1">
+            <a:schemeClr val="accent1"/>
+          </a:lnRef>
+          <a:fillRef idx="3">
+            <a:schemeClr val="accent1"/>
+          </a:fillRef>
+          <a:effectRef idx="2">
+            <a:schemeClr val="accent1"/>
+          </a:effectRef>
+          <a:fontRef idx="minor">
+            <a:schemeClr val="lt1"/>
+          </a:fontRef>
+        </p:style>
+        <p:txBody>
+          <a:bodyPr rtlCol="0" anchor="ctr"/>
+          <a:lstStyle/>
+          <a:p>
+            <a:pPr algn="ctr"/>
+          </a:p>
+        </p:txBody>
+      </p:sp>
+      <p:sp>
+        <p:nvSpPr>
+          <p:cNvPr id="69" name="Rectangle 68"/>
+          <p:cNvSpPr/>
+          <p:nvPr/>
+        </p:nvSpPr>
+        <p:spPr>
+          <a:xfrm>
+            <a:off x="566928" y="6455664"/>
+            <a:ext cx="11057839" cy="9144"/>
+          </a:xfrm>
+          <a:prstGeom prst="rect">
+            <a:avLst/>
+          </a:prstGeom>
+          <a:solidFill>
+            <a:srgbClr val="223049"/>
+          </a:solidFill>
+          <a:ln>
+            <a:noFill/>
+          </a:ln>
+          <a:effectLst/>
+        </p:spPr>
+        <p:style>
+          <a:lnRef idx="1">
+            <a:schemeClr val="accent1"/>
+          </a:lnRef>
+          <a:fillRef idx="3">
+            <a:schemeClr val="accent1"/>
+          </a:fillRef>
+          <a:effectRef idx="2">
+            <a:schemeClr val="accent1"/>
+          </a:effectRef>
+          <a:fontRef idx="minor">
+            <a:schemeClr val="lt1"/>
+          </a:fontRef>
+        </p:style>
+        <p:txBody>
+          <a:bodyPr rtlCol="0" anchor="ctr"/>
+          <a:lstStyle/>
+          <a:p>
+            <a:pPr algn="ctr"/>
+          </a:p>
+        </p:txBody>
+      </p:sp>
+      <p:sp>
+        <p:nvSpPr>
+          <p:cNvPr id="70" name="TextBox 69"/>
+          <p:cNvSpPr txBox="1"/>
+          <p:nvPr/>
+        </p:nvSpPr>
+        <p:spPr>
+          <a:xfrm>
+            <a:off x="566928" y="6510528"/>
+            <a:ext cx="9509760" cy="219456"/>
+          </a:xfrm>
+          <a:prstGeom prst="rect">
+            <a:avLst/>
+          </a:prstGeom>
+          <a:noFill/>
+        </p:spPr>
+        <p:txBody>
+          <a:bodyPr wrap="square" lIns="0" rIns="0" tIns="0" bIns="0" anchor="t">
+            <a:spAutoFit/>
+          </a:bodyPr>
+          <a:lstStyle/>
+          <a:p>
+            <a:pPr algn="l">
+              <a:lnSpc>
+                <a:spcPct val="112000"/>
+              </a:lnSpc>
+              <a:spcAft>
+                <a:spcPts val="0"/>
+              </a:spcAft>
+            </a:pPr>
+            <a:r>
               <a:rPr sz="900" b="0">
                 <a:solidFill>
                   <a:srgbClr val="8CA0BE"/>
@@ -22228,7 +23548,7 @@
       </p:sp>
       <p:sp>
         <p:nvSpPr>
-          <p:cNvPr id="37" name="TextBox 36"/>
+          <p:cNvPr id="71" name="TextBox 70"/>
           <p:cNvSpPr txBox="1"/>
           <p:nvPr/>
         </p:nvSpPr>

--- a/presentation/RetainIQ_Project_Review.pptx
+++ b/presentation/RetainIQ_Project_Review.pptx
@@ -25,7 +25,6 @@
     <p:sldId id="273" r:id="rId25"/>
     <p:sldId id="274" r:id="rId26"/>
     <p:sldId id="275" r:id="rId27"/>
-    <p:sldId id="276" r:id="rId28"/>
   </p:sldIdLst>
   <p:sldSz cx="12191695" cy="6858000" type="screen4x3"/>
   <p:notesSz cx="6858000" cy="9144000"/>
@@ -1799,152 +1798,6 @@
 </p:notes>
 </file>
 
-<file path=ppt/notesSlides/notesSlide21.xml><?xml version="1.0" encoding="utf-8"?>
-<p:notes xmlns:a="http://schemas.openxmlformats.org/drawingml/2006/main" xmlns:p="http://schemas.openxmlformats.org/presentationml/2006/main" xmlns:r="http://schemas.openxmlformats.org/officeDocument/2006/relationships">
-  <p:cSld>
-    <p:spTree>
-      <p:nvGrpSpPr>
-        <p:cNvPr id="1" name=""/>
-        <p:cNvGrpSpPr/>
-        <p:nvPr/>
-      </p:nvGrpSpPr>
-      <p:grpSpPr>
-        <a:xfrm>
-          <a:off x="0" y="0"/>
-          <a:ext cx="0" cy="0"/>
-          <a:chOff x="0" y="0"/>
-          <a:chExt cx="0" cy="0"/>
-        </a:xfrm>
-      </p:grpSpPr>
-      <p:sp>
-        <p:nvSpPr>
-          <p:cNvPr id="2" name="Slide Image Placeholder 1"/>
-          <p:cNvSpPr>
-            <a:spLocks noGrp="1"/>
-          </p:cNvSpPr>
-          <p:nvPr>
-            <p:ph type="sldImg" idx="2"/>
-          </p:nvPr>
-        </p:nvSpPr>
-        <p:spPr/>
-      </p:sp>
-      <p:sp>
-        <p:nvSpPr>
-          <p:cNvPr id="3" name="Notes Placeholder 2"/>
-          <p:cNvSpPr>
-            <a:spLocks noGrp="1"/>
-          </p:cNvSpPr>
-          <p:nvPr>
-            <p:ph type="body" idx="3" sz="quarter"/>
-          </p:nvPr>
-        </p:nvSpPr>
-        <p:spPr/>
-        <p:txBody>
-          <a:bodyPr/>
-          <a:lstStyle/>
-          <a:p>
-            <a:r>
-              <a:t>CLOSING (11:40–12:05) Leave this slide up for questions. It puts the live URL and</a:t>
-            </a:r>
-          </a:p>
-          <a:p>
-            <a:r>
-              <a:t>a scannable QR in front of the examiner and ends on the thesis, not a tool list.</a:t>
-            </a:r>
-          </a:p>
-          <a:p>
-            <a:r>
-              <a:t>"The contribution isn't the 80% — it's that a probability becomes a prioritised,</a:t>
-            </a:r>
-          </a:p>
-          <a:p>
-            <a:r>
-              <a:t>explained, costed action, in a product a retention team can actually open. Thank</a:t>
-            </a:r>
-          </a:p>
-          <a:p>
-            <a:r>
-              <a:t>you — happy to take questions."</a:t>
-            </a:r>
-          </a:p>
-          <a:p>
-            <a:r>
-              <a:t>Offer the demo: "if you'd like, I can upload a customer file and score it live."</a:t>
-            </a:r>
-          </a:p>
-          <a:p>
-            <a:r>
-              <a:t>Remember the free tier sleeps — warm the app before you present.</a:t>
-            </a:r>
-          </a:p>
-          <a:p/>
-          <a:p>
-            <a:r>
-              <a:t>LIKELY QUESTIONS</a:t>
-            </a:r>
-          </a:p>
-          <a:p>
-            <a:r>
-              <a:t>· Why not deep learning? 1,409 test rows and a largely linear signal; the four-way</a:t>
-            </a:r>
-          </a:p>
-          <a:p>
-            <a:r>
-              <a:t>  benchmark supports the simpler model, and it stays explainable.</a:t>
-            </a:r>
-          </a:p>
-          <a:p>
-            <a:r>
-              <a:t>· Why is recall low? The 0.5 threshold is a default. Phase 08 shows 0.35 catches</a:t>
-            </a:r>
-          </a:p>
-          <a:p>
-            <a:r>
-              <a:t>  71.7%, and balanced class weights reach 77.81% recall at identical ROC-AUC.</a:t>
-            </a:r>
-          </a:p>
-          <a:p>
-            <a:r>
-              <a:t>· Isn't revenue-at-risk optimistic? It's exposure, not savings — the deck and the</a:t>
-            </a:r>
-          </a:p>
-          <a:p>
-            <a:r>
-              <a:t>  app both say so; validating it needs a live campaign.</a:t>
-            </a:r>
-          </a:p>
-          <a:p>
-            <a:r>
-              <a:t>· How do you know it isn't leakage? Churn Score, Reason, Category and Status are</a:t>
-            </a:r>
-          </a:p>
-          <a:p>
-            <a:r>
-              <a:t>  post-outcome fields and were dropped before training.</a:t>
-            </a:r>
-          </a:p>
-        </p:txBody>
-      </p:sp>
-      <p:sp>
-        <p:nvSpPr>
-          <p:cNvPr id="4" name="Slide Number Placeholder 3"/>
-          <p:cNvSpPr>
-            <a:spLocks noGrp="1"/>
-          </p:cNvSpPr>
-          <p:nvPr>
-            <p:ph type="sldNum" idx="5" sz="quarter"/>
-          </p:nvPr>
-        </p:nvSpPr>
-        <p:spPr/>
-      </p:sp>
-    </p:spTree>
-  </p:cSld>
-  <p:clrMapOvr>
-    <a:masterClrMapping/>
-  </p:clrMapOvr>
-</p:notes>
-</file>
-
 <file path=ppt/notesSlides/notesSlide3.xml><?xml version="1.0" encoding="utf-8"?>
 <p:notes xmlns:a="http://schemas.openxmlformats.org/drawingml/2006/main" xmlns:p="http://schemas.openxmlformats.org/presentationml/2006/main" xmlns:r="http://schemas.openxmlformats.org/officeDocument/2006/relationships">
   <p:cSld>
@@ -28795,1098 +28648,6 @@
                 <a:latin typeface="Consolas"/>
               </a:rPr>
               <a:t>20</a:t>
-            </a:r>
-          </a:p>
-        </p:txBody>
-      </p:sp>
-    </p:spTree>
-  </p:cSld>
-  <p:clrMapOvr>
-    <a:masterClrMapping/>
-  </p:clrMapOvr>
-</p:sld>
-</file>
-
-<file path=ppt/slides/slide21.xml><?xml version="1.0" encoding="utf-8"?>
-<p:sld xmlns:a="http://schemas.openxmlformats.org/drawingml/2006/main" xmlns:p="http://schemas.openxmlformats.org/presentationml/2006/main" xmlns:r="http://schemas.openxmlformats.org/officeDocument/2006/relationships">
-  <p:cSld>
-    <p:spTree>
-      <p:nvGrpSpPr>
-        <p:cNvPr id="1" name=""/>
-        <p:cNvGrpSpPr/>
-        <p:nvPr/>
-      </p:nvGrpSpPr>
-      <p:grpSpPr/>
-      <p:sp>
-        <p:nvSpPr>
-          <p:cNvPr id="2" name="Rectangle 1"/>
-          <p:cNvSpPr/>
-          <p:nvPr/>
-        </p:nvSpPr>
-        <p:spPr>
-          <a:xfrm>
-            <a:off x="0" y="0"/>
-            <a:ext cx="12191695" cy="6858000"/>
-          </a:xfrm>
-          <a:prstGeom prst="rect">
-            <a:avLst/>
-          </a:prstGeom>
-          <a:solidFill>
-            <a:srgbClr val="0A0F1C"/>
-          </a:solidFill>
-          <a:ln>
-            <a:noFill/>
-          </a:ln>
-          <a:effectLst/>
-        </p:spPr>
-        <p:style>
-          <a:lnRef idx="1">
-            <a:schemeClr val="accent1"/>
-          </a:lnRef>
-          <a:fillRef idx="3">
-            <a:schemeClr val="accent1"/>
-          </a:fillRef>
-          <a:effectRef idx="2">
-            <a:schemeClr val="accent1"/>
-          </a:effectRef>
-          <a:fontRef idx="minor">
-            <a:schemeClr val="lt1"/>
-          </a:fontRef>
-        </p:style>
-        <p:txBody>
-          <a:bodyPr rtlCol="0" anchor="ctr"/>
-          <a:lstStyle/>
-          <a:p>
-            <a:pPr algn="ctr"/>
-          </a:p>
-        </p:txBody>
-      </p:sp>
-      <p:sp>
-        <p:nvSpPr>
-          <p:cNvPr id="3" name="Rectangle 2"/>
-          <p:cNvSpPr/>
-          <p:nvPr/>
-        </p:nvSpPr>
-        <p:spPr>
-          <a:xfrm>
-            <a:off x="0" y="0"/>
-            <a:ext cx="12191695" cy="77724"/>
-          </a:xfrm>
-          <a:prstGeom prst="rect">
-            <a:avLst/>
-          </a:prstGeom>
-          <a:solidFill>
-            <a:srgbClr val="2FD8B4"/>
-          </a:solidFill>
-          <a:ln>
-            <a:noFill/>
-          </a:ln>
-          <a:effectLst/>
-        </p:spPr>
-        <p:style>
-          <a:lnRef idx="1">
-            <a:schemeClr val="accent1"/>
-          </a:lnRef>
-          <a:fillRef idx="3">
-            <a:schemeClr val="accent1"/>
-          </a:fillRef>
-          <a:effectRef idx="2">
-            <a:schemeClr val="accent1"/>
-          </a:effectRef>
-          <a:fontRef idx="minor">
-            <a:schemeClr val="lt1"/>
-          </a:fontRef>
-        </p:style>
-        <p:txBody>
-          <a:bodyPr rtlCol="0" anchor="ctr"/>
-          <a:lstStyle/>
-          <a:p>
-            <a:pPr algn="ctr"/>
-          </a:p>
-        </p:txBody>
-      </p:sp>
-      <p:sp>
-        <p:nvSpPr>
-          <p:cNvPr id="4" name="TextBox 3"/>
-          <p:cNvSpPr txBox="1"/>
-          <p:nvPr/>
-        </p:nvSpPr>
-        <p:spPr>
-          <a:xfrm>
-            <a:off x="566928" y="365760"/>
-            <a:ext cx="8229600" cy="237744"/>
-          </a:xfrm>
-          <a:prstGeom prst="rect">
-            <a:avLst/>
-          </a:prstGeom>
-          <a:noFill/>
-        </p:spPr>
-        <p:txBody>
-          <a:bodyPr wrap="square" lIns="0" rIns="0" tIns="0" bIns="0" anchor="t">
-            <a:spAutoFit/>
-          </a:bodyPr>
-          <a:lstStyle/>
-          <a:p>
-            <a:pPr algn="l">
-              <a:lnSpc>
-                <a:spcPct val="112000"/>
-              </a:lnSpc>
-              <a:spcAft>
-                <a:spcPts val="0"/>
-              </a:spcAft>
-            </a:pPr>
-            <a:r>
-              <a:rPr sz="1000" b="1">
-                <a:solidFill>
-                  <a:srgbClr val="2FD8B4"/>
-                </a:solidFill>
-                <a:latin typeface="Consolas"/>
-              </a:rPr>
-              <a:t>THANK YOU</a:t>
-            </a:r>
-          </a:p>
-        </p:txBody>
-      </p:sp>
-      <p:sp>
-        <p:nvSpPr>
-          <p:cNvPr id="5" name="TextBox 4"/>
-          <p:cNvSpPr txBox="1"/>
-          <p:nvPr/>
-        </p:nvSpPr>
-        <p:spPr>
-          <a:xfrm>
-            <a:off x="566928" y="576072"/>
-            <a:ext cx="11057839" cy="475488"/>
-          </a:xfrm>
-          <a:prstGeom prst="rect">
-            <a:avLst/>
-          </a:prstGeom>
-          <a:noFill/>
-        </p:spPr>
-        <p:txBody>
-          <a:bodyPr wrap="square" lIns="0" rIns="0" tIns="0" bIns="0" anchor="t">
-            <a:spAutoFit/>
-          </a:bodyPr>
-          <a:lstStyle/>
-          <a:p>
-            <a:pPr algn="l">
-              <a:lnSpc>
-                <a:spcPct val="112000"/>
-              </a:lnSpc>
-              <a:spcAft>
-                <a:spcPts val="0"/>
-              </a:spcAft>
-            </a:pPr>
-            <a:r>
-              <a:rPr sz="2600" b="1">
-                <a:solidFill>
-                  <a:srgbClr val="EAF0F7"/>
-                </a:solidFill>
-                <a:latin typeface="Segoe UI"/>
-              </a:rPr>
-              <a:t>See it running</a:t>
-            </a:r>
-          </a:p>
-        </p:txBody>
-      </p:sp>
-      <p:sp>
-        <p:nvSpPr>
-          <p:cNvPr id="6" name="TextBox 5"/>
-          <p:cNvSpPr txBox="1"/>
-          <p:nvPr/>
-        </p:nvSpPr>
-        <p:spPr>
-          <a:xfrm>
-            <a:off x="566928" y="1060704"/>
-            <a:ext cx="11057839" cy="274320"/>
-          </a:xfrm>
-          <a:prstGeom prst="rect">
-            <a:avLst/>
-          </a:prstGeom>
-          <a:noFill/>
-        </p:spPr>
-        <p:txBody>
-          <a:bodyPr wrap="square" lIns="0" rIns="0" tIns="0" bIns="0" anchor="t">
-            <a:spAutoFit/>
-          </a:bodyPr>
-          <a:lstStyle/>
-          <a:p>
-            <a:pPr algn="l">
-              <a:lnSpc>
-                <a:spcPct val="112000"/>
-              </a:lnSpc>
-              <a:spcAft>
-                <a:spcPts val="0"/>
-              </a:spcAft>
-            </a:pPr>
-            <a:r>
-              <a:rPr sz="1250" b="0">
-                <a:solidFill>
-                  <a:srgbClr val="8CA0BE"/>
-                </a:solidFill>
-                <a:latin typeface="Segoe UI"/>
-              </a:rPr>
-              <a:t>Scan to open the live application and score a customer portfolio</a:t>
-            </a:r>
-          </a:p>
-        </p:txBody>
-      </p:sp>
-      <p:sp>
-        <p:nvSpPr>
-          <p:cNvPr id="7" name="Rectangle 6"/>
-          <p:cNvSpPr/>
-          <p:nvPr/>
-        </p:nvSpPr>
-        <p:spPr>
-          <a:xfrm>
-            <a:off x="566928" y="1371600"/>
-            <a:ext cx="11057839" cy="12801"/>
-          </a:xfrm>
-          <a:prstGeom prst="rect">
-            <a:avLst/>
-          </a:prstGeom>
-          <a:solidFill>
-            <a:srgbClr val="223049"/>
-          </a:solidFill>
-          <a:ln>
-            <a:noFill/>
-          </a:ln>
-          <a:effectLst/>
-        </p:spPr>
-        <p:style>
-          <a:lnRef idx="1">
-            <a:schemeClr val="accent1"/>
-          </a:lnRef>
-          <a:fillRef idx="3">
-            <a:schemeClr val="accent1"/>
-          </a:fillRef>
-          <a:effectRef idx="2">
-            <a:schemeClr val="accent1"/>
-          </a:effectRef>
-          <a:fontRef idx="minor">
-            <a:schemeClr val="lt1"/>
-          </a:fontRef>
-        </p:style>
-        <p:txBody>
-          <a:bodyPr rtlCol="0" anchor="ctr"/>
-          <a:lstStyle/>
-          <a:p>
-            <a:pPr algn="ctr"/>
-          </a:p>
-        </p:txBody>
-      </p:sp>
-      <p:sp>
-        <p:nvSpPr>
-          <p:cNvPr id="8" name="Rounded Rectangle 7"/>
-          <p:cNvSpPr/>
-          <p:nvPr/>
-        </p:nvSpPr>
-        <p:spPr>
-          <a:xfrm>
-            <a:off x="566928" y="1517904"/>
-            <a:ext cx="5321808" cy="3968496"/>
-          </a:xfrm>
-          <a:prstGeom prst="roundRect">
-            <a:avLst>
-              <a:gd name="adj" fmla="val 8000"/>
-            </a:avLst>
-          </a:prstGeom>
-          <a:solidFill>
-            <a:srgbClr val="111A2C"/>
-          </a:solidFill>
-          <a:ln w="17780">
-            <a:solidFill>
-              <a:srgbClr val="2FD8B4"/>
-            </a:solidFill>
-          </a:ln>
-          <a:effectLst/>
-        </p:spPr>
-        <p:style>
-          <a:lnRef idx="1">
-            <a:schemeClr val="accent1"/>
-          </a:lnRef>
-          <a:fillRef idx="3">
-            <a:schemeClr val="accent1"/>
-          </a:fillRef>
-          <a:effectRef idx="2">
-            <a:schemeClr val="accent1"/>
-          </a:effectRef>
-          <a:fontRef idx="minor">
-            <a:schemeClr val="lt1"/>
-          </a:fontRef>
-        </p:style>
-        <p:txBody>
-          <a:bodyPr rtlCol="0" anchor="ctr"/>
-          <a:lstStyle/>
-          <a:p>
-            <a:pPr algn="ctr"/>
-          </a:p>
-        </p:txBody>
-      </p:sp>
-      <p:sp>
-        <p:nvSpPr>
-          <p:cNvPr id="9" name="TextBox 8"/>
-          <p:cNvSpPr txBox="1"/>
-          <p:nvPr/>
-        </p:nvSpPr>
-        <p:spPr>
-          <a:xfrm>
-            <a:off x="822960" y="1737360"/>
-            <a:ext cx="4809744" cy="3529584"/>
-          </a:xfrm>
-          <a:prstGeom prst="rect">
-            <a:avLst/>
-          </a:prstGeom>
-          <a:noFill/>
-        </p:spPr>
-        <p:txBody>
-          <a:bodyPr wrap="square" lIns="0" rIns="0" tIns="0" bIns="0" anchor="t">
-            <a:spAutoFit/>
-          </a:bodyPr>
-          <a:lstStyle/>
-          <a:p>
-            <a:pPr algn="l">
-              <a:lnSpc>
-                <a:spcPct val="112000"/>
-              </a:lnSpc>
-              <a:spcAft>
-                <a:spcPts val="800"/>
-              </a:spcAft>
-            </a:pPr>
-            <a:r>
-              <a:rPr sz="1050" b="1" u="sng">
-                <a:solidFill>
-                  <a:srgbClr val="2FD8B4"/>
-                </a:solidFill>
-                <a:latin typeface="Consolas"/>
-                <a:hlinkClick r:id="rId2"/>
-              </a:rPr>
-              <a:t>LIVE APPLICATION</a:t>
-            </a:r>
-          </a:p>
-          <a:p>
-            <a:pPr algn="l">
-              <a:lnSpc>
-                <a:spcPct val="116000"/>
-              </a:lnSpc>
-              <a:spcAft>
-                <a:spcPts val="1000"/>
-              </a:spcAft>
-            </a:pPr>
-            <a:r>
-              <a:rPr sz="1100" b="1" u="sng">
-                <a:solidFill>
-                  <a:srgbClr val="4C8DFF"/>
-                </a:solidFill>
-                <a:latin typeface="Segoe UI"/>
-                <a:hlinkClick r:id="rId2"/>
-              </a:rPr>
-              <a:t>retainiq-predictive-customer-retention-zq6x.onrender.com</a:t>
-            </a:r>
-          </a:p>
-          <a:p>
-            <a:pPr algn="l">
-              <a:lnSpc>
-                <a:spcPct val="120000"/>
-              </a:lnSpc>
-              <a:spcAft>
-                <a:spcPts val="1200"/>
-              </a:spcAft>
-            </a:pPr>
-            <a:r>
-              <a:rPr sz="1080" b="0">
-                <a:solidFill>
-                  <a:srgbClr val="8CA0BE"/>
-                </a:solidFill>
-                <a:latin typeface="Segoe UI"/>
-              </a:rPr>
-              <a:t>Bulk score a customer CSV, read the dashboard, and download a private report. The model, risk bands, explanations and recommendations run live — the same code paths that produced every figure in this deck.</a:t>
-            </a:r>
-          </a:p>
-          <a:p>
-            <a:pPr algn="l">
-              <a:lnSpc>
-                <a:spcPct val="112000"/>
-              </a:lnSpc>
-              <a:spcAft>
-                <a:spcPts val="500"/>
-              </a:spcAft>
-            </a:pPr>
-            <a:r>
-              <a:rPr sz="1050" b="1" u="sng">
-                <a:solidFill>
-                  <a:srgbClr val="4C8DFF"/>
-                </a:solidFill>
-                <a:latin typeface="Consolas"/>
-                <a:hlinkClick r:id="rId3"/>
-              </a:rPr>
-              <a:t>SOURCE CODE</a:t>
-            </a:r>
-          </a:p>
-          <a:p>
-            <a:pPr algn="l">
-              <a:lnSpc>
-                <a:spcPct val="116000"/>
-              </a:lnSpc>
-              <a:spcAft>
-                <a:spcPts val="1200"/>
-              </a:spcAft>
-            </a:pPr>
-            <a:r>
-              <a:rPr sz="1060" b="0" u="sng">
-                <a:solidFill>
-                  <a:srgbClr val="4C8DFF"/>
-                </a:solidFill>
-                <a:latin typeface="Consolas"/>
-                <a:hlinkClick r:id="rId3"/>
-              </a:rPr>
-              <a:t>github.com/Logesh0247/RetainIQ_Signal_Ops_Console</a:t>
-            </a:r>
-          </a:p>
-          <a:p>
-            <a:pPr algn="l">
-              <a:lnSpc>
-                <a:spcPct val="118000"/>
-              </a:lnSpc>
-              <a:spcAft>
-                <a:spcPts val="1000"/>
-              </a:spcAft>
-            </a:pPr>
-            <a:r>
-              <a:rPr sz="1040" b="0">
-                <a:solidFill>
-                  <a:srgbClr val="8CA0BE"/>
-                </a:solidFill>
-                <a:latin typeface="Segoe UI"/>
-              </a:rPr>
-              <a:t>Notebooks 01–09, the Flask console, the FastAPI wrapper and the nine-test suite are all in the repository.</a:t>
-            </a:r>
-          </a:p>
-          <a:p>
-            <a:pPr algn="l">
-              <a:lnSpc>
-                <a:spcPct val="118000"/>
-              </a:lnSpc>
-              <a:spcAft>
-                <a:spcPts val="0"/>
-              </a:spcAft>
-            </a:pPr>
-            <a:r>
-              <a:rPr sz="1040" b="0">
-                <a:solidFill>
-                  <a:srgbClr val="F5A623"/>
-                </a:solidFill>
-                <a:latin typeface="Segoe UI"/>
-              </a:rPr>
-              <a:t>The host is a free tier — open it once a minute before the review so the first scan is instant.</a:t>
-            </a:r>
-          </a:p>
-        </p:txBody>
-      </p:sp>
-      <p:sp>
-        <p:nvSpPr>
-          <p:cNvPr id="10" name="Rounded Rectangle 9"/>
-          <p:cNvSpPr/>
-          <p:nvPr/>
-        </p:nvSpPr>
-        <p:spPr>
-          <a:xfrm>
-            <a:off x="5980176" y="1517904"/>
-            <a:ext cx="2724912" cy="3968496"/>
-          </a:xfrm>
-          <a:prstGeom prst="roundRect">
-            <a:avLst>
-              <a:gd name="adj" fmla="val 8000"/>
-            </a:avLst>
-          </a:prstGeom>
-          <a:solidFill>
-            <a:srgbClr val="FFFFFF"/>
-          </a:solidFill>
-          <a:ln w="12700">
-            <a:solidFill>
-              <a:srgbClr val="223049"/>
-            </a:solidFill>
-          </a:ln>
-          <a:effectLst/>
-        </p:spPr>
-        <p:style>
-          <a:lnRef idx="1">
-            <a:schemeClr val="accent1"/>
-          </a:lnRef>
-          <a:fillRef idx="3">
-            <a:schemeClr val="accent1"/>
-          </a:fillRef>
-          <a:effectRef idx="2">
-            <a:schemeClr val="accent1"/>
-          </a:effectRef>
-          <a:fontRef idx="minor">
-            <a:schemeClr val="lt1"/>
-          </a:fontRef>
-        </p:style>
-        <p:txBody>
-          <a:bodyPr rtlCol="0" anchor="ctr"/>
-          <a:lstStyle/>
-          <a:p>
-            <a:pPr algn="ctr"/>
-          </a:p>
-        </p:txBody>
-      </p:sp>
-      <p:pic>
-        <p:nvPicPr>
-          <p:cNvPr id="11" name="Picture 10" descr="qr_live_app.png"/>
-          <p:cNvPicPr>
-            <a:picLocks noChangeAspect="1"/>
-          </p:cNvPicPr>
-          <p:nvPr/>
-        </p:nvPicPr>
-        <p:blipFill>
-          <a:blip r:embed="rId4"/>
-          <a:stretch>
-            <a:fillRect/>
-          </a:stretch>
-        </p:blipFill>
-        <p:spPr>
-          <a:xfrm>
-            <a:off x="6035040" y="1719072"/>
-            <a:ext cx="2615184" cy="2615184"/>
-          </a:xfrm>
-          <a:prstGeom prst="rect">
-            <a:avLst/>
-          </a:prstGeom>
-        </p:spPr>
-      </p:pic>
-      <p:sp>
-        <p:nvSpPr>
-          <p:cNvPr id="12" name="TextBox 11"/>
-          <p:cNvSpPr txBox="1"/>
-          <p:nvPr/>
-        </p:nvSpPr>
-        <p:spPr>
-          <a:xfrm>
-            <a:off x="6126480" y="4864608"/>
-            <a:ext cx="2432304" cy="475488"/>
-          </a:xfrm>
-          <a:prstGeom prst="rect">
-            <a:avLst/>
-          </a:prstGeom>
-          <a:noFill/>
-        </p:spPr>
-        <p:txBody>
-          <a:bodyPr wrap="square" lIns="0" rIns="0" tIns="0" bIns="0" anchor="t">
-            <a:spAutoFit/>
-          </a:bodyPr>
-          <a:lstStyle/>
-          <a:p>
-            <a:pPr algn="ctr">
-              <a:lnSpc>
-                <a:spcPct val="112000"/>
-              </a:lnSpc>
-              <a:spcAft>
-                <a:spcPts val="200"/>
-              </a:spcAft>
-            </a:pPr>
-            <a:r>
-              <a:rPr sz="950" b="1">
-                <a:solidFill>
-                  <a:srgbClr val="0A0F1C"/>
-                </a:solidFill>
-                <a:latin typeface="Consolas"/>
-              </a:rPr>
-              <a:t>SCAN FOR THE</a:t>
-            </a:r>
-          </a:p>
-          <a:p>
-            <a:pPr algn="ctr">
-              <a:lnSpc>
-                <a:spcPct val="112000"/>
-              </a:lnSpc>
-              <a:spcAft>
-                <a:spcPts val="0"/>
-              </a:spcAft>
-            </a:pPr>
-            <a:r>
-              <a:rPr sz="950" b="1">
-                <a:solidFill>
-                  <a:srgbClr val="0A0F1C"/>
-                </a:solidFill>
-                <a:latin typeface="Consolas"/>
-              </a:rPr>
-              <a:t>LIVE APPLICATION</a:t>
-            </a:r>
-          </a:p>
-        </p:txBody>
-      </p:sp>
-      <p:sp>
-        <p:nvSpPr>
-          <p:cNvPr id="13" name="Rounded Rectangle 12"/>
-          <p:cNvSpPr/>
-          <p:nvPr/>
-        </p:nvSpPr>
-        <p:spPr>
-          <a:xfrm>
-            <a:off x="8796528" y="1517904"/>
-            <a:ext cx="2825496" cy="3968496"/>
-          </a:xfrm>
-          <a:prstGeom prst="roundRect">
-            <a:avLst>
-              <a:gd name="adj" fmla="val 8000"/>
-            </a:avLst>
-          </a:prstGeom>
-          <a:solidFill>
-            <a:srgbClr val="111A2C"/>
-          </a:solidFill>
-          <a:ln w="12700">
-            <a:solidFill>
-              <a:srgbClr val="223049"/>
-            </a:solidFill>
-          </a:ln>
-          <a:effectLst/>
-        </p:spPr>
-        <p:style>
-          <a:lnRef idx="1">
-            <a:schemeClr val="accent1"/>
-          </a:lnRef>
-          <a:fillRef idx="3">
-            <a:schemeClr val="accent1"/>
-          </a:fillRef>
-          <a:effectRef idx="2">
-            <a:schemeClr val="accent1"/>
-          </a:effectRef>
-          <a:fontRef idx="minor">
-            <a:schemeClr val="lt1"/>
-          </a:fontRef>
-        </p:style>
-        <p:txBody>
-          <a:bodyPr rtlCol="0" anchor="ctr"/>
-          <a:lstStyle/>
-          <a:p>
-            <a:pPr algn="ctr"/>
-          </a:p>
-        </p:txBody>
-      </p:sp>
-      <p:pic>
-        <p:nvPicPr>
-          <p:cNvPr id="14" name="Picture 13" descr="qr_repository.png"/>
-          <p:cNvPicPr>
-            <a:picLocks noChangeAspect="1"/>
-          </p:cNvPicPr>
-          <p:nvPr/>
-        </p:nvPicPr>
-        <p:blipFill>
-          <a:blip r:embed="rId5"/>
-          <a:stretch>
-            <a:fillRect/>
-          </a:stretch>
-        </p:blipFill>
-        <p:spPr>
-          <a:xfrm>
-            <a:off x="9637776" y="1737360"/>
-            <a:ext cx="1143000" cy="1143000"/>
-          </a:xfrm>
-          <a:prstGeom prst="rect">
-            <a:avLst/>
-          </a:prstGeom>
-        </p:spPr>
-      </p:pic>
-      <p:sp>
-        <p:nvSpPr>
-          <p:cNvPr id="15" name="TextBox 14"/>
-          <p:cNvSpPr txBox="1"/>
-          <p:nvPr/>
-        </p:nvSpPr>
-        <p:spPr>
-          <a:xfrm>
-            <a:off x="8979408" y="1773936"/>
-            <a:ext cx="603504" cy="914400"/>
-          </a:xfrm>
-          <a:prstGeom prst="rect">
-            <a:avLst/>
-          </a:prstGeom>
-          <a:noFill/>
-        </p:spPr>
-        <p:txBody>
-          <a:bodyPr wrap="square" lIns="0" rIns="0" tIns="0" bIns="0" anchor="t">
-            <a:spAutoFit/>
-          </a:bodyPr>
-          <a:lstStyle/>
-          <a:p>
-            <a:pPr algn="l">
-              <a:lnSpc>
-                <a:spcPct val="112000"/>
-              </a:lnSpc>
-              <a:spcAft>
-                <a:spcPts val="300"/>
-              </a:spcAft>
-            </a:pPr>
-            <a:r>
-              <a:rPr sz="850" b="1">
-                <a:solidFill>
-                  <a:srgbClr val="8CA0BE"/>
-                </a:solidFill>
-                <a:latin typeface="Consolas"/>
-              </a:rPr>
-              <a:t>SOURCE</a:t>
-            </a:r>
-          </a:p>
-          <a:p>
-            <a:pPr algn="l">
-              <a:lnSpc>
-                <a:spcPct val="112000"/>
-              </a:lnSpc>
-              <a:spcAft>
-                <a:spcPts val="0"/>
-              </a:spcAft>
-            </a:pPr>
-            <a:r>
-              <a:rPr sz="850" b="1">
-                <a:solidFill>
-                  <a:srgbClr val="8CA0BE"/>
-                </a:solidFill>
-                <a:latin typeface="Consolas"/>
-              </a:rPr>
-              <a:t>REPO</a:t>
-            </a:r>
-          </a:p>
-        </p:txBody>
-      </p:sp>
-      <p:sp>
-        <p:nvSpPr>
-          <p:cNvPr id="16" name="TextBox 15"/>
-          <p:cNvSpPr txBox="1"/>
-          <p:nvPr/>
-        </p:nvSpPr>
-        <p:spPr>
-          <a:xfrm>
-            <a:off x="8979408" y="2999232"/>
-            <a:ext cx="2459736" cy="2194560"/>
-          </a:xfrm>
-          <a:prstGeom prst="rect">
-            <a:avLst/>
-          </a:prstGeom>
-          <a:noFill/>
-        </p:spPr>
-        <p:txBody>
-          <a:bodyPr wrap="square" lIns="0" rIns="0" tIns="0" bIns="0" anchor="t">
-            <a:spAutoFit/>
-          </a:bodyPr>
-          <a:lstStyle/>
-          <a:p>
-            <a:pPr algn="l">
-              <a:lnSpc>
-                <a:spcPct val="112000"/>
-              </a:lnSpc>
-              <a:spcAft>
-                <a:spcPts val="500"/>
-              </a:spcAft>
-            </a:pPr>
-            <a:r>
-              <a:rPr sz="1900" b="1">
-                <a:solidFill>
-                  <a:srgbClr val="EAF0F7"/>
-                </a:solidFill>
-                <a:latin typeface="Segoe UI"/>
-              </a:rPr>
-              <a:t>Thank you</a:t>
-            </a:r>
-          </a:p>
-          <a:p>
-            <a:pPr algn="l">
-              <a:lnSpc>
-                <a:spcPct val="112000"/>
-              </a:lnSpc>
-              <a:spcAft>
-                <a:spcPts val="1000"/>
-              </a:spcAft>
-            </a:pPr>
-            <a:r>
-              <a:rPr sz="1100" b="0">
-                <a:solidFill>
-                  <a:srgbClr val="2FD8B4"/>
-                </a:solidFill>
-                <a:latin typeface="Segoe UI"/>
-              </a:rPr>
-              <a:t>Questions welcome.</a:t>
-            </a:r>
-          </a:p>
-          <a:p>
-            <a:pPr algn="l">
-              <a:lnSpc>
-                <a:spcPct val="118000"/>
-              </a:lnSpc>
-              <a:spcAft>
-                <a:spcPts val="0"/>
-              </a:spcAft>
-            </a:pPr>
-            <a:r>
-              <a:rPr sz="1040" b="0">
-                <a:solidFill>
-                  <a:srgbClr val="8CA0BE"/>
-                </a:solidFill>
-                <a:latin typeface="Segoe UI"/>
-              </a:rPr>
-              <a:t>RetainIQ — from a churn probability to a prioritised, explained, costed retention action.</a:t>
-            </a:r>
-          </a:p>
-        </p:txBody>
-      </p:sp>
-      <p:sp>
-        <p:nvSpPr>
-          <p:cNvPr id="17" name="Rectangle 16"/>
-          <p:cNvSpPr/>
-          <p:nvPr/>
-        </p:nvSpPr>
-        <p:spPr>
-          <a:xfrm>
-            <a:off x="10104120" y="4795113"/>
-            <a:ext cx="89382" cy="170992"/>
-          </a:xfrm>
-          <a:prstGeom prst="rect">
-            <a:avLst/>
-          </a:prstGeom>
-          <a:solidFill>
-            <a:srgbClr val="2FD8B4"/>
-          </a:solidFill>
-          <a:ln>
-            <a:noFill/>
-          </a:ln>
-          <a:effectLst/>
-        </p:spPr>
-        <p:style>
-          <a:lnRef idx="1">
-            <a:schemeClr val="accent1"/>
-          </a:lnRef>
-          <a:fillRef idx="3">
-            <a:schemeClr val="accent1"/>
-          </a:fillRef>
-          <a:effectRef idx="2">
-            <a:schemeClr val="accent1"/>
-          </a:effectRef>
-          <a:fontRef idx="minor">
-            <a:schemeClr val="lt1"/>
-          </a:fontRef>
-        </p:style>
-        <p:txBody>
-          <a:bodyPr rtlCol="0" anchor="ctr"/>
-          <a:lstStyle/>
-          <a:p>
-            <a:pPr algn="ctr"/>
-          </a:p>
-        </p:txBody>
-      </p:sp>
-      <p:sp>
-        <p:nvSpPr>
-          <p:cNvPr id="18" name="Rectangle 17"/>
-          <p:cNvSpPr/>
-          <p:nvPr/>
-        </p:nvSpPr>
-        <p:spPr>
-          <a:xfrm>
-            <a:off x="10259568" y="4670755"/>
-            <a:ext cx="89382" cy="295351"/>
-          </a:xfrm>
-          <a:prstGeom prst="rect">
-            <a:avLst/>
-          </a:prstGeom>
-          <a:solidFill>
-            <a:srgbClr val="2FD8B4"/>
-          </a:solidFill>
-          <a:ln>
-            <a:noFill/>
-          </a:ln>
-          <a:effectLst/>
-        </p:spPr>
-        <p:style>
-          <a:lnRef idx="1">
-            <a:schemeClr val="accent1"/>
-          </a:lnRef>
-          <a:fillRef idx="3">
-            <a:schemeClr val="accent1"/>
-          </a:fillRef>
-          <a:effectRef idx="2">
-            <a:schemeClr val="accent1"/>
-          </a:effectRef>
-          <a:fontRef idx="minor">
-            <a:schemeClr val="lt1"/>
-          </a:fontRef>
-        </p:style>
-        <p:txBody>
-          <a:bodyPr rtlCol="0" anchor="ctr"/>
-          <a:lstStyle/>
-          <a:p>
-            <a:pPr algn="ctr"/>
-          </a:p>
-        </p:txBody>
-      </p:sp>
-      <p:sp>
-        <p:nvSpPr>
-          <p:cNvPr id="19" name="Rectangle 18"/>
-          <p:cNvSpPr/>
-          <p:nvPr/>
-        </p:nvSpPr>
-        <p:spPr>
-          <a:xfrm>
-            <a:off x="10415016" y="4546396"/>
-            <a:ext cx="89382" cy="419709"/>
-          </a:xfrm>
-          <a:prstGeom prst="rect">
-            <a:avLst/>
-          </a:prstGeom>
-          <a:solidFill>
-            <a:srgbClr val="2FD8B4"/>
-          </a:solidFill>
-          <a:ln>
-            <a:noFill/>
-          </a:ln>
-          <a:effectLst/>
-        </p:spPr>
-        <p:style>
-          <a:lnRef idx="1">
-            <a:schemeClr val="accent1"/>
-          </a:lnRef>
-          <a:fillRef idx="3">
-            <a:schemeClr val="accent1"/>
-          </a:fillRef>
-          <a:effectRef idx="2">
-            <a:schemeClr val="accent1"/>
-          </a:effectRef>
-          <a:fontRef idx="minor">
-            <a:schemeClr val="lt1"/>
-          </a:fontRef>
-        </p:style>
-        <p:txBody>
-          <a:bodyPr rtlCol="0" anchor="ctr"/>
-          <a:lstStyle/>
-          <a:p>
-            <a:pPr algn="ctr"/>
-          </a:p>
-        </p:txBody>
-      </p:sp>
-      <p:sp>
-        <p:nvSpPr>
-          <p:cNvPr id="20" name="Rectangle 19"/>
-          <p:cNvSpPr/>
-          <p:nvPr/>
-        </p:nvSpPr>
-        <p:spPr>
-          <a:xfrm>
-            <a:off x="10570464" y="4422038"/>
-            <a:ext cx="89382" cy="544068"/>
-          </a:xfrm>
-          <a:prstGeom prst="rect">
-            <a:avLst/>
-          </a:prstGeom>
-          <a:solidFill>
-            <a:srgbClr val="2FD8B4"/>
-          </a:solidFill>
-          <a:ln>
-            <a:noFill/>
-          </a:ln>
-          <a:effectLst/>
-        </p:spPr>
-        <p:style>
-          <a:lnRef idx="1">
-            <a:schemeClr val="accent1"/>
-          </a:lnRef>
-          <a:fillRef idx="3">
-            <a:schemeClr val="accent1"/>
-          </a:fillRef>
-          <a:effectRef idx="2">
-            <a:schemeClr val="accent1"/>
-          </a:effectRef>
-          <a:fontRef idx="minor">
-            <a:schemeClr val="lt1"/>
-          </a:fontRef>
-        </p:style>
-        <p:txBody>
-          <a:bodyPr rtlCol="0" anchor="ctr"/>
-          <a:lstStyle/>
-          <a:p>
-            <a:pPr algn="ctr"/>
-          </a:p>
-        </p:txBody>
-      </p:sp>
-      <p:sp>
-        <p:nvSpPr>
-          <p:cNvPr id="21" name="Rectangle 20"/>
-          <p:cNvSpPr/>
-          <p:nvPr/>
-        </p:nvSpPr>
-        <p:spPr>
-          <a:xfrm>
-            <a:off x="10725912" y="4297680"/>
-            <a:ext cx="89382" cy="668426"/>
-          </a:xfrm>
-          <a:prstGeom prst="rect">
-            <a:avLst/>
-          </a:prstGeom>
-          <a:solidFill>
-            <a:srgbClr val="2FD8B4"/>
-          </a:solidFill>
-          <a:ln>
-            <a:noFill/>
-          </a:ln>
-          <a:effectLst/>
-        </p:spPr>
-        <p:style>
-          <a:lnRef idx="1">
-            <a:schemeClr val="accent1"/>
-          </a:lnRef>
-          <a:fillRef idx="3">
-            <a:schemeClr val="accent1"/>
-          </a:fillRef>
-          <a:effectRef idx="2">
-            <a:schemeClr val="accent1"/>
-          </a:effectRef>
-          <a:fontRef idx="minor">
-            <a:schemeClr val="lt1"/>
-          </a:fontRef>
-        </p:style>
-        <p:txBody>
-          <a:bodyPr rtlCol="0" anchor="ctr"/>
-          <a:lstStyle/>
-          <a:p>
-            <a:pPr algn="ctr"/>
-          </a:p>
-        </p:txBody>
-      </p:sp>
-      <p:sp>
-        <p:nvSpPr>
-          <p:cNvPr id="22" name="TextBox 21"/>
-          <p:cNvSpPr txBox="1"/>
-          <p:nvPr/>
-        </p:nvSpPr>
-        <p:spPr>
-          <a:xfrm>
-            <a:off x="566928" y="5669280"/>
-            <a:ext cx="11057839" cy="548640"/>
-          </a:xfrm>
-          <a:prstGeom prst="rect">
-            <a:avLst/>
-          </a:prstGeom>
-          <a:noFill/>
-        </p:spPr>
-        <p:txBody>
-          <a:bodyPr wrap="square" lIns="0" rIns="0" tIns="0" bIns="0" anchor="t">
-            <a:spAutoFit/>
-          </a:bodyPr>
-          <a:lstStyle/>
-          <a:p>
-            <a:pPr algn="l">
-              <a:lnSpc>
-                <a:spcPct val="112000"/>
-              </a:lnSpc>
-              <a:spcAft>
-                <a:spcPts val="0"/>
-              </a:spcAft>
-            </a:pPr>
-            <a:r>
-              <a:rPr sz="1050" b="0">
-                <a:solidFill>
-                  <a:srgbClr val="8CA0BE"/>
-                </a:solidFill>
-                <a:latin typeface="Consolas"/>
-              </a:rPr>
-              <a:t>Logesh S.  ·  B.Sc. Data Science  ·  RetainIQ Signal Ops Console  ·  80.34% accuracy  ·  84.91% ROC-AUC</a:t>
             </a:r>
           </a:p>
         </p:txBody>

--- a/presentation/RetainIQ_Project_Review.pptx
+++ b/presentation/RetainIQ_Project_Review.pptx
@@ -25,6 +25,7 @@
     <p:sldId id="273" r:id="rId25"/>
     <p:sldId id="274" r:id="rId26"/>
     <p:sldId id="275" r:id="rId27"/>
+    <p:sldId id="276" r:id="rId28"/>
   </p:sldIdLst>
   <p:sldSz cx="12191695" cy="6858000" type="screen4x3"/>
   <p:notesSz cx="6858000" cy="9144000"/>
@@ -1738,27 +1739,22 @@
           <a:lstStyle/>
           <a:p>
             <a:r>
-              <a:t>CLOSING (11:05–11:30) Leave this slide up for questions. It puts the live URL and</a:t>
-            </a:r>
-          </a:p>
-          <a:p>
-            <a:r>
-              <a:t>a scannable QR in front of the examiner and ends on the thesis, not a tool list.</a:t>
-            </a:r>
-          </a:p>
-          <a:p>
-            <a:r>
-              <a:t>"The contribution isn't the 80% — it's that a probability becomes a prioritised,</a:t>
-            </a:r>
-          </a:p>
-          <a:p>
-            <a:r>
-              <a:t>explained, costed action, in a product a retention team can actually open. Thank</a:t>
-            </a:r>
-          </a:p>
-          <a:p>
-            <a:r>
-              <a:t>you — happy to take questions."</a:t>
+              <a:t>LIVE DEMO / LINKS (11:05–11:20) Use this slide to hand off from the review to the</a:t>
+            </a:r>
+          </a:p>
+          <a:p>
+            <a:r>
+              <a:t>working product. The live URL is clickable and also available as a QR code; the</a:t>
+            </a:r>
+          </a:p>
+          <a:p>
+            <a:r>
+              <a:t>source repository has its own QR and link. The same scoring path powers the model,</a:t>
+            </a:r>
+          </a:p>
+          <a:p>
+            <a:r>
+              <a:t>risk bands, coefficient explanations and recommendations shown throughout the deck.</a:t>
             </a:r>
           </a:p>
           <a:p>
@@ -1768,7 +1764,87 @@
           </a:p>
           <a:p>
             <a:r>
-              <a:t>Remember the free tier sleeps — warm the app before you present.</a:t>
+              <a:t>The host is a free tier, so warm it before the presentation.</a:t>
+            </a:r>
+          </a:p>
+        </p:txBody>
+      </p:sp>
+      <p:sp>
+        <p:nvSpPr>
+          <p:cNvPr id="4" name="Slide Number Placeholder 3"/>
+          <p:cNvSpPr>
+            <a:spLocks noGrp="1"/>
+          </p:cNvSpPr>
+          <p:nvPr>
+            <p:ph type="sldNum" idx="5" sz="quarter"/>
+          </p:nvPr>
+        </p:nvSpPr>
+        <p:spPr/>
+      </p:sp>
+    </p:spTree>
+  </p:cSld>
+  <p:clrMapOvr>
+    <a:masterClrMapping/>
+  </p:clrMapOvr>
+</p:notes>
+</file>
+
+<file path=ppt/notesSlides/notesSlide21.xml><?xml version="1.0" encoding="utf-8"?>
+<p:notes xmlns:a="http://schemas.openxmlformats.org/drawingml/2006/main" xmlns:p="http://schemas.openxmlformats.org/presentationml/2006/main" xmlns:r="http://schemas.openxmlformats.org/officeDocument/2006/relationships">
+  <p:cSld>
+    <p:spTree>
+      <p:nvGrpSpPr>
+        <p:cNvPr id="1" name=""/>
+        <p:cNvGrpSpPr/>
+        <p:nvPr/>
+      </p:nvGrpSpPr>
+      <p:grpSpPr>
+        <a:xfrm>
+          <a:off x="0" y="0"/>
+          <a:ext cx="0" cy="0"/>
+          <a:chOff x="0" y="0"/>
+          <a:chExt cx="0" cy="0"/>
+        </a:xfrm>
+      </p:grpSpPr>
+      <p:sp>
+        <p:nvSpPr>
+          <p:cNvPr id="2" name="Slide Image Placeholder 1"/>
+          <p:cNvSpPr>
+            <a:spLocks noGrp="1"/>
+          </p:cNvSpPr>
+          <p:nvPr>
+            <p:ph type="sldImg" idx="2"/>
+          </p:nvPr>
+        </p:nvSpPr>
+        <p:spPr/>
+      </p:sp>
+      <p:sp>
+        <p:nvSpPr>
+          <p:cNvPr id="3" name="Notes Placeholder 2"/>
+          <p:cNvSpPr>
+            <a:spLocks noGrp="1"/>
+          </p:cNvSpPr>
+          <p:nvPr>
+            <p:ph type="body" idx="3" sz="quarter"/>
+          </p:nvPr>
+        </p:nvSpPr>
+        <p:spPr/>
+        <p:txBody>
+          <a:bodyPr/>
+          <a:lstStyle/>
+          <a:p>
+            <a:r>
+              <a:t>THANK YOU (11:20–11:30) End on this dedicated final slide. "Thank you for your</a:t>
+            </a:r>
+          </a:p>
+          <a:p>
+            <a:r>
+              <a:t>time — happy to take questions." Keep the contribution precise: the project turns</a:t>
+            </a:r>
+          </a:p>
+          <a:p>
+            <a:r>
+              <a:t>a churn probability into a prioritised, explained and costed retention action.</a:t>
             </a:r>
           </a:p>
           <a:p/>
@@ -1799,12 +1875,12 @@
           </a:p>
           <a:p>
             <a:r>
-              <a:t>· Isn't revenue-at-risk optimistic? It's exposure, not savings — the deck and the</a:t>
-            </a:r>
-          </a:p>
-          <a:p>
-            <a:r>
-              <a:t>  app both say so; validating it needs a live campaign.</a:t>
+              <a:t>· Isn't revenue-at-risk optimistic? It is exposure, not savings; validating it</a:t>
+            </a:r>
+          </a:p>
+          <a:p>
+            <a:r>
+              <a:t>  needs a live campaign.</a:t>
             </a:r>
           </a:p>
           <a:p>
@@ -27219,7 +27295,7 @@
                 </a:solidFill>
                 <a:latin typeface="Consolas"/>
               </a:rPr>
-              <a:t>THANK YOU</a:t>
+              <a:t>LIVE DEMO &amp; PROJECT LINKS</a:t>
             </a:r>
           </a:p>
         </p:txBody>
@@ -27853,36 +27929,36 @@
                 <a:spcPct val="112000"/>
               </a:lnSpc>
               <a:spcAft>
-                <a:spcPts val="500"/>
+                <a:spcPts val="700"/>
               </a:spcAft>
             </a:pPr>
             <a:r>
-              <a:rPr sz="1900" b="1">
+              <a:rPr sz="950" b="1">
+                <a:solidFill>
+                  <a:srgbClr val="2FD8B4"/>
+                </a:solidFill>
+                <a:latin typeface="Consolas"/>
+              </a:rPr>
+              <a:t>PROJECT TAKEAWAY</a:t>
+            </a:r>
+          </a:p>
+          <a:p>
+            <a:pPr algn="l">
+              <a:lnSpc>
+                <a:spcPct val="112000"/>
+              </a:lnSpc>
+              <a:spcAft>
+                <a:spcPts val="700"/>
+              </a:spcAft>
+            </a:pPr>
+            <a:r>
+              <a:rPr sz="1700" b="1">
                 <a:solidFill>
                   <a:srgbClr val="EAF0F7"/>
                 </a:solidFill>
                 <a:latin typeface="Segoe UI"/>
               </a:rPr>
-              <a:t>Thank you</a:t>
-            </a:r>
-          </a:p>
-          <a:p>
-            <a:pPr algn="l">
-              <a:lnSpc>
-                <a:spcPct val="112000"/>
-              </a:lnSpc>
-              <a:spcAft>
-                <a:spcPts val="1000"/>
-              </a:spcAft>
-            </a:pPr>
-            <a:r>
-              <a:rPr sz="1100" b="0">
-                <a:solidFill>
-                  <a:srgbClr val="2FD8B4"/>
-                </a:solidFill>
-                <a:latin typeface="Segoe UI"/>
-              </a:rPr>
-              <a:t>Questions welcome.</a:t>
+              <a:t>Probability → action</a:t>
             </a:r>
           </a:p>
           <a:p>
@@ -27901,7 +27977,7 @@
                 </a:solidFill>
                 <a:latin typeface="Segoe UI"/>
               </a:rPr>
-              <a:t>RetainIQ — from a churn probability to a prioritised, explained, costed retention action.</a:t>
+              <a:t>From churn risk to a prioritised, explained and costed retention response.</a:t>
             </a:r>
           </a:p>
         </p:txBody>
@@ -28164,6 +28240,1464 @@
                 <a:latin typeface="Consolas"/>
               </a:rPr>
               <a:t>Logesh S.  ·  B.Sc. Data Science  ·  RetainIQ Signal Ops Console  ·  80.34% accuracy  ·  84.91% ROC-AUC</a:t>
+            </a:r>
+          </a:p>
+        </p:txBody>
+      </p:sp>
+    </p:spTree>
+  </p:cSld>
+  <p:clrMapOvr>
+    <a:masterClrMapping/>
+  </p:clrMapOvr>
+</p:sld>
+</file>
+
+<file path=ppt/slides/slide21.xml><?xml version="1.0" encoding="utf-8"?>
+<p:sld xmlns:a="http://schemas.openxmlformats.org/drawingml/2006/main" xmlns:p="http://schemas.openxmlformats.org/presentationml/2006/main" xmlns:r="http://schemas.openxmlformats.org/officeDocument/2006/relationships">
+  <p:cSld>
+    <p:spTree>
+      <p:nvGrpSpPr>
+        <p:cNvPr id="1" name=""/>
+        <p:cNvGrpSpPr/>
+        <p:nvPr/>
+      </p:nvGrpSpPr>
+      <p:grpSpPr/>
+      <p:sp>
+        <p:nvSpPr>
+          <p:cNvPr id="2" name="Rectangle 1"/>
+          <p:cNvSpPr/>
+          <p:nvPr/>
+        </p:nvSpPr>
+        <p:spPr>
+          <a:xfrm>
+            <a:off x="0" y="0"/>
+            <a:ext cx="12191695" cy="6858000"/>
+          </a:xfrm>
+          <a:prstGeom prst="rect">
+            <a:avLst/>
+          </a:prstGeom>
+          <a:solidFill>
+            <a:srgbClr val="0A0F1C"/>
+          </a:solidFill>
+          <a:ln>
+            <a:noFill/>
+          </a:ln>
+          <a:effectLst/>
+        </p:spPr>
+        <p:style>
+          <a:lnRef idx="1">
+            <a:schemeClr val="accent1"/>
+          </a:lnRef>
+          <a:fillRef idx="3">
+            <a:schemeClr val="accent1"/>
+          </a:fillRef>
+          <a:effectRef idx="2">
+            <a:schemeClr val="accent1"/>
+          </a:effectRef>
+          <a:fontRef idx="minor">
+            <a:schemeClr val="lt1"/>
+          </a:fontRef>
+        </p:style>
+        <p:txBody>
+          <a:bodyPr rtlCol="0" anchor="ctr"/>
+          <a:lstStyle/>
+          <a:p>
+            <a:pPr algn="ctr"/>
+          </a:p>
+        </p:txBody>
+      </p:sp>
+      <p:sp>
+        <p:nvSpPr>
+          <p:cNvPr id="3" name="Rectangle 2"/>
+          <p:cNvSpPr/>
+          <p:nvPr/>
+        </p:nvSpPr>
+        <p:spPr>
+          <a:xfrm>
+            <a:off x="0" y="0"/>
+            <a:ext cx="12191695" cy="77724"/>
+          </a:xfrm>
+          <a:prstGeom prst="rect">
+            <a:avLst/>
+          </a:prstGeom>
+          <a:solidFill>
+            <a:srgbClr val="2FD8B4"/>
+          </a:solidFill>
+          <a:ln>
+            <a:noFill/>
+          </a:ln>
+          <a:effectLst/>
+        </p:spPr>
+        <p:style>
+          <a:lnRef idx="1">
+            <a:schemeClr val="accent1"/>
+          </a:lnRef>
+          <a:fillRef idx="3">
+            <a:schemeClr val="accent1"/>
+          </a:fillRef>
+          <a:effectRef idx="2">
+            <a:schemeClr val="accent1"/>
+          </a:effectRef>
+          <a:fontRef idx="minor">
+            <a:schemeClr val="lt1"/>
+          </a:fontRef>
+        </p:style>
+        <p:txBody>
+          <a:bodyPr rtlCol="0" anchor="ctr"/>
+          <a:lstStyle/>
+          <a:p>
+            <a:pPr algn="ctr"/>
+          </a:p>
+        </p:txBody>
+      </p:sp>
+      <p:sp>
+        <p:nvSpPr>
+          <p:cNvPr id="4" name="Rounded Rectangle 3"/>
+          <p:cNvSpPr/>
+          <p:nvPr/>
+        </p:nvSpPr>
+        <p:spPr>
+          <a:xfrm>
+            <a:off x="566928" y="1517904"/>
+            <a:ext cx="11057839" cy="4553712"/>
+          </a:xfrm>
+          <a:prstGeom prst="roundRect">
+            <a:avLst>
+              <a:gd name="adj" fmla="val 8000"/>
+            </a:avLst>
+          </a:prstGeom>
+          <a:solidFill>
+            <a:srgbClr val="111A2C"/>
+          </a:solidFill>
+          <a:ln w="12700">
+            <a:solidFill>
+              <a:srgbClr val="223049"/>
+            </a:solidFill>
+          </a:ln>
+          <a:effectLst/>
+        </p:spPr>
+        <p:style>
+          <a:lnRef idx="1">
+            <a:schemeClr val="accent1"/>
+          </a:lnRef>
+          <a:fillRef idx="3">
+            <a:schemeClr val="accent1"/>
+          </a:fillRef>
+          <a:effectRef idx="2">
+            <a:schemeClr val="accent1"/>
+          </a:effectRef>
+          <a:fontRef idx="minor">
+            <a:schemeClr val="lt1"/>
+          </a:fontRef>
+        </p:style>
+        <p:txBody>
+          <a:bodyPr rtlCol="0" anchor="ctr"/>
+          <a:lstStyle/>
+          <a:p>
+            <a:pPr algn="ctr"/>
+          </a:p>
+        </p:txBody>
+      </p:sp>
+      <p:sp>
+        <p:nvSpPr>
+          <p:cNvPr id="5" name="Rectangle 4"/>
+          <p:cNvSpPr/>
+          <p:nvPr/>
+        </p:nvSpPr>
+        <p:spPr>
+          <a:xfrm>
+            <a:off x="566928" y="1517904"/>
+            <a:ext cx="11057839" cy="32004"/>
+          </a:xfrm>
+          <a:prstGeom prst="rect">
+            <a:avLst/>
+          </a:prstGeom>
+          <a:solidFill>
+            <a:srgbClr val="2FD8B4"/>
+          </a:solidFill>
+          <a:ln>
+            <a:noFill/>
+          </a:ln>
+          <a:effectLst/>
+        </p:spPr>
+        <p:style>
+          <a:lnRef idx="1">
+            <a:schemeClr val="accent1"/>
+          </a:lnRef>
+          <a:fillRef idx="3">
+            <a:schemeClr val="accent1"/>
+          </a:fillRef>
+          <a:effectRef idx="2">
+            <a:schemeClr val="accent1"/>
+          </a:effectRef>
+          <a:fontRef idx="minor">
+            <a:schemeClr val="lt1"/>
+          </a:fontRef>
+        </p:style>
+        <p:txBody>
+          <a:bodyPr rtlCol="0" anchor="ctr"/>
+          <a:lstStyle/>
+          <a:p>
+            <a:pPr algn="ctr"/>
+          </a:p>
+        </p:txBody>
+      </p:sp>
+      <p:sp>
+        <p:nvSpPr>
+          <p:cNvPr id="6" name="TextBox 5"/>
+          <p:cNvSpPr txBox="1"/>
+          <p:nvPr/>
+        </p:nvSpPr>
+        <p:spPr>
+          <a:xfrm>
+            <a:off x="1024128" y="1773936"/>
+            <a:ext cx="10143439" cy="237744"/>
+          </a:xfrm>
+          <a:prstGeom prst="rect">
+            <a:avLst/>
+          </a:prstGeom>
+          <a:noFill/>
+        </p:spPr>
+        <p:txBody>
+          <a:bodyPr wrap="square" lIns="0" rIns="0" tIns="0" bIns="0" anchor="t">
+            <a:spAutoFit/>
+          </a:bodyPr>
+          <a:lstStyle/>
+          <a:p>
+            <a:pPr algn="ctr">
+              <a:lnSpc>
+                <a:spcPct val="112000"/>
+              </a:lnSpc>
+              <a:spcAft>
+                <a:spcPts val="0"/>
+              </a:spcAft>
+            </a:pPr>
+            <a:r>
+              <a:rPr sz="1000" b="1">
+                <a:solidFill>
+                  <a:srgbClr val="2FD8B4"/>
+                </a:solidFill>
+                <a:latin typeface="Consolas"/>
+              </a:rPr>
+              <a:t>RETAINIQ · SIGNAL OPS CONSOLE</a:t>
+            </a:r>
+          </a:p>
+        </p:txBody>
+      </p:sp>
+      <p:sp>
+        <p:nvSpPr>
+          <p:cNvPr id="7" name="Rectangle 6"/>
+          <p:cNvSpPr/>
+          <p:nvPr/>
+        </p:nvSpPr>
+        <p:spPr>
+          <a:xfrm>
+            <a:off x="5650992" y="2772460"/>
+            <a:ext cx="110413" cy="211226"/>
+          </a:xfrm>
+          <a:prstGeom prst="rect">
+            <a:avLst/>
+          </a:prstGeom>
+          <a:solidFill>
+            <a:srgbClr val="2FD8B4"/>
+          </a:solidFill>
+          <a:ln>
+            <a:noFill/>
+          </a:ln>
+          <a:effectLst/>
+        </p:spPr>
+        <p:style>
+          <a:lnRef idx="1">
+            <a:schemeClr val="accent1"/>
+          </a:lnRef>
+          <a:fillRef idx="3">
+            <a:schemeClr val="accent1"/>
+          </a:fillRef>
+          <a:effectRef idx="2">
+            <a:schemeClr val="accent1"/>
+          </a:effectRef>
+          <a:fontRef idx="minor">
+            <a:schemeClr val="lt1"/>
+          </a:fontRef>
+        </p:style>
+        <p:txBody>
+          <a:bodyPr rtlCol="0" anchor="ctr"/>
+          <a:lstStyle/>
+          <a:p>
+            <a:pPr algn="ctr"/>
+          </a:p>
+        </p:txBody>
+      </p:sp>
+      <p:sp>
+        <p:nvSpPr>
+          <p:cNvPr id="8" name="Rectangle 7"/>
+          <p:cNvSpPr/>
+          <p:nvPr/>
+        </p:nvSpPr>
+        <p:spPr>
+          <a:xfrm>
+            <a:off x="5843016" y="2618841"/>
+            <a:ext cx="110413" cy="364845"/>
+          </a:xfrm>
+          <a:prstGeom prst="rect">
+            <a:avLst/>
+          </a:prstGeom>
+          <a:solidFill>
+            <a:srgbClr val="2FD8B4"/>
+          </a:solidFill>
+          <a:ln>
+            <a:noFill/>
+          </a:ln>
+          <a:effectLst/>
+        </p:spPr>
+        <p:style>
+          <a:lnRef idx="1">
+            <a:schemeClr val="accent1"/>
+          </a:lnRef>
+          <a:fillRef idx="3">
+            <a:schemeClr val="accent1"/>
+          </a:fillRef>
+          <a:effectRef idx="2">
+            <a:schemeClr val="accent1"/>
+          </a:effectRef>
+          <a:fontRef idx="minor">
+            <a:schemeClr val="lt1"/>
+          </a:fontRef>
+        </p:style>
+        <p:txBody>
+          <a:bodyPr rtlCol="0" anchor="ctr"/>
+          <a:lstStyle/>
+          <a:p>
+            <a:pPr algn="ctr"/>
+          </a:p>
+        </p:txBody>
+      </p:sp>
+      <p:sp>
+        <p:nvSpPr>
+          <p:cNvPr id="9" name="Rectangle 8"/>
+          <p:cNvSpPr/>
+          <p:nvPr/>
+        </p:nvSpPr>
+        <p:spPr>
+          <a:xfrm>
+            <a:off x="6035040" y="2465222"/>
+            <a:ext cx="110413" cy="518464"/>
+          </a:xfrm>
+          <a:prstGeom prst="rect">
+            <a:avLst/>
+          </a:prstGeom>
+          <a:solidFill>
+            <a:srgbClr val="2FD8B4"/>
+          </a:solidFill>
+          <a:ln>
+            <a:noFill/>
+          </a:ln>
+          <a:effectLst/>
+        </p:spPr>
+        <p:style>
+          <a:lnRef idx="1">
+            <a:schemeClr val="accent1"/>
+          </a:lnRef>
+          <a:fillRef idx="3">
+            <a:schemeClr val="accent1"/>
+          </a:fillRef>
+          <a:effectRef idx="2">
+            <a:schemeClr val="accent1"/>
+          </a:effectRef>
+          <a:fontRef idx="minor">
+            <a:schemeClr val="lt1"/>
+          </a:fontRef>
+        </p:style>
+        <p:txBody>
+          <a:bodyPr rtlCol="0" anchor="ctr"/>
+          <a:lstStyle/>
+          <a:p>
+            <a:pPr algn="ctr"/>
+          </a:p>
+        </p:txBody>
+      </p:sp>
+      <p:sp>
+        <p:nvSpPr>
+          <p:cNvPr id="10" name="Rectangle 9"/>
+          <p:cNvSpPr/>
+          <p:nvPr/>
+        </p:nvSpPr>
+        <p:spPr>
+          <a:xfrm>
+            <a:off x="6227064" y="2311603"/>
+            <a:ext cx="110413" cy="672084"/>
+          </a:xfrm>
+          <a:prstGeom prst="rect">
+            <a:avLst/>
+          </a:prstGeom>
+          <a:solidFill>
+            <a:srgbClr val="2FD8B4"/>
+          </a:solidFill>
+          <a:ln>
+            <a:noFill/>
+          </a:ln>
+          <a:effectLst/>
+        </p:spPr>
+        <p:style>
+          <a:lnRef idx="1">
+            <a:schemeClr val="accent1"/>
+          </a:lnRef>
+          <a:fillRef idx="3">
+            <a:schemeClr val="accent1"/>
+          </a:fillRef>
+          <a:effectRef idx="2">
+            <a:schemeClr val="accent1"/>
+          </a:effectRef>
+          <a:fontRef idx="minor">
+            <a:schemeClr val="lt1"/>
+          </a:fontRef>
+        </p:style>
+        <p:txBody>
+          <a:bodyPr rtlCol="0" anchor="ctr"/>
+          <a:lstStyle/>
+          <a:p>
+            <a:pPr algn="ctr"/>
+          </a:p>
+        </p:txBody>
+      </p:sp>
+      <p:sp>
+        <p:nvSpPr>
+          <p:cNvPr id="11" name="Rectangle 10"/>
+          <p:cNvSpPr/>
+          <p:nvPr/>
+        </p:nvSpPr>
+        <p:spPr>
+          <a:xfrm>
+            <a:off x="6419088" y="2157984"/>
+            <a:ext cx="110413" cy="825703"/>
+          </a:xfrm>
+          <a:prstGeom prst="rect">
+            <a:avLst/>
+          </a:prstGeom>
+          <a:solidFill>
+            <a:srgbClr val="2FD8B4"/>
+          </a:solidFill>
+          <a:ln>
+            <a:noFill/>
+          </a:ln>
+          <a:effectLst/>
+        </p:spPr>
+        <p:style>
+          <a:lnRef idx="1">
+            <a:schemeClr val="accent1"/>
+          </a:lnRef>
+          <a:fillRef idx="3">
+            <a:schemeClr val="accent1"/>
+          </a:fillRef>
+          <a:effectRef idx="2">
+            <a:schemeClr val="accent1"/>
+          </a:effectRef>
+          <a:fontRef idx="minor">
+            <a:schemeClr val="lt1"/>
+          </a:fontRef>
+        </p:style>
+        <p:txBody>
+          <a:bodyPr rtlCol="0" anchor="ctr"/>
+          <a:lstStyle/>
+          <a:p>
+            <a:pPr algn="ctr"/>
+          </a:p>
+        </p:txBody>
+      </p:sp>
+      <p:sp>
+        <p:nvSpPr>
+          <p:cNvPr id="12" name="TextBox 11"/>
+          <p:cNvSpPr txBox="1"/>
+          <p:nvPr/>
+        </p:nvSpPr>
+        <p:spPr>
+          <a:xfrm>
+            <a:off x="1024128" y="3017520"/>
+            <a:ext cx="10143439" cy="768096"/>
+          </a:xfrm>
+          <a:prstGeom prst="rect">
+            <a:avLst/>
+          </a:prstGeom>
+          <a:noFill/>
+        </p:spPr>
+        <p:txBody>
+          <a:bodyPr wrap="square" lIns="0" rIns="0" tIns="0" bIns="0" anchor="t">
+            <a:spAutoFit/>
+          </a:bodyPr>
+          <a:lstStyle/>
+          <a:p>
+            <a:pPr algn="ctr">
+              <a:lnSpc>
+                <a:spcPct val="112000"/>
+              </a:lnSpc>
+              <a:spcAft>
+                <a:spcPts val="0"/>
+              </a:spcAft>
+            </a:pPr>
+            <a:r>
+              <a:rPr sz="4200" b="1">
+                <a:solidFill>
+                  <a:srgbClr val="EAF0F7"/>
+                </a:solidFill>
+                <a:latin typeface="Segoe UI"/>
+              </a:rPr>
+              <a:t>Thank You</a:t>
+            </a:r>
+          </a:p>
+        </p:txBody>
+      </p:sp>
+      <p:sp>
+        <p:nvSpPr>
+          <p:cNvPr id="13" name="TextBox 12"/>
+          <p:cNvSpPr txBox="1"/>
+          <p:nvPr/>
+        </p:nvSpPr>
+        <p:spPr>
+          <a:xfrm>
+            <a:off x="1024128" y="3886200"/>
+            <a:ext cx="10143439" cy="310896"/>
+          </a:xfrm>
+          <a:prstGeom prst="rect">
+            <a:avLst/>
+          </a:prstGeom>
+          <a:noFill/>
+        </p:spPr>
+        <p:txBody>
+          <a:bodyPr wrap="square" lIns="0" rIns="0" tIns="0" bIns="0" anchor="t">
+            <a:spAutoFit/>
+          </a:bodyPr>
+          <a:lstStyle/>
+          <a:p>
+            <a:pPr algn="ctr">
+              <a:lnSpc>
+                <a:spcPct val="112000"/>
+              </a:lnSpc>
+              <a:spcAft>
+                <a:spcPts val="0"/>
+              </a:spcAft>
+            </a:pPr>
+            <a:r>
+              <a:rPr sz="1600" b="0">
+                <a:solidFill>
+                  <a:srgbClr val="2FD8B4"/>
+                </a:solidFill>
+                <a:latin typeface="Segoe UI"/>
+              </a:rPr>
+              <a:t>Questions &amp; discussion</a:t>
+            </a:r>
+          </a:p>
+        </p:txBody>
+      </p:sp>
+      <p:sp>
+        <p:nvSpPr>
+          <p:cNvPr id="14" name="Rectangle 13"/>
+          <p:cNvSpPr/>
+          <p:nvPr/>
+        </p:nvSpPr>
+        <p:spPr>
+          <a:xfrm>
+            <a:off x="4370832" y="4370832"/>
+            <a:ext cx="3447288" cy="12801"/>
+          </a:xfrm>
+          <a:prstGeom prst="rect">
+            <a:avLst/>
+          </a:prstGeom>
+          <a:solidFill>
+            <a:srgbClr val="223049"/>
+          </a:solidFill>
+          <a:ln>
+            <a:noFill/>
+          </a:ln>
+          <a:effectLst/>
+        </p:spPr>
+        <p:style>
+          <a:lnRef idx="1">
+            <a:schemeClr val="accent1"/>
+          </a:lnRef>
+          <a:fillRef idx="3">
+            <a:schemeClr val="accent1"/>
+          </a:fillRef>
+          <a:effectRef idx="2">
+            <a:schemeClr val="accent1"/>
+          </a:effectRef>
+          <a:fontRef idx="minor">
+            <a:schemeClr val="lt1"/>
+          </a:fontRef>
+        </p:style>
+        <p:txBody>
+          <a:bodyPr rtlCol="0" anchor="ctr"/>
+          <a:lstStyle/>
+          <a:p>
+            <a:pPr algn="ctr"/>
+          </a:p>
+        </p:txBody>
+      </p:sp>
+      <p:sp>
+        <p:nvSpPr>
+          <p:cNvPr id="15" name="TextBox 14"/>
+          <p:cNvSpPr txBox="1"/>
+          <p:nvPr/>
+        </p:nvSpPr>
+        <p:spPr>
+          <a:xfrm>
+            <a:off x="1207007" y="4572000"/>
+            <a:ext cx="9777679" cy="438912"/>
+          </a:xfrm>
+          <a:prstGeom prst="rect">
+            <a:avLst/>
+          </a:prstGeom>
+          <a:noFill/>
+        </p:spPr>
+        <p:txBody>
+          <a:bodyPr wrap="square" lIns="0" rIns="0" tIns="0" bIns="0" anchor="t">
+            <a:spAutoFit/>
+          </a:bodyPr>
+          <a:lstStyle/>
+          <a:p>
+            <a:pPr algn="ctr">
+              <a:lnSpc>
+                <a:spcPct val="116000"/>
+              </a:lnSpc>
+              <a:spcAft>
+                <a:spcPts val="0"/>
+              </a:spcAft>
+            </a:pPr>
+            <a:r>
+              <a:rPr sz="1400" b="0">
+                <a:solidFill>
+                  <a:srgbClr val="8CA0BE"/>
+                </a:solidFill>
+                <a:latin typeface="Segoe UI"/>
+              </a:rPr>
+              <a:t>From churn probability to a prioritised, explained and costed retention action.</a:t>
+            </a:r>
+          </a:p>
+        </p:txBody>
+      </p:sp>
+      <p:sp>
+        <p:nvSpPr>
+          <p:cNvPr id="16" name="TextBox 15"/>
+          <p:cNvSpPr txBox="1"/>
+          <p:nvPr/>
+        </p:nvSpPr>
+        <p:spPr>
+          <a:xfrm>
+            <a:off x="1024128" y="5248656"/>
+            <a:ext cx="10143439" cy="228600"/>
+          </a:xfrm>
+          <a:prstGeom prst="rect">
+            <a:avLst/>
+          </a:prstGeom>
+          <a:noFill/>
+        </p:spPr>
+        <p:txBody>
+          <a:bodyPr wrap="square" lIns="0" rIns="0" tIns="0" bIns="0" anchor="t">
+            <a:spAutoFit/>
+          </a:bodyPr>
+          <a:lstStyle/>
+          <a:p>
+            <a:pPr algn="ctr">
+              <a:lnSpc>
+                <a:spcPct val="112000"/>
+              </a:lnSpc>
+              <a:spcAft>
+                <a:spcPts val="0"/>
+              </a:spcAft>
+            </a:pPr>
+            <a:r>
+              <a:rPr sz="1000" b="1">
+                <a:solidFill>
+                  <a:srgbClr val="4C8DFF"/>
+                </a:solidFill>
+                <a:latin typeface="Consolas"/>
+              </a:rPr>
+              <a:t>LOGESH S.  ·  B.SC. DATA SCIENCE</a:t>
+            </a:r>
+          </a:p>
+        </p:txBody>
+      </p:sp>
+      <p:sp>
+        <p:nvSpPr>
+          <p:cNvPr id="17" name="TextBox 16"/>
+          <p:cNvSpPr txBox="1"/>
+          <p:nvPr/>
+        </p:nvSpPr>
+        <p:spPr>
+          <a:xfrm>
+            <a:off x="1024128" y="5559552"/>
+            <a:ext cx="10143439" cy="228600"/>
+          </a:xfrm>
+          <a:prstGeom prst="rect">
+            <a:avLst/>
+          </a:prstGeom>
+          <a:noFill/>
+        </p:spPr>
+        <p:txBody>
+          <a:bodyPr wrap="square" lIns="0" rIns="0" tIns="0" bIns="0" anchor="t">
+            <a:spAutoFit/>
+          </a:bodyPr>
+          <a:lstStyle/>
+          <a:p>
+            <a:pPr algn="ctr">
+              <a:lnSpc>
+                <a:spcPct val="112000"/>
+              </a:lnSpc>
+              <a:spcAft>
+                <a:spcPts val="0"/>
+              </a:spcAft>
+            </a:pPr>
+            <a:r>
+              <a:rPr sz="950" b="0">
+                <a:solidFill>
+                  <a:srgbClr val="8CA0BE"/>
+                </a:solidFill>
+                <a:latin typeface="Consolas"/>
+              </a:rPr>
+              <a:t>80.34% ACCURACY  ·  84.91% ROC-AUC  ·  7,043 CUSTOMERS SCORED  ·  $92,539 HIGH-RISK MONTHLY EXPOSURE</a:t>
+            </a:r>
+          </a:p>
+        </p:txBody>
+      </p:sp>
+      <p:sp>
+        <p:nvSpPr>
+          <p:cNvPr id="18" name="Rectangle 17"/>
+          <p:cNvSpPr/>
+          <p:nvPr/>
+        </p:nvSpPr>
+        <p:spPr>
+          <a:xfrm>
+            <a:off x="566928" y="6309360"/>
+            <a:ext cx="743145" cy="43891"/>
+          </a:xfrm>
+          <a:prstGeom prst="rect">
+            <a:avLst/>
+          </a:prstGeom>
+          <a:solidFill>
+            <a:srgbClr val="2FD8B4"/>
+          </a:solidFill>
+          <a:ln>
+            <a:noFill/>
+          </a:ln>
+          <a:effectLst/>
+        </p:spPr>
+        <p:style>
+          <a:lnRef idx="1">
+            <a:schemeClr val="accent1"/>
+          </a:lnRef>
+          <a:fillRef idx="3">
+            <a:schemeClr val="accent1"/>
+          </a:fillRef>
+          <a:effectRef idx="2">
+            <a:schemeClr val="accent1"/>
+          </a:effectRef>
+          <a:fontRef idx="minor">
+            <a:schemeClr val="lt1"/>
+          </a:fontRef>
+        </p:style>
+        <p:txBody>
+          <a:bodyPr rtlCol="0" anchor="ctr"/>
+          <a:lstStyle/>
+          <a:p>
+            <a:pPr algn="ctr"/>
+          </a:p>
+        </p:txBody>
+      </p:sp>
+      <p:sp>
+        <p:nvSpPr>
+          <p:cNvPr id="19" name="Rectangle 18"/>
+          <p:cNvSpPr/>
+          <p:nvPr/>
+        </p:nvSpPr>
+        <p:spPr>
+          <a:xfrm>
+            <a:off x="1360365" y="6309360"/>
+            <a:ext cx="743145" cy="43891"/>
+          </a:xfrm>
+          <a:prstGeom prst="rect">
+            <a:avLst/>
+          </a:prstGeom>
+          <a:solidFill>
+            <a:srgbClr val="2FD8B4"/>
+          </a:solidFill>
+          <a:ln>
+            <a:noFill/>
+          </a:ln>
+          <a:effectLst/>
+        </p:spPr>
+        <p:style>
+          <a:lnRef idx="1">
+            <a:schemeClr val="accent1"/>
+          </a:lnRef>
+          <a:fillRef idx="3">
+            <a:schemeClr val="accent1"/>
+          </a:fillRef>
+          <a:effectRef idx="2">
+            <a:schemeClr val="accent1"/>
+          </a:effectRef>
+          <a:fontRef idx="minor">
+            <a:schemeClr val="lt1"/>
+          </a:fontRef>
+        </p:style>
+        <p:txBody>
+          <a:bodyPr rtlCol="0" anchor="ctr"/>
+          <a:lstStyle/>
+          <a:p>
+            <a:pPr algn="ctr"/>
+          </a:p>
+        </p:txBody>
+      </p:sp>
+      <p:sp>
+        <p:nvSpPr>
+          <p:cNvPr id="20" name="Rectangle 19"/>
+          <p:cNvSpPr/>
+          <p:nvPr/>
+        </p:nvSpPr>
+        <p:spPr>
+          <a:xfrm>
+            <a:off x="2153803" y="6309360"/>
+            <a:ext cx="743145" cy="43891"/>
+          </a:xfrm>
+          <a:prstGeom prst="rect">
+            <a:avLst/>
+          </a:prstGeom>
+          <a:solidFill>
+            <a:srgbClr val="2FD8B4"/>
+          </a:solidFill>
+          <a:ln>
+            <a:noFill/>
+          </a:ln>
+          <a:effectLst/>
+        </p:spPr>
+        <p:style>
+          <a:lnRef idx="1">
+            <a:schemeClr val="accent1"/>
+          </a:lnRef>
+          <a:fillRef idx="3">
+            <a:schemeClr val="accent1"/>
+          </a:fillRef>
+          <a:effectRef idx="2">
+            <a:schemeClr val="accent1"/>
+          </a:effectRef>
+          <a:fontRef idx="minor">
+            <a:schemeClr val="lt1"/>
+          </a:fontRef>
+        </p:style>
+        <p:txBody>
+          <a:bodyPr rtlCol="0" anchor="ctr"/>
+          <a:lstStyle/>
+          <a:p>
+            <a:pPr algn="ctr"/>
+          </a:p>
+        </p:txBody>
+      </p:sp>
+      <p:sp>
+        <p:nvSpPr>
+          <p:cNvPr id="21" name="Rectangle 20"/>
+          <p:cNvSpPr/>
+          <p:nvPr/>
+        </p:nvSpPr>
+        <p:spPr>
+          <a:xfrm>
+            <a:off x="2947241" y="6309360"/>
+            <a:ext cx="743145" cy="43891"/>
+          </a:xfrm>
+          <a:prstGeom prst="rect">
+            <a:avLst/>
+          </a:prstGeom>
+          <a:solidFill>
+            <a:srgbClr val="2FD8B4"/>
+          </a:solidFill>
+          <a:ln>
+            <a:noFill/>
+          </a:ln>
+          <a:effectLst/>
+        </p:spPr>
+        <p:style>
+          <a:lnRef idx="1">
+            <a:schemeClr val="accent1"/>
+          </a:lnRef>
+          <a:fillRef idx="3">
+            <a:schemeClr val="accent1"/>
+          </a:fillRef>
+          <a:effectRef idx="2">
+            <a:schemeClr val="accent1"/>
+          </a:effectRef>
+          <a:fontRef idx="minor">
+            <a:schemeClr val="lt1"/>
+          </a:fontRef>
+        </p:style>
+        <p:txBody>
+          <a:bodyPr rtlCol="0" anchor="ctr"/>
+          <a:lstStyle/>
+          <a:p>
+            <a:pPr algn="ctr"/>
+          </a:p>
+        </p:txBody>
+      </p:sp>
+      <p:sp>
+        <p:nvSpPr>
+          <p:cNvPr id="22" name="Rectangle 21"/>
+          <p:cNvSpPr/>
+          <p:nvPr/>
+        </p:nvSpPr>
+        <p:spPr>
+          <a:xfrm>
+            <a:off x="3740679" y="6309360"/>
+            <a:ext cx="743145" cy="43891"/>
+          </a:xfrm>
+          <a:prstGeom prst="rect">
+            <a:avLst/>
+          </a:prstGeom>
+          <a:solidFill>
+            <a:srgbClr val="2FD8B4"/>
+          </a:solidFill>
+          <a:ln>
+            <a:noFill/>
+          </a:ln>
+          <a:effectLst/>
+        </p:spPr>
+        <p:style>
+          <a:lnRef idx="1">
+            <a:schemeClr val="accent1"/>
+          </a:lnRef>
+          <a:fillRef idx="3">
+            <a:schemeClr val="accent1"/>
+          </a:fillRef>
+          <a:effectRef idx="2">
+            <a:schemeClr val="accent1"/>
+          </a:effectRef>
+          <a:fontRef idx="minor">
+            <a:schemeClr val="lt1"/>
+          </a:fontRef>
+        </p:style>
+        <p:txBody>
+          <a:bodyPr rtlCol="0" anchor="ctr"/>
+          <a:lstStyle/>
+          <a:p>
+            <a:pPr algn="ctr"/>
+          </a:p>
+        </p:txBody>
+      </p:sp>
+      <p:sp>
+        <p:nvSpPr>
+          <p:cNvPr id="23" name="Rectangle 22"/>
+          <p:cNvSpPr/>
+          <p:nvPr/>
+        </p:nvSpPr>
+        <p:spPr>
+          <a:xfrm>
+            <a:off x="4534117" y="6309360"/>
+            <a:ext cx="743145" cy="43891"/>
+          </a:xfrm>
+          <a:prstGeom prst="rect">
+            <a:avLst/>
+          </a:prstGeom>
+          <a:solidFill>
+            <a:srgbClr val="2FD8B4"/>
+          </a:solidFill>
+          <a:ln>
+            <a:noFill/>
+          </a:ln>
+          <a:effectLst/>
+        </p:spPr>
+        <p:style>
+          <a:lnRef idx="1">
+            <a:schemeClr val="accent1"/>
+          </a:lnRef>
+          <a:fillRef idx="3">
+            <a:schemeClr val="accent1"/>
+          </a:fillRef>
+          <a:effectRef idx="2">
+            <a:schemeClr val="accent1"/>
+          </a:effectRef>
+          <a:fontRef idx="minor">
+            <a:schemeClr val="lt1"/>
+          </a:fontRef>
+        </p:style>
+        <p:txBody>
+          <a:bodyPr rtlCol="0" anchor="ctr"/>
+          <a:lstStyle/>
+          <a:p>
+            <a:pPr algn="ctr"/>
+          </a:p>
+        </p:txBody>
+      </p:sp>
+      <p:sp>
+        <p:nvSpPr>
+          <p:cNvPr id="24" name="Rectangle 23"/>
+          <p:cNvSpPr/>
+          <p:nvPr/>
+        </p:nvSpPr>
+        <p:spPr>
+          <a:xfrm>
+            <a:off x="5327555" y="6309360"/>
+            <a:ext cx="743145" cy="43891"/>
+          </a:xfrm>
+          <a:prstGeom prst="rect">
+            <a:avLst/>
+          </a:prstGeom>
+          <a:solidFill>
+            <a:srgbClr val="2FD8B4"/>
+          </a:solidFill>
+          <a:ln>
+            <a:noFill/>
+          </a:ln>
+          <a:effectLst/>
+        </p:spPr>
+        <p:style>
+          <a:lnRef idx="1">
+            <a:schemeClr val="accent1"/>
+          </a:lnRef>
+          <a:fillRef idx="3">
+            <a:schemeClr val="accent1"/>
+          </a:fillRef>
+          <a:effectRef idx="2">
+            <a:schemeClr val="accent1"/>
+          </a:effectRef>
+          <a:fontRef idx="minor">
+            <a:schemeClr val="lt1"/>
+          </a:fontRef>
+        </p:style>
+        <p:txBody>
+          <a:bodyPr rtlCol="0" anchor="ctr"/>
+          <a:lstStyle/>
+          <a:p>
+            <a:pPr algn="ctr"/>
+          </a:p>
+        </p:txBody>
+      </p:sp>
+      <p:sp>
+        <p:nvSpPr>
+          <p:cNvPr id="25" name="Rectangle 24"/>
+          <p:cNvSpPr/>
+          <p:nvPr/>
+        </p:nvSpPr>
+        <p:spPr>
+          <a:xfrm>
+            <a:off x="6120993" y="6309360"/>
+            <a:ext cx="743145" cy="43891"/>
+          </a:xfrm>
+          <a:prstGeom prst="rect">
+            <a:avLst/>
+          </a:prstGeom>
+          <a:solidFill>
+            <a:srgbClr val="2FD8B4"/>
+          </a:solidFill>
+          <a:ln>
+            <a:noFill/>
+          </a:ln>
+          <a:effectLst/>
+        </p:spPr>
+        <p:style>
+          <a:lnRef idx="1">
+            <a:schemeClr val="accent1"/>
+          </a:lnRef>
+          <a:fillRef idx="3">
+            <a:schemeClr val="accent1"/>
+          </a:fillRef>
+          <a:effectRef idx="2">
+            <a:schemeClr val="accent1"/>
+          </a:effectRef>
+          <a:fontRef idx="minor">
+            <a:schemeClr val="lt1"/>
+          </a:fontRef>
+        </p:style>
+        <p:txBody>
+          <a:bodyPr rtlCol="0" anchor="ctr"/>
+          <a:lstStyle/>
+          <a:p>
+            <a:pPr algn="ctr"/>
+          </a:p>
+        </p:txBody>
+      </p:sp>
+      <p:sp>
+        <p:nvSpPr>
+          <p:cNvPr id="26" name="Rectangle 25"/>
+          <p:cNvSpPr/>
+          <p:nvPr/>
+        </p:nvSpPr>
+        <p:spPr>
+          <a:xfrm>
+            <a:off x="6914431" y="6309360"/>
+            <a:ext cx="743145" cy="43891"/>
+          </a:xfrm>
+          <a:prstGeom prst="rect">
+            <a:avLst/>
+          </a:prstGeom>
+          <a:solidFill>
+            <a:srgbClr val="2FD8B4"/>
+          </a:solidFill>
+          <a:ln>
+            <a:noFill/>
+          </a:ln>
+          <a:effectLst/>
+        </p:spPr>
+        <p:style>
+          <a:lnRef idx="1">
+            <a:schemeClr val="accent1"/>
+          </a:lnRef>
+          <a:fillRef idx="3">
+            <a:schemeClr val="accent1"/>
+          </a:fillRef>
+          <a:effectRef idx="2">
+            <a:schemeClr val="accent1"/>
+          </a:effectRef>
+          <a:fontRef idx="minor">
+            <a:schemeClr val="lt1"/>
+          </a:fontRef>
+        </p:style>
+        <p:txBody>
+          <a:bodyPr rtlCol="0" anchor="ctr"/>
+          <a:lstStyle/>
+          <a:p>
+            <a:pPr algn="ctr"/>
+          </a:p>
+        </p:txBody>
+      </p:sp>
+      <p:sp>
+        <p:nvSpPr>
+          <p:cNvPr id="27" name="Rectangle 26"/>
+          <p:cNvSpPr/>
+          <p:nvPr/>
+        </p:nvSpPr>
+        <p:spPr>
+          <a:xfrm>
+            <a:off x="7707869" y="6309360"/>
+            <a:ext cx="743145" cy="43891"/>
+          </a:xfrm>
+          <a:prstGeom prst="rect">
+            <a:avLst/>
+          </a:prstGeom>
+          <a:solidFill>
+            <a:srgbClr val="2FD8B4"/>
+          </a:solidFill>
+          <a:ln>
+            <a:noFill/>
+          </a:ln>
+          <a:effectLst/>
+        </p:spPr>
+        <p:style>
+          <a:lnRef idx="1">
+            <a:schemeClr val="accent1"/>
+          </a:lnRef>
+          <a:fillRef idx="3">
+            <a:schemeClr val="accent1"/>
+          </a:fillRef>
+          <a:effectRef idx="2">
+            <a:schemeClr val="accent1"/>
+          </a:effectRef>
+          <a:fontRef idx="minor">
+            <a:schemeClr val="lt1"/>
+          </a:fontRef>
+        </p:style>
+        <p:txBody>
+          <a:bodyPr rtlCol="0" anchor="ctr"/>
+          <a:lstStyle/>
+          <a:p>
+            <a:pPr algn="ctr"/>
+          </a:p>
+        </p:txBody>
+      </p:sp>
+      <p:sp>
+        <p:nvSpPr>
+          <p:cNvPr id="28" name="Rectangle 27"/>
+          <p:cNvSpPr/>
+          <p:nvPr/>
+        </p:nvSpPr>
+        <p:spPr>
+          <a:xfrm>
+            <a:off x="8501307" y="6309360"/>
+            <a:ext cx="743145" cy="43891"/>
+          </a:xfrm>
+          <a:prstGeom prst="rect">
+            <a:avLst/>
+          </a:prstGeom>
+          <a:solidFill>
+            <a:srgbClr val="2FD8B4"/>
+          </a:solidFill>
+          <a:ln>
+            <a:noFill/>
+          </a:ln>
+          <a:effectLst/>
+        </p:spPr>
+        <p:style>
+          <a:lnRef idx="1">
+            <a:schemeClr val="accent1"/>
+          </a:lnRef>
+          <a:fillRef idx="3">
+            <a:schemeClr val="accent1"/>
+          </a:fillRef>
+          <a:effectRef idx="2">
+            <a:schemeClr val="accent1"/>
+          </a:effectRef>
+          <a:fontRef idx="minor">
+            <a:schemeClr val="lt1"/>
+          </a:fontRef>
+        </p:style>
+        <p:txBody>
+          <a:bodyPr rtlCol="0" anchor="ctr"/>
+          <a:lstStyle/>
+          <a:p>
+            <a:pPr algn="ctr"/>
+          </a:p>
+        </p:txBody>
+      </p:sp>
+      <p:sp>
+        <p:nvSpPr>
+          <p:cNvPr id="29" name="Rectangle 28"/>
+          <p:cNvSpPr/>
+          <p:nvPr/>
+        </p:nvSpPr>
+        <p:spPr>
+          <a:xfrm>
+            <a:off x="9294745" y="6309360"/>
+            <a:ext cx="743145" cy="43891"/>
+          </a:xfrm>
+          <a:prstGeom prst="rect">
+            <a:avLst/>
+          </a:prstGeom>
+          <a:solidFill>
+            <a:srgbClr val="2FD8B4"/>
+          </a:solidFill>
+          <a:ln>
+            <a:noFill/>
+          </a:ln>
+          <a:effectLst/>
+        </p:spPr>
+        <p:style>
+          <a:lnRef idx="1">
+            <a:schemeClr val="accent1"/>
+          </a:lnRef>
+          <a:fillRef idx="3">
+            <a:schemeClr val="accent1"/>
+          </a:fillRef>
+          <a:effectRef idx="2">
+            <a:schemeClr val="accent1"/>
+          </a:effectRef>
+          <a:fontRef idx="minor">
+            <a:schemeClr val="lt1"/>
+          </a:fontRef>
+        </p:style>
+        <p:txBody>
+          <a:bodyPr rtlCol="0" anchor="ctr"/>
+          <a:lstStyle/>
+          <a:p>
+            <a:pPr algn="ctr"/>
+          </a:p>
+        </p:txBody>
+      </p:sp>
+      <p:sp>
+        <p:nvSpPr>
+          <p:cNvPr id="30" name="Rectangle 29"/>
+          <p:cNvSpPr/>
+          <p:nvPr/>
+        </p:nvSpPr>
+        <p:spPr>
+          <a:xfrm>
+            <a:off x="10088183" y="6309360"/>
+            <a:ext cx="743145" cy="43891"/>
+          </a:xfrm>
+          <a:prstGeom prst="rect">
+            <a:avLst/>
+          </a:prstGeom>
+          <a:solidFill>
+            <a:srgbClr val="2FD8B4"/>
+          </a:solidFill>
+          <a:ln>
+            <a:noFill/>
+          </a:ln>
+          <a:effectLst/>
+        </p:spPr>
+        <p:style>
+          <a:lnRef idx="1">
+            <a:schemeClr val="accent1"/>
+          </a:lnRef>
+          <a:fillRef idx="3">
+            <a:schemeClr val="accent1"/>
+          </a:fillRef>
+          <a:effectRef idx="2">
+            <a:schemeClr val="accent1"/>
+          </a:effectRef>
+          <a:fontRef idx="minor">
+            <a:schemeClr val="lt1"/>
+          </a:fontRef>
+        </p:style>
+        <p:txBody>
+          <a:bodyPr rtlCol="0" anchor="ctr"/>
+          <a:lstStyle/>
+          <a:p>
+            <a:pPr algn="ctr"/>
+          </a:p>
+        </p:txBody>
+      </p:sp>
+      <p:sp>
+        <p:nvSpPr>
+          <p:cNvPr id="31" name="Rectangle 30"/>
+          <p:cNvSpPr/>
+          <p:nvPr/>
+        </p:nvSpPr>
+        <p:spPr>
+          <a:xfrm>
+            <a:off x="10881621" y="6309360"/>
+            <a:ext cx="743145" cy="43891"/>
+          </a:xfrm>
+          <a:prstGeom prst="rect">
+            <a:avLst/>
+          </a:prstGeom>
+          <a:solidFill>
+            <a:srgbClr val="2FD8B4"/>
+          </a:solidFill>
+          <a:ln>
+            <a:noFill/>
+          </a:ln>
+          <a:effectLst/>
+        </p:spPr>
+        <p:style>
+          <a:lnRef idx="1">
+            <a:schemeClr val="accent1"/>
+          </a:lnRef>
+          <a:fillRef idx="3">
+            <a:schemeClr val="accent1"/>
+          </a:fillRef>
+          <a:effectRef idx="2">
+            <a:schemeClr val="accent1"/>
+          </a:effectRef>
+          <a:fontRef idx="minor">
+            <a:schemeClr val="lt1"/>
+          </a:fontRef>
+        </p:style>
+        <p:txBody>
+          <a:bodyPr rtlCol="0" anchor="ctr"/>
+          <a:lstStyle/>
+          <a:p>
+            <a:pPr algn="ctr"/>
+          </a:p>
+        </p:txBody>
+      </p:sp>
+      <p:sp>
+        <p:nvSpPr>
+          <p:cNvPr id="32" name="Rectangle 31"/>
+          <p:cNvSpPr/>
+          <p:nvPr/>
+        </p:nvSpPr>
+        <p:spPr>
+          <a:xfrm>
+            <a:off x="566928" y="6455664"/>
+            <a:ext cx="11057839" cy="9144"/>
+          </a:xfrm>
+          <a:prstGeom prst="rect">
+            <a:avLst/>
+          </a:prstGeom>
+          <a:solidFill>
+            <a:srgbClr val="223049"/>
+          </a:solidFill>
+          <a:ln>
+            <a:noFill/>
+          </a:ln>
+          <a:effectLst/>
+        </p:spPr>
+        <p:style>
+          <a:lnRef idx="1">
+            <a:schemeClr val="accent1"/>
+          </a:lnRef>
+          <a:fillRef idx="3">
+            <a:schemeClr val="accent1"/>
+          </a:fillRef>
+          <a:effectRef idx="2">
+            <a:schemeClr val="accent1"/>
+          </a:effectRef>
+          <a:fontRef idx="minor">
+            <a:schemeClr val="lt1"/>
+          </a:fontRef>
+        </p:style>
+        <p:txBody>
+          <a:bodyPr rtlCol="0" anchor="ctr"/>
+          <a:lstStyle/>
+          <a:p>
+            <a:pPr algn="ctr"/>
+          </a:p>
+        </p:txBody>
+      </p:sp>
+      <p:sp>
+        <p:nvSpPr>
+          <p:cNvPr id="33" name="TextBox 32"/>
+          <p:cNvSpPr txBox="1"/>
+          <p:nvPr/>
+        </p:nvSpPr>
+        <p:spPr>
+          <a:xfrm>
+            <a:off x="566928" y="6510528"/>
+            <a:ext cx="9509760" cy="219456"/>
+          </a:xfrm>
+          <a:prstGeom prst="rect">
+            <a:avLst/>
+          </a:prstGeom>
+          <a:noFill/>
+        </p:spPr>
+        <p:txBody>
+          <a:bodyPr wrap="square" lIns="0" rIns="0" tIns="0" bIns="0" anchor="t">
+            <a:spAutoFit/>
+          </a:bodyPr>
+          <a:lstStyle/>
+          <a:p>
+            <a:pPr algn="l">
+              <a:lnSpc>
+                <a:spcPct val="112000"/>
+              </a:lnSpc>
+              <a:spcAft>
+                <a:spcPts val="0"/>
+              </a:spcAft>
+            </a:pPr>
+            <a:r>
+              <a:rPr sz="900" b="0">
+                <a:solidFill>
+                  <a:srgbClr val="8CA0BE"/>
+                </a:solidFill>
+                <a:latin typeface="Segoe UI"/>
+              </a:rPr>
+              <a:t>RetainIQ · Signal Ops Console</a:t>
+            </a:r>
+          </a:p>
+        </p:txBody>
+      </p:sp>
+      <p:sp>
+        <p:nvSpPr>
+          <p:cNvPr id="34" name="TextBox 33"/>
+          <p:cNvSpPr txBox="1"/>
+          <p:nvPr/>
+        </p:nvSpPr>
+        <p:spPr>
+          <a:xfrm>
+            <a:off x="10527487" y="6510528"/>
+            <a:ext cx="1097280" cy="219456"/>
+          </a:xfrm>
+          <a:prstGeom prst="rect">
+            <a:avLst/>
+          </a:prstGeom>
+          <a:noFill/>
+        </p:spPr>
+        <p:txBody>
+          <a:bodyPr wrap="square" lIns="0" rIns="0" tIns="0" bIns="0" anchor="t">
+            <a:spAutoFit/>
+          </a:bodyPr>
+          <a:lstStyle/>
+          <a:p>
+            <a:pPr algn="r">
+              <a:lnSpc>
+                <a:spcPct val="112000"/>
+              </a:lnSpc>
+              <a:spcAft>
+                <a:spcPts val="0"/>
+              </a:spcAft>
+            </a:pPr>
+            <a:r>
+              <a:rPr sz="900" b="0">
+                <a:solidFill>
+                  <a:srgbClr val="8CA0BE"/>
+                </a:solidFill>
+                <a:latin typeface="Consolas"/>
+              </a:rPr>
+              <a:t>21</a:t>
             </a:r>
           </a:p>
         </p:txBody>

--- a/presentation/RetainIQ_Project_Review.pptx
+++ b/presentation/RetainIQ_Project_Review.pptx
@@ -31555,7 +31555,7 @@
                 </a:solidFill>
                 <a:latin typeface="Segoe UI"/>
               </a:rPr>
-              <a:t>The problem: retention is still reactive</a:t>
+              <a:t>Business Understanding: retention is still reactive</a:t>
             </a:r>
           </a:p>
         </p:txBody>
@@ -31597,7 +31597,7 @@
                 </a:solidFill>
                 <a:latin typeface="Segoe UI"/>
               </a:rPr>
-              <a:t>Reports explain what happened. They do not say who leaves next.</a:t>
+              <a:t>Churn is high, and teams often learn who left only after the fact.</a:t>
             </a:r>
           </a:p>
         </p:txBody>
@@ -31683,7 +31683,7 @@
                 </a:solidFill>
                 <a:latin typeface="Segoe UI"/>
               </a:rPr>
-              <a:t>▸  Churn compounds.</a:t>
+              <a:t>▸  Churn is a material business problem.</a:t>
             </a:r>
           </a:p>
           <a:p>
@@ -31724,7 +31724,7 @@
                 </a:solidFill>
                 <a:latin typeface="Segoe UI"/>
               </a:rPr>
-              <a:t>▸  Dashboards describe, they do not prioritise.</a:t>
+              <a:t>▸  Current retention is backward-looking.</a:t>
             </a:r>
           </a:p>
           <a:p>
@@ -31743,7 +31743,7 @@
                 </a:solidFill>
                 <a:latin typeface="Segoe UI"/>
               </a:rPr>
-              <a:t>     Knowing last quarter's churn rate does not tell a retention team whom to call today.</a:t>
+              <a:t>     Historical reporting shows who already left, not which customers need attention today.</a:t>
             </a:r>
           </a:p>
           <a:p>
@@ -31765,7 +31765,7 @@
                 </a:solidFill>
                 <a:latin typeface="Segoe UI"/>
               </a:rPr>
-              <a:t>▸  Generic campaigns waste budget.</a:t>
+              <a:t>▸  One-size-fits-all offers waste budget.</a:t>
             </a:r>
           </a:p>
           <a:p>
@@ -31784,7 +31784,7 @@
                 </a:solidFill>
                 <a:latin typeface="Segoe UI"/>
               </a:rPr>
-              <a:t>     Blanket offers discount loyal customers and still miss the ones about to leave.</a:t>
+              <a:t>     Discounts can go to customers who would stay, while still missing those likely to leave.</a:t>
             </a:r>
           </a:p>
         </p:txBody>

--- a/presentation/RetainIQ_Project_Review.pptx
+++ b/presentation/RetainIQ_Project_Review.pptx
@@ -1060,22 +1060,27 @@
           </a:p>
           <a:p>
             <a:r>
-              <a:t>Then the validation, which is the point of the slide: "I checked the bands against</a:t>
+              <a:t>Then the in-dataset check: "Across this full portfolio, observed churn rises from</a:t>
             </a:r>
           </a:p>
           <a:p>
             <a:r>
-              <a:t>the real churn labels. Low risk actually churns 9.5%, medium 42%, high 73%. The</a:t>
+              <a:t>9.5% in low risk, to 42% in medium and 73% in high. That shows the bands order</a:t>
             </a:r>
           </a:p>
           <a:p>
             <a:r>
-              <a:t>band is a genuine ordering of risk, not a cosmetic split."</a:t>
+              <a:t>this dataset; it is not independent or external validation."</a:t>
             </a:r>
           </a:p>
           <a:p>
             <a:r>
-              <a:t>Close operationally: "the team starts with 1,135 customers instead of 7,043."</a:t>
+              <a:t>Close operationally: "the team can prioritise 1,135 high-risk rows, rather than</a:t>
+            </a:r>
+          </a:p>
+          <a:p>
+            <a:r>
+              <a:t>starting with all 7,043." Do not generalise the 73% rate beyond this dataset.</a:t>
             </a:r>
           </a:p>
         </p:txBody>
@@ -1640,12 +1645,17 @@
           <a:lstStyle/>
           <a:p>
             <a:r>
-              <a:t>(0:35–1:05) "Everything I show you maps to one of these fourteen boxes, and the</a:t>
+              <a:t>(0:35–1:05) "The core project workflow maps to these fourteen phases, grouped into</a:t>
             </a:r>
           </a:p>
           <a:p>
             <a:r>
-              <a:t>boxes group into three acts."</a:t>
+              <a:t>three acts. The comparison, responsibility, demo and closing slides frame that</a:t>
+            </a:r>
+          </a:p>
+          <a:p>
+            <a:r>
+              <a:t>technical journey."</a:t>
             </a:r>
           </a:p>
           <a:p>
@@ -1740,7 +1750,7 @@
           <a:lstStyle/>
           <a:p>
             <a:r>
-              <a:t>(11:00–11:30) Most students hide this slide. Put it up and read it.</a:t>
+              <a:t>(11:00–11:30) Most students hide this slide. Put it up and speak precisely.</a:t>
             </a:r>
           </a:p>
           <a:p>
@@ -1755,32 +1765,37 @@
           </a:p>
           <a:p>
             <a:r>
-              <a:t>savings, only as exposure. And I wouldn't ship a retention campaign aimed at</a:t>
+              <a:t>savings, only as exposure. And I wouldn't target by age without a fairness audit.</a:t>
             </a:r>
           </a:p>
           <a:p>
             <a:r>
-              <a:t>senior citizens without a bias audit — they churn at 41.7%, nearly double the</a:t>
+              <a:t>Senior-customer churn is 41.7% versus 23.6% for non-seniors (1.77×); the overall</a:t>
             </a:r>
           </a:p>
           <a:p>
             <a:r>
-              <a:t>base rate, so a risk-optimising model will concentrate offers on them."</a:t>
+              <a:t>rate is 26.54%. We have not measured subgroup errors or offer allocation, so that</a:t>
             </a:r>
           </a:p>
           <a:p>
             <a:r>
-              <a:t>Then close the loop: "and the fix for the recall number is already measured — 0.35</a:t>
+              <a:t>gap is a fairness risk to audit, not a claim of demonstrated bias."</a:t>
             </a:r>
           </a:p>
           <a:p>
             <a:r>
-              <a:t>catches 71.7%. That's the next cycle, which starts back at Phase 02 with drift</a:t>
+              <a:t>Then close the loop: "and the operating-point experiment shows what is possible —</a:t>
             </a:r>
           </a:p>
           <a:p>
             <a:r>
-              <a:t>monitoring."</a:t>
+              <a:t>0.35 reaches 71.7% recall and 62.98% F1 on this test split. Choosing a threshold</a:t>
+            </a:r>
+          </a:p>
+          <a:p>
+            <a:r>
+              <a:t>still needs a business decision about offer capacity and the cost of false alarms."</a:t>
             </a:r>
           </a:p>
         </p:txBody>
@@ -2261,22 +2276,32 @@
           <a:lstStyle/>
           <a:p>
             <a:r>
-              <a:t>(2:20–3:00) Quick pass on the tiles. Spend the time on the right-hand callouts:</a:t>
+              <a:t>(2:20–3:00) Quick pass on the tiles. Say that both partitions round to 26.54%</a:t>
             </a:r>
           </a:p>
           <a:p>
             <a:r>
-              <a:t>"the split is stratified, so both halves carry exactly the same 26.54% churn rate</a:t>
+              <a:t>churn because the split is stratified. Be precise: the 1,409 test rows were held</a:t>
             </a:r>
           </a:p>
           <a:p>
             <a:r>
-              <a:t>— the model never sees a distorted class balance."</a:t>
+              <a:t>out from fitting, but were used to compare and select candidate models. This is</a:t>
             </a:r>
           </a:p>
           <a:p>
             <a:r>
-              <a:t>And the parity point: "the 30-column contract is saved next to the model and</a:t>
+              <a:t>internal evaluation, not an untouched final or external test. A future nested-CV</a:t>
+            </a:r>
+          </a:p>
+          <a:p>
+            <a:r>
+              <a:t>or external cohort would give a stronger final estimate.</a:t>
+            </a:r>
+          </a:p>
+          <a:p>
+            <a:r>
+              <a:t>Then the parity point: "the 30-column contract is saved next to the model and</a:t>
             </a:r>
           </a:p>
           <a:p>
@@ -21143,7 +21168,7 @@
                 </a:solidFill>
                 <a:latin typeface="Consolas"/>
               </a:rPr>
-              <a:t>VALIDATION</a:t>
+              <a:t>IN-DATASET CHECK</a:t>
             </a:r>
           </a:p>
           <a:p>
@@ -21162,7 +21187,7 @@
                 </a:solidFill>
                 <a:latin typeface="Segoe UI"/>
               </a:rPr>
-              <a:t>The bands track reality: actual churn is 9.5% in low risk, 42.0% in medium and 73.0% in high risk. The segmentation is not decoration — it orders the portfolio correctly.</a:t>
+              <a:t>Across all 7,043 rows, observed churn rises from 9.5% (low) to 42.0% (medium) to 73.0% (high). This demonstrates risk ordering in this dataset, not independent or external validation.</a:t>
             </a:r>
           </a:p>
         </p:txBody>
@@ -21271,7 +21296,7 @@
                 </a:solidFill>
                 <a:latin typeface="Segoe UI"/>
               </a:rPr>
-              <a:t>Instead of calling 7,043 customers, the team starts with 1,135 — 16.1% of the base, where 73% will actually leave — carrying $92,539 of recurring monthly charges.</a:t>
+              <a:t>The team can prioritise 1,135 high-risk rows (16.1% of the base). In this dataset, 73% of that band churned; its observed monthly charges total $92,539.</a:t>
             </a:r>
           </a:p>
         </p:txBody>
@@ -38587,7 +38612,7 @@
                 </a:solidFill>
                 <a:latin typeface="Segoe UI"/>
               </a:rPr>
-              <a:t>This is the map for the whole talk — every slide that follows is one of these boxes</a:t>
+              <a:t>The core project workflow: fourteen phases grouped into three acts</a:t>
             </a:r>
           </a:p>
         </p:txBody>
@@ -41068,7 +41093,7 @@
                 </a:solidFill>
                 <a:latin typeface="Segoe UI"/>
               </a:rPr>
-              <a:t>▸  Senior citizens churn at 41.7% — nearly double the base rate. A model optimising for churn risk will systematically concentrate its retention offers on them.</a:t>
+              <a:t>▸  Senior-customer churn is 41.7% vs 23.6% for non-seniors (1.77×); the overall rate is 26.54%. Senior status is a model input; whether scores or offers concentrate unevenly requires a subgroup audit.</a:t>
             </a:r>
           </a:p>
           <a:p>
@@ -41087,7 +41112,7 @@
                 </a:solidFill>
                 <a:latin typeface="Segoe UI"/>
               </a:rPr>
-              <a:t>▸  A blanket discount aimed at that group is not neutral; it can read as exploitative pricing.</a:t>
+              <a:t>▸  A blanket age-based discount could be inequitable or perceived as exploitative pricing.</a:t>
             </a:r>
           </a:p>
           <a:p>
@@ -54892,7 +54917,7 @@
                 </a:solidFill>
                 <a:latin typeface="Segoe UI"/>
               </a:rPr>
-              <a:t>1,869 churned against 5,174 retained. The split is stratified, so both halves carry the identical 26.54% churn rate: 5,634 rows train, 1,409 rows are held back and touched only once.</a:t>
+              <a:t>1,869 churned and 5,174 retained. Stratified 80/20 split: 5,634 train and 1,409 test rows; both round to 26.54% churn. The test rows were held out from fitting, then used to compare candidate models—so this is not a final untouched validation set.</a:t>
             </a:r>
           </a:p>
         </p:txBody>
